--- a/presentations/finops-gaining-visibility-cfo.pptx
+++ b/presentations/finops-gaining-visibility-cfo.pptx
@@ -6066,11 +6066,11 @@
         <p:spPr>
           <a:xfrm>
             <a:off x="548640" y="1783080"/>
-            <a:ext cx="2587752" cy="2377440"/>
+            <a:ext cx="2587752" cy="2423160"/>
           </a:xfrm>
           <a:prstGeom prst="roundRect">
             <a:avLst>
-              <a:gd name="adj" fmla="val 3462"/>
+              <a:gd name="adj" fmla="val 3396"/>
             </a:avLst>
           </a:prstGeom>
           <a:solidFill>
@@ -6126,8 +6126,8 @@
         </p:nvSpPr>
         <p:spPr>
           <a:xfrm>
-            <a:off x="804672" y="2542032"/>
-            <a:ext cx="2103120" cy="658368"/>
+            <a:off x="786384" y="2523744"/>
+            <a:ext cx="2139696" cy="786384"/>
           </a:xfrm>
           <a:prstGeom prst="rect">
             <a:avLst/>
@@ -6146,7 +6146,7 @@
               <a:buNone/>
             </a:pPr>
             <a:r>
-              <a:rPr lang="en-US" sz="1600" b="1" dirty="0">
+              <a:rPr lang="en-US" sz="1500" b="1" dirty="0">
                 <a:solidFill>
                   <a:srgbClr val="FFFFFF"/>
                 </a:solidFill>
@@ -6156,7 +6156,7 @@
               </a:rPr>
               <a:t>Set the tagging standard</a:t>
             </a:r>
-            <a:endParaRPr lang="en-US" sz="1600" dirty="0"/>
+            <a:endParaRPr lang="en-US" sz="1500" dirty="0"/>
           </a:p>
         </p:txBody>
       </p:sp>
@@ -6168,8 +6168,8 @@
         </p:nvSpPr>
         <p:spPr>
           <a:xfrm>
-            <a:off x="804672" y="3218688"/>
-            <a:ext cx="2103120" cy="822960"/>
+            <a:off x="786384" y="3346704"/>
+            <a:ext cx="2139696" cy="749808"/>
           </a:xfrm>
           <a:prstGeom prst="rect">
             <a:avLst/>
@@ -6211,11 +6211,11 @@
         <p:spPr>
           <a:xfrm>
             <a:off x="3383280" y="1783080"/>
-            <a:ext cx="2587752" cy="2377440"/>
+            <a:ext cx="2587752" cy="2423160"/>
           </a:xfrm>
           <a:prstGeom prst="roundRect">
             <a:avLst>
-              <a:gd name="adj" fmla="val 3462"/>
+              <a:gd name="adj" fmla="val 3396"/>
             </a:avLst>
           </a:prstGeom>
           <a:solidFill>
@@ -6271,8 +6271,8 @@
         </p:nvSpPr>
         <p:spPr>
           <a:xfrm>
-            <a:off x="3639312" y="2542032"/>
-            <a:ext cx="2103120" cy="658368"/>
+            <a:off x="3621024" y="2523744"/>
+            <a:ext cx="2139696" cy="786384"/>
           </a:xfrm>
           <a:prstGeom prst="rect">
             <a:avLst/>
@@ -6291,7 +6291,7 @@
               <a:buNone/>
             </a:pPr>
             <a:r>
-              <a:rPr lang="en-US" sz="1600" b="1" dirty="0">
+              <a:rPr lang="en-US" sz="1500" b="1" dirty="0">
                 <a:solidFill>
                   <a:srgbClr val="1B2430"/>
                 </a:solidFill>
@@ -6301,7 +6301,7 @@
               </a:rPr>
               <a:t>Start with the biggest spend</a:t>
             </a:r>
-            <a:endParaRPr lang="en-US" sz="1600" dirty="0"/>
+            <a:endParaRPr lang="en-US" sz="1500" dirty="0"/>
           </a:p>
         </p:txBody>
       </p:sp>
@@ -6313,8 +6313,8 @@
         </p:nvSpPr>
         <p:spPr>
           <a:xfrm>
-            <a:off x="3639312" y="3218688"/>
-            <a:ext cx="2103120" cy="822960"/>
+            <a:off x="3621024" y="3346704"/>
+            <a:ext cx="2139696" cy="749808"/>
           </a:xfrm>
           <a:prstGeom prst="rect">
             <a:avLst/>
@@ -6356,11 +6356,11 @@
         <p:spPr>
           <a:xfrm>
             <a:off x="6217920" y="1783080"/>
-            <a:ext cx="2587752" cy="2377440"/>
+            <a:ext cx="2587752" cy="2423160"/>
           </a:xfrm>
           <a:prstGeom prst="roundRect">
             <a:avLst>
-              <a:gd name="adj" fmla="val 3462"/>
+              <a:gd name="adj" fmla="val 3396"/>
             </a:avLst>
           </a:prstGeom>
           <a:solidFill>
@@ -6416,8 +6416,8 @@
         </p:nvSpPr>
         <p:spPr>
           <a:xfrm>
-            <a:off x="6473952" y="2542032"/>
-            <a:ext cx="2103120" cy="658368"/>
+            <a:off x="6455664" y="2523744"/>
+            <a:ext cx="2139696" cy="786384"/>
           </a:xfrm>
           <a:prstGeom prst="rect">
             <a:avLst/>
@@ -6436,7 +6436,7 @@
               <a:buNone/>
             </a:pPr>
             <a:r>
-              <a:rPr lang="en-US" sz="1600" b="1" dirty="0">
+              <a:rPr lang="en-US" sz="1500" b="1" dirty="0">
                 <a:solidFill>
                   <a:srgbClr val="1B2430"/>
                 </a:solidFill>
@@ -6446,7 +6446,7 @@
               </a:rPr>
               <a:t>Get finance and engineering talking</a:t>
             </a:r>
-            <a:endParaRPr lang="en-US" sz="1600" dirty="0"/>
+            <a:endParaRPr lang="en-US" sz="1500" dirty="0"/>
           </a:p>
         </p:txBody>
       </p:sp>
@@ -6458,8 +6458,8 @@
         </p:nvSpPr>
         <p:spPr>
           <a:xfrm>
-            <a:off x="6473952" y="3218688"/>
-            <a:ext cx="2103120" cy="822960"/>
+            <a:off x="6455664" y="3346704"/>
+            <a:ext cx="2139696" cy="749808"/>
           </a:xfrm>
           <a:prstGeom prst="rect">
             <a:avLst/>
@@ -6486,7 +6486,7 @@
                 <a:ea typeface="Calibri" pitchFamily="34" charset="-122"/>
                 <a:cs typeface="Calibri" pitchFamily="34" charset="-120"/>
               </a:rPr>
-              <a:t>Bring both into the same conversation early, not as an afterthought.</a:t>
+              <a:t>Bring both into the conversation early, not as an afterthought.</a:t>
             </a:r>
             <a:endParaRPr lang="en-US" sz="1200" dirty="0"/>
           </a:p>
@@ -6501,11 +6501,11 @@
         <p:spPr>
           <a:xfrm>
             <a:off x="9052560" y="1783080"/>
-            <a:ext cx="2587752" cy="2377440"/>
+            <a:ext cx="2587752" cy="2423160"/>
           </a:xfrm>
           <a:prstGeom prst="roundRect">
             <a:avLst>
-              <a:gd name="adj" fmla="val 3462"/>
+              <a:gd name="adj" fmla="val 3396"/>
             </a:avLst>
           </a:prstGeom>
           <a:solidFill>
@@ -6561,8 +6561,8 @@
         </p:nvSpPr>
         <p:spPr>
           <a:xfrm>
-            <a:off x="9308592" y="2542032"/>
-            <a:ext cx="2103120" cy="658368"/>
+            <a:off x="9290304" y="2523744"/>
+            <a:ext cx="2139696" cy="786384"/>
           </a:xfrm>
           <a:prstGeom prst="rect">
             <a:avLst/>
@@ -6581,7 +6581,7 @@
               <a:buNone/>
             </a:pPr>
             <a:r>
-              <a:rPr lang="en-US" sz="1600" b="1" dirty="0">
+              <a:rPr lang="en-US" sz="1500" b="1" dirty="0">
                 <a:solidFill>
                   <a:srgbClr val="1B2430"/>
                 </a:solidFill>
@@ -6591,7 +6591,7 @@
               </a:rPr>
               <a:t>Choose tools that fit the footprint</a:t>
             </a:r>
-            <a:endParaRPr lang="en-US" sz="1600" dirty="0"/>
+            <a:endParaRPr lang="en-US" sz="1500" dirty="0"/>
           </a:p>
         </p:txBody>
       </p:sp>
@@ -6603,8 +6603,8 @@
         </p:nvSpPr>
         <p:spPr>
           <a:xfrm>
-            <a:off x="9308592" y="3218688"/>
-            <a:ext cx="2103120" cy="822960"/>
+            <a:off x="9290304" y="3346704"/>
+            <a:ext cx="2139696" cy="749808"/>
           </a:xfrm>
           <a:prstGeom prst="rect">
             <a:avLst/>

--- a/presentations/finops-gaining-visibility-cfo.pptx
+++ b/presentations/finops-gaining-visibility-cfo.pptx
@@ -26,9 +26,10 @@
     <p:sldId id="274" r:id="rId20"/>
     <p:sldId id="275" r:id="rId21"/>
     <p:sldId id="276" r:id="rId22"/>
+    <p:sldId id="277" r:id="rId23"/>
   </p:sldIdLst>
   <p:notesMasterIdLst>
-    <p:notesMasterId r:id="rId23"/>
+    <p:notesMasterId r:id="rId24"/>
   </p:notesMasterIdLst>
   <p:sldSz cx="12192000" cy="6858000"/>
   <p:notesSz cx="6858000" cy="12192000"/>
@@ -1402,7 +1403,7 @@
           <a:p>
             <a:r>
               <a:rPr lang="en-US" dirty="0"/>
-              <a:t>This is the ask, and the honest cost answer is effort rather than licence spend if we stay on native tooling — name the roles and the share of their time instead of quoting a budget number you would have to defend. Step one is the only item that cannot run in parallel: every downstream report degrades if the taxonomy is still moving. Split the ownership explicitly — finance owns the taxonomy, the allocation policy and the KPI definitions; engineering owns enforcement, instrumentation and remediation. Steps two and four are both arguments for restraint: attack the largest cost categories rather than pursuing complete granularity, and buy tooling that matches the estate we have rather than the one we might have in three years.</a:t>
+              <a:t>This is the slide to bring to the conversation about why the number moved, because it reframes the problem from cost to timing. The overrun is the same in all four columns; what changes is how much notice we get, and notice is what converts a write-off into a decision. The third point is the one with direct budget consequence — a forecast warning two weeks before month end can still change the month's outcome, while the invoice can only be explained after close. Be careful with the closing line and repeat it verbatim: this programme does not commit to reducing spend by a percentage, it commits to no unexplained variance. That is the promise we can actually keep, and it is worth more at the audit committee than a savings figure nobody can attribute afterwards.</a:t>
             </a:r>
             <a:endParaRPr lang="en-US" dirty="0"/>
           </a:p>
@@ -1578,7 +1579,7 @@
           <a:p>
             <a:r>
               <a:rPr lang="en-US" dirty="0"/>
-              <a:t>Close on why this sequencing produces a better financial outcome than cutting first. A cut delivers a one-time step down and reverses as soon as attention moves elsewhere; allocation plus ownership changes the rate at which cost is added, which compounds across every subsequent period. That is also the honest framing for the board: the near-term deliverable is explainable variance and a forecast we can stand behind, with targeted savings following the first full period of clean data. Ask for the first two links today — the allocation standard and published ownership — because the rest follow from them and cannot be bought separately.</a:t>
+              <a:t>This is the ask, and the honest cost answer is effort rather than licence spend if we stay on native tooling — name the roles and the share of their time instead of quoting a budget number you would have to defend. Step one is the only item that cannot run in parallel: every downstream report degrades if the taxonomy is still moving. Split the ownership explicitly — finance owns the taxonomy, the allocation policy and the KPI definitions; engineering owns enforcement, instrumentation and remediation. Steps two and four are both arguments for restraint: attack the largest cost categories rather than pursuing complete granularity, and buy tooling that matches the estate we have rather than the one we might have in three years.</a:t>
             </a:r>
             <a:endParaRPr lang="en-US" dirty="0"/>
           </a:p>
@@ -1666,7 +1667,7 @@
           <a:p>
             <a:r>
               <a:rPr lang="en-US" dirty="0"/>
-              <a:t>Expect five questions and have the answers ready. What does it cost: effort, principally, plus any tooling only if we are genuinely multi-cloud. When do savings appear: allocation coverage improves within weeks, targeted savings follow the first full period of clean data, and be careful not to promise a percentage before we can see where the waste is. Who owns it: name the taxonomy owner and the monthly review before leaving the room, or none of this happens. Does it affect the close: better, not worse — daily data improves the accrual, though chargeback adds a journal step worth scoping with the controller. And will chargeback start an internal war: only if we launch it on allocation nobody trusts, which is exactly what the showback runway is for.</a:t>
+              <a:t>Close on why this sequencing produces a better financial outcome than cutting first. A cut delivers a one-time step down and reverses as soon as attention moves elsewhere; allocation plus ownership changes the rate at which cost is added, which compounds across every subsequent period. That is also the honest framing for the board: the near-term deliverable is explainable variance and a forecast we can stand behind, with targeted savings following the first full period of clean data. Ask for the first two links today — the allocation standard and published ownership — because the rest follow from them and cannot be bought separately.</a:t>
             </a:r>
             <a:endParaRPr lang="en-US" dirty="0"/>
           </a:p>
@@ -1690,6 +1691,94 @@
             <a:fld id="{F7021451-1387-4CA6-816F-3879F97B5CBC}" type="slidenum">
               <a:rPr lang="en-US"/>
               <a:t>21</a:t>
+            </a:fld>
+            <a:endParaRPr lang="en-US"/>
+          </a:p>
+        </p:txBody>
+      </p:sp>
+    </p:spTree>
+    <p:extLst>
+      <p:ext uri="{BB962C8B-B14F-4D97-AF65-F5344CB8AC3E}">
+        <p14:creationId xmlns:p14="http://schemas.microsoft.com/office/powerpoint/2010/main" val="1024086991"/>
+      </p:ext>
+    </p:extLst>
+  </p:cSld>
+  <p:clrMapOvr>
+    <a:masterClrMapping/>
+  </p:clrMapOvr>
+</p:notes>
+</file>
+
+<file path=ppt/notesSlides/notesSlide22.xml><?xml version="1.0" encoding="utf-8"?>
+<p:notes xmlns:a="http://schemas.openxmlformats.org/drawingml/2006/main" xmlns:r="http://schemas.openxmlformats.org/officeDocument/2006/relationships" xmlns:p="http://schemas.openxmlformats.org/presentationml/2006/main">
+  <p:cSld>
+    <p:spTree>
+      <p:nvGrpSpPr>
+        <p:cNvPr id="1" name=""/>
+        <p:cNvGrpSpPr/>
+        <p:nvPr/>
+      </p:nvGrpSpPr>
+      <p:grpSpPr>
+        <a:xfrm>
+          <a:off x="0" y="0"/>
+          <a:ext cx="0" cy="0"/>
+          <a:chOff x="0" y="0"/>
+          <a:chExt cx="0" cy="0"/>
+        </a:xfrm>
+      </p:grpSpPr>
+      <p:sp>
+        <p:nvSpPr>
+          <p:cNvPr id="2" name="Slide Image Placeholder 1"/>
+          <p:cNvSpPr>
+            <a:spLocks noGrp="1" noRot="1" noChangeAspect="1"/>
+          </p:cNvSpPr>
+          <p:nvPr>
+            <p:ph type="sldImg"/>
+          </p:nvPr>
+        </p:nvSpPr>
+        <p:spPr/>
+      </p:sp>
+      <p:sp>
+        <p:nvSpPr>
+          <p:cNvPr id="3" name="Notes Placeholder 2"/>
+          <p:cNvSpPr>
+            <a:spLocks noGrp="1"/>
+          </p:cNvSpPr>
+          <p:nvPr>
+            <p:ph type="body" idx="1"/>
+          </p:nvPr>
+        </p:nvSpPr>
+        <p:spPr/>
+        <p:txBody>
+          <a:bodyPr/>
+          <a:lstStyle/>
+          <a:p>
+            <a:r>
+              <a:rPr lang="en-US" dirty="0"/>
+              <a:t>Expect five questions and have the answers ready. What does it cost: effort, principally, plus any tooling only if we are genuinely multi-cloud. When do savings appear: allocation coverage improves within weeks, targeted savings follow the first full period of clean data, and be careful not to promise a percentage before we can see where the waste is. Who owns it: name the taxonomy owner and the monthly review before leaving the room, or none of this happens. Does it affect the close: better, not worse — daily data improves the accrual, though chargeback adds a journal step worth scoping with the controller. And will chargeback start an internal war: only if we launch it on allocation nobody trusts, which is exactly what the showback runway is for.</a:t>
+            </a:r>
+            <a:endParaRPr lang="en-US" dirty="0"/>
+          </a:p>
+        </p:txBody>
+      </p:sp>
+      <p:sp>
+        <p:nvSpPr>
+          <p:cNvPr id="4" name="Slide Number Placeholder 3"/>
+          <p:cNvSpPr>
+            <a:spLocks noGrp="1"/>
+          </p:cNvSpPr>
+          <p:nvPr>
+            <p:ph type="sldNum" sz="quarter" idx="10"/>
+          </p:nvPr>
+        </p:nvSpPr>
+        <p:spPr/>
+        <p:txBody>
+          <a:bodyPr/>
+          <a:lstStyle/>
+          <a:p>
+            <a:fld id="{F7021451-1387-4CA6-816F-3879F97B5CBC}" type="slidenum">
+              <a:rPr lang="en-US"/>
+              <a:t>22</a:t>
             </a:fld>
             <a:endParaRPr lang="en-US"/>
           </a:p>
@@ -12157,7 +12246,7 @@
                 <a:ea typeface="Calibri" pitchFamily="34" charset="-122"/>
                 <a:cs typeface="Calibri" pitchFamily="34" charset="-120"/>
               </a:rPr>
-              <a:t>THE PATH FORWARD</a:t>
+              <a:t>GOVERNANCE — PUTTING IT TOGETHER</a:t>
             </a:r>
             <a:endParaRPr lang="en-US" sz="1100" dirty="0"/>
           </a:p>
@@ -12196,7 +12285,7 @@
                 <a:ea typeface="Cambria" pitchFamily="34" charset="-122"/>
                 <a:cs typeface="Cambria" pitchFamily="34" charset="-120"/>
               </a:rPr>
-              <a:t>Where to start</a:t>
+              <a:t>Nobody should learn it from the invoice</a:t>
             </a:r>
             <a:endParaRPr lang="en-US" sz="3100" dirty="0"/>
           </a:p>
@@ -12204,876 +12293,1145 @@
       </p:sp>
       <p:sp>
         <p:nvSpPr>
-          <p:cNvPr id="4" name="Shape 2"/>
-          <p:cNvSpPr/>
-          <p:nvPr/>
-        </p:nvSpPr>
-        <p:spPr>
-          <a:xfrm>
-            <a:off x="548640" y="1783080"/>
-            <a:ext cx="2587752" cy="2423160"/>
+          <p:cNvPr id="4" name="Text 2"/>
+          <p:cNvSpPr/>
+          <p:nvPr/>
+        </p:nvSpPr>
+        <p:spPr>
+          <a:xfrm>
+            <a:off x="548640" y="1536192"/>
+            <a:ext cx="10607040" cy="365760"/>
+          </a:xfrm>
+          <a:prstGeom prst="rect">
+            <a:avLst/>
+          </a:prstGeom>
+          <a:noFill/>
+          <a:ln/>
+        </p:spPr>
+        <p:txBody>
+          <a:bodyPr wrap="square" lIns="0" tIns="0" rIns="0" bIns="0" rtlCol="0" anchor="ctr"/>
+          <a:lstStyle/>
+          <a:p>
+            <a:pPr indent="0" marL="0">
+              <a:buNone/>
+            </a:pPr>
+            <a:r>
+              <a:rPr lang="en-US" sz="1500" dirty="0">
+                <a:solidFill>
+                  <a:srgbClr val="5C6675"/>
+                </a:solidFill>
+                <a:latin typeface="Calibri" pitchFamily="34" charset="0"/>
+                <a:ea typeface="Calibri" pitchFamily="34" charset="-122"/>
+                <a:cs typeface="Calibri" pitchFamily="34" charset="-120"/>
+              </a:rPr>
+              <a:t>The same overrun, found at four different moments. Only the first three leave you anything to do about it.</a:t>
+            </a:r>
+            <a:endParaRPr lang="en-US" sz="1500" dirty="0"/>
+          </a:p>
+        </p:txBody>
+      </p:sp>
+      <p:sp>
+        <p:nvSpPr>
+          <p:cNvPr id="5" name="Shape 3"/>
+          <p:cNvSpPr/>
+          <p:nvPr/>
+        </p:nvSpPr>
+        <p:spPr>
+          <a:xfrm>
+            <a:off x="1737360" y="3127248"/>
+            <a:ext cx="8714232" cy="45720"/>
           </a:xfrm>
           <a:prstGeom prst="roundRect">
             <a:avLst>
-              <a:gd name="adj" fmla="val 3396"/>
+              <a:gd name="adj" fmla="val 40000"/>
             </a:avLst>
           </a:prstGeom>
           <a:solidFill>
+            <a:srgbClr val="DFE4EA"/>
+          </a:solidFill>
+          <a:ln/>
+        </p:spPr>
+      </p:sp>
+      <p:sp>
+        <p:nvSpPr>
+          <p:cNvPr id="6" name="Text 4"/>
+          <p:cNvSpPr/>
+          <p:nvPr/>
+        </p:nvSpPr>
+        <p:spPr>
+          <a:xfrm>
+            <a:off x="548640" y="2212848"/>
+            <a:ext cx="2377440" cy="310896"/>
+          </a:xfrm>
+          <a:prstGeom prst="rect">
+            <a:avLst/>
+          </a:prstGeom>
+          <a:noFill/>
+          <a:ln/>
+        </p:spPr>
+        <p:txBody>
+          <a:bodyPr wrap="square" lIns="0" tIns="0" rIns="0" bIns="0" rtlCol="0" anchor="ctr"/>
+          <a:lstStyle/>
+          <a:p>
+            <a:pPr algn="ctr" indent="0" marL="0">
+              <a:buNone/>
+            </a:pPr>
+            <a:r>
+              <a:rPr lang="en-US" sz="1400" b="1" dirty="0">
+                <a:solidFill>
+                  <a:srgbClr val="1B2430"/>
+                </a:solidFill>
+                <a:latin typeface="Calibri" pitchFamily="34" charset="0"/>
+                <a:ea typeface="Calibri" pitchFamily="34" charset="-122"/>
+                <a:cs typeface="Calibri" pitchFamily="34" charset="-120"/>
+              </a:rPr>
+              <a:t>Usage burn alert</a:t>
+            </a:r>
+            <a:endParaRPr lang="en-US" sz="1400" dirty="0"/>
+          </a:p>
+        </p:txBody>
+      </p:sp>
+      <p:sp>
+        <p:nvSpPr>
+          <p:cNvPr id="7" name="Text 5"/>
+          <p:cNvSpPr/>
+          <p:nvPr/>
+        </p:nvSpPr>
+        <p:spPr>
+          <a:xfrm>
+            <a:off x="548640" y="2542032"/>
+            <a:ext cx="2377440" cy="292608"/>
+          </a:xfrm>
+          <a:prstGeom prst="rect">
+            <a:avLst/>
+          </a:prstGeom>
+          <a:noFill/>
+          <a:ln/>
+        </p:spPr>
+        <p:txBody>
+          <a:bodyPr wrap="square" lIns="0" tIns="0" rIns="0" bIns="0" rtlCol="0" anchor="ctr"/>
+          <a:lstStyle/>
+          <a:p>
+            <a:pPr algn="ctr" indent="0" marL="0">
+              <a:buNone/>
+            </a:pPr>
+            <a:r>
+              <a:rPr lang="en-US" sz="1250" b="1" spc="60" kern="0" dirty="0">
+                <a:solidFill>
+                  <a:srgbClr val="B87B18"/>
+                </a:solidFill>
+                <a:latin typeface="Calibri" pitchFamily="34" charset="0"/>
+                <a:ea typeface="Calibri" pitchFamily="34" charset="-122"/>
+                <a:cs typeface="Calibri" pitchFamily="34" charset="-120"/>
+              </a:rPr>
+              <a:t>~10 minutes</a:t>
+            </a:r>
+            <a:endParaRPr lang="en-US" sz="1250" dirty="0"/>
+          </a:p>
+        </p:txBody>
+      </p:sp>
+      <p:sp>
+        <p:nvSpPr>
+          <p:cNvPr id="8" name="Shape 6"/>
+          <p:cNvSpPr/>
+          <p:nvPr/>
+        </p:nvSpPr>
+        <p:spPr>
+          <a:xfrm>
+            <a:off x="1618488" y="3031236"/>
+            <a:ext cx="237744" cy="237744"/>
+          </a:xfrm>
+          <a:prstGeom prst="ellipse">
+            <a:avLst/>
+          </a:prstGeom>
+          <a:solidFill>
+            <a:srgbClr val="E39B2C"/>
+          </a:solidFill>
+          <a:ln w="25400">
+            <a:solidFill>
+              <a:srgbClr val="FFFFFF"/>
+            </a:solidFill>
+            <a:prstDash val="solid"/>
+          </a:ln>
+        </p:spPr>
+      </p:sp>
+      <p:sp>
+        <p:nvSpPr>
+          <p:cNvPr id="9" name="Text 7"/>
+          <p:cNvSpPr/>
+          <p:nvPr/>
+        </p:nvSpPr>
+        <p:spPr>
+          <a:xfrm>
+            <a:off x="548640" y="3401568"/>
+            <a:ext cx="2377440" cy="566928"/>
+          </a:xfrm>
+          <a:prstGeom prst="rect">
+            <a:avLst/>
+          </a:prstGeom>
+          <a:noFill/>
+          <a:ln/>
+        </p:spPr>
+        <p:txBody>
+          <a:bodyPr wrap="square" lIns="0" tIns="0" rIns="0" bIns="0" rtlCol="0" anchor="t"/>
+          <a:lstStyle/>
+          <a:p>
+            <a:pPr algn="ctr" indent="0" marL="0">
+              <a:lnSpc>
+                <a:spcPts val="1600"/>
+              </a:lnSpc>
+              <a:buNone/>
+            </a:pPr>
+            <a:r>
+              <a:rPr lang="en-US" sz="1200" dirty="0">
+                <a:solidFill>
+                  <a:srgbClr val="5C6675"/>
+                </a:solidFill>
+                <a:latin typeface="Calibri" pitchFamily="34" charset="0"/>
+                <a:ea typeface="Calibri" pitchFamily="34" charset="-122"/>
+                <a:cs typeface="Calibri" pitchFamily="34" charset="-120"/>
+              </a:rPr>
+              <a:t>Throttle it, or confirm it was intended.</a:t>
+            </a:r>
+            <a:endParaRPr lang="en-US" sz="1200" dirty="0"/>
+          </a:p>
+        </p:txBody>
+      </p:sp>
+      <p:sp>
+        <p:nvSpPr>
+          <p:cNvPr id="10" name="Text 8"/>
+          <p:cNvSpPr/>
+          <p:nvPr/>
+        </p:nvSpPr>
+        <p:spPr>
+          <a:xfrm>
+            <a:off x="3566160" y="2212848"/>
+            <a:ext cx="2377440" cy="310896"/>
+          </a:xfrm>
+          <a:prstGeom prst="rect">
+            <a:avLst/>
+          </a:prstGeom>
+          <a:noFill/>
+          <a:ln/>
+        </p:spPr>
+        <p:txBody>
+          <a:bodyPr wrap="square" lIns="0" tIns="0" rIns="0" bIns="0" rtlCol="0" anchor="ctr"/>
+          <a:lstStyle/>
+          <a:p>
+            <a:pPr algn="ctr" indent="0" marL="0">
+              <a:buNone/>
+            </a:pPr>
+            <a:r>
+              <a:rPr lang="en-US" sz="1400" b="1" dirty="0">
+                <a:solidFill>
+                  <a:srgbClr val="1B2430"/>
+                </a:solidFill>
+                <a:latin typeface="Calibri" pitchFamily="34" charset="0"/>
+                <a:ea typeface="Calibri" pitchFamily="34" charset="-122"/>
+                <a:cs typeface="Calibri" pitchFamily="34" charset="-120"/>
+              </a:rPr>
+              <a:t>Daily spend threshold</a:t>
+            </a:r>
+            <a:endParaRPr lang="en-US" sz="1400" dirty="0"/>
+          </a:p>
+        </p:txBody>
+      </p:sp>
+      <p:sp>
+        <p:nvSpPr>
+          <p:cNvPr id="11" name="Text 9"/>
+          <p:cNvSpPr/>
+          <p:nvPr/>
+        </p:nvSpPr>
+        <p:spPr>
+          <a:xfrm>
+            <a:off x="3566160" y="2542032"/>
+            <a:ext cx="2377440" cy="292608"/>
+          </a:xfrm>
+          <a:prstGeom prst="rect">
+            <a:avLst/>
+          </a:prstGeom>
+          <a:noFill/>
+          <a:ln/>
+        </p:spPr>
+        <p:txBody>
+          <a:bodyPr wrap="square" lIns="0" tIns="0" rIns="0" bIns="0" rtlCol="0" anchor="ctr"/>
+          <a:lstStyle/>
+          <a:p>
+            <a:pPr algn="ctr" indent="0" marL="0">
+              <a:buNone/>
+            </a:pPr>
+            <a:r>
+              <a:rPr lang="en-US" sz="1250" b="1" spc="60" kern="0" dirty="0">
+                <a:solidFill>
+                  <a:srgbClr val="1F6B5C"/>
+                </a:solidFill>
+                <a:latin typeface="Calibri" pitchFamily="34" charset="0"/>
+                <a:ea typeface="Calibri" pitchFamily="34" charset="-122"/>
+                <a:cs typeface="Calibri" pitchFamily="34" charset="-120"/>
+              </a:rPr>
+              <a:t>next morning</a:t>
+            </a:r>
+            <a:endParaRPr lang="en-US" sz="1250" dirty="0"/>
+          </a:p>
+        </p:txBody>
+      </p:sp>
+      <p:sp>
+        <p:nvSpPr>
+          <p:cNvPr id="12" name="Shape 10"/>
+          <p:cNvSpPr/>
+          <p:nvPr/>
+        </p:nvSpPr>
+        <p:spPr>
+          <a:xfrm>
+            <a:off x="4636008" y="3031236"/>
+            <a:ext cx="237744" cy="237744"/>
+          </a:xfrm>
+          <a:prstGeom prst="ellipse">
+            <a:avLst/>
+          </a:prstGeom>
+          <a:solidFill>
+            <a:srgbClr val="2E8B7A"/>
+          </a:solidFill>
+          <a:ln w="25400">
+            <a:solidFill>
+              <a:srgbClr val="FFFFFF"/>
+            </a:solidFill>
+            <a:prstDash val="solid"/>
+          </a:ln>
+        </p:spPr>
+      </p:sp>
+      <p:sp>
+        <p:nvSpPr>
+          <p:cNvPr id="13" name="Text 11"/>
+          <p:cNvSpPr/>
+          <p:nvPr/>
+        </p:nvSpPr>
+        <p:spPr>
+          <a:xfrm>
+            <a:off x="3566160" y="3401568"/>
+            <a:ext cx="2377440" cy="566928"/>
+          </a:xfrm>
+          <a:prstGeom prst="rect">
+            <a:avLst/>
+          </a:prstGeom>
+          <a:noFill/>
+          <a:ln/>
+        </p:spPr>
+        <p:txBody>
+          <a:bodyPr wrap="square" lIns="0" tIns="0" rIns="0" bIns="0" rtlCol="0" anchor="t"/>
+          <a:lstStyle/>
+          <a:p>
+            <a:pPr algn="ctr" indent="0" marL="0">
+              <a:lnSpc>
+                <a:spcPts val="1600"/>
+              </a:lnSpc>
+              <a:buNone/>
+            </a:pPr>
+            <a:r>
+              <a:rPr lang="en-US" sz="1200" dirty="0">
+                <a:solidFill>
+                  <a:srgbClr val="5C6675"/>
+                </a:solidFill>
+                <a:latin typeface="Calibri" pitchFamily="34" charset="0"/>
+                <a:ea typeface="Calibri" pitchFamily="34" charset="-122"/>
+                <a:cs typeface="Calibri" pitchFamily="34" charset="-120"/>
+              </a:rPr>
+              <a:t>One team, one number, one owner to ask.</a:t>
+            </a:r>
+            <a:endParaRPr lang="en-US" sz="1200" dirty="0"/>
+          </a:p>
+        </p:txBody>
+      </p:sp>
+      <p:sp>
+        <p:nvSpPr>
+          <p:cNvPr id="14" name="Text 12"/>
+          <p:cNvSpPr/>
+          <p:nvPr/>
+        </p:nvSpPr>
+        <p:spPr>
+          <a:xfrm>
+            <a:off x="6583680" y="2212848"/>
+            <a:ext cx="2377440" cy="310896"/>
+          </a:xfrm>
+          <a:prstGeom prst="rect">
+            <a:avLst/>
+          </a:prstGeom>
+          <a:noFill/>
+          <a:ln/>
+        </p:spPr>
+        <p:txBody>
+          <a:bodyPr wrap="square" lIns="0" tIns="0" rIns="0" bIns="0" rtlCol="0" anchor="ctr"/>
+          <a:lstStyle/>
+          <a:p>
+            <a:pPr algn="ctr" indent="0" marL="0">
+              <a:buNone/>
+            </a:pPr>
+            <a:r>
+              <a:rPr lang="en-US" sz="1400" b="1" dirty="0">
+                <a:solidFill>
+                  <a:srgbClr val="1B2430"/>
+                </a:solidFill>
+                <a:latin typeface="Calibri" pitchFamily="34" charset="0"/>
+                <a:ea typeface="Calibri" pitchFamily="34" charset="-122"/>
+                <a:cs typeface="Calibri" pitchFamily="34" charset="-120"/>
+              </a:rPr>
+              <a:t>Forecast overrun</a:t>
+            </a:r>
+            <a:endParaRPr lang="en-US" sz="1400" dirty="0"/>
+          </a:p>
+        </p:txBody>
+      </p:sp>
+      <p:sp>
+        <p:nvSpPr>
+          <p:cNvPr id="15" name="Text 13"/>
+          <p:cNvSpPr/>
+          <p:nvPr/>
+        </p:nvSpPr>
+        <p:spPr>
+          <a:xfrm>
+            <a:off x="6583680" y="2542032"/>
+            <a:ext cx="2377440" cy="292608"/>
+          </a:xfrm>
+          <a:prstGeom prst="rect">
+            <a:avLst/>
+          </a:prstGeom>
+          <a:noFill/>
+          <a:ln/>
+        </p:spPr>
+        <p:txBody>
+          <a:bodyPr wrap="square" lIns="0" tIns="0" rIns="0" bIns="0" rtlCol="0" anchor="ctr"/>
+          <a:lstStyle/>
+          <a:p>
+            <a:pPr algn="ctr" indent="0" marL="0">
+              <a:buNone/>
+            </a:pPr>
+            <a:r>
+              <a:rPr lang="en-US" sz="1250" b="1" spc="60" kern="0" dirty="0">
+                <a:solidFill>
+                  <a:srgbClr val="1F6B5C"/>
+                </a:solidFill>
+                <a:latin typeface="Calibri" pitchFamily="34" charset="0"/>
+                <a:ea typeface="Calibri" pitchFamily="34" charset="-122"/>
+                <a:cs typeface="Calibri" pitchFamily="34" charset="-120"/>
+              </a:rPr>
+              <a:t>~2 weeks out</a:t>
+            </a:r>
+            <a:endParaRPr lang="en-US" sz="1250" dirty="0"/>
+          </a:p>
+        </p:txBody>
+      </p:sp>
+      <p:sp>
+        <p:nvSpPr>
+          <p:cNvPr id="16" name="Shape 14"/>
+          <p:cNvSpPr/>
+          <p:nvPr/>
+        </p:nvSpPr>
+        <p:spPr>
+          <a:xfrm>
+            <a:off x="7653528" y="3031236"/>
+            <a:ext cx="237744" cy="237744"/>
+          </a:xfrm>
+          <a:prstGeom prst="ellipse">
+            <a:avLst/>
+          </a:prstGeom>
+          <a:solidFill>
+            <a:srgbClr val="2E8B7A"/>
+          </a:solidFill>
+          <a:ln w="25400">
+            <a:solidFill>
+              <a:srgbClr val="FFFFFF"/>
+            </a:solidFill>
+            <a:prstDash val="solid"/>
+          </a:ln>
+        </p:spPr>
+      </p:sp>
+      <p:sp>
+        <p:nvSpPr>
+          <p:cNvPr id="17" name="Text 15"/>
+          <p:cNvSpPr/>
+          <p:nvPr/>
+        </p:nvSpPr>
+        <p:spPr>
+          <a:xfrm>
+            <a:off x="6583680" y="3401568"/>
+            <a:ext cx="2377440" cy="566928"/>
+          </a:xfrm>
+          <a:prstGeom prst="rect">
+            <a:avLst/>
+          </a:prstGeom>
+          <a:noFill/>
+          <a:ln/>
+        </p:spPr>
+        <p:txBody>
+          <a:bodyPr wrap="square" lIns="0" tIns="0" rIns="0" bIns="0" rtlCol="0" anchor="t"/>
+          <a:lstStyle/>
+          <a:p>
+            <a:pPr algn="ctr" indent="0" marL="0">
+              <a:lnSpc>
+                <a:spcPts val="1600"/>
+              </a:lnSpc>
+              <a:buNone/>
+            </a:pPr>
+            <a:r>
+              <a:rPr lang="en-US" sz="1200" dirty="0">
+                <a:solidFill>
+                  <a:srgbClr val="5C6675"/>
+                </a:solidFill>
+                <a:latin typeface="Calibri" pitchFamily="34" charset="0"/>
+                <a:ea typeface="Calibri" pitchFamily="34" charset="-122"/>
+                <a:cs typeface="Calibri" pitchFamily="34" charset="-120"/>
+              </a:rPr>
+              <a:t>Still time to change the month's outcome.</a:t>
+            </a:r>
+            <a:endParaRPr lang="en-US" sz="1200" dirty="0"/>
+          </a:p>
+        </p:txBody>
+      </p:sp>
+      <p:sp>
+        <p:nvSpPr>
+          <p:cNvPr id="18" name="Text 16"/>
+          <p:cNvSpPr/>
+          <p:nvPr/>
+        </p:nvSpPr>
+        <p:spPr>
+          <a:xfrm>
+            <a:off x="9262872" y="2212848"/>
+            <a:ext cx="2377440" cy="310896"/>
+          </a:xfrm>
+          <a:prstGeom prst="rect">
+            <a:avLst/>
+          </a:prstGeom>
+          <a:noFill/>
+          <a:ln/>
+        </p:spPr>
+        <p:txBody>
+          <a:bodyPr wrap="square" lIns="0" tIns="0" rIns="0" bIns="0" rtlCol="0" anchor="ctr"/>
+          <a:lstStyle/>
+          <a:p>
+            <a:pPr algn="ctr" indent="0" marL="0">
+              <a:buNone/>
+            </a:pPr>
+            <a:r>
+              <a:rPr lang="en-US" sz="1400" b="1" dirty="0">
+                <a:solidFill>
+                  <a:srgbClr val="5C6675"/>
+                </a:solidFill>
+                <a:latin typeface="Calibri" pitchFamily="34" charset="0"/>
+                <a:ea typeface="Calibri" pitchFamily="34" charset="-122"/>
+                <a:cs typeface="Calibri" pitchFamily="34" charset="-120"/>
+              </a:rPr>
+              <a:t>The invoice</a:t>
+            </a:r>
+            <a:endParaRPr lang="en-US" sz="1400" dirty="0"/>
+          </a:p>
+        </p:txBody>
+      </p:sp>
+      <p:sp>
+        <p:nvSpPr>
+          <p:cNvPr id="19" name="Text 17"/>
+          <p:cNvSpPr/>
+          <p:nvPr/>
+        </p:nvSpPr>
+        <p:spPr>
+          <a:xfrm>
+            <a:off x="9262872" y="2542032"/>
+            <a:ext cx="2377440" cy="292608"/>
+          </a:xfrm>
+          <a:prstGeom prst="rect">
+            <a:avLst/>
+          </a:prstGeom>
+          <a:noFill/>
+          <a:ln/>
+        </p:spPr>
+        <p:txBody>
+          <a:bodyPr wrap="square" lIns="0" tIns="0" rIns="0" bIns="0" rtlCol="0" anchor="ctr"/>
+          <a:lstStyle/>
+          <a:p>
+            <a:pPr algn="ctr" indent="0" marL="0">
+              <a:buNone/>
+            </a:pPr>
+            <a:r>
+              <a:rPr lang="en-US" sz="1250" b="1" spc="60" kern="0" dirty="0">
+                <a:solidFill>
+                  <a:srgbClr val="5C6675"/>
+                </a:solidFill>
+                <a:latin typeface="Calibri" pitchFamily="34" charset="0"/>
+                <a:ea typeface="Calibri" pitchFamily="34" charset="-122"/>
+                <a:cs typeface="Calibri" pitchFamily="34" charset="-120"/>
+              </a:rPr>
+              <a:t>30–45 days later</a:t>
+            </a:r>
+            <a:endParaRPr lang="en-US" sz="1250" dirty="0"/>
+          </a:p>
+        </p:txBody>
+      </p:sp>
+      <p:sp>
+        <p:nvSpPr>
+          <p:cNvPr id="20" name="Shape 18"/>
+          <p:cNvSpPr/>
+          <p:nvPr/>
+        </p:nvSpPr>
+        <p:spPr>
+          <a:xfrm>
+            <a:off x="10332720" y="3031236"/>
+            <a:ext cx="237744" cy="237744"/>
+          </a:xfrm>
+          <a:prstGeom prst="ellipse">
+            <a:avLst/>
+          </a:prstGeom>
+          <a:solidFill>
+            <a:srgbClr val="AEB8C4"/>
+          </a:solidFill>
+          <a:ln w="25400">
+            <a:solidFill>
+              <a:srgbClr val="FFFFFF"/>
+            </a:solidFill>
+            <a:prstDash val="solid"/>
+          </a:ln>
+        </p:spPr>
+      </p:sp>
+      <p:sp>
+        <p:nvSpPr>
+          <p:cNvPr id="21" name="Text 19"/>
+          <p:cNvSpPr/>
+          <p:nvPr/>
+        </p:nvSpPr>
+        <p:spPr>
+          <a:xfrm>
+            <a:off x="9262872" y="3401568"/>
+            <a:ext cx="2377440" cy="566928"/>
+          </a:xfrm>
+          <a:prstGeom prst="rect">
+            <a:avLst/>
+          </a:prstGeom>
+          <a:noFill/>
+          <a:ln/>
+        </p:spPr>
+        <p:txBody>
+          <a:bodyPr wrap="square" lIns="0" tIns="0" rIns="0" bIns="0" rtlCol="0" anchor="t"/>
+          <a:lstStyle/>
+          <a:p>
+            <a:pPr algn="ctr" indent="0" marL="0">
+              <a:lnSpc>
+                <a:spcPts val="1600"/>
+              </a:lnSpc>
+              <a:buNone/>
+            </a:pPr>
+            <a:r>
+              <a:rPr lang="en-US" sz="1200" dirty="0">
+                <a:solidFill>
+                  <a:srgbClr val="5C6675"/>
+                </a:solidFill>
+                <a:latin typeface="Calibri" pitchFamily="34" charset="0"/>
+                <a:ea typeface="Calibri" pitchFamily="34" charset="-122"/>
+                <a:cs typeface="Calibri" pitchFamily="34" charset="-120"/>
+              </a:rPr>
+              <a:t>Nothing left to decide. Only to explain.</a:t>
+            </a:r>
+            <a:endParaRPr lang="en-US" sz="1200" dirty="0"/>
+          </a:p>
+        </p:txBody>
+      </p:sp>
+      <p:sp>
+        <p:nvSpPr>
+          <p:cNvPr id="22" name="Shape 20"/>
+          <p:cNvSpPr/>
+          <p:nvPr/>
+        </p:nvSpPr>
+        <p:spPr>
+          <a:xfrm>
+            <a:off x="548640" y="4297680"/>
+            <a:ext cx="6675120" cy="2011680"/>
+          </a:xfrm>
+          <a:prstGeom prst="roundRect">
+            <a:avLst>
+              <a:gd name="adj" fmla="val 4091"/>
+            </a:avLst>
+          </a:prstGeom>
+          <a:solidFill>
+            <a:srgbClr val="F1F3F6"/>
+          </a:solidFill>
+          <a:ln/>
+        </p:spPr>
+      </p:sp>
+      <p:sp>
+        <p:nvSpPr>
+          <p:cNvPr id="23" name="Text 21"/>
+          <p:cNvSpPr/>
+          <p:nvPr/>
+        </p:nvSpPr>
+        <p:spPr>
+          <a:xfrm>
+            <a:off x="877824" y="4443984"/>
+            <a:ext cx="3657600" cy="292608"/>
+          </a:xfrm>
+          <a:prstGeom prst="rect">
+            <a:avLst/>
+          </a:prstGeom>
+          <a:noFill/>
+          <a:ln/>
+        </p:spPr>
+        <p:txBody>
+          <a:bodyPr wrap="square" lIns="0" tIns="0" rIns="0" bIns="0" rtlCol="0" anchor="ctr"/>
+          <a:lstStyle/>
+          <a:p>
+            <a:pPr indent="0" marL="0">
+              <a:buNone/>
+            </a:pPr>
+            <a:r>
+              <a:rPr lang="en-US" sz="1200" b="1" spc="180" kern="0" dirty="0">
+                <a:solidFill>
+                  <a:srgbClr val="5C6675"/>
+                </a:solidFill>
+                <a:latin typeface="Calibri" pitchFamily="34" charset="0"/>
+                <a:ea typeface="Calibri" pitchFamily="34" charset="-122"/>
+                <a:cs typeface="Calibri" pitchFamily="34" charset="-120"/>
+              </a:rPr>
+              <a:t>What has to be true</a:t>
+            </a:r>
+            <a:endParaRPr lang="en-US" sz="1200" dirty="0"/>
+          </a:p>
+        </p:txBody>
+      </p:sp>
+      <p:sp>
+        <p:nvSpPr>
+          <p:cNvPr id="24" name="Shape 22"/>
+          <p:cNvSpPr/>
+          <p:nvPr/>
+        </p:nvSpPr>
+        <p:spPr>
+          <a:xfrm>
+            <a:off x="877824" y="4809744"/>
+            <a:ext cx="274320" cy="274320"/>
+          </a:xfrm>
+          <a:prstGeom prst="ellipse">
+            <a:avLst/>
+          </a:prstGeom>
+          <a:solidFill>
+            <a:srgbClr val="FFFFFF"/>
+          </a:solidFill>
+          <a:ln/>
+        </p:spPr>
+      </p:sp>
+      <p:pic>
+        <p:nvPicPr>
+          <p:cNvPr id="25" name="Image 0" descr="preencoded.png">    </p:cNvPr>
+          <p:cNvPicPr>
+            <a:picLocks noChangeAspect="1"/>
+          </p:cNvPicPr>
+          <p:nvPr/>
+        </p:nvPicPr>
+        <p:blipFill>
+          <a:blip r:embed="rId1"/>
+          <a:stretch>
+            <a:fillRect/>
+          </a:stretch>
+        </p:blipFill>
+        <p:spPr>
+          <a:xfrm>
+            <a:off x="946404" y="4878324"/>
+            <a:ext cx="137160" cy="137160"/>
+          </a:xfrm>
+          <a:prstGeom prst="rect">
+            <a:avLst/>
+          </a:prstGeom>
+        </p:spPr>
+      </p:pic>
+      <p:sp>
+        <p:nvSpPr>
+          <p:cNvPr id="26" name="Text 23"/>
+          <p:cNvSpPr/>
+          <p:nvPr/>
+        </p:nvSpPr>
+        <p:spPr>
+          <a:xfrm>
+            <a:off x="1298448" y="4754880"/>
+            <a:ext cx="5669280" cy="384048"/>
+          </a:xfrm>
+          <a:prstGeom prst="rect">
+            <a:avLst/>
+          </a:prstGeom>
+          <a:noFill/>
+          <a:ln/>
+        </p:spPr>
+        <p:txBody>
+          <a:bodyPr wrap="square" lIns="0" tIns="0" rIns="0" bIns="0" rtlCol="0" anchor="ctr"/>
+          <a:lstStyle/>
+          <a:p>
+            <a:pPr indent="0" marL="0">
+              <a:buNone/>
+            </a:pPr>
+            <a:r>
+              <a:rPr lang="en-US" sz="1300" dirty="0">
+                <a:solidFill>
+                  <a:srgbClr val="1B2430"/>
+                </a:solidFill>
+                <a:latin typeface="Calibri" pitchFamily="34" charset="0"/>
+                <a:ea typeface="Calibri" pitchFamily="34" charset="-122"/>
+                <a:cs typeface="Calibri" pitchFamily="34" charset="-120"/>
+              </a:rPr>
+              <a:t>Protective alerts run on usage data, not on billing data</a:t>
+            </a:r>
+            <a:endParaRPr lang="en-US" sz="1300" dirty="0"/>
+          </a:p>
+        </p:txBody>
+      </p:sp>
+      <p:sp>
+        <p:nvSpPr>
+          <p:cNvPr id="27" name="Shape 24"/>
+          <p:cNvSpPr/>
+          <p:nvPr/>
+        </p:nvSpPr>
+        <p:spPr>
+          <a:xfrm>
+            <a:off x="877824" y="5193792"/>
+            <a:ext cx="274320" cy="274320"/>
+          </a:xfrm>
+          <a:prstGeom prst="ellipse">
+            <a:avLst/>
+          </a:prstGeom>
+          <a:solidFill>
+            <a:srgbClr val="FFFFFF"/>
+          </a:solidFill>
+          <a:ln/>
+        </p:spPr>
+      </p:sp>
+      <p:pic>
+        <p:nvPicPr>
+          <p:cNvPr id="28" name="Image 1" descr="preencoded.png">    </p:cNvPr>
+          <p:cNvPicPr>
+            <a:picLocks noChangeAspect="1"/>
+          </p:cNvPicPr>
+          <p:nvPr/>
+        </p:nvPicPr>
+        <p:blipFill>
+          <a:blip r:embed="rId2"/>
+          <a:stretch>
+            <a:fillRect/>
+          </a:stretch>
+        </p:blipFill>
+        <p:spPr>
+          <a:xfrm>
+            <a:off x="946404" y="5262372"/>
+            <a:ext cx="137160" cy="137160"/>
+          </a:xfrm>
+          <a:prstGeom prst="rect">
+            <a:avLst/>
+          </a:prstGeom>
+        </p:spPr>
+      </p:pic>
+      <p:sp>
+        <p:nvSpPr>
+          <p:cNvPr id="29" name="Text 25"/>
+          <p:cNvSpPr/>
+          <p:nvPr/>
+        </p:nvSpPr>
+        <p:spPr>
+          <a:xfrm>
+            <a:off x="1298448" y="5138928"/>
+            <a:ext cx="5669280" cy="384048"/>
+          </a:xfrm>
+          <a:prstGeom prst="rect">
+            <a:avLst/>
+          </a:prstGeom>
+          <a:noFill/>
+          <a:ln/>
+        </p:spPr>
+        <p:txBody>
+          <a:bodyPr wrap="square" lIns="0" tIns="0" rIns="0" bIns="0" rtlCol="0" anchor="ctr"/>
+          <a:lstStyle/>
+          <a:p>
+            <a:pPr indent="0" marL="0">
+              <a:buNone/>
+            </a:pPr>
+            <a:r>
+              <a:rPr lang="en-US" sz="1300" dirty="0">
+                <a:solidFill>
+                  <a:srgbClr val="1B2430"/>
+                </a:solidFill>
+                <a:latin typeface="Calibri" pitchFamily="34" charset="0"/>
+                <a:ea typeface="Calibri" pitchFamily="34" charset="-122"/>
+                <a:cs typeface="Calibri" pitchFamily="34" charset="-120"/>
+              </a:rPr>
+              <a:t>Every alert has a named owner to route to</a:t>
+            </a:r>
+            <a:endParaRPr lang="en-US" sz="1300" dirty="0"/>
+          </a:p>
+        </p:txBody>
+      </p:sp>
+      <p:sp>
+        <p:nvSpPr>
+          <p:cNvPr id="30" name="Shape 26"/>
+          <p:cNvSpPr/>
+          <p:nvPr/>
+        </p:nvSpPr>
+        <p:spPr>
+          <a:xfrm>
+            <a:off x="877824" y="5577840"/>
+            <a:ext cx="274320" cy="274320"/>
+          </a:xfrm>
+          <a:prstGeom prst="ellipse">
+            <a:avLst/>
+          </a:prstGeom>
+          <a:solidFill>
+            <a:srgbClr val="FFFFFF"/>
+          </a:solidFill>
+          <a:ln/>
+        </p:spPr>
+      </p:sp>
+      <p:pic>
+        <p:nvPicPr>
+          <p:cNvPr id="31" name="Image 2" descr="preencoded.png">    </p:cNvPr>
+          <p:cNvPicPr>
+            <a:picLocks noChangeAspect="1"/>
+          </p:cNvPicPr>
+          <p:nvPr/>
+        </p:nvPicPr>
+        <p:blipFill>
+          <a:blip r:embed="rId3"/>
+          <a:stretch>
+            <a:fillRect/>
+          </a:stretch>
+        </p:blipFill>
+        <p:spPr>
+          <a:xfrm>
+            <a:off x="946404" y="5646420"/>
+            <a:ext cx="137160" cy="137160"/>
+          </a:xfrm>
+          <a:prstGeom prst="rect">
+            <a:avLst/>
+          </a:prstGeom>
+        </p:spPr>
+      </p:pic>
+      <p:sp>
+        <p:nvSpPr>
+          <p:cNvPr id="32" name="Text 27"/>
+          <p:cNvSpPr/>
+          <p:nvPr/>
+        </p:nvSpPr>
+        <p:spPr>
+          <a:xfrm>
+            <a:off x="1298448" y="5522976"/>
+            <a:ext cx="5669280" cy="384048"/>
+          </a:xfrm>
+          <a:prstGeom prst="rect">
+            <a:avLst/>
+          </a:prstGeom>
+          <a:noFill/>
+          <a:ln/>
+        </p:spPr>
+        <p:txBody>
+          <a:bodyPr wrap="square" lIns="0" tIns="0" rIns="0" bIns="0" rtlCol="0" anchor="ctr"/>
+          <a:lstStyle/>
+          <a:p>
+            <a:pPr indent="0" marL="0">
+              <a:buNone/>
+            </a:pPr>
+            <a:r>
+              <a:rPr lang="en-US" sz="1300" dirty="0">
+                <a:solidFill>
+                  <a:srgbClr val="1B2430"/>
+                </a:solidFill>
+                <a:latin typeface="Calibri" pitchFamily="34" charset="0"/>
+                <a:ea typeface="Calibri" pitchFamily="34" charset="-122"/>
+                <a:cs typeface="Calibri" pitchFamily="34" charset="-120"/>
+              </a:rPr>
+              <a:t>Budgets are phased, so drift shows up in week one</a:t>
+            </a:r>
+            <a:endParaRPr lang="en-US" sz="1300" dirty="0"/>
+          </a:p>
+        </p:txBody>
+      </p:sp>
+      <p:sp>
+        <p:nvSpPr>
+          <p:cNvPr id="33" name="Shape 28"/>
+          <p:cNvSpPr/>
+          <p:nvPr/>
+        </p:nvSpPr>
+        <p:spPr>
+          <a:xfrm>
+            <a:off x="877824" y="5961888"/>
+            <a:ext cx="274320" cy="274320"/>
+          </a:xfrm>
+          <a:prstGeom prst="ellipse">
+            <a:avLst/>
+          </a:prstGeom>
+          <a:solidFill>
+            <a:srgbClr val="FFFFFF"/>
+          </a:solidFill>
+          <a:ln/>
+        </p:spPr>
+      </p:sp>
+      <p:pic>
+        <p:nvPicPr>
+          <p:cNvPr id="34" name="Image 3" descr="preencoded.png">    </p:cNvPr>
+          <p:cNvPicPr>
+            <a:picLocks noChangeAspect="1"/>
+          </p:cNvPicPr>
+          <p:nvPr/>
+        </p:nvPicPr>
+        <p:blipFill>
+          <a:blip r:embed="rId4"/>
+          <a:stretch>
+            <a:fillRect/>
+          </a:stretch>
+        </p:blipFill>
+        <p:spPr>
+          <a:xfrm>
+            <a:off x="946404" y="6030468"/>
+            <a:ext cx="137160" cy="137160"/>
+          </a:xfrm>
+          <a:prstGeom prst="rect">
+            <a:avLst/>
+          </a:prstGeom>
+        </p:spPr>
+      </p:pic>
+      <p:sp>
+        <p:nvSpPr>
+          <p:cNvPr id="35" name="Text 29"/>
+          <p:cNvSpPr/>
+          <p:nvPr/>
+        </p:nvSpPr>
+        <p:spPr>
+          <a:xfrm>
+            <a:off x="1298448" y="5907024"/>
+            <a:ext cx="5669280" cy="384048"/>
+          </a:xfrm>
+          <a:prstGeom prst="rect">
+            <a:avLst/>
+          </a:prstGeom>
+          <a:noFill/>
+          <a:ln/>
+        </p:spPr>
+        <p:txBody>
+          <a:bodyPr wrap="square" lIns="0" tIns="0" rIns="0" bIns="0" rtlCol="0" anchor="ctr"/>
+          <a:lstStyle/>
+          <a:p>
+            <a:pPr indent="0" marL="0">
+              <a:buNone/>
+            </a:pPr>
+            <a:r>
+              <a:rPr lang="en-US" sz="1300" dirty="0">
+                <a:solidFill>
+                  <a:srgbClr val="1B2430"/>
+                </a:solidFill>
+                <a:latin typeface="Calibri" pitchFamily="34" charset="0"/>
+                <a:ea typeface="Calibri" pitchFamily="34" charset="-122"/>
+                <a:cs typeface="Calibri" pitchFamily="34" charset="-120"/>
+              </a:rPr>
+              <a:t>Quotas cap the worst case while someone investigates</a:t>
+            </a:r>
+            <a:endParaRPr lang="en-US" sz="1300" dirty="0"/>
+          </a:p>
+        </p:txBody>
+      </p:sp>
+      <p:sp>
+        <p:nvSpPr>
+          <p:cNvPr id="36" name="Shape 30"/>
+          <p:cNvSpPr/>
+          <p:nvPr/>
+        </p:nvSpPr>
+        <p:spPr>
+          <a:xfrm>
+            <a:off x="7525512" y="4297680"/>
+            <a:ext cx="4114800" cy="2011680"/>
+          </a:xfrm>
+          <a:prstGeom prst="roundRect">
+            <a:avLst>
+              <a:gd name="adj" fmla="val 4091"/>
+            </a:avLst>
+          </a:prstGeom>
+          <a:solidFill>
             <a:srgbClr val="1F2936"/>
           </a:solidFill>
           <a:ln/>
-        </p:spPr>
-      </p:sp>
-      <p:sp>
-        <p:nvSpPr>
-          <p:cNvPr id="5" name="Text 3"/>
-          <p:cNvSpPr/>
-          <p:nvPr/>
-        </p:nvSpPr>
-        <p:spPr>
-          <a:xfrm>
-            <a:off x="804672" y="1965960"/>
-            <a:ext cx="1097280" cy="502920"/>
-          </a:xfrm>
-          <a:prstGeom prst="rect">
-            <a:avLst/>
-          </a:prstGeom>
-          <a:noFill/>
-          <a:ln/>
-        </p:spPr>
-        <p:txBody>
-          <a:bodyPr wrap="square" lIns="0" tIns="0" rIns="0" bIns="0" rtlCol="0" anchor="ctr"/>
-          <a:lstStyle/>
-          <a:p>
-            <a:pPr indent="0" marL="0">
-              <a:buNone/>
-            </a:pPr>
-            <a:r>
-              <a:rPr lang="en-US" sz="2800" b="1" dirty="0">
+          <a:effectLst>
+            <a:outerShdw sx="100000" sy="100000" kx="0" ky="0" algn="bl" rotWithShape="0" blurRad="127000" dist="25400" dir="5400000">
+              <a:srgbClr val="8C99A8">
+                <a:alpha val="16000"/>
+              </a:srgbClr>
+            </a:outerShdw>
+          </a:effectLst>
+        </p:spPr>
+      </p:sp>
+      <p:sp>
+        <p:nvSpPr>
+          <p:cNvPr id="37" name="Text 31"/>
+          <p:cNvSpPr/>
+          <p:nvPr/>
+        </p:nvSpPr>
+        <p:spPr>
+          <a:xfrm>
+            <a:off x="7818120" y="4462272"/>
+            <a:ext cx="3200400" cy="292608"/>
+          </a:xfrm>
+          <a:prstGeom prst="rect">
+            <a:avLst/>
+          </a:prstGeom>
+          <a:noFill/>
+          <a:ln/>
+        </p:spPr>
+        <p:txBody>
+          <a:bodyPr wrap="square" lIns="0" tIns="0" rIns="0" bIns="0" rtlCol="0" anchor="ctr"/>
+          <a:lstStyle/>
+          <a:p>
+            <a:pPr indent="0" marL="0">
+              <a:buNone/>
+            </a:pPr>
+            <a:r>
+              <a:rPr lang="en-US" sz="1200" b="1" spc="180" kern="0" dirty="0">
                 <a:solidFill>
                   <a:srgbClr val="E39B2C"/>
+                </a:solidFill>
+                <a:latin typeface="Calibri" pitchFamily="34" charset="0"/>
+                <a:ea typeface="Calibri" pitchFamily="34" charset="-122"/>
+                <a:cs typeface="Calibri" pitchFamily="34" charset="-120"/>
+              </a:rPr>
+              <a:t>The point</a:t>
+            </a:r>
+            <a:endParaRPr lang="en-US" sz="1200" dirty="0"/>
+          </a:p>
+        </p:txBody>
+      </p:sp>
+      <p:sp>
+        <p:nvSpPr>
+          <p:cNvPr id="38" name="Text 32"/>
+          <p:cNvSpPr/>
+          <p:nvPr/>
+        </p:nvSpPr>
+        <p:spPr>
+          <a:xfrm>
+            <a:off x="7818120" y="4828032"/>
+            <a:ext cx="3529584" cy="1280160"/>
+          </a:xfrm>
+          <a:prstGeom prst="rect">
+            <a:avLst/>
+          </a:prstGeom>
+          <a:noFill/>
+          <a:ln/>
+        </p:spPr>
+        <p:txBody>
+          <a:bodyPr wrap="square" lIns="0" tIns="0" rIns="0" bIns="0" rtlCol="0" anchor="t"/>
+          <a:lstStyle/>
+          <a:p>
+            <a:pPr indent="0" marL="0">
+              <a:lnSpc>
+                <a:spcPts val="2200"/>
+              </a:lnSpc>
+              <a:buNone/>
+            </a:pPr>
+            <a:r>
+              <a:rPr lang="en-US" sz="1550" i="1" dirty="0">
+                <a:solidFill>
+                  <a:srgbClr val="FFFFFF"/>
                 </a:solidFill>
                 <a:latin typeface="Cambria" pitchFamily="34" charset="0"/>
                 <a:ea typeface="Cambria" pitchFamily="34" charset="-122"/>
                 <a:cs typeface="Cambria" pitchFamily="34" charset="-120"/>
               </a:rPr>
-              <a:t>01</a:t>
-            </a:r>
-            <a:endParaRPr lang="en-US" sz="2800" dirty="0"/>
-          </a:p>
-        </p:txBody>
-      </p:sp>
-      <p:sp>
-        <p:nvSpPr>
-          <p:cNvPr id="6" name="Text 4"/>
-          <p:cNvSpPr/>
-          <p:nvPr/>
-        </p:nvSpPr>
-        <p:spPr>
-          <a:xfrm>
-            <a:off x="786384" y="2523744"/>
-            <a:ext cx="2139696" cy="786384"/>
-          </a:xfrm>
-          <a:prstGeom prst="rect">
-            <a:avLst/>
-          </a:prstGeom>
-          <a:noFill/>
-          <a:ln/>
-        </p:spPr>
-        <p:txBody>
-          <a:bodyPr wrap="square" lIns="0" tIns="0" rIns="0" bIns="0" rtlCol="0" anchor="t"/>
-          <a:lstStyle/>
-          <a:p>
-            <a:pPr indent="0" marL="0">
-              <a:lnSpc>
-                <a:spcPts val="2000"/>
-              </a:lnSpc>
-              <a:buNone/>
-            </a:pPr>
-            <a:r>
-              <a:rPr lang="en-US" sz="1500" b="1" dirty="0">
-                <a:solidFill>
-                  <a:srgbClr val="FFFFFF"/>
-                </a:solidFill>
-                <a:latin typeface="Cambria" pitchFamily="34" charset="0"/>
-                <a:ea typeface="Cambria" pitchFamily="34" charset="-122"/>
-                <a:cs typeface="Cambria" pitchFamily="34" charset="-120"/>
-              </a:rPr>
-              <a:t>Set the tagging standard</a:t>
-            </a:r>
-            <a:endParaRPr lang="en-US" sz="1500" dirty="0"/>
-          </a:p>
-        </p:txBody>
-      </p:sp>
-      <p:sp>
-        <p:nvSpPr>
-          <p:cNvPr id="7" name="Text 5"/>
-          <p:cNvSpPr/>
-          <p:nvPr/>
-        </p:nvSpPr>
-        <p:spPr>
-          <a:xfrm>
-            <a:off x="786384" y="3346704"/>
-            <a:ext cx="2139696" cy="749808"/>
-          </a:xfrm>
-          <a:prstGeom prst="rect">
-            <a:avLst/>
-          </a:prstGeom>
-          <a:noFill/>
-          <a:ln/>
-        </p:spPr>
-        <p:txBody>
-          <a:bodyPr wrap="square" lIns="0" tIns="0" rIns="0" bIns="0" rtlCol="0" anchor="t"/>
-          <a:lstStyle/>
-          <a:p>
-            <a:pPr indent="0" marL="0">
-              <a:lnSpc>
-                <a:spcPts val="1500"/>
-              </a:lnSpc>
-              <a:buNone/>
-            </a:pPr>
-            <a:r>
-              <a:rPr lang="en-US" sz="1200" dirty="0">
-                <a:solidFill>
-                  <a:srgbClr val="9EABBA"/>
-                </a:solidFill>
-                <a:latin typeface="Calibri" pitchFamily="34" charset="0"/>
-                <a:ea typeface="Calibri" pitchFamily="34" charset="-122"/>
-                <a:cs typeface="Calibri" pitchFamily="34" charset="-120"/>
-              </a:rPr>
-              <a:t>Agree a consistent taxonomy before investing in dashboards.</a:t>
-            </a:r>
-            <a:endParaRPr lang="en-US" sz="1200" dirty="0"/>
-          </a:p>
-        </p:txBody>
-      </p:sp>
-      <p:sp>
-        <p:nvSpPr>
-          <p:cNvPr id="8" name="Shape 6"/>
-          <p:cNvSpPr/>
-          <p:nvPr/>
-        </p:nvSpPr>
-        <p:spPr>
-          <a:xfrm>
-            <a:off x="3383280" y="1783080"/>
-            <a:ext cx="2587752" cy="2423160"/>
-          </a:xfrm>
-          <a:prstGeom prst="roundRect">
-            <a:avLst>
-              <a:gd name="adj" fmla="val 3396"/>
-            </a:avLst>
-          </a:prstGeom>
-          <a:solidFill>
-            <a:srgbClr val="F1F3F6"/>
-          </a:solidFill>
-          <a:ln/>
-        </p:spPr>
-      </p:sp>
-      <p:sp>
-        <p:nvSpPr>
-          <p:cNvPr id="9" name="Text 7"/>
-          <p:cNvSpPr/>
-          <p:nvPr/>
-        </p:nvSpPr>
-        <p:spPr>
-          <a:xfrm>
-            <a:off x="3639312" y="1965960"/>
-            <a:ext cx="1097280" cy="502920"/>
-          </a:xfrm>
-          <a:prstGeom prst="rect">
-            <a:avLst/>
-          </a:prstGeom>
-          <a:noFill/>
-          <a:ln/>
-        </p:spPr>
-        <p:txBody>
-          <a:bodyPr wrap="square" lIns="0" tIns="0" rIns="0" bIns="0" rtlCol="0" anchor="ctr"/>
-          <a:lstStyle/>
-          <a:p>
-            <a:pPr indent="0" marL="0">
-              <a:buNone/>
-            </a:pPr>
-            <a:r>
-              <a:rPr lang="en-US" sz="2800" b="1" dirty="0">
-                <a:solidFill>
-                  <a:srgbClr val="B9C2CD"/>
-                </a:solidFill>
-                <a:latin typeface="Cambria" pitchFamily="34" charset="0"/>
-                <a:ea typeface="Cambria" pitchFamily="34" charset="-122"/>
-                <a:cs typeface="Cambria" pitchFamily="34" charset="-120"/>
-              </a:rPr>
-              <a:t>02</a:t>
-            </a:r>
-            <a:endParaRPr lang="en-US" sz="2800" dirty="0"/>
-          </a:p>
-        </p:txBody>
-      </p:sp>
-      <p:sp>
-        <p:nvSpPr>
-          <p:cNvPr id="10" name="Text 8"/>
-          <p:cNvSpPr/>
-          <p:nvPr/>
-        </p:nvSpPr>
-        <p:spPr>
-          <a:xfrm>
-            <a:off x="3621024" y="2523744"/>
-            <a:ext cx="2139696" cy="786384"/>
-          </a:xfrm>
-          <a:prstGeom prst="rect">
-            <a:avLst/>
-          </a:prstGeom>
-          <a:noFill/>
-          <a:ln/>
-        </p:spPr>
-        <p:txBody>
-          <a:bodyPr wrap="square" lIns="0" tIns="0" rIns="0" bIns="0" rtlCol="0" anchor="t"/>
-          <a:lstStyle/>
-          <a:p>
-            <a:pPr indent="0" marL="0">
-              <a:lnSpc>
-                <a:spcPts val="2000"/>
-              </a:lnSpc>
-              <a:buNone/>
-            </a:pPr>
-            <a:r>
-              <a:rPr lang="en-US" sz="1500" b="1" dirty="0">
-                <a:solidFill>
-                  <a:srgbClr val="1B2430"/>
-                </a:solidFill>
-                <a:latin typeface="Cambria" pitchFamily="34" charset="0"/>
-                <a:ea typeface="Cambria" pitchFamily="34" charset="-122"/>
-                <a:cs typeface="Cambria" pitchFamily="34" charset="-120"/>
-              </a:rPr>
-              <a:t>Start with the biggest spend</a:t>
-            </a:r>
-            <a:endParaRPr lang="en-US" sz="1500" dirty="0"/>
-          </a:p>
-        </p:txBody>
-      </p:sp>
-      <p:sp>
-        <p:nvSpPr>
-          <p:cNvPr id="11" name="Text 9"/>
-          <p:cNvSpPr/>
-          <p:nvPr/>
-        </p:nvSpPr>
-        <p:spPr>
-          <a:xfrm>
-            <a:off x="3621024" y="3346704"/>
-            <a:ext cx="2139696" cy="749808"/>
-          </a:xfrm>
-          <a:prstGeom prst="rect">
-            <a:avLst/>
-          </a:prstGeom>
-          <a:noFill/>
-          <a:ln/>
-        </p:spPr>
-        <p:txBody>
-          <a:bodyPr wrap="square" lIns="0" tIns="0" rIns="0" bIns="0" rtlCol="0" anchor="t"/>
-          <a:lstStyle/>
-          <a:p>
-            <a:pPr indent="0" marL="0">
-              <a:lnSpc>
-                <a:spcPts val="1500"/>
-              </a:lnSpc>
-              <a:buNone/>
-            </a:pPr>
-            <a:r>
-              <a:rPr lang="en-US" sz="1200" dirty="0">
-                <a:solidFill>
-                  <a:srgbClr val="5C6675"/>
-                </a:solidFill>
-                <a:latin typeface="Calibri" pitchFamily="34" charset="0"/>
-                <a:ea typeface="Calibri" pitchFamily="34" charset="-122"/>
-                <a:cs typeface="Calibri" pitchFamily="34" charset="-120"/>
-              </a:rPr>
-              <a:t>Attack the largest categories first. Don't chase perfect granularity everywhere.</a:t>
-            </a:r>
-            <a:endParaRPr lang="en-US" sz="1200" dirty="0"/>
-          </a:p>
-        </p:txBody>
-      </p:sp>
-      <p:sp>
-        <p:nvSpPr>
-          <p:cNvPr id="12" name="Shape 10"/>
-          <p:cNvSpPr/>
-          <p:nvPr/>
-        </p:nvSpPr>
-        <p:spPr>
-          <a:xfrm>
-            <a:off x="6217920" y="1783080"/>
-            <a:ext cx="2587752" cy="2423160"/>
-          </a:xfrm>
-          <a:prstGeom prst="roundRect">
-            <a:avLst>
-              <a:gd name="adj" fmla="val 3396"/>
-            </a:avLst>
-          </a:prstGeom>
-          <a:solidFill>
-            <a:srgbClr val="F1F3F6"/>
-          </a:solidFill>
-          <a:ln/>
-        </p:spPr>
-      </p:sp>
-      <p:sp>
-        <p:nvSpPr>
-          <p:cNvPr id="13" name="Text 11"/>
-          <p:cNvSpPr/>
-          <p:nvPr/>
-        </p:nvSpPr>
-        <p:spPr>
-          <a:xfrm>
-            <a:off x="6473952" y="1965960"/>
-            <a:ext cx="1097280" cy="502920"/>
-          </a:xfrm>
-          <a:prstGeom prst="rect">
-            <a:avLst/>
-          </a:prstGeom>
-          <a:noFill/>
-          <a:ln/>
-        </p:spPr>
-        <p:txBody>
-          <a:bodyPr wrap="square" lIns="0" tIns="0" rIns="0" bIns="0" rtlCol="0" anchor="ctr"/>
-          <a:lstStyle/>
-          <a:p>
-            <a:pPr indent="0" marL="0">
-              <a:buNone/>
-            </a:pPr>
-            <a:r>
-              <a:rPr lang="en-US" sz="2800" b="1" dirty="0">
-                <a:solidFill>
-                  <a:srgbClr val="B9C2CD"/>
-                </a:solidFill>
-                <a:latin typeface="Cambria" pitchFamily="34" charset="0"/>
-                <a:ea typeface="Cambria" pitchFamily="34" charset="-122"/>
-                <a:cs typeface="Cambria" pitchFamily="34" charset="-120"/>
-              </a:rPr>
-              <a:t>03</a:t>
-            </a:r>
-            <a:endParaRPr lang="en-US" sz="2800" dirty="0"/>
-          </a:p>
-        </p:txBody>
-      </p:sp>
-      <p:sp>
-        <p:nvSpPr>
-          <p:cNvPr id="14" name="Text 12"/>
-          <p:cNvSpPr/>
-          <p:nvPr/>
-        </p:nvSpPr>
-        <p:spPr>
-          <a:xfrm>
-            <a:off x="6455664" y="2523744"/>
-            <a:ext cx="2139696" cy="786384"/>
-          </a:xfrm>
-          <a:prstGeom prst="rect">
-            <a:avLst/>
-          </a:prstGeom>
-          <a:noFill/>
-          <a:ln/>
-        </p:spPr>
-        <p:txBody>
-          <a:bodyPr wrap="square" lIns="0" tIns="0" rIns="0" bIns="0" rtlCol="0" anchor="t"/>
-          <a:lstStyle/>
-          <a:p>
-            <a:pPr indent="0" marL="0">
-              <a:lnSpc>
-                <a:spcPts val="2000"/>
-              </a:lnSpc>
-              <a:buNone/>
-            </a:pPr>
-            <a:r>
-              <a:rPr lang="en-US" sz="1500" b="1" dirty="0">
-                <a:solidFill>
-                  <a:srgbClr val="1B2430"/>
-                </a:solidFill>
-                <a:latin typeface="Cambria" pitchFamily="34" charset="0"/>
-                <a:ea typeface="Cambria" pitchFamily="34" charset="-122"/>
-                <a:cs typeface="Cambria" pitchFamily="34" charset="-120"/>
-              </a:rPr>
-              <a:t>Get finance and engineering talking</a:t>
-            </a:r>
-            <a:endParaRPr lang="en-US" sz="1500" dirty="0"/>
-          </a:p>
-        </p:txBody>
-      </p:sp>
-      <p:sp>
-        <p:nvSpPr>
-          <p:cNvPr id="15" name="Text 13"/>
-          <p:cNvSpPr/>
-          <p:nvPr/>
-        </p:nvSpPr>
-        <p:spPr>
-          <a:xfrm>
-            <a:off x="6455664" y="3346704"/>
-            <a:ext cx="2139696" cy="749808"/>
-          </a:xfrm>
-          <a:prstGeom prst="rect">
-            <a:avLst/>
-          </a:prstGeom>
-          <a:noFill/>
-          <a:ln/>
-        </p:spPr>
-        <p:txBody>
-          <a:bodyPr wrap="square" lIns="0" tIns="0" rIns="0" bIns="0" rtlCol="0" anchor="t"/>
-          <a:lstStyle/>
-          <a:p>
-            <a:pPr indent="0" marL="0">
-              <a:lnSpc>
-                <a:spcPts val="1500"/>
-              </a:lnSpc>
-              <a:buNone/>
-            </a:pPr>
-            <a:r>
-              <a:rPr lang="en-US" sz="1200" dirty="0">
-                <a:solidFill>
-                  <a:srgbClr val="5C6675"/>
-                </a:solidFill>
-                <a:latin typeface="Calibri" pitchFamily="34" charset="0"/>
-                <a:ea typeface="Calibri" pitchFamily="34" charset="-122"/>
-                <a:cs typeface="Calibri" pitchFamily="34" charset="-120"/>
-              </a:rPr>
-              <a:t>Bring both into the conversation early, not as an afterthought.</a:t>
-            </a:r>
-            <a:endParaRPr lang="en-US" sz="1200" dirty="0"/>
-          </a:p>
-        </p:txBody>
-      </p:sp>
-      <p:sp>
-        <p:nvSpPr>
-          <p:cNvPr id="16" name="Shape 14"/>
-          <p:cNvSpPr/>
-          <p:nvPr/>
-        </p:nvSpPr>
-        <p:spPr>
-          <a:xfrm>
-            <a:off x="9052560" y="1783080"/>
-            <a:ext cx="2587752" cy="2423160"/>
-          </a:xfrm>
-          <a:prstGeom prst="roundRect">
-            <a:avLst>
-              <a:gd name="adj" fmla="val 3396"/>
-            </a:avLst>
-          </a:prstGeom>
-          <a:solidFill>
-            <a:srgbClr val="F1F3F6"/>
-          </a:solidFill>
-          <a:ln/>
-        </p:spPr>
-      </p:sp>
-      <p:sp>
-        <p:nvSpPr>
-          <p:cNvPr id="17" name="Text 15"/>
-          <p:cNvSpPr/>
-          <p:nvPr/>
-        </p:nvSpPr>
-        <p:spPr>
-          <a:xfrm>
-            <a:off x="9308592" y="1965960"/>
-            <a:ext cx="1097280" cy="502920"/>
-          </a:xfrm>
-          <a:prstGeom prst="rect">
-            <a:avLst/>
-          </a:prstGeom>
-          <a:noFill/>
-          <a:ln/>
-        </p:spPr>
-        <p:txBody>
-          <a:bodyPr wrap="square" lIns="0" tIns="0" rIns="0" bIns="0" rtlCol="0" anchor="ctr"/>
-          <a:lstStyle/>
-          <a:p>
-            <a:pPr indent="0" marL="0">
-              <a:buNone/>
-            </a:pPr>
-            <a:r>
-              <a:rPr lang="en-US" sz="2800" b="1" dirty="0">
-                <a:solidFill>
-                  <a:srgbClr val="B9C2CD"/>
-                </a:solidFill>
-                <a:latin typeface="Cambria" pitchFamily="34" charset="0"/>
-                <a:ea typeface="Cambria" pitchFamily="34" charset="-122"/>
-                <a:cs typeface="Cambria" pitchFamily="34" charset="-120"/>
-              </a:rPr>
-              <a:t>04</a:t>
-            </a:r>
-            <a:endParaRPr lang="en-US" sz="2800" dirty="0"/>
-          </a:p>
-        </p:txBody>
-      </p:sp>
-      <p:sp>
-        <p:nvSpPr>
-          <p:cNvPr id="18" name="Text 16"/>
-          <p:cNvSpPr/>
-          <p:nvPr/>
-        </p:nvSpPr>
-        <p:spPr>
-          <a:xfrm>
-            <a:off x="9290304" y="2523744"/>
-            <a:ext cx="2139696" cy="786384"/>
-          </a:xfrm>
-          <a:prstGeom prst="rect">
-            <a:avLst/>
-          </a:prstGeom>
-          <a:noFill/>
-          <a:ln/>
-        </p:spPr>
-        <p:txBody>
-          <a:bodyPr wrap="square" lIns="0" tIns="0" rIns="0" bIns="0" rtlCol="0" anchor="t"/>
-          <a:lstStyle/>
-          <a:p>
-            <a:pPr indent="0" marL="0">
-              <a:lnSpc>
-                <a:spcPts val="2000"/>
-              </a:lnSpc>
-              <a:buNone/>
-            </a:pPr>
-            <a:r>
-              <a:rPr lang="en-US" sz="1500" b="1" dirty="0">
-                <a:solidFill>
-                  <a:srgbClr val="1B2430"/>
-                </a:solidFill>
-                <a:latin typeface="Cambria" pitchFamily="34" charset="0"/>
-                <a:ea typeface="Cambria" pitchFamily="34" charset="-122"/>
-                <a:cs typeface="Cambria" pitchFamily="34" charset="-120"/>
-              </a:rPr>
-              <a:t>Set guardrails early</a:t>
-            </a:r>
-            <a:endParaRPr lang="en-US" sz="1500" dirty="0"/>
-          </a:p>
-        </p:txBody>
-      </p:sp>
-      <p:sp>
-        <p:nvSpPr>
-          <p:cNvPr id="19" name="Text 17"/>
-          <p:cNvSpPr/>
-          <p:nvPr/>
-        </p:nvSpPr>
-        <p:spPr>
-          <a:xfrm>
-            <a:off x="9290304" y="3346704"/>
-            <a:ext cx="2139696" cy="749808"/>
-          </a:xfrm>
-          <a:prstGeom prst="rect">
-            <a:avLst/>
-          </a:prstGeom>
-          <a:noFill/>
-          <a:ln/>
-        </p:spPr>
-        <p:txBody>
-          <a:bodyPr wrap="square" lIns="0" tIns="0" rIns="0" bIns="0" rtlCol="0" anchor="t"/>
-          <a:lstStyle/>
-          <a:p>
-            <a:pPr indent="0" marL="0">
-              <a:lnSpc>
-                <a:spcPts val="1500"/>
-              </a:lnSpc>
-              <a:buNone/>
-            </a:pPr>
-            <a:r>
-              <a:rPr lang="en-US" sz="1200" dirty="0">
-                <a:solidFill>
-                  <a:srgbClr val="5C6675"/>
-                </a:solidFill>
-                <a:latin typeface="Calibri" pitchFamily="34" charset="0"/>
-                <a:ea typeface="Calibri" pitchFamily="34" charset="-122"/>
-                <a:cs typeface="Calibri" pitchFamily="34" charset="-120"/>
-              </a:rPr>
-              <a:t>Owners, budget thresholds and quotas cost little to add — and stop the expensive surprises.</a:t>
-            </a:r>
-            <a:endParaRPr lang="en-US" sz="1200" dirty="0"/>
-          </a:p>
-        </p:txBody>
-      </p:sp>
-      <p:sp>
-        <p:nvSpPr>
-          <p:cNvPr id="20" name="Shape 18"/>
-          <p:cNvSpPr/>
-          <p:nvPr/>
-        </p:nvSpPr>
-        <p:spPr>
-          <a:xfrm>
-            <a:off x="548640" y="4434840"/>
-            <a:ext cx="11091672" cy="1874520"/>
-          </a:xfrm>
-          <a:prstGeom prst="roundRect">
-            <a:avLst>
-              <a:gd name="adj" fmla="val 4390"/>
-            </a:avLst>
-          </a:prstGeom>
-          <a:solidFill>
-            <a:srgbClr val="F1F3F6"/>
-          </a:solidFill>
-          <a:ln/>
-        </p:spPr>
-      </p:sp>
-      <p:sp>
-        <p:nvSpPr>
-          <p:cNvPr id="21" name="Text 19"/>
-          <p:cNvSpPr/>
-          <p:nvPr/>
-        </p:nvSpPr>
-        <p:spPr>
-          <a:xfrm>
-            <a:off x="877824" y="4572000"/>
-            <a:ext cx="6035040" cy="292608"/>
-          </a:xfrm>
-          <a:prstGeom prst="rect">
-            <a:avLst/>
-          </a:prstGeom>
-          <a:noFill/>
-          <a:ln/>
-        </p:spPr>
-        <p:txBody>
-          <a:bodyPr wrap="square" lIns="0" tIns="0" rIns="0" bIns="0" rtlCol="0" anchor="ctr"/>
-          <a:lstStyle/>
-          <a:p>
-            <a:pPr indent="0" marL="0">
-              <a:buNone/>
-            </a:pPr>
-            <a:r>
-              <a:rPr lang="en-US" sz="1200" b="1" spc="180" kern="0" dirty="0">
-                <a:solidFill>
-                  <a:srgbClr val="5C6675"/>
-                </a:solidFill>
-                <a:latin typeface="Calibri" pitchFamily="34" charset="0"/>
-                <a:ea typeface="Calibri" pitchFamily="34" charset="-122"/>
-                <a:cs typeface="Calibri" pitchFamily="34" charset="-120"/>
-              </a:rPr>
-              <a:t>Tooling — match the footprint, not the ambition</a:t>
-            </a:r>
-            <a:endParaRPr lang="en-US" sz="1200" dirty="0"/>
-          </a:p>
-        </p:txBody>
-      </p:sp>
-      <p:sp>
-        <p:nvSpPr>
-          <p:cNvPr id="22" name="Text 20"/>
-          <p:cNvSpPr/>
-          <p:nvPr/>
-        </p:nvSpPr>
-        <p:spPr>
-          <a:xfrm>
-            <a:off x="877824" y="4937760"/>
-            <a:ext cx="1737360" cy="384048"/>
-          </a:xfrm>
-          <a:prstGeom prst="rect">
-            <a:avLst/>
-          </a:prstGeom>
-          <a:noFill/>
-          <a:ln/>
-        </p:spPr>
-        <p:txBody>
-          <a:bodyPr wrap="square" lIns="0" tIns="0" rIns="0" bIns="0" rtlCol="0" anchor="ctr"/>
-          <a:lstStyle/>
-          <a:p>
-            <a:pPr indent="0" marL="0">
-              <a:buNone/>
-            </a:pPr>
-            <a:r>
-              <a:rPr lang="en-US" sz="1350" b="1" dirty="0">
-                <a:solidFill>
-                  <a:srgbClr val="2E8B7A"/>
-                </a:solidFill>
-                <a:latin typeface="Calibri" pitchFamily="34" charset="0"/>
-                <a:ea typeface="Calibri" pitchFamily="34" charset="-122"/>
-                <a:cs typeface="Calibri" pitchFamily="34" charset="-120"/>
-              </a:rPr>
-              <a:t>Native</a:t>
-            </a:r>
-            <a:endParaRPr lang="en-US" sz="1350" dirty="0"/>
-          </a:p>
-        </p:txBody>
-      </p:sp>
-      <p:sp>
-        <p:nvSpPr>
-          <p:cNvPr id="23" name="Text 21"/>
-          <p:cNvSpPr/>
-          <p:nvPr/>
-        </p:nvSpPr>
-        <p:spPr>
-          <a:xfrm>
-            <a:off x="2651760" y="4937760"/>
-            <a:ext cx="8595360" cy="384048"/>
-          </a:xfrm>
-          <a:prstGeom prst="rect">
-            <a:avLst/>
-          </a:prstGeom>
-          <a:noFill/>
-          <a:ln/>
-        </p:spPr>
-        <p:txBody>
-          <a:bodyPr wrap="square" lIns="0" tIns="0" rIns="0" bIns="0" rtlCol="0" anchor="ctr"/>
-          <a:lstStyle/>
-          <a:p>
-            <a:pPr indent="0" marL="0">
-              <a:buNone/>
-            </a:pPr>
-            <a:r>
-              <a:rPr lang="en-US" sz="1350" dirty="0">
-                <a:solidFill>
-                  <a:srgbClr val="5C6675"/>
-                </a:solidFill>
-                <a:latin typeface="Calibri" pitchFamily="34" charset="0"/>
-                <a:ea typeface="Calibri" pitchFamily="34" charset="-122"/>
-                <a:cs typeface="Calibri" pitchFamily="34" charset="-120"/>
-              </a:rPr>
-              <a:t>AWS Cost Explorer  ·  Azure Cost Management  ·  GCP Billing</a:t>
-            </a:r>
-            <a:endParaRPr lang="en-US" sz="1350" dirty="0"/>
-          </a:p>
-        </p:txBody>
-      </p:sp>
-      <p:sp>
-        <p:nvSpPr>
-          <p:cNvPr id="24" name="Text 22"/>
-          <p:cNvSpPr/>
-          <p:nvPr/>
-        </p:nvSpPr>
-        <p:spPr>
-          <a:xfrm>
-            <a:off x="877824" y="5349240"/>
-            <a:ext cx="1737360" cy="384048"/>
-          </a:xfrm>
-          <a:prstGeom prst="rect">
-            <a:avLst/>
-          </a:prstGeom>
-          <a:noFill/>
-          <a:ln/>
-        </p:spPr>
-        <p:txBody>
-          <a:bodyPr wrap="square" lIns="0" tIns="0" rIns="0" bIns="0" rtlCol="0" anchor="ctr"/>
-          <a:lstStyle/>
-          <a:p>
-            <a:pPr indent="0" marL="0">
-              <a:buNone/>
-            </a:pPr>
-            <a:r>
-              <a:rPr lang="en-US" sz="1350" b="1" dirty="0">
-                <a:solidFill>
-                  <a:srgbClr val="B87B18"/>
-                </a:solidFill>
-                <a:latin typeface="Calibri" pitchFamily="34" charset="0"/>
-                <a:ea typeface="Calibri" pitchFamily="34" charset="-122"/>
-                <a:cs typeface="Calibri" pitchFamily="34" charset="-120"/>
-              </a:rPr>
-              <a:t>Third-party</a:t>
-            </a:r>
-            <a:endParaRPr lang="en-US" sz="1350" dirty="0"/>
-          </a:p>
-        </p:txBody>
-      </p:sp>
-      <p:sp>
-        <p:nvSpPr>
-          <p:cNvPr id="25" name="Text 23"/>
-          <p:cNvSpPr/>
-          <p:nvPr/>
-        </p:nvSpPr>
-        <p:spPr>
-          <a:xfrm>
-            <a:off x="2651760" y="5349240"/>
-            <a:ext cx="8595360" cy="384048"/>
-          </a:xfrm>
-          <a:prstGeom prst="rect">
-            <a:avLst/>
-          </a:prstGeom>
-          <a:noFill/>
-          <a:ln/>
-        </p:spPr>
-        <p:txBody>
-          <a:bodyPr wrap="square" lIns="0" tIns="0" rIns="0" bIns="0" rtlCol="0" anchor="ctr"/>
-          <a:lstStyle/>
-          <a:p>
-            <a:pPr indent="0" marL="0">
-              <a:buNone/>
-            </a:pPr>
-            <a:r>
-              <a:rPr lang="en-US" sz="1350" dirty="0">
-                <a:solidFill>
-                  <a:srgbClr val="5C6675"/>
-                </a:solidFill>
-                <a:latin typeface="Calibri" pitchFamily="34" charset="0"/>
-                <a:ea typeface="Calibri" pitchFamily="34" charset="-122"/>
-                <a:cs typeface="Calibri" pitchFamily="34" charset="-120"/>
-              </a:rPr>
-              <a:t>CloudHealth  ·  Apptio  ·  Vantage  ·  nOps  ·  Finout  ·  CoreStack</a:t>
-            </a:r>
-            <a:endParaRPr lang="en-US" sz="1350" dirty="0"/>
-          </a:p>
-        </p:txBody>
-      </p:sp>
-      <p:sp>
-        <p:nvSpPr>
-          <p:cNvPr id="26" name="Text 24"/>
-          <p:cNvSpPr/>
-          <p:nvPr/>
-        </p:nvSpPr>
-        <p:spPr>
-          <a:xfrm>
-            <a:off x="877824" y="5760720"/>
-            <a:ext cx="1737360" cy="384048"/>
-          </a:xfrm>
-          <a:prstGeom prst="rect">
-            <a:avLst/>
-          </a:prstGeom>
-          <a:noFill/>
-          <a:ln/>
-        </p:spPr>
-        <p:txBody>
-          <a:bodyPr wrap="square" lIns="0" tIns="0" rIns="0" bIns="0" rtlCol="0" anchor="ctr"/>
-          <a:lstStyle/>
-          <a:p>
-            <a:pPr indent="0" marL="0">
-              <a:buNone/>
-            </a:pPr>
-            <a:r>
-              <a:rPr lang="en-US" sz="1350" b="1" dirty="0">
-                <a:solidFill>
-                  <a:srgbClr val="1B2430"/>
-                </a:solidFill>
-                <a:latin typeface="Calibri" pitchFamily="34" charset="0"/>
-                <a:ea typeface="Calibri" pitchFamily="34" charset="-122"/>
-                <a:cs typeface="Calibri" pitchFamily="34" charset="-120"/>
-              </a:rPr>
-              <a:t>Standard</a:t>
-            </a:r>
-            <a:endParaRPr lang="en-US" sz="1350" dirty="0"/>
-          </a:p>
-        </p:txBody>
-      </p:sp>
-      <p:sp>
-        <p:nvSpPr>
-          <p:cNvPr id="27" name="Text 25"/>
-          <p:cNvSpPr/>
-          <p:nvPr/>
-        </p:nvSpPr>
-        <p:spPr>
-          <a:xfrm>
-            <a:off x="2651760" y="5760720"/>
-            <a:ext cx="8595360" cy="384048"/>
-          </a:xfrm>
-          <a:prstGeom prst="rect">
-            <a:avLst/>
-          </a:prstGeom>
-          <a:noFill/>
-          <a:ln/>
-        </p:spPr>
-        <p:txBody>
-          <a:bodyPr wrap="square" lIns="0" tIns="0" rIns="0" bIns="0" rtlCol="0" anchor="ctr"/>
-          <a:lstStyle/>
-          <a:p>
-            <a:pPr indent="0" marL="0">
-              <a:buNone/>
-            </a:pPr>
-            <a:r>
-              <a:rPr lang="en-US" sz="1350" dirty="0">
-                <a:solidFill>
-                  <a:srgbClr val="5C6675"/>
-                </a:solidFill>
-                <a:latin typeface="Calibri" pitchFamily="34" charset="0"/>
-                <a:ea typeface="Calibri" pitchFamily="34" charset="-122"/>
-                <a:cs typeface="Calibri" pitchFamily="34" charset="-120"/>
-              </a:rPr>
-              <a:t>FOCUS-compliant platforms for multi-cloud reporting</a:t>
-            </a:r>
-            <a:endParaRPr lang="en-US" sz="1350" dirty="0"/>
+              <a:t>The goal is not a smaller invoice. It is an invoice with nothing in it you have not already seen, explained and decided about.</a:t>
+            </a:r>
+            <a:endParaRPr lang="en-US" sz="1550" dirty="0"/>
           </a:p>
         </p:txBody>
       </p:sp>
@@ -13787,6 +14145,991 @@
     <p:bg>
       <p:bgPr>
         <a:solidFill>
+          <a:srgbClr val="FFFFFF"/>
+        </a:solidFill>
+      </p:bgPr>
+    </p:bg>
+    <p:spTree>
+      <p:nvGrpSpPr>
+        <p:cNvPr id="1" name=""/>
+        <p:cNvGrpSpPr/>
+        <p:nvPr/>
+      </p:nvGrpSpPr>
+      <p:grpSpPr>
+        <a:xfrm>
+          <a:off x="0" y="0"/>
+          <a:ext cx="0" cy="0"/>
+          <a:chOff x="0" y="0"/>
+          <a:chExt cx="0" cy="0"/>
+        </a:xfrm>
+      </p:grpSpPr>
+      <p:sp>
+        <p:nvSpPr>
+          <p:cNvPr id="2" name="Text 0"/>
+          <p:cNvSpPr/>
+          <p:nvPr/>
+        </p:nvSpPr>
+        <p:spPr>
+          <a:xfrm>
+            <a:off x="548640" y="475488"/>
+            <a:ext cx="7315200" cy="256032"/>
+          </a:xfrm>
+          <a:prstGeom prst="rect">
+            <a:avLst/>
+          </a:prstGeom>
+          <a:noFill/>
+          <a:ln/>
+        </p:spPr>
+        <p:txBody>
+          <a:bodyPr wrap="square" lIns="0" tIns="0" rIns="0" bIns="0" rtlCol="0" anchor="ctr"/>
+          <a:lstStyle/>
+          <a:p>
+            <a:pPr indent="0" marL="0">
+              <a:buNone/>
+            </a:pPr>
+            <a:r>
+              <a:rPr lang="en-US" sz="1100" b="1" spc="220" kern="0" dirty="0">
+                <a:solidFill>
+                  <a:srgbClr val="E39B2C"/>
+                </a:solidFill>
+                <a:latin typeface="Calibri" pitchFamily="34" charset="0"/>
+                <a:ea typeface="Calibri" pitchFamily="34" charset="-122"/>
+                <a:cs typeface="Calibri" pitchFamily="34" charset="-120"/>
+              </a:rPr>
+              <a:t>THE PATH FORWARD</a:t>
+            </a:r>
+            <a:endParaRPr lang="en-US" sz="1100" dirty="0"/>
+          </a:p>
+        </p:txBody>
+      </p:sp>
+      <p:sp>
+        <p:nvSpPr>
+          <p:cNvPr id="3" name="Text 1"/>
+          <p:cNvSpPr/>
+          <p:nvPr/>
+        </p:nvSpPr>
+        <p:spPr>
+          <a:xfrm>
+            <a:off x="548640" y="768096"/>
+            <a:ext cx="11091672" cy="804672"/>
+          </a:xfrm>
+          <a:prstGeom prst="rect">
+            <a:avLst/>
+          </a:prstGeom>
+          <a:noFill/>
+          <a:ln/>
+        </p:spPr>
+        <p:txBody>
+          <a:bodyPr wrap="square" lIns="0" tIns="0" rIns="0" bIns="0" rtlCol="0" anchor="ctr"/>
+          <a:lstStyle/>
+          <a:p>
+            <a:pPr indent="0" marL="0">
+              <a:buNone/>
+            </a:pPr>
+            <a:r>
+              <a:rPr lang="en-US" sz="3100" b="1" dirty="0">
+                <a:solidFill>
+                  <a:srgbClr val="1B2430"/>
+                </a:solidFill>
+                <a:latin typeface="Cambria" pitchFamily="34" charset="0"/>
+                <a:ea typeface="Cambria" pitchFamily="34" charset="-122"/>
+                <a:cs typeface="Cambria" pitchFamily="34" charset="-120"/>
+              </a:rPr>
+              <a:t>Where to start</a:t>
+            </a:r>
+            <a:endParaRPr lang="en-US" sz="3100" dirty="0"/>
+          </a:p>
+        </p:txBody>
+      </p:sp>
+      <p:sp>
+        <p:nvSpPr>
+          <p:cNvPr id="4" name="Shape 2"/>
+          <p:cNvSpPr/>
+          <p:nvPr/>
+        </p:nvSpPr>
+        <p:spPr>
+          <a:xfrm>
+            <a:off x="548640" y="1783080"/>
+            <a:ext cx="2587752" cy="2423160"/>
+          </a:xfrm>
+          <a:prstGeom prst="roundRect">
+            <a:avLst>
+              <a:gd name="adj" fmla="val 3396"/>
+            </a:avLst>
+          </a:prstGeom>
+          <a:solidFill>
+            <a:srgbClr val="1F2936"/>
+          </a:solidFill>
+          <a:ln/>
+        </p:spPr>
+      </p:sp>
+      <p:sp>
+        <p:nvSpPr>
+          <p:cNvPr id="5" name="Text 3"/>
+          <p:cNvSpPr/>
+          <p:nvPr/>
+        </p:nvSpPr>
+        <p:spPr>
+          <a:xfrm>
+            <a:off x="804672" y="1965960"/>
+            <a:ext cx="1097280" cy="502920"/>
+          </a:xfrm>
+          <a:prstGeom prst="rect">
+            <a:avLst/>
+          </a:prstGeom>
+          <a:noFill/>
+          <a:ln/>
+        </p:spPr>
+        <p:txBody>
+          <a:bodyPr wrap="square" lIns="0" tIns="0" rIns="0" bIns="0" rtlCol="0" anchor="ctr"/>
+          <a:lstStyle/>
+          <a:p>
+            <a:pPr indent="0" marL="0">
+              <a:buNone/>
+            </a:pPr>
+            <a:r>
+              <a:rPr lang="en-US" sz="2800" b="1" dirty="0">
+                <a:solidFill>
+                  <a:srgbClr val="E39B2C"/>
+                </a:solidFill>
+                <a:latin typeface="Cambria" pitchFamily="34" charset="0"/>
+                <a:ea typeface="Cambria" pitchFamily="34" charset="-122"/>
+                <a:cs typeface="Cambria" pitchFamily="34" charset="-120"/>
+              </a:rPr>
+              <a:t>01</a:t>
+            </a:r>
+            <a:endParaRPr lang="en-US" sz="2800" dirty="0"/>
+          </a:p>
+        </p:txBody>
+      </p:sp>
+      <p:sp>
+        <p:nvSpPr>
+          <p:cNvPr id="6" name="Text 4"/>
+          <p:cNvSpPr/>
+          <p:nvPr/>
+        </p:nvSpPr>
+        <p:spPr>
+          <a:xfrm>
+            <a:off x="786384" y="2523744"/>
+            <a:ext cx="2139696" cy="786384"/>
+          </a:xfrm>
+          <a:prstGeom prst="rect">
+            <a:avLst/>
+          </a:prstGeom>
+          <a:noFill/>
+          <a:ln/>
+        </p:spPr>
+        <p:txBody>
+          <a:bodyPr wrap="square" lIns="0" tIns="0" rIns="0" bIns="0" rtlCol="0" anchor="t"/>
+          <a:lstStyle/>
+          <a:p>
+            <a:pPr indent="0" marL="0">
+              <a:lnSpc>
+                <a:spcPts val="2000"/>
+              </a:lnSpc>
+              <a:buNone/>
+            </a:pPr>
+            <a:r>
+              <a:rPr lang="en-US" sz="1500" b="1" dirty="0">
+                <a:solidFill>
+                  <a:srgbClr val="FFFFFF"/>
+                </a:solidFill>
+                <a:latin typeface="Cambria" pitchFamily="34" charset="0"/>
+                <a:ea typeface="Cambria" pitchFamily="34" charset="-122"/>
+                <a:cs typeface="Cambria" pitchFamily="34" charset="-120"/>
+              </a:rPr>
+              <a:t>Set the tagging standard</a:t>
+            </a:r>
+            <a:endParaRPr lang="en-US" sz="1500" dirty="0"/>
+          </a:p>
+        </p:txBody>
+      </p:sp>
+      <p:sp>
+        <p:nvSpPr>
+          <p:cNvPr id="7" name="Text 5"/>
+          <p:cNvSpPr/>
+          <p:nvPr/>
+        </p:nvSpPr>
+        <p:spPr>
+          <a:xfrm>
+            <a:off x="786384" y="3346704"/>
+            <a:ext cx="2139696" cy="749808"/>
+          </a:xfrm>
+          <a:prstGeom prst="rect">
+            <a:avLst/>
+          </a:prstGeom>
+          <a:noFill/>
+          <a:ln/>
+        </p:spPr>
+        <p:txBody>
+          <a:bodyPr wrap="square" lIns="0" tIns="0" rIns="0" bIns="0" rtlCol="0" anchor="t"/>
+          <a:lstStyle/>
+          <a:p>
+            <a:pPr indent="0" marL="0">
+              <a:lnSpc>
+                <a:spcPts val="1500"/>
+              </a:lnSpc>
+              <a:buNone/>
+            </a:pPr>
+            <a:r>
+              <a:rPr lang="en-US" sz="1200" dirty="0">
+                <a:solidFill>
+                  <a:srgbClr val="9EABBA"/>
+                </a:solidFill>
+                <a:latin typeface="Calibri" pitchFamily="34" charset="0"/>
+                <a:ea typeface="Calibri" pitchFamily="34" charset="-122"/>
+                <a:cs typeface="Calibri" pitchFamily="34" charset="-120"/>
+              </a:rPr>
+              <a:t>Agree a consistent taxonomy before investing in dashboards.</a:t>
+            </a:r>
+            <a:endParaRPr lang="en-US" sz="1200" dirty="0"/>
+          </a:p>
+        </p:txBody>
+      </p:sp>
+      <p:sp>
+        <p:nvSpPr>
+          <p:cNvPr id="8" name="Shape 6"/>
+          <p:cNvSpPr/>
+          <p:nvPr/>
+        </p:nvSpPr>
+        <p:spPr>
+          <a:xfrm>
+            <a:off x="3383280" y="1783080"/>
+            <a:ext cx="2587752" cy="2423160"/>
+          </a:xfrm>
+          <a:prstGeom prst="roundRect">
+            <a:avLst>
+              <a:gd name="adj" fmla="val 3396"/>
+            </a:avLst>
+          </a:prstGeom>
+          <a:solidFill>
+            <a:srgbClr val="F1F3F6"/>
+          </a:solidFill>
+          <a:ln/>
+        </p:spPr>
+      </p:sp>
+      <p:sp>
+        <p:nvSpPr>
+          <p:cNvPr id="9" name="Text 7"/>
+          <p:cNvSpPr/>
+          <p:nvPr/>
+        </p:nvSpPr>
+        <p:spPr>
+          <a:xfrm>
+            <a:off x="3639312" y="1965960"/>
+            <a:ext cx="1097280" cy="502920"/>
+          </a:xfrm>
+          <a:prstGeom prst="rect">
+            <a:avLst/>
+          </a:prstGeom>
+          <a:noFill/>
+          <a:ln/>
+        </p:spPr>
+        <p:txBody>
+          <a:bodyPr wrap="square" lIns="0" tIns="0" rIns="0" bIns="0" rtlCol="0" anchor="ctr"/>
+          <a:lstStyle/>
+          <a:p>
+            <a:pPr indent="0" marL="0">
+              <a:buNone/>
+            </a:pPr>
+            <a:r>
+              <a:rPr lang="en-US" sz="2800" b="1" dirty="0">
+                <a:solidFill>
+                  <a:srgbClr val="B9C2CD"/>
+                </a:solidFill>
+                <a:latin typeface="Cambria" pitchFamily="34" charset="0"/>
+                <a:ea typeface="Cambria" pitchFamily="34" charset="-122"/>
+                <a:cs typeface="Cambria" pitchFamily="34" charset="-120"/>
+              </a:rPr>
+              <a:t>02</a:t>
+            </a:r>
+            <a:endParaRPr lang="en-US" sz="2800" dirty="0"/>
+          </a:p>
+        </p:txBody>
+      </p:sp>
+      <p:sp>
+        <p:nvSpPr>
+          <p:cNvPr id="10" name="Text 8"/>
+          <p:cNvSpPr/>
+          <p:nvPr/>
+        </p:nvSpPr>
+        <p:spPr>
+          <a:xfrm>
+            <a:off x="3621024" y="2523744"/>
+            <a:ext cx="2139696" cy="786384"/>
+          </a:xfrm>
+          <a:prstGeom prst="rect">
+            <a:avLst/>
+          </a:prstGeom>
+          <a:noFill/>
+          <a:ln/>
+        </p:spPr>
+        <p:txBody>
+          <a:bodyPr wrap="square" lIns="0" tIns="0" rIns="0" bIns="0" rtlCol="0" anchor="t"/>
+          <a:lstStyle/>
+          <a:p>
+            <a:pPr indent="0" marL="0">
+              <a:lnSpc>
+                <a:spcPts val="2000"/>
+              </a:lnSpc>
+              <a:buNone/>
+            </a:pPr>
+            <a:r>
+              <a:rPr lang="en-US" sz="1500" b="1" dirty="0">
+                <a:solidFill>
+                  <a:srgbClr val="1B2430"/>
+                </a:solidFill>
+                <a:latin typeface="Cambria" pitchFamily="34" charset="0"/>
+                <a:ea typeface="Cambria" pitchFamily="34" charset="-122"/>
+                <a:cs typeface="Cambria" pitchFamily="34" charset="-120"/>
+              </a:rPr>
+              <a:t>Start with the biggest spend</a:t>
+            </a:r>
+            <a:endParaRPr lang="en-US" sz="1500" dirty="0"/>
+          </a:p>
+        </p:txBody>
+      </p:sp>
+      <p:sp>
+        <p:nvSpPr>
+          <p:cNvPr id="11" name="Text 9"/>
+          <p:cNvSpPr/>
+          <p:nvPr/>
+        </p:nvSpPr>
+        <p:spPr>
+          <a:xfrm>
+            <a:off x="3621024" y="3346704"/>
+            <a:ext cx="2139696" cy="749808"/>
+          </a:xfrm>
+          <a:prstGeom prst="rect">
+            <a:avLst/>
+          </a:prstGeom>
+          <a:noFill/>
+          <a:ln/>
+        </p:spPr>
+        <p:txBody>
+          <a:bodyPr wrap="square" lIns="0" tIns="0" rIns="0" bIns="0" rtlCol="0" anchor="t"/>
+          <a:lstStyle/>
+          <a:p>
+            <a:pPr indent="0" marL="0">
+              <a:lnSpc>
+                <a:spcPts val="1500"/>
+              </a:lnSpc>
+              <a:buNone/>
+            </a:pPr>
+            <a:r>
+              <a:rPr lang="en-US" sz="1200" dirty="0">
+                <a:solidFill>
+                  <a:srgbClr val="5C6675"/>
+                </a:solidFill>
+                <a:latin typeface="Calibri" pitchFamily="34" charset="0"/>
+                <a:ea typeface="Calibri" pitchFamily="34" charset="-122"/>
+                <a:cs typeface="Calibri" pitchFamily="34" charset="-120"/>
+              </a:rPr>
+              <a:t>Attack the largest categories first. Don't chase perfect granularity everywhere.</a:t>
+            </a:r>
+            <a:endParaRPr lang="en-US" sz="1200" dirty="0"/>
+          </a:p>
+        </p:txBody>
+      </p:sp>
+      <p:sp>
+        <p:nvSpPr>
+          <p:cNvPr id="12" name="Shape 10"/>
+          <p:cNvSpPr/>
+          <p:nvPr/>
+        </p:nvSpPr>
+        <p:spPr>
+          <a:xfrm>
+            <a:off x="6217920" y="1783080"/>
+            <a:ext cx="2587752" cy="2423160"/>
+          </a:xfrm>
+          <a:prstGeom prst="roundRect">
+            <a:avLst>
+              <a:gd name="adj" fmla="val 3396"/>
+            </a:avLst>
+          </a:prstGeom>
+          <a:solidFill>
+            <a:srgbClr val="F1F3F6"/>
+          </a:solidFill>
+          <a:ln/>
+        </p:spPr>
+      </p:sp>
+      <p:sp>
+        <p:nvSpPr>
+          <p:cNvPr id="13" name="Text 11"/>
+          <p:cNvSpPr/>
+          <p:nvPr/>
+        </p:nvSpPr>
+        <p:spPr>
+          <a:xfrm>
+            <a:off x="6473952" y="1965960"/>
+            <a:ext cx="1097280" cy="502920"/>
+          </a:xfrm>
+          <a:prstGeom prst="rect">
+            <a:avLst/>
+          </a:prstGeom>
+          <a:noFill/>
+          <a:ln/>
+        </p:spPr>
+        <p:txBody>
+          <a:bodyPr wrap="square" lIns="0" tIns="0" rIns="0" bIns="0" rtlCol="0" anchor="ctr"/>
+          <a:lstStyle/>
+          <a:p>
+            <a:pPr indent="0" marL="0">
+              <a:buNone/>
+            </a:pPr>
+            <a:r>
+              <a:rPr lang="en-US" sz="2800" b="1" dirty="0">
+                <a:solidFill>
+                  <a:srgbClr val="B9C2CD"/>
+                </a:solidFill>
+                <a:latin typeface="Cambria" pitchFamily="34" charset="0"/>
+                <a:ea typeface="Cambria" pitchFamily="34" charset="-122"/>
+                <a:cs typeface="Cambria" pitchFamily="34" charset="-120"/>
+              </a:rPr>
+              <a:t>03</a:t>
+            </a:r>
+            <a:endParaRPr lang="en-US" sz="2800" dirty="0"/>
+          </a:p>
+        </p:txBody>
+      </p:sp>
+      <p:sp>
+        <p:nvSpPr>
+          <p:cNvPr id="14" name="Text 12"/>
+          <p:cNvSpPr/>
+          <p:nvPr/>
+        </p:nvSpPr>
+        <p:spPr>
+          <a:xfrm>
+            <a:off x="6455664" y="2523744"/>
+            <a:ext cx="2139696" cy="786384"/>
+          </a:xfrm>
+          <a:prstGeom prst="rect">
+            <a:avLst/>
+          </a:prstGeom>
+          <a:noFill/>
+          <a:ln/>
+        </p:spPr>
+        <p:txBody>
+          <a:bodyPr wrap="square" lIns="0" tIns="0" rIns="0" bIns="0" rtlCol="0" anchor="t"/>
+          <a:lstStyle/>
+          <a:p>
+            <a:pPr indent="0" marL="0">
+              <a:lnSpc>
+                <a:spcPts val="2000"/>
+              </a:lnSpc>
+              <a:buNone/>
+            </a:pPr>
+            <a:r>
+              <a:rPr lang="en-US" sz="1500" b="1" dirty="0">
+                <a:solidFill>
+                  <a:srgbClr val="1B2430"/>
+                </a:solidFill>
+                <a:latin typeface="Cambria" pitchFamily="34" charset="0"/>
+                <a:ea typeface="Cambria" pitchFamily="34" charset="-122"/>
+                <a:cs typeface="Cambria" pitchFamily="34" charset="-120"/>
+              </a:rPr>
+              <a:t>Get finance and engineering talking</a:t>
+            </a:r>
+            <a:endParaRPr lang="en-US" sz="1500" dirty="0"/>
+          </a:p>
+        </p:txBody>
+      </p:sp>
+      <p:sp>
+        <p:nvSpPr>
+          <p:cNvPr id="15" name="Text 13"/>
+          <p:cNvSpPr/>
+          <p:nvPr/>
+        </p:nvSpPr>
+        <p:spPr>
+          <a:xfrm>
+            <a:off x="6455664" y="3346704"/>
+            <a:ext cx="2139696" cy="749808"/>
+          </a:xfrm>
+          <a:prstGeom prst="rect">
+            <a:avLst/>
+          </a:prstGeom>
+          <a:noFill/>
+          <a:ln/>
+        </p:spPr>
+        <p:txBody>
+          <a:bodyPr wrap="square" lIns="0" tIns="0" rIns="0" bIns="0" rtlCol="0" anchor="t"/>
+          <a:lstStyle/>
+          <a:p>
+            <a:pPr indent="0" marL="0">
+              <a:lnSpc>
+                <a:spcPts val="1500"/>
+              </a:lnSpc>
+              <a:buNone/>
+            </a:pPr>
+            <a:r>
+              <a:rPr lang="en-US" sz="1200" dirty="0">
+                <a:solidFill>
+                  <a:srgbClr val="5C6675"/>
+                </a:solidFill>
+                <a:latin typeface="Calibri" pitchFamily="34" charset="0"/>
+                <a:ea typeface="Calibri" pitchFamily="34" charset="-122"/>
+                <a:cs typeface="Calibri" pitchFamily="34" charset="-120"/>
+              </a:rPr>
+              <a:t>Bring both into the conversation early, not as an afterthought.</a:t>
+            </a:r>
+            <a:endParaRPr lang="en-US" sz="1200" dirty="0"/>
+          </a:p>
+        </p:txBody>
+      </p:sp>
+      <p:sp>
+        <p:nvSpPr>
+          <p:cNvPr id="16" name="Shape 14"/>
+          <p:cNvSpPr/>
+          <p:nvPr/>
+        </p:nvSpPr>
+        <p:spPr>
+          <a:xfrm>
+            <a:off x="9052560" y="1783080"/>
+            <a:ext cx="2587752" cy="2423160"/>
+          </a:xfrm>
+          <a:prstGeom prst="roundRect">
+            <a:avLst>
+              <a:gd name="adj" fmla="val 3396"/>
+            </a:avLst>
+          </a:prstGeom>
+          <a:solidFill>
+            <a:srgbClr val="F1F3F6"/>
+          </a:solidFill>
+          <a:ln/>
+        </p:spPr>
+      </p:sp>
+      <p:sp>
+        <p:nvSpPr>
+          <p:cNvPr id="17" name="Text 15"/>
+          <p:cNvSpPr/>
+          <p:nvPr/>
+        </p:nvSpPr>
+        <p:spPr>
+          <a:xfrm>
+            <a:off x="9308592" y="1965960"/>
+            <a:ext cx="1097280" cy="502920"/>
+          </a:xfrm>
+          <a:prstGeom prst="rect">
+            <a:avLst/>
+          </a:prstGeom>
+          <a:noFill/>
+          <a:ln/>
+        </p:spPr>
+        <p:txBody>
+          <a:bodyPr wrap="square" lIns="0" tIns="0" rIns="0" bIns="0" rtlCol="0" anchor="ctr"/>
+          <a:lstStyle/>
+          <a:p>
+            <a:pPr indent="0" marL="0">
+              <a:buNone/>
+            </a:pPr>
+            <a:r>
+              <a:rPr lang="en-US" sz="2800" b="1" dirty="0">
+                <a:solidFill>
+                  <a:srgbClr val="B9C2CD"/>
+                </a:solidFill>
+                <a:latin typeface="Cambria" pitchFamily="34" charset="0"/>
+                <a:ea typeface="Cambria" pitchFamily="34" charset="-122"/>
+                <a:cs typeface="Cambria" pitchFamily="34" charset="-120"/>
+              </a:rPr>
+              <a:t>04</a:t>
+            </a:r>
+            <a:endParaRPr lang="en-US" sz="2800" dirty="0"/>
+          </a:p>
+        </p:txBody>
+      </p:sp>
+      <p:sp>
+        <p:nvSpPr>
+          <p:cNvPr id="18" name="Text 16"/>
+          <p:cNvSpPr/>
+          <p:nvPr/>
+        </p:nvSpPr>
+        <p:spPr>
+          <a:xfrm>
+            <a:off x="9290304" y="2523744"/>
+            <a:ext cx="2139696" cy="786384"/>
+          </a:xfrm>
+          <a:prstGeom prst="rect">
+            <a:avLst/>
+          </a:prstGeom>
+          <a:noFill/>
+          <a:ln/>
+        </p:spPr>
+        <p:txBody>
+          <a:bodyPr wrap="square" lIns="0" tIns="0" rIns="0" bIns="0" rtlCol="0" anchor="t"/>
+          <a:lstStyle/>
+          <a:p>
+            <a:pPr indent="0" marL="0">
+              <a:lnSpc>
+                <a:spcPts val="2000"/>
+              </a:lnSpc>
+              <a:buNone/>
+            </a:pPr>
+            <a:r>
+              <a:rPr lang="en-US" sz="1500" b="1" dirty="0">
+                <a:solidFill>
+                  <a:srgbClr val="1B2430"/>
+                </a:solidFill>
+                <a:latin typeface="Cambria" pitchFamily="34" charset="0"/>
+                <a:ea typeface="Cambria" pitchFamily="34" charset="-122"/>
+                <a:cs typeface="Cambria" pitchFamily="34" charset="-120"/>
+              </a:rPr>
+              <a:t>Set guardrails early</a:t>
+            </a:r>
+            <a:endParaRPr lang="en-US" sz="1500" dirty="0"/>
+          </a:p>
+        </p:txBody>
+      </p:sp>
+      <p:sp>
+        <p:nvSpPr>
+          <p:cNvPr id="19" name="Text 17"/>
+          <p:cNvSpPr/>
+          <p:nvPr/>
+        </p:nvSpPr>
+        <p:spPr>
+          <a:xfrm>
+            <a:off x="9290304" y="3346704"/>
+            <a:ext cx="2139696" cy="749808"/>
+          </a:xfrm>
+          <a:prstGeom prst="rect">
+            <a:avLst/>
+          </a:prstGeom>
+          <a:noFill/>
+          <a:ln/>
+        </p:spPr>
+        <p:txBody>
+          <a:bodyPr wrap="square" lIns="0" tIns="0" rIns="0" bIns="0" rtlCol="0" anchor="t"/>
+          <a:lstStyle/>
+          <a:p>
+            <a:pPr indent="0" marL="0">
+              <a:lnSpc>
+                <a:spcPts val="1500"/>
+              </a:lnSpc>
+              <a:buNone/>
+            </a:pPr>
+            <a:r>
+              <a:rPr lang="en-US" sz="1200" dirty="0">
+                <a:solidFill>
+                  <a:srgbClr val="5C6675"/>
+                </a:solidFill>
+                <a:latin typeface="Calibri" pitchFamily="34" charset="0"/>
+                <a:ea typeface="Calibri" pitchFamily="34" charset="-122"/>
+                <a:cs typeface="Calibri" pitchFamily="34" charset="-120"/>
+              </a:rPr>
+              <a:t>Owners, budget thresholds and quotas cost little to add — and stop the expensive surprises.</a:t>
+            </a:r>
+            <a:endParaRPr lang="en-US" sz="1200" dirty="0"/>
+          </a:p>
+        </p:txBody>
+      </p:sp>
+      <p:sp>
+        <p:nvSpPr>
+          <p:cNvPr id="20" name="Shape 18"/>
+          <p:cNvSpPr/>
+          <p:nvPr/>
+        </p:nvSpPr>
+        <p:spPr>
+          <a:xfrm>
+            <a:off x="548640" y="4434840"/>
+            <a:ext cx="11091672" cy="1874520"/>
+          </a:xfrm>
+          <a:prstGeom prst="roundRect">
+            <a:avLst>
+              <a:gd name="adj" fmla="val 4390"/>
+            </a:avLst>
+          </a:prstGeom>
+          <a:solidFill>
+            <a:srgbClr val="F1F3F6"/>
+          </a:solidFill>
+          <a:ln/>
+        </p:spPr>
+      </p:sp>
+      <p:sp>
+        <p:nvSpPr>
+          <p:cNvPr id="21" name="Text 19"/>
+          <p:cNvSpPr/>
+          <p:nvPr/>
+        </p:nvSpPr>
+        <p:spPr>
+          <a:xfrm>
+            <a:off x="877824" y="4572000"/>
+            <a:ext cx="6035040" cy="292608"/>
+          </a:xfrm>
+          <a:prstGeom prst="rect">
+            <a:avLst/>
+          </a:prstGeom>
+          <a:noFill/>
+          <a:ln/>
+        </p:spPr>
+        <p:txBody>
+          <a:bodyPr wrap="square" lIns="0" tIns="0" rIns="0" bIns="0" rtlCol="0" anchor="ctr"/>
+          <a:lstStyle/>
+          <a:p>
+            <a:pPr indent="0" marL="0">
+              <a:buNone/>
+            </a:pPr>
+            <a:r>
+              <a:rPr lang="en-US" sz="1200" b="1" spc="180" kern="0" dirty="0">
+                <a:solidFill>
+                  <a:srgbClr val="5C6675"/>
+                </a:solidFill>
+                <a:latin typeface="Calibri" pitchFamily="34" charset="0"/>
+                <a:ea typeface="Calibri" pitchFamily="34" charset="-122"/>
+                <a:cs typeface="Calibri" pitchFamily="34" charset="-120"/>
+              </a:rPr>
+              <a:t>Tooling — match the footprint, not the ambition</a:t>
+            </a:r>
+            <a:endParaRPr lang="en-US" sz="1200" dirty="0"/>
+          </a:p>
+        </p:txBody>
+      </p:sp>
+      <p:sp>
+        <p:nvSpPr>
+          <p:cNvPr id="22" name="Text 20"/>
+          <p:cNvSpPr/>
+          <p:nvPr/>
+        </p:nvSpPr>
+        <p:spPr>
+          <a:xfrm>
+            <a:off x="877824" y="4937760"/>
+            <a:ext cx="1737360" cy="384048"/>
+          </a:xfrm>
+          <a:prstGeom prst="rect">
+            <a:avLst/>
+          </a:prstGeom>
+          <a:noFill/>
+          <a:ln/>
+        </p:spPr>
+        <p:txBody>
+          <a:bodyPr wrap="square" lIns="0" tIns="0" rIns="0" bIns="0" rtlCol="0" anchor="ctr"/>
+          <a:lstStyle/>
+          <a:p>
+            <a:pPr indent="0" marL="0">
+              <a:buNone/>
+            </a:pPr>
+            <a:r>
+              <a:rPr lang="en-US" sz="1350" b="1" dirty="0">
+                <a:solidFill>
+                  <a:srgbClr val="2E8B7A"/>
+                </a:solidFill>
+                <a:latin typeface="Calibri" pitchFamily="34" charset="0"/>
+                <a:ea typeface="Calibri" pitchFamily="34" charset="-122"/>
+                <a:cs typeface="Calibri" pitchFamily="34" charset="-120"/>
+              </a:rPr>
+              <a:t>Native</a:t>
+            </a:r>
+            <a:endParaRPr lang="en-US" sz="1350" dirty="0"/>
+          </a:p>
+        </p:txBody>
+      </p:sp>
+      <p:sp>
+        <p:nvSpPr>
+          <p:cNvPr id="23" name="Text 21"/>
+          <p:cNvSpPr/>
+          <p:nvPr/>
+        </p:nvSpPr>
+        <p:spPr>
+          <a:xfrm>
+            <a:off x="2651760" y="4937760"/>
+            <a:ext cx="8595360" cy="384048"/>
+          </a:xfrm>
+          <a:prstGeom prst="rect">
+            <a:avLst/>
+          </a:prstGeom>
+          <a:noFill/>
+          <a:ln/>
+        </p:spPr>
+        <p:txBody>
+          <a:bodyPr wrap="square" lIns="0" tIns="0" rIns="0" bIns="0" rtlCol="0" anchor="ctr"/>
+          <a:lstStyle/>
+          <a:p>
+            <a:pPr indent="0" marL="0">
+              <a:buNone/>
+            </a:pPr>
+            <a:r>
+              <a:rPr lang="en-US" sz="1350" dirty="0">
+                <a:solidFill>
+                  <a:srgbClr val="5C6675"/>
+                </a:solidFill>
+                <a:latin typeface="Calibri" pitchFamily="34" charset="0"/>
+                <a:ea typeface="Calibri" pitchFamily="34" charset="-122"/>
+                <a:cs typeface="Calibri" pitchFamily="34" charset="-120"/>
+              </a:rPr>
+              <a:t>AWS Cost Explorer  ·  Azure Cost Management  ·  GCP Billing</a:t>
+            </a:r>
+            <a:endParaRPr lang="en-US" sz="1350" dirty="0"/>
+          </a:p>
+        </p:txBody>
+      </p:sp>
+      <p:sp>
+        <p:nvSpPr>
+          <p:cNvPr id="24" name="Text 22"/>
+          <p:cNvSpPr/>
+          <p:nvPr/>
+        </p:nvSpPr>
+        <p:spPr>
+          <a:xfrm>
+            <a:off x="877824" y="5349240"/>
+            <a:ext cx="1737360" cy="384048"/>
+          </a:xfrm>
+          <a:prstGeom prst="rect">
+            <a:avLst/>
+          </a:prstGeom>
+          <a:noFill/>
+          <a:ln/>
+        </p:spPr>
+        <p:txBody>
+          <a:bodyPr wrap="square" lIns="0" tIns="0" rIns="0" bIns="0" rtlCol="0" anchor="ctr"/>
+          <a:lstStyle/>
+          <a:p>
+            <a:pPr indent="0" marL="0">
+              <a:buNone/>
+            </a:pPr>
+            <a:r>
+              <a:rPr lang="en-US" sz="1350" b="1" dirty="0">
+                <a:solidFill>
+                  <a:srgbClr val="B87B18"/>
+                </a:solidFill>
+                <a:latin typeface="Calibri" pitchFamily="34" charset="0"/>
+                <a:ea typeface="Calibri" pitchFamily="34" charset="-122"/>
+                <a:cs typeface="Calibri" pitchFamily="34" charset="-120"/>
+              </a:rPr>
+              <a:t>Third-party</a:t>
+            </a:r>
+            <a:endParaRPr lang="en-US" sz="1350" dirty="0"/>
+          </a:p>
+        </p:txBody>
+      </p:sp>
+      <p:sp>
+        <p:nvSpPr>
+          <p:cNvPr id="25" name="Text 23"/>
+          <p:cNvSpPr/>
+          <p:nvPr/>
+        </p:nvSpPr>
+        <p:spPr>
+          <a:xfrm>
+            <a:off x="2651760" y="5349240"/>
+            <a:ext cx="8595360" cy="384048"/>
+          </a:xfrm>
+          <a:prstGeom prst="rect">
+            <a:avLst/>
+          </a:prstGeom>
+          <a:noFill/>
+          <a:ln/>
+        </p:spPr>
+        <p:txBody>
+          <a:bodyPr wrap="square" lIns="0" tIns="0" rIns="0" bIns="0" rtlCol="0" anchor="ctr"/>
+          <a:lstStyle/>
+          <a:p>
+            <a:pPr indent="0" marL="0">
+              <a:buNone/>
+            </a:pPr>
+            <a:r>
+              <a:rPr lang="en-US" sz="1350" dirty="0">
+                <a:solidFill>
+                  <a:srgbClr val="5C6675"/>
+                </a:solidFill>
+                <a:latin typeface="Calibri" pitchFamily="34" charset="0"/>
+                <a:ea typeface="Calibri" pitchFamily="34" charset="-122"/>
+                <a:cs typeface="Calibri" pitchFamily="34" charset="-120"/>
+              </a:rPr>
+              <a:t>CloudHealth  ·  Apptio  ·  Vantage  ·  nOps  ·  Finout  ·  CoreStack</a:t>
+            </a:r>
+            <a:endParaRPr lang="en-US" sz="1350" dirty="0"/>
+          </a:p>
+        </p:txBody>
+      </p:sp>
+      <p:sp>
+        <p:nvSpPr>
+          <p:cNvPr id="26" name="Text 24"/>
+          <p:cNvSpPr/>
+          <p:nvPr/>
+        </p:nvSpPr>
+        <p:spPr>
+          <a:xfrm>
+            <a:off x="877824" y="5760720"/>
+            <a:ext cx="1737360" cy="384048"/>
+          </a:xfrm>
+          <a:prstGeom prst="rect">
+            <a:avLst/>
+          </a:prstGeom>
+          <a:noFill/>
+          <a:ln/>
+        </p:spPr>
+        <p:txBody>
+          <a:bodyPr wrap="square" lIns="0" tIns="0" rIns="0" bIns="0" rtlCol="0" anchor="ctr"/>
+          <a:lstStyle/>
+          <a:p>
+            <a:pPr indent="0" marL="0">
+              <a:buNone/>
+            </a:pPr>
+            <a:r>
+              <a:rPr lang="en-US" sz="1350" b="1" dirty="0">
+                <a:solidFill>
+                  <a:srgbClr val="1B2430"/>
+                </a:solidFill>
+                <a:latin typeface="Calibri" pitchFamily="34" charset="0"/>
+                <a:ea typeface="Calibri" pitchFamily="34" charset="-122"/>
+                <a:cs typeface="Calibri" pitchFamily="34" charset="-120"/>
+              </a:rPr>
+              <a:t>Standard</a:t>
+            </a:r>
+            <a:endParaRPr lang="en-US" sz="1350" dirty="0"/>
+          </a:p>
+        </p:txBody>
+      </p:sp>
+      <p:sp>
+        <p:nvSpPr>
+          <p:cNvPr id="27" name="Text 25"/>
+          <p:cNvSpPr/>
+          <p:nvPr/>
+        </p:nvSpPr>
+        <p:spPr>
+          <a:xfrm>
+            <a:off x="2651760" y="5760720"/>
+            <a:ext cx="8595360" cy="384048"/>
+          </a:xfrm>
+          <a:prstGeom prst="rect">
+            <a:avLst/>
+          </a:prstGeom>
+          <a:noFill/>
+          <a:ln/>
+        </p:spPr>
+        <p:txBody>
+          <a:bodyPr wrap="square" lIns="0" tIns="0" rIns="0" bIns="0" rtlCol="0" anchor="ctr"/>
+          <a:lstStyle/>
+          <a:p>
+            <a:pPr indent="0" marL="0">
+              <a:buNone/>
+            </a:pPr>
+            <a:r>
+              <a:rPr lang="en-US" sz="1350" dirty="0">
+                <a:solidFill>
+                  <a:srgbClr val="5C6675"/>
+                </a:solidFill>
+                <a:latin typeface="Calibri" pitchFamily="34" charset="0"/>
+                <a:ea typeface="Calibri" pitchFamily="34" charset="-122"/>
+                <a:cs typeface="Calibri" pitchFamily="34" charset="-120"/>
+              </a:rPr>
+              <a:t>FOCUS-compliant platforms for multi-cloud reporting</a:t>
+            </a:r>
+            <a:endParaRPr lang="en-US" sz="1350" dirty="0"/>
+          </a:p>
+        </p:txBody>
+      </p:sp>
+    </p:spTree>
+  </p:cSld>
+  <p:clrMapOvr>
+    <a:masterClrMapping/>
+  </p:clrMapOvr>
+</p:sld>
+</file>
+
+<file path=ppt/slides/slide21.xml><?xml version="1.0" encoding="utf-8"?>
+<p:sld xmlns:a="http://schemas.openxmlformats.org/drawingml/2006/main" xmlns:r="http://schemas.openxmlformats.org/officeDocument/2006/relationships" xmlns:p="http://schemas.openxmlformats.org/presentationml/2006/main">
+  <p:cSld name="Slide 21">
+    <p:bg>
+      <p:bgPr>
+        <a:solidFill>
           <a:srgbClr val="141A22"/>
         </a:solidFill>
       </p:bgPr>
@@ -14583,9 +15926,9 @@
 </p:sld>
 </file>
 
-<file path=ppt/slides/slide21.xml><?xml version="1.0" encoding="utf-8"?>
+<file path=ppt/slides/slide22.xml><?xml version="1.0" encoding="utf-8"?>
 <p:sld xmlns:a="http://schemas.openxmlformats.org/drawingml/2006/main" xmlns:r="http://schemas.openxmlformats.org/officeDocument/2006/relationships" xmlns:p="http://schemas.openxmlformats.org/presentationml/2006/main">
-  <p:cSld name="Slide 21">
+  <p:cSld name="Slide 22">
     <p:bg>
       <p:bgPr>
         <a:solidFill>

--- a/presentations/finops-gaining-visibility-cfo.pptx
+++ b/presentations/finops-gaining-visibility-cfo.pptx
@@ -27,9 +27,10 @@
     <p:sldId id="275" r:id="rId21"/>
     <p:sldId id="276" r:id="rId22"/>
     <p:sldId id="277" r:id="rId23"/>
+    <p:sldId id="278" r:id="rId24"/>
   </p:sldIdLst>
   <p:notesMasterIdLst>
-    <p:notesMasterId r:id="rId24"/>
+    <p:notesMasterId r:id="rId25"/>
   </p:notesMasterIdLst>
   <p:sldSz cx="12192000" cy="6858000"/>
   <p:notesSz cx="6858000" cy="12192000"/>
@@ -1403,7 +1404,7 @@
           <a:p>
             <a:r>
               <a:rPr lang="en-US" dirty="0"/>
-              <a:t>This is the slide to bring to the conversation about why the number moved, because it reframes the problem from cost to timing. The overrun is the same in all four columns; what changes is how much notice we get, and notice is what converts a write-off into a decision. The third point is the one with direct budget consequence — a forecast warning two weeks before month end can still change the month's outcome, while the invoice can only be explained after close. Be careful with the closing line and repeat it verbatim: this programme does not commit to reducing spend by a percentage, it commits to no unexplained variance. That is the promise we can actually keep, and it is worth more at the audit committee than a savings figure nobody can attribute afterwards.</a:t>
+              <a:t>The finance reading of this slide is straightforward: the earlier a cost decision is reviewed, the cheaper it is to change, and by the time it reaches an invoice it is effectively fixed. That is the same logic as reviewing a capital request before commitment rather than after — we are simply applying it to architectural choices that commit spend without ever passing through a requisition. Note what this adds to the control environment: an approval point that exists before money is spent, sitting in the engineering workflow rather than in a finance queue. Policy as code is the part to appreciate — budget and tagging rules enforced automatically in the deployment pipeline, which is a preventive control rather than a detective one, and it is auditable. External evidence is worth citing here: pre-deployment architecture costing is the most requested capability in the State of FinOps 2026, so this is where the discipline is heading rather than a local preference.</a:t>
             </a:r>
             <a:endParaRPr lang="en-US" dirty="0"/>
           </a:p>
@@ -1579,7 +1580,7 @@
           <a:p>
             <a:r>
               <a:rPr lang="en-US" dirty="0"/>
-              <a:t>This is the ask, and the honest cost answer is effort rather than licence spend if we stay on native tooling — name the roles and the share of their time instead of quoting a budget number you would have to defend. Step one is the only item that cannot run in parallel: every downstream report degrades if the taxonomy is still moving. Split the ownership explicitly — finance owns the taxonomy, the allocation policy and the KPI definitions; engineering owns enforcement, instrumentation and remediation. Steps two and four are both arguments for restraint: attack the largest cost categories rather than pursuing complete granularity, and buy tooling that matches the estate we have rather than the one we might have in three years.</a:t>
+              <a:t>This is the slide to bring to the conversation about why the number moved, because it reframes the problem from cost to timing. The overrun is the same in all four columns; what changes is how much notice we get, and notice is what converts a write-off into a decision. The third point is the one with direct budget consequence — a forecast warning two weeks before month end can still change the month's outcome, while the invoice can only be explained after close. Be careful with the closing line and repeat it verbatim: this programme does not commit to reducing spend by a percentage, it commits to no unexplained variance. That is the promise we can actually keep, and it is worth more at the audit committee than a savings figure nobody can attribute afterwards.</a:t>
             </a:r>
             <a:endParaRPr lang="en-US" dirty="0"/>
           </a:p>
@@ -1667,7 +1668,7 @@
           <a:p>
             <a:r>
               <a:rPr lang="en-US" dirty="0"/>
-              <a:t>Close on why this sequencing produces a better financial outcome than cutting first. A cut delivers a one-time step down and reverses as soon as attention moves elsewhere; allocation plus ownership changes the rate at which cost is added, which compounds across every subsequent period. That is also the honest framing for the board: the near-term deliverable is explainable variance and a forecast we can stand behind, with targeted savings following the first full period of clean data. Ask for the first two links today — the allocation standard and published ownership — because the rest follow from them and cannot be bought separately.</a:t>
+              <a:t>This is the ask, and the honest cost answer is effort rather than licence spend if we stay on native tooling — name the roles and the share of their time instead of quoting a budget number you would have to defend. Step one is the only item that cannot run in parallel: every downstream report degrades if the taxonomy is still moving. Split the ownership explicitly — finance owns the taxonomy, the allocation policy and the KPI definitions; engineering owns enforcement, instrumentation and remediation. Steps two and four are both arguments for restraint: attack the largest cost categories rather than pursuing complete granularity, and buy tooling that matches the estate we have rather than the one we might have in three years.</a:t>
             </a:r>
             <a:endParaRPr lang="en-US" dirty="0"/>
           </a:p>
@@ -1755,7 +1756,7 @@
           <a:p>
             <a:r>
               <a:rPr lang="en-US" dirty="0"/>
-              <a:t>Expect five questions and have the answers ready. What does it cost: effort, principally, plus any tooling only if we are genuinely multi-cloud. When do savings appear: allocation coverage improves within weeks, targeted savings follow the first full period of clean data, and be careful not to promise a percentage before we can see where the waste is. Who owns it: name the taxonomy owner and the monthly review before leaving the room, or none of this happens. Does it affect the close: better, not worse — daily data improves the accrual, though chargeback adds a journal step worth scoping with the controller. And will chargeback start an internal war: only if we launch it on allocation nobody trusts, which is exactly what the showback runway is for.</a:t>
+              <a:t>Close on why this sequencing produces a better financial outcome than cutting first. A cut delivers a one-time step down and reverses as soon as attention moves elsewhere; allocation plus ownership changes the rate at which cost is added, which compounds across every subsequent period. That is also the honest framing for the board: the near-term deliverable is explainable variance and a forecast we can stand behind, with targeted savings following the first full period of clean data. Ask for the first two links today — the allocation standard and published ownership — because the rest follow from them and cannot be bought separately.</a:t>
             </a:r>
             <a:endParaRPr lang="en-US" dirty="0"/>
           </a:p>
@@ -1779,6 +1780,94 @@
             <a:fld id="{F7021451-1387-4CA6-816F-3879F97B5CBC}" type="slidenum">
               <a:rPr lang="en-US"/>
               <a:t>22</a:t>
+            </a:fld>
+            <a:endParaRPr lang="en-US"/>
+          </a:p>
+        </p:txBody>
+      </p:sp>
+    </p:spTree>
+    <p:extLst>
+      <p:ext uri="{BB962C8B-B14F-4D97-AF65-F5344CB8AC3E}">
+        <p14:creationId xmlns:p14="http://schemas.microsoft.com/office/powerpoint/2010/main" val="1024086991"/>
+      </p:ext>
+    </p:extLst>
+  </p:cSld>
+  <p:clrMapOvr>
+    <a:masterClrMapping/>
+  </p:clrMapOvr>
+</p:notes>
+</file>
+
+<file path=ppt/notesSlides/notesSlide23.xml><?xml version="1.0" encoding="utf-8"?>
+<p:notes xmlns:a="http://schemas.openxmlformats.org/drawingml/2006/main" xmlns:r="http://schemas.openxmlformats.org/officeDocument/2006/relationships" xmlns:p="http://schemas.openxmlformats.org/presentationml/2006/main">
+  <p:cSld>
+    <p:spTree>
+      <p:nvGrpSpPr>
+        <p:cNvPr id="1" name=""/>
+        <p:cNvGrpSpPr/>
+        <p:nvPr/>
+      </p:nvGrpSpPr>
+      <p:grpSpPr>
+        <a:xfrm>
+          <a:off x="0" y="0"/>
+          <a:ext cx="0" cy="0"/>
+          <a:chOff x="0" y="0"/>
+          <a:chExt cx="0" cy="0"/>
+        </a:xfrm>
+      </p:grpSpPr>
+      <p:sp>
+        <p:nvSpPr>
+          <p:cNvPr id="2" name="Slide Image Placeholder 1"/>
+          <p:cNvSpPr>
+            <a:spLocks noGrp="1" noRot="1" noChangeAspect="1"/>
+          </p:cNvSpPr>
+          <p:nvPr>
+            <p:ph type="sldImg"/>
+          </p:nvPr>
+        </p:nvSpPr>
+        <p:spPr/>
+      </p:sp>
+      <p:sp>
+        <p:nvSpPr>
+          <p:cNvPr id="3" name="Notes Placeholder 2"/>
+          <p:cNvSpPr>
+            <a:spLocks noGrp="1"/>
+          </p:cNvSpPr>
+          <p:nvPr>
+            <p:ph type="body" idx="1"/>
+          </p:nvPr>
+        </p:nvSpPr>
+        <p:spPr/>
+        <p:txBody>
+          <a:bodyPr/>
+          <a:lstStyle/>
+          <a:p>
+            <a:r>
+              <a:rPr lang="en-US" dirty="0"/>
+              <a:t>Expect five questions and have the answers ready. What does it cost: effort, principally, plus any tooling only if we are genuinely multi-cloud. When do savings appear: allocation coverage improves within weeks, targeted savings follow the first full period of clean data, and be careful not to promise a percentage before we can see where the waste is. Who owns it: name the taxonomy owner and the monthly review before leaving the room, or none of this happens. Does it affect the close: better, not worse — daily data improves the accrual, though chargeback adds a journal step worth scoping with the controller. And will chargeback start an internal war: only if we launch it on allocation nobody trusts, which is exactly what the showback runway is for.</a:t>
+            </a:r>
+            <a:endParaRPr lang="en-US" dirty="0"/>
+          </a:p>
+        </p:txBody>
+      </p:sp>
+      <p:sp>
+        <p:nvSpPr>
+          <p:cNvPr id="4" name="Slide Number Placeholder 3"/>
+          <p:cNvSpPr>
+            <a:spLocks noGrp="1"/>
+          </p:cNvSpPr>
+          <p:nvPr>
+            <p:ph type="sldNum" sz="quarter" idx="10"/>
+          </p:nvPr>
+        </p:nvSpPr>
+        <p:spPr/>
+        <p:txBody>
+          <a:bodyPr/>
+          <a:lstStyle/>
+          <a:p>
+            <a:fld id="{F7021451-1387-4CA6-816F-3879F97B5CBC}" type="slidenum">
+              <a:rPr lang="en-US"/>
+              <a:t>23</a:t>
             </a:fld>
             <a:endParaRPr lang="en-US"/>
           </a:p>
@@ -12246,7 +12335,7 @@
                 <a:ea typeface="Calibri" pitchFamily="34" charset="-122"/>
                 <a:cs typeface="Calibri" pitchFamily="34" charset="-120"/>
               </a:rPr>
-              <a:t>GOVERNANCE — PUTTING IT TOGETHER</a:t>
+              <a:t>GOVERNANCE — SHIFT LEFT</a:t>
             </a:r>
             <a:endParaRPr lang="en-US" sz="1100" dirty="0"/>
           </a:p>
@@ -12285,7 +12374,7 @@
                 <a:ea typeface="Cambria" pitchFamily="34" charset="-122"/>
                 <a:cs typeface="Cambria" pitchFamily="34" charset="-120"/>
               </a:rPr>
-              <a:t>Nobody should learn it from the invoice</a:t>
+              <a:t>Catch it at design, not on the invoice</a:t>
             </a:r>
             <a:endParaRPr lang="en-US" sz="3100" dirty="0"/>
           </a:p>
@@ -12324,7 +12413,7 @@
                 <a:ea typeface="Calibri" pitchFamily="34" charset="-122"/>
                 <a:cs typeface="Calibri" pitchFamily="34" charset="-120"/>
               </a:rPr>
-              <a:t>The same overrun, found at four different moments. Only the first three leave you anything to do about it.</a:t>
+              <a:t>Cost is a design constraint, reviewed alongside security and reliability — not a report that arrives afterwards.</a:t>
             </a:r>
             <a:endParaRPr lang="en-US" sz="1500" dirty="0"/>
           </a:p>
@@ -12332,36 +12421,75 @@
       </p:sp>
       <p:sp>
         <p:nvSpPr>
-          <p:cNvPr id="5" name="Shape 3"/>
-          <p:cNvSpPr/>
-          <p:nvPr/>
-        </p:nvSpPr>
-        <p:spPr>
-          <a:xfrm>
-            <a:off x="1737360" y="3127248"/>
-            <a:ext cx="8714232" cy="45720"/>
+          <p:cNvPr id="5" name="Text 3"/>
+          <p:cNvSpPr/>
+          <p:nvPr/>
+        </p:nvSpPr>
+        <p:spPr>
+          <a:xfrm>
+            <a:off x="548640" y="2194560"/>
+            <a:ext cx="4114800" cy="274320"/>
+          </a:xfrm>
+          <a:prstGeom prst="rect">
+            <a:avLst/>
+          </a:prstGeom>
+          <a:noFill/>
+          <a:ln/>
+        </p:spPr>
+        <p:txBody>
+          <a:bodyPr wrap="square" lIns="0" tIns="0" rIns="0" bIns="0" rtlCol="0" anchor="ctr"/>
+          <a:lstStyle/>
+          <a:p>
+            <a:pPr indent="0" marL="0">
+              <a:buNone/>
+            </a:pPr>
+            <a:r>
+              <a:rPr lang="en-US" sz="1200" b="1" spc="180" kern="0" dirty="0">
+                <a:solidFill>
+                  <a:srgbClr val="5C6675"/>
+                </a:solidFill>
+                <a:latin typeface="Calibri" pitchFamily="34" charset="0"/>
+                <a:ea typeface="Calibri" pitchFamily="34" charset="-122"/>
+                <a:cs typeface="Calibri" pitchFamily="34" charset="-120"/>
+              </a:rPr>
+              <a:t>Effort to change the decision</a:t>
+            </a:r>
+            <a:endParaRPr lang="en-US" sz="1200" dirty="0"/>
+          </a:p>
+        </p:txBody>
+      </p:sp>
+      <p:sp>
+        <p:nvSpPr>
+          <p:cNvPr id="6" name="Shape 4"/>
+          <p:cNvSpPr/>
+          <p:nvPr/>
+        </p:nvSpPr>
+        <p:spPr>
+          <a:xfrm>
+            <a:off x="685800" y="4572000"/>
+            <a:ext cx="1188720" cy="457200"/>
           </a:xfrm>
           <a:prstGeom prst="roundRect">
             <a:avLst>
-              <a:gd name="adj" fmla="val 40000"/>
+              <a:gd name="adj" fmla="val 12000"/>
             </a:avLst>
           </a:prstGeom>
           <a:solidFill>
-            <a:srgbClr val="DFE4EA"/>
-          </a:solidFill>
-          <a:ln/>
-        </p:spPr>
-      </p:sp>
-      <p:sp>
-        <p:nvSpPr>
-          <p:cNvPr id="6" name="Text 4"/>
-          <p:cNvSpPr/>
-          <p:nvPr/>
-        </p:nvSpPr>
-        <p:spPr>
-          <a:xfrm>
-            <a:off x="548640" y="2212848"/>
-            <a:ext cx="2377440" cy="310896"/>
+            <a:srgbClr val="2E8B7A"/>
+          </a:solidFill>
+          <a:ln/>
+        </p:spPr>
+      </p:sp>
+      <p:sp>
+        <p:nvSpPr>
+          <p:cNvPr id="7" name="Text 5"/>
+          <p:cNvSpPr/>
+          <p:nvPr/>
+        </p:nvSpPr>
+        <p:spPr>
+          <a:xfrm>
+            <a:off x="548640" y="5102352"/>
+            <a:ext cx="1463040" cy="274320"/>
           </a:xfrm>
           <a:prstGeom prst="rect">
             <a:avLst/>
@@ -12377,7 +12505,7 @@
               <a:buNone/>
             </a:pPr>
             <a:r>
-              <a:rPr lang="en-US" sz="1400" b="1" dirty="0">
+              <a:rPr lang="en-US" sz="1250" b="1" dirty="0">
                 <a:solidFill>
                   <a:srgbClr val="1B2430"/>
                 </a:solidFill>
@@ -12385,22 +12513,22 @@
                 <a:ea typeface="Calibri" pitchFamily="34" charset="-122"/>
                 <a:cs typeface="Calibri" pitchFamily="34" charset="-120"/>
               </a:rPr>
-              <a:t>Usage burn alert</a:t>
-            </a:r>
-            <a:endParaRPr lang="en-US" sz="1400" dirty="0"/>
-          </a:p>
-        </p:txBody>
-      </p:sp>
-      <p:sp>
-        <p:nvSpPr>
-          <p:cNvPr id="7" name="Text 5"/>
-          <p:cNvSpPr/>
-          <p:nvPr/>
-        </p:nvSpPr>
-        <p:spPr>
-          <a:xfrm>
-            <a:off x="548640" y="2542032"/>
-            <a:ext cx="2377440" cy="292608"/>
+              <a:t>Design</a:t>
+            </a:r>
+            <a:endParaRPr lang="en-US" sz="1250" dirty="0"/>
+          </a:p>
+        </p:txBody>
+      </p:sp>
+      <p:sp>
+        <p:nvSpPr>
+          <p:cNvPr id="8" name="Text 6"/>
+          <p:cNvSpPr/>
+          <p:nvPr/>
+        </p:nvSpPr>
+        <p:spPr>
+          <a:xfrm>
+            <a:off x="548640" y="5376672"/>
+            <a:ext cx="1463040" cy="256032"/>
           </a:xfrm>
           <a:prstGeom prst="rect">
             <a:avLst/>
@@ -12416,74 +12544,7 @@
               <a:buNone/>
             </a:pPr>
             <a:r>
-              <a:rPr lang="en-US" sz="1250" b="1" spc="60" kern="0" dirty="0">
-                <a:solidFill>
-                  <a:srgbClr val="B87B18"/>
-                </a:solidFill>
-                <a:latin typeface="Calibri" pitchFamily="34" charset="0"/>
-                <a:ea typeface="Calibri" pitchFamily="34" charset="-122"/>
-                <a:cs typeface="Calibri" pitchFamily="34" charset="-120"/>
-              </a:rPr>
-              <a:t>~10 minutes</a:t>
-            </a:r>
-            <a:endParaRPr lang="en-US" sz="1250" dirty="0"/>
-          </a:p>
-        </p:txBody>
-      </p:sp>
-      <p:sp>
-        <p:nvSpPr>
-          <p:cNvPr id="8" name="Shape 6"/>
-          <p:cNvSpPr/>
-          <p:nvPr/>
-        </p:nvSpPr>
-        <p:spPr>
-          <a:xfrm>
-            <a:off x="1618488" y="3031236"/>
-            <a:ext cx="237744" cy="237744"/>
-          </a:xfrm>
-          <a:prstGeom prst="ellipse">
-            <a:avLst/>
-          </a:prstGeom>
-          <a:solidFill>
-            <a:srgbClr val="E39B2C"/>
-          </a:solidFill>
-          <a:ln w="25400">
-            <a:solidFill>
-              <a:srgbClr val="FFFFFF"/>
-            </a:solidFill>
-            <a:prstDash val="solid"/>
-          </a:ln>
-        </p:spPr>
-      </p:sp>
-      <p:sp>
-        <p:nvSpPr>
-          <p:cNvPr id="9" name="Text 7"/>
-          <p:cNvSpPr/>
-          <p:nvPr/>
-        </p:nvSpPr>
-        <p:spPr>
-          <a:xfrm>
-            <a:off x="548640" y="3401568"/>
-            <a:ext cx="2377440" cy="566928"/>
-          </a:xfrm>
-          <a:prstGeom prst="rect">
-            <a:avLst/>
-          </a:prstGeom>
-          <a:noFill/>
-          <a:ln/>
-        </p:spPr>
-        <p:txBody>
-          <a:bodyPr wrap="square" lIns="0" tIns="0" rIns="0" bIns="0" rtlCol="0" anchor="t"/>
-          <a:lstStyle/>
-          <a:p>
-            <a:pPr algn="ctr" indent="0" marL="0">
-              <a:lnSpc>
-                <a:spcPts val="1600"/>
-              </a:lnSpc>
-              <a:buNone/>
-            </a:pPr>
-            <a:r>
-              <a:rPr lang="en-US" sz="1200" dirty="0">
+              <a:rPr lang="en-US" sz="1150" dirty="0">
                 <a:solidFill>
                   <a:srgbClr val="5C6675"/>
                 </a:solidFill>
@@ -12491,479 +12552,373 @@
                 <a:ea typeface="Calibri" pitchFamily="34" charset="-122"/>
                 <a:cs typeface="Calibri" pitchFamily="34" charset="-120"/>
               </a:rPr>
-              <a:t>Throttle it, or confirm it was intended.</a:t>
-            </a:r>
-            <a:endParaRPr lang="en-US" sz="1200" dirty="0"/>
-          </a:p>
-        </p:txBody>
-      </p:sp>
-      <p:sp>
-        <p:nvSpPr>
-          <p:cNvPr id="10" name="Text 8"/>
-          <p:cNvSpPr/>
-          <p:nvPr/>
-        </p:nvSpPr>
-        <p:spPr>
-          <a:xfrm>
-            <a:off x="3566160" y="2212848"/>
-            <a:ext cx="2377440" cy="310896"/>
-          </a:xfrm>
-          <a:prstGeom prst="rect">
-            <a:avLst/>
-          </a:prstGeom>
-          <a:noFill/>
-          <a:ln/>
-        </p:spPr>
-        <p:txBody>
-          <a:bodyPr wrap="square" lIns="0" tIns="0" rIns="0" bIns="0" rtlCol="0" anchor="ctr"/>
-          <a:lstStyle/>
-          <a:p>
-            <a:pPr algn="ctr" indent="0" marL="0">
-              <a:buNone/>
-            </a:pPr>
-            <a:r>
-              <a:rPr lang="en-US" sz="1400" b="1" dirty="0">
-                <a:solidFill>
-                  <a:srgbClr val="1B2430"/>
-                </a:solidFill>
-                <a:latin typeface="Calibri" pitchFamily="34" charset="0"/>
-                <a:ea typeface="Calibri" pitchFamily="34" charset="-122"/>
-                <a:cs typeface="Calibri" pitchFamily="34" charset="-120"/>
-              </a:rPr>
-              <a:t>Daily spend threshold</a:t>
-            </a:r>
-            <a:endParaRPr lang="en-US" sz="1400" dirty="0"/>
-          </a:p>
-        </p:txBody>
-      </p:sp>
-      <p:sp>
-        <p:nvSpPr>
-          <p:cNvPr id="11" name="Text 9"/>
-          <p:cNvSpPr/>
-          <p:nvPr/>
-        </p:nvSpPr>
-        <p:spPr>
-          <a:xfrm>
-            <a:off x="3566160" y="2542032"/>
-            <a:ext cx="2377440" cy="292608"/>
-          </a:xfrm>
-          <a:prstGeom prst="rect">
-            <a:avLst/>
-          </a:prstGeom>
-          <a:noFill/>
-          <a:ln/>
-        </p:spPr>
-        <p:txBody>
-          <a:bodyPr wrap="square" lIns="0" tIns="0" rIns="0" bIns="0" rtlCol="0" anchor="ctr"/>
-          <a:lstStyle/>
-          <a:p>
-            <a:pPr algn="ctr" indent="0" marL="0">
-              <a:buNone/>
-            </a:pPr>
-            <a:r>
-              <a:rPr lang="en-US" sz="1250" b="1" spc="60" kern="0" dirty="0">
-                <a:solidFill>
-                  <a:srgbClr val="1F6B5C"/>
-                </a:solidFill>
-                <a:latin typeface="Calibri" pitchFamily="34" charset="0"/>
-                <a:ea typeface="Calibri" pitchFamily="34" charset="-122"/>
-                <a:cs typeface="Calibri" pitchFamily="34" charset="-120"/>
-              </a:rPr>
-              <a:t>next morning</a:t>
-            </a:r>
-            <a:endParaRPr lang="en-US" sz="1250" dirty="0"/>
-          </a:p>
-        </p:txBody>
-      </p:sp>
-      <p:sp>
-        <p:nvSpPr>
-          <p:cNvPr id="12" name="Shape 10"/>
-          <p:cNvSpPr/>
-          <p:nvPr/>
-        </p:nvSpPr>
-        <p:spPr>
-          <a:xfrm>
-            <a:off x="4636008" y="3031236"/>
-            <a:ext cx="237744" cy="237744"/>
-          </a:xfrm>
-          <a:prstGeom prst="ellipse">
-            <a:avLst/>
-          </a:prstGeom>
-          <a:solidFill>
-            <a:srgbClr val="2E8B7A"/>
-          </a:solidFill>
-          <a:ln w="25400">
-            <a:solidFill>
-              <a:srgbClr val="FFFFFF"/>
-            </a:solidFill>
-            <a:prstDash val="solid"/>
-          </a:ln>
-        </p:spPr>
-      </p:sp>
-      <p:sp>
-        <p:nvSpPr>
-          <p:cNvPr id="13" name="Text 11"/>
-          <p:cNvSpPr/>
-          <p:nvPr/>
-        </p:nvSpPr>
-        <p:spPr>
-          <a:xfrm>
-            <a:off x="3566160" y="3401568"/>
-            <a:ext cx="2377440" cy="566928"/>
-          </a:xfrm>
-          <a:prstGeom prst="rect">
-            <a:avLst/>
-          </a:prstGeom>
-          <a:noFill/>
-          <a:ln/>
-        </p:spPr>
-        <p:txBody>
-          <a:bodyPr wrap="square" lIns="0" tIns="0" rIns="0" bIns="0" rtlCol="0" anchor="t"/>
-          <a:lstStyle/>
-          <a:p>
-            <a:pPr algn="ctr" indent="0" marL="0">
-              <a:lnSpc>
-                <a:spcPts val="1600"/>
-              </a:lnSpc>
-              <a:buNone/>
-            </a:pPr>
-            <a:r>
-              <a:rPr lang="en-US" sz="1200" dirty="0">
-                <a:solidFill>
-                  <a:srgbClr val="5C6675"/>
-                </a:solidFill>
-                <a:latin typeface="Calibri" pitchFamily="34" charset="0"/>
-                <a:ea typeface="Calibri" pitchFamily="34" charset="-122"/>
-                <a:cs typeface="Calibri" pitchFamily="34" charset="-120"/>
-              </a:rPr>
-              <a:t>One team, one number, one owner to ask.</a:t>
-            </a:r>
-            <a:endParaRPr lang="en-US" sz="1200" dirty="0"/>
-          </a:p>
-        </p:txBody>
-      </p:sp>
-      <p:sp>
-        <p:nvSpPr>
-          <p:cNvPr id="14" name="Text 12"/>
-          <p:cNvSpPr/>
-          <p:nvPr/>
-        </p:nvSpPr>
-        <p:spPr>
-          <a:xfrm>
-            <a:off x="6583680" y="2212848"/>
-            <a:ext cx="2377440" cy="310896"/>
-          </a:xfrm>
-          <a:prstGeom prst="rect">
-            <a:avLst/>
-          </a:prstGeom>
-          <a:noFill/>
-          <a:ln/>
-        </p:spPr>
-        <p:txBody>
-          <a:bodyPr wrap="square" lIns="0" tIns="0" rIns="0" bIns="0" rtlCol="0" anchor="ctr"/>
-          <a:lstStyle/>
-          <a:p>
-            <a:pPr algn="ctr" indent="0" marL="0">
-              <a:buNone/>
-            </a:pPr>
-            <a:r>
-              <a:rPr lang="en-US" sz="1400" b="1" dirty="0">
-                <a:solidFill>
-                  <a:srgbClr val="1B2430"/>
-                </a:solidFill>
-                <a:latin typeface="Calibri" pitchFamily="34" charset="0"/>
-                <a:ea typeface="Calibri" pitchFamily="34" charset="-122"/>
-                <a:cs typeface="Calibri" pitchFamily="34" charset="-120"/>
-              </a:rPr>
-              <a:t>Forecast overrun</a:t>
-            </a:r>
-            <a:endParaRPr lang="en-US" sz="1400" dirty="0"/>
-          </a:p>
-        </p:txBody>
-      </p:sp>
-      <p:sp>
-        <p:nvSpPr>
-          <p:cNvPr id="15" name="Text 13"/>
-          <p:cNvSpPr/>
-          <p:nvPr/>
-        </p:nvSpPr>
-        <p:spPr>
-          <a:xfrm>
-            <a:off x="6583680" y="2542032"/>
-            <a:ext cx="2377440" cy="292608"/>
-          </a:xfrm>
-          <a:prstGeom prst="rect">
-            <a:avLst/>
-          </a:prstGeom>
-          <a:noFill/>
-          <a:ln/>
-        </p:spPr>
-        <p:txBody>
-          <a:bodyPr wrap="square" lIns="0" tIns="0" rIns="0" bIns="0" rtlCol="0" anchor="ctr"/>
-          <a:lstStyle/>
-          <a:p>
-            <a:pPr algn="ctr" indent="0" marL="0">
-              <a:buNone/>
-            </a:pPr>
-            <a:r>
-              <a:rPr lang="en-US" sz="1250" b="1" spc="60" kern="0" dirty="0">
-                <a:solidFill>
-                  <a:srgbClr val="1F6B5C"/>
-                </a:solidFill>
-                <a:latin typeface="Calibri" pitchFamily="34" charset="0"/>
-                <a:ea typeface="Calibri" pitchFamily="34" charset="-122"/>
-                <a:cs typeface="Calibri" pitchFamily="34" charset="-120"/>
-              </a:rPr>
-              <a:t>~2 weeks out</a:t>
-            </a:r>
-            <a:endParaRPr lang="en-US" sz="1250" dirty="0"/>
-          </a:p>
-        </p:txBody>
-      </p:sp>
-      <p:sp>
-        <p:nvSpPr>
-          <p:cNvPr id="16" name="Shape 14"/>
-          <p:cNvSpPr/>
-          <p:nvPr/>
-        </p:nvSpPr>
-        <p:spPr>
-          <a:xfrm>
-            <a:off x="7653528" y="3031236"/>
-            <a:ext cx="237744" cy="237744"/>
-          </a:xfrm>
-          <a:prstGeom prst="ellipse">
-            <a:avLst/>
-          </a:prstGeom>
-          <a:solidFill>
-            <a:srgbClr val="2E8B7A"/>
-          </a:solidFill>
-          <a:ln w="25400">
-            <a:solidFill>
-              <a:srgbClr val="FFFFFF"/>
-            </a:solidFill>
-            <a:prstDash val="solid"/>
-          </a:ln>
-        </p:spPr>
-      </p:sp>
-      <p:sp>
-        <p:nvSpPr>
-          <p:cNvPr id="17" name="Text 15"/>
-          <p:cNvSpPr/>
-          <p:nvPr/>
-        </p:nvSpPr>
-        <p:spPr>
-          <a:xfrm>
-            <a:off x="6583680" y="3401568"/>
-            <a:ext cx="2377440" cy="566928"/>
-          </a:xfrm>
-          <a:prstGeom prst="rect">
-            <a:avLst/>
-          </a:prstGeom>
-          <a:noFill/>
-          <a:ln/>
-        </p:spPr>
-        <p:txBody>
-          <a:bodyPr wrap="square" lIns="0" tIns="0" rIns="0" bIns="0" rtlCol="0" anchor="t"/>
-          <a:lstStyle/>
-          <a:p>
-            <a:pPr algn="ctr" indent="0" marL="0">
-              <a:lnSpc>
-                <a:spcPts val="1600"/>
-              </a:lnSpc>
-              <a:buNone/>
-            </a:pPr>
-            <a:r>
-              <a:rPr lang="en-US" sz="1200" dirty="0">
-                <a:solidFill>
-                  <a:srgbClr val="5C6675"/>
-                </a:solidFill>
-                <a:latin typeface="Calibri" pitchFamily="34" charset="0"/>
-                <a:ea typeface="Calibri" pitchFamily="34" charset="-122"/>
-                <a:cs typeface="Calibri" pitchFamily="34" charset="-120"/>
-              </a:rPr>
-              <a:t>Still time to change the month's outcome.</a:t>
-            </a:r>
-            <a:endParaRPr lang="en-US" sz="1200" dirty="0"/>
-          </a:p>
-        </p:txBody>
-      </p:sp>
-      <p:sp>
-        <p:nvSpPr>
-          <p:cNvPr id="18" name="Text 16"/>
-          <p:cNvSpPr/>
-          <p:nvPr/>
-        </p:nvSpPr>
-        <p:spPr>
-          <a:xfrm>
-            <a:off x="9262872" y="2212848"/>
-            <a:ext cx="2377440" cy="310896"/>
-          </a:xfrm>
-          <a:prstGeom prst="rect">
-            <a:avLst/>
-          </a:prstGeom>
-          <a:noFill/>
-          <a:ln/>
-        </p:spPr>
-        <p:txBody>
-          <a:bodyPr wrap="square" lIns="0" tIns="0" rIns="0" bIns="0" rtlCol="0" anchor="ctr"/>
-          <a:lstStyle/>
-          <a:p>
-            <a:pPr algn="ctr" indent="0" marL="0">
-              <a:buNone/>
-            </a:pPr>
-            <a:r>
-              <a:rPr lang="en-US" sz="1400" b="1" dirty="0">
-                <a:solidFill>
-                  <a:srgbClr val="5C6675"/>
-                </a:solidFill>
-                <a:latin typeface="Calibri" pitchFamily="34" charset="0"/>
-                <a:ea typeface="Calibri" pitchFamily="34" charset="-122"/>
-                <a:cs typeface="Calibri" pitchFamily="34" charset="-120"/>
-              </a:rPr>
-              <a:t>The invoice</a:t>
-            </a:r>
-            <a:endParaRPr lang="en-US" sz="1400" dirty="0"/>
-          </a:p>
-        </p:txBody>
-      </p:sp>
-      <p:sp>
-        <p:nvSpPr>
-          <p:cNvPr id="19" name="Text 17"/>
-          <p:cNvSpPr/>
-          <p:nvPr/>
-        </p:nvSpPr>
-        <p:spPr>
-          <a:xfrm>
-            <a:off x="9262872" y="2542032"/>
-            <a:ext cx="2377440" cy="292608"/>
-          </a:xfrm>
-          <a:prstGeom prst="rect">
-            <a:avLst/>
-          </a:prstGeom>
-          <a:noFill/>
-          <a:ln/>
-        </p:spPr>
-        <p:txBody>
-          <a:bodyPr wrap="square" lIns="0" tIns="0" rIns="0" bIns="0" rtlCol="0" anchor="ctr"/>
-          <a:lstStyle/>
-          <a:p>
-            <a:pPr algn="ctr" indent="0" marL="0">
-              <a:buNone/>
-            </a:pPr>
-            <a:r>
-              <a:rPr lang="en-US" sz="1250" b="1" spc="60" kern="0" dirty="0">
-                <a:solidFill>
-                  <a:srgbClr val="5C6675"/>
-                </a:solidFill>
-                <a:latin typeface="Calibri" pitchFamily="34" charset="0"/>
-                <a:ea typeface="Calibri" pitchFamily="34" charset="-122"/>
-                <a:cs typeface="Calibri" pitchFamily="34" charset="-120"/>
-              </a:rPr>
-              <a:t>30–45 days later</a:t>
-            </a:r>
-            <a:endParaRPr lang="en-US" sz="1250" dirty="0"/>
-          </a:p>
-        </p:txBody>
-      </p:sp>
-      <p:sp>
-        <p:nvSpPr>
-          <p:cNvPr id="20" name="Shape 18"/>
-          <p:cNvSpPr/>
-          <p:nvPr/>
-        </p:nvSpPr>
-        <p:spPr>
-          <a:xfrm>
-            <a:off x="10332720" y="3031236"/>
-            <a:ext cx="237744" cy="237744"/>
-          </a:xfrm>
-          <a:prstGeom prst="ellipse">
-            <a:avLst/>
-          </a:prstGeom>
-          <a:solidFill>
-            <a:srgbClr val="AEB8C4"/>
-          </a:solidFill>
-          <a:ln w="25400">
-            <a:solidFill>
-              <a:srgbClr val="FFFFFF"/>
-            </a:solidFill>
-            <a:prstDash val="solid"/>
-          </a:ln>
-        </p:spPr>
-      </p:sp>
-      <p:sp>
-        <p:nvSpPr>
-          <p:cNvPr id="21" name="Text 19"/>
-          <p:cNvSpPr/>
-          <p:nvPr/>
-        </p:nvSpPr>
-        <p:spPr>
-          <a:xfrm>
-            <a:off x="9262872" y="3401568"/>
-            <a:ext cx="2377440" cy="566928"/>
-          </a:xfrm>
-          <a:prstGeom prst="rect">
-            <a:avLst/>
-          </a:prstGeom>
-          <a:noFill/>
-          <a:ln/>
-        </p:spPr>
-        <p:txBody>
-          <a:bodyPr wrap="square" lIns="0" tIns="0" rIns="0" bIns="0" rtlCol="0" anchor="t"/>
-          <a:lstStyle/>
-          <a:p>
-            <a:pPr algn="ctr" indent="0" marL="0">
-              <a:lnSpc>
-                <a:spcPts val="1600"/>
-              </a:lnSpc>
-              <a:buNone/>
-            </a:pPr>
-            <a:r>
-              <a:rPr lang="en-US" sz="1200" dirty="0">
-                <a:solidFill>
-                  <a:srgbClr val="5C6675"/>
-                </a:solidFill>
-                <a:latin typeface="Calibri" pitchFamily="34" charset="0"/>
-                <a:ea typeface="Calibri" pitchFamily="34" charset="-122"/>
-                <a:cs typeface="Calibri" pitchFamily="34" charset="-120"/>
-              </a:rPr>
-              <a:t>Nothing left to decide. Only to explain.</a:t>
-            </a:r>
-            <a:endParaRPr lang="en-US" sz="1200" dirty="0"/>
-          </a:p>
-        </p:txBody>
-      </p:sp>
-      <p:sp>
-        <p:nvSpPr>
-          <p:cNvPr id="22" name="Shape 20"/>
-          <p:cNvSpPr/>
-          <p:nvPr/>
-        </p:nvSpPr>
-        <p:spPr>
-          <a:xfrm>
-            <a:off x="548640" y="4297680"/>
-            <a:ext cx="6675120" cy="2011680"/>
+              <a:t>a conversation</a:t>
+            </a:r>
+            <a:endParaRPr lang="en-US" sz="1150" dirty="0"/>
+          </a:p>
+        </p:txBody>
+      </p:sp>
+      <p:sp>
+        <p:nvSpPr>
+          <p:cNvPr id="9" name="Shape 7"/>
+          <p:cNvSpPr/>
+          <p:nvPr/>
+        </p:nvSpPr>
+        <p:spPr>
+          <a:xfrm>
+            <a:off x="2148840" y="4114800"/>
+            <a:ext cx="1188720" cy="914400"/>
           </a:xfrm>
           <a:prstGeom prst="roundRect">
             <a:avLst>
-              <a:gd name="adj" fmla="val 4091"/>
+              <a:gd name="adj" fmla="val 6000"/>
             </a:avLst>
           </a:prstGeom>
           <a:solidFill>
-            <a:srgbClr val="F1F3F6"/>
-          </a:solidFill>
-          <a:ln/>
-        </p:spPr>
-      </p:sp>
-      <p:sp>
-        <p:nvSpPr>
-          <p:cNvPr id="23" name="Text 21"/>
-          <p:cNvSpPr/>
-          <p:nvPr/>
-        </p:nvSpPr>
-        <p:spPr>
-          <a:xfrm>
-            <a:off x="877824" y="4443984"/>
-            <a:ext cx="3657600" cy="292608"/>
+            <a:srgbClr val="2E8B7A"/>
+          </a:solidFill>
+          <a:ln/>
+        </p:spPr>
+      </p:sp>
+      <p:sp>
+        <p:nvSpPr>
+          <p:cNvPr id="10" name="Text 8"/>
+          <p:cNvSpPr/>
+          <p:nvPr/>
+        </p:nvSpPr>
+        <p:spPr>
+          <a:xfrm>
+            <a:off x="2011680" y="5102352"/>
+            <a:ext cx="1463040" cy="274320"/>
+          </a:xfrm>
+          <a:prstGeom prst="rect">
+            <a:avLst/>
+          </a:prstGeom>
+          <a:noFill/>
+          <a:ln/>
+        </p:spPr>
+        <p:txBody>
+          <a:bodyPr wrap="square" lIns="0" tIns="0" rIns="0" bIns="0" rtlCol="0" anchor="ctr"/>
+          <a:lstStyle/>
+          <a:p>
+            <a:pPr algn="ctr" indent="0" marL="0">
+              <a:buNone/>
+            </a:pPr>
+            <a:r>
+              <a:rPr lang="en-US" sz="1250" b="1" dirty="0">
+                <a:solidFill>
+                  <a:srgbClr val="1B2430"/>
+                </a:solidFill>
+                <a:latin typeface="Calibri" pitchFamily="34" charset="0"/>
+                <a:ea typeface="Calibri" pitchFamily="34" charset="-122"/>
+                <a:cs typeface="Calibri" pitchFamily="34" charset="-120"/>
+              </a:rPr>
+              <a:t>Pull request</a:t>
+            </a:r>
+            <a:endParaRPr lang="en-US" sz="1250" dirty="0"/>
+          </a:p>
+        </p:txBody>
+      </p:sp>
+      <p:sp>
+        <p:nvSpPr>
+          <p:cNvPr id="11" name="Text 9"/>
+          <p:cNvSpPr/>
+          <p:nvPr/>
+        </p:nvSpPr>
+        <p:spPr>
+          <a:xfrm>
+            <a:off x="2011680" y="5376672"/>
+            <a:ext cx="1463040" cy="256032"/>
+          </a:xfrm>
+          <a:prstGeom prst="rect">
+            <a:avLst/>
+          </a:prstGeom>
+          <a:noFill/>
+          <a:ln/>
+        </p:spPr>
+        <p:txBody>
+          <a:bodyPr wrap="square" lIns="0" tIns="0" rIns="0" bIns="0" rtlCol="0" anchor="ctr"/>
+          <a:lstStyle/>
+          <a:p>
+            <a:pPr algn="ctr" indent="0" marL="0">
+              <a:buNone/>
+            </a:pPr>
+            <a:r>
+              <a:rPr lang="en-US" sz="1150" dirty="0">
+                <a:solidFill>
+                  <a:srgbClr val="5C6675"/>
+                </a:solidFill>
+                <a:latin typeface="Calibri" pitchFamily="34" charset="0"/>
+                <a:ea typeface="Calibri" pitchFamily="34" charset="-122"/>
+                <a:cs typeface="Calibri" pitchFamily="34" charset="-120"/>
+              </a:rPr>
+              <a:t>an edit</a:t>
+            </a:r>
+            <a:endParaRPr lang="en-US" sz="1150" dirty="0"/>
+          </a:p>
+        </p:txBody>
+      </p:sp>
+      <p:sp>
+        <p:nvSpPr>
+          <p:cNvPr id="12" name="Shape 10"/>
+          <p:cNvSpPr/>
+          <p:nvPr/>
+        </p:nvSpPr>
+        <p:spPr>
+          <a:xfrm>
+            <a:off x="3611880" y="3337560"/>
+            <a:ext cx="1188720" cy="1691640"/>
+          </a:xfrm>
+          <a:prstGeom prst="roundRect">
+            <a:avLst>
+              <a:gd name="adj" fmla="val 4615"/>
+            </a:avLst>
+          </a:prstGeom>
+          <a:solidFill>
+            <a:srgbClr val="E39B2C"/>
+          </a:solidFill>
+          <a:ln/>
+        </p:spPr>
+      </p:sp>
+      <p:sp>
+        <p:nvSpPr>
+          <p:cNvPr id="13" name="Text 11"/>
+          <p:cNvSpPr/>
+          <p:nvPr/>
+        </p:nvSpPr>
+        <p:spPr>
+          <a:xfrm>
+            <a:off x="3474720" y="5102352"/>
+            <a:ext cx="1463040" cy="274320"/>
+          </a:xfrm>
+          <a:prstGeom prst="rect">
+            <a:avLst/>
+          </a:prstGeom>
+          <a:noFill/>
+          <a:ln/>
+        </p:spPr>
+        <p:txBody>
+          <a:bodyPr wrap="square" lIns="0" tIns="0" rIns="0" bIns="0" rtlCol="0" anchor="ctr"/>
+          <a:lstStyle/>
+          <a:p>
+            <a:pPr algn="ctr" indent="0" marL="0">
+              <a:buNone/>
+            </a:pPr>
+            <a:r>
+              <a:rPr lang="en-US" sz="1250" b="1" dirty="0">
+                <a:solidFill>
+                  <a:srgbClr val="1B2430"/>
+                </a:solidFill>
+                <a:latin typeface="Calibri" pitchFamily="34" charset="0"/>
+                <a:ea typeface="Calibri" pitchFamily="34" charset="-122"/>
+                <a:cs typeface="Calibri" pitchFamily="34" charset="-120"/>
+              </a:rPr>
+              <a:t>Deployed</a:t>
+            </a:r>
+            <a:endParaRPr lang="en-US" sz="1250" dirty="0"/>
+          </a:p>
+        </p:txBody>
+      </p:sp>
+      <p:sp>
+        <p:nvSpPr>
+          <p:cNvPr id="14" name="Text 12"/>
+          <p:cNvSpPr/>
+          <p:nvPr/>
+        </p:nvSpPr>
+        <p:spPr>
+          <a:xfrm>
+            <a:off x="3474720" y="5376672"/>
+            <a:ext cx="1463040" cy="256032"/>
+          </a:xfrm>
+          <a:prstGeom prst="rect">
+            <a:avLst/>
+          </a:prstGeom>
+          <a:noFill/>
+          <a:ln/>
+        </p:spPr>
+        <p:txBody>
+          <a:bodyPr wrap="square" lIns="0" tIns="0" rIns="0" bIns="0" rtlCol="0" anchor="ctr"/>
+          <a:lstStyle/>
+          <a:p>
+            <a:pPr algn="ctr" indent="0" marL="0">
+              <a:buNone/>
+            </a:pPr>
+            <a:r>
+              <a:rPr lang="en-US" sz="1150" dirty="0">
+                <a:solidFill>
+                  <a:srgbClr val="5C6675"/>
+                </a:solidFill>
+                <a:latin typeface="Calibri" pitchFamily="34" charset="0"/>
+                <a:ea typeface="Calibri" pitchFamily="34" charset="-122"/>
+                <a:cs typeface="Calibri" pitchFamily="34" charset="-120"/>
+              </a:rPr>
+              <a:t>a migration</a:t>
+            </a:r>
+            <a:endParaRPr lang="en-US" sz="1150" dirty="0"/>
+          </a:p>
+        </p:txBody>
+      </p:sp>
+      <p:sp>
+        <p:nvSpPr>
+          <p:cNvPr id="15" name="Shape 13"/>
+          <p:cNvSpPr/>
+          <p:nvPr/>
+        </p:nvSpPr>
+        <p:spPr>
+          <a:xfrm>
+            <a:off x="5074920" y="2651760"/>
+            <a:ext cx="1188720" cy="2377440"/>
+          </a:xfrm>
+          <a:prstGeom prst="roundRect">
+            <a:avLst>
+              <a:gd name="adj" fmla="val 4615"/>
+            </a:avLst>
+          </a:prstGeom>
+          <a:solidFill>
+            <a:srgbClr val="A6432F"/>
+          </a:solidFill>
+          <a:ln/>
+        </p:spPr>
+      </p:sp>
+      <p:sp>
+        <p:nvSpPr>
+          <p:cNvPr id="16" name="Text 14"/>
+          <p:cNvSpPr/>
+          <p:nvPr/>
+        </p:nvSpPr>
+        <p:spPr>
+          <a:xfrm>
+            <a:off x="4937760" y="5102352"/>
+            <a:ext cx="1463040" cy="274320"/>
+          </a:xfrm>
+          <a:prstGeom prst="rect">
+            <a:avLst/>
+          </a:prstGeom>
+          <a:noFill/>
+          <a:ln/>
+        </p:spPr>
+        <p:txBody>
+          <a:bodyPr wrap="square" lIns="0" tIns="0" rIns="0" bIns="0" rtlCol="0" anchor="ctr"/>
+          <a:lstStyle/>
+          <a:p>
+            <a:pPr algn="ctr" indent="0" marL="0">
+              <a:buNone/>
+            </a:pPr>
+            <a:r>
+              <a:rPr lang="en-US" sz="1250" b="1" dirty="0">
+                <a:solidFill>
+                  <a:srgbClr val="1B2430"/>
+                </a:solidFill>
+                <a:latin typeface="Calibri" pitchFamily="34" charset="0"/>
+                <a:ea typeface="Calibri" pitchFamily="34" charset="-122"/>
+                <a:cs typeface="Calibri" pitchFamily="34" charset="-120"/>
+              </a:rPr>
+              <a:t>Invoiced</a:t>
+            </a:r>
+            <a:endParaRPr lang="en-US" sz="1250" dirty="0"/>
+          </a:p>
+        </p:txBody>
+      </p:sp>
+      <p:sp>
+        <p:nvSpPr>
+          <p:cNvPr id="17" name="Text 15"/>
+          <p:cNvSpPr/>
+          <p:nvPr/>
+        </p:nvSpPr>
+        <p:spPr>
+          <a:xfrm>
+            <a:off x="4937760" y="5376672"/>
+            <a:ext cx="1463040" cy="256032"/>
+          </a:xfrm>
+          <a:prstGeom prst="rect">
+            <a:avLst/>
+          </a:prstGeom>
+          <a:noFill/>
+          <a:ln/>
+        </p:spPr>
+        <p:txBody>
+          <a:bodyPr wrap="square" lIns="0" tIns="0" rIns="0" bIns="0" rtlCol="0" anchor="ctr"/>
+          <a:lstStyle/>
+          <a:p>
+            <a:pPr algn="ctr" indent="0" marL="0">
+              <a:buNone/>
+            </a:pPr>
+            <a:r>
+              <a:rPr lang="en-US" sz="1150" dirty="0">
+                <a:solidFill>
+                  <a:srgbClr val="5C6675"/>
+                </a:solidFill>
+                <a:latin typeface="Calibri" pitchFamily="34" charset="0"/>
+                <a:ea typeface="Calibri" pitchFamily="34" charset="-122"/>
+                <a:cs typeface="Calibri" pitchFamily="34" charset="-120"/>
+              </a:rPr>
+              <a:t>a negotiation</a:t>
+            </a:r>
+            <a:endParaRPr lang="en-US" sz="1150" dirty="0"/>
+          </a:p>
+        </p:txBody>
+      </p:sp>
+      <p:sp>
+        <p:nvSpPr>
+          <p:cNvPr id="18" name="Shape 16"/>
+          <p:cNvSpPr/>
+          <p:nvPr/>
+        </p:nvSpPr>
+        <p:spPr>
+          <a:xfrm>
+            <a:off x="548640" y="5029200"/>
+            <a:ext cx="5989320" cy="36576"/>
+          </a:xfrm>
+          <a:prstGeom prst="roundRect">
+            <a:avLst>
+              <a:gd name="adj" fmla="val 50000"/>
+            </a:avLst>
+          </a:prstGeom>
+          <a:solidFill>
+            <a:srgbClr val="DFE4EA"/>
+          </a:solidFill>
+          <a:ln/>
+        </p:spPr>
+      </p:sp>
+      <p:sp>
+        <p:nvSpPr>
+          <p:cNvPr id="19" name="Shape 17"/>
+          <p:cNvSpPr/>
+          <p:nvPr/>
+        </p:nvSpPr>
+        <p:spPr>
+          <a:xfrm>
+            <a:off x="6858000" y="2084832"/>
+            <a:ext cx="4782312" cy="3602736"/>
+          </a:xfrm>
+          <a:prstGeom prst="roundRect">
+            <a:avLst>
+              <a:gd name="adj" fmla="val 2284"/>
+            </a:avLst>
+          </a:prstGeom>
+          <a:solidFill>
+            <a:srgbClr val="1F2936"/>
+          </a:solidFill>
+          <a:ln/>
+          <a:effectLst>
+            <a:outerShdw sx="100000" sy="100000" kx="0" ky="0" algn="bl" rotWithShape="0" blurRad="127000" dist="25400" dir="5400000">
+              <a:srgbClr val="8C99A8">
+                <a:alpha val="16000"/>
+              </a:srgbClr>
+            </a:outerShdw>
+          </a:effectLst>
+        </p:spPr>
+      </p:sp>
+      <p:sp>
+        <p:nvSpPr>
+          <p:cNvPr id="20" name="Text 18"/>
+          <p:cNvSpPr/>
+          <p:nvPr/>
+        </p:nvSpPr>
+        <p:spPr>
+          <a:xfrm>
+            <a:off x="7168896" y="2267712"/>
+            <a:ext cx="4114800" cy="292608"/>
           </a:xfrm>
           <a:prstGeom prst="rect">
             <a:avLst/>
@@ -12981,13 +12936,13 @@
             <a:r>
               <a:rPr lang="en-US" sz="1200" b="1" spc="180" kern="0" dirty="0">
                 <a:solidFill>
-                  <a:srgbClr val="5C6675"/>
-                </a:solidFill>
-                <a:latin typeface="Calibri" pitchFamily="34" charset="0"/>
-                <a:ea typeface="Calibri" pitchFamily="34" charset="-122"/>
-                <a:cs typeface="Calibri" pitchFamily="34" charset="-120"/>
-              </a:rPr>
-              <a:t>What has to be true</a:t>
+                  <a:srgbClr val="E39B2C"/>
+                </a:solidFill>
+                <a:latin typeface="Calibri" pitchFamily="34" charset="0"/>
+                <a:ea typeface="Calibri" pitchFamily="34" charset="-122"/>
+                <a:cs typeface="Calibri" pitchFamily="34" charset="-120"/>
+              </a:rPr>
+              <a:t>Where cost enters the workflow</a:t>
             </a:r>
             <a:endParaRPr lang="en-US" sz="1200" dirty="0"/>
           </a:p>
@@ -12995,27 +12950,27 @@
       </p:sp>
       <p:sp>
         <p:nvSpPr>
-          <p:cNvPr id="24" name="Shape 22"/>
-          <p:cNvSpPr/>
-          <p:nvPr/>
-        </p:nvSpPr>
-        <p:spPr>
-          <a:xfrm>
-            <a:off x="877824" y="4809744"/>
-            <a:ext cx="274320" cy="274320"/>
+          <p:cNvPr id="21" name="Shape 19"/>
+          <p:cNvSpPr/>
+          <p:nvPr/>
+        </p:nvSpPr>
+        <p:spPr>
+          <a:xfrm>
+            <a:off x="7168896" y="2743200"/>
+            <a:ext cx="420624" cy="420624"/>
           </a:xfrm>
           <a:prstGeom prst="ellipse">
             <a:avLst/>
           </a:prstGeom>
           <a:solidFill>
-            <a:srgbClr val="FFFFFF"/>
+            <a:srgbClr val="2E3A48"/>
           </a:solidFill>
           <a:ln/>
         </p:spPr>
       </p:sp>
       <p:pic>
         <p:nvPicPr>
-          <p:cNvPr id="25" name="Image 0" descr="preencoded.png">    </p:cNvPr>
+          <p:cNvPr id="22" name="Image 0" descr="preencoded.png">    </p:cNvPr>
           <p:cNvPicPr>
             <a:picLocks noChangeAspect="1"/>
           </p:cNvPicPr>
@@ -13029,8 +12984,8 @@
         </p:blipFill>
         <p:spPr>
           <a:xfrm>
-            <a:off x="946404" y="4878324"/>
-            <a:ext cx="137160" cy="137160"/>
+            <a:off x="7274052" y="2848356"/>
+            <a:ext cx="210312" cy="210312"/>
           </a:xfrm>
           <a:prstGeom prst="rect">
             <a:avLst/>
@@ -13039,66 +12994,89 @@
       </p:pic>
       <p:sp>
         <p:nvSpPr>
-          <p:cNvPr id="26" name="Text 23"/>
-          <p:cNvSpPr/>
-          <p:nvPr/>
-        </p:nvSpPr>
-        <p:spPr>
-          <a:xfrm>
-            <a:off x="1298448" y="4754880"/>
-            <a:ext cx="5669280" cy="384048"/>
-          </a:xfrm>
-          <a:prstGeom prst="rect">
-            <a:avLst/>
-          </a:prstGeom>
-          <a:noFill/>
-          <a:ln/>
-        </p:spPr>
-        <p:txBody>
-          <a:bodyPr wrap="square" lIns="0" tIns="0" rIns="0" bIns="0" rtlCol="0" anchor="ctr"/>
-          <a:lstStyle/>
-          <a:p>
-            <a:pPr indent="0" marL="0">
-              <a:buNone/>
-            </a:pPr>
-            <a:r>
-              <a:rPr lang="en-US" sz="1300" dirty="0">
-                <a:solidFill>
-                  <a:srgbClr val="1B2430"/>
-                </a:solidFill>
-                <a:latin typeface="Calibri" pitchFamily="34" charset="0"/>
-                <a:ea typeface="Calibri" pitchFamily="34" charset="-122"/>
-                <a:cs typeface="Calibri" pitchFamily="34" charset="-120"/>
-              </a:rPr>
-              <a:t>Protective alerts run on usage data, not on billing data</a:t>
-            </a:r>
-            <a:endParaRPr lang="en-US" sz="1300" dirty="0"/>
-          </a:p>
-        </p:txBody>
-      </p:sp>
-      <p:sp>
-        <p:nvSpPr>
-          <p:cNvPr id="27" name="Shape 24"/>
-          <p:cNvSpPr/>
-          <p:nvPr/>
-        </p:nvSpPr>
-        <p:spPr>
-          <a:xfrm>
-            <a:off x="877824" y="5193792"/>
-            <a:ext cx="274320" cy="274320"/>
+          <p:cNvPr id="23" name="Text 20"/>
+          <p:cNvSpPr/>
+          <p:nvPr/>
+        </p:nvSpPr>
+        <p:spPr>
+          <a:xfrm>
+            <a:off x="7735824" y="2670048"/>
+            <a:ext cx="3602736" cy="914400"/>
+          </a:xfrm>
+          <a:prstGeom prst="rect">
+            <a:avLst/>
+          </a:prstGeom>
+          <a:noFill/>
+          <a:ln/>
+        </p:spPr>
+        <p:txBody>
+          <a:bodyPr wrap="square" lIns="0" tIns="0" rIns="0" bIns="0" rtlCol="0" anchor="ctr"/>
+          <a:lstStyle/>
+          <a:p>
+            <a:pPr indent="0" marL="0">
+              <a:lnSpc>
+                <a:spcPts val="1600"/>
+              </a:lnSpc>
+              <a:buNone/>
+            </a:pPr>
+            <a:r>
+              <a:rPr lang="en-US" sz="1350" b="1" dirty="0">
+                <a:solidFill>
+                  <a:srgbClr val="FFFFFF"/>
+                </a:solidFill>
+                <a:latin typeface="Calibri" pitchFamily="34" charset="0"/>
+                <a:ea typeface="Calibri" pitchFamily="34" charset="-122"/>
+                <a:cs typeface="Calibri" pitchFamily="34" charset="-120"/>
+              </a:rPr>
+              <a:t>Architecture review</a:t>
+            </a:r>
+            <a:endParaRPr lang="en-US" sz="1350" dirty="0"/>
+          </a:p>
+          <a:p>
+            <a:pPr indent="0" marL="0">
+              <a:lnSpc>
+                <a:spcPts val="1600"/>
+              </a:lnSpc>
+              <a:buNone/>
+            </a:pPr>
+            <a:r>
+              <a:rPr lang="en-US" sz="1200" dirty="0">
+                <a:solidFill>
+                  <a:srgbClr val="9EABBA"/>
+                </a:solidFill>
+                <a:latin typeface="Calibri" pitchFamily="34" charset="0"/>
+                <a:ea typeface="Calibri" pitchFamily="34" charset="-122"/>
+                <a:cs typeface="Calibri" pitchFamily="34" charset="-120"/>
+              </a:rPr>
+              <a:t>Price two or three options before choosing one. Multi-AZ or single, this SKU or that.</a:t>
+            </a:r>
+            <a:endParaRPr lang="en-US" sz="1350" dirty="0"/>
+          </a:p>
+        </p:txBody>
+      </p:sp>
+      <p:sp>
+        <p:nvSpPr>
+          <p:cNvPr id="24" name="Shape 21"/>
+          <p:cNvSpPr/>
+          <p:nvPr/>
+        </p:nvSpPr>
+        <p:spPr>
+          <a:xfrm>
+            <a:off x="7168896" y="3730752"/>
+            <a:ext cx="420624" cy="420624"/>
           </a:xfrm>
           <a:prstGeom prst="ellipse">
             <a:avLst/>
           </a:prstGeom>
           <a:solidFill>
-            <a:srgbClr val="FFFFFF"/>
+            <a:srgbClr val="2E3A48"/>
           </a:solidFill>
           <a:ln/>
         </p:spPr>
       </p:sp>
       <p:pic>
         <p:nvPicPr>
-          <p:cNvPr id="28" name="Image 1" descr="preencoded.png">    </p:cNvPr>
+          <p:cNvPr id="25" name="Image 1" descr="preencoded.png">    </p:cNvPr>
           <p:cNvPicPr>
             <a:picLocks noChangeAspect="1"/>
           </p:cNvPicPr>
@@ -13112,8 +13090,8 @@
         </p:blipFill>
         <p:spPr>
           <a:xfrm>
-            <a:off x="946404" y="5262372"/>
-            <a:ext cx="137160" cy="137160"/>
+            <a:off x="7274052" y="3835908"/>
+            <a:ext cx="210312" cy="210312"/>
           </a:xfrm>
           <a:prstGeom prst="rect">
             <a:avLst/>
@@ -13122,66 +13100,89 @@
       </p:pic>
       <p:sp>
         <p:nvSpPr>
-          <p:cNvPr id="29" name="Text 25"/>
-          <p:cNvSpPr/>
-          <p:nvPr/>
-        </p:nvSpPr>
-        <p:spPr>
-          <a:xfrm>
-            <a:off x="1298448" y="5138928"/>
-            <a:ext cx="5669280" cy="384048"/>
-          </a:xfrm>
-          <a:prstGeom prst="rect">
-            <a:avLst/>
-          </a:prstGeom>
-          <a:noFill/>
-          <a:ln/>
-        </p:spPr>
-        <p:txBody>
-          <a:bodyPr wrap="square" lIns="0" tIns="0" rIns="0" bIns="0" rtlCol="0" anchor="ctr"/>
-          <a:lstStyle/>
-          <a:p>
-            <a:pPr indent="0" marL="0">
-              <a:buNone/>
-            </a:pPr>
-            <a:r>
-              <a:rPr lang="en-US" sz="1300" dirty="0">
-                <a:solidFill>
-                  <a:srgbClr val="1B2430"/>
-                </a:solidFill>
-                <a:latin typeface="Calibri" pitchFamily="34" charset="0"/>
-                <a:ea typeface="Calibri" pitchFamily="34" charset="-122"/>
-                <a:cs typeface="Calibri" pitchFamily="34" charset="-120"/>
-              </a:rPr>
-              <a:t>Every alert has a named owner to route to</a:t>
-            </a:r>
-            <a:endParaRPr lang="en-US" sz="1300" dirty="0"/>
-          </a:p>
-        </p:txBody>
-      </p:sp>
-      <p:sp>
-        <p:nvSpPr>
-          <p:cNvPr id="30" name="Shape 26"/>
-          <p:cNvSpPr/>
-          <p:nvPr/>
-        </p:nvSpPr>
-        <p:spPr>
-          <a:xfrm>
-            <a:off x="877824" y="5577840"/>
-            <a:ext cx="274320" cy="274320"/>
+          <p:cNvPr id="26" name="Text 22"/>
+          <p:cNvSpPr/>
+          <p:nvPr/>
+        </p:nvSpPr>
+        <p:spPr>
+          <a:xfrm>
+            <a:off x="7735824" y="3657600"/>
+            <a:ext cx="3602736" cy="914400"/>
+          </a:xfrm>
+          <a:prstGeom prst="rect">
+            <a:avLst/>
+          </a:prstGeom>
+          <a:noFill/>
+          <a:ln/>
+        </p:spPr>
+        <p:txBody>
+          <a:bodyPr wrap="square" lIns="0" tIns="0" rIns="0" bIns="0" rtlCol="0" anchor="ctr"/>
+          <a:lstStyle/>
+          <a:p>
+            <a:pPr indent="0" marL="0">
+              <a:lnSpc>
+                <a:spcPts val="1600"/>
+              </a:lnSpc>
+              <a:buNone/>
+            </a:pPr>
+            <a:r>
+              <a:rPr lang="en-US" sz="1350" b="1" dirty="0">
+                <a:solidFill>
+                  <a:srgbClr val="FFFFFF"/>
+                </a:solidFill>
+                <a:latin typeface="Calibri" pitchFamily="34" charset="0"/>
+                <a:ea typeface="Calibri" pitchFamily="34" charset="-122"/>
+                <a:cs typeface="Calibri" pitchFamily="34" charset="-120"/>
+              </a:rPr>
+              <a:t>Cost diff on the pull request</a:t>
+            </a:r>
+            <a:endParaRPr lang="en-US" sz="1350" dirty="0"/>
+          </a:p>
+          <a:p>
+            <a:pPr indent="0" marL="0">
+              <a:lnSpc>
+                <a:spcPts val="1600"/>
+              </a:lnSpc>
+              <a:buNone/>
+            </a:pPr>
+            <a:r>
+              <a:rPr lang="en-US" sz="1200" dirty="0">
+                <a:solidFill>
+                  <a:srgbClr val="9EABBA"/>
+                </a:solidFill>
+                <a:latin typeface="Calibri" pitchFamily="34" charset="0"/>
+                <a:ea typeface="Calibri" pitchFamily="34" charset="-122"/>
+                <a:cs typeface="Calibri" pitchFamily="34" charset="-120"/>
+              </a:rPr>
+              <a:t>Every infrastructure change shows its monthly delta, so cost is part of code review.</a:t>
+            </a:r>
+            <a:endParaRPr lang="en-US" sz="1350" dirty="0"/>
+          </a:p>
+        </p:txBody>
+      </p:sp>
+      <p:sp>
+        <p:nvSpPr>
+          <p:cNvPr id="27" name="Shape 23"/>
+          <p:cNvSpPr/>
+          <p:nvPr/>
+        </p:nvSpPr>
+        <p:spPr>
+          <a:xfrm>
+            <a:off x="7168896" y="4718304"/>
+            <a:ext cx="420624" cy="420624"/>
           </a:xfrm>
           <a:prstGeom prst="ellipse">
             <a:avLst/>
           </a:prstGeom>
           <a:solidFill>
-            <a:srgbClr val="FFFFFF"/>
+            <a:srgbClr val="2E3A48"/>
           </a:solidFill>
           <a:ln/>
         </p:spPr>
       </p:sp>
       <p:pic>
         <p:nvPicPr>
-          <p:cNvPr id="31" name="Image 2" descr="preencoded.png">    </p:cNvPr>
+          <p:cNvPr id="28" name="Image 2" descr="preencoded.png">    </p:cNvPr>
           <p:cNvPicPr>
             <a:picLocks noChangeAspect="1"/>
           </p:cNvPicPr>
@@ -13195,8 +13196,8 @@
         </p:blipFill>
         <p:spPr>
           <a:xfrm>
-            <a:off x="946404" y="5646420"/>
-            <a:ext cx="137160" cy="137160"/>
+            <a:off x="7274052" y="4823460"/>
+            <a:ext cx="210312" cy="210312"/>
           </a:xfrm>
           <a:prstGeom prst="rect">
             <a:avLst/>
@@ -13205,233 +13206,144 @@
       </p:pic>
       <p:sp>
         <p:nvSpPr>
-          <p:cNvPr id="32" name="Text 27"/>
-          <p:cNvSpPr/>
-          <p:nvPr/>
-        </p:nvSpPr>
-        <p:spPr>
-          <a:xfrm>
-            <a:off x="1298448" y="5522976"/>
-            <a:ext cx="5669280" cy="384048"/>
-          </a:xfrm>
-          <a:prstGeom prst="rect">
-            <a:avLst/>
-          </a:prstGeom>
-          <a:noFill/>
-          <a:ln/>
-        </p:spPr>
-        <p:txBody>
-          <a:bodyPr wrap="square" lIns="0" tIns="0" rIns="0" bIns="0" rtlCol="0" anchor="ctr"/>
-          <a:lstStyle/>
-          <a:p>
-            <a:pPr indent="0" marL="0">
-              <a:buNone/>
-            </a:pPr>
-            <a:r>
-              <a:rPr lang="en-US" sz="1300" dirty="0">
-                <a:solidFill>
-                  <a:srgbClr val="1B2430"/>
-                </a:solidFill>
-                <a:latin typeface="Calibri" pitchFamily="34" charset="0"/>
-                <a:ea typeface="Calibri" pitchFamily="34" charset="-122"/>
-                <a:cs typeface="Calibri" pitchFamily="34" charset="-120"/>
-              </a:rPr>
-              <a:t>Budgets are phased, so drift shows up in week one</a:t>
-            </a:r>
-            <a:endParaRPr lang="en-US" sz="1300" dirty="0"/>
-          </a:p>
-        </p:txBody>
-      </p:sp>
-      <p:sp>
-        <p:nvSpPr>
-          <p:cNvPr id="33" name="Shape 28"/>
-          <p:cNvSpPr/>
-          <p:nvPr/>
-        </p:nvSpPr>
-        <p:spPr>
-          <a:xfrm>
-            <a:off x="877824" y="5961888"/>
-            <a:ext cx="274320" cy="274320"/>
-          </a:xfrm>
-          <a:prstGeom prst="ellipse">
-            <a:avLst/>
-          </a:prstGeom>
-          <a:solidFill>
-            <a:srgbClr val="FFFFFF"/>
-          </a:solidFill>
-          <a:ln/>
-        </p:spPr>
-      </p:sp>
-      <p:pic>
-        <p:nvPicPr>
-          <p:cNvPr id="34" name="Image 3" descr="preencoded.png">    </p:cNvPr>
-          <p:cNvPicPr>
-            <a:picLocks noChangeAspect="1"/>
-          </p:cNvPicPr>
-          <p:nvPr/>
-        </p:nvPicPr>
-        <p:blipFill>
-          <a:blip r:embed="rId4"/>
-          <a:stretch>
-            <a:fillRect/>
-          </a:stretch>
-        </p:blipFill>
-        <p:spPr>
-          <a:xfrm>
-            <a:off x="946404" y="6030468"/>
-            <a:ext cx="137160" cy="137160"/>
-          </a:xfrm>
-          <a:prstGeom prst="rect">
-            <a:avLst/>
-          </a:prstGeom>
-        </p:spPr>
-      </p:pic>
-      <p:sp>
-        <p:nvSpPr>
-          <p:cNvPr id="35" name="Text 29"/>
-          <p:cNvSpPr/>
-          <p:nvPr/>
-        </p:nvSpPr>
-        <p:spPr>
-          <a:xfrm>
-            <a:off x="1298448" y="5907024"/>
-            <a:ext cx="5669280" cy="384048"/>
-          </a:xfrm>
-          <a:prstGeom prst="rect">
-            <a:avLst/>
-          </a:prstGeom>
-          <a:noFill/>
-          <a:ln/>
-        </p:spPr>
-        <p:txBody>
-          <a:bodyPr wrap="square" lIns="0" tIns="0" rIns="0" bIns="0" rtlCol="0" anchor="ctr"/>
-          <a:lstStyle/>
-          <a:p>
-            <a:pPr indent="0" marL="0">
-              <a:buNone/>
-            </a:pPr>
-            <a:r>
-              <a:rPr lang="en-US" sz="1300" dirty="0">
-                <a:solidFill>
-                  <a:srgbClr val="1B2430"/>
-                </a:solidFill>
-                <a:latin typeface="Calibri" pitchFamily="34" charset="0"/>
-                <a:ea typeface="Calibri" pitchFamily="34" charset="-122"/>
-                <a:cs typeface="Calibri" pitchFamily="34" charset="-120"/>
-              </a:rPr>
-              <a:t>Quotas cap the worst case while someone investigates</a:t>
-            </a:r>
-            <a:endParaRPr lang="en-US" sz="1300" dirty="0"/>
-          </a:p>
-        </p:txBody>
-      </p:sp>
-      <p:sp>
-        <p:nvSpPr>
-          <p:cNvPr id="36" name="Shape 30"/>
-          <p:cNvSpPr/>
-          <p:nvPr/>
-        </p:nvSpPr>
-        <p:spPr>
-          <a:xfrm>
-            <a:off x="7525512" y="4297680"/>
-            <a:ext cx="4114800" cy="2011680"/>
+          <p:cNvPr id="29" name="Text 24"/>
+          <p:cNvSpPr/>
+          <p:nvPr/>
+        </p:nvSpPr>
+        <p:spPr>
+          <a:xfrm>
+            <a:off x="7735824" y="4645152"/>
+            <a:ext cx="3602736" cy="914400"/>
+          </a:xfrm>
+          <a:prstGeom prst="rect">
+            <a:avLst/>
+          </a:prstGeom>
+          <a:noFill/>
+          <a:ln/>
+        </p:spPr>
+        <p:txBody>
+          <a:bodyPr wrap="square" lIns="0" tIns="0" rIns="0" bIns="0" rtlCol="0" anchor="ctr"/>
+          <a:lstStyle/>
+          <a:p>
+            <a:pPr indent="0" marL="0">
+              <a:lnSpc>
+                <a:spcPts val="1600"/>
+              </a:lnSpc>
+              <a:buNone/>
+            </a:pPr>
+            <a:r>
+              <a:rPr lang="en-US" sz="1350" b="1" dirty="0">
+                <a:solidFill>
+                  <a:srgbClr val="FFFFFF"/>
+                </a:solidFill>
+                <a:latin typeface="Calibri" pitchFamily="34" charset="0"/>
+                <a:ea typeface="Calibri" pitchFamily="34" charset="-122"/>
+                <a:cs typeface="Calibri" pitchFamily="34" charset="-120"/>
+              </a:rPr>
+              <a:t>Policy as code</a:t>
+            </a:r>
+            <a:endParaRPr lang="en-US" sz="1350" dirty="0"/>
+          </a:p>
+          <a:p>
+            <a:pPr indent="0" marL="0">
+              <a:lnSpc>
+                <a:spcPts val="1600"/>
+              </a:lnSpc>
+              <a:buNone/>
+            </a:pPr>
+            <a:r>
+              <a:rPr lang="en-US" sz="1200" dirty="0">
+                <a:solidFill>
+                  <a:srgbClr val="9EABBA"/>
+                </a:solidFill>
+                <a:latin typeface="Calibri" pitchFamily="34" charset="0"/>
+                <a:ea typeface="Calibri" pitchFamily="34" charset="-122"/>
+                <a:cs typeface="Calibri" pitchFamily="34" charset="-120"/>
+              </a:rPr>
+              <a:t>Tagging and budget rules enforced in the pipeline — the expensive change never merges.</a:t>
+            </a:r>
+            <a:endParaRPr lang="en-US" sz="1350" dirty="0"/>
+          </a:p>
+        </p:txBody>
+      </p:sp>
+      <p:sp>
+        <p:nvSpPr>
+          <p:cNvPr id="30" name="Shape 25"/>
+          <p:cNvSpPr/>
+          <p:nvPr/>
+        </p:nvSpPr>
+        <p:spPr>
+          <a:xfrm>
+            <a:off x="548640" y="5742432"/>
+            <a:ext cx="11091672" cy="841248"/>
           </a:xfrm>
           <a:prstGeom prst="roundRect">
             <a:avLst>
-              <a:gd name="adj" fmla="val 4091"/>
+              <a:gd name="adj" fmla="val 9783"/>
             </a:avLst>
           </a:prstGeom>
           <a:solidFill>
-            <a:srgbClr val="1F2936"/>
-          </a:solidFill>
-          <a:ln/>
-          <a:effectLst>
-            <a:outerShdw sx="100000" sy="100000" kx="0" ky="0" algn="bl" rotWithShape="0" blurRad="127000" dist="25400" dir="5400000">
-              <a:srgbClr val="8C99A8">
-                <a:alpha val="16000"/>
-              </a:srgbClr>
-            </a:outerShdw>
-          </a:effectLst>
-        </p:spPr>
-      </p:sp>
-      <p:sp>
-        <p:nvSpPr>
-          <p:cNvPr id="37" name="Text 31"/>
-          <p:cNvSpPr/>
-          <p:nvPr/>
-        </p:nvSpPr>
-        <p:spPr>
-          <a:xfrm>
-            <a:off x="7818120" y="4462272"/>
-            <a:ext cx="3200400" cy="292608"/>
-          </a:xfrm>
-          <a:prstGeom prst="rect">
-            <a:avLst/>
-          </a:prstGeom>
-          <a:noFill/>
-          <a:ln/>
-        </p:spPr>
-        <p:txBody>
-          <a:bodyPr wrap="square" lIns="0" tIns="0" rIns="0" bIns="0" rtlCol="0" anchor="ctr"/>
-          <a:lstStyle/>
-          <a:p>
-            <a:pPr indent="0" marL="0">
-              <a:buNone/>
-            </a:pPr>
-            <a:r>
-              <a:rPr lang="en-US" sz="1200" b="1" spc="180" kern="0" dirty="0">
-                <a:solidFill>
-                  <a:srgbClr val="E39B2C"/>
-                </a:solidFill>
-                <a:latin typeface="Calibri" pitchFamily="34" charset="0"/>
-                <a:ea typeface="Calibri" pitchFamily="34" charset="-122"/>
-                <a:cs typeface="Calibri" pitchFamily="34" charset="-120"/>
-              </a:rPr>
-              <a:t>The point</a:t>
-            </a:r>
-            <a:endParaRPr lang="en-US" sz="1200" dirty="0"/>
-          </a:p>
-        </p:txBody>
-      </p:sp>
-      <p:sp>
-        <p:nvSpPr>
-          <p:cNvPr id="38" name="Text 32"/>
-          <p:cNvSpPr/>
-          <p:nvPr/>
-        </p:nvSpPr>
-        <p:spPr>
-          <a:xfrm>
-            <a:off x="7818120" y="4828032"/>
-            <a:ext cx="3529584" cy="1280160"/>
-          </a:xfrm>
-          <a:prstGeom prst="rect">
-            <a:avLst/>
-          </a:prstGeom>
-          <a:noFill/>
-          <a:ln/>
-        </p:spPr>
-        <p:txBody>
-          <a:bodyPr wrap="square" lIns="0" tIns="0" rIns="0" bIns="0" rtlCol="0" anchor="t"/>
+            <a:srgbClr val="FBEFD8"/>
+          </a:solidFill>
+          <a:ln/>
+        </p:spPr>
+      </p:sp>
+      <p:sp>
+        <p:nvSpPr>
+          <p:cNvPr id="31" name="Text 26"/>
+          <p:cNvSpPr/>
+          <p:nvPr/>
+        </p:nvSpPr>
+        <p:spPr>
+          <a:xfrm>
+            <a:off x="877824" y="5742432"/>
+            <a:ext cx="10424160" cy="841248"/>
+          </a:xfrm>
+          <a:prstGeom prst="rect">
+            <a:avLst/>
+          </a:prstGeom>
+          <a:noFill/>
+          <a:ln/>
+        </p:spPr>
+        <p:txBody>
+          <a:bodyPr wrap="square" lIns="0" tIns="0" rIns="0" bIns="0" rtlCol="0" anchor="ctr"/>
           <a:lstStyle/>
           <a:p>
             <a:pPr indent="0" marL="0">
               <a:lnSpc>
-                <a:spcPts val="2200"/>
+                <a:spcPts val="1800"/>
               </a:lnSpc>
               <a:buNone/>
             </a:pPr>
             <a:r>
-              <a:rPr lang="en-US" sz="1550" i="1" dirty="0">
-                <a:solidFill>
-                  <a:srgbClr val="FFFFFF"/>
-                </a:solidFill>
-                <a:latin typeface="Cambria" pitchFamily="34" charset="0"/>
-                <a:ea typeface="Cambria" pitchFamily="34" charset="-122"/>
-                <a:cs typeface="Cambria" pitchFamily="34" charset="-120"/>
-              </a:rPr>
-              <a:t>The goal is not a smaller invoice. It is an invoice with nothing in it you have not already seen, explained and decided about.</a:t>
-            </a:r>
-            <a:endParaRPr lang="en-US" sz="1550" dirty="0"/>
+              <a:rPr lang="en-US" sz="1300" b="1" dirty="0">
+                <a:solidFill>
+                  <a:srgbClr val="6B4A0E"/>
+                </a:solidFill>
+                <a:latin typeface="Calibri" pitchFamily="34" charset="0"/>
+                <a:ea typeface="Calibri" pitchFamily="34" charset="-122"/>
+                <a:cs typeface="Calibri" pitchFamily="34" charset="-120"/>
+              </a:rPr>
+              <a:t>Pre-deployment architecture costing is the most requested capability in the State of FinOps 2026 — </a:t>
+            </a:r>
+            <a:pPr indent="0" marL="0">
+              <a:lnSpc>
+                <a:spcPts val="1800"/>
+              </a:lnSpc>
+              <a:buNone/>
+            </a:pPr>
+            <a:r>
+              <a:rPr lang="en-US" sz="1300" dirty="0">
+                <a:solidFill>
+                  <a:srgbClr val="6B4A0E"/>
+                </a:solidFill>
+                <a:latin typeface="Calibri" pitchFamily="34" charset="0"/>
+                <a:ea typeface="Calibri" pitchFamily="34" charset="-122"/>
+                <a:cs typeface="Calibri" pitchFamily="34" charset="-120"/>
+              </a:rPr>
+              <a:t>and the practices that get it working describe FinOps as partnering with engineers, not policing them. Give teams the cost of a choice at the moment they make it; nobody has to become a pricing expert.</a:t>
+            </a:r>
+            <a:endParaRPr lang="en-US" sz="1300" dirty="0"/>
           </a:p>
         </p:txBody>
       </p:sp>
@@ -14196,7 +14108,7 @@
                 <a:ea typeface="Calibri" pitchFamily="34" charset="-122"/>
                 <a:cs typeface="Calibri" pitchFamily="34" charset="-120"/>
               </a:rPr>
-              <a:t>THE PATH FORWARD</a:t>
+              <a:t>GOVERNANCE — PUTTING IT TOGETHER</a:t>
             </a:r>
             <a:endParaRPr lang="en-US" sz="1100" dirty="0"/>
           </a:p>
@@ -14235,7 +14147,7 @@
                 <a:ea typeface="Cambria" pitchFamily="34" charset="-122"/>
                 <a:cs typeface="Cambria" pitchFamily="34" charset="-120"/>
               </a:rPr>
-              <a:t>Where to start</a:t>
+              <a:t>Nobody should learn it from the invoice</a:t>
             </a:r>
             <a:endParaRPr lang="en-US" sz="3100" dirty="0"/>
           </a:p>
@@ -14243,876 +14155,1145 @@
       </p:sp>
       <p:sp>
         <p:nvSpPr>
-          <p:cNvPr id="4" name="Shape 2"/>
-          <p:cNvSpPr/>
-          <p:nvPr/>
-        </p:nvSpPr>
-        <p:spPr>
-          <a:xfrm>
-            <a:off x="548640" y="1783080"/>
-            <a:ext cx="2587752" cy="2423160"/>
+          <p:cNvPr id="4" name="Text 2"/>
+          <p:cNvSpPr/>
+          <p:nvPr/>
+        </p:nvSpPr>
+        <p:spPr>
+          <a:xfrm>
+            <a:off x="548640" y="1536192"/>
+            <a:ext cx="10607040" cy="365760"/>
+          </a:xfrm>
+          <a:prstGeom prst="rect">
+            <a:avLst/>
+          </a:prstGeom>
+          <a:noFill/>
+          <a:ln/>
+        </p:spPr>
+        <p:txBody>
+          <a:bodyPr wrap="square" lIns="0" tIns="0" rIns="0" bIns="0" rtlCol="0" anchor="ctr"/>
+          <a:lstStyle/>
+          <a:p>
+            <a:pPr indent="0" marL="0">
+              <a:buNone/>
+            </a:pPr>
+            <a:r>
+              <a:rPr lang="en-US" sz="1500" dirty="0">
+                <a:solidFill>
+                  <a:srgbClr val="5C6675"/>
+                </a:solidFill>
+                <a:latin typeface="Calibri" pitchFamily="34" charset="0"/>
+                <a:ea typeface="Calibri" pitchFamily="34" charset="-122"/>
+                <a:cs typeface="Calibri" pitchFamily="34" charset="-120"/>
+              </a:rPr>
+              <a:t>The same overrun, found at four different moments. Only the first three leave you anything to do about it.</a:t>
+            </a:r>
+            <a:endParaRPr lang="en-US" sz="1500" dirty="0"/>
+          </a:p>
+        </p:txBody>
+      </p:sp>
+      <p:sp>
+        <p:nvSpPr>
+          <p:cNvPr id="5" name="Shape 3"/>
+          <p:cNvSpPr/>
+          <p:nvPr/>
+        </p:nvSpPr>
+        <p:spPr>
+          <a:xfrm>
+            <a:off x="1737360" y="3127248"/>
+            <a:ext cx="8714232" cy="45720"/>
           </a:xfrm>
           <a:prstGeom prst="roundRect">
             <a:avLst>
-              <a:gd name="adj" fmla="val 3396"/>
+              <a:gd name="adj" fmla="val 40000"/>
             </a:avLst>
           </a:prstGeom>
           <a:solidFill>
+            <a:srgbClr val="DFE4EA"/>
+          </a:solidFill>
+          <a:ln/>
+        </p:spPr>
+      </p:sp>
+      <p:sp>
+        <p:nvSpPr>
+          <p:cNvPr id="6" name="Text 4"/>
+          <p:cNvSpPr/>
+          <p:nvPr/>
+        </p:nvSpPr>
+        <p:spPr>
+          <a:xfrm>
+            <a:off x="548640" y="2212848"/>
+            <a:ext cx="2377440" cy="310896"/>
+          </a:xfrm>
+          <a:prstGeom prst="rect">
+            <a:avLst/>
+          </a:prstGeom>
+          <a:noFill/>
+          <a:ln/>
+        </p:spPr>
+        <p:txBody>
+          <a:bodyPr wrap="square" lIns="0" tIns="0" rIns="0" bIns="0" rtlCol="0" anchor="ctr"/>
+          <a:lstStyle/>
+          <a:p>
+            <a:pPr algn="ctr" indent="0" marL="0">
+              <a:buNone/>
+            </a:pPr>
+            <a:r>
+              <a:rPr lang="en-US" sz="1400" b="1" dirty="0">
+                <a:solidFill>
+                  <a:srgbClr val="1B2430"/>
+                </a:solidFill>
+                <a:latin typeface="Calibri" pitchFamily="34" charset="0"/>
+                <a:ea typeface="Calibri" pitchFamily="34" charset="-122"/>
+                <a:cs typeface="Calibri" pitchFamily="34" charset="-120"/>
+              </a:rPr>
+              <a:t>Usage burn alert</a:t>
+            </a:r>
+            <a:endParaRPr lang="en-US" sz="1400" dirty="0"/>
+          </a:p>
+        </p:txBody>
+      </p:sp>
+      <p:sp>
+        <p:nvSpPr>
+          <p:cNvPr id="7" name="Text 5"/>
+          <p:cNvSpPr/>
+          <p:nvPr/>
+        </p:nvSpPr>
+        <p:spPr>
+          <a:xfrm>
+            <a:off x="548640" y="2542032"/>
+            <a:ext cx="2377440" cy="292608"/>
+          </a:xfrm>
+          <a:prstGeom prst="rect">
+            <a:avLst/>
+          </a:prstGeom>
+          <a:noFill/>
+          <a:ln/>
+        </p:spPr>
+        <p:txBody>
+          <a:bodyPr wrap="square" lIns="0" tIns="0" rIns="0" bIns="0" rtlCol="0" anchor="ctr"/>
+          <a:lstStyle/>
+          <a:p>
+            <a:pPr algn="ctr" indent="0" marL="0">
+              <a:buNone/>
+            </a:pPr>
+            <a:r>
+              <a:rPr lang="en-US" sz="1250" b="1" spc="60" kern="0" dirty="0">
+                <a:solidFill>
+                  <a:srgbClr val="B87B18"/>
+                </a:solidFill>
+                <a:latin typeface="Calibri" pitchFamily="34" charset="0"/>
+                <a:ea typeface="Calibri" pitchFamily="34" charset="-122"/>
+                <a:cs typeface="Calibri" pitchFamily="34" charset="-120"/>
+              </a:rPr>
+              <a:t>~10 minutes</a:t>
+            </a:r>
+            <a:endParaRPr lang="en-US" sz="1250" dirty="0"/>
+          </a:p>
+        </p:txBody>
+      </p:sp>
+      <p:sp>
+        <p:nvSpPr>
+          <p:cNvPr id="8" name="Shape 6"/>
+          <p:cNvSpPr/>
+          <p:nvPr/>
+        </p:nvSpPr>
+        <p:spPr>
+          <a:xfrm>
+            <a:off x="1618488" y="3031236"/>
+            <a:ext cx="237744" cy="237744"/>
+          </a:xfrm>
+          <a:prstGeom prst="ellipse">
+            <a:avLst/>
+          </a:prstGeom>
+          <a:solidFill>
+            <a:srgbClr val="E39B2C"/>
+          </a:solidFill>
+          <a:ln w="25400">
+            <a:solidFill>
+              <a:srgbClr val="FFFFFF"/>
+            </a:solidFill>
+            <a:prstDash val="solid"/>
+          </a:ln>
+        </p:spPr>
+      </p:sp>
+      <p:sp>
+        <p:nvSpPr>
+          <p:cNvPr id="9" name="Text 7"/>
+          <p:cNvSpPr/>
+          <p:nvPr/>
+        </p:nvSpPr>
+        <p:spPr>
+          <a:xfrm>
+            <a:off x="548640" y="3401568"/>
+            <a:ext cx="2377440" cy="566928"/>
+          </a:xfrm>
+          <a:prstGeom prst="rect">
+            <a:avLst/>
+          </a:prstGeom>
+          <a:noFill/>
+          <a:ln/>
+        </p:spPr>
+        <p:txBody>
+          <a:bodyPr wrap="square" lIns="0" tIns="0" rIns="0" bIns="0" rtlCol="0" anchor="t"/>
+          <a:lstStyle/>
+          <a:p>
+            <a:pPr algn="ctr" indent="0" marL="0">
+              <a:lnSpc>
+                <a:spcPts val="1600"/>
+              </a:lnSpc>
+              <a:buNone/>
+            </a:pPr>
+            <a:r>
+              <a:rPr lang="en-US" sz="1200" dirty="0">
+                <a:solidFill>
+                  <a:srgbClr val="5C6675"/>
+                </a:solidFill>
+                <a:latin typeface="Calibri" pitchFamily="34" charset="0"/>
+                <a:ea typeface="Calibri" pitchFamily="34" charset="-122"/>
+                <a:cs typeface="Calibri" pitchFamily="34" charset="-120"/>
+              </a:rPr>
+              <a:t>Throttle it, or confirm it was intended.</a:t>
+            </a:r>
+            <a:endParaRPr lang="en-US" sz="1200" dirty="0"/>
+          </a:p>
+        </p:txBody>
+      </p:sp>
+      <p:sp>
+        <p:nvSpPr>
+          <p:cNvPr id="10" name="Text 8"/>
+          <p:cNvSpPr/>
+          <p:nvPr/>
+        </p:nvSpPr>
+        <p:spPr>
+          <a:xfrm>
+            <a:off x="3566160" y="2212848"/>
+            <a:ext cx="2377440" cy="310896"/>
+          </a:xfrm>
+          <a:prstGeom prst="rect">
+            <a:avLst/>
+          </a:prstGeom>
+          <a:noFill/>
+          <a:ln/>
+        </p:spPr>
+        <p:txBody>
+          <a:bodyPr wrap="square" lIns="0" tIns="0" rIns="0" bIns="0" rtlCol="0" anchor="ctr"/>
+          <a:lstStyle/>
+          <a:p>
+            <a:pPr algn="ctr" indent="0" marL="0">
+              <a:buNone/>
+            </a:pPr>
+            <a:r>
+              <a:rPr lang="en-US" sz="1400" b="1" dirty="0">
+                <a:solidFill>
+                  <a:srgbClr val="1B2430"/>
+                </a:solidFill>
+                <a:latin typeface="Calibri" pitchFamily="34" charset="0"/>
+                <a:ea typeface="Calibri" pitchFamily="34" charset="-122"/>
+                <a:cs typeface="Calibri" pitchFamily="34" charset="-120"/>
+              </a:rPr>
+              <a:t>Daily spend threshold</a:t>
+            </a:r>
+            <a:endParaRPr lang="en-US" sz="1400" dirty="0"/>
+          </a:p>
+        </p:txBody>
+      </p:sp>
+      <p:sp>
+        <p:nvSpPr>
+          <p:cNvPr id="11" name="Text 9"/>
+          <p:cNvSpPr/>
+          <p:nvPr/>
+        </p:nvSpPr>
+        <p:spPr>
+          <a:xfrm>
+            <a:off x="3566160" y="2542032"/>
+            <a:ext cx="2377440" cy="292608"/>
+          </a:xfrm>
+          <a:prstGeom prst="rect">
+            <a:avLst/>
+          </a:prstGeom>
+          <a:noFill/>
+          <a:ln/>
+        </p:spPr>
+        <p:txBody>
+          <a:bodyPr wrap="square" lIns="0" tIns="0" rIns="0" bIns="0" rtlCol="0" anchor="ctr"/>
+          <a:lstStyle/>
+          <a:p>
+            <a:pPr algn="ctr" indent="0" marL="0">
+              <a:buNone/>
+            </a:pPr>
+            <a:r>
+              <a:rPr lang="en-US" sz="1250" b="1" spc="60" kern="0" dirty="0">
+                <a:solidFill>
+                  <a:srgbClr val="1F6B5C"/>
+                </a:solidFill>
+                <a:latin typeface="Calibri" pitchFamily="34" charset="0"/>
+                <a:ea typeface="Calibri" pitchFamily="34" charset="-122"/>
+                <a:cs typeface="Calibri" pitchFamily="34" charset="-120"/>
+              </a:rPr>
+              <a:t>next morning</a:t>
+            </a:r>
+            <a:endParaRPr lang="en-US" sz="1250" dirty="0"/>
+          </a:p>
+        </p:txBody>
+      </p:sp>
+      <p:sp>
+        <p:nvSpPr>
+          <p:cNvPr id="12" name="Shape 10"/>
+          <p:cNvSpPr/>
+          <p:nvPr/>
+        </p:nvSpPr>
+        <p:spPr>
+          <a:xfrm>
+            <a:off x="4636008" y="3031236"/>
+            <a:ext cx="237744" cy="237744"/>
+          </a:xfrm>
+          <a:prstGeom prst="ellipse">
+            <a:avLst/>
+          </a:prstGeom>
+          <a:solidFill>
+            <a:srgbClr val="2E8B7A"/>
+          </a:solidFill>
+          <a:ln w="25400">
+            <a:solidFill>
+              <a:srgbClr val="FFFFFF"/>
+            </a:solidFill>
+            <a:prstDash val="solid"/>
+          </a:ln>
+        </p:spPr>
+      </p:sp>
+      <p:sp>
+        <p:nvSpPr>
+          <p:cNvPr id="13" name="Text 11"/>
+          <p:cNvSpPr/>
+          <p:nvPr/>
+        </p:nvSpPr>
+        <p:spPr>
+          <a:xfrm>
+            <a:off x="3566160" y="3401568"/>
+            <a:ext cx="2377440" cy="566928"/>
+          </a:xfrm>
+          <a:prstGeom prst="rect">
+            <a:avLst/>
+          </a:prstGeom>
+          <a:noFill/>
+          <a:ln/>
+        </p:spPr>
+        <p:txBody>
+          <a:bodyPr wrap="square" lIns="0" tIns="0" rIns="0" bIns="0" rtlCol="0" anchor="t"/>
+          <a:lstStyle/>
+          <a:p>
+            <a:pPr algn="ctr" indent="0" marL="0">
+              <a:lnSpc>
+                <a:spcPts val="1600"/>
+              </a:lnSpc>
+              <a:buNone/>
+            </a:pPr>
+            <a:r>
+              <a:rPr lang="en-US" sz="1200" dirty="0">
+                <a:solidFill>
+                  <a:srgbClr val="5C6675"/>
+                </a:solidFill>
+                <a:latin typeface="Calibri" pitchFamily="34" charset="0"/>
+                <a:ea typeface="Calibri" pitchFamily="34" charset="-122"/>
+                <a:cs typeface="Calibri" pitchFamily="34" charset="-120"/>
+              </a:rPr>
+              <a:t>One team, one number, one owner to ask.</a:t>
+            </a:r>
+            <a:endParaRPr lang="en-US" sz="1200" dirty="0"/>
+          </a:p>
+        </p:txBody>
+      </p:sp>
+      <p:sp>
+        <p:nvSpPr>
+          <p:cNvPr id="14" name="Text 12"/>
+          <p:cNvSpPr/>
+          <p:nvPr/>
+        </p:nvSpPr>
+        <p:spPr>
+          <a:xfrm>
+            <a:off x="6583680" y="2212848"/>
+            <a:ext cx="2377440" cy="310896"/>
+          </a:xfrm>
+          <a:prstGeom prst="rect">
+            <a:avLst/>
+          </a:prstGeom>
+          <a:noFill/>
+          <a:ln/>
+        </p:spPr>
+        <p:txBody>
+          <a:bodyPr wrap="square" lIns="0" tIns="0" rIns="0" bIns="0" rtlCol="0" anchor="ctr"/>
+          <a:lstStyle/>
+          <a:p>
+            <a:pPr algn="ctr" indent="0" marL="0">
+              <a:buNone/>
+            </a:pPr>
+            <a:r>
+              <a:rPr lang="en-US" sz="1400" b="1" dirty="0">
+                <a:solidFill>
+                  <a:srgbClr val="1B2430"/>
+                </a:solidFill>
+                <a:latin typeface="Calibri" pitchFamily="34" charset="0"/>
+                <a:ea typeface="Calibri" pitchFamily="34" charset="-122"/>
+                <a:cs typeface="Calibri" pitchFamily="34" charset="-120"/>
+              </a:rPr>
+              <a:t>Forecast overrun</a:t>
+            </a:r>
+            <a:endParaRPr lang="en-US" sz="1400" dirty="0"/>
+          </a:p>
+        </p:txBody>
+      </p:sp>
+      <p:sp>
+        <p:nvSpPr>
+          <p:cNvPr id="15" name="Text 13"/>
+          <p:cNvSpPr/>
+          <p:nvPr/>
+        </p:nvSpPr>
+        <p:spPr>
+          <a:xfrm>
+            <a:off x="6583680" y="2542032"/>
+            <a:ext cx="2377440" cy="292608"/>
+          </a:xfrm>
+          <a:prstGeom prst="rect">
+            <a:avLst/>
+          </a:prstGeom>
+          <a:noFill/>
+          <a:ln/>
+        </p:spPr>
+        <p:txBody>
+          <a:bodyPr wrap="square" lIns="0" tIns="0" rIns="0" bIns="0" rtlCol="0" anchor="ctr"/>
+          <a:lstStyle/>
+          <a:p>
+            <a:pPr algn="ctr" indent="0" marL="0">
+              <a:buNone/>
+            </a:pPr>
+            <a:r>
+              <a:rPr lang="en-US" sz="1250" b="1" spc="60" kern="0" dirty="0">
+                <a:solidFill>
+                  <a:srgbClr val="1F6B5C"/>
+                </a:solidFill>
+                <a:latin typeface="Calibri" pitchFamily="34" charset="0"/>
+                <a:ea typeface="Calibri" pitchFamily="34" charset="-122"/>
+                <a:cs typeface="Calibri" pitchFamily="34" charset="-120"/>
+              </a:rPr>
+              <a:t>~2 weeks out</a:t>
+            </a:r>
+            <a:endParaRPr lang="en-US" sz="1250" dirty="0"/>
+          </a:p>
+        </p:txBody>
+      </p:sp>
+      <p:sp>
+        <p:nvSpPr>
+          <p:cNvPr id="16" name="Shape 14"/>
+          <p:cNvSpPr/>
+          <p:nvPr/>
+        </p:nvSpPr>
+        <p:spPr>
+          <a:xfrm>
+            <a:off x="7653528" y="3031236"/>
+            <a:ext cx="237744" cy="237744"/>
+          </a:xfrm>
+          <a:prstGeom prst="ellipse">
+            <a:avLst/>
+          </a:prstGeom>
+          <a:solidFill>
+            <a:srgbClr val="2E8B7A"/>
+          </a:solidFill>
+          <a:ln w="25400">
+            <a:solidFill>
+              <a:srgbClr val="FFFFFF"/>
+            </a:solidFill>
+            <a:prstDash val="solid"/>
+          </a:ln>
+        </p:spPr>
+      </p:sp>
+      <p:sp>
+        <p:nvSpPr>
+          <p:cNvPr id="17" name="Text 15"/>
+          <p:cNvSpPr/>
+          <p:nvPr/>
+        </p:nvSpPr>
+        <p:spPr>
+          <a:xfrm>
+            <a:off x="6583680" y="3401568"/>
+            <a:ext cx="2377440" cy="566928"/>
+          </a:xfrm>
+          <a:prstGeom prst="rect">
+            <a:avLst/>
+          </a:prstGeom>
+          <a:noFill/>
+          <a:ln/>
+        </p:spPr>
+        <p:txBody>
+          <a:bodyPr wrap="square" lIns="0" tIns="0" rIns="0" bIns="0" rtlCol="0" anchor="t"/>
+          <a:lstStyle/>
+          <a:p>
+            <a:pPr algn="ctr" indent="0" marL="0">
+              <a:lnSpc>
+                <a:spcPts val="1600"/>
+              </a:lnSpc>
+              <a:buNone/>
+            </a:pPr>
+            <a:r>
+              <a:rPr lang="en-US" sz="1200" dirty="0">
+                <a:solidFill>
+                  <a:srgbClr val="5C6675"/>
+                </a:solidFill>
+                <a:latin typeface="Calibri" pitchFamily="34" charset="0"/>
+                <a:ea typeface="Calibri" pitchFamily="34" charset="-122"/>
+                <a:cs typeface="Calibri" pitchFamily="34" charset="-120"/>
+              </a:rPr>
+              <a:t>Still time to change the month's outcome.</a:t>
+            </a:r>
+            <a:endParaRPr lang="en-US" sz="1200" dirty="0"/>
+          </a:p>
+        </p:txBody>
+      </p:sp>
+      <p:sp>
+        <p:nvSpPr>
+          <p:cNvPr id="18" name="Text 16"/>
+          <p:cNvSpPr/>
+          <p:nvPr/>
+        </p:nvSpPr>
+        <p:spPr>
+          <a:xfrm>
+            <a:off x="9262872" y="2212848"/>
+            <a:ext cx="2377440" cy="310896"/>
+          </a:xfrm>
+          <a:prstGeom prst="rect">
+            <a:avLst/>
+          </a:prstGeom>
+          <a:noFill/>
+          <a:ln/>
+        </p:spPr>
+        <p:txBody>
+          <a:bodyPr wrap="square" lIns="0" tIns="0" rIns="0" bIns="0" rtlCol="0" anchor="ctr"/>
+          <a:lstStyle/>
+          <a:p>
+            <a:pPr algn="ctr" indent="0" marL="0">
+              <a:buNone/>
+            </a:pPr>
+            <a:r>
+              <a:rPr lang="en-US" sz="1400" b="1" dirty="0">
+                <a:solidFill>
+                  <a:srgbClr val="5C6675"/>
+                </a:solidFill>
+                <a:latin typeface="Calibri" pitchFamily="34" charset="0"/>
+                <a:ea typeface="Calibri" pitchFamily="34" charset="-122"/>
+                <a:cs typeface="Calibri" pitchFamily="34" charset="-120"/>
+              </a:rPr>
+              <a:t>The invoice</a:t>
+            </a:r>
+            <a:endParaRPr lang="en-US" sz="1400" dirty="0"/>
+          </a:p>
+        </p:txBody>
+      </p:sp>
+      <p:sp>
+        <p:nvSpPr>
+          <p:cNvPr id="19" name="Text 17"/>
+          <p:cNvSpPr/>
+          <p:nvPr/>
+        </p:nvSpPr>
+        <p:spPr>
+          <a:xfrm>
+            <a:off x="9262872" y="2542032"/>
+            <a:ext cx="2377440" cy="292608"/>
+          </a:xfrm>
+          <a:prstGeom prst="rect">
+            <a:avLst/>
+          </a:prstGeom>
+          <a:noFill/>
+          <a:ln/>
+        </p:spPr>
+        <p:txBody>
+          <a:bodyPr wrap="square" lIns="0" tIns="0" rIns="0" bIns="0" rtlCol="0" anchor="ctr"/>
+          <a:lstStyle/>
+          <a:p>
+            <a:pPr algn="ctr" indent="0" marL="0">
+              <a:buNone/>
+            </a:pPr>
+            <a:r>
+              <a:rPr lang="en-US" sz="1250" b="1" spc="60" kern="0" dirty="0">
+                <a:solidFill>
+                  <a:srgbClr val="5C6675"/>
+                </a:solidFill>
+                <a:latin typeface="Calibri" pitchFamily="34" charset="0"/>
+                <a:ea typeface="Calibri" pitchFamily="34" charset="-122"/>
+                <a:cs typeface="Calibri" pitchFamily="34" charset="-120"/>
+              </a:rPr>
+              <a:t>30–45 days later</a:t>
+            </a:r>
+            <a:endParaRPr lang="en-US" sz="1250" dirty="0"/>
+          </a:p>
+        </p:txBody>
+      </p:sp>
+      <p:sp>
+        <p:nvSpPr>
+          <p:cNvPr id="20" name="Shape 18"/>
+          <p:cNvSpPr/>
+          <p:nvPr/>
+        </p:nvSpPr>
+        <p:spPr>
+          <a:xfrm>
+            <a:off x="10332720" y="3031236"/>
+            <a:ext cx="237744" cy="237744"/>
+          </a:xfrm>
+          <a:prstGeom prst="ellipse">
+            <a:avLst/>
+          </a:prstGeom>
+          <a:solidFill>
+            <a:srgbClr val="AEB8C4"/>
+          </a:solidFill>
+          <a:ln w="25400">
+            <a:solidFill>
+              <a:srgbClr val="FFFFFF"/>
+            </a:solidFill>
+            <a:prstDash val="solid"/>
+          </a:ln>
+        </p:spPr>
+      </p:sp>
+      <p:sp>
+        <p:nvSpPr>
+          <p:cNvPr id="21" name="Text 19"/>
+          <p:cNvSpPr/>
+          <p:nvPr/>
+        </p:nvSpPr>
+        <p:spPr>
+          <a:xfrm>
+            <a:off x="9262872" y="3401568"/>
+            <a:ext cx="2377440" cy="566928"/>
+          </a:xfrm>
+          <a:prstGeom prst="rect">
+            <a:avLst/>
+          </a:prstGeom>
+          <a:noFill/>
+          <a:ln/>
+        </p:spPr>
+        <p:txBody>
+          <a:bodyPr wrap="square" lIns="0" tIns="0" rIns="0" bIns="0" rtlCol="0" anchor="t"/>
+          <a:lstStyle/>
+          <a:p>
+            <a:pPr algn="ctr" indent="0" marL="0">
+              <a:lnSpc>
+                <a:spcPts val="1600"/>
+              </a:lnSpc>
+              <a:buNone/>
+            </a:pPr>
+            <a:r>
+              <a:rPr lang="en-US" sz="1200" dirty="0">
+                <a:solidFill>
+                  <a:srgbClr val="5C6675"/>
+                </a:solidFill>
+                <a:latin typeface="Calibri" pitchFamily="34" charset="0"/>
+                <a:ea typeface="Calibri" pitchFamily="34" charset="-122"/>
+                <a:cs typeface="Calibri" pitchFamily="34" charset="-120"/>
+              </a:rPr>
+              <a:t>Nothing left to decide. Only to explain.</a:t>
+            </a:r>
+            <a:endParaRPr lang="en-US" sz="1200" dirty="0"/>
+          </a:p>
+        </p:txBody>
+      </p:sp>
+      <p:sp>
+        <p:nvSpPr>
+          <p:cNvPr id="22" name="Shape 20"/>
+          <p:cNvSpPr/>
+          <p:nvPr/>
+        </p:nvSpPr>
+        <p:spPr>
+          <a:xfrm>
+            <a:off x="548640" y="4297680"/>
+            <a:ext cx="6675120" cy="2011680"/>
+          </a:xfrm>
+          <a:prstGeom prst="roundRect">
+            <a:avLst>
+              <a:gd name="adj" fmla="val 4091"/>
+            </a:avLst>
+          </a:prstGeom>
+          <a:solidFill>
+            <a:srgbClr val="F1F3F6"/>
+          </a:solidFill>
+          <a:ln/>
+        </p:spPr>
+      </p:sp>
+      <p:sp>
+        <p:nvSpPr>
+          <p:cNvPr id="23" name="Text 21"/>
+          <p:cNvSpPr/>
+          <p:nvPr/>
+        </p:nvSpPr>
+        <p:spPr>
+          <a:xfrm>
+            <a:off x="877824" y="4443984"/>
+            <a:ext cx="3657600" cy="292608"/>
+          </a:xfrm>
+          <a:prstGeom prst="rect">
+            <a:avLst/>
+          </a:prstGeom>
+          <a:noFill/>
+          <a:ln/>
+        </p:spPr>
+        <p:txBody>
+          <a:bodyPr wrap="square" lIns="0" tIns="0" rIns="0" bIns="0" rtlCol="0" anchor="ctr"/>
+          <a:lstStyle/>
+          <a:p>
+            <a:pPr indent="0" marL="0">
+              <a:buNone/>
+            </a:pPr>
+            <a:r>
+              <a:rPr lang="en-US" sz="1200" b="1" spc="180" kern="0" dirty="0">
+                <a:solidFill>
+                  <a:srgbClr val="5C6675"/>
+                </a:solidFill>
+                <a:latin typeface="Calibri" pitchFamily="34" charset="0"/>
+                <a:ea typeface="Calibri" pitchFamily="34" charset="-122"/>
+                <a:cs typeface="Calibri" pitchFamily="34" charset="-120"/>
+              </a:rPr>
+              <a:t>What has to be true</a:t>
+            </a:r>
+            <a:endParaRPr lang="en-US" sz="1200" dirty="0"/>
+          </a:p>
+        </p:txBody>
+      </p:sp>
+      <p:sp>
+        <p:nvSpPr>
+          <p:cNvPr id="24" name="Shape 22"/>
+          <p:cNvSpPr/>
+          <p:nvPr/>
+        </p:nvSpPr>
+        <p:spPr>
+          <a:xfrm>
+            <a:off x="877824" y="4809744"/>
+            <a:ext cx="274320" cy="274320"/>
+          </a:xfrm>
+          <a:prstGeom prst="ellipse">
+            <a:avLst/>
+          </a:prstGeom>
+          <a:solidFill>
+            <a:srgbClr val="FFFFFF"/>
+          </a:solidFill>
+          <a:ln/>
+        </p:spPr>
+      </p:sp>
+      <p:pic>
+        <p:nvPicPr>
+          <p:cNvPr id="25" name="Image 0" descr="preencoded.png">    </p:cNvPr>
+          <p:cNvPicPr>
+            <a:picLocks noChangeAspect="1"/>
+          </p:cNvPicPr>
+          <p:nvPr/>
+        </p:nvPicPr>
+        <p:blipFill>
+          <a:blip r:embed="rId1"/>
+          <a:stretch>
+            <a:fillRect/>
+          </a:stretch>
+        </p:blipFill>
+        <p:spPr>
+          <a:xfrm>
+            <a:off x="946404" y="4878324"/>
+            <a:ext cx="137160" cy="137160"/>
+          </a:xfrm>
+          <a:prstGeom prst="rect">
+            <a:avLst/>
+          </a:prstGeom>
+        </p:spPr>
+      </p:pic>
+      <p:sp>
+        <p:nvSpPr>
+          <p:cNvPr id="26" name="Text 23"/>
+          <p:cNvSpPr/>
+          <p:nvPr/>
+        </p:nvSpPr>
+        <p:spPr>
+          <a:xfrm>
+            <a:off x="1298448" y="4754880"/>
+            <a:ext cx="5669280" cy="384048"/>
+          </a:xfrm>
+          <a:prstGeom prst="rect">
+            <a:avLst/>
+          </a:prstGeom>
+          <a:noFill/>
+          <a:ln/>
+        </p:spPr>
+        <p:txBody>
+          <a:bodyPr wrap="square" lIns="0" tIns="0" rIns="0" bIns="0" rtlCol="0" anchor="ctr"/>
+          <a:lstStyle/>
+          <a:p>
+            <a:pPr indent="0" marL="0">
+              <a:buNone/>
+            </a:pPr>
+            <a:r>
+              <a:rPr lang="en-US" sz="1300" dirty="0">
+                <a:solidFill>
+                  <a:srgbClr val="1B2430"/>
+                </a:solidFill>
+                <a:latin typeface="Calibri" pitchFamily="34" charset="0"/>
+                <a:ea typeface="Calibri" pitchFamily="34" charset="-122"/>
+                <a:cs typeface="Calibri" pitchFamily="34" charset="-120"/>
+              </a:rPr>
+              <a:t>Protective alerts run on usage data, not on billing data</a:t>
+            </a:r>
+            <a:endParaRPr lang="en-US" sz="1300" dirty="0"/>
+          </a:p>
+        </p:txBody>
+      </p:sp>
+      <p:sp>
+        <p:nvSpPr>
+          <p:cNvPr id="27" name="Shape 24"/>
+          <p:cNvSpPr/>
+          <p:nvPr/>
+        </p:nvSpPr>
+        <p:spPr>
+          <a:xfrm>
+            <a:off x="877824" y="5193792"/>
+            <a:ext cx="274320" cy="274320"/>
+          </a:xfrm>
+          <a:prstGeom prst="ellipse">
+            <a:avLst/>
+          </a:prstGeom>
+          <a:solidFill>
+            <a:srgbClr val="FFFFFF"/>
+          </a:solidFill>
+          <a:ln/>
+        </p:spPr>
+      </p:sp>
+      <p:pic>
+        <p:nvPicPr>
+          <p:cNvPr id="28" name="Image 1" descr="preencoded.png">    </p:cNvPr>
+          <p:cNvPicPr>
+            <a:picLocks noChangeAspect="1"/>
+          </p:cNvPicPr>
+          <p:nvPr/>
+        </p:nvPicPr>
+        <p:blipFill>
+          <a:blip r:embed="rId2"/>
+          <a:stretch>
+            <a:fillRect/>
+          </a:stretch>
+        </p:blipFill>
+        <p:spPr>
+          <a:xfrm>
+            <a:off x="946404" y="5262372"/>
+            <a:ext cx="137160" cy="137160"/>
+          </a:xfrm>
+          <a:prstGeom prst="rect">
+            <a:avLst/>
+          </a:prstGeom>
+        </p:spPr>
+      </p:pic>
+      <p:sp>
+        <p:nvSpPr>
+          <p:cNvPr id="29" name="Text 25"/>
+          <p:cNvSpPr/>
+          <p:nvPr/>
+        </p:nvSpPr>
+        <p:spPr>
+          <a:xfrm>
+            <a:off x="1298448" y="5138928"/>
+            <a:ext cx="5669280" cy="384048"/>
+          </a:xfrm>
+          <a:prstGeom prst="rect">
+            <a:avLst/>
+          </a:prstGeom>
+          <a:noFill/>
+          <a:ln/>
+        </p:spPr>
+        <p:txBody>
+          <a:bodyPr wrap="square" lIns="0" tIns="0" rIns="0" bIns="0" rtlCol="0" anchor="ctr"/>
+          <a:lstStyle/>
+          <a:p>
+            <a:pPr indent="0" marL="0">
+              <a:buNone/>
+            </a:pPr>
+            <a:r>
+              <a:rPr lang="en-US" sz="1300" dirty="0">
+                <a:solidFill>
+                  <a:srgbClr val="1B2430"/>
+                </a:solidFill>
+                <a:latin typeface="Calibri" pitchFamily="34" charset="0"/>
+                <a:ea typeface="Calibri" pitchFamily="34" charset="-122"/>
+                <a:cs typeface="Calibri" pitchFamily="34" charset="-120"/>
+              </a:rPr>
+              <a:t>Every alert has a named owner to route to</a:t>
+            </a:r>
+            <a:endParaRPr lang="en-US" sz="1300" dirty="0"/>
+          </a:p>
+        </p:txBody>
+      </p:sp>
+      <p:sp>
+        <p:nvSpPr>
+          <p:cNvPr id="30" name="Shape 26"/>
+          <p:cNvSpPr/>
+          <p:nvPr/>
+        </p:nvSpPr>
+        <p:spPr>
+          <a:xfrm>
+            <a:off x="877824" y="5577840"/>
+            <a:ext cx="274320" cy="274320"/>
+          </a:xfrm>
+          <a:prstGeom prst="ellipse">
+            <a:avLst/>
+          </a:prstGeom>
+          <a:solidFill>
+            <a:srgbClr val="FFFFFF"/>
+          </a:solidFill>
+          <a:ln/>
+        </p:spPr>
+      </p:sp>
+      <p:pic>
+        <p:nvPicPr>
+          <p:cNvPr id="31" name="Image 2" descr="preencoded.png">    </p:cNvPr>
+          <p:cNvPicPr>
+            <a:picLocks noChangeAspect="1"/>
+          </p:cNvPicPr>
+          <p:nvPr/>
+        </p:nvPicPr>
+        <p:blipFill>
+          <a:blip r:embed="rId3"/>
+          <a:stretch>
+            <a:fillRect/>
+          </a:stretch>
+        </p:blipFill>
+        <p:spPr>
+          <a:xfrm>
+            <a:off x="946404" y="5646420"/>
+            <a:ext cx="137160" cy="137160"/>
+          </a:xfrm>
+          <a:prstGeom prst="rect">
+            <a:avLst/>
+          </a:prstGeom>
+        </p:spPr>
+      </p:pic>
+      <p:sp>
+        <p:nvSpPr>
+          <p:cNvPr id="32" name="Text 27"/>
+          <p:cNvSpPr/>
+          <p:nvPr/>
+        </p:nvSpPr>
+        <p:spPr>
+          <a:xfrm>
+            <a:off x="1298448" y="5522976"/>
+            <a:ext cx="5669280" cy="384048"/>
+          </a:xfrm>
+          <a:prstGeom prst="rect">
+            <a:avLst/>
+          </a:prstGeom>
+          <a:noFill/>
+          <a:ln/>
+        </p:spPr>
+        <p:txBody>
+          <a:bodyPr wrap="square" lIns="0" tIns="0" rIns="0" bIns="0" rtlCol="0" anchor="ctr"/>
+          <a:lstStyle/>
+          <a:p>
+            <a:pPr indent="0" marL="0">
+              <a:buNone/>
+            </a:pPr>
+            <a:r>
+              <a:rPr lang="en-US" sz="1300" dirty="0">
+                <a:solidFill>
+                  <a:srgbClr val="1B2430"/>
+                </a:solidFill>
+                <a:latin typeface="Calibri" pitchFamily="34" charset="0"/>
+                <a:ea typeface="Calibri" pitchFamily="34" charset="-122"/>
+                <a:cs typeface="Calibri" pitchFamily="34" charset="-120"/>
+              </a:rPr>
+              <a:t>Budgets are phased, so drift shows up in week one</a:t>
+            </a:r>
+            <a:endParaRPr lang="en-US" sz="1300" dirty="0"/>
+          </a:p>
+        </p:txBody>
+      </p:sp>
+      <p:sp>
+        <p:nvSpPr>
+          <p:cNvPr id="33" name="Shape 28"/>
+          <p:cNvSpPr/>
+          <p:nvPr/>
+        </p:nvSpPr>
+        <p:spPr>
+          <a:xfrm>
+            <a:off x="877824" y="5961888"/>
+            <a:ext cx="274320" cy="274320"/>
+          </a:xfrm>
+          <a:prstGeom prst="ellipse">
+            <a:avLst/>
+          </a:prstGeom>
+          <a:solidFill>
+            <a:srgbClr val="FFFFFF"/>
+          </a:solidFill>
+          <a:ln/>
+        </p:spPr>
+      </p:sp>
+      <p:pic>
+        <p:nvPicPr>
+          <p:cNvPr id="34" name="Image 3" descr="preencoded.png">    </p:cNvPr>
+          <p:cNvPicPr>
+            <a:picLocks noChangeAspect="1"/>
+          </p:cNvPicPr>
+          <p:nvPr/>
+        </p:nvPicPr>
+        <p:blipFill>
+          <a:blip r:embed="rId4"/>
+          <a:stretch>
+            <a:fillRect/>
+          </a:stretch>
+        </p:blipFill>
+        <p:spPr>
+          <a:xfrm>
+            <a:off x="946404" y="6030468"/>
+            <a:ext cx="137160" cy="137160"/>
+          </a:xfrm>
+          <a:prstGeom prst="rect">
+            <a:avLst/>
+          </a:prstGeom>
+        </p:spPr>
+      </p:pic>
+      <p:sp>
+        <p:nvSpPr>
+          <p:cNvPr id="35" name="Text 29"/>
+          <p:cNvSpPr/>
+          <p:nvPr/>
+        </p:nvSpPr>
+        <p:spPr>
+          <a:xfrm>
+            <a:off x="1298448" y="5907024"/>
+            <a:ext cx="5669280" cy="384048"/>
+          </a:xfrm>
+          <a:prstGeom prst="rect">
+            <a:avLst/>
+          </a:prstGeom>
+          <a:noFill/>
+          <a:ln/>
+        </p:spPr>
+        <p:txBody>
+          <a:bodyPr wrap="square" lIns="0" tIns="0" rIns="0" bIns="0" rtlCol="0" anchor="ctr"/>
+          <a:lstStyle/>
+          <a:p>
+            <a:pPr indent="0" marL="0">
+              <a:buNone/>
+            </a:pPr>
+            <a:r>
+              <a:rPr lang="en-US" sz="1300" dirty="0">
+                <a:solidFill>
+                  <a:srgbClr val="1B2430"/>
+                </a:solidFill>
+                <a:latin typeface="Calibri" pitchFamily="34" charset="0"/>
+                <a:ea typeface="Calibri" pitchFamily="34" charset="-122"/>
+                <a:cs typeface="Calibri" pitchFamily="34" charset="-120"/>
+              </a:rPr>
+              <a:t>Quotas cap the worst case while someone investigates</a:t>
+            </a:r>
+            <a:endParaRPr lang="en-US" sz="1300" dirty="0"/>
+          </a:p>
+        </p:txBody>
+      </p:sp>
+      <p:sp>
+        <p:nvSpPr>
+          <p:cNvPr id="36" name="Shape 30"/>
+          <p:cNvSpPr/>
+          <p:nvPr/>
+        </p:nvSpPr>
+        <p:spPr>
+          <a:xfrm>
+            <a:off x="7525512" y="4297680"/>
+            <a:ext cx="4114800" cy="2011680"/>
+          </a:xfrm>
+          <a:prstGeom prst="roundRect">
+            <a:avLst>
+              <a:gd name="adj" fmla="val 4091"/>
+            </a:avLst>
+          </a:prstGeom>
+          <a:solidFill>
             <a:srgbClr val="1F2936"/>
           </a:solidFill>
           <a:ln/>
-        </p:spPr>
-      </p:sp>
-      <p:sp>
-        <p:nvSpPr>
-          <p:cNvPr id="5" name="Text 3"/>
-          <p:cNvSpPr/>
-          <p:nvPr/>
-        </p:nvSpPr>
-        <p:spPr>
-          <a:xfrm>
-            <a:off x="804672" y="1965960"/>
-            <a:ext cx="1097280" cy="502920"/>
-          </a:xfrm>
-          <a:prstGeom prst="rect">
-            <a:avLst/>
-          </a:prstGeom>
-          <a:noFill/>
-          <a:ln/>
-        </p:spPr>
-        <p:txBody>
-          <a:bodyPr wrap="square" lIns="0" tIns="0" rIns="0" bIns="0" rtlCol="0" anchor="ctr"/>
-          <a:lstStyle/>
-          <a:p>
-            <a:pPr indent="0" marL="0">
-              <a:buNone/>
-            </a:pPr>
-            <a:r>
-              <a:rPr lang="en-US" sz="2800" b="1" dirty="0">
+          <a:effectLst>
+            <a:outerShdw sx="100000" sy="100000" kx="0" ky="0" algn="bl" rotWithShape="0" blurRad="127000" dist="25400" dir="5400000">
+              <a:srgbClr val="8C99A8">
+                <a:alpha val="16000"/>
+              </a:srgbClr>
+            </a:outerShdw>
+          </a:effectLst>
+        </p:spPr>
+      </p:sp>
+      <p:sp>
+        <p:nvSpPr>
+          <p:cNvPr id="37" name="Text 31"/>
+          <p:cNvSpPr/>
+          <p:nvPr/>
+        </p:nvSpPr>
+        <p:spPr>
+          <a:xfrm>
+            <a:off x="7818120" y="4462272"/>
+            <a:ext cx="3200400" cy="292608"/>
+          </a:xfrm>
+          <a:prstGeom prst="rect">
+            <a:avLst/>
+          </a:prstGeom>
+          <a:noFill/>
+          <a:ln/>
+        </p:spPr>
+        <p:txBody>
+          <a:bodyPr wrap="square" lIns="0" tIns="0" rIns="0" bIns="0" rtlCol="0" anchor="ctr"/>
+          <a:lstStyle/>
+          <a:p>
+            <a:pPr indent="0" marL="0">
+              <a:buNone/>
+            </a:pPr>
+            <a:r>
+              <a:rPr lang="en-US" sz="1200" b="1" spc="180" kern="0" dirty="0">
                 <a:solidFill>
                   <a:srgbClr val="E39B2C"/>
+                </a:solidFill>
+                <a:latin typeface="Calibri" pitchFamily="34" charset="0"/>
+                <a:ea typeface="Calibri" pitchFamily="34" charset="-122"/>
+                <a:cs typeface="Calibri" pitchFamily="34" charset="-120"/>
+              </a:rPr>
+              <a:t>The point</a:t>
+            </a:r>
+            <a:endParaRPr lang="en-US" sz="1200" dirty="0"/>
+          </a:p>
+        </p:txBody>
+      </p:sp>
+      <p:sp>
+        <p:nvSpPr>
+          <p:cNvPr id="38" name="Text 32"/>
+          <p:cNvSpPr/>
+          <p:nvPr/>
+        </p:nvSpPr>
+        <p:spPr>
+          <a:xfrm>
+            <a:off x="7818120" y="4828032"/>
+            <a:ext cx="3529584" cy="1280160"/>
+          </a:xfrm>
+          <a:prstGeom prst="rect">
+            <a:avLst/>
+          </a:prstGeom>
+          <a:noFill/>
+          <a:ln/>
+        </p:spPr>
+        <p:txBody>
+          <a:bodyPr wrap="square" lIns="0" tIns="0" rIns="0" bIns="0" rtlCol="0" anchor="t"/>
+          <a:lstStyle/>
+          <a:p>
+            <a:pPr indent="0" marL="0">
+              <a:lnSpc>
+                <a:spcPts val="2200"/>
+              </a:lnSpc>
+              <a:buNone/>
+            </a:pPr>
+            <a:r>
+              <a:rPr lang="en-US" sz="1550" i="1" dirty="0">
+                <a:solidFill>
+                  <a:srgbClr val="FFFFFF"/>
                 </a:solidFill>
                 <a:latin typeface="Cambria" pitchFamily="34" charset="0"/>
                 <a:ea typeface="Cambria" pitchFamily="34" charset="-122"/>
                 <a:cs typeface="Cambria" pitchFamily="34" charset="-120"/>
               </a:rPr>
-              <a:t>01</a:t>
-            </a:r>
-            <a:endParaRPr lang="en-US" sz="2800" dirty="0"/>
-          </a:p>
-        </p:txBody>
-      </p:sp>
-      <p:sp>
-        <p:nvSpPr>
-          <p:cNvPr id="6" name="Text 4"/>
-          <p:cNvSpPr/>
-          <p:nvPr/>
-        </p:nvSpPr>
-        <p:spPr>
-          <a:xfrm>
-            <a:off x="786384" y="2523744"/>
-            <a:ext cx="2139696" cy="786384"/>
-          </a:xfrm>
-          <a:prstGeom prst="rect">
-            <a:avLst/>
-          </a:prstGeom>
-          <a:noFill/>
-          <a:ln/>
-        </p:spPr>
-        <p:txBody>
-          <a:bodyPr wrap="square" lIns="0" tIns="0" rIns="0" bIns="0" rtlCol="0" anchor="t"/>
-          <a:lstStyle/>
-          <a:p>
-            <a:pPr indent="0" marL="0">
-              <a:lnSpc>
-                <a:spcPts val="2000"/>
-              </a:lnSpc>
-              <a:buNone/>
-            </a:pPr>
-            <a:r>
-              <a:rPr lang="en-US" sz="1500" b="1" dirty="0">
-                <a:solidFill>
-                  <a:srgbClr val="FFFFFF"/>
-                </a:solidFill>
-                <a:latin typeface="Cambria" pitchFamily="34" charset="0"/>
-                <a:ea typeface="Cambria" pitchFamily="34" charset="-122"/>
-                <a:cs typeface="Cambria" pitchFamily="34" charset="-120"/>
-              </a:rPr>
-              <a:t>Set the tagging standard</a:t>
-            </a:r>
-            <a:endParaRPr lang="en-US" sz="1500" dirty="0"/>
-          </a:p>
-        </p:txBody>
-      </p:sp>
-      <p:sp>
-        <p:nvSpPr>
-          <p:cNvPr id="7" name="Text 5"/>
-          <p:cNvSpPr/>
-          <p:nvPr/>
-        </p:nvSpPr>
-        <p:spPr>
-          <a:xfrm>
-            <a:off x="786384" y="3346704"/>
-            <a:ext cx="2139696" cy="749808"/>
-          </a:xfrm>
-          <a:prstGeom prst="rect">
-            <a:avLst/>
-          </a:prstGeom>
-          <a:noFill/>
-          <a:ln/>
-        </p:spPr>
-        <p:txBody>
-          <a:bodyPr wrap="square" lIns="0" tIns="0" rIns="0" bIns="0" rtlCol="0" anchor="t"/>
-          <a:lstStyle/>
-          <a:p>
-            <a:pPr indent="0" marL="0">
-              <a:lnSpc>
-                <a:spcPts val="1500"/>
-              </a:lnSpc>
-              <a:buNone/>
-            </a:pPr>
-            <a:r>
-              <a:rPr lang="en-US" sz="1200" dirty="0">
-                <a:solidFill>
-                  <a:srgbClr val="9EABBA"/>
-                </a:solidFill>
-                <a:latin typeface="Calibri" pitchFamily="34" charset="0"/>
-                <a:ea typeface="Calibri" pitchFamily="34" charset="-122"/>
-                <a:cs typeface="Calibri" pitchFamily="34" charset="-120"/>
-              </a:rPr>
-              <a:t>Agree a consistent taxonomy before investing in dashboards.</a:t>
-            </a:r>
-            <a:endParaRPr lang="en-US" sz="1200" dirty="0"/>
-          </a:p>
-        </p:txBody>
-      </p:sp>
-      <p:sp>
-        <p:nvSpPr>
-          <p:cNvPr id="8" name="Shape 6"/>
-          <p:cNvSpPr/>
-          <p:nvPr/>
-        </p:nvSpPr>
-        <p:spPr>
-          <a:xfrm>
-            <a:off x="3383280" y="1783080"/>
-            <a:ext cx="2587752" cy="2423160"/>
-          </a:xfrm>
-          <a:prstGeom prst="roundRect">
-            <a:avLst>
-              <a:gd name="adj" fmla="val 3396"/>
-            </a:avLst>
-          </a:prstGeom>
-          <a:solidFill>
-            <a:srgbClr val="F1F3F6"/>
-          </a:solidFill>
-          <a:ln/>
-        </p:spPr>
-      </p:sp>
-      <p:sp>
-        <p:nvSpPr>
-          <p:cNvPr id="9" name="Text 7"/>
-          <p:cNvSpPr/>
-          <p:nvPr/>
-        </p:nvSpPr>
-        <p:spPr>
-          <a:xfrm>
-            <a:off x="3639312" y="1965960"/>
-            <a:ext cx="1097280" cy="502920"/>
-          </a:xfrm>
-          <a:prstGeom prst="rect">
-            <a:avLst/>
-          </a:prstGeom>
-          <a:noFill/>
-          <a:ln/>
-        </p:spPr>
-        <p:txBody>
-          <a:bodyPr wrap="square" lIns="0" tIns="0" rIns="0" bIns="0" rtlCol="0" anchor="ctr"/>
-          <a:lstStyle/>
-          <a:p>
-            <a:pPr indent="0" marL="0">
-              <a:buNone/>
-            </a:pPr>
-            <a:r>
-              <a:rPr lang="en-US" sz="2800" b="1" dirty="0">
-                <a:solidFill>
-                  <a:srgbClr val="B9C2CD"/>
-                </a:solidFill>
-                <a:latin typeface="Cambria" pitchFamily="34" charset="0"/>
-                <a:ea typeface="Cambria" pitchFamily="34" charset="-122"/>
-                <a:cs typeface="Cambria" pitchFamily="34" charset="-120"/>
-              </a:rPr>
-              <a:t>02</a:t>
-            </a:r>
-            <a:endParaRPr lang="en-US" sz="2800" dirty="0"/>
-          </a:p>
-        </p:txBody>
-      </p:sp>
-      <p:sp>
-        <p:nvSpPr>
-          <p:cNvPr id="10" name="Text 8"/>
-          <p:cNvSpPr/>
-          <p:nvPr/>
-        </p:nvSpPr>
-        <p:spPr>
-          <a:xfrm>
-            <a:off x="3621024" y="2523744"/>
-            <a:ext cx="2139696" cy="786384"/>
-          </a:xfrm>
-          <a:prstGeom prst="rect">
-            <a:avLst/>
-          </a:prstGeom>
-          <a:noFill/>
-          <a:ln/>
-        </p:spPr>
-        <p:txBody>
-          <a:bodyPr wrap="square" lIns="0" tIns="0" rIns="0" bIns="0" rtlCol="0" anchor="t"/>
-          <a:lstStyle/>
-          <a:p>
-            <a:pPr indent="0" marL="0">
-              <a:lnSpc>
-                <a:spcPts val="2000"/>
-              </a:lnSpc>
-              <a:buNone/>
-            </a:pPr>
-            <a:r>
-              <a:rPr lang="en-US" sz="1500" b="1" dirty="0">
-                <a:solidFill>
-                  <a:srgbClr val="1B2430"/>
-                </a:solidFill>
-                <a:latin typeface="Cambria" pitchFamily="34" charset="0"/>
-                <a:ea typeface="Cambria" pitchFamily="34" charset="-122"/>
-                <a:cs typeface="Cambria" pitchFamily="34" charset="-120"/>
-              </a:rPr>
-              <a:t>Start with the biggest spend</a:t>
-            </a:r>
-            <a:endParaRPr lang="en-US" sz="1500" dirty="0"/>
-          </a:p>
-        </p:txBody>
-      </p:sp>
-      <p:sp>
-        <p:nvSpPr>
-          <p:cNvPr id="11" name="Text 9"/>
-          <p:cNvSpPr/>
-          <p:nvPr/>
-        </p:nvSpPr>
-        <p:spPr>
-          <a:xfrm>
-            <a:off x="3621024" y="3346704"/>
-            <a:ext cx="2139696" cy="749808"/>
-          </a:xfrm>
-          <a:prstGeom prst="rect">
-            <a:avLst/>
-          </a:prstGeom>
-          <a:noFill/>
-          <a:ln/>
-        </p:spPr>
-        <p:txBody>
-          <a:bodyPr wrap="square" lIns="0" tIns="0" rIns="0" bIns="0" rtlCol="0" anchor="t"/>
-          <a:lstStyle/>
-          <a:p>
-            <a:pPr indent="0" marL="0">
-              <a:lnSpc>
-                <a:spcPts val="1500"/>
-              </a:lnSpc>
-              <a:buNone/>
-            </a:pPr>
-            <a:r>
-              <a:rPr lang="en-US" sz="1200" dirty="0">
-                <a:solidFill>
-                  <a:srgbClr val="5C6675"/>
-                </a:solidFill>
-                <a:latin typeface="Calibri" pitchFamily="34" charset="0"/>
-                <a:ea typeface="Calibri" pitchFamily="34" charset="-122"/>
-                <a:cs typeface="Calibri" pitchFamily="34" charset="-120"/>
-              </a:rPr>
-              <a:t>Attack the largest categories first. Don't chase perfect granularity everywhere.</a:t>
-            </a:r>
-            <a:endParaRPr lang="en-US" sz="1200" dirty="0"/>
-          </a:p>
-        </p:txBody>
-      </p:sp>
-      <p:sp>
-        <p:nvSpPr>
-          <p:cNvPr id="12" name="Shape 10"/>
-          <p:cNvSpPr/>
-          <p:nvPr/>
-        </p:nvSpPr>
-        <p:spPr>
-          <a:xfrm>
-            <a:off x="6217920" y="1783080"/>
-            <a:ext cx="2587752" cy="2423160"/>
-          </a:xfrm>
-          <a:prstGeom prst="roundRect">
-            <a:avLst>
-              <a:gd name="adj" fmla="val 3396"/>
-            </a:avLst>
-          </a:prstGeom>
-          <a:solidFill>
-            <a:srgbClr val="F1F3F6"/>
-          </a:solidFill>
-          <a:ln/>
-        </p:spPr>
-      </p:sp>
-      <p:sp>
-        <p:nvSpPr>
-          <p:cNvPr id="13" name="Text 11"/>
-          <p:cNvSpPr/>
-          <p:nvPr/>
-        </p:nvSpPr>
-        <p:spPr>
-          <a:xfrm>
-            <a:off x="6473952" y="1965960"/>
-            <a:ext cx="1097280" cy="502920"/>
-          </a:xfrm>
-          <a:prstGeom prst="rect">
-            <a:avLst/>
-          </a:prstGeom>
-          <a:noFill/>
-          <a:ln/>
-        </p:spPr>
-        <p:txBody>
-          <a:bodyPr wrap="square" lIns="0" tIns="0" rIns="0" bIns="0" rtlCol="0" anchor="ctr"/>
-          <a:lstStyle/>
-          <a:p>
-            <a:pPr indent="0" marL="0">
-              <a:buNone/>
-            </a:pPr>
-            <a:r>
-              <a:rPr lang="en-US" sz="2800" b="1" dirty="0">
-                <a:solidFill>
-                  <a:srgbClr val="B9C2CD"/>
-                </a:solidFill>
-                <a:latin typeface="Cambria" pitchFamily="34" charset="0"/>
-                <a:ea typeface="Cambria" pitchFamily="34" charset="-122"/>
-                <a:cs typeface="Cambria" pitchFamily="34" charset="-120"/>
-              </a:rPr>
-              <a:t>03</a:t>
-            </a:r>
-            <a:endParaRPr lang="en-US" sz="2800" dirty="0"/>
-          </a:p>
-        </p:txBody>
-      </p:sp>
-      <p:sp>
-        <p:nvSpPr>
-          <p:cNvPr id="14" name="Text 12"/>
-          <p:cNvSpPr/>
-          <p:nvPr/>
-        </p:nvSpPr>
-        <p:spPr>
-          <a:xfrm>
-            <a:off x="6455664" y="2523744"/>
-            <a:ext cx="2139696" cy="786384"/>
-          </a:xfrm>
-          <a:prstGeom prst="rect">
-            <a:avLst/>
-          </a:prstGeom>
-          <a:noFill/>
-          <a:ln/>
-        </p:spPr>
-        <p:txBody>
-          <a:bodyPr wrap="square" lIns="0" tIns="0" rIns="0" bIns="0" rtlCol="0" anchor="t"/>
-          <a:lstStyle/>
-          <a:p>
-            <a:pPr indent="0" marL="0">
-              <a:lnSpc>
-                <a:spcPts val="2000"/>
-              </a:lnSpc>
-              <a:buNone/>
-            </a:pPr>
-            <a:r>
-              <a:rPr lang="en-US" sz="1500" b="1" dirty="0">
-                <a:solidFill>
-                  <a:srgbClr val="1B2430"/>
-                </a:solidFill>
-                <a:latin typeface="Cambria" pitchFamily="34" charset="0"/>
-                <a:ea typeface="Cambria" pitchFamily="34" charset="-122"/>
-                <a:cs typeface="Cambria" pitchFamily="34" charset="-120"/>
-              </a:rPr>
-              <a:t>Get finance and engineering talking</a:t>
-            </a:r>
-            <a:endParaRPr lang="en-US" sz="1500" dirty="0"/>
-          </a:p>
-        </p:txBody>
-      </p:sp>
-      <p:sp>
-        <p:nvSpPr>
-          <p:cNvPr id="15" name="Text 13"/>
-          <p:cNvSpPr/>
-          <p:nvPr/>
-        </p:nvSpPr>
-        <p:spPr>
-          <a:xfrm>
-            <a:off x="6455664" y="3346704"/>
-            <a:ext cx="2139696" cy="749808"/>
-          </a:xfrm>
-          <a:prstGeom prst="rect">
-            <a:avLst/>
-          </a:prstGeom>
-          <a:noFill/>
-          <a:ln/>
-        </p:spPr>
-        <p:txBody>
-          <a:bodyPr wrap="square" lIns="0" tIns="0" rIns="0" bIns="0" rtlCol="0" anchor="t"/>
-          <a:lstStyle/>
-          <a:p>
-            <a:pPr indent="0" marL="0">
-              <a:lnSpc>
-                <a:spcPts val="1500"/>
-              </a:lnSpc>
-              <a:buNone/>
-            </a:pPr>
-            <a:r>
-              <a:rPr lang="en-US" sz="1200" dirty="0">
-                <a:solidFill>
-                  <a:srgbClr val="5C6675"/>
-                </a:solidFill>
-                <a:latin typeface="Calibri" pitchFamily="34" charset="0"/>
-                <a:ea typeface="Calibri" pitchFamily="34" charset="-122"/>
-                <a:cs typeface="Calibri" pitchFamily="34" charset="-120"/>
-              </a:rPr>
-              <a:t>Bring both into the conversation early, not as an afterthought.</a:t>
-            </a:r>
-            <a:endParaRPr lang="en-US" sz="1200" dirty="0"/>
-          </a:p>
-        </p:txBody>
-      </p:sp>
-      <p:sp>
-        <p:nvSpPr>
-          <p:cNvPr id="16" name="Shape 14"/>
-          <p:cNvSpPr/>
-          <p:nvPr/>
-        </p:nvSpPr>
-        <p:spPr>
-          <a:xfrm>
-            <a:off x="9052560" y="1783080"/>
-            <a:ext cx="2587752" cy="2423160"/>
-          </a:xfrm>
-          <a:prstGeom prst="roundRect">
-            <a:avLst>
-              <a:gd name="adj" fmla="val 3396"/>
-            </a:avLst>
-          </a:prstGeom>
-          <a:solidFill>
-            <a:srgbClr val="F1F3F6"/>
-          </a:solidFill>
-          <a:ln/>
-        </p:spPr>
-      </p:sp>
-      <p:sp>
-        <p:nvSpPr>
-          <p:cNvPr id="17" name="Text 15"/>
-          <p:cNvSpPr/>
-          <p:nvPr/>
-        </p:nvSpPr>
-        <p:spPr>
-          <a:xfrm>
-            <a:off x="9308592" y="1965960"/>
-            <a:ext cx="1097280" cy="502920"/>
-          </a:xfrm>
-          <a:prstGeom prst="rect">
-            <a:avLst/>
-          </a:prstGeom>
-          <a:noFill/>
-          <a:ln/>
-        </p:spPr>
-        <p:txBody>
-          <a:bodyPr wrap="square" lIns="0" tIns="0" rIns="0" bIns="0" rtlCol="0" anchor="ctr"/>
-          <a:lstStyle/>
-          <a:p>
-            <a:pPr indent="0" marL="0">
-              <a:buNone/>
-            </a:pPr>
-            <a:r>
-              <a:rPr lang="en-US" sz="2800" b="1" dirty="0">
-                <a:solidFill>
-                  <a:srgbClr val="B9C2CD"/>
-                </a:solidFill>
-                <a:latin typeface="Cambria" pitchFamily="34" charset="0"/>
-                <a:ea typeface="Cambria" pitchFamily="34" charset="-122"/>
-                <a:cs typeface="Cambria" pitchFamily="34" charset="-120"/>
-              </a:rPr>
-              <a:t>04</a:t>
-            </a:r>
-            <a:endParaRPr lang="en-US" sz="2800" dirty="0"/>
-          </a:p>
-        </p:txBody>
-      </p:sp>
-      <p:sp>
-        <p:nvSpPr>
-          <p:cNvPr id="18" name="Text 16"/>
-          <p:cNvSpPr/>
-          <p:nvPr/>
-        </p:nvSpPr>
-        <p:spPr>
-          <a:xfrm>
-            <a:off x="9290304" y="2523744"/>
-            <a:ext cx="2139696" cy="786384"/>
-          </a:xfrm>
-          <a:prstGeom prst="rect">
-            <a:avLst/>
-          </a:prstGeom>
-          <a:noFill/>
-          <a:ln/>
-        </p:spPr>
-        <p:txBody>
-          <a:bodyPr wrap="square" lIns="0" tIns="0" rIns="0" bIns="0" rtlCol="0" anchor="t"/>
-          <a:lstStyle/>
-          <a:p>
-            <a:pPr indent="0" marL="0">
-              <a:lnSpc>
-                <a:spcPts val="2000"/>
-              </a:lnSpc>
-              <a:buNone/>
-            </a:pPr>
-            <a:r>
-              <a:rPr lang="en-US" sz="1500" b="1" dirty="0">
-                <a:solidFill>
-                  <a:srgbClr val="1B2430"/>
-                </a:solidFill>
-                <a:latin typeface="Cambria" pitchFamily="34" charset="0"/>
-                <a:ea typeface="Cambria" pitchFamily="34" charset="-122"/>
-                <a:cs typeface="Cambria" pitchFamily="34" charset="-120"/>
-              </a:rPr>
-              <a:t>Set guardrails early</a:t>
-            </a:r>
-            <a:endParaRPr lang="en-US" sz="1500" dirty="0"/>
-          </a:p>
-        </p:txBody>
-      </p:sp>
-      <p:sp>
-        <p:nvSpPr>
-          <p:cNvPr id="19" name="Text 17"/>
-          <p:cNvSpPr/>
-          <p:nvPr/>
-        </p:nvSpPr>
-        <p:spPr>
-          <a:xfrm>
-            <a:off x="9290304" y="3346704"/>
-            <a:ext cx="2139696" cy="749808"/>
-          </a:xfrm>
-          <a:prstGeom prst="rect">
-            <a:avLst/>
-          </a:prstGeom>
-          <a:noFill/>
-          <a:ln/>
-        </p:spPr>
-        <p:txBody>
-          <a:bodyPr wrap="square" lIns="0" tIns="0" rIns="0" bIns="0" rtlCol="0" anchor="t"/>
-          <a:lstStyle/>
-          <a:p>
-            <a:pPr indent="0" marL="0">
-              <a:lnSpc>
-                <a:spcPts val="1500"/>
-              </a:lnSpc>
-              <a:buNone/>
-            </a:pPr>
-            <a:r>
-              <a:rPr lang="en-US" sz="1200" dirty="0">
-                <a:solidFill>
-                  <a:srgbClr val="5C6675"/>
-                </a:solidFill>
-                <a:latin typeface="Calibri" pitchFamily="34" charset="0"/>
-                <a:ea typeface="Calibri" pitchFamily="34" charset="-122"/>
-                <a:cs typeface="Calibri" pitchFamily="34" charset="-120"/>
-              </a:rPr>
-              <a:t>Owners, budget thresholds and quotas cost little to add — and stop the expensive surprises.</a:t>
-            </a:r>
-            <a:endParaRPr lang="en-US" sz="1200" dirty="0"/>
-          </a:p>
-        </p:txBody>
-      </p:sp>
-      <p:sp>
-        <p:nvSpPr>
-          <p:cNvPr id="20" name="Shape 18"/>
-          <p:cNvSpPr/>
-          <p:nvPr/>
-        </p:nvSpPr>
-        <p:spPr>
-          <a:xfrm>
-            <a:off x="548640" y="4434840"/>
-            <a:ext cx="11091672" cy="1874520"/>
-          </a:xfrm>
-          <a:prstGeom prst="roundRect">
-            <a:avLst>
-              <a:gd name="adj" fmla="val 4390"/>
-            </a:avLst>
-          </a:prstGeom>
-          <a:solidFill>
-            <a:srgbClr val="F1F3F6"/>
-          </a:solidFill>
-          <a:ln/>
-        </p:spPr>
-      </p:sp>
-      <p:sp>
-        <p:nvSpPr>
-          <p:cNvPr id="21" name="Text 19"/>
-          <p:cNvSpPr/>
-          <p:nvPr/>
-        </p:nvSpPr>
-        <p:spPr>
-          <a:xfrm>
-            <a:off x="877824" y="4572000"/>
-            <a:ext cx="6035040" cy="292608"/>
-          </a:xfrm>
-          <a:prstGeom prst="rect">
-            <a:avLst/>
-          </a:prstGeom>
-          <a:noFill/>
-          <a:ln/>
-        </p:spPr>
-        <p:txBody>
-          <a:bodyPr wrap="square" lIns="0" tIns="0" rIns="0" bIns="0" rtlCol="0" anchor="ctr"/>
-          <a:lstStyle/>
-          <a:p>
-            <a:pPr indent="0" marL="0">
-              <a:buNone/>
-            </a:pPr>
-            <a:r>
-              <a:rPr lang="en-US" sz="1200" b="1" spc="180" kern="0" dirty="0">
-                <a:solidFill>
-                  <a:srgbClr val="5C6675"/>
-                </a:solidFill>
-                <a:latin typeface="Calibri" pitchFamily="34" charset="0"/>
-                <a:ea typeface="Calibri" pitchFamily="34" charset="-122"/>
-                <a:cs typeface="Calibri" pitchFamily="34" charset="-120"/>
-              </a:rPr>
-              <a:t>Tooling — match the footprint, not the ambition</a:t>
-            </a:r>
-            <a:endParaRPr lang="en-US" sz="1200" dirty="0"/>
-          </a:p>
-        </p:txBody>
-      </p:sp>
-      <p:sp>
-        <p:nvSpPr>
-          <p:cNvPr id="22" name="Text 20"/>
-          <p:cNvSpPr/>
-          <p:nvPr/>
-        </p:nvSpPr>
-        <p:spPr>
-          <a:xfrm>
-            <a:off x="877824" y="4937760"/>
-            <a:ext cx="1737360" cy="384048"/>
-          </a:xfrm>
-          <a:prstGeom prst="rect">
-            <a:avLst/>
-          </a:prstGeom>
-          <a:noFill/>
-          <a:ln/>
-        </p:spPr>
-        <p:txBody>
-          <a:bodyPr wrap="square" lIns="0" tIns="0" rIns="0" bIns="0" rtlCol="0" anchor="ctr"/>
-          <a:lstStyle/>
-          <a:p>
-            <a:pPr indent="0" marL="0">
-              <a:buNone/>
-            </a:pPr>
-            <a:r>
-              <a:rPr lang="en-US" sz="1350" b="1" dirty="0">
-                <a:solidFill>
-                  <a:srgbClr val="2E8B7A"/>
-                </a:solidFill>
-                <a:latin typeface="Calibri" pitchFamily="34" charset="0"/>
-                <a:ea typeface="Calibri" pitchFamily="34" charset="-122"/>
-                <a:cs typeface="Calibri" pitchFamily="34" charset="-120"/>
-              </a:rPr>
-              <a:t>Native</a:t>
-            </a:r>
-            <a:endParaRPr lang="en-US" sz="1350" dirty="0"/>
-          </a:p>
-        </p:txBody>
-      </p:sp>
-      <p:sp>
-        <p:nvSpPr>
-          <p:cNvPr id="23" name="Text 21"/>
-          <p:cNvSpPr/>
-          <p:nvPr/>
-        </p:nvSpPr>
-        <p:spPr>
-          <a:xfrm>
-            <a:off x="2651760" y="4937760"/>
-            <a:ext cx="8595360" cy="384048"/>
-          </a:xfrm>
-          <a:prstGeom prst="rect">
-            <a:avLst/>
-          </a:prstGeom>
-          <a:noFill/>
-          <a:ln/>
-        </p:spPr>
-        <p:txBody>
-          <a:bodyPr wrap="square" lIns="0" tIns="0" rIns="0" bIns="0" rtlCol="0" anchor="ctr"/>
-          <a:lstStyle/>
-          <a:p>
-            <a:pPr indent="0" marL="0">
-              <a:buNone/>
-            </a:pPr>
-            <a:r>
-              <a:rPr lang="en-US" sz="1350" dirty="0">
-                <a:solidFill>
-                  <a:srgbClr val="5C6675"/>
-                </a:solidFill>
-                <a:latin typeface="Calibri" pitchFamily="34" charset="0"/>
-                <a:ea typeface="Calibri" pitchFamily="34" charset="-122"/>
-                <a:cs typeface="Calibri" pitchFamily="34" charset="-120"/>
-              </a:rPr>
-              <a:t>AWS Cost Explorer  ·  Azure Cost Management  ·  GCP Billing</a:t>
-            </a:r>
-            <a:endParaRPr lang="en-US" sz="1350" dirty="0"/>
-          </a:p>
-        </p:txBody>
-      </p:sp>
-      <p:sp>
-        <p:nvSpPr>
-          <p:cNvPr id="24" name="Text 22"/>
-          <p:cNvSpPr/>
-          <p:nvPr/>
-        </p:nvSpPr>
-        <p:spPr>
-          <a:xfrm>
-            <a:off x="877824" y="5349240"/>
-            <a:ext cx="1737360" cy="384048"/>
-          </a:xfrm>
-          <a:prstGeom prst="rect">
-            <a:avLst/>
-          </a:prstGeom>
-          <a:noFill/>
-          <a:ln/>
-        </p:spPr>
-        <p:txBody>
-          <a:bodyPr wrap="square" lIns="0" tIns="0" rIns="0" bIns="0" rtlCol="0" anchor="ctr"/>
-          <a:lstStyle/>
-          <a:p>
-            <a:pPr indent="0" marL="0">
-              <a:buNone/>
-            </a:pPr>
-            <a:r>
-              <a:rPr lang="en-US" sz="1350" b="1" dirty="0">
-                <a:solidFill>
-                  <a:srgbClr val="B87B18"/>
-                </a:solidFill>
-                <a:latin typeface="Calibri" pitchFamily="34" charset="0"/>
-                <a:ea typeface="Calibri" pitchFamily="34" charset="-122"/>
-                <a:cs typeface="Calibri" pitchFamily="34" charset="-120"/>
-              </a:rPr>
-              <a:t>Third-party</a:t>
-            </a:r>
-            <a:endParaRPr lang="en-US" sz="1350" dirty="0"/>
-          </a:p>
-        </p:txBody>
-      </p:sp>
-      <p:sp>
-        <p:nvSpPr>
-          <p:cNvPr id="25" name="Text 23"/>
-          <p:cNvSpPr/>
-          <p:nvPr/>
-        </p:nvSpPr>
-        <p:spPr>
-          <a:xfrm>
-            <a:off x="2651760" y="5349240"/>
-            <a:ext cx="8595360" cy="384048"/>
-          </a:xfrm>
-          <a:prstGeom prst="rect">
-            <a:avLst/>
-          </a:prstGeom>
-          <a:noFill/>
-          <a:ln/>
-        </p:spPr>
-        <p:txBody>
-          <a:bodyPr wrap="square" lIns="0" tIns="0" rIns="0" bIns="0" rtlCol="0" anchor="ctr"/>
-          <a:lstStyle/>
-          <a:p>
-            <a:pPr indent="0" marL="0">
-              <a:buNone/>
-            </a:pPr>
-            <a:r>
-              <a:rPr lang="en-US" sz="1350" dirty="0">
-                <a:solidFill>
-                  <a:srgbClr val="5C6675"/>
-                </a:solidFill>
-                <a:latin typeface="Calibri" pitchFamily="34" charset="0"/>
-                <a:ea typeface="Calibri" pitchFamily="34" charset="-122"/>
-                <a:cs typeface="Calibri" pitchFamily="34" charset="-120"/>
-              </a:rPr>
-              <a:t>CloudHealth  ·  Apptio  ·  Vantage  ·  nOps  ·  Finout  ·  CoreStack</a:t>
-            </a:r>
-            <a:endParaRPr lang="en-US" sz="1350" dirty="0"/>
-          </a:p>
-        </p:txBody>
-      </p:sp>
-      <p:sp>
-        <p:nvSpPr>
-          <p:cNvPr id="26" name="Text 24"/>
-          <p:cNvSpPr/>
-          <p:nvPr/>
-        </p:nvSpPr>
-        <p:spPr>
-          <a:xfrm>
-            <a:off x="877824" y="5760720"/>
-            <a:ext cx="1737360" cy="384048"/>
-          </a:xfrm>
-          <a:prstGeom prst="rect">
-            <a:avLst/>
-          </a:prstGeom>
-          <a:noFill/>
-          <a:ln/>
-        </p:spPr>
-        <p:txBody>
-          <a:bodyPr wrap="square" lIns="0" tIns="0" rIns="0" bIns="0" rtlCol="0" anchor="ctr"/>
-          <a:lstStyle/>
-          <a:p>
-            <a:pPr indent="0" marL="0">
-              <a:buNone/>
-            </a:pPr>
-            <a:r>
-              <a:rPr lang="en-US" sz="1350" b="1" dirty="0">
-                <a:solidFill>
-                  <a:srgbClr val="1B2430"/>
-                </a:solidFill>
-                <a:latin typeface="Calibri" pitchFamily="34" charset="0"/>
-                <a:ea typeface="Calibri" pitchFamily="34" charset="-122"/>
-                <a:cs typeface="Calibri" pitchFamily="34" charset="-120"/>
-              </a:rPr>
-              <a:t>Standard</a:t>
-            </a:r>
-            <a:endParaRPr lang="en-US" sz="1350" dirty="0"/>
-          </a:p>
-        </p:txBody>
-      </p:sp>
-      <p:sp>
-        <p:nvSpPr>
-          <p:cNvPr id="27" name="Text 25"/>
-          <p:cNvSpPr/>
-          <p:nvPr/>
-        </p:nvSpPr>
-        <p:spPr>
-          <a:xfrm>
-            <a:off x="2651760" y="5760720"/>
-            <a:ext cx="8595360" cy="384048"/>
-          </a:xfrm>
-          <a:prstGeom prst="rect">
-            <a:avLst/>
-          </a:prstGeom>
-          <a:noFill/>
-          <a:ln/>
-        </p:spPr>
-        <p:txBody>
-          <a:bodyPr wrap="square" lIns="0" tIns="0" rIns="0" bIns="0" rtlCol="0" anchor="ctr"/>
-          <a:lstStyle/>
-          <a:p>
-            <a:pPr indent="0" marL="0">
-              <a:buNone/>
-            </a:pPr>
-            <a:r>
-              <a:rPr lang="en-US" sz="1350" dirty="0">
-                <a:solidFill>
-                  <a:srgbClr val="5C6675"/>
-                </a:solidFill>
-                <a:latin typeface="Calibri" pitchFamily="34" charset="0"/>
-                <a:ea typeface="Calibri" pitchFamily="34" charset="-122"/>
-                <a:cs typeface="Calibri" pitchFamily="34" charset="-120"/>
-              </a:rPr>
-              <a:t>FOCUS-compliant platforms for multi-cloud reporting</a:t>
-            </a:r>
-            <a:endParaRPr lang="en-US" sz="1350" dirty="0"/>
+              <a:t>The goal is not a smaller invoice. It is an invoice with nothing in it you have not already seen, explained and decided about.</a:t>
+            </a:r>
+            <a:endParaRPr lang="en-US" sz="1550" dirty="0"/>
           </a:p>
         </p:txBody>
       </p:sp>
@@ -15127,6 +15308,991 @@
 <file path=ppt/slides/slide21.xml><?xml version="1.0" encoding="utf-8"?>
 <p:sld xmlns:a="http://schemas.openxmlformats.org/drawingml/2006/main" xmlns:r="http://schemas.openxmlformats.org/officeDocument/2006/relationships" xmlns:p="http://schemas.openxmlformats.org/presentationml/2006/main">
   <p:cSld name="Slide 21">
+    <p:bg>
+      <p:bgPr>
+        <a:solidFill>
+          <a:srgbClr val="FFFFFF"/>
+        </a:solidFill>
+      </p:bgPr>
+    </p:bg>
+    <p:spTree>
+      <p:nvGrpSpPr>
+        <p:cNvPr id="1" name=""/>
+        <p:cNvGrpSpPr/>
+        <p:nvPr/>
+      </p:nvGrpSpPr>
+      <p:grpSpPr>
+        <a:xfrm>
+          <a:off x="0" y="0"/>
+          <a:ext cx="0" cy="0"/>
+          <a:chOff x="0" y="0"/>
+          <a:chExt cx="0" cy="0"/>
+        </a:xfrm>
+      </p:grpSpPr>
+      <p:sp>
+        <p:nvSpPr>
+          <p:cNvPr id="2" name="Text 0"/>
+          <p:cNvSpPr/>
+          <p:nvPr/>
+        </p:nvSpPr>
+        <p:spPr>
+          <a:xfrm>
+            <a:off x="548640" y="475488"/>
+            <a:ext cx="7315200" cy="256032"/>
+          </a:xfrm>
+          <a:prstGeom prst="rect">
+            <a:avLst/>
+          </a:prstGeom>
+          <a:noFill/>
+          <a:ln/>
+        </p:spPr>
+        <p:txBody>
+          <a:bodyPr wrap="square" lIns="0" tIns="0" rIns="0" bIns="0" rtlCol="0" anchor="ctr"/>
+          <a:lstStyle/>
+          <a:p>
+            <a:pPr indent="0" marL="0">
+              <a:buNone/>
+            </a:pPr>
+            <a:r>
+              <a:rPr lang="en-US" sz="1100" b="1" spc="220" kern="0" dirty="0">
+                <a:solidFill>
+                  <a:srgbClr val="E39B2C"/>
+                </a:solidFill>
+                <a:latin typeface="Calibri" pitchFamily="34" charset="0"/>
+                <a:ea typeface="Calibri" pitchFamily="34" charset="-122"/>
+                <a:cs typeface="Calibri" pitchFamily="34" charset="-120"/>
+              </a:rPr>
+              <a:t>THE PATH FORWARD</a:t>
+            </a:r>
+            <a:endParaRPr lang="en-US" sz="1100" dirty="0"/>
+          </a:p>
+        </p:txBody>
+      </p:sp>
+      <p:sp>
+        <p:nvSpPr>
+          <p:cNvPr id="3" name="Text 1"/>
+          <p:cNvSpPr/>
+          <p:nvPr/>
+        </p:nvSpPr>
+        <p:spPr>
+          <a:xfrm>
+            <a:off x="548640" y="768096"/>
+            <a:ext cx="11091672" cy="804672"/>
+          </a:xfrm>
+          <a:prstGeom prst="rect">
+            <a:avLst/>
+          </a:prstGeom>
+          <a:noFill/>
+          <a:ln/>
+        </p:spPr>
+        <p:txBody>
+          <a:bodyPr wrap="square" lIns="0" tIns="0" rIns="0" bIns="0" rtlCol="0" anchor="ctr"/>
+          <a:lstStyle/>
+          <a:p>
+            <a:pPr indent="0" marL="0">
+              <a:buNone/>
+            </a:pPr>
+            <a:r>
+              <a:rPr lang="en-US" sz="3100" b="1" dirty="0">
+                <a:solidFill>
+                  <a:srgbClr val="1B2430"/>
+                </a:solidFill>
+                <a:latin typeface="Cambria" pitchFamily="34" charset="0"/>
+                <a:ea typeface="Cambria" pitchFamily="34" charset="-122"/>
+                <a:cs typeface="Cambria" pitchFamily="34" charset="-120"/>
+              </a:rPr>
+              <a:t>Where to start</a:t>
+            </a:r>
+            <a:endParaRPr lang="en-US" sz="3100" dirty="0"/>
+          </a:p>
+        </p:txBody>
+      </p:sp>
+      <p:sp>
+        <p:nvSpPr>
+          <p:cNvPr id="4" name="Shape 2"/>
+          <p:cNvSpPr/>
+          <p:nvPr/>
+        </p:nvSpPr>
+        <p:spPr>
+          <a:xfrm>
+            <a:off x="548640" y="1783080"/>
+            <a:ext cx="2587752" cy="2423160"/>
+          </a:xfrm>
+          <a:prstGeom prst="roundRect">
+            <a:avLst>
+              <a:gd name="adj" fmla="val 3396"/>
+            </a:avLst>
+          </a:prstGeom>
+          <a:solidFill>
+            <a:srgbClr val="1F2936"/>
+          </a:solidFill>
+          <a:ln/>
+        </p:spPr>
+      </p:sp>
+      <p:sp>
+        <p:nvSpPr>
+          <p:cNvPr id="5" name="Text 3"/>
+          <p:cNvSpPr/>
+          <p:nvPr/>
+        </p:nvSpPr>
+        <p:spPr>
+          <a:xfrm>
+            <a:off x="804672" y="1965960"/>
+            <a:ext cx="1097280" cy="502920"/>
+          </a:xfrm>
+          <a:prstGeom prst="rect">
+            <a:avLst/>
+          </a:prstGeom>
+          <a:noFill/>
+          <a:ln/>
+        </p:spPr>
+        <p:txBody>
+          <a:bodyPr wrap="square" lIns="0" tIns="0" rIns="0" bIns="0" rtlCol="0" anchor="ctr"/>
+          <a:lstStyle/>
+          <a:p>
+            <a:pPr indent="0" marL="0">
+              <a:buNone/>
+            </a:pPr>
+            <a:r>
+              <a:rPr lang="en-US" sz="2800" b="1" dirty="0">
+                <a:solidFill>
+                  <a:srgbClr val="E39B2C"/>
+                </a:solidFill>
+                <a:latin typeface="Cambria" pitchFamily="34" charset="0"/>
+                <a:ea typeface="Cambria" pitchFamily="34" charset="-122"/>
+                <a:cs typeface="Cambria" pitchFamily="34" charset="-120"/>
+              </a:rPr>
+              <a:t>01</a:t>
+            </a:r>
+            <a:endParaRPr lang="en-US" sz="2800" dirty="0"/>
+          </a:p>
+        </p:txBody>
+      </p:sp>
+      <p:sp>
+        <p:nvSpPr>
+          <p:cNvPr id="6" name="Text 4"/>
+          <p:cNvSpPr/>
+          <p:nvPr/>
+        </p:nvSpPr>
+        <p:spPr>
+          <a:xfrm>
+            <a:off x="786384" y="2523744"/>
+            <a:ext cx="2139696" cy="786384"/>
+          </a:xfrm>
+          <a:prstGeom prst="rect">
+            <a:avLst/>
+          </a:prstGeom>
+          <a:noFill/>
+          <a:ln/>
+        </p:spPr>
+        <p:txBody>
+          <a:bodyPr wrap="square" lIns="0" tIns="0" rIns="0" bIns="0" rtlCol="0" anchor="t"/>
+          <a:lstStyle/>
+          <a:p>
+            <a:pPr indent="0" marL="0">
+              <a:lnSpc>
+                <a:spcPts val="2000"/>
+              </a:lnSpc>
+              <a:buNone/>
+            </a:pPr>
+            <a:r>
+              <a:rPr lang="en-US" sz="1500" b="1" dirty="0">
+                <a:solidFill>
+                  <a:srgbClr val="FFFFFF"/>
+                </a:solidFill>
+                <a:latin typeface="Cambria" pitchFamily="34" charset="0"/>
+                <a:ea typeface="Cambria" pitchFamily="34" charset="-122"/>
+                <a:cs typeface="Cambria" pitchFamily="34" charset="-120"/>
+              </a:rPr>
+              <a:t>Set the tagging standard</a:t>
+            </a:r>
+            <a:endParaRPr lang="en-US" sz="1500" dirty="0"/>
+          </a:p>
+        </p:txBody>
+      </p:sp>
+      <p:sp>
+        <p:nvSpPr>
+          <p:cNvPr id="7" name="Text 5"/>
+          <p:cNvSpPr/>
+          <p:nvPr/>
+        </p:nvSpPr>
+        <p:spPr>
+          <a:xfrm>
+            <a:off x="786384" y="3346704"/>
+            <a:ext cx="2139696" cy="749808"/>
+          </a:xfrm>
+          <a:prstGeom prst="rect">
+            <a:avLst/>
+          </a:prstGeom>
+          <a:noFill/>
+          <a:ln/>
+        </p:spPr>
+        <p:txBody>
+          <a:bodyPr wrap="square" lIns="0" tIns="0" rIns="0" bIns="0" rtlCol="0" anchor="t"/>
+          <a:lstStyle/>
+          <a:p>
+            <a:pPr indent="0" marL="0">
+              <a:lnSpc>
+                <a:spcPts val="1500"/>
+              </a:lnSpc>
+              <a:buNone/>
+            </a:pPr>
+            <a:r>
+              <a:rPr lang="en-US" sz="1200" dirty="0">
+                <a:solidFill>
+                  <a:srgbClr val="9EABBA"/>
+                </a:solidFill>
+                <a:latin typeface="Calibri" pitchFamily="34" charset="0"/>
+                <a:ea typeface="Calibri" pitchFamily="34" charset="-122"/>
+                <a:cs typeface="Calibri" pitchFamily="34" charset="-120"/>
+              </a:rPr>
+              <a:t>Agree a consistent taxonomy before investing in dashboards.</a:t>
+            </a:r>
+            <a:endParaRPr lang="en-US" sz="1200" dirty="0"/>
+          </a:p>
+        </p:txBody>
+      </p:sp>
+      <p:sp>
+        <p:nvSpPr>
+          <p:cNvPr id="8" name="Shape 6"/>
+          <p:cNvSpPr/>
+          <p:nvPr/>
+        </p:nvSpPr>
+        <p:spPr>
+          <a:xfrm>
+            <a:off x="3383280" y="1783080"/>
+            <a:ext cx="2587752" cy="2423160"/>
+          </a:xfrm>
+          <a:prstGeom prst="roundRect">
+            <a:avLst>
+              <a:gd name="adj" fmla="val 3396"/>
+            </a:avLst>
+          </a:prstGeom>
+          <a:solidFill>
+            <a:srgbClr val="F1F3F6"/>
+          </a:solidFill>
+          <a:ln/>
+        </p:spPr>
+      </p:sp>
+      <p:sp>
+        <p:nvSpPr>
+          <p:cNvPr id="9" name="Text 7"/>
+          <p:cNvSpPr/>
+          <p:nvPr/>
+        </p:nvSpPr>
+        <p:spPr>
+          <a:xfrm>
+            <a:off x="3639312" y="1965960"/>
+            <a:ext cx="1097280" cy="502920"/>
+          </a:xfrm>
+          <a:prstGeom prst="rect">
+            <a:avLst/>
+          </a:prstGeom>
+          <a:noFill/>
+          <a:ln/>
+        </p:spPr>
+        <p:txBody>
+          <a:bodyPr wrap="square" lIns="0" tIns="0" rIns="0" bIns="0" rtlCol="0" anchor="ctr"/>
+          <a:lstStyle/>
+          <a:p>
+            <a:pPr indent="0" marL="0">
+              <a:buNone/>
+            </a:pPr>
+            <a:r>
+              <a:rPr lang="en-US" sz="2800" b="1" dirty="0">
+                <a:solidFill>
+                  <a:srgbClr val="B9C2CD"/>
+                </a:solidFill>
+                <a:latin typeface="Cambria" pitchFamily="34" charset="0"/>
+                <a:ea typeface="Cambria" pitchFamily="34" charset="-122"/>
+                <a:cs typeface="Cambria" pitchFamily="34" charset="-120"/>
+              </a:rPr>
+              <a:t>02</a:t>
+            </a:r>
+            <a:endParaRPr lang="en-US" sz="2800" dirty="0"/>
+          </a:p>
+        </p:txBody>
+      </p:sp>
+      <p:sp>
+        <p:nvSpPr>
+          <p:cNvPr id="10" name="Text 8"/>
+          <p:cNvSpPr/>
+          <p:nvPr/>
+        </p:nvSpPr>
+        <p:spPr>
+          <a:xfrm>
+            <a:off x="3621024" y="2523744"/>
+            <a:ext cx="2139696" cy="786384"/>
+          </a:xfrm>
+          <a:prstGeom prst="rect">
+            <a:avLst/>
+          </a:prstGeom>
+          <a:noFill/>
+          <a:ln/>
+        </p:spPr>
+        <p:txBody>
+          <a:bodyPr wrap="square" lIns="0" tIns="0" rIns="0" bIns="0" rtlCol="0" anchor="t"/>
+          <a:lstStyle/>
+          <a:p>
+            <a:pPr indent="0" marL="0">
+              <a:lnSpc>
+                <a:spcPts val="2000"/>
+              </a:lnSpc>
+              <a:buNone/>
+            </a:pPr>
+            <a:r>
+              <a:rPr lang="en-US" sz="1500" b="1" dirty="0">
+                <a:solidFill>
+                  <a:srgbClr val="1B2430"/>
+                </a:solidFill>
+                <a:latin typeface="Cambria" pitchFamily="34" charset="0"/>
+                <a:ea typeface="Cambria" pitchFamily="34" charset="-122"/>
+                <a:cs typeface="Cambria" pitchFamily="34" charset="-120"/>
+              </a:rPr>
+              <a:t>Start with the biggest spend</a:t>
+            </a:r>
+            <a:endParaRPr lang="en-US" sz="1500" dirty="0"/>
+          </a:p>
+        </p:txBody>
+      </p:sp>
+      <p:sp>
+        <p:nvSpPr>
+          <p:cNvPr id="11" name="Text 9"/>
+          <p:cNvSpPr/>
+          <p:nvPr/>
+        </p:nvSpPr>
+        <p:spPr>
+          <a:xfrm>
+            <a:off x="3621024" y="3346704"/>
+            <a:ext cx="2139696" cy="749808"/>
+          </a:xfrm>
+          <a:prstGeom prst="rect">
+            <a:avLst/>
+          </a:prstGeom>
+          <a:noFill/>
+          <a:ln/>
+        </p:spPr>
+        <p:txBody>
+          <a:bodyPr wrap="square" lIns="0" tIns="0" rIns="0" bIns="0" rtlCol="0" anchor="t"/>
+          <a:lstStyle/>
+          <a:p>
+            <a:pPr indent="0" marL="0">
+              <a:lnSpc>
+                <a:spcPts val="1500"/>
+              </a:lnSpc>
+              <a:buNone/>
+            </a:pPr>
+            <a:r>
+              <a:rPr lang="en-US" sz="1200" dirty="0">
+                <a:solidFill>
+                  <a:srgbClr val="5C6675"/>
+                </a:solidFill>
+                <a:latin typeface="Calibri" pitchFamily="34" charset="0"/>
+                <a:ea typeface="Calibri" pitchFamily="34" charset="-122"/>
+                <a:cs typeface="Calibri" pitchFamily="34" charset="-120"/>
+              </a:rPr>
+              <a:t>Attack the largest categories first. Don't chase perfect granularity everywhere.</a:t>
+            </a:r>
+            <a:endParaRPr lang="en-US" sz="1200" dirty="0"/>
+          </a:p>
+        </p:txBody>
+      </p:sp>
+      <p:sp>
+        <p:nvSpPr>
+          <p:cNvPr id="12" name="Shape 10"/>
+          <p:cNvSpPr/>
+          <p:nvPr/>
+        </p:nvSpPr>
+        <p:spPr>
+          <a:xfrm>
+            <a:off x="6217920" y="1783080"/>
+            <a:ext cx="2587752" cy="2423160"/>
+          </a:xfrm>
+          <a:prstGeom prst="roundRect">
+            <a:avLst>
+              <a:gd name="adj" fmla="val 3396"/>
+            </a:avLst>
+          </a:prstGeom>
+          <a:solidFill>
+            <a:srgbClr val="F1F3F6"/>
+          </a:solidFill>
+          <a:ln/>
+        </p:spPr>
+      </p:sp>
+      <p:sp>
+        <p:nvSpPr>
+          <p:cNvPr id="13" name="Text 11"/>
+          <p:cNvSpPr/>
+          <p:nvPr/>
+        </p:nvSpPr>
+        <p:spPr>
+          <a:xfrm>
+            <a:off x="6473952" y="1965960"/>
+            <a:ext cx="1097280" cy="502920"/>
+          </a:xfrm>
+          <a:prstGeom prst="rect">
+            <a:avLst/>
+          </a:prstGeom>
+          <a:noFill/>
+          <a:ln/>
+        </p:spPr>
+        <p:txBody>
+          <a:bodyPr wrap="square" lIns="0" tIns="0" rIns="0" bIns="0" rtlCol="0" anchor="ctr"/>
+          <a:lstStyle/>
+          <a:p>
+            <a:pPr indent="0" marL="0">
+              <a:buNone/>
+            </a:pPr>
+            <a:r>
+              <a:rPr lang="en-US" sz="2800" b="1" dirty="0">
+                <a:solidFill>
+                  <a:srgbClr val="B9C2CD"/>
+                </a:solidFill>
+                <a:latin typeface="Cambria" pitchFamily="34" charset="0"/>
+                <a:ea typeface="Cambria" pitchFamily="34" charset="-122"/>
+                <a:cs typeface="Cambria" pitchFamily="34" charset="-120"/>
+              </a:rPr>
+              <a:t>03</a:t>
+            </a:r>
+            <a:endParaRPr lang="en-US" sz="2800" dirty="0"/>
+          </a:p>
+        </p:txBody>
+      </p:sp>
+      <p:sp>
+        <p:nvSpPr>
+          <p:cNvPr id="14" name="Text 12"/>
+          <p:cNvSpPr/>
+          <p:nvPr/>
+        </p:nvSpPr>
+        <p:spPr>
+          <a:xfrm>
+            <a:off x="6455664" y="2523744"/>
+            <a:ext cx="2139696" cy="786384"/>
+          </a:xfrm>
+          <a:prstGeom prst="rect">
+            <a:avLst/>
+          </a:prstGeom>
+          <a:noFill/>
+          <a:ln/>
+        </p:spPr>
+        <p:txBody>
+          <a:bodyPr wrap="square" lIns="0" tIns="0" rIns="0" bIns="0" rtlCol="0" anchor="t"/>
+          <a:lstStyle/>
+          <a:p>
+            <a:pPr indent="0" marL="0">
+              <a:lnSpc>
+                <a:spcPts val="2000"/>
+              </a:lnSpc>
+              <a:buNone/>
+            </a:pPr>
+            <a:r>
+              <a:rPr lang="en-US" sz="1500" b="1" dirty="0">
+                <a:solidFill>
+                  <a:srgbClr val="1B2430"/>
+                </a:solidFill>
+                <a:latin typeface="Cambria" pitchFamily="34" charset="0"/>
+                <a:ea typeface="Cambria" pitchFamily="34" charset="-122"/>
+                <a:cs typeface="Cambria" pitchFamily="34" charset="-120"/>
+              </a:rPr>
+              <a:t>Get finance and engineering talking</a:t>
+            </a:r>
+            <a:endParaRPr lang="en-US" sz="1500" dirty="0"/>
+          </a:p>
+        </p:txBody>
+      </p:sp>
+      <p:sp>
+        <p:nvSpPr>
+          <p:cNvPr id="15" name="Text 13"/>
+          <p:cNvSpPr/>
+          <p:nvPr/>
+        </p:nvSpPr>
+        <p:spPr>
+          <a:xfrm>
+            <a:off x="6455664" y="3346704"/>
+            <a:ext cx="2139696" cy="749808"/>
+          </a:xfrm>
+          <a:prstGeom prst="rect">
+            <a:avLst/>
+          </a:prstGeom>
+          <a:noFill/>
+          <a:ln/>
+        </p:spPr>
+        <p:txBody>
+          <a:bodyPr wrap="square" lIns="0" tIns="0" rIns="0" bIns="0" rtlCol="0" anchor="t"/>
+          <a:lstStyle/>
+          <a:p>
+            <a:pPr indent="0" marL="0">
+              <a:lnSpc>
+                <a:spcPts val="1500"/>
+              </a:lnSpc>
+              <a:buNone/>
+            </a:pPr>
+            <a:r>
+              <a:rPr lang="en-US" sz="1200" dirty="0">
+                <a:solidFill>
+                  <a:srgbClr val="5C6675"/>
+                </a:solidFill>
+                <a:latin typeface="Calibri" pitchFamily="34" charset="0"/>
+                <a:ea typeface="Calibri" pitchFamily="34" charset="-122"/>
+                <a:cs typeface="Calibri" pitchFamily="34" charset="-120"/>
+              </a:rPr>
+              <a:t>Bring both into the conversation early, not as an afterthought.</a:t>
+            </a:r>
+            <a:endParaRPr lang="en-US" sz="1200" dirty="0"/>
+          </a:p>
+        </p:txBody>
+      </p:sp>
+      <p:sp>
+        <p:nvSpPr>
+          <p:cNvPr id="16" name="Shape 14"/>
+          <p:cNvSpPr/>
+          <p:nvPr/>
+        </p:nvSpPr>
+        <p:spPr>
+          <a:xfrm>
+            <a:off x="9052560" y="1783080"/>
+            <a:ext cx="2587752" cy="2423160"/>
+          </a:xfrm>
+          <a:prstGeom prst="roundRect">
+            <a:avLst>
+              <a:gd name="adj" fmla="val 3396"/>
+            </a:avLst>
+          </a:prstGeom>
+          <a:solidFill>
+            <a:srgbClr val="F1F3F6"/>
+          </a:solidFill>
+          <a:ln/>
+        </p:spPr>
+      </p:sp>
+      <p:sp>
+        <p:nvSpPr>
+          <p:cNvPr id="17" name="Text 15"/>
+          <p:cNvSpPr/>
+          <p:nvPr/>
+        </p:nvSpPr>
+        <p:spPr>
+          <a:xfrm>
+            <a:off x="9308592" y="1965960"/>
+            <a:ext cx="1097280" cy="502920"/>
+          </a:xfrm>
+          <a:prstGeom prst="rect">
+            <a:avLst/>
+          </a:prstGeom>
+          <a:noFill/>
+          <a:ln/>
+        </p:spPr>
+        <p:txBody>
+          <a:bodyPr wrap="square" lIns="0" tIns="0" rIns="0" bIns="0" rtlCol="0" anchor="ctr"/>
+          <a:lstStyle/>
+          <a:p>
+            <a:pPr indent="0" marL="0">
+              <a:buNone/>
+            </a:pPr>
+            <a:r>
+              <a:rPr lang="en-US" sz="2800" b="1" dirty="0">
+                <a:solidFill>
+                  <a:srgbClr val="B9C2CD"/>
+                </a:solidFill>
+                <a:latin typeface="Cambria" pitchFamily="34" charset="0"/>
+                <a:ea typeface="Cambria" pitchFamily="34" charset="-122"/>
+                <a:cs typeface="Cambria" pitchFamily="34" charset="-120"/>
+              </a:rPr>
+              <a:t>04</a:t>
+            </a:r>
+            <a:endParaRPr lang="en-US" sz="2800" dirty="0"/>
+          </a:p>
+        </p:txBody>
+      </p:sp>
+      <p:sp>
+        <p:nvSpPr>
+          <p:cNvPr id="18" name="Text 16"/>
+          <p:cNvSpPr/>
+          <p:nvPr/>
+        </p:nvSpPr>
+        <p:spPr>
+          <a:xfrm>
+            <a:off x="9290304" y="2523744"/>
+            <a:ext cx="2139696" cy="786384"/>
+          </a:xfrm>
+          <a:prstGeom prst="rect">
+            <a:avLst/>
+          </a:prstGeom>
+          <a:noFill/>
+          <a:ln/>
+        </p:spPr>
+        <p:txBody>
+          <a:bodyPr wrap="square" lIns="0" tIns="0" rIns="0" bIns="0" rtlCol="0" anchor="t"/>
+          <a:lstStyle/>
+          <a:p>
+            <a:pPr indent="0" marL="0">
+              <a:lnSpc>
+                <a:spcPts val="2000"/>
+              </a:lnSpc>
+              <a:buNone/>
+            </a:pPr>
+            <a:r>
+              <a:rPr lang="en-US" sz="1500" b="1" dirty="0">
+                <a:solidFill>
+                  <a:srgbClr val="1B2430"/>
+                </a:solidFill>
+                <a:latin typeface="Cambria" pitchFamily="34" charset="0"/>
+                <a:ea typeface="Cambria" pitchFamily="34" charset="-122"/>
+                <a:cs typeface="Cambria" pitchFamily="34" charset="-120"/>
+              </a:rPr>
+              <a:t>Set guardrails early</a:t>
+            </a:r>
+            <a:endParaRPr lang="en-US" sz="1500" dirty="0"/>
+          </a:p>
+        </p:txBody>
+      </p:sp>
+      <p:sp>
+        <p:nvSpPr>
+          <p:cNvPr id="19" name="Text 17"/>
+          <p:cNvSpPr/>
+          <p:nvPr/>
+        </p:nvSpPr>
+        <p:spPr>
+          <a:xfrm>
+            <a:off x="9290304" y="3346704"/>
+            <a:ext cx="2139696" cy="749808"/>
+          </a:xfrm>
+          <a:prstGeom prst="rect">
+            <a:avLst/>
+          </a:prstGeom>
+          <a:noFill/>
+          <a:ln/>
+        </p:spPr>
+        <p:txBody>
+          <a:bodyPr wrap="square" lIns="0" tIns="0" rIns="0" bIns="0" rtlCol="0" anchor="t"/>
+          <a:lstStyle/>
+          <a:p>
+            <a:pPr indent="0" marL="0">
+              <a:lnSpc>
+                <a:spcPts val="1500"/>
+              </a:lnSpc>
+              <a:buNone/>
+            </a:pPr>
+            <a:r>
+              <a:rPr lang="en-US" sz="1200" dirty="0">
+                <a:solidFill>
+                  <a:srgbClr val="5C6675"/>
+                </a:solidFill>
+                <a:latin typeface="Calibri" pitchFamily="34" charset="0"/>
+                <a:ea typeface="Calibri" pitchFamily="34" charset="-122"/>
+                <a:cs typeface="Calibri" pitchFamily="34" charset="-120"/>
+              </a:rPr>
+              <a:t>Owners, budget thresholds and quotas cost little to add — and stop the expensive surprises.</a:t>
+            </a:r>
+            <a:endParaRPr lang="en-US" sz="1200" dirty="0"/>
+          </a:p>
+        </p:txBody>
+      </p:sp>
+      <p:sp>
+        <p:nvSpPr>
+          <p:cNvPr id="20" name="Shape 18"/>
+          <p:cNvSpPr/>
+          <p:nvPr/>
+        </p:nvSpPr>
+        <p:spPr>
+          <a:xfrm>
+            <a:off x="548640" y="4434840"/>
+            <a:ext cx="11091672" cy="1874520"/>
+          </a:xfrm>
+          <a:prstGeom prst="roundRect">
+            <a:avLst>
+              <a:gd name="adj" fmla="val 4390"/>
+            </a:avLst>
+          </a:prstGeom>
+          <a:solidFill>
+            <a:srgbClr val="F1F3F6"/>
+          </a:solidFill>
+          <a:ln/>
+        </p:spPr>
+      </p:sp>
+      <p:sp>
+        <p:nvSpPr>
+          <p:cNvPr id="21" name="Text 19"/>
+          <p:cNvSpPr/>
+          <p:nvPr/>
+        </p:nvSpPr>
+        <p:spPr>
+          <a:xfrm>
+            <a:off x="877824" y="4572000"/>
+            <a:ext cx="6035040" cy="292608"/>
+          </a:xfrm>
+          <a:prstGeom prst="rect">
+            <a:avLst/>
+          </a:prstGeom>
+          <a:noFill/>
+          <a:ln/>
+        </p:spPr>
+        <p:txBody>
+          <a:bodyPr wrap="square" lIns="0" tIns="0" rIns="0" bIns="0" rtlCol="0" anchor="ctr"/>
+          <a:lstStyle/>
+          <a:p>
+            <a:pPr indent="0" marL="0">
+              <a:buNone/>
+            </a:pPr>
+            <a:r>
+              <a:rPr lang="en-US" sz="1200" b="1" spc="180" kern="0" dirty="0">
+                <a:solidFill>
+                  <a:srgbClr val="5C6675"/>
+                </a:solidFill>
+                <a:latin typeface="Calibri" pitchFamily="34" charset="0"/>
+                <a:ea typeface="Calibri" pitchFamily="34" charset="-122"/>
+                <a:cs typeface="Calibri" pitchFamily="34" charset="-120"/>
+              </a:rPr>
+              <a:t>Tooling — match the footprint, not the ambition</a:t>
+            </a:r>
+            <a:endParaRPr lang="en-US" sz="1200" dirty="0"/>
+          </a:p>
+        </p:txBody>
+      </p:sp>
+      <p:sp>
+        <p:nvSpPr>
+          <p:cNvPr id="22" name="Text 20"/>
+          <p:cNvSpPr/>
+          <p:nvPr/>
+        </p:nvSpPr>
+        <p:spPr>
+          <a:xfrm>
+            <a:off x="877824" y="4937760"/>
+            <a:ext cx="1737360" cy="384048"/>
+          </a:xfrm>
+          <a:prstGeom prst="rect">
+            <a:avLst/>
+          </a:prstGeom>
+          <a:noFill/>
+          <a:ln/>
+        </p:spPr>
+        <p:txBody>
+          <a:bodyPr wrap="square" lIns="0" tIns="0" rIns="0" bIns="0" rtlCol="0" anchor="ctr"/>
+          <a:lstStyle/>
+          <a:p>
+            <a:pPr indent="0" marL="0">
+              <a:buNone/>
+            </a:pPr>
+            <a:r>
+              <a:rPr lang="en-US" sz="1350" b="1" dirty="0">
+                <a:solidFill>
+                  <a:srgbClr val="2E8B7A"/>
+                </a:solidFill>
+                <a:latin typeface="Calibri" pitchFamily="34" charset="0"/>
+                <a:ea typeface="Calibri" pitchFamily="34" charset="-122"/>
+                <a:cs typeface="Calibri" pitchFamily="34" charset="-120"/>
+              </a:rPr>
+              <a:t>Native</a:t>
+            </a:r>
+            <a:endParaRPr lang="en-US" sz="1350" dirty="0"/>
+          </a:p>
+        </p:txBody>
+      </p:sp>
+      <p:sp>
+        <p:nvSpPr>
+          <p:cNvPr id="23" name="Text 21"/>
+          <p:cNvSpPr/>
+          <p:nvPr/>
+        </p:nvSpPr>
+        <p:spPr>
+          <a:xfrm>
+            <a:off x="2651760" y="4937760"/>
+            <a:ext cx="8595360" cy="384048"/>
+          </a:xfrm>
+          <a:prstGeom prst="rect">
+            <a:avLst/>
+          </a:prstGeom>
+          <a:noFill/>
+          <a:ln/>
+        </p:spPr>
+        <p:txBody>
+          <a:bodyPr wrap="square" lIns="0" tIns="0" rIns="0" bIns="0" rtlCol="0" anchor="ctr"/>
+          <a:lstStyle/>
+          <a:p>
+            <a:pPr indent="0" marL="0">
+              <a:buNone/>
+            </a:pPr>
+            <a:r>
+              <a:rPr lang="en-US" sz="1350" dirty="0">
+                <a:solidFill>
+                  <a:srgbClr val="5C6675"/>
+                </a:solidFill>
+                <a:latin typeface="Calibri" pitchFamily="34" charset="0"/>
+                <a:ea typeface="Calibri" pitchFamily="34" charset="-122"/>
+                <a:cs typeface="Calibri" pitchFamily="34" charset="-120"/>
+              </a:rPr>
+              <a:t>AWS Cost Explorer  ·  Azure Cost Management  ·  GCP Billing</a:t>
+            </a:r>
+            <a:endParaRPr lang="en-US" sz="1350" dirty="0"/>
+          </a:p>
+        </p:txBody>
+      </p:sp>
+      <p:sp>
+        <p:nvSpPr>
+          <p:cNvPr id="24" name="Text 22"/>
+          <p:cNvSpPr/>
+          <p:nvPr/>
+        </p:nvSpPr>
+        <p:spPr>
+          <a:xfrm>
+            <a:off x="877824" y="5349240"/>
+            <a:ext cx="1737360" cy="384048"/>
+          </a:xfrm>
+          <a:prstGeom prst="rect">
+            <a:avLst/>
+          </a:prstGeom>
+          <a:noFill/>
+          <a:ln/>
+        </p:spPr>
+        <p:txBody>
+          <a:bodyPr wrap="square" lIns="0" tIns="0" rIns="0" bIns="0" rtlCol="0" anchor="ctr"/>
+          <a:lstStyle/>
+          <a:p>
+            <a:pPr indent="0" marL="0">
+              <a:buNone/>
+            </a:pPr>
+            <a:r>
+              <a:rPr lang="en-US" sz="1350" b="1" dirty="0">
+                <a:solidFill>
+                  <a:srgbClr val="B87B18"/>
+                </a:solidFill>
+                <a:latin typeface="Calibri" pitchFamily="34" charset="0"/>
+                <a:ea typeface="Calibri" pitchFamily="34" charset="-122"/>
+                <a:cs typeface="Calibri" pitchFamily="34" charset="-120"/>
+              </a:rPr>
+              <a:t>Third-party</a:t>
+            </a:r>
+            <a:endParaRPr lang="en-US" sz="1350" dirty="0"/>
+          </a:p>
+        </p:txBody>
+      </p:sp>
+      <p:sp>
+        <p:nvSpPr>
+          <p:cNvPr id="25" name="Text 23"/>
+          <p:cNvSpPr/>
+          <p:nvPr/>
+        </p:nvSpPr>
+        <p:spPr>
+          <a:xfrm>
+            <a:off x="2651760" y="5349240"/>
+            <a:ext cx="8595360" cy="384048"/>
+          </a:xfrm>
+          <a:prstGeom prst="rect">
+            <a:avLst/>
+          </a:prstGeom>
+          <a:noFill/>
+          <a:ln/>
+        </p:spPr>
+        <p:txBody>
+          <a:bodyPr wrap="square" lIns="0" tIns="0" rIns="0" bIns="0" rtlCol="0" anchor="ctr"/>
+          <a:lstStyle/>
+          <a:p>
+            <a:pPr indent="0" marL="0">
+              <a:buNone/>
+            </a:pPr>
+            <a:r>
+              <a:rPr lang="en-US" sz="1350" dirty="0">
+                <a:solidFill>
+                  <a:srgbClr val="5C6675"/>
+                </a:solidFill>
+                <a:latin typeface="Calibri" pitchFamily="34" charset="0"/>
+                <a:ea typeface="Calibri" pitchFamily="34" charset="-122"/>
+                <a:cs typeface="Calibri" pitchFamily="34" charset="-120"/>
+              </a:rPr>
+              <a:t>CloudHealth  ·  Apptio  ·  Vantage  ·  nOps  ·  Finout  ·  CoreStack</a:t>
+            </a:r>
+            <a:endParaRPr lang="en-US" sz="1350" dirty="0"/>
+          </a:p>
+        </p:txBody>
+      </p:sp>
+      <p:sp>
+        <p:nvSpPr>
+          <p:cNvPr id="26" name="Text 24"/>
+          <p:cNvSpPr/>
+          <p:nvPr/>
+        </p:nvSpPr>
+        <p:spPr>
+          <a:xfrm>
+            <a:off x="877824" y="5760720"/>
+            <a:ext cx="1737360" cy="384048"/>
+          </a:xfrm>
+          <a:prstGeom prst="rect">
+            <a:avLst/>
+          </a:prstGeom>
+          <a:noFill/>
+          <a:ln/>
+        </p:spPr>
+        <p:txBody>
+          <a:bodyPr wrap="square" lIns="0" tIns="0" rIns="0" bIns="0" rtlCol="0" anchor="ctr"/>
+          <a:lstStyle/>
+          <a:p>
+            <a:pPr indent="0" marL="0">
+              <a:buNone/>
+            </a:pPr>
+            <a:r>
+              <a:rPr lang="en-US" sz="1350" b="1" dirty="0">
+                <a:solidFill>
+                  <a:srgbClr val="1B2430"/>
+                </a:solidFill>
+                <a:latin typeface="Calibri" pitchFamily="34" charset="0"/>
+                <a:ea typeface="Calibri" pitchFamily="34" charset="-122"/>
+                <a:cs typeface="Calibri" pitchFamily="34" charset="-120"/>
+              </a:rPr>
+              <a:t>Standard</a:t>
+            </a:r>
+            <a:endParaRPr lang="en-US" sz="1350" dirty="0"/>
+          </a:p>
+        </p:txBody>
+      </p:sp>
+      <p:sp>
+        <p:nvSpPr>
+          <p:cNvPr id="27" name="Text 25"/>
+          <p:cNvSpPr/>
+          <p:nvPr/>
+        </p:nvSpPr>
+        <p:spPr>
+          <a:xfrm>
+            <a:off x="2651760" y="5760720"/>
+            <a:ext cx="8595360" cy="384048"/>
+          </a:xfrm>
+          <a:prstGeom prst="rect">
+            <a:avLst/>
+          </a:prstGeom>
+          <a:noFill/>
+          <a:ln/>
+        </p:spPr>
+        <p:txBody>
+          <a:bodyPr wrap="square" lIns="0" tIns="0" rIns="0" bIns="0" rtlCol="0" anchor="ctr"/>
+          <a:lstStyle/>
+          <a:p>
+            <a:pPr indent="0" marL="0">
+              <a:buNone/>
+            </a:pPr>
+            <a:r>
+              <a:rPr lang="en-US" sz="1350" dirty="0">
+                <a:solidFill>
+                  <a:srgbClr val="5C6675"/>
+                </a:solidFill>
+                <a:latin typeface="Calibri" pitchFamily="34" charset="0"/>
+                <a:ea typeface="Calibri" pitchFamily="34" charset="-122"/>
+                <a:cs typeface="Calibri" pitchFamily="34" charset="-120"/>
+              </a:rPr>
+              <a:t>FOCUS-compliant platforms for multi-cloud reporting</a:t>
+            </a:r>
+            <a:endParaRPr lang="en-US" sz="1350" dirty="0"/>
+          </a:p>
+        </p:txBody>
+      </p:sp>
+    </p:spTree>
+  </p:cSld>
+  <p:clrMapOvr>
+    <a:masterClrMapping/>
+  </p:clrMapOvr>
+</p:sld>
+</file>
+
+<file path=ppt/slides/slide22.xml><?xml version="1.0" encoding="utf-8"?>
+<p:sld xmlns:a="http://schemas.openxmlformats.org/drawingml/2006/main" xmlns:r="http://schemas.openxmlformats.org/officeDocument/2006/relationships" xmlns:p="http://schemas.openxmlformats.org/presentationml/2006/main">
+  <p:cSld name="Slide 22">
     <p:bg>
       <p:bgPr>
         <a:solidFill>
@@ -15926,9 +17092,9 @@
 </p:sld>
 </file>
 
-<file path=ppt/slides/slide22.xml><?xml version="1.0" encoding="utf-8"?>
+<file path=ppt/slides/slide23.xml><?xml version="1.0" encoding="utf-8"?>
 <p:sld xmlns:a="http://schemas.openxmlformats.org/drawingml/2006/main" xmlns:r="http://schemas.openxmlformats.org/officeDocument/2006/relationships" xmlns:p="http://schemas.openxmlformats.org/presentationml/2006/main">
-  <p:cSld name="Slide 22">
+  <p:cSld name="Slide 23">
     <p:bg>
       <p:bgPr>
         <a:solidFill>

--- a/presentations/finops-gaining-visibility-cfo.pptx
+++ b/presentations/finops-gaining-visibility-cfo.pptx
@@ -28,9 +28,10 @@
     <p:sldId id="276" r:id="rId22"/>
     <p:sldId id="277" r:id="rId23"/>
     <p:sldId id="278" r:id="rId24"/>
+    <p:sldId id="279" r:id="rId25"/>
   </p:sldIdLst>
   <p:notesMasterIdLst>
-    <p:notesMasterId r:id="rId25"/>
+    <p:notesMasterId r:id="rId26"/>
   </p:notesMasterIdLst>
   <p:sldSz cx="12192000" cy="6858000"/>
   <p:notesSz cx="6858000" cy="12192000"/>
@@ -1404,7 +1405,7 @@
           <a:p>
             <a:r>
               <a:rPr lang="en-US" dirty="0"/>
-              <a:t>The finance reading of this slide is straightforward: the earlier a cost decision is reviewed, the cheaper it is to change, and by the time it reaches an invoice it is effectively fixed. That is the same logic as reviewing a capital request before commitment rather than after — we are simply applying it to architectural choices that commit spend without ever passing through a requisition. Note what this adds to the control environment: an approval point that exists before money is spent, sitting in the engineering workflow rather than in a finance queue. Policy as code is the part to appreciate — budget and tagging rules enforced automatically in the deployment pipeline, which is a preventive control rather than a detective one, and it is auditable. External evidence is worth citing here: pre-deployment architecture costing is the most requested capability in the State of FinOps 2026, so this is where the discipline is heading rather than a local preference.</a:t>
+              <a:t>The finance parallel is a capital request reviewed before commitment rather than after. These architectural decisions commit recurring spend without ever passing through a requisition, and this slide asks for a review point at the moment the commitment is made. The band is the argument: by the time a design is signed off, most of that workload's lifetime cost is fixed. Everything we do later is trimming a base rate we already accepted. Note the resourcing implication, since it is the obvious question — this needs someone's time in design reviews, not a new team. It is the cheapest control on offer here, and the Framework treats it as a defined capability rather than an optional practice.</a:t>
             </a:r>
             <a:endParaRPr lang="en-US" dirty="0"/>
           </a:p>
@@ -1580,7 +1581,7 @@
           <a:p>
             <a:r>
               <a:rPr lang="en-US" dirty="0"/>
-              <a:t>This is the slide to bring to the conversation about why the number moved, because it reframes the problem from cost to timing. The overrun is the same in all four columns; what changes is how much notice we get, and notice is what converts a write-off into a decision. The third point is the one with direct budget consequence — a forecast warning two weeks before month end can still change the month's outcome, while the invoice can only be explained after close. Be careful with the closing line and repeat it verbatim: this programme does not commit to reducing spend by a percentage, it commits to no unexplained variance. That is the promise we can actually keep, and it is worth more at the audit committee than a savings figure nobody can attribute afterwards.</a:t>
+              <a:t>Read two or three of these aloud, because they demonstrate that cost questions at design are engineering questions, not finance interference — which is the objection this slide exists to disarm. The finance-relevant output is at the bottom: a cost estimate attached to the design and a cost target recorded alongside the other non-functional requirements. That gives us a budget baseline that exists before spend starts, which is what makes later variance meaningful — without it, the first actual is the plan. The AI question deserves attention given how quickly that line grows: token volume, cache behaviour and model tier change the unit cost by an order of magnitude, and provisioned capacity is a commitment decision in everything but name.</a:t>
             </a:r>
             <a:endParaRPr lang="en-US" dirty="0"/>
           </a:p>
@@ -1668,7 +1669,7 @@
           <a:p>
             <a:r>
               <a:rPr lang="en-US" dirty="0"/>
-              <a:t>This is the ask, and the honest cost answer is effort rather than licence spend if we stay on native tooling — name the roles and the share of their time instead of quoting a budget number you would have to defend. Step one is the only item that cannot run in parallel: every downstream report degrades if the taxonomy is still moving. Split the ownership explicitly — finance owns the taxonomy, the allocation policy and the KPI definitions; engineering owns enforcement, instrumentation and remediation. Steps two and four are both arguments for restraint: attack the largest cost categories rather than pursuing complete granularity, and buy tooling that matches the estate we have rather than the one we might have in three years.</a:t>
+              <a:t>This is the slide to bring to the conversation about why the number moved, because it reframes the problem from cost to timing. The overrun is the same in all four columns; what changes is how much notice we get, and notice is what converts a write-off into a decision. The third point is the one with direct budget consequence — a forecast warning two weeks before month end can still change the month's outcome, while the invoice can only be explained after close. Be careful with the closing line and repeat it verbatim: this programme does not commit to reducing spend by a percentage, it commits to no unexplained variance. That is the promise we can actually keep, and it is worth more at the audit committee than a savings figure nobody can attribute afterwards.</a:t>
             </a:r>
             <a:endParaRPr lang="en-US" dirty="0"/>
           </a:p>
@@ -1756,7 +1757,7 @@
           <a:p>
             <a:r>
               <a:rPr lang="en-US" dirty="0"/>
-              <a:t>Close on why this sequencing produces a better financial outcome than cutting first. A cut delivers a one-time step down and reverses as soon as attention moves elsewhere; allocation plus ownership changes the rate at which cost is added, which compounds across every subsequent period. That is also the honest framing for the board: the near-term deliverable is explainable variance and a forecast we can stand behind, with targeted savings following the first full period of clean data. Ask for the first two links today — the allocation standard and published ownership — because the rest follow from them and cannot be bought separately.</a:t>
+              <a:t>This is the ask, and the honest cost answer is effort rather than licence spend if we stay on native tooling — name the roles and the share of their time instead of quoting a budget number you would have to defend. Step one is the only item that cannot run in parallel: every downstream report degrades if the taxonomy is still moving. Split the ownership explicitly — finance owns the taxonomy, the allocation policy and the KPI definitions; engineering owns enforcement, instrumentation and remediation. Steps two and four are both arguments for restraint: attack the largest cost categories rather than pursuing complete granularity, and buy tooling that matches the estate we have rather than the one we might have in three years.</a:t>
             </a:r>
             <a:endParaRPr lang="en-US" dirty="0"/>
           </a:p>
@@ -1844,7 +1845,7 @@
           <a:p>
             <a:r>
               <a:rPr lang="en-US" dirty="0"/>
-              <a:t>Expect five questions and have the answers ready. What does it cost: effort, principally, plus any tooling only if we are genuinely multi-cloud. When do savings appear: allocation coverage improves within weeks, targeted savings follow the first full period of clean data, and be careful not to promise a percentage before we can see where the waste is. Who owns it: name the taxonomy owner and the monthly review before leaving the room, or none of this happens. Does it affect the close: better, not worse — daily data improves the accrual, though chargeback adds a journal step worth scoping with the controller. And will chargeback start an internal war: only if we launch it on allocation nobody trusts, which is exactly what the showback runway is for.</a:t>
+              <a:t>Close on why this sequencing produces a better financial outcome than cutting first. A cut delivers a one-time step down and reverses as soon as attention moves elsewhere; allocation plus ownership changes the rate at which cost is added, which compounds across every subsequent period. That is also the honest framing for the board: the near-term deliverable is explainable variance and a forecast we can stand behind, with targeted savings following the first full period of clean data. Ask for the first two links today — the allocation standard and published ownership — because the rest follow from them and cannot be bought separately.</a:t>
             </a:r>
             <a:endParaRPr lang="en-US" dirty="0"/>
           </a:p>
@@ -1868,6 +1869,94 @@
             <a:fld id="{F7021451-1387-4CA6-816F-3879F97B5CBC}" type="slidenum">
               <a:rPr lang="en-US"/>
               <a:t>23</a:t>
+            </a:fld>
+            <a:endParaRPr lang="en-US"/>
+          </a:p>
+        </p:txBody>
+      </p:sp>
+    </p:spTree>
+    <p:extLst>
+      <p:ext uri="{BB962C8B-B14F-4D97-AF65-F5344CB8AC3E}">
+        <p14:creationId xmlns:p14="http://schemas.microsoft.com/office/powerpoint/2010/main" val="1024086991"/>
+      </p:ext>
+    </p:extLst>
+  </p:cSld>
+  <p:clrMapOvr>
+    <a:masterClrMapping/>
+  </p:clrMapOvr>
+</p:notes>
+</file>
+
+<file path=ppt/notesSlides/notesSlide24.xml><?xml version="1.0" encoding="utf-8"?>
+<p:notes xmlns:a="http://schemas.openxmlformats.org/drawingml/2006/main" xmlns:r="http://schemas.openxmlformats.org/officeDocument/2006/relationships" xmlns:p="http://schemas.openxmlformats.org/presentationml/2006/main">
+  <p:cSld>
+    <p:spTree>
+      <p:nvGrpSpPr>
+        <p:cNvPr id="1" name=""/>
+        <p:cNvGrpSpPr/>
+        <p:nvPr/>
+      </p:nvGrpSpPr>
+      <p:grpSpPr>
+        <a:xfrm>
+          <a:off x="0" y="0"/>
+          <a:ext cx="0" cy="0"/>
+          <a:chOff x="0" y="0"/>
+          <a:chExt cx="0" cy="0"/>
+        </a:xfrm>
+      </p:grpSpPr>
+      <p:sp>
+        <p:nvSpPr>
+          <p:cNvPr id="2" name="Slide Image Placeholder 1"/>
+          <p:cNvSpPr>
+            <a:spLocks noGrp="1" noRot="1" noChangeAspect="1"/>
+          </p:cNvSpPr>
+          <p:nvPr>
+            <p:ph type="sldImg"/>
+          </p:nvPr>
+        </p:nvSpPr>
+        <p:spPr/>
+      </p:sp>
+      <p:sp>
+        <p:nvSpPr>
+          <p:cNvPr id="3" name="Notes Placeholder 2"/>
+          <p:cNvSpPr>
+            <a:spLocks noGrp="1"/>
+          </p:cNvSpPr>
+          <p:nvPr>
+            <p:ph type="body" idx="1"/>
+          </p:nvPr>
+        </p:nvSpPr>
+        <p:spPr/>
+        <p:txBody>
+          <a:bodyPr/>
+          <a:lstStyle/>
+          <a:p>
+            <a:r>
+              <a:rPr lang="en-US" dirty="0"/>
+              <a:t>Expect five questions and have the answers ready. What does it cost: effort, principally, plus any tooling only if we are genuinely multi-cloud. When do savings appear: allocation coverage improves within weeks, targeted savings follow the first full period of clean data, and be careful not to promise a percentage before we can see where the waste is. Who owns it: name the taxonomy owner and the monthly review before leaving the room, or none of this happens. Does it affect the close: better, not worse — daily data improves the accrual, though chargeback adds a journal step worth scoping with the controller. And will chargeback start an internal war: only if we launch it on allocation nobody trusts, which is exactly what the showback runway is for.</a:t>
+            </a:r>
+            <a:endParaRPr lang="en-US" dirty="0"/>
+          </a:p>
+        </p:txBody>
+      </p:sp>
+      <p:sp>
+        <p:nvSpPr>
+          <p:cNvPr id="4" name="Slide Number Placeholder 3"/>
+          <p:cNvSpPr>
+            <a:spLocks noGrp="1"/>
+          </p:cNvSpPr>
+          <p:nvPr>
+            <p:ph type="sldNum" sz="quarter" idx="10"/>
+          </p:nvPr>
+        </p:nvSpPr>
+        <p:spPr/>
+        <p:txBody>
+          <a:bodyPr/>
+          <a:lstStyle/>
+          <a:p>
+            <a:fld id="{F7021451-1387-4CA6-816F-3879F97B5CBC}" type="slidenum">
+              <a:rPr lang="en-US"/>
+              <a:t>24</a:t>
             </a:fld>
             <a:endParaRPr lang="en-US"/>
           </a:p>
@@ -12374,7 +12463,7 @@
                 <a:ea typeface="Cambria" pitchFamily="34" charset="-122"/>
                 <a:cs typeface="Cambria" pitchFamily="34" charset="-120"/>
               </a:rPr>
-              <a:t>Catch it at design, not on the invoice</a:t>
+              <a:t>Shift left is a seat at the design table</a:t>
             </a:r>
             <a:endParaRPr lang="en-US" sz="3100" dirty="0"/>
           </a:p>
@@ -12413,7 +12502,7 @@
                 <a:ea typeface="Calibri" pitchFamily="34" charset="-122"/>
                 <a:cs typeface="Calibri" pitchFamily="34" charset="-120"/>
               </a:rPr>
-              <a:t>Cost is a design constraint, reviewed alongside security and reliability — not a report that arrives afterwards.</a:t>
+              <a:t>Not a tool. A change in when FinOps shows up — and the earlier it is, the less of the bill is already decided.</a:t>
             </a:r>
             <a:endParaRPr lang="en-US" sz="1500" dirty="0"/>
           </a:p>
@@ -12421,75 +12510,36 @@
       </p:sp>
       <p:sp>
         <p:nvSpPr>
-          <p:cNvPr id="5" name="Text 3"/>
-          <p:cNvSpPr/>
-          <p:nvPr/>
-        </p:nvSpPr>
-        <p:spPr>
-          <a:xfrm>
-            <a:off x="548640" y="2194560"/>
-            <a:ext cx="4114800" cy="274320"/>
-          </a:xfrm>
-          <a:prstGeom prst="rect">
-            <a:avLst/>
-          </a:prstGeom>
-          <a:noFill/>
-          <a:ln/>
-        </p:spPr>
-        <p:txBody>
-          <a:bodyPr wrap="square" lIns="0" tIns="0" rIns="0" bIns="0" rtlCol="0" anchor="ctr"/>
-          <a:lstStyle/>
-          <a:p>
-            <a:pPr indent="0" marL="0">
-              <a:buNone/>
-            </a:pPr>
-            <a:r>
-              <a:rPr lang="en-US" sz="1200" b="1" spc="180" kern="0" dirty="0">
-                <a:solidFill>
-                  <a:srgbClr val="5C6675"/>
-                </a:solidFill>
-                <a:latin typeface="Calibri" pitchFamily="34" charset="0"/>
-                <a:ea typeface="Calibri" pitchFamily="34" charset="-122"/>
-                <a:cs typeface="Calibri" pitchFamily="34" charset="-120"/>
-              </a:rPr>
-              <a:t>Effort to change the decision</a:t>
-            </a:r>
-            <a:endParaRPr lang="en-US" sz="1200" dirty="0"/>
-          </a:p>
-        </p:txBody>
-      </p:sp>
-      <p:sp>
-        <p:nvSpPr>
-          <p:cNvPr id="6" name="Shape 4"/>
-          <p:cNvSpPr/>
-          <p:nvPr/>
-        </p:nvSpPr>
-        <p:spPr>
-          <a:xfrm>
-            <a:off x="685800" y="4572000"/>
-            <a:ext cx="1188720" cy="457200"/>
+          <p:cNvPr id="5" name="Shape 3"/>
+          <p:cNvSpPr/>
+          <p:nvPr/>
+        </p:nvSpPr>
+        <p:spPr>
+          <a:xfrm>
+            <a:off x="548640" y="2651760"/>
+            <a:ext cx="1773936" cy="566928"/>
           </a:xfrm>
           <a:prstGeom prst="roundRect">
             <a:avLst>
-              <a:gd name="adj" fmla="val 12000"/>
+              <a:gd name="adj" fmla="val 12903"/>
             </a:avLst>
           </a:prstGeom>
           <a:solidFill>
-            <a:srgbClr val="2E8B7A"/>
-          </a:solidFill>
-          <a:ln/>
-        </p:spPr>
-      </p:sp>
-      <p:sp>
-        <p:nvSpPr>
-          <p:cNvPr id="7" name="Text 5"/>
-          <p:cNvSpPr/>
-          <p:nvPr/>
-        </p:nvSpPr>
-        <p:spPr>
-          <a:xfrm>
-            <a:off x="548640" y="5102352"/>
-            <a:ext cx="1463040" cy="274320"/>
+            <a:srgbClr val="FBEFD8"/>
+          </a:solidFill>
+          <a:ln/>
+        </p:spPr>
+      </p:sp>
+      <p:sp>
+        <p:nvSpPr>
+          <p:cNvPr id="6" name="Text 4"/>
+          <p:cNvSpPr/>
+          <p:nvPr/>
+        </p:nvSpPr>
+        <p:spPr>
+          <a:xfrm>
+            <a:off x="548640" y="2651760"/>
+            <a:ext cx="1773936" cy="566928"/>
           </a:xfrm>
           <a:prstGeom prst="rect">
             <a:avLst/>
@@ -12505,91 +12555,52 @@
               <a:buNone/>
             </a:pPr>
             <a:r>
-              <a:rPr lang="en-US" sz="1250" b="1" dirty="0">
-                <a:solidFill>
-                  <a:srgbClr val="1B2430"/>
-                </a:solidFill>
-                <a:latin typeface="Calibri" pitchFamily="34" charset="0"/>
-                <a:ea typeface="Calibri" pitchFamily="34" charset="-122"/>
-                <a:cs typeface="Calibri" pitchFamily="34" charset="-120"/>
-              </a:rPr>
-              <a:t>Design</a:t>
-            </a:r>
-            <a:endParaRPr lang="en-US" sz="1250" dirty="0"/>
-          </a:p>
-        </p:txBody>
-      </p:sp>
-      <p:sp>
-        <p:nvSpPr>
-          <p:cNvPr id="8" name="Text 6"/>
-          <p:cNvSpPr/>
-          <p:nvPr/>
-        </p:nvSpPr>
-        <p:spPr>
-          <a:xfrm>
-            <a:off x="548640" y="5376672"/>
-            <a:ext cx="1463040" cy="256032"/>
-          </a:xfrm>
-          <a:prstGeom prst="rect">
-            <a:avLst/>
-          </a:prstGeom>
-          <a:noFill/>
-          <a:ln/>
-        </p:spPr>
-        <p:txBody>
-          <a:bodyPr wrap="square" lIns="0" tIns="0" rIns="0" bIns="0" rtlCol="0" anchor="ctr"/>
-          <a:lstStyle/>
-          <a:p>
-            <a:pPr algn="ctr" indent="0" marL="0">
-              <a:buNone/>
-            </a:pPr>
-            <a:r>
-              <a:rPr lang="en-US" sz="1150" dirty="0">
-                <a:solidFill>
-                  <a:srgbClr val="5C6675"/>
-                </a:solidFill>
-                <a:latin typeface="Calibri" pitchFamily="34" charset="0"/>
-                <a:ea typeface="Calibri" pitchFamily="34" charset="-122"/>
-                <a:cs typeface="Calibri" pitchFamily="34" charset="-120"/>
-              </a:rPr>
-              <a:t>a conversation</a:t>
-            </a:r>
-            <a:endParaRPr lang="en-US" sz="1150" dirty="0"/>
-          </a:p>
-        </p:txBody>
-      </p:sp>
-      <p:sp>
-        <p:nvSpPr>
-          <p:cNvPr id="9" name="Shape 7"/>
-          <p:cNvSpPr/>
-          <p:nvPr/>
-        </p:nvSpPr>
-        <p:spPr>
-          <a:xfrm>
-            <a:off x="2148840" y="4114800"/>
-            <a:ext cx="1188720" cy="914400"/>
+              <a:rPr lang="en-US" sz="1300" b="1" dirty="0">
+                <a:solidFill>
+                  <a:srgbClr val="6B4A0E"/>
+                </a:solidFill>
+                <a:latin typeface="Calibri" pitchFamily="34" charset="0"/>
+                <a:ea typeface="Calibri" pitchFamily="34" charset="-122"/>
+                <a:cs typeface="Calibri" pitchFamily="34" charset="-120"/>
+              </a:rPr>
+              <a:t>Requirements</a:t>
+            </a:r>
+            <a:endParaRPr lang="en-US" sz="1300" dirty="0"/>
+          </a:p>
+        </p:txBody>
+      </p:sp>
+      <p:sp>
+        <p:nvSpPr>
+          <p:cNvPr id="7" name="Shape 5"/>
+          <p:cNvSpPr/>
+          <p:nvPr/>
+        </p:nvSpPr>
+        <p:spPr>
+          <a:xfrm>
+            <a:off x="2423160" y="2651760"/>
+            <a:ext cx="1773936" cy="566928"/>
           </a:xfrm>
           <a:prstGeom prst="roundRect">
             <a:avLst>
-              <a:gd name="adj" fmla="val 6000"/>
+              <a:gd name="adj" fmla="val 12903"/>
             </a:avLst>
           </a:prstGeom>
           <a:solidFill>
-            <a:srgbClr val="2E8B7A"/>
-          </a:solidFill>
-          <a:ln/>
-        </p:spPr>
-      </p:sp>
-      <p:sp>
-        <p:nvSpPr>
-          <p:cNvPr id="10" name="Text 8"/>
-          <p:cNvSpPr/>
-          <p:nvPr/>
-        </p:nvSpPr>
-        <p:spPr>
-          <a:xfrm>
-            <a:off x="2011680" y="5102352"/>
-            <a:ext cx="1463040" cy="274320"/>
+            <a:srgbClr val="FBEFD8"/>
+          </a:solidFill>
+          <a:ln/>
+        </p:spPr>
+      </p:sp>
+      <p:sp>
+        <p:nvSpPr>
+          <p:cNvPr id="8" name="Text 6"/>
+          <p:cNvSpPr/>
+          <p:nvPr/>
+        </p:nvSpPr>
+        <p:spPr>
+          <a:xfrm>
+            <a:off x="2423160" y="2651760"/>
+            <a:ext cx="1773936" cy="566928"/>
           </a:xfrm>
           <a:prstGeom prst="rect">
             <a:avLst/>
@@ -12605,91 +12616,52 @@
               <a:buNone/>
             </a:pPr>
             <a:r>
-              <a:rPr lang="en-US" sz="1250" b="1" dirty="0">
-                <a:solidFill>
-                  <a:srgbClr val="1B2430"/>
-                </a:solidFill>
-                <a:latin typeface="Calibri" pitchFamily="34" charset="0"/>
-                <a:ea typeface="Calibri" pitchFamily="34" charset="-122"/>
-                <a:cs typeface="Calibri" pitchFamily="34" charset="-120"/>
-              </a:rPr>
-              <a:t>Pull request</a:t>
-            </a:r>
-            <a:endParaRPr lang="en-US" sz="1250" dirty="0"/>
-          </a:p>
-        </p:txBody>
-      </p:sp>
-      <p:sp>
-        <p:nvSpPr>
-          <p:cNvPr id="11" name="Text 9"/>
-          <p:cNvSpPr/>
-          <p:nvPr/>
-        </p:nvSpPr>
-        <p:spPr>
-          <a:xfrm>
-            <a:off x="2011680" y="5376672"/>
-            <a:ext cx="1463040" cy="256032"/>
-          </a:xfrm>
-          <a:prstGeom prst="rect">
-            <a:avLst/>
-          </a:prstGeom>
-          <a:noFill/>
-          <a:ln/>
-        </p:spPr>
-        <p:txBody>
-          <a:bodyPr wrap="square" lIns="0" tIns="0" rIns="0" bIns="0" rtlCol="0" anchor="ctr"/>
-          <a:lstStyle/>
-          <a:p>
-            <a:pPr algn="ctr" indent="0" marL="0">
-              <a:buNone/>
-            </a:pPr>
-            <a:r>
-              <a:rPr lang="en-US" sz="1150" dirty="0">
-                <a:solidFill>
-                  <a:srgbClr val="5C6675"/>
-                </a:solidFill>
-                <a:latin typeface="Calibri" pitchFamily="34" charset="0"/>
-                <a:ea typeface="Calibri" pitchFamily="34" charset="-122"/>
-                <a:cs typeface="Calibri" pitchFamily="34" charset="-120"/>
-              </a:rPr>
-              <a:t>an edit</a:t>
-            </a:r>
-            <a:endParaRPr lang="en-US" sz="1150" dirty="0"/>
-          </a:p>
-        </p:txBody>
-      </p:sp>
-      <p:sp>
-        <p:nvSpPr>
-          <p:cNvPr id="12" name="Shape 10"/>
-          <p:cNvSpPr/>
-          <p:nvPr/>
-        </p:nvSpPr>
-        <p:spPr>
-          <a:xfrm>
-            <a:off x="3611880" y="3337560"/>
-            <a:ext cx="1188720" cy="1691640"/>
+              <a:rPr lang="en-US" sz="1300" b="1" dirty="0">
+                <a:solidFill>
+                  <a:srgbClr val="6B4A0E"/>
+                </a:solidFill>
+                <a:latin typeface="Calibri" pitchFamily="34" charset="0"/>
+                <a:ea typeface="Calibri" pitchFamily="34" charset="-122"/>
+                <a:cs typeface="Calibri" pitchFamily="34" charset="-120"/>
+              </a:rPr>
+              <a:t>Design</a:t>
+            </a:r>
+            <a:endParaRPr lang="en-US" sz="1300" dirty="0"/>
+          </a:p>
+        </p:txBody>
+      </p:sp>
+      <p:sp>
+        <p:nvSpPr>
+          <p:cNvPr id="9" name="Shape 7"/>
+          <p:cNvSpPr/>
+          <p:nvPr/>
+        </p:nvSpPr>
+        <p:spPr>
+          <a:xfrm>
+            <a:off x="4297680" y="2651760"/>
+            <a:ext cx="1773936" cy="566928"/>
           </a:xfrm>
           <a:prstGeom prst="roundRect">
             <a:avLst>
-              <a:gd name="adj" fmla="val 4615"/>
+              <a:gd name="adj" fmla="val 12903"/>
             </a:avLst>
           </a:prstGeom>
           <a:solidFill>
-            <a:srgbClr val="E39B2C"/>
-          </a:solidFill>
-          <a:ln/>
-        </p:spPr>
-      </p:sp>
-      <p:sp>
-        <p:nvSpPr>
-          <p:cNvPr id="13" name="Text 11"/>
-          <p:cNvSpPr/>
-          <p:nvPr/>
-        </p:nvSpPr>
-        <p:spPr>
-          <a:xfrm>
-            <a:off x="3474720" y="5102352"/>
-            <a:ext cx="1463040" cy="274320"/>
+            <a:srgbClr val="F1F3F6"/>
+          </a:solidFill>
+          <a:ln/>
+        </p:spPr>
+      </p:sp>
+      <p:sp>
+        <p:nvSpPr>
+          <p:cNvPr id="10" name="Text 8"/>
+          <p:cNvSpPr/>
+          <p:nvPr/>
+        </p:nvSpPr>
+        <p:spPr>
+          <a:xfrm>
+            <a:off x="4297680" y="2651760"/>
+            <a:ext cx="1773936" cy="566928"/>
           </a:xfrm>
           <a:prstGeom prst="rect">
             <a:avLst/>
@@ -12705,46 +12677,7 @@
               <a:buNone/>
             </a:pPr>
             <a:r>
-              <a:rPr lang="en-US" sz="1250" b="1" dirty="0">
-                <a:solidFill>
-                  <a:srgbClr val="1B2430"/>
-                </a:solidFill>
-                <a:latin typeface="Calibri" pitchFamily="34" charset="0"/>
-                <a:ea typeface="Calibri" pitchFamily="34" charset="-122"/>
-                <a:cs typeface="Calibri" pitchFamily="34" charset="-120"/>
-              </a:rPr>
-              <a:t>Deployed</a:t>
-            </a:r>
-            <a:endParaRPr lang="en-US" sz="1250" dirty="0"/>
-          </a:p>
-        </p:txBody>
-      </p:sp>
-      <p:sp>
-        <p:nvSpPr>
-          <p:cNvPr id="14" name="Text 12"/>
-          <p:cNvSpPr/>
-          <p:nvPr/>
-        </p:nvSpPr>
-        <p:spPr>
-          <a:xfrm>
-            <a:off x="3474720" y="5376672"/>
-            <a:ext cx="1463040" cy="256032"/>
-          </a:xfrm>
-          <a:prstGeom prst="rect">
-            <a:avLst/>
-          </a:prstGeom>
-          <a:noFill/>
-          <a:ln/>
-        </p:spPr>
-        <p:txBody>
-          <a:bodyPr wrap="square" lIns="0" tIns="0" rIns="0" bIns="0" rtlCol="0" anchor="ctr"/>
-          <a:lstStyle/>
-          <a:p>
-            <a:pPr algn="ctr" indent="0" marL="0">
-              <a:buNone/>
-            </a:pPr>
-            <a:r>
-              <a:rPr lang="en-US" sz="1150" dirty="0">
+              <a:rPr lang="en-US" sz="1300" dirty="0">
                 <a:solidFill>
                   <a:srgbClr val="5C6675"/>
                 </a:solidFill>
@@ -12752,44 +12685,44 @@
                 <a:ea typeface="Calibri" pitchFamily="34" charset="-122"/>
                 <a:cs typeface="Calibri" pitchFamily="34" charset="-120"/>
               </a:rPr>
-              <a:t>a migration</a:t>
-            </a:r>
-            <a:endParaRPr lang="en-US" sz="1150" dirty="0"/>
-          </a:p>
-        </p:txBody>
-      </p:sp>
-      <p:sp>
-        <p:nvSpPr>
-          <p:cNvPr id="15" name="Shape 13"/>
-          <p:cNvSpPr/>
-          <p:nvPr/>
-        </p:nvSpPr>
-        <p:spPr>
-          <a:xfrm>
-            <a:off x="5074920" y="2651760"/>
-            <a:ext cx="1188720" cy="2377440"/>
+              <a:t>Build</a:t>
+            </a:r>
+            <a:endParaRPr lang="en-US" sz="1300" dirty="0"/>
+          </a:p>
+        </p:txBody>
+      </p:sp>
+      <p:sp>
+        <p:nvSpPr>
+          <p:cNvPr id="11" name="Shape 9"/>
+          <p:cNvSpPr/>
+          <p:nvPr/>
+        </p:nvSpPr>
+        <p:spPr>
+          <a:xfrm>
+            <a:off x="6172200" y="2651760"/>
+            <a:ext cx="1773936" cy="566928"/>
           </a:xfrm>
           <a:prstGeom prst="roundRect">
             <a:avLst>
-              <a:gd name="adj" fmla="val 4615"/>
+              <a:gd name="adj" fmla="val 12903"/>
             </a:avLst>
           </a:prstGeom>
           <a:solidFill>
-            <a:srgbClr val="A6432F"/>
-          </a:solidFill>
-          <a:ln/>
-        </p:spPr>
-      </p:sp>
-      <p:sp>
-        <p:nvSpPr>
-          <p:cNvPr id="16" name="Text 14"/>
-          <p:cNvSpPr/>
-          <p:nvPr/>
-        </p:nvSpPr>
-        <p:spPr>
-          <a:xfrm>
-            <a:off x="4937760" y="5102352"/>
-            <a:ext cx="1463040" cy="274320"/>
+            <a:srgbClr val="F1F3F6"/>
+          </a:solidFill>
+          <a:ln/>
+        </p:spPr>
+      </p:sp>
+      <p:sp>
+        <p:nvSpPr>
+          <p:cNvPr id="12" name="Text 10"/>
+          <p:cNvSpPr/>
+          <p:nvPr/>
+        </p:nvSpPr>
+        <p:spPr>
+          <a:xfrm>
+            <a:off x="6172200" y="2651760"/>
+            <a:ext cx="1773936" cy="566928"/>
           </a:xfrm>
           <a:prstGeom prst="rect">
             <a:avLst/>
@@ -12805,46 +12738,7 @@
               <a:buNone/>
             </a:pPr>
             <a:r>
-              <a:rPr lang="en-US" sz="1250" b="1" dirty="0">
-                <a:solidFill>
-                  <a:srgbClr val="1B2430"/>
-                </a:solidFill>
-                <a:latin typeface="Calibri" pitchFamily="34" charset="0"/>
-                <a:ea typeface="Calibri" pitchFamily="34" charset="-122"/>
-                <a:cs typeface="Calibri" pitchFamily="34" charset="-120"/>
-              </a:rPr>
-              <a:t>Invoiced</a:t>
-            </a:r>
-            <a:endParaRPr lang="en-US" sz="1250" dirty="0"/>
-          </a:p>
-        </p:txBody>
-      </p:sp>
-      <p:sp>
-        <p:nvSpPr>
-          <p:cNvPr id="17" name="Text 15"/>
-          <p:cNvSpPr/>
-          <p:nvPr/>
-        </p:nvSpPr>
-        <p:spPr>
-          <a:xfrm>
-            <a:off x="4937760" y="5376672"/>
-            <a:ext cx="1463040" cy="256032"/>
-          </a:xfrm>
-          <a:prstGeom prst="rect">
-            <a:avLst/>
-          </a:prstGeom>
-          <a:noFill/>
-          <a:ln/>
-        </p:spPr>
-        <p:txBody>
-          <a:bodyPr wrap="square" lIns="0" tIns="0" rIns="0" bIns="0" rtlCol="0" anchor="ctr"/>
-          <a:lstStyle/>
-          <a:p>
-            <a:pPr algn="ctr" indent="0" marL="0">
-              <a:buNone/>
-            </a:pPr>
-            <a:r>
-              <a:rPr lang="en-US" sz="1150" dirty="0">
+              <a:rPr lang="en-US" sz="1300" dirty="0">
                 <a:solidFill>
                   <a:srgbClr val="5C6675"/>
                 </a:solidFill>
@@ -12852,89 +12746,299 @@
                 <a:ea typeface="Calibri" pitchFamily="34" charset="-122"/>
                 <a:cs typeface="Calibri" pitchFamily="34" charset="-120"/>
               </a:rPr>
-              <a:t>a negotiation</a:t>
-            </a:r>
-            <a:endParaRPr lang="en-US" sz="1150" dirty="0"/>
-          </a:p>
-        </p:txBody>
-      </p:sp>
-      <p:sp>
-        <p:nvSpPr>
-          <p:cNvPr id="18" name="Shape 16"/>
-          <p:cNvSpPr/>
-          <p:nvPr/>
-        </p:nvSpPr>
-        <p:spPr>
-          <a:xfrm>
-            <a:off x="548640" y="5029200"/>
-            <a:ext cx="5989320" cy="36576"/>
+              <a:t>Deploy</a:t>
+            </a:r>
+            <a:endParaRPr lang="en-US" sz="1300" dirty="0"/>
+          </a:p>
+        </p:txBody>
+      </p:sp>
+      <p:sp>
+        <p:nvSpPr>
+          <p:cNvPr id="13" name="Shape 11"/>
+          <p:cNvSpPr/>
+          <p:nvPr/>
+        </p:nvSpPr>
+        <p:spPr>
+          <a:xfrm>
+            <a:off x="8046720" y="2651760"/>
+            <a:ext cx="1773936" cy="566928"/>
           </a:xfrm>
           <a:prstGeom prst="roundRect">
             <a:avLst>
-              <a:gd name="adj" fmla="val 50000"/>
+              <a:gd name="adj" fmla="val 12903"/>
             </a:avLst>
           </a:prstGeom>
           <a:solidFill>
-            <a:srgbClr val="DFE4EA"/>
-          </a:solidFill>
-          <a:ln/>
-        </p:spPr>
-      </p:sp>
-      <p:sp>
-        <p:nvSpPr>
-          <p:cNvPr id="19" name="Shape 17"/>
-          <p:cNvSpPr/>
-          <p:nvPr/>
-        </p:nvSpPr>
-        <p:spPr>
-          <a:xfrm>
-            <a:off x="6858000" y="2084832"/>
-            <a:ext cx="4782312" cy="3602736"/>
+            <a:srgbClr val="F1F3F6"/>
+          </a:solidFill>
+          <a:ln/>
+        </p:spPr>
+      </p:sp>
+      <p:sp>
+        <p:nvSpPr>
+          <p:cNvPr id="14" name="Text 12"/>
+          <p:cNvSpPr/>
+          <p:nvPr/>
+        </p:nvSpPr>
+        <p:spPr>
+          <a:xfrm>
+            <a:off x="8046720" y="2651760"/>
+            <a:ext cx="1773936" cy="566928"/>
+          </a:xfrm>
+          <a:prstGeom prst="rect">
+            <a:avLst/>
+          </a:prstGeom>
+          <a:noFill/>
+          <a:ln/>
+        </p:spPr>
+        <p:txBody>
+          <a:bodyPr wrap="square" lIns="0" tIns="0" rIns="0" bIns="0" rtlCol="0" anchor="ctr"/>
+          <a:lstStyle/>
+          <a:p>
+            <a:pPr algn="ctr" indent="0" marL="0">
+              <a:buNone/>
+            </a:pPr>
+            <a:r>
+              <a:rPr lang="en-US" sz="1300" dirty="0">
+                <a:solidFill>
+                  <a:srgbClr val="5C6675"/>
+                </a:solidFill>
+                <a:latin typeface="Calibri" pitchFamily="34" charset="0"/>
+                <a:ea typeface="Calibri" pitchFamily="34" charset="-122"/>
+                <a:cs typeface="Calibri" pitchFamily="34" charset="-120"/>
+              </a:rPr>
+              <a:t>Run</a:t>
+            </a:r>
+            <a:endParaRPr lang="en-US" sz="1300" dirty="0"/>
+          </a:p>
+        </p:txBody>
+      </p:sp>
+      <p:sp>
+        <p:nvSpPr>
+          <p:cNvPr id="15" name="Shape 13"/>
+          <p:cNvSpPr/>
+          <p:nvPr/>
+        </p:nvSpPr>
+        <p:spPr>
+          <a:xfrm>
+            <a:off x="9921240" y="2651760"/>
+            <a:ext cx="1773936" cy="566928"/>
           </a:xfrm>
           <a:prstGeom prst="roundRect">
             <a:avLst>
-              <a:gd name="adj" fmla="val 2284"/>
+              <a:gd name="adj" fmla="val 12903"/>
             </a:avLst>
           </a:prstGeom>
           <a:solidFill>
+            <a:srgbClr val="F1F3F6"/>
+          </a:solidFill>
+          <a:ln/>
+        </p:spPr>
+      </p:sp>
+      <p:sp>
+        <p:nvSpPr>
+          <p:cNvPr id="16" name="Text 14"/>
+          <p:cNvSpPr/>
+          <p:nvPr/>
+        </p:nvSpPr>
+        <p:spPr>
+          <a:xfrm>
+            <a:off x="9921240" y="2651760"/>
+            <a:ext cx="1773936" cy="566928"/>
+          </a:xfrm>
+          <a:prstGeom prst="rect">
+            <a:avLst/>
+          </a:prstGeom>
+          <a:noFill/>
+          <a:ln/>
+        </p:spPr>
+        <p:txBody>
+          <a:bodyPr wrap="square" lIns="0" tIns="0" rIns="0" bIns="0" rtlCol="0" anchor="ctr"/>
+          <a:lstStyle/>
+          <a:p>
+            <a:pPr algn="ctr" indent="0" marL="0">
+              <a:buNone/>
+            </a:pPr>
+            <a:r>
+              <a:rPr lang="en-US" sz="1300" dirty="0">
+                <a:solidFill>
+                  <a:srgbClr val="5C6675"/>
+                </a:solidFill>
+                <a:latin typeface="Calibri" pitchFamily="34" charset="0"/>
+                <a:ea typeface="Calibri" pitchFamily="34" charset="-122"/>
+                <a:cs typeface="Calibri" pitchFamily="34" charset="-120"/>
+              </a:rPr>
+              <a:t>Invoice</a:t>
+            </a:r>
+            <a:endParaRPr lang="en-US" sz="1300" dirty="0"/>
+          </a:p>
+        </p:txBody>
+      </p:sp>
+      <p:sp>
+        <p:nvSpPr>
+          <p:cNvPr id="17" name="Text 15"/>
+          <p:cNvSpPr/>
+          <p:nvPr/>
+        </p:nvSpPr>
+        <p:spPr>
+          <a:xfrm>
+            <a:off x="548640" y="2267712"/>
+            <a:ext cx="3749040" cy="310896"/>
+          </a:xfrm>
+          <a:prstGeom prst="rect">
+            <a:avLst/>
+          </a:prstGeom>
+          <a:noFill/>
+          <a:ln/>
+        </p:spPr>
+        <p:txBody>
+          <a:bodyPr wrap="square" lIns="0" tIns="0" rIns="0" bIns="0" rtlCol="0" anchor="ctr"/>
+          <a:lstStyle/>
+          <a:p>
+            <a:pPr indent="0" marL="0">
+              <a:buNone/>
+            </a:pPr>
+            <a:r>
+              <a:rPr lang="en-US" sz="1200" b="1" spc="140" kern="0" dirty="0">
+                <a:solidFill>
+                  <a:srgbClr val="B87B18"/>
+                </a:solidFill>
+                <a:latin typeface="Calibri" pitchFamily="34" charset="0"/>
+                <a:ea typeface="Calibri" pitchFamily="34" charset="-122"/>
+                <a:cs typeface="Calibri" pitchFamily="34" charset="-120"/>
+              </a:rPr>
+              <a:t>Where FinOps belongs</a:t>
+            </a:r>
+            <a:endParaRPr lang="en-US" sz="1200" dirty="0"/>
+          </a:p>
+        </p:txBody>
+      </p:sp>
+      <p:sp>
+        <p:nvSpPr>
+          <p:cNvPr id="18" name="Text 16"/>
+          <p:cNvSpPr/>
+          <p:nvPr/>
+        </p:nvSpPr>
+        <p:spPr>
+          <a:xfrm>
+            <a:off x="8046720" y="3310128"/>
+            <a:ext cx="3593592" cy="310896"/>
+          </a:xfrm>
+          <a:prstGeom prst="rect">
+            <a:avLst/>
+          </a:prstGeom>
+          <a:noFill/>
+          <a:ln/>
+        </p:spPr>
+        <p:txBody>
+          <a:bodyPr wrap="square" lIns="0" tIns="0" rIns="0" bIns="0" rtlCol="0" anchor="ctr"/>
+          <a:lstStyle/>
+          <a:p>
+            <a:pPr algn="r" indent="0" marL="0">
+              <a:buNone/>
+            </a:pPr>
+            <a:r>
+              <a:rPr lang="en-US" sz="1200" b="1" spc="140" kern="0" dirty="0">
+                <a:solidFill>
+                  <a:srgbClr val="5C6675"/>
+                </a:solidFill>
+                <a:latin typeface="Calibri" pitchFamily="34" charset="0"/>
+                <a:ea typeface="Calibri" pitchFamily="34" charset="-122"/>
+                <a:cs typeface="Calibri" pitchFamily="34" charset="-120"/>
+              </a:rPr>
+              <a:t>Where FinOps usually arrives</a:t>
+            </a:r>
+            <a:endParaRPr lang="en-US" sz="1200" dirty="0"/>
+          </a:p>
+        </p:txBody>
+      </p:sp>
+      <p:sp>
+        <p:nvSpPr>
+          <p:cNvPr id="19" name="Text 17"/>
+          <p:cNvSpPr/>
+          <p:nvPr/>
+        </p:nvSpPr>
+        <p:spPr>
+          <a:xfrm>
+            <a:off x="548640" y="3310128"/>
+            <a:ext cx="5486400" cy="310896"/>
+          </a:xfrm>
+          <a:prstGeom prst="rect">
+            <a:avLst/>
+          </a:prstGeom>
+          <a:noFill/>
+          <a:ln/>
+        </p:spPr>
+        <p:txBody>
+          <a:bodyPr wrap="square" lIns="0" tIns="0" rIns="0" bIns="0" rtlCol="0" anchor="ctr"/>
+          <a:lstStyle/>
+          <a:p>
+            <a:pPr indent="0" marL="0">
+              <a:buNone/>
+            </a:pPr>
+            <a:r>
+              <a:rPr lang="en-US" sz="1250" dirty="0">
+                <a:solidFill>
+                  <a:srgbClr val="1B2430"/>
+                </a:solidFill>
+                <a:latin typeface="Calibri" pitchFamily="34" charset="0"/>
+                <a:ea typeface="Calibri" pitchFamily="34" charset="-122"/>
+                <a:cs typeface="Calibri" pitchFamily="34" charset="-120"/>
+              </a:rPr>
+              <a:t>Most of the lifetime cost is committed here.</a:t>
+            </a:r>
+            <a:endParaRPr lang="en-US" sz="1250" dirty="0"/>
+          </a:p>
+        </p:txBody>
+      </p:sp>
+      <p:sp>
+        <p:nvSpPr>
+          <p:cNvPr id="20" name="Shape 18"/>
+          <p:cNvSpPr/>
+          <p:nvPr/>
+        </p:nvSpPr>
+        <p:spPr>
+          <a:xfrm>
+            <a:off x="548640" y="3913632"/>
+            <a:ext cx="5394960" cy="2121408"/>
+          </a:xfrm>
+          <a:prstGeom prst="roundRect">
+            <a:avLst>
+              <a:gd name="adj" fmla="val 3879"/>
+            </a:avLst>
+          </a:prstGeom>
+          <a:solidFill>
             <a:srgbClr val="1F2936"/>
           </a:solidFill>
           <a:ln/>
-          <a:effectLst>
-            <a:outerShdw sx="100000" sy="100000" kx="0" ky="0" algn="bl" rotWithShape="0" blurRad="127000" dist="25400" dir="5400000">
-              <a:srgbClr val="8C99A8">
-                <a:alpha val="16000"/>
-              </a:srgbClr>
-            </a:outerShdw>
-          </a:effectLst>
-        </p:spPr>
-      </p:sp>
-      <p:sp>
-        <p:nvSpPr>
-          <p:cNvPr id="20" name="Text 18"/>
-          <p:cNvSpPr/>
-          <p:nvPr/>
-        </p:nvSpPr>
-        <p:spPr>
-          <a:xfrm>
-            <a:off x="7168896" y="2267712"/>
-            <a:ext cx="4114800" cy="292608"/>
-          </a:xfrm>
-          <a:prstGeom prst="rect">
-            <a:avLst/>
-          </a:prstGeom>
-          <a:noFill/>
-          <a:ln/>
-        </p:spPr>
-        <p:txBody>
-          <a:bodyPr wrap="square" lIns="0" tIns="0" rIns="0" bIns="0" rtlCol="0" anchor="ctr"/>
-          <a:lstStyle/>
-          <a:p>
-            <a:pPr indent="0" marL="0">
-              <a:buNone/>
-            </a:pPr>
-            <a:r>
-              <a:rPr lang="en-US" sz="1200" b="1" spc="180" kern="0" dirty="0">
+        </p:spPr>
+      </p:sp>
+      <p:sp>
+        <p:nvSpPr>
+          <p:cNvPr id="21" name="Text 19"/>
+          <p:cNvSpPr/>
+          <p:nvPr/>
+        </p:nvSpPr>
+        <p:spPr>
+          <a:xfrm>
+            <a:off x="859536" y="4078224"/>
+            <a:ext cx="4754880" cy="274320"/>
+          </a:xfrm>
+          <a:prstGeom prst="rect">
+            <a:avLst/>
+          </a:prstGeom>
+          <a:noFill/>
+          <a:ln/>
+        </p:spPr>
+        <p:txBody>
+          <a:bodyPr wrap="square" lIns="0" tIns="0" rIns="0" bIns="0" rtlCol="0" anchor="ctr"/>
+          <a:lstStyle/>
+          <a:p>
+            <a:pPr indent="0" marL="0">
+              <a:buNone/>
+            </a:pPr>
+            <a:r>
+              <a:rPr lang="en-US" sz="1100" b="1" spc="140" kern="0" dirty="0">
                 <a:solidFill>
                   <a:srgbClr val="E39B2C"/>
                 </a:solidFill>
@@ -12942,75 +13046,51 @@
                 <a:ea typeface="Calibri" pitchFamily="34" charset="-122"/>
                 <a:cs typeface="Calibri" pitchFamily="34" charset="-120"/>
               </a:rPr>
-              <a:t>Where cost enters the workflow</a:t>
-            </a:r>
-            <a:endParaRPr lang="en-US" sz="1200" dirty="0"/>
-          </a:p>
-        </p:txBody>
-      </p:sp>
-      <p:sp>
-        <p:nvSpPr>
-          <p:cNvPr id="21" name="Shape 19"/>
-          <p:cNvSpPr/>
-          <p:nvPr/>
-        </p:nvSpPr>
-        <p:spPr>
-          <a:xfrm>
-            <a:off x="7168896" y="2743200"/>
-            <a:ext cx="420624" cy="420624"/>
+              <a:t>WHAT FINOPS BRINGS TO THE ROOM</a:t>
+            </a:r>
+            <a:endParaRPr lang="en-US" sz="1100" dirty="0"/>
+          </a:p>
+        </p:txBody>
+      </p:sp>
+      <p:sp>
+        <p:nvSpPr>
+          <p:cNvPr id="22" name="Shape 20"/>
+          <p:cNvSpPr/>
+          <p:nvPr/>
+        </p:nvSpPr>
+        <p:spPr>
+          <a:xfrm>
+            <a:off x="877824" y="4590288"/>
+            <a:ext cx="100584" cy="100584"/>
           </a:xfrm>
           <a:prstGeom prst="ellipse">
             <a:avLst/>
           </a:prstGeom>
           <a:solidFill>
-            <a:srgbClr val="2E3A48"/>
-          </a:solidFill>
-          <a:ln/>
-        </p:spPr>
-      </p:sp>
-      <p:pic>
-        <p:nvPicPr>
-          <p:cNvPr id="22" name="Image 0" descr="preencoded.png">    </p:cNvPr>
-          <p:cNvPicPr>
-            <a:picLocks noChangeAspect="1"/>
-          </p:cNvPicPr>
-          <p:nvPr/>
-        </p:nvPicPr>
-        <p:blipFill>
-          <a:blip r:embed="rId1"/>
-          <a:stretch>
-            <a:fillRect/>
-          </a:stretch>
-        </p:blipFill>
-        <p:spPr>
-          <a:xfrm>
-            <a:off x="7274052" y="2848356"/>
-            <a:ext cx="210312" cy="210312"/>
-          </a:xfrm>
-          <a:prstGeom prst="rect">
-            <a:avLst/>
-          </a:prstGeom>
-        </p:spPr>
-      </p:pic>
-      <p:sp>
-        <p:nvSpPr>
-          <p:cNvPr id="23" name="Text 20"/>
-          <p:cNvSpPr/>
-          <p:nvPr/>
-        </p:nvSpPr>
-        <p:spPr>
-          <a:xfrm>
-            <a:off x="7735824" y="2670048"/>
-            <a:ext cx="3602736" cy="914400"/>
-          </a:xfrm>
-          <a:prstGeom prst="rect">
-            <a:avLst/>
-          </a:prstGeom>
-          <a:noFill/>
-          <a:ln/>
-        </p:spPr>
-        <p:txBody>
-          <a:bodyPr wrap="square" lIns="0" tIns="0" rIns="0" bIns="0" rtlCol="0" anchor="ctr"/>
+            <a:srgbClr val="E39B2C"/>
+          </a:solidFill>
+          <a:ln/>
+        </p:spPr>
+      </p:sp>
+      <p:sp>
+        <p:nvSpPr>
+          <p:cNvPr id="23" name="Text 21"/>
+          <p:cNvSpPr/>
+          <p:nvPr/>
+        </p:nvSpPr>
+        <p:spPr>
+          <a:xfrm>
+            <a:off x="1115568" y="4443984"/>
+            <a:ext cx="4517136" cy="512064"/>
+          </a:xfrm>
+          <a:prstGeom prst="rect">
+            <a:avLst/>
+          </a:prstGeom>
+          <a:noFill/>
+          <a:ln/>
+        </p:spPr>
+        <p:txBody>
+          <a:bodyPr wrap="square" lIns="0" tIns="0" rIns="0" bIns="0" rtlCol="0" anchor="t"/>
           <a:lstStyle/>
           <a:p>
             <a:pPr indent="0" marL="0">
@@ -13020,7 +13100,7 @@
               <a:buNone/>
             </a:pPr>
             <a:r>
-              <a:rPr lang="en-US" sz="1350" b="1" dirty="0">
+              <a:rPr lang="en-US" sz="1250" b="1" dirty="0">
                 <a:solidFill>
                   <a:srgbClr val="FFFFFF"/>
                 </a:solidFill>
@@ -13028,11 +13108,8 @@
                 <a:ea typeface="Calibri" pitchFamily="34" charset="-122"/>
                 <a:cs typeface="Calibri" pitchFamily="34" charset="-120"/>
               </a:rPr>
-              <a:t>Architecture review</a:t>
-            </a:r>
-            <a:endParaRPr lang="en-US" sz="1350" dirty="0"/>
-          </a:p>
-          <a:p>
+              <a:t>Two or three options, priced  </a:t>
+            </a:r>
             <a:pPr indent="0" marL="0">
               <a:lnSpc>
                 <a:spcPts val="1600"/>
@@ -13040,7 +13117,7 @@
               <a:buNone/>
             </a:pPr>
             <a:r>
-              <a:rPr lang="en-US" sz="1200" dirty="0">
+              <a:rPr lang="en-US" sz="1250" dirty="0">
                 <a:solidFill>
                   <a:srgbClr val="9EABBA"/>
                 </a:solidFill>
@@ -13048,75 +13125,51 @@
                 <a:ea typeface="Calibri" pitchFamily="34" charset="-122"/>
                 <a:cs typeface="Calibri" pitchFamily="34" charset="-120"/>
               </a:rPr>
-              <a:t>Price two or three options before choosing one. Multi-AZ or single, this SKU or that.</a:t>
-            </a:r>
-            <a:endParaRPr lang="en-US" sz="1350" dirty="0"/>
-          </a:p>
-        </p:txBody>
-      </p:sp>
-      <p:sp>
-        <p:nvSpPr>
-          <p:cNvPr id="24" name="Shape 21"/>
-          <p:cNvSpPr/>
-          <p:nvPr/>
-        </p:nvSpPr>
-        <p:spPr>
-          <a:xfrm>
-            <a:off x="7168896" y="3730752"/>
-            <a:ext cx="420624" cy="420624"/>
+              <a:t>The choice gets made with the number visible.</a:t>
+            </a:r>
+            <a:endParaRPr lang="en-US" sz="1250" dirty="0"/>
+          </a:p>
+        </p:txBody>
+      </p:sp>
+      <p:sp>
+        <p:nvSpPr>
+          <p:cNvPr id="24" name="Shape 22"/>
+          <p:cNvSpPr/>
+          <p:nvPr/>
+        </p:nvSpPr>
+        <p:spPr>
+          <a:xfrm>
+            <a:off x="877824" y="5120640"/>
+            <a:ext cx="100584" cy="100584"/>
           </a:xfrm>
           <a:prstGeom prst="ellipse">
             <a:avLst/>
           </a:prstGeom>
           <a:solidFill>
-            <a:srgbClr val="2E3A48"/>
-          </a:solidFill>
-          <a:ln/>
-        </p:spPr>
-      </p:sp>
-      <p:pic>
-        <p:nvPicPr>
-          <p:cNvPr id="25" name="Image 1" descr="preencoded.png">    </p:cNvPr>
-          <p:cNvPicPr>
-            <a:picLocks noChangeAspect="1"/>
-          </p:cNvPicPr>
-          <p:nvPr/>
-        </p:nvPicPr>
-        <p:blipFill>
-          <a:blip r:embed="rId2"/>
-          <a:stretch>
-            <a:fillRect/>
-          </a:stretch>
-        </p:blipFill>
-        <p:spPr>
-          <a:xfrm>
-            <a:off x="7274052" y="3835908"/>
-            <a:ext cx="210312" cy="210312"/>
-          </a:xfrm>
-          <a:prstGeom prst="rect">
-            <a:avLst/>
-          </a:prstGeom>
-        </p:spPr>
-      </p:pic>
-      <p:sp>
-        <p:nvSpPr>
-          <p:cNvPr id="26" name="Text 22"/>
-          <p:cNvSpPr/>
-          <p:nvPr/>
-        </p:nvSpPr>
-        <p:spPr>
-          <a:xfrm>
-            <a:off x="7735824" y="3657600"/>
-            <a:ext cx="3602736" cy="914400"/>
-          </a:xfrm>
-          <a:prstGeom prst="rect">
-            <a:avLst/>
-          </a:prstGeom>
-          <a:noFill/>
-          <a:ln/>
-        </p:spPr>
-        <p:txBody>
-          <a:bodyPr wrap="square" lIns="0" tIns="0" rIns="0" bIns="0" rtlCol="0" anchor="ctr"/>
+            <a:srgbClr val="E39B2C"/>
+          </a:solidFill>
+          <a:ln/>
+        </p:spPr>
+      </p:sp>
+      <p:sp>
+        <p:nvSpPr>
+          <p:cNvPr id="25" name="Text 23"/>
+          <p:cNvSpPr/>
+          <p:nvPr/>
+        </p:nvSpPr>
+        <p:spPr>
+          <a:xfrm>
+            <a:off x="1115568" y="4974336"/>
+            <a:ext cx="4517136" cy="512064"/>
+          </a:xfrm>
+          <a:prstGeom prst="rect">
+            <a:avLst/>
+          </a:prstGeom>
+          <a:noFill/>
+          <a:ln/>
+        </p:spPr>
+        <p:txBody>
+          <a:bodyPr wrap="square" lIns="0" tIns="0" rIns="0" bIns="0" rtlCol="0" anchor="t"/>
           <a:lstStyle/>
           <a:p>
             <a:pPr indent="0" marL="0">
@@ -13126,7 +13179,7 @@
               <a:buNone/>
             </a:pPr>
             <a:r>
-              <a:rPr lang="en-US" sz="1350" b="1" dirty="0">
+              <a:rPr lang="en-US" sz="1250" b="1" dirty="0">
                 <a:solidFill>
                   <a:srgbClr val="FFFFFF"/>
                 </a:solidFill>
@@ -13134,11 +13187,8 @@
                 <a:ea typeface="Calibri" pitchFamily="34" charset="-122"/>
                 <a:cs typeface="Calibri" pitchFamily="34" charset="-120"/>
               </a:rPr>
-              <a:t>Cost diff on the pull request</a:t>
-            </a:r>
-            <a:endParaRPr lang="en-US" sz="1350" dirty="0"/>
-          </a:p>
-          <a:p>
+              <a:t>A cost target for the workload  </a:t>
+            </a:r>
             <a:pPr indent="0" marL="0">
               <a:lnSpc>
                 <a:spcPts val="1600"/>
@@ -13146,7 +13196,7 @@
               <a:buNone/>
             </a:pPr>
             <a:r>
-              <a:rPr lang="en-US" sz="1200" dirty="0">
+              <a:rPr lang="en-US" sz="1250" dirty="0">
                 <a:solidFill>
                   <a:srgbClr val="9EABBA"/>
                 </a:solidFill>
@@ -13154,75 +13204,51 @@
                 <a:ea typeface="Calibri" pitchFamily="34" charset="-122"/>
                 <a:cs typeface="Calibri" pitchFamily="34" charset="-120"/>
               </a:rPr>
-              <a:t>Every infrastructure change shows its monthly delta, so cost is part of code review.</a:t>
-            </a:r>
-            <a:endParaRPr lang="en-US" sz="1350" dirty="0"/>
-          </a:p>
-        </p:txBody>
-      </p:sp>
-      <p:sp>
-        <p:nvSpPr>
-          <p:cNvPr id="27" name="Shape 23"/>
-          <p:cNvSpPr/>
-          <p:nvPr/>
-        </p:nvSpPr>
-        <p:spPr>
-          <a:xfrm>
-            <a:off x="7168896" y="4718304"/>
-            <a:ext cx="420624" cy="420624"/>
+              <a:t>Recorded beside latency and availability.</a:t>
+            </a:r>
+            <a:endParaRPr lang="en-US" sz="1250" dirty="0"/>
+          </a:p>
+        </p:txBody>
+      </p:sp>
+      <p:sp>
+        <p:nvSpPr>
+          <p:cNvPr id="26" name="Shape 24"/>
+          <p:cNvSpPr/>
+          <p:nvPr/>
+        </p:nvSpPr>
+        <p:spPr>
+          <a:xfrm>
+            <a:off x="877824" y="5650992"/>
+            <a:ext cx="100584" cy="100584"/>
           </a:xfrm>
           <a:prstGeom prst="ellipse">
             <a:avLst/>
           </a:prstGeom>
           <a:solidFill>
-            <a:srgbClr val="2E3A48"/>
-          </a:solidFill>
-          <a:ln/>
-        </p:spPr>
-      </p:sp>
-      <p:pic>
-        <p:nvPicPr>
-          <p:cNvPr id="28" name="Image 2" descr="preencoded.png">    </p:cNvPr>
-          <p:cNvPicPr>
-            <a:picLocks noChangeAspect="1"/>
-          </p:cNvPicPr>
-          <p:nvPr/>
-        </p:nvPicPr>
-        <p:blipFill>
-          <a:blip r:embed="rId3"/>
-          <a:stretch>
-            <a:fillRect/>
-          </a:stretch>
-        </p:blipFill>
-        <p:spPr>
-          <a:xfrm>
-            <a:off x="7274052" y="4823460"/>
-            <a:ext cx="210312" cy="210312"/>
-          </a:xfrm>
-          <a:prstGeom prst="rect">
-            <a:avLst/>
-          </a:prstGeom>
-        </p:spPr>
-      </p:pic>
-      <p:sp>
-        <p:nvSpPr>
-          <p:cNvPr id="29" name="Text 24"/>
-          <p:cNvSpPr/>
-          <p:nvPr/>
-        </p:nvSpPr>
-        <p:spPr>
-          <a:xfrm>
-            <a:off x="7735824" y="4645152"/>
-            <a:ext cx="3602736" cy="914400"/>
-          </a:xfrm>
-          <a:prstGeom prst="rect">
-            <a:avLst/>
-          </a:prstGeom>
-          <a:noFill/>
-          <a:ln/>
-        </p:spPr>
-        <p:txBody>
-          <a:bodyPr wrap="square" lIns="0" tIns="0" rIns="0" bIns="0" rtlCol="0" anchor="ctr"/>
+            <a:srgbClr val="E39B2C"/>
+          </a:solidFill>
+          <a:ln/>
+        </p:spPr>
+      </p:sp>
+      <p:sp>
+        <p:nvSpPr>
+          <p:cNvPr id="27" name="Text 25"/>
+          <p:cNvSpPr/>
+          <p:nvPr/>
+        </p:nvSpPr>
+        <p:spPr>
+          <a:xfrm>
+            <a:off x="1115568" y="5504688"/>
+            <a:ext cx="4517136" cy="512064"/>
+          </a:xfrm>
+          <a:prstGeom prst="rect">
+            <a:avLst/>
+          </a:prstGeom>
+          <a:noFill/>
+          <a:ln/>
+        </p:spPr>
+        <p:txBody>
+          <a:bodyPr wrap="square" lIns="0" tIns="0" rIns="0" bIns="0" rtlCol="0" anchor="t"/>
           <a:lstStyle/>
           <a:p>
             <a:pPr indent="0" marL="0">
@@ -13232,7 +13258,7 @@
               <a:buNone/>
             </a:pPr>
             <a:r>
-              <a:rPr lang="en-US" sz="1350" b="1" dirty="0">
+              <a:rPr lang="en-US" sz="1250" b="1" dirty="0">
                 <a:solidFill>
                   <a:srgbClr val="FFFFFF"/>
                 </a:solidFill>
@@ -13240,11 +13266,8 @@
                 <a:ea typeface="Calibri" pitchFamily="34" charset="-122"/>
                 <a:cs typeface="Calibri" pitchFamily="34" charset="-120"/>
               </a:rPr>
-              <a:t>Policy as code</a:t>
-            </a:r>
-            <a:endParaRPr lang="en-US" sz="1350" dirty="0"/>
-          </a:p>
-          <a:p>
+              <a:t>The allocation plan  </a:t>
+            </a:r>
             <a:pPr indent="0" marL="0">
               <a:lnSpc>
                 <a:spcPts val="1600"/>
@@ -13252,7 +13275,7 @@
               <a:buNone/>
             </a:pPr>
             <a:r>
-              <a:rPr lang="en-US" sz="1200" dirty="0">
+              <a:rPr lang="en-US" sz="1250" dirty="0">
                 <a:solidFill>
                   <a:srgbClr val="9EABBA"/>
                 </a:solidFill>
@@ -13260,90 +13283,346 @@
                 <a:ea typeface="Calibri" pitchFamily="34" charset="-122"/>
                 <a:cs typeface="Calibri" pitchFamily="34" charset="-120"/>
               </a:rPr>
-              <a:t>Tagging and budget rules enforced in the pipeline — the expensive change never merges.</a:t>
-            </a:r>
-            <a:endParaRPr lang="en-US" sz="1350" dirty="0"/>
-          </a:p>
-        </p:txBody>
-      </p:sp>
-      <p:sp>
-        <p:nvSpPr>
-          <p:cNvPr id="30" name="Shape 25"/>
-          <p:cNvSpPr/>
-          <p:nvPr/>
-        </p:nvSpPr>
-        <p:spPr>
-          <a:xfrm>
-            <a:off x="548640" y="5742432"/>
-            <a:ext cx="11091672" cy="841248"/>
+              <a:t>Which tags, which cost centre, which unit.</a:t>
+            </a:r>
+            <a:endParaRPr lang="en-US" sz="1250" dirty="0"/>
+          </a:p>
+        </p:txBody>
+      </p:sp>
+      <p:sp>
+        <p:nvSpPr>
+          <p:cNvPr id="28" name="Shape 26"/>
+          <p:cNvSpPr/>
+          <p:nvPr/>
+        </p:nvSpPr>
+        <p:spPr>
+          <a:xfrm>
+            <a:off x="6245352" y="3913632"/>
+            <a:ext cx="5394960" cy="2121408"/>
           </a:xfrm>
           <a:prstGeom prst="roundRect">
             <a:avLst>
-              <a:gd name="adj" fmla="val 9783"/>
+              <a:gd name="adj" fmla="val 3879"/>
             </a:avLst>
           </a:prstGeom>
           <a:solidFill>
-            <a:srgbClr val="FBEFD8"/>
-          </a:solidFill>
-          <a:ln/>
-        </p:spPr>
-      </p:sp>
-      <p:sp>
-        <p:nvSpPr>
-          <p:cNvPr id="31" name="Text 26"/>
-          <p:cNvSpPr/>
-          <p:nvPr/>
-        </p:nvSpPr>
-        <p:spPr>
-          <a:xfrm>
-            <a:off x="877824" y="5742432"/>
-            <a:ext cx="10424160" cy="841248"/>
-          </a:xfrm>
-          <a:prstGeom prst="rect">
-            <a:avLst/>
-          </a:prstGeom>
-          <a:noFill/>
-          <a:ln/>
-        </p:spPr>
-        <p:txBody>
-          <a:bodyPr wrap="square" lIns="0" tIns="0" rIns="0" bIns="0" rtlCol="0" anchor="ctr"/>
+            <a:srgbClr val="F1F3F6"/>
+          </a:solidFill>
+          <a:ln/>
+        </p:spPr>
+      </p:sp>
+      <p:sp>
+        <p:nvSpPr>
+          <p:cNvPr id="29" name="Text 27"/>
+          <p:cNvSpPr/>
+          <p:nvPr/>
+        </p:nvSpPr>
+        <p:spPr>
+          <a:xfrm>
+            <a:off x="6556248" y="4078224"/>
+            <a:ext cx="4754880" cy="274320"/>
+          </a:xfrm>
+          <a:prstGeom prst="rect">
+            <a:avLst/>
+          </a:prstGeom>
+          <a:noFill/>
+          <a:ln/>
+        </p:spPr>
+        <p:txBody>
+          <a:bodyPr wrap="square" lIns="0" tIns="0" rIns="0" bIns="0" rtlCol="0" anchor="ctr"/>
+          <a:lstStyle/>
+          <a:p>
+            <a:pPr indent="0" marL="0">
+              <a:buNone/>
+            </a:pPr>
+            <a:r>
+              <a:rPr lang="en-US" sz="1100" b="1" spc="140" kern="0" dirty="0">
+                <a:solidFill>
+                  <a:srgbClr val="1F6B5C"/>
+                </a:solidFill>
+                <a:latin typeface="Calibri" pitchFamily="34" charset="0"/>
+                <a:ea typeface="Calibri" pitchFamily="34" charset="-122"/>
+                <a:cs typeface="Calibri" pitchFamily="34" charset="-120"/>
+              </a:rPr>
+              <a:t>WHAT FINOPS NEEDS TO LEARN FROM THE TEAM</a:t>
+            </a:r>
+            <a:endParaRPr lang="en-US" sz="1100" dirty="0"/>
+          </a:p>
+        </p:txBody>
+      </p:sp>
+      <p:sp>
+        <p:nvSpPr>
+          <p:cNvPr id="30" name="Shape 28"/>
+          <p:cNvSpPr/>
+          <p:nvPr/>
+        </p:nvSpPr>
+        <p:spPr>
+          <a:xfrm>
+            <a:off x="6574536" y="4590288"/>
+            <a:ext cx="100584" cy="100584"/>
+          </a:xfrm>
+          <a:prstGeom prst="ellipse">
+            <a:avLst/>
+          </a:prstGeom>
+          <a:solidFill>
+            <a:srgbClr val="1F6B5C"/>
+          </a:solidFill>
+          <a:ln/>
+        </p:spPr>
+      </p:sp>
+      <p:sp>
+        <p:nvSpPr>
+          <p:cNvPr id="31" name="Text 29"/>
+          <p:cNvSpPr/>
+          <p:nvPr/>
+        </p:nvSpPr>
+        <p:spPr>
+          <a:xfrm>
+            <a:off x="6812280" y="4443984"/>
+            <a:ext cx="4517136" cy="512064"/>
+          </a:xfrm>
+          <a:prstGeom prst="rect">
+            <a:avLst/>
+          </a:prstGeom>
+          <a:noFill/>
+          <a:ln/>
+        </p:spPr>
+        <p:txBody>
+          <a:bodyPr wrap="square" lIns="0" tIns="0" rIns="0" bIns="0" rtlCol="0" anchor="t"/>
           <a:lstStyle/>
           <a:p>
             <a:pPr indent="0" marL="0">
               <a:lnSpc>
-                <a:spcPts val="1800"/>
+                <a:spcPts val="1600"/>
               </a:lnSpc>
               <a:buNone/>
             </a:pPr>
             <a:r>
-              <a:rPr lang="en-US" sz="1300" b="1" dirty="0">
-                <a:solidFill>
-                  <a:srgbClr val="6B4A0E"/>
-                </a:solidFill>
-                <a:latin typeface="Calibri" pitchFamily="34" charset="0"/>
-                <a:ea typeface="Calibri" pitchFamily="34" charset="-122"/>
-                <a:cs typeface="Calibri" pitchFamily="34" charset="-120"/>
-              </a:rPr>
-              <a:t>Pre-deployment architecture costing is the most requested capability in the State of FinOps 2026 — </a:t>
+              <a:rPr lang="en-US" sz="1250" b="1" dirty="0">
+                <a:solidFill>
+                  <a:srgbClr val="1B2430"/>
+                </a:solidFill>
+                <a:latin typeface="Calibri" pitchFamily="34" charset="0"/>
+                <a:ea typeface="Calibri" pitchFamily="34" charset="-122"/>
+                <a:cs typeface="Calibri" pitchFamily="34" charset="-120"/>
+              </a:rPr>
+              <a:t>What the project actually needs  </a:t>
             </a:r>
             <a:pPr indent="0" marL="0">
               <a:lnSpc>
-                <a:spcPts val="1800"/>
+                <a:spcPts val="1600"/>
               </a:lnSpc>
               <a:buNone/>
             </a:pPr>
             <a:r>
-              <a:rPr lang="en-US" sz="1300" dirty="0">
-                <a:solidFill>
-                  <a:srgbClr val="6B4A0E"/>
-                </a:solidFill>
-                <a:latin typeface="Calibri" pitchFamily="34" charset="0"/>
-                <a:ea typeface="Calibri" pitchFamily="34" charset="-122"/>
-                <a:cs typeface="Calibri" pitchFamily="34" charset="-120"/>
-              </a:rPr>
-              <a:t>and the practices that get it working describe FinOps as partnering with engineers, not policing them. Give teams the cost of a choice at the moment they make it; nobody has to become a pricing expert.</a:t>
-            </a:r>
-            <a:endParaRPr lang="en-US" sz="1300" dirty="0"/>
+              <a:rPr lang="en-US" sz="1250" dirty="0">
+                <a:solidFill>
+                  <a:srgbClr val="5C6675"/>
+                </a:solidFill>
+                <a:latin typeface="Calibri" pitchFamily="34" charset="0"/>
+                <a:ea typeface="Calibri" pitchFamily="34" charset="-122"/>
+                <a:cs typeface="Calibri" pitchFamily="34" charset="-120"/>
+              </a:rPr>
+              <a:t>Scale, growth, retention, and the real SLO.</a:t>
+            </a:r>
+            <a:endParaRPr lang="en-US" sz="1250" dirty="0"/>
+          </a:p>
+        </p:txBody>
+      </p:sp>
+      <p:sp>
+        <p:nvSpPr>
+          <p:cNvPr id="32" name="Shape 30"/>
+          <p:cNvSpPr/>
+          <p:nvPr/>
+        </p:nvSpPr>
+        <p:spPr>
+          <a:xfrm>
+            <a:off x="6574536" y="5120640"/>
+            <a:ext cx="100584" cy="100584"/>
+          </a:xfrm>
+          <a:prstGeom prst="ellipse">
+            <a:avLst/>
+          </a:prstGeom>
+          <a:solidFill>
+            <a:srgbClr val="1F6B5C"/>
+          </a:solidFill>
+          <a:ln/>
+        </p:spPr>
+      </p:sp>
+      <p:sp>
+        <p:nvSpPr>
+          <p:cNvPr id="33" name="Text 31"/>
+          <p:cNvSpPr/>
+          <p:nvPr/>
+        </p:nvSpPr>
+        <p:spPr>
+          <a:xfrm>
+            <a:off x="6812280" y="4974336"/>
+            <a:ext cx="4517136" cy="512064"/>
+          </a:xfrm>
+          <a:prstGeom prst="rect">
+            <a:avLst/>
+          </a:prstGeom>
+          <a:noFill/>
+          <a:ln/>
+        </p:spPr>
+        <p:txBody>
+          <a:bodyPr wrap="square" lIns="0" tIns="0" rIns="0" bIns="0" rtlCol="0" anchor="t"/>
+          <a:lstStyle/>
+          <a:p>
+            <a:pPr indent="0" marL="0">
+              <a:lnSpc>
+                <a:spcPts val="1600"/>
+              </a:lnSpc>
+              <a:buNone/>
+            </a:pPr>
+            <a:r>
+              <a:rPr lang="en-US" sz="1250" b="1" dirty="0">
+                <a:solidFill>
+                  <a:srgbClr val="1B2430"/>
+                </a:solidFill>
+                <a:latin typeface="Calibri" pitchFamily="34" charset="0"/>
+                <a:ea typeface="Calibri" pitchFamily="34" charset="-122"/>
+                <a:cs typeface="Calibri" pitchFamily="34" charset="-120"/>
+              </a:rPr>
+              <a:t>What is temporary  </a:t>
+            </a:r>
+            <a:pPr indent="0" marL="0">
+              <a:lnSpc>
+                <a:spcPts val="1600"/>
+              </a:lnSpc>
+              <a:buNone/>
+            </a:pPr>
+            <a:r>
+              <a:rPr lang="en-US" sz="1250" dirty="0">
+                <a:solidFill>
+                  <a:srgbClr val="5C6675"/>
+                </a:solidFill>
+                <a:latin typeface="Calibri" pitchFamily="34" charset="0"/>
+                <a:ea typeface="Calibri" pitchFamily="34" charset="-122"/>
+                <a:cs typeface="Calibri" pitchFamily="34" charset="-120"/>
+              </a:rPr>
+              <a:t>An end date set now costs nothing to honour later.</a:t>
+            </a:r>
+            <a:endParaRPr lang="en-US" sz="1250" dirty="0"/>
+          </a:p>
+        </p:txBody>
+      </p:sp>
+      <p:sp>
+        <p:nvSpPr>
+          <p:cNvPr id="34" name="Shape 32"/>
+          <p:cNvSpPr/>
+          <p:nvPr/>
+        </p:nvSpPr>
+        <p:spPr>
+          <a:xfrm>
+            <a:off x="6574536" y="5650992"/>
+            <a:ext cx="100584" cy="100584"/>
+          </a:xfrm>
+          <a:prstGeom prst="ellipse">
+            <a:avLst/>
+          </a:prstGeom>
+          <a:solidFill>
+            <a:srgbClr val="1F6B5C"/>
+          </a:solidFill>
+          <a:ln/>
+        </p:spPr>
+      </p:sp>
+      <p:sp>
+        <p:nvSpPr>
+          <p:cNvPr id="35" name="Text 33"/>
+          <p:cNvSpPr/>
+          <p:nvPr/>
+        </p:nvSpPr>
+        <p:spPr>
+          <a:xfrm>
+            <a:off x="6812280" y="5504688"/>
+            <a:ext cx="4517136" cy="512064"/>
+          </a:xfrm>
+          <a:prstGeom prst="rect">
+            <a:avLst/>
+          </a:prstGeom>
+          <a:noFill/>
+          <a:ln/>
+        </p:spPr>
+        <p:txBody>
+          <a:bodyPr wrap="square" lIns="0" tIns="0" rIns="0" bIns="0" rtlCol="0" anchor="t"/>
+          <a:lstStyle/>
+          <a:p>
+            <a:pPr indent="0" marL="0">
+              <a:lnSpc>
+                <a:spcPts val="1600"/>
+              </a:lnSpc>
+              <a:buNone/>
+            </a:pPr>
+            <a:r>
+              <a:rPr lang="en-US" sz="1250" b="1" dirty="0">
+                <a:solidFill>
+                  <a:srgbClr val="1B2430"/>
+                </a:solidFill>
+                <a:latin typeface="Calibri" pitchFamily="34" charset="0"/>
+                <a:ea typeface="Calibri" pitchFamily="34" charset="-122"/>
+                <a:cs typeface="Calibri" pitchFamily="34" charset="-120"/>
+              </a:rPr>
+              <a:t>Where the business value sits  </a:t>
+            </a:r>
+            <a:pPr indent="0" marL="0">
+              <a:lnSpc>
+                <a:spcPts val="1600"/>
+              </a:lnSpc>
+              <a:buNone/>
+            </a:pPr>
+            <a:r>
+              <a:rPr lang="en-US" sz="1250" dirty="0">
+                <a:solidFill>
+                  <a:srgbClr val="5C6675"/>
+                </a:solidFill>
+                <a:latin typeface="Calibri" pitchFamily="34" charset="0"/>
+                <a:ea typeface="Calibri" pitchFamily="34" charset="-122"/>
+                <a:cs typeface="Calibri" pitchFamily="34" charset="-120"/>
+              </a:rPr>
+              <a:t>Per customer, per order, per model call.</a:t>
+            </a:r>
+            <a:endParaRPr lang="en-US" sz="1250" dirty="0"/>
+          </a:p>
+        </p:txBody>
+      </p:sp>
+      <p:sp>
+        <p:nvSpPr>
+          <p:cNvPr id="36" name="Text 34"/>
+          <p:cNvSpPr/>
+          <p:nvPr/>
+        </p:nvSpPr>
+        <p:spPr>
+          <a:xfrm>
+            <a:off x="548640" y="6144768"/>
+            <a:ext cx="11091672" cy="457200"/>
+          </a:xfrm>
+          <a:prstGeom prst="rect">
+            <a:avLst/>
+          </a:prstGeom>
+          <a:noFill/>
+          <a:ln/>
+        </p:spPr>
+        <p:txBody>
+          <a:bodyPr wrap="square" lIns="0" tIns="0" rIns="0" bIns="0" rtlCol="0" anchor="ctr"/>
+          <a:lstStyle/>
+          <a:p>
+            <a:pPr indent="0" marL="0">
+              <a:buNone/>
+            </a:pPr>
+            <a:r>
+              <a:rPr lang="en-US" sz="1250" dirty="0">
+                <a:solidFill>
+                  <a:srgbClr val="5C6675"/>
+                </a:solidFill>
+                <a:latin typeface="Calibri" pitchFamily="34" charset="0"/>
+                <a:ea typeface="Calibri" pitchFamily="34" charset="-122"/>
+                <a:cs typeface="Calibri" pitchFamily="34" charset="-120"/>
+              </a:rPr>
+              <a:t>The FinOps Framework names this: Architecting &amp; Workload Placement, and Onboarding Workloads — cost, usage and impact decision support during design and intake.</a:t>
+            </a:r>
+            <a:endParaRPr lang="en-US" sz="1250" dirty="0"/>
           </a:p>
         </p:txBody>
       </p:sp>
@@ -14057,7 +14336,7 @@
     <p:bg>
       <p:bgPr>
         <a:solidFill>
-          <a:srgbClr val="FFFFFF"/>
+          <a:srgbClr val="141A22"/>
         </a:solidFill>
       </p:bgPr>
     </p:bg>
@@ -14108,7 +14387,7 @@
                 <a:ea typeface="Calibri" pitchFamily="34" charset="-122"/>
                 <a:cs typeface="Calibri" pitchFamily="34" charset="-120"/>
               </a:rPr>
-              <a:t>GOVERNANCE — PUTTING IT TOGETHER</a:t>
+              <a:t>GOVERNANCE — SHIFT LEFT IN PRACTICE</a:t>
             </a:r>
             <a:endParaRPr lang="en-US" sz="1100" dirty="0"/>
           </a:p>
@@ -14141,13 +14420,13 @@
             <a:r>
               <a:rPr lang="en-US" sz="3100" b="1" dirty="0">
                 <a:solidFill>
-                  <a:srgbClr val="1B2430"/>
+                  <a:srgbClr val="FFFFFF"/>
                 </a:solidFill>
                 <a:latin typeface="Cambria" pitchFamily="34" charset="0"/>
                 <a:ea typeface="Cambria" pitchFamily="34" charset="-122"/>
                 <a:cs typeface="Cambria" pitchFamily="34" charset="-120"/>
               </a:rPr>
-              <a:t>Nobody should learn it from the invoice</a:t>
+              <a:t>Six questions, asked before the build starts</a:t>
             </a:r>
             <a:endParaRPr lang="en-US" sz="3100" dirty="0"/>
           </a:p>
@@ -14180,13 +14459,13 @@
             <a:r>
               <a:rPr lang="en-US" sz="1500" dirty="0">
                 <a:solidFill>
-                  <a:srgbClr val="5C6675"/>
-                </a:solidFill>
-                <a:latin typeface="Calibri" pitchFamily="34" charset="0"/>
-                <a:ea typeface="Calibri" pitchFamily="34" charset="-122"/>
-                <a:cs typeface="Calibri" pitchFamily="34" charset="-120"/>
-              </a:rPr>
-              <a:t>The same overrun, found at four different moments. Only the first three leave you anything to do about it.</a:t>
+                  <a:srgbClr val="9EABBA"/>
+                </a:solidFill>
+                <a:latin typeface="Calibri" pitchFamily="34" charset="0"/>
+                <a:ea typeface="Calibri" pitchFamily="34" charset="-122"/>
+                <a:cs typeface="Calibri" pitchFamily="34" charset="-120"/>
+              </a:rPr>
+              <a:t>None of them is a finance question. All of them decide the bill.</a:t>
             </a:r>
             <a:endParaRPr lang="en-US" sz="1500" dirty="0"/>
           </a:p>
@@ -14200,684 +14479,43 @@
         </p:nvSpPr>
         <p:spPr>
           <a:xfrm>
-            <a:off x="1737360" y="3127248"/>
-            <a:ext cx="8714232" cy="45720"/>
+            <a:off x="548640" y="2121408"/>
+            <a:ext cx="3511296" cy="1874520"/>
           </a:xfrm>
           <a:prstGeom prst="roundRect">
             <a:avLst>
-              <a:gd name="adj" fmla="val 40000"/>
+              <a:gd name="adj" fmla="val 4390"/>
             </a:avLst>
           </a:prstGeom>
           <a:solidFill>
-            <a:srgbClr val="DFE4EA"/>
-          </a:solidFill>
-          <a:ln/>
-        </p:spPr>
-      </p:sp>
-      <p:sp>
-        <p:nvSpPr>
-          <p:cNvPr id="6" name="Text 4"/>
-          <p:cNvSpPr/>
-          <p:nvPr/>
-        </p:nvSpPr>
-        <p:spPr>
-          <a:xfrm>
-            <a:off x="548640" y="2212848"/>
-            <a:ext cx="2377440" cy="310896"/>
-          </a:xfrm>
-          <a:prstGeom prst="rect">
-            <a:avLst/>
-          </a:prstGeom>
-          <a:noFill/>
-          <a:ln/>
-        </p:spPr>
-        <p:txBody>
-          <a:bodyPr wrap="square" lIns="0" tIns="0" rIns="0" bIns="0" rtlCol="0" anchor="ctr"/>
-          <a:lstStyle/>
-          <a:p>
-            <a:pPr algn="ctr" indent="0" marL="0">
-              <a:buNone/>
-            </a:pPr>
-            <a:r>
-              <a:rPr lang="en-US" sz="1400" b="1" dirty="0">
-                <a:solidFill>
-                  <a:srgbClr val="1B2430"/>
-                </a:solidFill>
-                <a:latin typeface="Calibri" pitchFamily="34" charset="0"/>
-                <a:ea typeface="Calibri" pitchFamily="34" charset="-122"/>
-                <a:cs typeface="Calibri" pitchFamily="34" charset="-120"/>
-              </a:rPr>
-              <a:t>Usage burn alert</a:t>
-            </a:r>
-            <a:endParaRPr lang="en-US" sz="1400" dirty="0"/>
-          </a:p>
-        </p:txBody>
-      </p:sp>
-      <p:sp>
-        <p:nvSpPr>
-          <p:cNvPr id="7" name="Text 5"/>
-          <p:cNvSpPr/>
-          <p:nvPr/>
-        </p:nvSpPr>
-        <p:spPr>
-          <a:xfrm>
-            <a:off x="548640" y="2542032"/>
-            <a:ext cx="2377440" cy="292608"/>
-          </a:xfrm>
-          <a:prstGeom prst="rect">
-            <a:avLst/>
-          </a:prstGeom>
-          <a:noFill/>
-          <a:ln/>
-        </p:spPr>
-        <p:txBody>
-          <a:bodyPr wrap="square" lIns="0" tIns="0" rIns="0" bIns="0" rtlCol="0" anchor="ctr"/>
-          <a:lstStyle/>
-          <a:p>
-            <a:pPr algn="ctr" indent="0" marL="0">
-              <a:buNone/>
-            </a:pPr>
-            <a:r>
-              <a:rPr lang="en-US" sz="1250" b="1" spc="60" kern="0" dirty="0">
-                <a:solidFill>
-                  <a:srgbClr val="B87B18"/>
-                </a:solidFill>
-                <a:latin typeface="Calibri" pitchFamily="34" charset="0"/>
-                <a:ea typeface="Calibri" pitchFamily="34" charset="-122"/>
-                <a:cs typeface="Calibri" pitchFamily="34" charset="-120"/>
-              </a:rPr>
-              <a:t>~10 minutes</a:t>
-            </a:r>
-            <a:endParaRPr lang="en-US" sz="1250" dirty="0"/>
-          </a:p>
-        </p:txBody>
-      </p:sp>
-      <p:sp>
-        <p:nvSpPr>
-          <p:cNvPr id="8" name="Shape 6"/>
-          <p:cNvSpPr/>
-          <p:nvPr/>
-        </p:nvSpPr>
-        <p:spPr>
-          <a:xfrm>
-            <a:off x="1618488" y="3031236"/>
-            <a:ext cx="237744" cy="237744"/>
+            <a:srgbClr val="1F2936"/>
+          </a:solidFill>
+          <a:ln/>
+        </p:spPr>
+      </p:sp>
+      <p:sp>
+        <p:nvSpPr>
+          <p:cNvPr id="6" name="Shape 4"/>
+          <p:cNvSpPr/>
+          <p:nvPr/>
+        </p:nvSpPr>
+        <p:spPr>
+          <a:xfrm>
+            <a:off x="841248" y="2377440"/>
+            <a:ext cx="457200" cy="457200"/>
           </a:xfrm>
           <a:prstGeom prst="ellipse">
             <a:avLst/>
           </a:prstGeom>
           <a:solidFill>
-            <a:srgbClr val="E39B2C"/>
-          </a:solidFill>
-          <a:ln w="25400">
-            <a:solidFill>
-              <a:srgbClr val="FFFFFF"/>
-            </a:solidFill>
-            <a:prstDash val="solid"/>
-          </a:ln>
-        </p:spPr>
-      </p:sp>
-      <p:sp>
-        <p:nvSpPr>
-          <p:cNvPr id="9" name="Text 7"/>
-          <p:cNvSpPr/>
-          <p:nvPr/>
-        </p:nvSpPr>
-        <p:spPr>
-          <a:xfrm>
-            <a:off x="548640" y="3401568"/>
-            <a:ext cx="2377440" cy="566928"/>
-          </a:xfrm>
-          <a:prstGeom prst="rect">
-            <a:avLst/>
-          </a:prstGeom>
-          <a:noFill/>
-          <a:ln/>
-        </p:spPr>
-        <p:txBody>
-          <a:bodyPr wrap="square" lIns="0" tIns="0" rIns="0" bIns="0" rtlCol="0" anchor="t"/>
-          <a:lstStyle/>
-          <a:p>
-            <a:pPr algn="ctr" indent="0" marL="0">
-              <a:lnSpc>
-                <a:spcPts val="1600"/>
-              </a:lnSpc>
-              <a:buNone/>
-            </a:pPr>
-            <a:r>
-              <a:rPr lang="en-US" sz="1200" dirty="0">
-                <a:solidFill>
-                  <a:srgbClr val="5C6675"/>
-                </a:solidFill>
-                <a:latin typeface="Calibri" pitchFamily="34" charset="0"/>
-                <a:ea typeface="Calibri" pitchFamily="34" charset="-122"/>
-                <a:cs typeface="Calibri" pitchFamily="34" charset="-120"/>
-              </a:rPr>
-              <a:t>Throttle it, or confirm it was intended.</a:t>
-            </a:r>
-            <a:endParaRPr lang="en-US" sz="1200" dirty="0"/>
-          </a:p>
-        </p:txBody>
-      </p:sp>
-      <p:sp>
-        <p:nvSpPr>
-          <p:cNvPr id="10" name="Text 8"/>
-          <p:cNvSpPr/>
-          <p:nvPr/>
-        </p:nvSpPr>
-        <p:spPr>
-          <a:xfrm>
-            <a:off x="3566160" y="2212848"/>
-            <a:ext cx="2377440" cy="310896"/>
-          </a:xfrm>
-          <a:prstGeom prst="rect">
-            <a:avLst/>
-          </a:prstGeom>
-          <a:noFill/>
-          <a:ln/>
-        </p:spPr>
-        <p:txBody>
-          <a:bodyPr wrap="square" lIns="0" tIns="0" rIns="0" bIns="0" rtlCol="0" anchor="ctr"/>
-          <a:lstStyle/>
-          <a:p>
-            <a:pPr algn="ctr" indent="0" marL="0">
-              <a:buNone/>
-            </a:pPr>
-            <a:r>
-              <a:rPr lang="en-US" sz="1400" b="1" dirty="0">
-                <a:solidFill>
-                  <a:srgbClr val="1B2430"/>
-                </a:solidFill>
-                <a:latin typeface="Calibri" pitchFamily="34" charset="0"/>
-                <a:ea typeface="Calibri" pitchFamily="34" charset="-122"/>
-                <a:cs typeface="Calibri" pitchFamily="34" charset="-120"/>
-              </a:rPr>
-              <a:t>Daily spend threshold</a:t>
-            </a:r>
-            <a:endParaRPr lang="en-US" sz="1400" dirty="0"/>
-          </a:p>
-        </p:txBody>
-      </p:sp>
-      <p:sp>
-        <p:nvSpPr>
-          <p:cNvPr id="11" name="Text 9"/>
-          <p:cNvSpPr/>
-          <p:nvPr/>
-        </p:nvSpPr>
-        <p:spPr>
-          <a:xfrm>
-            <a:off x="3566160" y="2542032"/>
-            <a:ext cx="2377440" cy="292608"/>
-          </a:xfrm>
-          <a:prstGeom prst="rect">
-            <a:avLst/>
-          </a:prstGeom>
-          <a:noFill/>
-          <a:ln/>
-        </p:spPr>
-        <p:txBody>
-          <a:bodyPr wrap="square" lIns="0" tIns="0" rIns="0" bIns="0" rtlCol="0" anchor="ctr"/>
-          <a:lstStyle/>
-          <a:p>
-            <a:pPr algn="ctr" indent="0" marL="0">
-              <a:buNone/>
-            </a:pPr>
-            <a:r>
-              <a:rPr lang="en-US" sz="1250" b="1" spc="60" kern="0" dirty="0">
-                <a:solidFill>
-                  <a:srgbClr val="1F6B5C"/>
-                </a:solidFill>
-                <a:latin typeface="Calibri" pitchFamily="34" charset="0"/>
-                <a:ea typeface="Calibri" pitchFamily="34" charset="-122"/>
-                <a:cs typeface="Calibri" pitchFamily="34" charset="-120"/>
-              </a:rPr>
-              <a:t>next morning</a:t>
-            </a:r>
-            <a:endParaRPr lang="en-US" sz="1250" dirty="0"/>
-          </a:p>
-        </p:txBody>
-      </p:sp>
-      <p:sp>
-        <p:nvSpPr>
-          <p:cNvPr id="12" name="Shape 10"/>
-          <p:cNvSpPr/>
-          <p:nvPr/>
-        </p:nvSpPr>
-        <p:spPr>
-          <a:xfrm>
-            <a:off x="4636008" y="3031236"/>
-            <a:ext cx="237744" cy="237744"/>
-          </a:xfrm>
-          <a:prstGeom prst="ellipse">
-            <a:avLst/>
-          </a:prstGeom>
-          <a:solidFill>
-            <a:srgbClr val="2E8B7A"/>
-          </a:solidFill>
-          <a:ln w="25400">
-            <a:solidFill>
-              <a:srgbClr val="FFFFFF"/>
-            </a:solidFill>
-            <a:prstDash val="solid"/>
-          </a:ln>
-        </p:spPr>
-      </p:sp>
-      <p:sp>
-        <p:nvSpPr>
-          <p:cNvPr id="13" name="Text 11"/>
-          <p:cNvSpPr/>
-          <p:nvPr/>
-        </p:nvSpPr>
-        <p:spPr>
-          <a:xfrm>
-            <a:off x="3566160" y="3401568"/>
-            <a:ext cx="2377440" cy="566928"/>
-          </a:xfrm>
-          <a:prstGeom prst="rect">
-            <a:avLst/>
-          </a:prstGeom>
-          <a:noFill/>
-          <a:ln/>
-        </p:spPr>
-        <p:txBody>
-          <a:bodyPr wrap="square" lIns="0" tIns="0" rIns="0" bIns="0" rtlCol="0" anchor="t"/>
-          <a:lstStyle/>
-          <a:p>
-            <a:pPr algn="ctr" indent="0" marL="0">
-              <a:lnSpc>
-                <a:spcPts val="1600"/>
-              </a:lnSpc>
-              <a:buNone/>
-            </a:pPr>
-            <a:r>
-              <a:rPr lang="en-US" sz="1200" dirty="0">
-                <a:solidFill>
-                  <a:srgbClr val="5C6675"/>
-                </a:solidFill>
-                <a:latin typeface="Calibri" pitchFamily="34" charset="0"/>
-                <a:ea typeface="Calibri" pitchFamily="34" charset="-122"/>
-                <a:cs typeface="Calibri" pitchFamily="34" charset="-120"/>
-              </a:rPr>
-              <a:t>One team, one number, one owner to ask.</a:t>
-            </a:r>
-            <a:endParaRPr lang="en-US" sz="1200" dirty="0"/>
-          </a:p>
-        </p:txBody>
-      </p:sp>
-      <p:sp>
-        <p:nvSpPr>
-          <p:cNvPr id="14" name="Text 12"/>
-          <p:cNvSpPr/>
-          <p:nvPr/>
-        </p:nvSpPr>
-        <p:spPr>
-          <a:xfrm>
-            <a:off x="6583680" y="2212848"/>
-            <a:ext cx="2377440" cy="310896"/>
-          </a:xfrm>
-          <a:prstGeom prst="rect">
-            <a:avLst/>
-          </a:prstGeom>
-          <a:noFill/>
-          <a:ln/>
-        </p:spPr>
-        <p:txBody>
-          <a:bodyPr wrap="square" lIns="0" tIns="0" rIns="0" bIns="0" rtlCol="0" anchor="ctr"/>
-          <a:lstStyle/>
-          <a:p>
-            <a:pPr algn="ctr" indent="0" marL="0">
-              <a:buNone/>
-            </a:pPr>
-            <a:r>
-              <a:rPr lang="en-US" sz="1400" b="1" dirty="0">
-                <a:solidFill>
-                  <a:srgbClr val="1B2430"/>
-                </a:solidFill>
-                <a:latin typeface="Calibri" pitchFamily="34" charset="0"/>
-                <a:ea typeface="Calibri" pitchFamily="34" charset="-122"/>
-                <a:cs typeface="Calibri" pitchFamily="34" charset="-120"/>
-              </a:rPr>
-              <a:t>Forecast overrun</a:t>
-            </a:r>
-            <a:endParaRPr lang="en-US" sz="1400" dirty="0"/>
-          </a:p>
-        </p:txBody>
-      </p:sp>
-      <p:sp>
-        <p:nvSpPr>
-          <p:cNvPr id="15" name="Text 13"/>
-          <p:cNvSpPr/>
-          <p:nvPr/>
-        </p:nvSpPr>
-        <p:spPr>
-          <a:xfrm>
-            <a:off x="6583680" y="2542032"/>
-            <a:ext cx="2377440" cy="292608"/>
-          </a:xfrm>
-          <a:prstGeom prst="rect">
-            <a:avLst/>
-          </a:prstGeom>
-          <a:noFill/>
-          <a:ln/>
-        </p:spPr>
-        <p:txBody>
-          <a:bodyPr wrap="square" lIns="0" tIns="0" rIns="0" bIns="0" rtlCol="0" anchor="ctr"/>
-          <a:lstStyle/>
-          <a:p>
-            <a:pPr algn="ctr" indent="0" marL="0">
-              <a:buNone/>
-            </a:pPr>
-            <a:r>
-              <a:rPr lang="en-US" sz="1250" b="1" spc="60" kern="0" dirty="0">
-                <a:solidFill>
-                  <a:srgbClr val="1F6B5C"/>
-                </a:solidFill>
-                <a:latin typeface="Calibri" pitchFamily="34" charset="0"/>
-                <a:ea typeface="Calibri" pitchFamily="34" charset="-122"/>
-                <a:cs typeface="Calibri" pitchFamily="34" charset="-120"/>
-              </a:rPr>
-              <a:t>~2 weeks out</a:t>
-            </a:r>
-            <a:endParaRPr lang="en-US" sz="1250" dirty="0"/>
-          </a:p>
-        </p:txBody>
-      </p:sp>
-      <p:sp>
-        <p:nvSpPr>
-          <p:cNvPr id="16" name="Shape 14"/>
-          <p:cNvSpPr/>
-          <p:nvPr/>
-        </p:nvSpPr>
-        <p:spPr>
-          <a:xfrm>
-            <a:off x="7653528" y="3031236"/>
-            <a:ext cx="237744" cy="237744"/>
-          </a:xfrm>
-          <a:prstGeom prst="ellipse">
-            <a:avLst/>
-          </a:prstGeom>
-          <a:solidFill>
-            <a:srgbClr val="2E8B7A"/>
-          </a:solidFill>
-          <a:ln w="25400">
-            <a:solidFill>
-              <a:srgbClr val="FFFFFF"/>
-            </a:solidFill>
-            <a:prstDash val="solid"/>
-          </a:ln>
-        </p:spPr>
-      </p:sp>
-      <p:sp>
-        <p:nvSpPr>
-          <p:cNvPr id="17" name="Text 15"/>
-          <p:cNvSpPr/>
-          <p:nvPr/>
-        </p:nvSpPr>
-        <p:spPr>
-          <a:xfrm>
-            <a:off x="6583680" y="3401568"/>
-            <a:ext cx="2377440" cy="566928"/>
-          </a:xfrm>
-          <a:prstGeom prst="rect">
-            <a:avLst/>
-          </a:prstGeom>
-          <a:noFill/>
-          <a:ln/>
-        </p:spPr>
-        <p:txBody>
-          <a:bodyPr wrap="square" lIns="0" tIns="0" rIns="0" bIns="0" rtlCol="0" anchor="t"/>
-          <a:lstStyle/>
-          <a:p>
-            <a:pPr algn="ctr" indent="0" marL="0">
-              <a:lnSpc>
-                <a:spcPts val="1600"/>
-              </a:lnSpc>
-              <a:buNone/>
-            </a:pPr>
-            <a:r>
-              <a:rPr lang="en-US" sz="1200" dirty="0">
-                <a:solidFill>
-                  <a:srgbClr val="5C6675"/>
-                </a:solidFill>
-                <a:latin typeface="Calibri" pitchFamily="34" charset="0"/>
-                <a:ea typeface="Calibri" pitchFamily="34" charset="-122"/>
-                <a:cs typeface="Calibri" pitchFamily="34" charset="-120"/>
-              </a:rPr>
-              <a:t>Still time to change the month's outcome.</a:t>
-            </a:r>
-            <a:endParaRPr lang="en-US" sz="1200" dirty="0"/>
-          </a:p>
-        </p:txBody>
-      </p:sp>
-      <p:sp>
-        <p:nvSpPr>
-          <p:cNvPr id="18" name="Text 16"/>
-          <p:cNvSpPr/>
-          <p:nvPr/>
-        </p:nvSpPr>
-        <p:spPr>
-          <a:xfrm>
-            <a:off x="9262872" y="2212848"/>
-            <a:ext cx="2377440" cy="310896"/>
-          </a:xfrm>
-          <a:prstGeom prst="rect">
-            <a:avLst/>
-          </a:prstGeom>
-          <a:noFill/>
-          <a:ln/>
-        </p:spPr>
-        <p:txBody>
-          <a:bodyPr wrap="square" lIns="0" tIns="0" rIns="0" bIns="0" rtlCol="0" anchor="ctr"/>
-          <a:lstStyle/>
-          <a:p>
-            <a:pPr algn="ctr" indent="0" marL="0">
-              <a:buNone/>
-            </a:pPr>
-            <a:r>
-              <a:rPr lang="en-US" sz="1400" b="1" dirty="0">
-                <a:solidFill>
-                  <a:srgbClr val="5C6675"/>
-                </a:solidFill>
-                <a:latin typeface="Calibri" pitchFamily="34" charset="0"/>
-                <a:ea typeface="Calibri" pitchFamily="34" charset="-122"/>
-                <a:cs typeface="Calibri" pitchFamily="34" charset="-120"/>
-              </a:rPr>
-              <a:t>The invoice</a:t>
-            </a:r>
-            <a:endParaRPr lang="en-US" sz="1400" dirty="0"/>
-          </a:p>
-        </p:txBody>
-      </p:sp>
-      <p:sp>
-        <p:nvSpPr>
-          <p:cNvPr id="19" name="Text 17"/>
-          <p:cNvSpPr/>
-          <p:nvPr/>
-        </p:nvSpPr>
-        <p:spPr>
-          <a:xfrm>
-            <a:off x="9262872" y="2542032"/>
-            <a:ext cx="2377440" cy="292608"/>
-          </a:xfrm>
-          <a:prstGeom prst="rect">
-            <a:avLst/>
-          </a:prstGeom>
-          <a:noFill/>
-          <a:ln/>
-        </p:spPr>
-        <p:txBody>
-          <a:bodyPr wrap="square" lIns="0" tIns="0" rIns="0" bIns="0" rtlCol="0" anchor="ctr"/>
-          <a:lstStyle/>
-          <a:p>
-            <a:pPr algn="ctr" indent="0" marL="0">
-              <a:buNone/>
-            </a:pPr>
-            <a:r>
-              <a:rPr lang="en-US" sz="1250" b="1" spc="60" kern="0" dirty="0">
-                <a:solidFill>
-                  <a:srgbClr val="5C6675"/>
-                </a:solidFill>
-                <a:latin typeface="Calibri" pitchFamily="34" charset="0"/>
-                <a:ea typeface="Calibri" pitchFamily="34" charset="-122"/>
-                <a:cs typeface="Calibri" pitchFamily="34" charset="-120"/>
-              </a:rPr>
-              <a:t>30–45 days later</a:t>
-            </a:r>
-            <a:endParaRPr lang="en-US" sz="1250" dirty="0"/>
-          </a:p>
-        </p:txBody>
-      </p:sp>
-      <p:sp>
-        <p:nvSpPr>
-          <p:cNvPr id="20" name="Shape 18"/>
-          <p:cNvSpPr/>
-          <p:nvPr/>
-        </p:nvSpPr>
-        <p:spPr>
-          <a:xfrm>
-            <a:off x="10332720" y="3031236"/>
-            <a:ext cx="237744" cy="237744"/>
-          </a:xfrm>
-          <a:prstGeom prst="ellipse">
-            <a:avLst/>
-          </a:prstGeom>
-          <a:solidFill>
-            <a:srgbClr val="AEB8C4"/>
-          </a:solidFill>
-          <a:ln w="25400">
-            <a:solidFill>
-              <a:srgbClr val="FFFFFF"/>
-            </a:solidFill>
-            <a:prstDash val="solid"/>
-          </a:ln>
-        </p:spPr>
-      </p:sp>
-      <p:sp>
-        <p:nvSpPr>
-          <p:cNvPr id="21" name="Text 19"/>
-          <p:cNvSpPr/>
-          <p:nvPr/>
-        </p:nvSpPr>
-        <p:spPr>
-          <a:xfrm>
-            <a:off x="9262872" y="3401568"/>
-            <a:ext cx="2377440" cy="566928"/>
-          </a:xfrm>
-          <a:prstGeom prst="rect">
-            <a:avLst/>
-          </a:prstGeom>
-          <a:noFill/>
-          <a:ln/>
-        </p:spPr>
-        <p:txBody>
-          <a:bodyPr wrap="square" lIns="0" tIns="0" rIns="0" bIns="0" rtlCol="0" anchor="t"/>
-          <a:lstStyle/>
-          <a:p>
-            <a:pPr algn="ctr" indent="0" marL="0">
-              <a:lnSpc>
-                <a:spcPts val="1600"/>
-              </a:lnSpc>
-              <a:buNone/>
-            </a:pPr>
-            <a:r>
-              <a:rPr lang="en-US" sz="1200" dirty="0">
-                <a:solidFill>
-                  <a:srgbClr val="5C6675"/>
-                </a:solidFill>
-                <a:latin typeface="Calibri" pitchFamily="34" charset="0"/>
-                <a:ea typeface="Calibri" pitchFamily="34" charset="-122"/>
-                <a:cs typeface="Calibri" pitchFamily="34" charset="-120"/>
-              </a:rPr>
-              <a:t>Nothing left to decide. Only to explain.</a:t>
-            </a:r>
-            <a:endParaRPr lang="en-US" sz="1200" dirty="0"/>
-          </a:p>
-        </p:txBody>
-      </p:sp>
-      <p:sp>
-        <p:nvSpPr>
-          <p:cNvPr id="22" name="Shape 20"/>
-          <p:cNvSpPr/>
-          <p:nvPr/>
-        </p:nvSpPr>
-        <p:spPr>
-          <a:xfrm>
-            <a:off x="548640" y="4297680"/>
-            <a:ext cx="6675120" cy="2011680"/>
-          </a:xfrm>
-          <a:prstGeom prst="roundRect">
-            <a:avLst>
-              <a:gd name="adj" fmla="val 4091"/>
-            </a:avLst>
-          </a:prstGeom>
-          <a:solidFill>
-            <a:srgbClr val="F1F3F6"/>
-          </a:solidFill>
-          <a:ln/>
-        </p:spPr>
-      </p:sp>
-      <p:sp>
-        <p:nvSpPr>
-          <p:cNvPr id="23" name="Text 21"/>
-          <p:cNvSpPr/>
-          <p:nvPr/>
-        </p:nvSpPr>
-        <p:spPr>
-          <a:xfrm>
-            <a:off x="877824" y="4443984"/>
-            <a:ext cx="3657600" cy="292608"/>
-          </a:xfrm>
-          <a:prstGeom prst="rect">
-            <a:avLst/>
-          </a:prstGeom>
-          <a:noFill/>
-          <a:ln/>
-        </p:spPr>
-        <p:txBody>
-          <a:bodyPr wrap="square" lIns="0" tIns="0" rIns="0" bIns="0" rtlCol="0" anchor="ctr"/>
-          <a:lstStyle/>
-          <a:p>
-            <a:pPr indent="0" marL="0">
-              <a:buNone/>
-            </a:pPr>
-            <a:r>
-              <a:rPr lang="en-US" sz="1200" b="1" spc="180" kern="0" dirty="0">
-                <a:solidFill>
-                  <a:srgbClr val="5C6675"/>
-                </a:solidFill>
-                <a:latin typeface="Calibri" pitchFamily="34" charset="0"/>
-                <a:ea typeface="Calibri" pitchFamily="34" charset="-122"/>
-                <a:cs typeface="Calibri" pitchFamily="34" charset="-120"/>
-              </a:rPr>
-              <a:t>What has to be true</a:t>
-            </a:r>
-            <a:endParaRPr lang="en-US" sz="1200" dirty="0"/>
-          </a:p>
-        </p:txBody>
-      </p:sp>
-      <p:sp>
-        <p:nvSpPr>
-          <p:cNvPr id="24" name="Shape 22"/>
-          <p:cNvSpPr/>
-          <p:nvPr/>
-        </p:nvSpPr>
-        <p:spPr>
-          <a:xfrm>
-            <a:off x="877824" y="4809744"/>
-            <a:ext cx="274320" cy="274320"/>
-          </a:xfrm>
-          <a:prstGeom prst="ellipse">
-            <a:avLst/>
-          </a:prstGeom>
-          <a:solidFill>
-            <a:srgbClr val="FFFFFF"/>
+            <a:srgbClr val="2E3A48"/>
           </a:solidFill>
           <a:ln/>
         </p:spPr>
       </p:sp>
       <p:pic>
         <p:nvPicPr>
-          <p:cNvPr id="25" name="Image 0" descr="preencoded.png">    </p:cNvPr>
+          <p:cNvPr id="7" name="Image 0" descr="preencoded.png">    </p:cNvPr>
           <p:cNvPicPr>
             <a:picLocks noChangeAspect="1"/>
           </p:cNvPicPr>
@@ -14891,8 +14529,8 @@
         </p:blipFill>
         <p:spPr>
           <a:xfrm>
-            <a:off x="946404" y="4878324"/>
-            <a:ext cx="137160" cy="137160"/>
+            <a:off x="955548" y="2491740"/>
+            <a:ext cx="228600" cy="228600"/>
           </a:xfrm>
           <a:prstGeom prst="rect">
             <a:avLst/>
@@ -14901,66 +14539,130 @@
       </p:pic>
       <p:sp>
         <p:nvSpPr>
-          <p:cNvPr id="26" name="Text 23"/>
-          <p:cNvSpPr/>
-          <p:nvPr/>
-        </p:nvSpPr>
-        <p:spPr>
-          <a:xfrm>
-            <a:off x="1298448" y="4754880"/>
-            <a:ext cx="5669280" cy="384048"/>
-          </a:xfrm>
-          <a:prstGeom prst="rect">
-            <a:avLst/>
-          </a:prstGeom>
-          <a:noFill/>
-          <a:ln/>
-        </p:spPr>
-        <p:txBody>
-          <a:bodyPr wrap="square" lIns="0" tIns="0" rIns="0" bIns="0" rtlCol="0" anchor="ctr"/>
-          <a:lstStyle/>
-          <a:p>
-            <a:pPr indent="0" marL="0">
-              <a:buNone/>
-            </a:pPr>
-            <a:r>
-              <a:rPr lang="en-US" sz="1300" dirty="0">
-                <a:solidFill>
-                  <a:srgbClr val="1B2430"/>
-                </a:solidFill>
-                <a:latin typeface="Calibri" pitchFamily="34" charset="0"/>
-                <a:ea typeface="Calibri" pitchFamily="34" charset="-122"/>
-                <a:cs typeface="Calibri" pitchFamily="34" charset="-120"/>
-              </a:rPr>
-              <a:t>Protective alerts run on usage data, not on billing data</a:t>
-            </a:r>
-            <a:endParaRPr lang="en-US" sz="1300" dirty="0"/>
-          </a:p>
-        </p:txBody>
-      </p:sp>
-      <p:sp>
-        <p:nvSpPr>
-          <p:cNvPr id="27" name="Shape 24"/>
-          <p:cNvSpPr/>
-          <p:nvPr/>
-        </p:nvSpPr>
-        <p:spPr>
-          <a:xfrm>
-            <a:off x="877824" y="5193792"/>
-            <a:ext cx="274320" cy="274320"/>
+          <p:cNvPr id="8" name="Text 5"/>
+          <p:cNvSpPr/>
+          <p:nvPr/>
+        </p:nvSpPr>
+        <p:spPr>
+          <a:xfrm>
+            <a:off x="1426464" y="2359152"/>
+            <a:ext cx="2468880" cy="493776"/>
+          </a:xfrm>
+          <a:prstGeom prst="rect">
+            <a:avLst/>
+          </a:prstGeom>
+          <a:noFill/>
+          <a:ln/>
+        </p:spPr>
+        <p:txBody>
+          <a:bodyPr wrap="square" lIns="0" tIns="0" rIns="0" bIns="0" rtlCol="0" anchor="ctr"/>
+          <a:lstStyle/>
+          <a:p>
+            <a:pPr indent="0" marL="0">
+              <a:buNone/>
+            </a:pPr>
+            <a:r>
+              <a:rPr lang="en-US" sz="1500" b="1" dirty="0">
+                <a:solidFill>
+                  <a:srgbClr val="FFFFFF"/>
+                </a:solidFill>
+                <a:latin typeface="Cambria" pitchFamily="34" charset="0"/>
+                <a:ea typeface="Cambria" pitchFamily="34" charset="-122"/>
+                <a:cs typeface="Cambria" pitchFamily="34" charset="-120"/>
+              </a:rPr>
+              <a:t>Shape of the load</a:t>
+            </a:r>
+            <a:endParaRPr lang="en-US" sz="1500" dirty="0"/>
+          </a:p>
+        </p:txBody>
+      </p:sp>
+      <p:sp>
+        <p:nvSpPr>
+          <p:cNvPr id="9" name="Text 6"/>
+          <p:cNvSpPr/>
+          <p:nvPr/>
+        </p:nvSpPr>
+        <p:spPr>
+          <a:xfrm>
+            <a:off x="841248" y="2962656"/>
+            <a:ext cx="2926080" cy="960120"/>
+          </a:xfrm>
+          <a:prstGeom prst="rect">
+            <a:avLst/>
+          </a:prstGeom>
+          <a:noFill/>
+          <a:ln/>
+        </p:spPr>
+        <p:txBody>
+          <a:bodyPr wrap="square" lIns="0" tIns="0" rIns="0" bIns="0" rtlCol="0" anchor="t"/>
+          <a:lstStyle/>
+          <a:p>
+            <a:pPr indent="0" marL="0">
+              <a:lnSpc>
+                <a:spcPts val="1600"/>
+              </a:lnSpc>
+              <a:buNone/>
+            </a:pPr>
+            <a:r>
+              <a:rPr lang="en-US" sz="1200" dirty="0">
+                <a:solidFill>
+                  <a:srgbClr val="9EABBA"/>
+                </a:solidFill>
+                <a:latin typeface="Calibri" pitchFamily="34" charset="0"/>
+                <a:ea typeface="Calibri" pitchFamily="34" charset="-122"/>
+                <a:cs typeface="Calibri" pitchFamily="34" charset="-120"/>
+              </a:rPr>
+              <a:t>Peak versus average, and how spiky? Sizing for a peak that lasts an hour a week is the most common overspend.</a:t>
+            </a:r>
+            <a:endParaRPr lang="en-US" sz="1200" dirty="0"/>
+          </a:p>
+        </p:txBody>
+      </p:sp>
+      <p:sp>
+        <p:nvSpPr>
+          <p:cNvPr id="10" name="Shape 7"/>
+          <p:cNvSpPr/>
+          <p:nvPr/>
+        </p:nvSpPr>
+        <p:spPr>
+          <a:xfrm>
+            <a:off x="4334256" y="2121408"/>
+            <a:ext cx="3511296" cy="1874520"/>
+          </a:xfrm>
+          <a:prstGeom prst="roundRect">
+            <a:avLst>
+              <a:gd name="adj" fmla="val 4390"/>
+            </a:avLst>
+          </a:prstGeom>
+          <a:solidFill>
+            <a:srgbClr val="1F2936"/>
+          </a:solidFill>
+          <a:ln/>
+        </p:spPr>
+      </p:sp>
+      <p:sp>
+        <p:nvSpPr>
+          <p:cNvPr id="11" name="Shape 8"/>
+          <p:cNvSpPr/>
+          <p:nvPr/>
+        </p:nvSpPr>
+        <p:spPr>
+          <a:xfrm>
+            <a:off x="4626864" y="2377440"/>
+            <a:ext cx="457200" cy="457200"/>
           </a:xfrm>
           <a:prstGeom prst="ellipse">
             <a:avLst/>
           </a:prstGeom>
           <a:solidFill>
-            <a:srgbClr val="FFFFFF"/>
+            <a:srgbClr val="2E3A48"/>
           </a:solidFill>
           <a:ln/>
         </p:spPr>
       </p:sp>
       <p:pic>
         <p:nvPicPr>
-          <p:cNvPr id="28" name="Image 1" descr="preencoded.png">    </p:cNvPr>
+          <p:cNvPr id="12" name="Image 1" descr="preencoded.png">    </p:cNvPr>
           <p:cNvPicPr>
             <a:picLocks noChangeAspect="1"/>
           </p:cNvPicPr>
@@ -14974,8 +14676,8 @@
         </p:blipFill>
         <p:spPr>
           <a:xfrm>
-            <a:off x="946404" y="5262372"/>
-            <a:ext cx="137160" cy="137160"/>
+            <a:off x="4741164" y="2491740"/>
+            <a:ext cx="228600" cy="228600"/>
           </a:xfrm>
           <a:prstGeom prst="rect">
             <a:avLst/>
@@ -14984,66 +14686,130 @@
       </p:pic>
       <p:sp>
         <p:nvSpPr>
-          <p:cNvPr id="29" name="Text 25"/>
-          <p:cNvSpPr/>
-          <p:nvPr/>
-        </p:nvSpPr>
-        <p:spPr>
-          <a:xfrm>
-            <a:off x="1298448" y="5138928"/>
-            <a:ext cx="5669280" cy="384048"/>
-          </a:xfrm>
-          <a:prstGeom prst="rect">
-            <a:avLst/>
-          </a:prstGeom>
-          <a:noFill/>
-          <a:ln/>
-        </p:spPr>
-        <p:txBody>
-          <a:bodyPr wrap="square" lIns="0" tIns="0" rIns="0" bIns="0" rtlCol="0" anchor="ctr"/>
-          <a:lstStyle/>
-          <a:p>
-            <a:pPr indent="0" marL="0">
-              <a:buNone/>
-            </a:pPr>
-            <a:r>
-              <a:rPr lang="en-US" sz="1300" dirty="0">
-                <a:solidFill>
-                  <a:srgbClr val="1B2430"/>
-                </a:solidFill>
-                <a:latin typeface="Calibri" pitchFamily="34" charset="0"/>
-                <a:ea typeface="Calibri" pitchFamily="34" charset="-122"/>
-                <a:cs typeface="Calibri" pitchFamily="34" charset="-120"/>
-              </a:rPr>
-              <a:t>Every alert has a named owner to route to</a:t>
-            </a:r>
-            <a:endParaRPr lang="en-US" sz="1300" dirty="0"/>
-          </a:p>
-        </p:txBody>
-      </p:sp>
-      <p:sp>
-        <p:nvSpPr>
-          <p:cNvPr id="30" name="Shape 26"/>
-          <p:cNvSpPr/>
-          <p:nvPr/>
-        </p:nvSpPr>
-        <p:spPr>
-          <a:xfrm>
-            <a:off x="877824" y="5577840"/>
-            <a:ext cx="274320" cy="274320"/>
+          <p:cNvPr id="13" name="Text 9"/>
+          <p:cNvSpPr/>
+          <p:nvPr/>
+        </p:nvSpPr>
+        <p:spPr>
+          <a:xfrm>
+            <a:off x="5212080" y="2359152"/>
+            <a:ext cx="2468880" cy="493776"/>
+          </a:xfrm>
+          <a:prstGeom prst="rect">
+            <a:avLst/>
+          </a:prstGeom>
+          <a:noFill/>
+          <a:ln/>
+        </p:spPr>
+        <p:txBody>
+          <a:bodyPr wrap="square" lIns="0" tIns="0" rIns="0" bIns="0" rtlCol="0" anchor="ctr"/>
+          <a:lstStyle/>
+          <a:p>
+            <a:pPr indent="0" marL="0">
+              <a:buNone/>
+            </a:pPr>
+            <a:r>
+              <a:rPr lang="en-US" sz="1500" b="1" dirty="0">
+                <a:solidFill>
+                  <a:srgbClr val="FFFFFF"/>
+                </a:solidFill>
+                <a:latin typeface="Cambria" pitchFamily="34" charset="0"/>
+                <a:ea typeface="Cambria" pitchFamily="34" charset="-122"/>
+                <a:cs typeface="Cambria" pitchFamily="34" charset="-120"/>
+              </a:rPr>
+              <a:t>Data volume and retention</a:t>
+            </a:r>
+            <a:endParaRPr lang="en-US" sz="1500" dirty="0"/>
+          </a:p>
+        </p:txBody>
+      </p:sp>
+      <p:sp>
+        <p:nvSpPr>
+          <p:cNvPr id="14" name="Text 10"/>
+          <p:cNvSpPr/>
+          <p:nvPr/>
+        </p:nvSpPr>
+        <p:spPr>
+          <a:xfrm>
+            <a:off x="4626864" y="2962656"/>
+            <a:ext cx="2926080" cy="960120"/>
+          </a:xfrm>
+          <a:prstGeom prst="rect">
+            <a:avLst/>
+          </a:prstGeom>
+          <a:noFill/>
+          <a:ln/>
+        </p:spPr>
+        <p:txBody>
+          <a:bodyPr wrap="square" lIns="0" tIns="0" rIns="0" bIns="0" rtlCol="0" anchor="t"/>
+          <a:lstStyle/>
+          <a:p>
+            <a:pPr indent="0" marL="0">
+              <a:lnSpc>
+                <a:spcPts val="1600"/>
+              </a:lnSpc>
+              <a:buNone/>
+            </a:pPr>
+            <a:r>
+              <a:rPr lang="en-US" sz="1200" dirty="0">
+                <a:solidFill>
+                  <a:srgbClr val="9EABBA"/>
+                </a:solidFill>
+                <a:latin typeface="Calibri" pitchFamily="34" charset="0"/>
+                <a:ea typeface="Calibri" pitchFamily="34" charset="-122"/>
+                <a:cs typeface="Calibri" pitchFamily="34" charset="-120"/>
+              </a:rPr>
+              <a:t>How much is stored, for how long, and how much leaves the region? Egress and retention rarely appear in the estimate.</a:t>
+            </a:r>
+            <a:endParaRPr lang="en-US" sz="1200" dirty="0"/>
+          </a:p>
+        </p:txBody>
+      </p:sp>
+      <p:sp>
+        <p:nvSpPr>
+          <p:cNvPr id="15" name="Shape 11"/>
+          <p:cNvSpPr/>
+          <p:nvPr/>
+        </p:nvSpPr>
+        <p:spPr>
+          <a:xfrm>
+            <a:off x="8119872" y="2121408"/>
+            <a:ext cx="3511296" cy="1874520"/>
+          </a:xfrm>
+          <a:prstGeom prst="roundRect">
+            <a:avLst>
+              <a:gd name="adj" fmla="val 4390"/>
+            </a:avLst>
+          </a:prstGeom>
+          <a:solidFill>
+            <a:srgbClr val="1F2936"/>
+          </a:solidFill>
+          <a:ln/>
+        </p:spPr>
+      </p:sp>
+      <p:sp>
+        <p:nvSpPr>
+          <p:cNvPr id="16" name="Shape 12"/>
+          <p:cNvSpPr/>
+          <p:nvPr/>
+        </p:nvSpPr>
+        <p:spPr>
+          <a:xfrm>
+            <a:off x="8412480" y="2377440"/>
+            <a:ext cx="457200" cy="457200"/>
           </a:xfrm>
           <a:prstGeom prst="ellipse">
             <a:avLst/>
           </a:prstGeom>
           <a:solidFill>
-            <a:srgbClr val="FFFFFF"/>
+            <a:srgbClr val="2E3A48"/>
           </a:solidFill>
           <a:ln/>
         </p:spPr>
       </p:sp>
       <p:pic>
         <p:nvPicPr>
-          <p:cNvPr id="31" name="Image 2" descr="preencoded.png">    </p:cNvPr>
+          <p:cNvPr id="17" name="Image 2" descr="preencoded.png">    </p:cNvPr>
           <p:cNvPicPr>
             <a:picLocks noChangeAspect="1"/>
           </p:cNvPicPr>
@@ -15057,8 +14823,8 @@
         </p:blipFill>
         <p:spPr>
           <a:xfrm>
-            <a:off x="946404" y="5646420"/>
-            <a:ext cx="137160" cy="137160"/>
+            <a:off x="8526780" y="2491740"/>
+            <a:ext cx="228600" cy="228600"/>
           </a:xfrm>
           <a:prstGeom prst="rect">
             <a:avLst/>
@@ -15067,66 +14833,130 @@
       </p:pic>
       <p:sp>
         <p:nvSpPr>
-          <p:cNvPr id="32" name="Text 27"/>
-          <p:cNvSpPr/>
-          <p:nvPr/>
-        </p:nvSpPr>
-        <p:spPr>
-          <a:xfrm>
-            <a:off x="1298448" y="5522976"/>
-            <a:ext cx="5669280" cy="384048"/>
-          </a:xfrm>
-          <a:prstGeom prst="rect">
-            <a:avLst/>
-          </a:prstGeom>
-          <a:noFill/>
-          <a:ln/>
-        </p:spPr>
-        <p:txBody>
-          <a:bodyPr wrap="square" lIns="0" tIns="0" rIns="0" bIns="0" rtlCol="0" anchor="ctr"/>
-          <a:lstStyle/>
-          <a:p>
-            <a:pPr indent="0" marL="0">
-              <a:buNone/>
-            </a:pPr>
-            <a:r>
-              <a:rPr lang="en-US" sz="1300" dirty="0">
-                <a:solidFill>
-                  <a:srgbClr val="1B2430"/>
-                </a:solidFill>
-                <a:latin typeface="Calibri" pitchFamily="34" charset="0"/>
-                <a:ea typeface="Calibri" pitchFamily="34" charset="-122"/>
-                <a:cs typeface="Calibri" pitchFamily="34" charset="-120"/>
-              </a:rPr>
-              <a:t>Budgets are phased, so drift shows up in week one</a:t>
-            </a:r>
-            <a:endParaRPr lang="en-US" sz="1300" dirty="0"/>
-          </a:p>
-        </p:txBody>
-      </p:sp>
-      <p:sp>
-        <p:nvSpPr>
-          <p:cNvPr id="33" name="Shape 28"/>
-          <p:cNvSpPr/>
-          <p:nvPr/>
-        </p:nvSpPr>
-        <p:spPr>
-          <a:xfrm>
-            <a:off x="877824" y="5961888"/>
-            <a:ext cx="274320" cy="274320"/>
+          <p:cNvPr id="18" name="Text 13"/>
+          <p:cNvSpPr/>
+          <p:nvPr/>
+        </p:nvSpPr>
+        <p:spPr>
+          <a:xfrm>
+            <a:off x="8997696" y="2359152"/>
+            <a:ext cx="2468880" cy="493776"/>
+          </a:xfrm>
+          <a:prstGeom prst="rect">
+            <a:avLst/>
+          </a:prstGeom>
+          <a:noFill/>
+          <a:ln/>
+        </p:spPr>
+        <p:txBody>
+          <a:bodyPr wrap="square" lIns="0" tIns="0" rIns="0" bIns="0" rtlCol="0" anchor="ctr"/>
+          <a:lstStyle/>
+          <a:p>
+            <a:pPr indent="0" marL="0">
+              <a:buNone/>
+            </a:pPr>
+            <a:r>
+              <a:rPr lang="en-US" sz="1500" b="1" dirty="0">
+                <a:solidFill>
+                  <a:srgbClr val="FFFFFF"/>
+                </a:solidFill>
+                <a:latin typeface="Cambria" pitchFamily="34" charset="0"/>
+                <a:ea typeface="Cambria" pitchFamily="34" charset="-122"/>
+                <a:cs typeface="Cambria" pitchFamily="34" charset="-120"/>
+              </a:rPr>
+              <a:t>What the SLO actually requires</a:t>
+            </a:r>
+            <a:endParaRPr lang="en-US" sz="1500" dirty="0"/>
+          </a:p>
+        </p:txBody>
+      </p:sp>
+      <p:sp>
+        <p:nvSpPr>
+          <p:cNvPr id="19" name="Text 14"/>
+          <p:cNvSpPr/>
+          <p:nvPr/>
+        </p:nvSpPr>
+        <p:spPr>
+          <a:xfrm>
+            <a:off x="8412480" y="2962656"/>
+            <a:ext cx="2926080" cy="960120"/>
+          </a:xfrm>
+          <a:prstGeom prst="rect">
+            <a:avLst/>
+          </a:prstGeom>
+          <a:noFill/>
+          <a:ln/>
+        </p:spPr>
+        <p:txBody>
+          <a:bodyPr wrap="square" lIns="0" tIns="0" rIns="0" bIns="0" rtlCol="0" anchor="t"/>
+          <a:lstStyle/>
+          <a:p>
+            <a:pPr indent="0" marL="0">
+              <a:lnSpc>
+                <a:spcPts val="1600"/>
+              </a:lnSpc>
+              <a:buNone/>
+            </a:pPr>
+            <a:r>
+              <a:rPr lang="en-US" sz="1200" dirty="0">
+                <a:solidFill>
+                  <a:srgbClr val="9EABBA"/>
+                </a:solidFill>
+                <a:latin typeface="Calibri" pitchFamily="34" charset="0"/>
+                <a:ea typeface="Calibri" pitchFamily="34" charset="-122"/>
+                <a:cs typeface="Calibri" pitchFamily="34" charset="-120"/>
+              </a:rPr>
+              <a:t>Multi-region and multi-AZ are priced choices. Ask which one the business will genuinely pay for.</a:t>
+            </a:r>
+            <a:endParaRPr lang="en-US" sz="1200" dirty="0"/>
+          </a:p>
+        </p:txBody>
+      </p:sp>
+      <p:sp>
+        <p:nvSpPr>
+          <p:cNvPr id="20" name="Shape 15"/>
+          <p:cNvSpPr/>
+          <p:nvPr/>
+        </p:nvSpPr>
+        <p:spPr>
+          <a:xfrm>
+            <a:off x="548640" y="4133088"/>
+            <a:ext cx="3511296" cy="1874520"/>
+          </a:xfrm>
+          <a:prstGeom prst="roundRect">
+            <a:avLst>
+              <a:gd name="adj" fmla="val 4390"/>
+            </a:avLst>
+          </a:prstGeom>
+          <a:solidFill>
+            <a:srgbClr val="1F2936"/>
+          </a:solidFill>
+          <a:ln/>
+        </p:spPr>
+      </p:sp>
+      <p:sp>
+        <p:nvSpPr>
+          <p:cNvPr id="21" name="Shape 16"/>
+          <p:cNvSpPr/>
+          <p:nvPr/>
+        </p:nvSpPr>
+        <p:spPr>
+          <a:xfrm>
+            <a:off x="841248" y="4389120"/>
+            <a:ext cx="457200" cy="457200"/>
           </a:xfrm>
           <a:prstGeom prst="ellipse">
             <a:avLst/>
           </a:prstGeom>
           <a:solidFill>
-            <a:srgbClr val="FFFFFF"/>
+            <a:srgbClr val="2E3A48"/>
           </a:solidFill>
           <a:ln/>
         </p:spPr>
       </p:sp>
       <p:pic>
         <p:nvPicPr>
-          <p:cNvPr id="34" name="Image 3" descr="preencoded.png">    </p:cNvPr>
+          <p:cNvPr id="22" name="Image 3" descr="preencoded.png">    </p:cNvPr>
           <p:cNvPicPr>
             <a:picLocks noChangeAspect="1"/>
           </p:cNvPicPr>
@@ -15140,8 +14970,8 @@
         </p:blipFill>
         <p:spPr>
           <a:xfrm>
-            <a:off x="946404" y="6030468"/>
-            <a:ext cx="137160" cy="137160"/>
+            <a:off x="955548" y="4503420"/>
+            <a:ext cx="228600" cy="228600"/>
           </a:xfrm>
           <a:prstGeom prst="rect">
             <a:avLst/>
@@ -15150,140 +14980,30 @@
       </p:pic>
       <p:sp>
         <p:nvSpPr>
-          <p:cNvPr id="35" name="Text 29"/>
-          <p:cNvSpPr/>
-          <p:nvPr/>
-        </p:nvSpPr>
-        <p:spPr>
-          <a:xfrm>
-            <a:off x="1298448" y="5907024"/>
-            <a:ext cx="5669280" cy="384048"/>
-          </a:xfrm>
-          <a:prstGeom prst="rect">
-            <a:avLst/>
-          </a:prstGeom>
-          <a:noFill/>
-          <a:ln/>
-        </p:spPr>
-        <p:txBody>
-          <a:bodyPr wrap="square" lIns="0" tIns="0" rIns="0" bIns="0" rtlCol="0" anchor="ctr"/>
-          <a:lstStyle/>
-          <a:p>
-            <a:pPr indent="0" marL="0">
-              <a:buNone/>
-            </a:pPr>
-            <a:r>
-              <a:rPr lang="en-US" sz="1300" dirty="0">
-                <a:solidFill>
-                  <a:srgbClr val="1B2430"/>
-                </a:solidFill>
-                <a:latin typeface="Calibri" pitchFamily="34" charset="0"/>
-                <a:ea typeface="Calibri" pitchFamily="34" charset="-122"/>
-                <a:cs typeface="Calibri" pitchFamily="34" charset="-120"/>
-              </a:rPr>
-              <a:t>Quotas cap the worst case while someone investigates</a:t>
-            </a:r>
-            <a:endParaRPr lang="en-US" sz="1300" dirty="0"/>
-          </a:p>
-        </p:txBody>
-      </p:sp>
-      <p:sp>
-        <p:nvSpPr>
-          <p:cNvPr id="36" name="Shape 30"/>
-          <p:cNvSpPr/>
-          <p:nvPr/>
-        </p:nvSpPr>
-        <p:spPr>
-          <a:xfrm>
-            <a:off x="7525512" y="4297680"/>
-            <a:ext cx="4114800" cy="2011680"/>
-          </a:xfrm>
-          <a:prstGeom prst="roundRect">
-            <a:avLst>
-              <a:gd name="adj" fmla="val 4091"/>
-            </a:avLst>
-          </a:prstGeom>
-          <a:solidFill>
-            <a:srgbClr val="1F2936"/>
-          </a:solidFill>
-          <a:ln/>
-          <a:effectLst>
-            <a:outerShdw sx="100000" sy="100000" kx="0" ky="0" algn="bl" rotWithShape="0" blurRad="127000" dist="25400" dir="5400000">
-              <a:srgbClr val="8C99A8">
-                <a:alpha val="16000"/>
-              </a:srgbClr>
-            </a:outerShdw>
-          </a:effectLst>
-        </p:spPr>
-      </p:sp>
-      <p:sp>
-        <p:nvSpPr>
-          <p:cNvPr id="37" name="Text 31"/>
-          <p:cNvSpPr/>
-          <p:nvPr/>
-        </p:nvSpPr>
-        <p:spPr>
-          <a:xfrm>
-            <a:off x="7818120" y="4462272"/>
-            <a:ext cx="3200400" cy="292608"/>
-          </a:xfrm>
-          <a:prstGeom prst="rect">
-            <a:avLst/>
-          </a:prstGeom>
-          <a:noFill/>
-          <a:ln/>
-        </p:spPr>
-        <p:txBody>
-          <a:bodyPr wrap="square" lIns="0" tIns="0" rIns="0" bIns="0" rtlCol="0" anchor="ctr"/>
-          <a:lstStyle/>
-          <a:p>
-            <a:pPr indent="0" marL="0">
-              <a:buNone/>
-            </a:pPr>
-            <a:r>
-              <a:rPr lang="en-US" sz="1200" b="1" spc="180" kern="0" dirty="0">
-                <a:solidFill>
-                  <a:srgbClr val="E39B2C"/>
-                </a:solidFill>
-                <a:latin typeface="Calibri" pitchFamily="34" charset="0"/>
-                <a:ea typeface="Calibri" pitchFamily="34" charset="-122"/>
-                <a:cs typeface="Calibri" pitchFamily="34" charset="-120"/>
-              </a:rPr>
-              <a:t>The point</a:t>
-            </a:r>
-            <a:endParaRPr lang="en-US" sz="1200" dirty="0"/>
-          </a:p>
-        </p:txBody>
-      </p:sp>
-      <p:sp>
-        <p:nvSpPr>
-          <p:cNvPr id="38" name="Text 32"/>
-          <p:cNvSpPr/>
-          <p:nvPr/>
-        </p:nvSpPr>
-        <p:spPr>
-          <a:xfrm>
-            <a:off x="7818120" y="4828032"/>
-            <a:ext cx="3529584" cy="1280160"/>
-          </a:xfrm>
-          <a:prstGeom prst="rect">
-            <a:avLst/>
-          </a:prstGeom>
-          <a:noFill/>
-          <a:ln/>
-        </p:spPr>
-        <p:txBody>
-          <a:bodyPr wrap="square" lIns="0" tIns="0" rIns="0" bIns="0" rtlCol="0" anchor="t"/>
-          <a:lstStyle/>
-          <a:p>
-            <a:pPr indent="0" marL="0">
-              <a:lnSpc>
-                <a:spcPts val="2200"/>
-              </a:lnSpc>
-              <a:buNone/>
-            </a:pPr>
-            <a:r>
-              <a:rPr lang="en-US" sz="1550" i="1" dirty="0">
+          <p:cNvPr id="23" name="Text 17"/>
+          <p:cNvSpPr/>
+          <p:nvPr/>
+        </p:nvSpPr>
+        <p:spPr>
+          <a:xfrm>
+            <a:off x="1426464" y="4370832"/>
+            <a:ext cx="2468880" cy="493776"/>
+          </a:xfrm>
+          <a:prstGeom prst="rect">
+            <a:avLst/>
+          </a:prstGeom>
+          <a:noFill/>
+          <a:ln/>
+        </p:spPr>
+        <p:txBody>
+          <a:bodyPr wrap="square" lIns="0" tIns="0" rIns="0" bIns="0" rtlCol="0" anchor="ctr"/>
+          <a:lstStyle/>
+          <a:p>
+            <a:pPr indent="0" marL="0">
+              <a:buNone/>
+            </a:pPr>
+            <a:r>
+              <a:rPr lang="en-US" sz="1500" b="1" dirty="0">
                 <a:solidFill>
                   <a:srgbClr val="FFFFFF"/>
                 </a:solidFill>
@@ -15291,9 +15011,404 @@
                 <a:ea typeface="Cambria" pitchFamily="34" charset="-122"/>
                 <a:cs typeface="Cambria" pitchFamily="34" charset="-120"/>
               </a:rPr>
-              <a:t>The goal is not a smaller invoice. It is an invoice with nothing in it you have not already seen, explained and decided about.</a:t>
-            </a:r>
-            <a:endParaRPr lang="en-US" sz="1550" dirty="0"/>
+              <a:t>What is temporary</a:t>
+            </a:r>
+            <a:endParaRPr lang="en-US" sz="1500" dirty="0"/>
+          </a:p>
+        </p:txBody>
+      </p:sp>
+      <p:sp>
+        <p:nvSpPr>
+          <p:cNvPr id="24" name="Text 18"/>
+          <p:cNvSpPr/>
+          <p:nvPr/>
+        </p:nvSpPr>
+        <p:spPr>
+          <a:xfrm>
+            <a:off x="841248" y="4974336"/>
+            <a:ext cx="2926080" cy="960120"/>
+          </a:xfrm>
+          <a:prstGeom prst="rect">
+            <a:avLst/>
+          </a:prstGeom>
+          <a:noFill/>
+          <a:ln/>
+        </p:spPr>
+        <p:txBody>
+          <a:bodyPr wrap="square" lIns="0" tIns="0" rIns="0" bIns="0" rtlCol="0" anchor="t"/>
+          <a:lstStyle/>
+          <a:p>
+            <a:pPr indent="0" marL="0">
+              <a:lnSpc>
+                <a:spcPts val="1600"/>
+              </a:lnSpc>
+              <a:buNone/>
+            </a:pPr>
+            <a:r>
+              <a:rPr lang="en-US" sz="1200" dirty="0">
+                <a:solidFill>
+                  <a:srgbClr val="9EABBA"/>
+                </a:solidFill>
+                <a:latin typeface="Calibri" pitchFamily="34" charset="0"/>
+                <a:ea typeface="Calibri" pitchFamily="34" charset="-122"/>
+                <a:cs typeface="Calibri" pitchFamily="34" charset="-120"/>
+              </a:rPr>
+              <a:t>Non-production with no end date becomes permanent. An expiry set on day one is free; removing it later is a project.</a:t>
+            </a:r>
+            <a:endParaRPr lang="en-US" sz="1200" dirty="0"/>
+          </a:p>
+        </p:txBody>
+      </p:sp>
+      <p:sp>
+        <p:nvSpPr>
+          <p:cNvPr id="25" name="Shape 19"/>
+          <p:cNvSpPr/>
+          <p:nvPr/>
+        </p:nvSpPr>
+        <p:spPr>
+          <a:xfrm>
+            <a:off x="4334256" y="4133088"/>
+            <a:ext cx="3511296" cy="1874520"/>
+          </a:xfrm>
+          <a:prstGeom prst="roundRect">
+            <a:avLst>
+              <a:gd name="adj" fmla="val 4390"/>
+            </a:avLst>
+          </a:prstGeom>
+          <a:solidFill>
+            <a:srgbClr val="1F2936"/>
+          </a:solidFill>
+          <a:ln/>
+        </p:spPr>
+      </p:sp>
+      <p:sp>
+        <p:nvSpPr>
+          <p:cNvPr id="26" name="Shape 20"/>
+          <p:cNvSpPr/>
+          <p:nvPr/>
+        </p:nvSpPr>
+        <p:spPr>
+          <a:xfrm>
+            <a:off x="4626864" y="4389120"/>
+            <a:ext cx="457200" cy="457200"/>
+          </a:xfrm>
+          <a:prstGeom prst="ellipse">
+            <a:avLst/>
+          </a:prstGeom>
+          <a:solidFill>
+            <a:srgbClr val="2E3A48"/>
+          </a:solidFill>
+          <a:ln/>
+        </p:spPr>
+      </p:sp>
+      <p:pic>
+        <p:nvPicPr>
+          <p:cNvPr id="27" name="Image 4" descr="preencoded.png">    </p:cNvPr>
+          <p:cNvPicPr>
+            <a:picLocks noChangeAspect="1"/>
+          </p:cNvPicPr>
+          <p:nvPr/>
+        </p:nvPicPr>
+        <p:blipFill>
+          <a:blip r:embed="rId5"/>
+          <a:stretch>
+            <a:fillRect/>
+          </a:stretch>
+        </p:blipFill>
+        <p:spPr>
+          <a:xfrm>
+            <a:off x="4741164" y="4503420"/>
+            <a:ext cx="228600" cy="228600"/>
+          </a:xfrm>
+          <a:prstGeom prst="rect">
+            <a:avLst/>
+          </a:prstGeom>
+        </p:spPr>
+      </p:pic>
+      <p:sp>
+        <p:nvSpPr>
+          <p:cNvPr id="28" name="Text 21"/>
+          <p:cNvSpPr/>
+          <p:nvPr/>
+        </p:nvSpPr>
+        <p:spPr>
+          <a:xfrm>
+            <a:off x="5212080" y="4370832"/>
+            <a:ext cx="2468880" cy="493776"/>
+          </a:xfrm>
+          <a:prstGeom prst="rect">
+            <a:avLst/>
+          </a:prstGeom>
+          <a:noFill/>
+          <a:ln/>
+        </p:spPr>
+        <p:txBody>
+          <a:bodyPr wrap="square" lIns="0" tIns="0" rIns="0" bIns="0" rtlCol="0" anchor="ctr"/>
+          <a:lstStyle/>
+          <a:p>
+            <a:pPr indent="0" marL="0">
+              <a:buNone/>
+            </a:pPr>
+            <a:r>
+              <a:rPr lang="en-US" sz="1500" b="1" dirty="0">
+                <a:solidFill>
+                  <a:srgbClr val="FFFFFF"/>
+                </a:solidFill>
+                <a:latin typeface="Cambria" pitchFamily="34" charset="0"/>
+                <a:ea typeface="Cambria" pitchFamily="34" charset="-122"/>
+                <a:cs typeface="Cambria" pitchFamily="34" charset="-120"/>
+              </a:rPr>
+              <a:t>For AI workloads</a:t>
+            </a:r>
+            <a:endParaRPr lang="en-US" sz="1500" dirty="0"/>
+          </a:p>
+        </p:txBody>
+      </p:sp>
+      <p:sp>
+        <p:nvSpPr>
+          <p:cNvPr id="29" name="Text 22"/>
+          <p:cNvSpPr/>
+          <p:nvPr/>
+        </p:nvSpPr>
+        <p:spPr>
+          <a:xfrm>
+            <a:off x="4626864" y="4974336"/>
+            <a:ext cx="2926080" cy="960120"/>
+          </a:xfrm>
+          <a:prstGeom prst="rect">
+            <a:avLst/>
+          </a:prstGeom>
+          <a:noFill/>
+          <a:ln/>
+        </p:spPr>
+        <p:txBody>
+          <a:bodyPr wrap="square" lIns="0" tIns="0" rIns="0" bIns="0" rtlCol="0" anchor="t"/>
+          <a:lstStyle/>
+          <a:p>
+            <a:pPr indent="0" marL="0">
+              <a:lnSpc>
+                <a:spcPts val="1600"/>
+              </a:lnSpc>
+              <a:buNone/>
+            </a:pPr>
+            <a:r>
+              <a:rPr lang="en-US" sz="1200" dirty="0">
+                <a:solidFill>
+                  <a:srgbClr val="9EABBA"/>
+                </a:solidFill>
+                <a:latin typeface="Calibri" pitchFamily="34" charset="0"/>
+                <a:ea typeface="Calibri" pitchFamily="34" charset="-122"/>
+                <a:cs typeface="Calibri" pitchFamily="34" charset="-120"/>
+              </a:rPr>
+              <a:t>Tokens per request, cache hit rate, model tier, and whether provisioned throughput is justified by the traffic.</a:t>
+            </a:r>
+            <a:endParaRPr lang="en-US" sz="1200" dirty="0"/>
+          </a:p>
+        </p:txBody>
+      </p:sp>
+      <p:sp>
+        <p:nvSpPr>
+          <p:cNvPr id="30" name="Shape 23"/>
+          <p:cNvSpPr/>
+          <p:nvPr/>
+        </p:nvSpPr>
+        <p:spPr>
+          <a:xfrm>
+            <a:off x="8119872" y="4133088"/>
+            <a:ext cx="3511296" cy="1874520"/>
+          </a:xfrm>
+          <a:prstGeom prst="roundRect">
+            <a:avLst>
+              <a:gd name="adj" fmla="val 4390"/>
+            </a:avLst>
+          </a:prstGeom>
+          <a:solidFill>
+            <a:srgbClr val="1F2936"/>
+          </a:solidFill>
+          <a:ln/>
+        </p:spPr>
+      </p:sp>
+      <p:sp>
+        <p:nvSpPr>
+          <p:cNvPr id="31" name="Shape 24"/>
+          <p:cNvSpPr/>
+          <p:nvPr/>
+        </p:nvSpPr>
+        <p:spPr>
+          <a:xfrm>
+            <a:off x="8412480" y="4389120"/>
+            <a:ext cx="457200" cy="457200"/>
+          </a:xfrm>
+          <a:prstGeom prst="ellipse">
+            <a:avLst/>
+          </a:prstGeom>
+          <a:solidFill>
+            <a:srgbClr val="2E3A48"/>
+          </a:solidFill>
+          <a:ln/>
+        </p:spPr>
+      </p:sp>
+      <p:pic>
+        <p:nvPicPr>
+          <p:cNvPr id="32" name="Image 5" descr="preencoded.png">    </p:cNvPr>
+          <p:cNvPicPr>
+            <a:picLocks noChangeAspect="1"/>
+          </p:cNvPicPr>
+          <p:nvPr/>
+        </p:nvPicPr>
+        <p:blipFill>
+          <a:blip r:embed="rId6"/>
+          <a:stretch>
+            <a:fillRect/>
+          </a:stretch>
+        </p:blipFill>
+        <p:spPr>
+          <a:xfrm>
+            <a:off x="8526780" y="4503420"/>
+            <a:ext cx="228600" cy="228600"/>
+          </a:xfrm>
+          <a:prstGeom prst="rect">
+            <a:avLst/>
+          </a:prstGeom>
+        </p:spPr>
+      </p:pic>
+      <p:sp>
+        <p:nvSpPr>
+          <p:cNvPr id="33" name="Text 25"/>
+          <p:cNvSpPr/>
+          <p:nvPr/>
+        </p:nvSpPr>
+        <p:spPr>
+          <a:xfrm>
+            <a:off x="8997696" y="4370832"/>
+            <a:ext cx="2468880" cy="493776"/>
+          </a:xfrm>
+          <a:prstGeom prst="rect">
+            <a:avLst/>
+          </a:prstGeom>
+          <a:noFill/>
+          <a:ln/>
+        </p:spPr>
+        <p:txBody>
+          <a:bodyPr wrap="square" lIns="0" tIns="0" rIns="0" bIns="0" rtlCol="0" anchor="ctr"/>
+          <a:lstStyle/>
+          <a:p>
+            <a:pPr indent="0" marL="0">
+              <a:buNone/>
+            </a:pPr>
+            <a:r>
+              <a:rPr lang="en-US" sz="1500" b="1" dirty="0">
+                <a:solidFill>
+                  <a:srgbClr val="FFFFFF"/>
+                </a:solidFill>
+                <a:latin typeface="Cambria" pitchFamily="34" charset="0"/>
+                <a:ea typeface="Cambria" pitchFamily="34" charset="-122"/>
+                <a:cs typeface="Cambria" pitchFamily="34" charset="-120"/>
+              </a:rPr>
+              <a:t>Owner and unit</a:t>
+            </a:r>
+            <a:endParaRPr lang="en-US" sz="1500" dirty="0"/>
+          </a:p>
+        </p:txBody>
+      </p:sp>
+      <p:sp>
+        <p:nvSpPr>
+          <p:cNvPr id="34" name="Text 26"/>
+          <p:cNvSpPr/>
+          <p:nvPr/>
+        </p:nvSpPr>
+        <p:spPr>
+          <a:xfrm>
+            <a:off x="8412480" y="4974336"/>
+            <a:ext cx="2926080" cy="960120"/>
+          </a:xfrm>
+          <a:prstGeom prst="rect">
+            <a:avLst/>
+          </a:prstGeom>
+          <a:noFill/>
+          <a:ln/>
+        </p:spPr>
+        <p:txBody>
+          <a:bodyPr wrap="square" lIns="0" tIns="0" rIns="0" bIns="0" rtlCol="0" anchor="t"/>
+          <a:lstStyle/>
+          <a:p>
+            <a:pPr indent="0" marL="0">
+              <a:lnSpc>
+                <a:spcPts val="1600"/>
+              </a:lnSpc>
+              <a:buNone/>
+            </a:pPr>
+            <a:r>
+              <a:rPr lang="en-US" sz="1200" dirty="0">
+                <a:solidFill>
+                  <a:srgbClr val="9EABBA"/>
+                </a:solidFill>
+                <a:latin typeface="Calibri" pitchFamily="34" charset="0"/>
+                <a:ea typeface="Calibri" pitchFamily="34" charset="-122"/>
+                <a:cs typeface="Calibri" pitchFamily="34" charset="-120"/>
+              </a:rPr>
+              <a:t>Which cost centre carries it, and what unit we will divide the cost by once it is live.</a:t>
+            </a:r>
+            <a:endParaRPr lang="en-US" sz="1200" dirty="0"/>
+          </a:p>
+        </p:txBody>
+      </p:sp>
+      <p:sp>
+        <p:nvSpPr>
+          <p:cNvPr id="35" name="Text 27"/>
+          <p:cNvSpPr/>
+          <p:nvPr/>
+        </p:nvSpPr>
+        <p:spPr>
+          <a:xfrm>
+            <a:off x="548640" y="6163056"/>
+            <a:ext cx="11091672" cy="548640"/>
+          </a:xfrm>
+          <a:prstGeom prst="rect">
+            <a:avLst/>
+          </a:prstGeom>
+          <a:noFill/>
+          <a:ln/>
+        </p:spPr>
+        <p:txBody>
+          <a:bodyPr wrap="square" lIns="0" tIns="0" rIns="0" bIns="0" rtlCol="0" anchor="t"/>
+          <a:lstStyle/>
+          <a:p>
+            <a:pPr indent="0" marL="0">
+              <a:lnSpc>
+                <a:spcPts val="1800"/>
+              </a:lnSpc>
+              <a:buNone/>
+            </a:pPr>
+            <a:r>
+              <a:rPr lang="en-US" sz="1250" b="1" dirty="0">
+                <a:solidFill>
+                  <a:srgbClr val="E39B2C"/>
+                </a:solidFill>
+                <a:latin typeface="Calibri" pitchFamily="34" charset="0"/>
+                <a:ea typeface="Calibri" pitchFamily="34" charset="-122"/>
+                <a:cs typeface="Calibri" pitchFamily="34" charset="-120"/>
+              </a:rPr>
+              <a:t>The output is a number attached to the design: </a:t>
+            </a:r>
+            <a:pPr indent="0" marL="0">
+              <a:lnSpc>
+                <a:spcPts val="1800"/>
+              </a:lnSpc>
+              <a:buNone/>
+            </a:pPr>
+            <a:r>
+              <a:rPr lang="en-US" sz="1250" dirty="0">
+                <a:solidFill>
+                  <a:srgbClr val="9EABBA"/>
+                </a:solidFill>
+                <a:latin typeface="Calibri" pitchFamily="34" charset="0"/>
+                <a:ea typeface="Calibri" pitchFamily="34" charset="-122"/>
+                <a:cs typeface="Calibri" pitchFamily="34" charset="-120"/>
+              </a:rPr>
+              <a:t>an estimate, and a cost target recorded beside the latency and availability targets. A cost diff on the pull request and policy as code keep it honest afterwards.</a:t>
+            </a:r>
+            <a:endParaRPr lang="en-US" sz="1250" dirty="0"/>
           </a:p>
         </p:txBody>
       </p:sp>
@@ -15362,7 +15477,7 @@
                 <a:ea typeface="Calibri" pitchFamily="34" charset="-122"/>
                 <a:cs typeface="Calibri" pitchFamily="34" charset="-120"/>
               </a:rPr>
-              <a:t>THE PATH FORWARD</a:t>
+              <a:t>GOVERNANCE — PUTTING IT TOGETHER</a:t>
             </a:r>
             <a:endParaRPr lang="en-US" sz="1100" dirty="0"/>
           </a:p>
@@ -15401,7 +15516,7 @@
                 <a:ea typeface="Cambria" pitchFamily="34" charset="-122"/>
                 <a:cs typeface="Cambria" pitchFamily="34" charset="-120"/>
               </a:rPr>
-              <a:t>Where to start</a:t>
+              <a:t>Nobody should learn it from the invoice</a:t>
             </a:r>
             <a:endParaRPr lang="en-US" sz="3100" dirty="0"/>
           </a:p>
@@ -15409,876 +15524,1145 @@
       </p:sp>
       <p:sp>
         <p:nvSpPr>
-          <p:cNvPr id="4" name="Shape 2"/>
-          <p:cNvSpPr/>
-          <p:nvPr/>
-        </p:nvSpPr>
-        <p:spPr>
-          <a:xfrm>
-            <a:off x="548640" y="1783080"/>
-            <a:ext cx="2587752" cy="2423160"/>
+          <p:cNvPr id="4" name="Text 2"/>
+          <p:cNvSpPr/>
+          <p:nvPr/>
+        </p:nvSpPr>
+        <p:spPr>
+          <a:xfrm>
+            <a:off x="548640" y="1536192"/>
+            <a:ext cx="10607040" cy="365760"/>
+          </a:xfrm>
+          <a:prstGeom prst="rect">
+            <a:avLst/>
+          </a:prstGeom>
+          <a:noFill/>
+          <a:ln/>
+        </p:spPr>
+        <p:txBody>
+          <a:bodyPr wrap="square" lIns="0" tIns="0" rIns="0" bIns="0" rtlCol="0" anchor="ctr"/>
+          <a:lstStyle/>
+          <a:p>
+            <a:pPr indent="0" marL="0">
+              <a:buNone/>
+            </a:pPr>
+            <a:r>
+              <a:rPr lang="en-US" sz="1500" dirty="0">
+                <a:solidFill>
+                  <a:srgbClr val="5C6675"/>
+                </a:solidFill>
+                <a:latin typeface="Calibri" pitchFamily="34" charset="0"/>
+                <a:ea typeface="Calibri" pitchFamily="34" charset="-122"/>
+                <a:cs typeface="Calibri" pitchFamily="34" charset="-120"/>
+              </a:rPr>
+              <a:t>The same overrun, found at four different moments. Only the first three leave you anything to do about it.</a:t>
+            </a:r>
+            <a:endParaRPr lang="en-US" sz="1500" dirty="0"/>
+          </a:p>
+        </p:txBody>
+      </p:sp>
+      <p:sp>
+        <p:nvSpPr>
+          <p:cNvPr id="5" name="Shape 3"/>
+          <p:cNvSpPr/>
+          <p:nvPr/>
+        </p:nvSpPr>
+        <p:spPr>
+          <a:xfrm>
+            <a:off x="1737360" y="3127248"/>
+            <a:ext cx="8714232" cy="45720"/>
           </a:xfrm>
           <a:prstGeom prst="roundRect">
             <a:avLst>
-              <a:gd name="adj" fmla="val 3396"/>
+              <a:gd name="adj" fmla="val 40000"/>
             </a:avLst>
           </a:prstGeom>
           <a:solidFill>
+            <a:srgbClr val="DFE4EA"/>
+          </a:solidFill>
+          <a:ln/>
+        </p:spPr>
+      </p:sp>
+      <p:sp>
+        <p:nvSpPr>
+          <p:cNvPr id="6" name="Text 4"/>
+          <p:cNvSpPr/>
+          <p:nvPr/>
+        </p:nvSpPr>
+        <p:spPr>
+          <a:xfrm>
+            <a:off x="548640" y="2212848"/>
+            <a:ext cx="2377440" cy="310896"/>
+          </a:xfrm>
+          <a:prstGeom prst="rect">
+            <a:avLst/>
+          </a:prstGeom>
+          <a:noFill/>
+          <a:ln/>
+        </p:spPr>
+        <p:txBody>
+          <a:bodyPr wrap="square" lIns="0" tIns="0" rIns="0" bIns="0" rtlCol="0" anchor="ctr"/>
+          <a:lstStyle/>
+          <a:p>
+            <a:pPr algn="ctr" indent="0" marL="0">
+              <a:buNone/>
+            </a:pPr>
+            <a:r>
+              <a:rPr lang="en-US" sz="1400" b="1" dirty="0">
+                <a:solidFill>
+                  <a:srgbClr val="1B2430"/>
+                </a:solidFill>
+                <a:latin typeface="Calibri" pitchFamily="34" charset="0"/>
+                <a:ea typeface="Calibri" pitchFamily="34" charset="-122"/>
+                <a:cs typeface="Calibri" pitchFamily="34" charset="-120"/>
+              </a:rPr>
+              <a:t>Usage burn alert</a:t>
+            </a:r>
+            <a:endParaRPr lang="en-US" sz="1400" dirty="0"/>
+          </a:p>
+        </p:txBody>
+      </p:sp>
+      <p:sp>
+        <p:nvSpPr>
+          <p:cNvPr id="7" name="Text 5"/>
+          <p:cNvSpPr/>
+          <p:nvPr/>
+        </p:nvSpPr>
+        <p:spPr>
+          <a:xfrm>
+            <a:off x="548640" y="2542032"/>
+            <a:ext cx="2377440" cy="292608"/>
+          </a:xfrm>
+          <a:prstGeom prst="rect">
+            <a:avLst/>
+          </a:prstGeom>
+          <a:noFill/>
+          <a:ln/>
+        </p:spPr>
+        <p:txBody>
+          <a:bodyPr wrap="square" lIns="0" tIns="0" rIns="0" bIns="0" rtlCol="0" anchor="ctr"/>
+          <a:lstStyle/>
+          <a:p>
+            <a:pPr algn="ctr" indent="0" marL="0">
+              <a:buNone/>
+            </a:pPr>
+            <a:r>
+              <a:rPr lang="en-US" sz="1250" b="1" spc="60" kern="0" dirty="0">
+                <a:solidFill>
+                  <a:srgbClr val="B87B18"/>
+                </a:solidFill>
+                <a:latin typeface="Calibri" pitchFamily="34" charset="0"/>
+                <a:ea typeface="Calibri" pitchFamily="34" charset="-122"/>
+                <a:cs typeface="Calibri" pitchFamily="34" charset="-120"/>
+              </a:rPr>
+              <a:t>~10 minutes</a:t>
+            </a:r>
+            <a:endParaRPr lang="en-US" sz="1250" dirty="0"/>
+          </a:p>
+        </p:txBody>
+      </p:sp>
+      <p:sp>
+        <p:nvSpPr>
+          <p:cNvPr id="8" name="Shape 6"/>
+          <p:cNvSpPr/>
+          <p:nvPr/>
+        </p:nvSpPr>
+        <p:spPr>
+          <a:xfrm>
+            <a:off x="1618488" y="3031236"/>
+            <a:ext cx="237744" cy="237744"/>
+          </a:xfrm>
+          <a:prstGeom prst="ellipse">
+            <a:avLst/>
+          </a:prstGeom>
+          <a:solidFill>
+            <a:srgbClr val="E39B2C"/>
+          </a:solidFill>
+          <a:ln w="25400">
+            <a:solidFill>
+              <a:srgbClr val="FFFFFF"/>
+            </a:solidFill>
+            <a:prstDash val="solid"/>
+          </a:ln>
+        </p:spPr>
+      </p:sp>
+      <p:sp>
+        <p:nvSpPr>
+          <p:cNvPr id="9" name="Text 7"/>
+          <p:cNvSpPr/>
+          <p:nvPr/>
+        </p:nvSpPr>
+        <p:spPr>
+          <a:xfrm>
+            <a:off x="548640" y="3401568"/>
+            <a:ext cx="2377440" cy="566928"/>
+          </a:xfrm>
+          <a:prstGeom prst="rect">
+            <a:avLst/>
+          </a:prstGeom>
+          <a:noFill/>
+          <a:ln/>
+        </p:spPr>
+        <p:txBody>
+          <a:bodyPr wrap="square" lIns="0" tIns="0" rIns="0" bIns="0" rtlCol="0" anchor="t"/>
+          <a:lstStyle/>
+          <a:p>
+            <a:pPr algn="ctr" indent="0" marL="0">
+              <a:lnSpc>
+                <a:spcPts val="1600"/>
+              </a:lnSpc>
+              <a:buNone/>
+            </a:pPr>
+            <a:r>
+              <a:rPr lang="en-US" sz="1200" dirty="0">
+                <a:solidFill>
+                  <a:srgbClr val="5C6675"/>
+                </a:solidFill>
+                <a:latin typeface="Calibri" pitchFamily="34" charset="0"/>
+                <a:ea typeface="Calibri" pitchFamily="34" charset="-122"/>
+                <a:cs typeface="Calibri" pitchFamily="34" charset="-120"/>
+              </a:rPr>
+              <a:t>Throttle it, or confirm it was intended.</a:t>
+            </a:r>
+            <a:endParaRPr lang="en-US" sz="1200" dirty="0"/>
+          </a:p>
+        </p:txBody>
+      </p:sp>
+      <p:sp>
+        <p:nvSpPr>
+          <p:cNvPr id="10" name="Text 8"/>
+          <p:cNvSpPr/>
+          <p:nvPr/>
+        </p:nvSpPr>
+        <p:spPr>
+          <a:xfrm>
+            <a:off x="3566160" y="2212848"/>
+            <a:ext cx="2377440" cy="310896"/>
+          </a:xfrm>
+          <a:prstGeom prst="rect">
+            <a:avLst/>
+          </a:prstGeom>
+          <a:noFill/>
+          <a:ln/>
+        </p:spPr>
+        <p:txBody>
+          <a:bodyPr wrap="square" lIns="0" tIns="0" rIns="0" bIns="0" rtlCol="0" anchor="ctr"/>
+          <a:lstStyle/>
+          <a:p>
+            <a:pPr algn="ctr" indent="0" marL="0">
+              <a:buNone/>
+            </a:pPr>
+            <a:r>
+              <a:rPr lang="en-US" sz="1400" b="1" dirty="0">
+                <a:solidFill>
+                  <a:srgbClr val="1B2430"/>
+                </a:solidFill>
+                <a:latin typeface="Calibri" pitchFamily="34" charset="0"/>
+                <a:ea typeface="Calibri" pitchFamily="34" charset="-122"/>
+                <a:cs typeface="Calibri" pitchFamily="34" charset="-120"/>
+              </a:rPr>
+              <a:t>Daily spend threshold</a:t>
+            </a:r>
+            <a:endParaRPr lang="en-US" sz="1400" dirty="0"/>
+          </a:p>
+        </p:txBody>
+      </p:sp>
+      <p:sp>
+        <p:nvSpPr>
+          <p:cNvPr id="11" name="Text 9"/>
+          <p:cNvSpPr/>
+          <p:nvPr/>
+        </p:nvSpPr>
+        <p:spPr>
+          <a:xfrm>
+            <a:off x="3566160" y="2542032"/>
+            <a:ext cx="2377440" cy="292608"/>
+          </a:xfrm>
+          <a:prstGeom prst="rect">
+            <a:avLst/>
+          </a:prstGeom>
+          <a:noFill/>
+          <a:ln/>
+        </p:spPr>
+        <p:txBody>
+          <a:bodyPr wrap="square" lIns="0" tIns="0" rIns="0" bIns="0" rtlCol="0" anchor="ctr"/>
+          <a:lstStyle/>
+          <a:p>
+            <a:pPr algn="ctr" indent="0" marL="0">
+              <a:buNone/>
+            </a:pPr>
+            <a:r>
+              <a:rPr lang="en-US" sz="1250" b="1" spc="60" kern="0" dirty="0">
+                <a:solidFill>
+                  <a:srgbClr val="1F6B5C"/>
+                </a:solidFill>
+                <a:latin typeface="Calibri" pitchFamily="34" charset="0"/>
+                <a:ea typeface="Calibri" pitchFamily="34" charset="-122"/>
+                <a:cs typeface="Calibri" pitchFamily="34" charset="-120"/>
+              </a:rPr>
+              <a:t>next morning</a:t>
+            </a:r>
+            <a:endParaRPr lang="en-US" sz="1250" dirty="0"/>
+          </a:p>
+        </p:txBody>
+      </p:sp>
+      <p:sp>
+        <p:nvSpPr>
+          <p:cNvPr id="12" name="Shape 10"/>
+          <p:cNvSpPr/>
+          <p:nvPr/>
+        </p:nvSpPr>
+        <p:spPr>
+          <a:xfrm>
+            <a:off x="4636008" y="3031236"/>
+            <a:ext cx="237744" cy="237744"/>
+          </a:xfrm>
+          <a:prstGeom prst="ellipse">
+            <a:avLst/>
+          </a:prstGeom>
+          <a:solidFill>
+            <a:srgbClr val="2E8B7A"/>
+          </a:solidFill>
+          <a:ln w="25400">
+            <a:solidFill>
+              <a:srgbClr val="FFFFFF"/>
+            </a:solidFill>
+            <a:prstDash val="solid"/>
+          </a:ln>
+        </p:spPr>
+      </p:sp>
+      <p:sp>
+        <p:nvSpPr>
+          <p:cNvPr id="13" name="Text 11"/>
+          <p:cNvSpPr/>
+          <p:nvPr/>
+        </p:nvSpPr>
+        <p:spPr>
+          <a:xfrm>
+            <a:off x="3566160" y="3401568"/>
+            <a:ext cx="2377440" cy="566928"/>
+          </a:xfrm>
+          <a:prstGeom prst="rect">
+            <a:avLst/>
+          </a:prstGeom>
+          <a:noFill/>
+          <a:ln/>
+        </p:spPr>
+        <p:txBody>
+          <a:bodyPr wrap="square" lIns="0" tIns="0" rIns="0" bIns="0" rtlCol="0" anchor="t"/>
+          <a:lstStyle/>
+          <a:p>
+            <a:pPr algn="ctr" indent="0" marL="0">
+              <a:lnSpc>
+                <a:spcPts val="1600"/>
+              </a:lnSpc>
+              <a:buNone/>
+            </a:pPr>
+            <a:r>
+              <a:rPr lang="en-US" sz="1200" dirty="0">
+                <a:solidFill>
+                  <a:srgbClr val="5C6675"/>
+                </a:solidFill>
+                <a:latin typeface="Calibri" pitchFamily="34" charset="0"/>
+                <a:ea typeface="Calibri" pitchFamily="34" charset="-122"/>
+                <a:cs typeface="Calibri" pitchFamily="34" charset="-120"/>
+              </a:rPr>
+              <a:t>One team, one number, one owner to ask.</a:t>
+            </a:r>
+            <a:endParaRPr lang="en-US" sz="1200" dirty="0"/>
+          </a:p>
+        </p:txBody>
+      </p:sp>
+      <p:sp>
+        <p:nvSpPr>
+          <p:cNvPr id="14" name="Text 12"/>
+          <p:cNvSpPr/>
+          <p:nvPr/>
+        </p:nvSpPr>
+        <p:spPr>
+          <a:xfrm>
+            <a:off x="6583680" y="2212848"/>
+            <a:ext cx="2377440" cy="310896"/>
+          </a:xfrm>
+          <a:prstGeom prst="rect">
+            <a:avLst/>
+          </a:prstGeom>
+          <a:noFill/>
+          <a:ln/>
+        </p:spPr>
+        <p:txBody>
+          <a:bodyPr wrap="square" lIns="0" tIns="0" rIns="0" bIns="0" rtlCol="0" anchor="ctr"/>
+          <a:lstStyle/>
+          <a:p>
+            <a:pPr algn="ctr" indent="0" marL="0">
+              <a:buNone/>
+            </a:pPr>
+            <a:r>
+              <a:rPr lang="en-US" sz="1400" b="1" dirty="0">
+                <a:solidFill>
+                  <a:srgbClr val="1B2430"/>
+                </a:solidFill>
+                <a:latin typeface="Calibri" pitchFamily="34" charset="0"/>
+                <a:ea typeface="Calibri" pitchFamily="34" charset="-122"/>
+                <a:cs typeface="Calibri" pitchFamily="34" charset="-120"/>
+              </a:rPr>
+              <a:t>Forecast overrun</a:t>
+            </a:r>
+            <a:endParaRPr lang="en-US" sz="1400" dirty="0"/>
+          </a:p>
+        </p:txBody>
+      </p:sp>
+      <p:sp>
+        <p:nvSpPr>
+          <p:cNvPr id="15" name="Text 13"/>
+          <p:cNvSpPr/>
+          <p:nvPr/>
+        </p:nvSpPr>
+        <p:spPr>
+          <a:xfrm>
+            <a:off x="6583680" y="2542032"/>
+            <a:ext cx="2377440" cy="292608"/>
+          </a:xfrm>
+          <a:prstGeom prst="rect">
+            <a:avLst/>
+          </a:prstGeom>
+          <a:noFill/>
+          <a:ln/>
+        </p:spPr>
+        <p:txBody>
+          <a:bodyPr wrap="square" lIns="0" tIns="0" rIns="0" bIns="0" rtlCol="0" anchor="ctr"/>
+          <a:lstStyle/>
+          <a:p>
+            <a:pPr algn="ctr" indent="0" marL="0">
+              <a:buNone/>
+            </a:pPr>
+            <a:r>
+              <a:rPr lang="en-US" sz="1250" b="1" spc="60" kern="0" dirty="0">
+                <a:solidFill>
+                  <a:srgbClr val="1F6B5C"/>
+                </a:solidFill>
+                <a:latin typeface="Calibri" pitchFamily="34" charset="0"/>
+                <a:ea typeface="Calibri" pitchFamily="34" charset="-122"/>
+                <a:cs typeface="Calibri" pitchFamily="34" charset="-120"/>
+              </a:rPr>
+              <a:t>~2 weeks out</a:t>
+            </a:r>
+            <a:endParaRPr lang="en-US" sz="1250" dirty="0"/>
+          </a:p>
+        </p:txBody>
+      </p:sp>
+      <p:sp>
+        <p:nvSpPr>
+          <p:cNvPr id="16" name="Shape 14"/>
+          <p:cNvSpPr/>
+          <p:nvPr/>
+        </p:nvSpPr>
+        <p:spPr>
+          <a:xfrm>
+            <a:off x="7653528" y="3031236"/>
+            <a:ext cx="237744" cy="237744"/>
+          </a:xfrm>
+          <a:prstGeom prst="ellipse">
+            <a:avLst/>
+          </a:prstGeom>
+          <a:solidFill>
+            <a:srgbClr val="2E8B7A"/>
+          </a:solidFill>
+          <a:ln w="25400">
+            <a:solidFill>
+              <a:srgbClr val="FFFFFF"/>
+            </a:solidFill>
+            <a:prstDash val="solid"/>
+          </a:ln>
+        </p:spPr>
+      </p:sp>
+      <p:sp>
+        <p:nvSpPr>
+          <p:cNvPr id="17" name="Text 15"/>
+          <p:cNvSpPr/>
+          <p:nvPr/>
+        </p:nvSpPr>
+        <p:spPr>
+          <a:xfrm>
+            <a:off x="6583680" y="3401568"/>
+            <a:ext cx="2377440" cy="566928"/>
+          </a:xfrm>
+          <a:prstGeom prst="rect">
+            <a:avLst/>
+          </a:prstGeom>
+          <a:noFill/>
+          <a:ln/>
+        </p:spPr>
+        <p:txBody>
+          <a:bodyPr wrap="square" lIns="0" tIns="0" rIns="0" bIns="0" rtlCol="0" anchor="t"/>
+          <a:lstStyle/>
+          <a:p>
+            <a:pPr algn="ctr" indent="0" marL="0">
+              <a:lnSpc>
+                <a:spcPts val="1600"/>
+              </a:lnSpc>
+              <a:buNone/>
+            </a:pPr>
+            <a:r>
+              <a:rPr lang="en-US" sz="1200" dirty="0">
+                <a:solidFill>
+                  <a:srgbClr val="5C6675"/>
+                </a:solidFill>
+                <a:latin typeface="Calibri" pitchFamily="34" charset="0"/>
+                <a:ea typeface="Calibri" pitchFamily="34" charset="-122"/>
+                <a:cs typeface="Calibri" pitchFamily="34" charset="-120"/>
+              </a:rPr>
+              <a:t>Still time to change the month's outcome.</a:t>
+            </a:r>
+            <a:endParaRPr lang="en-US" sz="1200" dirty="0"/>
+          </a:p>
+        </p:txBody>
+      </p:sp>
+      <p:sp>
+        <p:nvSpPr>
+          <p:cNvPr id="18" name="Text 16"/>
+          <p:cNvSpPr/>
+          <p:nvPr/>
+        </p:nvSpPr>
+        <p:spPr>
+          <a:xfrm>
+            <a:off x="9262872" y="2212848"/>
+            <a:ext cx="2377440" cy="310896"/>
+          </a:xfrm>
+          <a:prstGeom prst="rect">
+            <a:avLst/>
+          </a:prstGeom>
+          <a:noFill/>
+          <a:ln/>
+        </p:spPr>
+        <p:txBody>
+          <a:bodyPr wrap="square" lIns="0" tIns="0" rIns="0" bIns="0" rtlCol="0" anchor="ctr"/>
+          <a:lstStyle/>
+          <a:p>
+            <a:pPr algn="ctr" indent="0" marL="0">
+              <a:buNone/>
+            </a:pPr>
+            <a:r>
+              <a:rPr lang="en-US" sz="1400" b="1" dirty="0">
+                <a:solidFill>
+                  <a:srgbClr val="5C6675"/>
+                </a:solidFill>
+                <a:latin typeface="Calibri" pitchFamily="34" charset="0"/>
+                <a:ea typeface="Calibri" pitchFamily="34" charset="-122"/>
+                <a:cs typeface="Calibri" pitchFamily="34" charset="-120"/>
+              </a:rPr>
+              <a:t>The invoice</a:t>
+            </a:r>
+            <a:endParaRPr lang="en-US" sz="1400" dirty="0"/>
+          </a:p>
+        </p:txBody>
+      </p:sp>
+      <p:sp>
+        <p:nvSpPr>
+          <p:cNvPr id="19" name="Text 17"/>
+          <p:cNvSpPr/>
+          <p:nvPr/>
+        </p:nvSpPr>
+        <p:spPr>
+          <a:xfrm>
+            <a:off x="9262872" y="2542032"/>
+            <a:ext cx="2377440" cy="292608"/>
+          </a:xfrm>
+          <a:prstGeom prst="rect">
+            <a:avLst/>
+          </a:prstGeom>
+          <a:noFill/>
+          <a:ln/>
+        </p:spPr>
+        <p:txBody>
+          <a:bodyPr wrap="square" lIns="0" tIns="0" rIns="0" bIns="0" rtlCol="0" anchor="ctr"/>
+          <a:lstStyle/>
+          <a:p>
+            <a:pPr algn="ctr" indent="0" marL="0">
+              <a:buNone/>
+            </a:pPr>
+            <a:r>
+              <a:rPr lang="en-US" sz="1250" b="1" spc="60" kern="0" dirty="0">
+                <a:solidFill>
+                  <a:srgbClr val="5C6675"/>
+                </a:solidFill>
+                <a:latin typeface="Calibri" pitchFamily="34" charset="0"/>
+                <a:ea typeface="Calibri" pitchFamily="34" charset="-122"/>
+                <a:cs typeface="Calibri" pitchFamily="34" charset="-120"/>
+              </a:rPr>
+              <a:t>30–45 days later</a:t>
+            </a:r>
+            <a:endParaRPr lang="en-US" sz="1250" dirty="0"/>
+          </a:p>
+        </p:txBody>
+      </p:sp>
+      <p:sp>
+        <p:nvSpPr>
+          <p:cNvPr id="20" name="Shape 18"/>
+          <p:cNvSpPr/>
+          <p:nvPr/>
+        </p:nvSpPr>
+        <p:spPr>
+          <a:xfrm>
+            <a:off x="10332720" y="3031236"/>
+            <a:ext cx="237744" cy="237744"/>
+          </a:xfrm>
+          <a:prstGeom prst="ellipse">
+            <a:avLst/>
+          </a:prstGeom>
+          <a:solidFill>
+            <a:srgbClr val="AEB8C4"/>
+          </a:solidFill>
+          <a:ln w="25400">
+            <a:solidFill>
+              <a:srgbClr val="FFFFFF"/>
+            </a:solidFill>
+            <a:prstDash val="solid"/>
+          </a:ln>
+        </p:spPr>
+      </p:sp>
+      <p:sp>
+        <p:nvSpPr>
+          <p:cNvPr id="21" name="Text 19"/>
+          <p:cNvSpPr/>
+          <p:nvPr/>
+        </p:nvSpPr>
+        <p:spPr>
+          <a:xfrm>
+            <a:off x="9262872" y="3401568"/>
+            <a:ext cx="2377440" cy="566928"/>
+          </a:xfrm>
+          <a:prstGeom prst="rect">
+            <a:avLst/>
+          </a:prstGeom>
+          <a:noFill/>
+          <a:ln/>
+        </p:spPr>
+        <p:txBody>
+          <a:bodyPr wrap="square" lIns="0" tIns="0" rIns="0" bIns="0" rtlCol="0" anchor="t"/>
+          <a:lstStyle/>
+          <a:p>
+            <a:pPr algn="ctr" indent="0" marL="0">
+              <a:lnSpc>
+                <a:spcPts val="1600"/>
+              </a:lnSpc>
+              <a:buNone/>
+            </a:pPr>
+            <a:r>
+              <a:rPr lang="en-US" sz="1200" dirty="0">
+                <a:solidFill>
+                  <a:srgbClr val="5C6675"/>
+                </a:solidFill>
+                <a:latin typeface="Calibri" pitchFamily="34" charset="0"/>
+                <a:ea typeface="Calibri" pitchFamily="34" charset="-122"/>
+                <a:cs typeface="Calibri" pitchFamily="34" charset="-120"/>
+              </a:rPr>
+              <a:t>Nothing left to decide. Only to explain.</a:t>
+            </a:r>
+            <a:endParaRPr lang="en-US" sz="1200" dirty="0"/>
+          </a:p>
+        </p:txBody>
+      </p:sp>
+      <p:sp>
+        <p:nvSpPr>
+          <p:cNvPr id="22" name="Shape 20"/>
+          <p:cNvSpPr/>
+          <p:nvPr/>
+        </p:nvSpPr>
+        <p:spPr>
+          <a:xfrm>
+            <a:off x="548640" y="4297680"/>
+            <a:ext cx="6675120" cy="2011680"/>
+          </a:xfrm>
+          <a:prstGeom prst="roundRect">
+            <a:avLst>
+              <a:gd name="adj" fmla="val 4091"/>
+            </a:avLst>
+          </a:prstGeom>
+          <a:solidFill>
+            <a:srgbClr val="F1F3F6"/>
+          </a:solidFill>
+          <a:ln/>
+        </p:spPr>
+      </p:sp>
+      <p:sp>
+        <p:nvSpPr>
+          <p:cNvPr id="23" name="Text 21"/>
+          <p:cNvSpPr/>
+          <p:nvPr/>
+        </p:nvSpPr>
+        <p:spPr>
+          <a:xfrm>
+            <a:off x="877824" y="4443984"/>
+            <a:ext cx="3657600" cy="292608"/>
+          </a:xfrm>
+          <a:prstGeom prst="rect">
+            <a:avLst/>
+          </a:prstGeom>
+          <a:noFill/>
+          <a:ln/>
+        </p:spPr>
+        <p:txBody>
+          <a:bodyPr wrap="square" lIns="0" tIns="0" rIns="0" bIns="0" rtlCol="0" anchor="ctr"/>
+          <a:lstStyle/>
+          <a:p>
+            <a:pPr indent="0" marL="0">
+              <a:buNone/>
+            </a:pPr>
+            <a:r>
+              <a:rPr lang="en-US" sz="1200" b="1" spc="180" kern="0" dirty="0">
+                <a:solidFill>
+                  <a:srgbClr val="5C6675"/>
+                </a:solidFill>
+                <a:latin typeface="Calibri" pitchFamily="34" charset="0"/>
+                <a:ea typeface="Calibri" pitchFamily="34" charset="-122"/>
+                <a:cs typeface="Calibri" pitchFamily="34" charset="-120"/>
+              </a:rPr>
+              <a:t>What has to be true</a:t>
+            </a:r>
+            <a:endParaRPr lang="en-US" sz="1200" dirty="0"/>
+          </a:p>
+        </p:txBody>
+      </p:sp>
+      <p:sp>
+        <p:nvSpPr>
+          <p:cNvPr id="24" name="Shape 22"/>
+          <p:cNvSpPr/>
+          <p:nvPr/>
+        </p:nvSpPr>
+        <p:spPr>
+          <a:xfrm>
+            <a:off x="877824" y="4809744"/>
+            <a:ext cx="274320" cy="274320"/>
+          </a:xfrm>
+          <a:prstGeom prst="ellipse">
+            <a:avLst/>
+          </a:prstGeom>
+          <a:solidFill>
+            <a:srgbClr val="FFFFFF"/>
+          </a:solidFill>
+          <a:ln/>
+        </p:spPr>
+      </p:sp>
+      <p:pic>
+        <p:nvPicPr>
+          <p:cNvPr id="25" name="Image 0" descr="preencoded.png">    </p:cNvPr>
+          <p:cNvPicPr>
+            <a:picLocks noChangeAspect="1"/>
+          </p:cNvPicPr>
+          <p:nvPr/>
+        </p:nvPicPr>
+        <p:blipFill>
+          <a:blip r:embed="rId1"/>
+          <a:stretch>
+            <a:fillRect/>
+          </a:stretch>
+        </p:blipFill>
+        <p:spPr>
+          <a:xfrm>
+            <a:off x="946404" y="4878324"/>
+            <a:ext cx="137160" cy="137160"/>
+          </a:xfrm>
+          <a:prstGeom prst="rect">
+            <a:avLst/>
+          </a:prstGeom>
+        </p:spPr>
+      </p:pic>
+      <p:sp>
+        <p:nvSpPr>
+          <p:cNvPr id="26" name="Text 23"/>
+          <p:cNvSpPr/>
+          <p:nvPr/>
+        </p:nvSpPr>
+        <p:spPr>
+          <a:xfrm>
+            <a:off x="1298448" y="4754880"/>
+            <a:ext cx="5669280" cy="384048"/>
+          </a:xfrm>
+          <a:prstGeom prst="rect">
+            <a:avLst/>
+          </a:prstGeom>
+          <a:noFill/>
+          <a:ln/>
+        </p:spPr>
+        <p:txBody>
+          <a:bodyPr wrap="square" lIns="0" tIns="0" rIns="0" bIns="0" rtlCol="0" anchor="ctr"/>
+          <a:lstStyle/>
+          <a:p>
+            <a:pPr indent="0" marL="0">
+              <a:buNone/>
+            </a:pPr>
+            <a:r>
+              <a:rPr lang="en-US" sz="1300" dirty="0">
+                <a:solidFill>
+                  <a:srgbClr val="1B2430"/>
+                </a:solidFill>
+                <a:latin typeface="Calibri" pitchFamily="34" charset="0"/>
+                <a:ea typeface="Calibri" pitchFamily="34" charset="-122"/>
+                <a:cs typeface="Calibri" pitchFamily="34" charset="-120"/>
+              </a:rPr>
+              <a:t>Protective alerts run on usage data, not on billing data</a:t>
+            </a:r>
+            <a:endParaRPr lang="en-US" sz="1300" dirty="0"/>
+          </a:p>
+        </p:txBody>
+      </p:sp>
+      <p:sp>
+        <p:nvSpPr>
+          <p:cNvPr id="27" name="Shape 24"/>
+          <p:cNvSpPr/>
+          <p:nvPr/>
+        </p:nvSpPr>
+        <p:spPr>
+          <a:xfrm>
+            <a:off x="877824" y="5193792"/>
+            <a:ext cx="274320" cy="274320"/>
+          </a:xfrm>
+          <a:prstGeom prst="ellipse">
+            <a:avLst/>
+          </a:prstGeom>
+          <a:solidFill>
+            <a:srgbClr val="FFFFFF"/>
+          </a:solidFill>
+          <a:ln/>
+        </p:spPr>
+      </p:sp>
+      <p:pic>
+        <p:nvPicPr>
+          <p:cNvPr id="28" name="Image 1" descr="preencoded.png">    </p:cNvPr>
+          <p:cNvPicPr>
+            <a:picLocks noChangeAspect="1"/>
+          </p:cNvPicPr>
+          <p:nvPr/>
+        </p:nvPicPr>
+        <p:blipFill>
+          <a:blip r:embed="rId2"/>
+          <a:stretch>
+            <a:fillRect/>
+          </a:stretch>
+        </p:blipFill>
+        <p:spPr>
+          <a:xfrm>
+            <a:off x="946404" y="5262372"/>
+            <a:ext cx="137160" cy="137160"/>
+          </a:xfrm>
+          <a:prstGeom prst="rect">
+            <a:avLst/>
+          </a:prstGeom>
+        </p:spPr>
+      </p:pic>
+      <p:sp>
+        <p:nvSpPr>
+          <p:cNvPr id="29" name="Text 25"/>
+          <p:cNvSpPr/>
+          <p:nvPr/>
+        </p:nvSpPr>
+        <p:spPr>
+          <a:xfrm>
+            <a:off x="1298448" y="5138928"/>
+            <a:ext cx="5669280" cy="384048"/>
+          </a:xfrm>
+          <a:prstGeom prst="rect">
+            <a:avLst/>
+          </a:prstGeom>
+          <a:noFill/>
+          <a:ln/>
+        </p:spPr>
+        <p:txBody>
+          <a:bodyPr wrap="square" lIns="0" tIns="0" rIns="0" bIns="0" rtlCol="0" anchor="ctr"/>
+          <a:lstStyle/>
+          <a:p>
+            <a:pPr indent="0" marL="0">
+              <a:buNone/>
+            </a:pPr>
+            <a:r>
+              <a:rPr lang="en-US" sz="1300" dirty="0">
+                <a:solidFill>
+                  <a:srgbClr val="1B2430"/>
+                </a:solidFill>
+                <a:latin typeface="Calibri" pitchFamily="34" charset="0"/>
+                <a:ea typeface="Calibri" pitchFamily="34" charset="-122"/>
+                <a:cs typeface="Calibri" pitchFamily="34" charset="-120"/>
+              </a:rPr>
+              <a:t>Every alert has a named owner to route to</a:t>
+            </a:r>
+            <a:endParaRPr lang="en-US" sz="1300" dirty="0"/>
+          </a:p>
+        </p:txBody>
+      </p:sp>
+      <p:sp>
+        <p:nvSpPr>
+          <p:cNvPr id="30" name="Shape 26"/>
+          <p:cNvSpPr/>
+          <p:nvPr/>
+        </p:nvSpPr>
+        <p:spPr>
+          <a:xfrm>
+            <a:off x="877824" y="5577840"/>
+            <a:ext cx="274320" cy="274320"/>
+          </a:xfrm>
+          <a:prstGeom prst="ellipse">
+            <a:avLst/>
+          </a:prstGeom>
+          <a:solidFill>
+            <a:srgbClr val="FFFFFF"/>
+          </a:solidFill>
+          <a:ln/>
+        </p:spPr>
+      </p:sp>
+      <p:pic>
+        <p:nvPicPr>
+          <p:cNvPr id="31" name="Image 2" descr="preencoded.png">    </p:cNvPr>
+          <p:cNvPicPr>
+            <a:picLocks noChangeAspect="1"/>
+          </p:cNvPicPr>
+          <p:nvPr/>
+        </p:nvPicPr>
+        <p:blipFill>
+          <a:blip r:embed="rId3"/>
+          <a:stretch>
+            <a:fillRect/>
+          </a:stretch>
+        </p:blipFill>
+        <p:spPr>
+          <a:xfrm>
+            <a:off x="946404" y="5646420"/>
+            <a:ext cx="137160" cy="137160"/>
+          </a:xfrm>
+          <a:prstGeom prst="rect">
+            <a:avLst/>
+          </a:prstGeom>
+        </p:spPr>
+      </p:pic>
+      <p:sp>
+        <p:nvSpPr>
+          <p:cNvPr id="32" name="Text 27"/>
+          <p:cNvSpPr/>
+          <p:nvPr/>
+        </p:nvSpPr>
+        <p:spPr>
+          <a:xfrm>
+            <a:off x="1298448" y="5522976"/>
+            <a:ext cx="5669280" cy="384048"/>
+          </a:xfrm>
+          <a:prstGeom prst="rect">
+            <a:avLst/>
+          </a:prstGeom>
+          <a:noFill/>
+          <a:ln/>
+        </p:spPr>
+        <p:txBody>
+          <a:bodyPr wrap="square" lIns="0" tIns="0" rIns="0" bIns="0" rtlCol="0" anchor="ctr"/>
+          <a:lstStyle/>
+          <a:p>
+            <a:pPr indent="0" marL="0">
+              <a:buNone/>
+            </a:pPr>
+            <a:r>
+              <a:rPr lang="en-US" sz="1300" dirty="0">
+                <a:solidFill>
+                  <a:srgbClr val="1B2430"/>
+                </a:solidFill>
+                <a:latin typeface="Calibri" pitchFamily="34" charset="0"/>
+                <a:ea typeface="Calibri" pitchFamily="34" charset="-122"/>
+                <a:cs typeface="Calibri" pitchFamily="34" charset="-120"/>
+              </a:rPr>
+              <a:t>Budgets are phased, so drift shows up in week one</a:t>
+            </a:r>
+            <a:endParaRPr lang="en-US" sz="1300" dirty="0"/>
+          </a:p>
+        </p:txBody>
+      </p:sp>
+      <p:sp>
+        <p:nvSpPr>
+          <p:cNvPr id="33" name="Shape 28"/>
+          <p:cNvSpPr/>
+          <p:nvPr/>
+        </p:nvSpPr>
+        <p:spPr>
+          <a:xfrm>
+            <a:off x="877824" y="5961888"/>
+            <a:ext cx="274320" cy="274320"/>
+          </a:xfrm>
+          <a:prstGeom prst="ellipse">
+            <a:avLst/>
+          </a:prstGeom>
+          <a:solidFill>
+            <a:srgbClr val="FFFFFF"/>
+          </a:solidFill>
+          <a:ln/>
+        </p:spPr>
+      </p:sp>
+      <p:pic>
+        <p:nvPicPr>
+          <p:cNvPr id="34" name="Image 3" descr="preencoded.png">    </p:cNvPr>
+          <p:cNvPicPr>
+            <a:picLocks noChangeAspect="1"/>
+          </p:cNvPicPr>
+          <p:nvPr/>
+        </p:nvPicPr>
+        <p:blipFill>
+          <a:blip r:embed="rId4"/>
+          <a:stretch>
+            <a:fillRect/>
+          </a:stretch>
+        </p:blipFill>
+        <p:spPr>
+          <a:xfrm>
+            <a:off x="946404" y="6030468"/>
+            <a:ext cx="137160" cy="137160"/>
+          </a:xfrm>
+          <a:prstGeom prst="rect">
+            <a:avLst/>
+          </a:prstGeom>
+        </p:spPr>
+      </p:pic>
+      <p:sp>
+        <p:nvSpPr>
+          <p:cNvPr id="35" name="Text 29"/>
+          <p:cNvSpPr/>
+          <p:nvPr/>
+        </p:nvSpPr>
+        <p:spPr>
+          <a:xfrm>
+            <a:off x="1298448" y="5907024"/>
+            <a:ext cx="5669280" cy="384048"/>
+          </a:xfrm>
+          <a:prstGeom prst="rect">
+            <a:avLst/>
+          </a:prstGeom>
+          <a:noFill/>
+          <a:ln/>
+        </p:spPr>
+        <p:txBody>
+          <a:bodyPr wrap="square" lIns="0" tIns="0" rIns="0" bIns="0" rtlCol="0" anchor="ctr"/>
+          <a:lstStyle/>
+          <a:p>
+            <a:pPr indent="0" marL="0">
+              <a:buNone/>
+            </a:pPr>
+            <a:r>
+              <a:rPr lang="en-US" sz="1300" dirty="0">
+                <a:solidFill>
+                  <a:srgbClr val="1B2430"/>
+                </a:solidFill>
+                <a:latin typeface="Calibri" pitchFamily="34" charset="0"/>
+                <a:ea typeface="Calibri" pitchFamily="34" charset="-122"/>
+                <a:cs typeface="Calibri" pitchFamily="34" charset="-120"/>
+              </a:rPr>
+              <a:t>Quotas cap the worst case while someone investigates</a:t>
+            </a:r>
+            <a:endParaRPr lang="en-US" sz="1300" dirty="0"/>
+          </a:p>
+        </p:txBody>
+      </p:sp>
+      <p:sp>
+        <p:nvSpPr>
+          <p:cNvPr id="36" name="Shape 30"/>
+          <p:cNvSpPr/>
+          <p:nvPr/>
+        </p:nvSpPr>
+        <p:spPr>
+          <a:xfrm>
+            <a:off x="7525512" y="4297680"/>
+            <a:ext cx="4114800" cy="2011680"/>
+          </a:xfrm>
+          <a:prstGeom prst="roundRect">
+            <a:avLst>
+              <a:gd name="adj" fmla="val 4091"/>
+            </a:avLst>
+          </a:prstGeom>
+          <a:solidFill>
             <a:srgbClr val="1F2936"/>
           </a:solidFill>
           <a:ln/>
-        </p:spPr>
-      </p:sp>
-      <p:sp>
-        <p:nvSpPr>
-          <p:cNvPr id="5" name="Text 3"/>
-          <p:cNvSpPr/>
-          <p:nvPr/>
-        </p:nvSpPr>
-        <p:spPr>
-          <a:xfrm>
-            <a:off x="804672" y="1965960"/>
-            <a:ext cx="1097280" cy="502920"/>
-          </a:xfrm>
-          <a:prstGeom prst="rect">
-            <a:avLst/>
-          </a:prstGeom>
-          <a:noFill/>
-          <a:ln/>
-        </p:spPr>
-        <p:txBody>
-          <a:bodyPr wrap="square" lIns="0" tIns="0" rIns="0" bIns="0" rtlCol="0" anchor="ctr"/>
-          <a:lstStyle/>
-          <a:p>
-            <a:pPr indent="0" marL="0">
-              <a:buNone/>
-            </a:pPr>
-            <a:r>
-              <a:rPr lang="en-US" sz="2800" b="1" dirty="0">
+          <a:effectLst>
+            <a:outerShdw sx="100000" sy="100000" kx="0" ky="0" algn="bl" rotWithShape="0" blurRad="127000" dist="25400" dir="5400000">
+              <a:srgbClr val="8C99A8">
+                <a:alpha val="16000"/>
+              </a:srgbClr>
+            </a:outerShdw>
+          </a:effectLst>
+        </p:spPr>
+      </p:sp>
+      <p:sp>
+        <p:nvSpPr>
+          <p:cNvPr id="37" name="Text 31"/>
+          <p:cNvSpPr/>
+          <p:nvPr/>
+        </p:nvSpPr>
+        <p:spPr>
+          <a:xfrm>
+            <a:off x="7818120" y="4462272"/>
+            <a:ext cx="3200400" cy="292608"/>
+          </a:xfrm>
+          <a:prstGeom prst="rect">
+            <a:avLst/>
+          </a:prstGeom>
+          <a:noFill/>
+          <a:ln/>
+        </p:spPr>
+        <p:txBody>
+          <a:bodyPr wrap="square" lIns="0" tIns="0" rIns="0" bIns="0" rtlCol="0" anchor="ctr"/>
+          <a:lstStyle/>
+          <a:p>
+            <a:pPr indent="0" marL="0">
+              <a:buNone/>
+            </a:pPr>
+            <a:r>
+              <a:rPr lang="en-US" sz="1200" b="1" spc="180" kern="0" dirty="0">
                 <a:solidFill>
                   <a:srgbClr val="E39B2C"/>
+                </a:solidFill>
+                <a:latin typeface="Calibri" pitchFamily="34" charset="0"/>
+                <a:ea typeface="Calibri" pitchFamily="34" charset="-122"/>
+                <a:cs typeface="Calibri" pitchFamily="34" charset="-120"/>
+              </a:rPr>
+              <a:t>The point</a:t>
+            </a:r>
+            <a:endParaRPr lang="en-US" sz="1200" dirty="0"/>
+          </a:p>
+        </p:txBody>
+      </p:sp>
+      <p:sp>
+        <p:nvSpPr>
+          <p:cNvPr id="38" name="Text 32"/>
+          <p:cNvSpPr/>
+          <p:nvPr/>
+        </p:nvSpPr>
+        <p:spPr>
+          <a:xfrm>
+            <a:off x="7818120" y="4828032"/>
+            <a:ext cx="3529584" cy="1280160"/>
+          </a:xfrm>
+          <a:prstGeom prst="rect">
+            <a:avLst/>
+          </a:prstGeom>
+          <a:noFill/>
+          <a:ln/>
+        </p:spPr>
+        <p:txBody>
+          <a:bodyPr wrap="square" lIns="0" tIns="0" rIns="0" bIns="0" rtlCol="0" anchor="t"/>
+          <a:lstStyle/>
+          <a:p>
+            <a:pPr indent="0" marL="0">
+              <a:lnSpc>
+                <a:spcPts val="2200"/>
+              </a:lnSpc>
+              <a:buNone/>
+            </a:pPr>
+            <a:r>
+              <a:rPr lang="en-US" sz="1550" i="1" dirty="0">
+                <a:solidFill>
+                  <a:srgbClr val="FFFFFF"/>
                 </a:solidFill>
                 <a:latin typeface="Cambria" pitchFamily="34" charset="0"/>
                 <a:ea typeface="Cambria" pitchFamily="34" charset="-122"/>
                 <a:cs typeface="Cambria" pitchFamily="34" charset="-120"/>
               </a:rPr>
-              <a:t>01</a:t>
-            </a:r>
-            <a:endParaRPr lang="en-US" sz="2800" dirty="0"/>
-          </a:p>
-        </p:txBody>
-      </p:sp>
-      <p:sp>
-        <p:nvSpPr>
-          <p:cNvPr id="6" name="Text 4"/>
-          <p:cNvSpPr/>
-          <p:nvPr/>
-        </p:nvSpPr>
-        <p:spPr>
-          <a:xfrm>
-            <a:off x="786384" y="2523744"/>
-            <a:ext cx="2139696" cy="786384"/>
-          </a:xfrm>
-          <a:prstGeom prst="rect">
-            <a:avLst/>
-          </a:prstGeom>
-          <a:noFill/>
-          <a:ln/>
-        </p:spPr>
-        <p:txBody>
-          <a:bodyPr wrap="square" lIns="0" tIns="0" rIns="0" bIns="0" rtlCol="0" anchor="t"/>
-          <a:lstStyle/>
-          <a:p>
-            <a:pPr indent="0" marL="0">
-              <a:lnSpc>
-                <a:spcPts val="2000"/>
-              </a:lnSpc>
-              <a:buNone/>
-            </a:pPr>
-            <a:r>
-              <a:rPr lang="en-US" sz="1500" b="1" dirty="0">
-                <a:solidFill>
-                  <a:srgbClr val="FFFFFF"/>
-                </a:solidFill>
-                <a:latin typeface="Cambria" pitchFamily="34" charset="0"/>
-                <a:ea typeface="Cambria" pitchFamily="34" charset="-122"/>
-                <a:cs typeface="Cambria" pitchFamily="34" charset="-120"/>
-              </a:rPr>
-              <a:t>Set the tagging standard</a:t>
-            </a:r>
-            <a:endParaRPr lang="en-US" sz="1500" dirty="0"/>
-          </a:p>
-        </p:txBody>
-      </p:sp>
-      <p:sp>
-        <p:nvSpPr>
-          <p:cNvPr id="7" name="Text 5"/>
-          <p:cNvSpPr/>
-          <p:nvPr/>
-        </p:nvSpPr>
-        <p:spPr>
-          <a:xfrm>
-            <a:off x="786384" y="3346704"/>
-            <a:ext cx="2139696" cy="749808"/>
-          </a:xfrm>
-          <a:prstGeom prst="rect">
-            <a:avLst/>
-          </a:prstGeom>
-          <a:noFill/>
-          <a:ln/>
-        </p:spPr>
-        <p:txBody>
-          <a:bodyPr wrap="square" lIns="0" tIns="0" rIns="0" bIns="0" rtlCol="0" anchor="t"/>
-          <a:lstStyle/>
-          <a:p>
-            <a:pPr indent="0" marL="0">
-              <a:lnSpc>
-                <a:spcPts val="1500"/>
-              </a:lnSpc>
-              <a:buNone/>
-            </a:pPr>
-            <a:r>
-              <a:rPr lang="en-US" sz="1200" dirty="0">
-                <a:solidFill>
-                  <a:srgbClr val="9EABBA"/>
-                </a:solidFill>
-                <a:latin typeface="Calibri" pitchFamily="34" charset="0"/>
-                <a:ea typeface="Calibri" pitchFamily="34" charset="-122"/>
-                <a:cs typeface="Calibri" pitchFamily="34" charset="-120"/>
-              </a:rPr>
-              <a:t>Agree a consistent taxonomy before investing in dashboards.</a:t>
-            </a:r>
-            <a:endParaRPr lang="en-US" sz="1200" dirty="0"/>
-          </a:p>
-        </p:txBody>
-      </p:sp>
-      <p:sp>
-        <p:nvSpPr>
-          <p:cNvPr id="8" name="Shape 6"/>
-          <p:cNvSpPr/>
-          <p:nvPr/>
-        </p:nvSpPr>
-        <p:spPr>
-          <a:xfrm>
-            <a:off x="3383280" y="1783080"/>
-            <a:ext cx="2587752" cy="2423160"/>
-          </a:xfrm>
-          <a:prstGeom prst="roundRect">
-            <a:avLst>
-              <a:gd name="adj" fmla="val 3396"/>
-            </a:avLst>
-          </a:prstGeom>
-          <a:solidFill>
-            <a:srgbClr val="F1F3F6"/>
-          </a:solidFill>
-          <a:ln/>
-        </p:spPr>
-      </p:sp>
-      <p:sp>
-        <p:nvSpPr>
-          <p:cNvPr id="9" name="Text 7"/>
-          <p:cNvSpPr/>
-          <p:nvPr/>
-        </p:nvSpPr>
-        <p:spPr>
-          <a:xfrm>
-            <a:off x="3639312" y="1965960"/>
-            <a:ext cx="1097280" cy="502920"/>
-          </a:xfrm>
-          <a:prstGeom prst="rect">
-            <a:avLst/>
-          </a:prstGeom>
-          <a:noFill/>
-          <a:ln/>
-        </p:spPr>
-        <p:txBody>
-          <a:bodyPr wrap="square" lIns="0" tIns="0" rIns="0" bIns="0" rtlCol="0" anchor="ctr"/>
-          <a:lstStyle/>
-          <a:p>
-            <a:pPr indent="0" marL="0">
-              <a:buNone/>
-            </a:pPr>
-            <a:r>
-              <a:rPr lang="en-US" sz="2800" b="1" dirty="0">
-                <a:solidFill>
-                  <a:srgbClr val="B9C2CD"/>
-                </a:solidFill>
-                <a:latin typeface="Cambria" pitchFamily="34" charset="0"/>
-                <a:ea typeface="Cambria" pitchFamily="34" charset="-122"/>
-                <a:cs typeface="Cambria" pitchFamily="34" charset="-120"/>
-              </a:rPr>
-              <a:t>02</a:t>
-            </a:r>
-            <a:endParaRPr lang="en-US" sz="2800" dirty="0"/>
-          </a:p>
-        </p:txBody>
-      </p:sp>
-      <p:sp>
-        <p:nvSpPr>
-          <p:cNvPr id="10" name="Text 8"/>
-          <p:cNvSpPr/>
-          <p:nvPr/>
-        </p:nvSpPr>
-        <p:spPr>
-          <a:xfrm>
-            <a:off x="3621024" y="2523744"/>
-            <a:ext cx="2139696" cy="786384"/>
-          </a:xfrm>
-          <a:prstGeom prst="rect">
-            <a:avLst/>
-          </a:prstGeom>
-          <a:noFill/>
-          <a:ln/>
-        </p:spPr>
-        <p:txBody>
-          <a:bodyPr wrap="square" lIns="0" tIns="0" rIns="0" bIns="0" rtlCol="0" anchor="t"/>
-          <a:lstStyle/>
-          <a:p>
-            <a:pPr indent="0" marL="0">
-              <a:lnSpc>
-                <a:spcPts val="2000"/>
-              </a:lnSpc>
-              <a:buNone/>
-            </a:pPr>
-            <a:r>
-              <a:rPr lang="en-US" sz="1500" b="1" dirty="0">
-                <a:solidFill>
-                  <a:srgbClr val="1B2430"/>
-                </a:solidFill>
-                <a:latin typeface="Cambria" pitchFamily="34" charset="0"/>
-                <a:ea typeface="Cambria" pitchFamily="34" charset="-122"/>
-                <a:cs typeface="Cambria" pitchFamily="34" charset="-120"/>
-              </a:rPr>
-              <a:t>Start with the biggest spend</a:t>
-            </a:r>
-            <a:endParaRPr lang="en-US" sz="1500" dirty="0"/>
-          </a:p>
-        </p:txBody>
-      </p:sp>
-      <p:sp>
-        <p:nvSpPr>
-          <p:cNvPr id="11" name="Text 9"/>
-          <p:cNvSpPr/>
-          <p:nvPr/>
-        </p:nvSpPr>
-        <p:spPr>
-          <a:xfrm>
-            <a:off x="3621024" y="3346704"/>
-            <a:ext cx="2139696" cy="749808"/>
-          </a:xfrm>
-          <a:prstGeom prst="rect">
-            <a:avLst/>
-          </a:prstGeom>
-          <a:noFill/>
-          <a:ln/>
-        </p:spPr>
-        <p:txBody>
-          <a:bodyPr wrap="square" lIns="0" tIns="0" rIns="0" bIns="0" rtlCol="0" anchor="t"/>
-          <a:lstStyle/>
-          <a:p>
-            <a:pPr indent="0" marL="0">
-              <a:lnSpc>
-                <a:spcPts val="1500"/>
-              </a:lnSpc>
-              <a:buNone/>
-            </a:pPr>
-            <a:r>
-              <a:rPr lang="en-US" sz="1200" dirty="0">
-                <a:solidFill>
-                  <a:srgbClr val="5C6675"/>
-                </a:solidFill>
-                <a:latin typeface="Calibri" pitchFamily="34" charset="0"/>
-                <a:ea typeface="Calibri" pitchFamily="34" charset="-122"/>
-                <a:cs typeface="Calibri" pitchFamily="34" charset="-120"/>
-              </a:rPr>
-              <a:t>Attack the largest categories first. Don't chase perfect granularity everywhere.</a:t>
-            </a:r>
-            <a:endParaRPr lang="en-US" sz="1200" dirty="0"/>
-          </a:p>
-        </p:txBody>
-      </p:sp>
-      <p:sp>
-        <p:nvSpPr>
-          <p:cNvPr id="12" name="Shape 10"/>
-          <p:cNvSpPr/>
-          <p:nvPr/>
-        </p:nvSpPr>
-        <p:spPr>
-          <a:xfrm>
-            <a:off x="6217920" y="1783080"/>
-            <a:ext cx="2587752" cy="2423160"/>
-          </a:xfrm>
-          <a:prstGeom prst="roundRect">
-            <a:avLst>
-              <a:gd name="adj" fmla="val 3396"/>
-            </a:avLst>
-          </a:prstGeom>
-          <a:solidFill>
-            <a:srgbClr val="F1F3F6"/>
-          </a:solidFill>
-          <a:ln/>
-        </p:spPr>
-      </p:sp>
-      <p:sp>
-        <p:nvSpPr>
-          <p:cNvPr id="13" name="Text 11"/>
-          <p:cNvSpPr/>
-          <p:nvPr/>
-        </p:nvSpPr>
-        <p:spPr>
-          <a:xfrm>
-            <a:off x="6473952" y="1965960"/>
-            <a:ext cx="1097280" cy="502920"/>
-          </a:xfrm>
-          <a:prstGeom prst="rect">
-            <a:avLst/>
-          </a:prstGeom>
-          <a:noFill/>
-          <a:ln/>
-        </p:spPr>
-        <p:txBody>
-          <a:bodyPr wrap="square" lIns="0" tIns="0" rIns="0" bIns="0" rtlCol="0" anchor="ctr"/>
-          <a:lstStyle/>
-          <a:p>
-            <a:pPr indent="0" marL="0">
-              <a:buNone/>
-            </a:pPr>
-            <a:r>
-              <a:rPr lang="en-US" sz="2800" b="1" dirty="0">
-                <a:solidFill>
-                  <a:srgbClr val="B9C2CD"/>
-                </a:solidFill>
-                <a:latin typeface="Cambria" pitchFamily="34" charset="0"/>
-                <a:ea typeface="Cambria" pitchFamily="34" charset="-122"/>
-                <a:cs typeface="Cambria" pitchFamily="34" charset="-120"/>
-              </a:rPr>
-              <a:t>03</a:t>
-            </a:r>
-            <a:endParaRPr lang="en-US" sz="2800" dirty="0"/>
-          </a:p>
-        </p:txBody>
-      </p:sp>
-      <p:sp>
-        <p:nvSpPr>
-          <p:cNvPr id="14" name="Text 12"/>
-          <p:cNvSpPr/>
-          <p:nvPr/>
-        </p:nvSpPr>
-        <p:spPr>
-          <a:xfrm>
-            <a:off x="6455664" y="2523744"/>
-            <a:ext cx="2139696" cy="786384"/>
-          </a:xfrm>
-          <a:prstGeom prst="rect">
-            <a:avLst/>
-          </a:prstGeom>
-          <a:noFill/>
-          <a:ln/>
-        </p:spPr>
-        <p:txBody>
-          <a:bodyPr wrap="square" lIns="0" tIns="0" rIns="0" bIns="0" rtlCol="0" anchor="t"/>
-          <a:lstStyle/>
-          <a:p>
-            <a:pPr indent="0" marL="0">
-              <a:lnSpc>
-                <a:spcPts val="2000"/>
-              </a:lnSpc>
-              <a:buNone/>
-            </a:pPr>
-            <a:r>
-              <a:rPr lang="en-US" sz="1500" b="1" dirty="0">
-                <a:solidFill>
-                  <a:srgbClr val="1B2430"/>
-                </a:solidFill>
-                <a:latin typeface="Cambria" pitchFamily="34" charset="0"/>
-                <a:ea typeface="Cambria" pitchFamily="34" charset="-122"/>
-                <a:cs typeface="Cambria" pitchFamily="34" charset="-120"/>
-              </a:rPr>
-              <a:t>Get finance and engineering talking</a:t>
-            </a:r>
-            <a:endParaRPr lang="en-US" sz="1500" dirty="0"/>
-          </a:p>
-        </p:txBody>
-      </p:sp>
-      <p:sp>
-        <p:nvSpPr>
-          <p:cNvPr id="15" name="Text 13"/>
-          <p:cNvSpPr/>
-          <p:nvPr/>
-        </p:nvSpPr>
-        <p:spPr>
-          <a:xfrm>
-            <a:off x="6455664" y="3346704"/>
-            <a:ext cx="2139696" cy="749808"/>
-          </a:xfrm>
-          <a:prstGeom prst="rect">
-            <a:avLst/>
-          </a:prstGeom>
-          <a:noFill/>
-          <a:ln/>
-        </p:spPr>
-        <p:txBody>
-          <a:bodyPr wrap="square" lIns="0" tIns="0" rIns="0" bIns="0" rtlCol="0" anchor="t"/>
-          <a:lstStyle/>
-          <a:p>
-            <a:pPr indent="0" marL="0">
-              <a:lnSpc>
-                <a:spcPts val="1500"/>
-              </a:lnSpc>
-              <a:buNone/>
-            </a:pPr>
-            <a:r>
-              <a:rPr lang="en-US" sz="1200" dirty="0">
-                <a:solidFill>
-                  <a:srgbClr val="5C6675"/>
-                </a:solidFill>
-                <a:latin typeface="Calibri" pitchFamily="34" charset="0"/>
-                <a:ea typeface="Calibri" pitchFamily="34" charset="-122"/>
-                <a:cs typeface="Calibri" pitchFamily="34" charset="-120"/>
-              </a:rPr>
-              <a:t>Bring both into the conversation early, not as an afterthought.</a:t>
-            </a:r>
-            <a:endParaRPr lang="en-US" sz="1200" dirty="0"/>
-          </a:p>
-        </p:txBody>
-      </p:sp>
-      <p:sp>
-        <p:nvSpPr>
-          <p:cNvPr id="16" name="Shape 14"/>
-          <p:cNvSpPr/>
-          <p:nvPr/>
-        </p:nvSpPr>
-        <p:spPr>
-          <a:xfrm>
-            <a:off x="9052560" y="1783080"/>
-            <a:ext cx="2587752" cy="2423160"/>
-          </a:xfrm>
-          <a:prstGeom prst="roundRect">
-            <a:avLst>
-              <a:gd name="adj" fmla="val 3396"/>
-            </a:avLst>
-          </a:prstGeom>
-          <a:solidFill>
-            <a:srgbClr val="F1F3F6"/>
-          </a:solidFill>
-          <a:ln/>
-        </p:spPr>
-      </p:sp>
-      <p:sp>
-        <p:nvSpPr>
-          <p:cNvPr id="17" name="Text 15"/>
-          <p:cNvSpPr/>
-          <p:nvPr/>
-        </p:nvSpPr>
-        <p:spPr>
-          <a:xfrm>
-            <a:off x="9308592" y="1965960"/>
-            <a:ext cx="1097280" cy="502920"/>
-          </a:xfrm>
-          <a:prstGeom prst="rect">
-            <a:avLst/>
-          </a:prstGeom>
-          <a:noFill/>
-          <a:ln/>
-        </p:spPr>
-        <p:txBody>
-          <a:bodyPr wrap="square" lIns="0" tIns="0" rIns="0" bIns="0" rtlCol="0" anchor="ctr"/>
-          <a:lstStyle/>
-          <a:p>
-            <a:pPr indent="0" marL="0">
-              <a:buNone/>
-            </a:pPr>
-            <a:r>
-              <a:rPr lang="en-US" sz="2800" b="1" dirty="0">
-                <a:solidFill>
-                  <a:srgbClr val="B9C2CD"/>
-                </a:solidFill>
-                <a:latin typeface="Cambria" pitchFamily="34" charset="0"/>
-                <a:ea typeface="Cambria" pitchFamily="34" charset="-122"/>
-                <a:cs typeface="Cambria" pitchFamily="34" charset="-120"/>
-              </a:rPr>
-              <a:t>04</a:t>
-            </a:r>
-            <a:endParaRPr lang="en-US" sz="2800" dirty="0"/>
-          </a:p>
-        </p:txBody>
-      </p:sp>
-      <p:sp>
-        <p:nvSpPr>
-          <p:cNvPr id="18" name="Text 16"/>
-          <p:cNvSpPr/>
-          <p:nvPr/>
-        </p:nvSpPr>
-        <p:spPr>
-          <a:xfrm>
-            <a:off x="9290304" y="2523744"/>
-            <a:ext cx="2139696" cy="786384"/>
-          </a:xfrm>
-          <a:prstGeom prst="rect">
-            <a:avLst/>
-          </a:prstGeom>
-          <a:noFill/>
-          <a:ln/>
-        </p:spPr>
-        <p:txBody>
-          <a:bodyPr wrap="square" lIns="0" tIns="0" rIns="0" bIns="0" rtlCol="0" anchor="t"/>
-          <a:lstStyle/>
-          <a:p>
-            <a:pPr indent="0" marL="0">
-              <a:lnSpc>
-                <a:spcPts val="2000"/>
-              </a:lnSpc>
-              <a:buNone/>
-            </a:pPr>
-            <a:r>
-              <a:rPr lang="en-US" sz="1500" b="1" dirty="0">
-                <a:solidFill>
-                  <a:srgbClr val="1B2430"/>
-                </a:solidFill>
-                <a:latin typeface="Cambria" pitchFamily="34" charset="0"/>
-                <a:ea typeface="Cambria" pitchFamily="34" charset="-122"/>
-                <a:cs typeface="Cambria" pitchFamily="34" charset="-120"/>
-              </a:rPr>
-              <a:t>Set guardrails early</a:t>
-            </a:r>
-            <a:endParaRPr lang="en-US" sz="1500" dirty="0"/>
-          </a:p>
-        </p:txBody>
-      </p:sp>
-      <p:sp>
-        <p:nvSpPr>
-          <p:cNvPr id="19" name="Text 17"/>
-          <p:cNvSpPr/>
-          <p:nvPr/>
-        </p:nvSpPr>
-        <p:spPr>
-          <a:xfrm>
-            <a:off x="9290304" y="3346704"/>
-            <a:ext cx="2139696" cy="749808"/>
-          </a:xfrm>
-          <a:prstGeom prst="rect">
-            <a:avLst/>
-          </a:prstGeom>
-          <a:noFill/>
-          <a:ln/>
-        </p:spPr>
-        <p:txBody>
-          <a:bodyPr wrap="square" lIns="0" tIns="0" rIns="0" bIns="0" rtlCol="0" anchor="t"/>
-          <a:lstStyle/>
-          <a:p>
-            <a:pPr indent="0" marL="0">
-              <a:lnSpc>
-                <a:spcPts val="1500"/>
-              </a:lnSpc>
-              <a:buNone/>
-            </a:pPr>
-            <a:r>
-              <a:rPr lang="en-US" sz="1200" dirty="0">
-                <a:solidFill>
-                  <a:srgbClr val="5C6675"/>
-                </a:solidFill>
-                <a:latin typeface="Calibri" pitchFamily="34" charset="0"/>
-                <a:ea typeface="Calibri" pitchFamily="34" charset="-122"/>
-                <a:cs typeface="Calibri" pitchFamily="34" charset="-120"/>
-              </a:rPr>
-              <a:t>Owners, budget thresholds and quotas cost little to add — and stop the expensive surprises.</a:t>
-            </a:r>
-            <a:endParaRPr lang="en-US" sz="1200" dirty="0"/>
-          </a:p>
-        </p:txBody>
-      </p:sp>
-      <p:sp>
-        <p:nvSpPr>
-          <p:cNvPr id="20" name="Shape 18"/>
-          <p:cNvSpPr/>
-          <p:nvPr/>
-        </p:nvSpPr>
-        <p:spPr>
-          <a:xfrm>
-            <a:off x="548640" y="4434840"/>
-            <a:ext cx="11091672" cy="1874520"/>
-          </a:xfrm>
-          <a:prstGeom prst="roundRect">
-            <a:avLst>
-              <a:gd name="adj" fmla="val 4390"/>
-            </a:avLst>
-          </a:prstGeom>
-          <a:solidFill>
-            <a:srgbClr val="F1F3F6"/>
-          </a:solidFill>
-          <a:ln/>
-        </p:spPr>
-      </p:sp>
-      <p:sp>
-        <p:nvSpPr>
-          <p:cNvPr id="21" name="Text 19"/>
-          <p:cNvSpPr/>
-          <p:nvPr/>
-        </p:nvSpPr>
-        <p:spPr>
-          <a:xfrm>
-            <a:off x="877824" y="4572000"/>
-            <a:ext cx="6035040" cy="292608"/>
-          </a:xfrm>
-          <a:prstGeom prst="rect">
-            <a:avLst/>
-          </a:prstGeom>
-          <a:noFill/>
-          <a:ln/>
-        </p:spPr>
-        <p:txBody>
-          <a:bodyPr wrap="square" lIns="0" tIns="0" rIns="0" bIns="0" rtlCol="0" anchor="ctr"/>
-          <a:lstStyle/>
-          <a:p>
-            <a:pPr indent="0" marL="0">
-              <a:buNone/>
-            </a:pPr>
-            <a:r>
-              <a:rPr lang="en-US" sz="1200" b="1" spc="180" kern="0" dirty="0">
-                <a:solidFill>
-                  <a:srgbClr val="5C6675"/>
-                </a:solidFill>
-                <a:latin typeface="Calibri" pitchFamily="34" charset="0"/>
-                <a:ea typeface="Calibri" pitchFamily="34" charset="-122"/>
-                <a:cs typeface="Calibri" pitchFamily="34" charset="-120"/>
-              </a:rPr>
-              <a:t>Tooling — match the footprint, not the ambition</a:t>
-            </a:r>
-            <a:endParaRPr lang="en-US" sz="1200" dirty="0"/>
-          </a:p>
-        </p:txBody>
-      </p:sp>
-      <p:sp>
-        <p:nvSpPr>
-          <p:cNvPr id="22" name="Text 20"/>
-          <p:cNvSpPr/>
-          <p:nvPr/>
-        </p:nvSpPr>
-        <p:spPr>
-          <a:xfrm>
-            <a:off x="877824" y="4937760"/>
-            <a:ext cx="1737360" cy="384048"/>
-          </a:xfrm>
-          <a:prstGeom prst="rect">
-            <a:avLst/>
-          </a:prstGeom>
-          <a:noFill/>
-          <a:ln/>
-        </p:spPr>
-        <p:txBody>
-          <a:bodyPr wrap="square" lIns="0" tIns="0" rIns="0" bIns="0" rtlCol="0" anchor="ctr"/>
-          <a:lstStyle/>
-          <a:p>
-            <a:pPr indent="0" marL="0">
-              <a:buNone/>
-            </a:pPr>
-            <a:r>
-              <a:rPr lang="en-US" sz="1350" b="1" dirty="0">
-                <a:solidFill>
-                  <a:srgbClr val="2E8B7A"/>
-                </a:solidFill>
-                <a:latin typeface="Calibri" pitchFamily="34" charset="0"/>
-                <a:ea typeface="Calibri" pitchFamily="34" charset="-122"/>
-                <a:cs typeface="Calibri" pitchFamily="34" charset="-120"/>
-              </a:rPr>
-              <a:t>Native</a:t>
-            </a:r>
-            <a:endParaRPr lang="en-US" sz="1350" dirty="0"/>
-          </a:p>
-        </p:txBody>
-      </p:sp>
-      <p:sp>
-        <p:nvSpPr>
-          <p:cNvPr id="23" name="Text 21"/>
-          <p:cNvSpPr/>
-          <p:nvPr/>
-        </p:nvSpPr>
-        <p:spPr>
-          <a:xfrm>
-            <a:off x="2651760" y="4937760"/>
-            <a:ext cx="8595360" cy="384048"/>
-          </a:xfrm>
-          <a:prstGeom prst="rect">
-            <a:avLst/>
-          </a:prstGeom>
-          <a:noFill/>
-          <a:ln/>
-        </p:spPr>
-        <p:txBody>
-          <a:bodyPr wrap="square" lIns="0" tIns="0" rIns="0" bIns="0" rtlCol="0" anchor="ctr"/>
-          <a:lstStyle/>
-          <a:p>
-            <a:pPr indent="0" marL="0">
-              <a:buNone/>
-            </a:pPr>
-            <a:r>
-              <a:rPr lang="en-US" sz="1350" dirty="0">
-                <a:solidFill>
-                  <a:srgbClr val="5C6675"/>
-                </a:solidFill>
-                <a:latin typeface="Calibri" pitchFamily="34" charset="0"/>
-                <a:ea typeface="Calibri" pitchFamily="34" charset="-122"/>
-                <a:cs typeface="Calibri" pitchFamily="34" charset="-120"/>
-              </a:rPr>
-              <a:t>AWS Cost Explorer  ·  Azure Cost Management  ·  GCP Billing</a:t>
-            </a:r>
-            <a:endParaRPr lang="en-US" sz="1350" dirty="0"/>
-          </a:p>
-        </p:txBody>
-      </p:sp>
-      <p:sp>
-        <p:nvSpPr>
-          <p:cNvPr id="24" name="Text 22"/>
-          <p:cNvSpPr/>
-          <p:nvPr/>
-        </p:nvSpPr>
-        <p:spPr>
-          <a:xfrm>
-            <a:off x="877824" y="5349240"/>
-            <a:ext cx="1737360" cy="384048"/>
-          </a:xfrm>
-          <a:prstGeom prst="rect">
-            <a:avLst/>
-          </a:prstGeom>
-          <a:noFill/>
-          <a:ln/>
-        </p:spPr>
-        <p:txBody>
-          <a:bodyPr wrap="square" lIns="0" tIns="0" rIns="0" bIns="0" rtlCol="0" anchor="ctr"/>
-          <a:lstStyle/>
-          <a:p>
-            <a:pPr indent="0" marL="0">
-              <a:buNone/>
-            </a:pPr>
-            <a:r>
-              <a:rPr lang="en-US" sz="1350" b="1" dirty="0">
-                <a:solidFill>
-                  <a:srgbClr val="B87B18"/>
-                </a:solidFill>
-                <a:latin typeface="Calibri" pitchFamily="34" charset="0"/>
-                <a:ea typeface="Calibri" pitchFamily="34" charset="-122"/>
-                <a:cs typeface="Calibri" pitchFamily="34" charset="-120"/>
-              </a:rPr>
-              <a:t>Third-party</a:t>
-            </a:r>
-            <a:endParaRPr lang="en-US" sz="1350" dirty="0"/>
-          </a:p>
-        </p:txBody>
-      </p:sp>
-      <p:sp>
-        <p:nvSpPr>
-          <p:cNvPr id="25" name="Text 23"/>
-          <p:cNvSpPr/>
-          <p:nvPr/>
-        </p:nvSpPr>
-        <p:spPr>
-          <a:xfrm>
-            <a:off x="2651760" y="5349240"/>
-            <a:ext cx="8595360" cy="384048"/>
-          </a:xfrm>
-          <a:prstGeom prst="rect">
-            <a:avLst/>
-          </a:prstGeom>
-          <a:noFill/>
-          <a:ln/>
-        </p:spPr>
-        <p:txBody>
-          <a:bodyPr wrap="square" lIns="0" tIns="0" rIns="0" bIns="0" rtlCol="0" anchor="ctr"/>
-          <a:lstStyle/>
-          <a:p>
-            <a:pPr indent="0" marL="0">
-              <a:buNone/>
-            </a:pPr>
-            <a:r>
-              <a:rPr lang="en-US" sz="1350" dirty="0">
-                <a:solidFill>
-                  <a:srgbClr val="5C6675"/>
-                </a:solidFill>
-                <a:latin typeface="Calibri" pitchFamily="34" charset="0"/>
-                <a:ea typeface="Calibri" pitchFamily="34" charset="-122"/>
-                <a:cs typeface="Calibri" pitchFamily="34" charset="-120"/>
-              </a:rPr>
-              <a:t>CloudHealth  ·  Apptio  ·  Vantage  ·  nOps  ·  Finout  ·  CoreStack</a:t>
-            </a:r>
-            <a:endParaRPr lang="en-US" sz="1350" dirty="0"/>
-          </a:p>
-        </p:txBody>
-      </p:sp>
-      <p:sp>
-        <p:nvSpPr>
-          <p:cNvPr id="26" name="Text 24"/>
-          <p:cNvSpPr/>
-          <p:nvPr/>
-        </p:nvSpPr>
-        <p:spPr>
-          <a:xfrm>
-            <a:off x="877824" y="5760720"/>
-            <a:ext cx="1737360" cy="384048"/>
-          </a:xfrm>
-          <a:prstGeom prst="rect">
-            <a:avLst/>
-          </a:prstGeom>
-          <a:noFill/>
-          <a:ln/>
-        </p:spPr>
-        <p:txBody>
-          <a:bodyPr wrap="square" lIns="0" tIns="0" rIns="0" bIns="0" rtlCol="0" anchor="ctr"/>
-          <a:lstStyle/>
-          <a:p>
-            <a:pPr indent="0" marL="0">
-              <a:buNone/>
-            </a:pPr>
-            <a:r>
-              <a:rPr lang="en-US" sz="1350" b="1" dirty="0">
-                <a:solidFill>
-                  <a:srgbClr val="1B2430"/>
-                </a:solidFill>
-                <a:latin typeface="Calibri" pitchFamily="34" charset="0"/>
-                <a:ea typeface="Calibri" pitchFamily="34" charset="-122"/>
-                <a:cs typeface="Calibri" pitchFamily="34" charset="-120"/>
-              </a:rPr>
-              <a:t>Standard</a:t>
-            </a:r>
-            <a:endParaRPr lang="en-US" sz="1350" dirty="0"/>
-          </a:p>
-        </p:txBody>
-      </p:sp>
-      <p:sp>
-        <p:nvSpPr>
-          <p:cNvPr id="27" name="Text 25"/>
-          <p:cNvSpPr/>
-          <p:nvPr/>
-        </p:nvSpPr>
-        <p:spPr>
-          <a:xfrm>
-            <a:off x="2651760" y="5760720"/>
-            <a:ext cx="8595360" cy="384048"/>
-          </a:xfrm>
-          <a:prstGeom prst="rect">
-            <a:avLst/>
-          </a:prstGeom>
-          <a:noFill/>
-          <a:ln/>
-        </p:spPr>
-        <p:txBody>
-          <a:bodyPr wrap="square" lIns="0" tIns="0" rIns="0" bIns="0" rtlCol="0" anchor="ctr"/>
-          <a:lstStyle/>
-          <a:p>
-            <a:pPr indent="0" marL="0">
-              <a:buNone/>
-            </a:pPr>
-            <a:r>
-              <a:rPr lang="en-US" sz="1350" dirty="0">
-                <a:solidFill>
-                  <a:srgbClr val="5C6675"/>
-                </a:solidFill>
-                <a:latin typeface="Calibri" pitchFamily="34" charset="0"/>
-                <a:ea typeface="Calibri" pitchFamily="34" charset="-122"/>
-                <a:cs typeface="Calibri" pitchFamily="34" charset="-120"/>
-              </a:rPr>
-              <a:t>FOCUS-compliant platforms for multi-cloud reporting</a:t>
-            </a:r>
-            <a:endParaRPr lang="en-US" sz="1350" dirty="0"/>
+              <a:t>The goal is not a smaller invoice. It is an invoice with nothing in it you have not already seen, explained and decided about.</a:t>
+            </a:r>
+            <a:endParaRPr lang="en-US" sz="1550" dirty="0"/>
           </a:p>
         </p:txBody>
       </p:sp>
@@ -16293,6 +16677,991 @@
 <file path=ppt/slides/slide22.xml><?xml version="1.0" encoding="utf-8"?>
 <p:sld xmlns:a="http://schemas.openxmlformats.org/drawingml/2006/main" xmlns:r="http://schemas.openxmlformats.org/officeDocument/2006/relationships" xmlns:p="http://schemas.openxmlformats.org/presentationml/2006/main">
   <p:cSld name="Slide 22">
+    <p:bg>
+      <p:bgPr>
+        <a:solidFill>
+          <a:srgbClr val="FFFFFF"/>
+        </a:solidFill>
+      </p:bgPr>
+    </p:bg>
+    <p:spTree>
+      <p:nvGrpSpPr>
+        <p:cNvPr id="1" name=""/>
+        <p:cNvGrpSpPr/>
+        <p:nvPr/>
+      </p:nvGrpSpPr>
+      <p:grpSpPr>
+        <a:xfrm>
+          <a:off x="0" y="0"/>
+          <a:ext cx="0" cy="0"/>
+          <a:chOff x="0" y="0"/>
+          <a:chExt cx="0" cy="0"/>
+        </a:xfrm>
+      </p:grpSpPr>
+      <p:sp>
+        <p:nvSpPr>
+          <p:cNvPr id="2" name="Text 0"/>
+          <p:cNvSpPr/>
+          <p:nvPr/>
+        </p:nvSpPr>
+        <p:spPr>
+          <a:xfrm>
+            <a:off x="548640" y="475488"/>
+            <a:ext cx="7315200" cy="256032"/>
+          </a:xfrm>
+          <a:prstGeom prst="rect">
+            <a:avLst/>
+          </a:prstGeom>
+          <a:noFill/>
+          <a:ln/>
+        </p:spPr>
+        <p:txBody>
+          <a:bodyPr wrap="square" lIns="0" tIns="0" rIns="0" bIns="0" rtlCol="0" anchor="ctr"/>
+          <a:lstStyle/>
+          <a:p>
+            <a:pPr indent="0" marL="0">
+              <a:buNone/>
+            </a:pPr>
+            <a:r>
+              <a:rPr lang="en-US" sz="1100" b="1" spc="220" kern="0" dirty="0">
+                <a:solidFill>
+                  <a:srgbClr val="E39B2C"/>
+                </a:solidFill>
+                <a:latin typeface="Calibri" pitchFamily="34" charset="0"/>
+                <a:ea typeface="Calibri" pitchFamily="34" charset="-122"/>
+                <a:cs typeface="Calibri" pitchFamily="34" charset="-120"/>
+              </a:rPr>
+              <a:t>THE PATH FORWARD</a:t>
+            </a:r>
+            <a:endParaRPr lang="en-US" sz="1100" dirty="0"/>
+          </a:p>
+        </p:txBody>
+      </p:sp>
+      <p:sp>
+        <p:nvSpPr>
+          <p:cNvPr id="3" name="Text 1"/>
+          <p:cNvSpPr/>
+          <p:nvPr/>
+        </p:nvSpPr>
+        <p:spPr>
+          <a:xfrm>
+            <a:off x="548640" y="768096"/>
+            <a:ext cx="11091672" cy="804672"/>
+          </a:xfrm>
+          <a:prstGeom prst="rect">
+            <a:avLst/>
+          </a:prstGeom>
+          <a:noFill/>
+          <a:ln/>
+        </p:spPr>
+        <p:txBody>
+          <a:bodyPr wrap="square" lIns="0" tIns="0" rIns="0" bIns="0" rtlCol="0" anchor="ctr"/>
+          <a:lstStyle/>
+          <a:p>
+            <a:pPr indent="0" marL="0">
+              <a:buNone/>
+            </a:pPr>
+            <a:r>
+              <a:rPr lang="en-US" sz="3100" b="1" dirty="0">
+                <a:solidFill>
+                  <a:srgbClr val="1B2430"/>
+                </a:solidFill>
+                <a:latin typeface="Cambria" pitchFamily="34" charset="0"/>
+                <a:ea typeface="Cambria" pitchFamily="34" charset="-122"/>
+                <a:cs typeface="Cambria" pitchFamily="34" charset="-120"/>
+              </a:rPr>
+              <a:t>Where to start</a:t>
+            </a:r>
+            <a:endParaRPr lang="en-US" sz="3100" dirty="0"/>
+          </a:p>
+        </p:txBody>
+      </p:sp>
+      <p:sp>
+        <p:nvSpPr>
+          <p:cNvPr id="4" name="Shape 2"/>
+          <p:cNvSpPr/>
+          <p:nvPr/>
+        </p:nvSpPr>
+        <p:spPr>
+          <a:xfrm>
+            <a:off x="548640" y="1783080"/>
+            <a:ext cx="2587752" cy="2423160"/>
+          </a:xfrm>
+          <a:prstGeom prst="roundRect">
+            <a:avLst>
+              <a:gd name="adj" fmla="val 3396"/>
+            </a:avLst>
+          </a:prstGeom>
+          <a:solidFill>
+            <a:srgbClr val="1F2936"/>
+          </a:solidFill>
+          <a:ln/>
+        </p:spPr>
+      </p:sp>
+      <p:sp>
+        <p:nvSpPr>
+          <p:cNvPr id="5" name="Text 3"/>
+          <p:cNvSpPr/>
+          <p:nvPr/>
+        </p:nvSpPr>
+        <p:spPr>
+          <a:xfrm>
+            <a:off x="804672" y="1965960"/>
+            <a:ext cx="1097280" cy="502920"/>
+          </a:xfrm>
+          <a:prstGeom prst="rect">
+            <a:avLst/>
+          </a:prstGeom>
+          <a:noFill/>
+          <a:ln/>
+        </p:spPr>
+        <p:txBody>
+          <a:bodyPr wrap="square" lIns="0" tIns="0" rIns="0" bIns="0" rtlCol="0" anchor="ctr"/>
+          <a:lstStyle/>
+          <a:p>
+            <a:pPr indent="0" marL="0">
+              <a:buNone/>
+            </a:pPr>
+            <a:r>
+              <a:rPr lang="en-US" sz="2800" b="1" dirty="0">
+                <a:solidFill>
+                  <a:srgbClr val="E39B2C"/>
+                </a:solidFill>
+                <a:latin typeface="Cambria" pitchFamily="34" charset="0"/>
+                <a:ea typeface="Cambria" pitchFamily="34" charset="-122"/>
+                <a:cs typeface="Cambria" pitchFamily="34" charset="-120"/>
+              </a:rPr>
+              <a:t>01</a:t>
+            </a:r>
+            <a:endParaRPr lang="en-US" sz="2800" dirty="0"/>
+          </a:p>
+        </p:txBody>
+      </p:sp>
+      <p:sp>
+        <p:nvSpPr>
+          <p:cNvPr id="6" name="Text 4"/>
+          <p:cNvSpPr/>
+          <p:nvPr/>
+        </p:nvSpPr>
+        <p:spPr>
+          <a:xfrm>
+            <a:off x="786384" y="2523744"/>
+            <a:ext cx="2139696" cy="786384"/>
+          </a:xfrm>
+          <a:prstGeom prst="rect">
+            <a:avLst/>
+          </a:prstGeom>
+          <a:noFill/>
+          <a:ln/>
+        </p:spPr>
+        <p:txBody>
+          <a:bodyPr wrap="square" lIns="0" tIns="0" rIns="0" bIns="0" rtlCol="0" anchor="t"/>
+          <a:lstStyle/>
+          <a:p>
+            <a:pPr indent="0" marL="0">
+              <a:lnSpc>
+                <a:spcPts val="2000"/>
+              </a:lnSpc>
+              <a:buNone/>
+            </a:pPr>
+            <a:r>
+              <a:rPr lang="en-US" sz="1500" b="1" dirty="0">
+                <a:solidFill>
+                  <a:srgbClr val="FFFFFF"/>
+                </a:solidFill>
+                <a:latin typeface="Cambria" pitchFamily="34" charset="0"/>
+                <a:ea typeface="Cambria" pitchFamily="34" charset="-122"/>
+                <a:cs typeface="Cambria" pitchFamily="34" charset="-120"/>
+              </a:rPr>
+              <a:t>Set the tagging standard</a:t>
+            </a:r>
+            <a:endParaRPr lang="en-US" sz="1500" dirty="0"/>
+          </a:p>
+        </p:txBody>
+      </p:sp>
+      <p:sp>
+        <p:nvSpPr>
+          <p:cNvPr id="7" name="Text 5"/>
+          <p:cNvSpPr/>
+          <p:nvPr/>
+        </p:nvSpPr>
+        <p:spPr>
+          <a:xfrm>
+            <a:off x="786384" y="3346704"/>
+            <a:ext cx="2139696" cy="749808"/>
+          </a:xfrm>
+          <a:prstGeom prst="rect">
+            <a:avLst/>
+          </a:prstGeom>
+          <a:noFill/>
+          <a:ln/>
+        </p:spPr>
+        <p:txBody>
+          <a:bodyPr wrap="square" lIns="0" tIns="0" rIns="0" bIns="0" rtlCol="0" anchor="t"/>
+          <a:lstStyle/>
+          <a:p>
+            <a:pPr indent="0" marL="0">
+              <a:lnSpc>
+                <a:spcPts val="1500"/>
+              </a:lnSpc>
+              <a:buNone/>
+            </a:pPr>
+            <a:r>
+              <a:rPr lang="en-US" sz="1200" dirty="0">
+                <a:solidFill>
+                  <a:srgbClr val="9EABBA"/>
+                </a:solidFill>
+                <a:latin typeface="Calibri" pitchFamily="34" charset="0"/>
+                <a:ea typeface="Calibri" pitchFamily="34" charset="-122"/>
+                <a:cs typeface="Calibri" pitchFamily="34" charset="-120"/>
+              </a:rPr>
+              <a:t>Agree a consistent taxonomy before investing in dashboards.</a:t>
+            </a:r>
+            <a:endParaRPr lang="en-US" sz="1200" dirty="0"/>
+          </a:p>
+        </p:txBody>
+      </p:sp>
+      <p:sp>
+        <p:nvSpPr>
+          <p:cNvPr id="8" name="Shape 6"/>
+          <p:cNvSpPr/>
+          <p:nvPr/>
+        </p:nvSpPr>
+        <p:spPr>
+          <a:xfrm>
+            <a:off x="3383280" y="1783080"/>
+            <a:ext cx="2587752" cy="2423160"/>
+          </a:xfrm>
+          <a:prstGeom prst="roundRect">
+            <a:avLst>
+              <a:gd name="adj" fmla="val 3396"/>
+            </a:avLst>
+          </a:prstGeom>
+          <a:solidFill>
+            <a:srgbClr val="F1F3F6"/>
+          </a:solidFill>
+          <a:ln/>
+        </p:spPr>
+      </p:sp>
+      <p:sp>
+        <p:nvSpPr>
+          <p:cNvPr id="9" name="Text 7"/>
+          <p:cNvSpPr/>
+          <p:nvPr/>
+        </p:nvSpPr>
+        <p:spPr>
+          <a:xfrm>
+            <a:off x="3639312" y="1965960"/>
+            <a:ext cx="1097280" cy="502920"/>
+          </a:xfrm>
+          <a:prstGeom prst="rect">
+            <a:avLst/>
+          </a:prstGeom>
+          <a:noFill/>
+          <a:ln/>
+        </p:spPr>
+        <p:txBody>
+          <a:bodyPr wrap="square" lIns="0" tIns="0" rIns="0" bIns="0" rtlCol="0" anchor="ctr"/>
+          <a:lstStyle/>
+          <a:p>
+            <a:pPr indent="0" marL="0">
+              <a:buNone/>
+            </a:pPr>
+            <a:r>
+              <a:rPr lang="en-US" sz="2800" b="1" dirty="0">
+                <a:solidFill>
+                  <a:srgbClr val="B9C2CD"/>
+                </a:solidFill>
+                <a:latin typeface="Cambria" pitchFamily="34" charset="0"/>
+                <a:ea typeface="Cambria" pitchFamily="34" charset="-122"/>
+                <a:cs typeface="Cambria" pitchFamily="34" charset="-120"/>
+              </a:rPr>
+              <a:t>02</a:t>
+            </a:r>
+            <a:endParaRPr lang="en-US" sz="2800" dirty="0"/>
+          </a:p>
+        </p:txBody>
+      </p:sp>
+      <p:sp>
+        <p:nvSpPr>
+          <p:cNvPr id="10" name="Text 8"/>
+          <p:cNvSpPr/>
+          <p:nvPr/>
+        </p:nvSpPr>
+        <p:spPr>
+          <a:xfrm>
+            <a:off x="3621024" y="2523744"/>
+            <a:ext cx="2139696" cy="786384"/>
+          </a:xfrm>
+          <a:prstGeom prst="rect">
+            <a:avLst/>
+          </a:prstGeom>
+          <a:noFill/>
+          <a:ln/>
+        </p:spPr>
+        <p:txBody>
+          <a:bodyPr wrap="square" lIns="0" tIns="0" rIns="0" bIns="0" rtlCol="0" anchor="t"/>
+          <a:lstStyle/>
+          <a:p>
+            <a:pPr indent="0" marL="0">
+              <a:lnSpc>
+                <a:spcPts val="2000"/>
+              </a:lnSpc>
+              <a:buNone/>
+            </a:pPr>
+            <a:r>
+              <a:rPr lang="en-US" sz="1500" b="1" dirty="0">
+                <a:solidFill>
+                  <a:srgbClr val="1B2430"/>
+                </a:solidFill>
+                <a:latin typeface="Cambria" pitchFamily="34" charset="0"/>
+                <a:ea typeface="Cambria" pitchFamily="34" charset="-122"/>
+                <a:cs typeface="Cambria" pitchFamily="34" charset="-120"/>
+              </a:rPr>
+              <a:t>Start with the biggest spend</a:t>
+            </a:r>
+            <a:endParaRPr lang="en-US" sz="1500" dirty="0"/>
+          </a:p>
+        </p:txBody>
+      </p:sp>
+      <p:sp>
+        <p:nvSpPr>
+          <p:cNvPr id="11" name="Text 9"/>
+          <p:cNvSpPr/>
+          <p:nvPr/>
+        </p:nvSpPr>
+        <p:spPr>
+          <a:xfrm>
+            <a:off x="3621024" y="3346704"/>
+            <a:ext cx="2139696" cy="749808"/>
+          </a:xfrm>
+          <a:prstGeom prst="rect">
+            <a:avLst/>
+          </a:prstGeom>
+          <a:noFill/>
+          <a:ln/>
+        </p:spPr>
+        <p:txBody>
+          <a:bodyPr wrap="square" lIns="0" tIns="0" rIns="0" bIns="0" rtlCol="0" anchor="t"/>
+          <a:lstStyle/>
+          <a:p>
+            <a:pPr indent="0" marL="0">
+              <a:lnSpc>
+                <a:spcPts val="1500"/>
+              </a:lnSpc>
+              <a:buNone/>
+            </a:pPr>
+            <a:r>
+              <a:rPr lang="en-US" sz="1200" dirty="0">
+                <a:solidFill>
+                  <a:srgbClr val="5C6675"/>
+                </a:solidFill>
+                <a:latin typeface="Calibri" pitchFamily="34" charset="0"/>
+                <a:ea typeface="Calibri" pitchFamily="34" charset="-122"/>
+                <a:cs typeface="Calibri" pitchFamily="34" charset="-120"/>
+              </a:rPr>
+              <a:t>Attack the largest categories first. Don't chase perfect granularity everywhere.</a:t>
+            </a:r>
+            <a:endParaRPr lang="en-US" sz="1200" dirty="0"/>
+          </a:p>
+        </p:txBody>
+      </p:sp>
+      <p:sp>
+        <p:nvSpPr>
+          <p:cNvPr id="12" name="Shape 10"/>
+          <p:cNvSpPr/>
+          <p:nvPr/>
+        </p:nvSpPr>
+        <p:spPr>
+          <a:xfrm>
+            <a:off x="6217920" y="1783080"/>
+            <a:ext cx="2587752" cy="2423160"/>
+          </a:xfrm>
+          <a:prstGeom prst="roundRect">
+            <a:avLst>
+              <a:gd name="adj" fmla="val 3396"/>
+            </a:avLst>
+          </a:prstGeom>
+          <a:solidFill>
+            <a:srgbClr val="F1F3F6"/>
+          </a:solidFill>
+          <a:ln/>
+        </p:spPr>
+      </p:sp>
+      <p:sp>
+        <p:nvSpPr>
+          <p:cNvPr id="13" name="Text 11"/>
+          <p:cNvSpPr/>
+          <p:nvPr/>
+        </p:nvSpPr>
+        <p:spPr>
+          <a:xfrm>
+            <a:off x="6473952" y="1965960"/>
+            <a:ext cx="1097280" cy="502920"/>
+          </a:xfrm>
+          <a:prstGeom prst="rect">
+            <a:avLst/>
+          </a:prstGeom>
+          <a:noFill/>
+          <a:ln/>
+        </p:spPr>
+        <p:txBody>
+          <a:bodyPr wrap="square" lIns="0" tIns="0" rIns="0" bIns="0" rtlCol="0" anchor="ctr"/>
+          <a:lstStyle/>
+          <a:p>
+            <a:pPr indent="0" marL="0">
+              <a:buNone/>
+            </a:pPr>
+            <a:r>
+              <a:rPr lang="en-US" sz="2800" b="1" dirty="0">
+                <a:solidFill>
+                  <a:srgbClr val="B9C2CD"/>
+                </a:solidFill>
+                <a:latin typeface="Cambria" pitchFamily="34" charset="0"/>
+                <a:ea typeface="Cambria" pitchFamily="34" charset="-122"/>
+                <a:cs typeface="Cambria" pitchFamily="34" charset="-120"/>
+              </a:rPr>
+              <a:t>03</a:t>
+            </a:r>
+            <a:endParaRPr lang="en-US" sz="2800" dirty="0"/>
+          </a:p>
+        </p:txBody>
+      </p:sp>
+      <p:sp>
+        <p:nvSpPr>
+          <p:cNvPr id="14" name="Text 12"/>
+          <p:cNvSpPr/>
+          <p:nvPr/>
+        </p:nvSpPr>
+        <p:spPr>
+          <a:xfrm>
+            <a:off x="6455664" y="2523744"/>
+            <a:ext cx="2139696" cy="786384"/>
+          </a:xfrm>
+          <a:prstGeom prst="rect">
+            <a:avLst/>
+          </a:prstGeom>
+          <a:noFill/>
+          <a:ln/>
+        </p:spPr>
+        <p:txBody>
+          <a:bodyPr wrap="square" lIns="0" tIns="0" rIns="0" bIns="0" rtlCol="0" anchor="t"/>
+          <a:lstStyle/>
+          <a:p>
+            <a:pPr indent="0" marL="0">
+              <a:lnSpc>
+                <a:spcPts val="2000"/>
+              </a:lnSpc>
+              <a:buNone/>
+            </a:pPr>
+            <a:r>
+              <a:rPr lang="en-US" sz="1500" b="1" dirty="0">
+                <a:solidFill>
+                  <a:srgbClr val="1B2430"/>
+                </a:solidFill>
+                <a:latin typeface="Cambria" pitchFamily="34" charset="0"/>
+                <a:ea typeface="Cambria" pitchFamily="34" charset="-122"/>
+                <a:cs typeface="Cambria" pitchFamily="34" charset="-120"/>
+              </a:rPr>
+              <a:t>Get finance and engineering talking</a:t>
+            </a:r>
+            <a:endParaRPr lang="en-US" sz="1500" dirty="0"/>
+          </a:p>
+        </p:txBody>
+      </p:sp>
+      <p:sp>
+        <p:nvSpPr>
+          <p:cNvPr id="15" name="Text 13"/>
+          <p:cNvSpPr/>
+          <p:nvPr/>
+        </p:nvSpPr>
+        <p:spPr>
+          <a:xfrm>
+            <a:off x="6455664" y="3346704"/>
+            <a:ext cx="2139696" cy="749808"/>
+          </a:xfrm>
+          <a:prstGeom prst="rect">
+            <a:avLst/>
+          </a:prstGeom>
+          <a:noFill/>
+          <a:ln/>
+        </p:spPr>
+        <p:txBody>
+          <a:bodyPr wrap="square" lIns="0" tIns="0" rIns="0" bIns="0" rtlCol="0" anchor="t"/>
+          <a:lstStyle/>
+          <a:p>
+            <a:pPr indent="0" marL="0">
+              <a:lnSpc>
+                <a:spcPts val="1500"/>
+              </a:lnSpc>
+              <a:buNone/>
+            </a:pPr>
+            <a:r>
+              <a:rPr lang="en-US" sz="1200" dirty="0">
+                <a:solidFill>
+                  <a:srgbClr val="5C6675"/>
+                </a:solidFill>
+                <a:latin typeface="Calibri" pitchFamily="34" charset="0"/>
+                <a:ea typeface="Calibri" pitchFamily="34" charset="-122"/>
+                <a:cs typeface="Calibri" pitchFamily="34" charset="-120"/>
+              </a:rPr>
+              <a:t>Bring both into the conversation early, not as an afterthought.</a:t>
+            </a:r>
+            <a:endParaRPr lang="en-US" sz="1200" dirty="0"/>
+          </a:p>
+        </p:txBody>
+      </p:sp>
+      <p:sp>
+        <p:nvSpPr>
+          <p:cNvPr id="16" name="Shape 14"/>
+          <p:cNvSpPr/>
+          <p:nvPr/>
+        </p:nvSpPr>
+        <p:spPr>
+          <a:xfrm>
+            <a:off x="9052560" y="1783080"/>
+            <a:ext cx="2587752" cy="2423160"/>
+          </a:xfrm>
+          <a:prstGeom prst="roundRect">
+            <a:avLst>
+              <a:gd name="adj" fmla="val 3396"/>
+            </a:avLst>
+          </a:prstGeom>
+          <a:solidFill>
+            <a:srgbClr val="F1F3F6"/>
+          </a:solidFill>
+          <a:ln/>
+        </p:spPr>
+      </p:sp>
+      <p:sp>
+        <p:nvSpPr>
+          <p:cNvPr id="17" name="Text 15"/>
+          <p:cNvSpPr/>
+          <p:nvPr/>
+        </p:nvSpPr>
+        <p:spPr>
+          <a:xfrm>
+            <a:off x="9308592" y="1965960"/>
+            <a:ext cx="1097280" cy="502920"/>
+          </a:xfrm>
+          <a:prstGeom prst="rect">
+            <a:avLst/>
+          </a:prstGeom>
+          <a:noFill/>
+          <a:ln/>
+        </p:spPr>
+        <p:txBody>
+          <a:bodyPr wrap="square" lIns="0" tIns="0" rIns="0" bIns="0" rtlCol="0" anchor="ctr"/>
+          <a:lstStyle/>
+          <a:p>
+            <a:pPr indent="0" marL="0">
+              <a:buNone/>
+            </a:pPr>
+            <a:r>
+              <a:rPr lang="en-US" sz="2800" b="1" dirty="0">
+                <a:solidFill>
+                  <a:srgbClr val="B9C2CD"/>
+                </a:solidFill>
+                <a:latin typeface="Cambria" pitchFamily="34" charset="0"/>
+                <a:ea typeface="Cambria" pitchFamily="34" charset="-122"/>
+                <a:cs typeface="Cambria" pitchFamily="34" charset="-120"/>
+              </a:rPr>
+              <a:t>04</a:t>
+            </a:r>
+            <a:endParaRPr lang="en-US" sz="2800" dirty="0"/>
+          </a:p>
+        </p:txBody>
+      </p:sp>
+      <p:sp>
+        <p:nvSpPr>
+          <p:cNvPr id="18" name="Text 16"/>
+          <p:cNvSpPr/>
+          <p:nvPr/>
+        </p:nvSpPr>
+        <p:spPr>
+          <a:xfrm>
+            <a:off x="9290304" y="2523744"/>
+            <a:ext cx="2139696" cy="786384"/>
+          </a:xfrm>
+          <a:prstGeom prst="rect">
+            <a:avLst/>
+          </a:prstGeom>
+          <a:noFill/>
+          <a:ln/>
+        </p:spPr>
+        <p:txBody>
+          <a:bodyPr wrap="square" lIns="0" tIns="0" rIns="0" bIns="0" rtlCol="0" anchor="t"/>
+          <a:lstStyle/>
+          <a:p>
+            <a:pPr indent="0" marL="0">
+              <a:lnSpc>
+                <a:spcPts val="2000"/>
+              </a:lnSpc>
+              <a:buNone/>
+            </a:pPr>
+            <a:r>
+              <a:rPr lang="en-US" sz="1500" b="1" dirty="0">
+                <a:solidFill>
+                  <a:srgbClr val="1B2430"/>
+                </a:solidFill>
+                <a:latin typeface="Cambria" pitchFamily="34" charset="0"/>
+                <a:ea typeface="Cambria" pitchFamily="34" charset="-122"/>
+                <a:cs typeface="Cambria" pitchFamily="34" charset="-120"/>
+              </a:rPr>
+              <a:t>Set guardrails early</a:t>
+            </a:r>
+            <a:endParaRPr lang="en-US" sz="1500" dirty="0"/>
+          </a:p>
+        </p:txBody>
+      </p:sp>
+      <p:sp>
+        <p:nvSpPr>
+          <p:cNvPr id="19" name="Text 17"/>
+          <p:cNvSpPr/>
+          <p:nvPr/>
+        </p:nvSpPr>
+        <p:spPr>
+          <a:xfrm>
+            <a:off x="9290304" y="3346704"/>
+            <a:ext cx="2139696" cy="749808"/>
+          </a:xfrm>
+          <a:prstGeom prst="rect">
+            <a:avLst/>
+          </a:prstGeom>
+          <a:noFill/>
+          <a:ln/>
+        </p:spPr>
+        <p:txBody>
+          <a:bodyPr wrap="square" lIns="0" tIns="0" rIns="0" bIns="0" rtlCol="0" anchor="t"/>
+          <a:lstStyle/>
+          <a:p>
+            <a:pPr indent="0" marL="0">
+              <a:lnSpc>
+                <a:spcPts val="1500"/>
+              </a:lnSpc>
+              <a:buNone/>
+            </a:pPr>
+            <a:r>
+              <a:rPr lang="en-US" sz="1200" dirty="0">
+                <a:solidFill>
+                  <a:srgbClr val="5C6675"/>
+                </a:solidFill>
+                <a:latin typeface="Calibri" pitchFamily="34" charset="0"/>
+                <a:ea typeface="Calibri" pitchFamily="34" charset="-122"/>
+                <a:cs typeface="Calibri" pitchFamily="34" charset="-120"/>
+              </a:rPr>
+              <a:t>Owners, budget thresholds and quotas cost little to add — and stop the expensive surprises.</a:t>
+            </a:r>
+            <a:endParaRPr lang="en-US" sz="1200" dirty="0"/>
+          </a:p>
+        </p:txBody>
+      </p:sp>
+      <p:sp>
+        <p:nvSpPr>
+          <p:cNvPr id="20" name="Shape 18"/>
+          <p:cNvSpPr/>
+          <p:nvPr/>
+        </p:nvSpPr>
+        <p:spPr>
+          <a:xfrm>
+            <a:off x="548640" y="4434840"/>
+            <a:ext cx="11091672" cy="1874520"/>
+          </a:xfrm>
+          <a:prstGeom prst="roundRect">
+            <a:avLst>
+              <a:gd name="adj" fmla="val 4390"/>
+            </a:avLst>
+          </a:prstGeom>
+          <a:solidFill>
+            <a:srgbClr val="F1F3F6"/>
+          </a:solidFill>
+          <a:ln/>
+        </p:spPr>
+      </p:sp>
+      <p:sp>
+        <p:nvSpPr>
+          <p:cNvPr id="21" name="Text 19"/>
+          <p:cNvSpPr/>
+          <p:nvPr/>
+        </p:nvSpPr>
+        <p:spPr>
+          <a:xfrm>
+            <a:off x="877824" y="4572000"/>
+            <a:ext cx="6035040" cy="292608"/>
+          </a:xfrm>
+          <a:prstGeom prst="rect">
+            <a:avLst/>
+          </a:prstGeom>
+          <a:noFill/>
+          <a:ln/>
+        </p:spPr>
+        <p:txBody>
+          <a:bodyPr wrap="square" lIns="0" tIns="0" rIns="0" bIns="0" rtlCol="0" anchor="ctr"/>
+          <a:lstStyle/>
+          <a:p>
+            <a:pPr indent="0" marL="0">
+              <a:buNone/>
+            </a:pPr>
+            <a:r>
+              <a:rPr lang="en-US" sz="1200" b="1" spc="180" kern="0" dirty="0">
+                <a:solidFill>
+                  <a:srgbClr val="5C6675"/>
+                </a:solidFill>
+                <a:latin typeface="Calibri" pitchFamily="34" charset="0"/>
+                <a:ea typeface="Calibri" pitchFamily="34" charset="-122"/>
+                <a:cs typeface="Calibri" pitchFamily="34" charset="-120"/>
+              </a:rPr>
+              <a:t>Tooling — match the footprint, not the ambition</a:t>
+            </a:r>
+            <a:endParaRPr lang="en-US" sz="1200" dirty="0"/>
+          </a:p>
+        </p:txBody>
+      </p:sp>
+      <p:sp>
+        <p:nvSpPr>
+          <p:cNvPr id="22" name="Text 20"/>
+          <p:cNvSpPr/>
+          <p:nvPr/>
+        </p:nvSpPr>
+        <p:spPr>
+          <a:xfrm>
+            <a:off x="877824" y="4937760"/>
+            <a:ext cx="1737360" cy="384048"/>
+          </a:xfrm>
+          <a:prstGeom prst="rect">
+            <a:avLst/>
+          </a:prstGeom>
+          <a:noFill/>
+          <a:ln/>
+        </p:spPr>
+        <p:txBody>
+          <a:bodyPr wrap="square" lIns="0" tIns="0" rIns="0" bIns="0" rtlCol="0" anchor="ctr"/>
+          <a:lstStyle/>
+          <a:p>
+            <a:pPr indent="0" marL="0">
+              <a:buNone/>
+            </a:pPr>
+            <a:r>
+              <a:rPr lang="en-US" sz="1350" b="1" dirty="0">
+                <a:solidFill>
+                  <a:srgbClr val="2E8B7A"/>
+                </a:solidFill>
+                <a:latin typeface="Calibri" pitchFamily="34" charset="0"/>
+                <a:ea typeface="Calibri" pitchFamily="34" charset="-122"/>
+                <a:cs typeface="Calibri" pitchFamily="34" charset="-120"/>
+              </a:rPr>
+              <a:t>Native</a:t>
+            </a:r>
+            <a:endParaRPr lang="en-US" sz="1350" dirty="0"/>
+          </a:p>
+        </p:txBody>
+      </p:sp>
+      <p:sp>
+        <p:nvSpPr>
+          <p:cNvPr id="23" name="Text 21"/>
+          <p:cNvSpPr/>
+          <p:nvPr/>
+        </p:nvSpPr>
+        <p:spPr>
+          <a:xfrm>
+            <a:off x="2651760" y="4937760"/>
+            <a:ext cx="8595360" cy="384048"/>
+          </a:xfrm>
+          <a:prstGeom prst="rect">
+            <a:avLst/>
+          </a:prstGeom>
+          <a:noFill/>
+          <a:ln/>
+        </p:spPr>
+        <p:txBody>
+          <a:bodyPr wrap="square" lIns="0" tIns="0" rIns="0" bIns="0" rtlCol="0" anchor="ctr"/>
+          <a:lstStyle/>
+          <a:p>
+            <a:pPr indent="0" marL="0">
+              <a:buNone/>
+            </a:pPr>
+            <a:r>
+              <a:rPr lang="en-US" sz="1350" dirty="0">
+                <a:solidFill>
+                  <a:srgbClr val="5C6675"/>
+                </a:solidFill>
+                <a:latin typeface="Calibri" pitchFamily="34" charset="0"/>
+                <a:ea typeface="Calibri" pitchFamily="34" charset="-122"/>
+                <a:cs typeface="Calibri" pitchFamily="34" charset="-120"/>
+              </a:rPr>
+              <a:t>AWS Cost Explorer  ·  Azure Cost Management  ·  GCP Billing</a:t>
+            </a:r>
+            <a:endParaRPr lang="en-US" sz="1350" dirty="0"/>
+          </a:p>
+        </p:txBody>
+      </p:sp>
+      <p:sp>
+        <p:nvSpPr>
+          <p:cNvPr id="24" name="Text 22"/>
+          <p:cNvSpPr/>
+          <p:nvPr/>
+        </p:nvSpPr>
+        <p:spPr>
+          <a:xfrm>
+            <a:off x="877824" y="5349240"/>
+            <a:ext cx="1737360" cy="384048"/>
+          </a:xfrm>
+          <a:prstGeom prst="rect">
+            <a:avLst/>
+          </a:prstGeom>
+          <a:noFill/>
+          <a:ln/>
+        </p:spPr>
+        <p:txBody>
+          <a:bodyPr wrap="square" lIns="0" tIns="0" rIns="0" bIns="0" rtlCol="0" anchor="ctr"/>
+          <a:lstStyle/>
+          <a:p>
+            <a:pPr indent="0" marL="0">
+              <a:buNone/>
+            </a:pPr>
+            <a:r>
+              <a:rPr lang="en-US" sz="1350" b="1" dirty="0">
+                <a:solidFill>
+                  <a:srgbClr val="B87B18"/>
+                </a:solidFill>
+                <a:latin typeface="Calibri" pitchFamily="34" charset="0"/>
+                <a:ea typeface="Calibri" pitchFamily="34" charset="-122"/>
+                <a:cs typeface="Calibri" pitchFamily="34" charset="-120"/>
+              </a:rPr>
+              <a:t>Third-party</a:t>
+            </a:r>
+            <a:endParaRPr lang="en-US" sz="1350" dirty="0"/>
+          </a:p>
+        </p:txBody>
+      </p:sp>
+      <p:sp>
+        <p:nvSpPr>
+          <p:cNvPr id="25" name="Text 23"/>
+          <p:cNvSpPr/>
+          <p:nvPr/>
+        </p:nvSpPr>
+        <p:spPr>
+          <a:xfrm>
+            <a:off x="2651760" y="5349240"/>
+            <a:ext cx="8595360" cy="384048"/>
+          </a:xfrm>
+          <a:prstGeom prst="rect">
+            <a:avLst/>
+          </a:prstGeom>
+          <a:noFill/>
+          <a:ln/>
+        </p:spPr>
+        <p:txBody>
+          <a:bodyPr wrap="square" lIns="0" tIns="0" rIns="0" bIns="0" rtlCol="0" anchor="ctr"/>
+          <a:lstStyle/>
+          <a:p>
+            <a:pPr indent="0" marL="0">
+              <a:buNone/>
+            </a:pPr>
+            <a:r>
+              <a:rPr lang="en-US" sz="1350" dirty="0">
+                <a:solidFill>
+                  <a:srgbClr val="5C6675"/>
+                </a:solidFill>
+                <a:latin typeface="Calibri" pitchFamily="34" charset="0"/>
+                <a:ea typeface="Calibri" pitchFamily="34" charset="-122"/>
+                <a:cs typeface="Calibri" pitchFamily="34" charset="-120"/>
+              </a:rPr>
+              <a:t>CloudHealth  ·  Apptio  ·  Vantage  ·  nOps  ·  Finout  ·  CoreStack</a:t>
+            </a:r>
+            <a:endParaRPr lang="en-US" sz="1350" dirty="0"/>
+          </a:p>
+        </p:txBody>
+      </p:sp>
+      <p:sp>
+        <p:nvSpPr>
+          <p:cNvPr id="26" name="Text 24"/>
+          <p:cNvSpPr/>
+          <p:nvPr/>
+        </p:nvSpPr>
+        <p:spPr>
+          <a:xfrm>
+            <a:off x="877824" y="5760720"/>
+            <a:ext cx="1737360" cy="384048"/>
+          </a:xfrm>
+          <a:prstGeom prst="rect">
+            <a:avLst/>
+          </a:prstGeom>
+          <a:noFill/>
+          <a:ln/>
+        </p:spPr>
+        <p:txBody>
+          <a:bodyPr wrap="square" lIns="0" tIns="0" rIns="0" bIns="0" rtlCol="0" anchor="ctr"/>
+          <a:lstStyle/>
+          <a:p>
+            <a:pPr indent="0" marL="0">
+              <a:buNone/>
+            </a:pPr>
+            <a:r>
+              <a:rPr lang="en-US" sz="1350" b="1" dirty="0">
+                <a:solidFill>
+                  <a:srgbClr val="1B2430"/>
+                </a:solidFill>
+                <a:latin typeface="Calibri" pitchFamily="34" charset="0"/>
+                <a:ea typeface="Calibri" pitchFamily="34" charset="-122"/>
+                <a:cs typeface="Calibri" pitchFamily="34" charset="-120"/>
+              </a:rPr>
+              <a:t>Standard</a:t>
+            </a:r>
+            <a:endParaRPr lang="en-US" sz="1350" dirty="0"/>
+          </a:p>
+        </p:txBody>
+      </p:sp>
+      <p:sp>
+        <p:nvSpPr>
+          <p:cNvPr id="27" name="Text 25"/>
+          <p:cNvSpPr/>
+          <p:nvPr/>
+        </p:nvSpPr>
+        <p:spPr>
+          <a:xfrm>
+            <a:off x="2651760" y="5760720"/>
+            <a:ext cx="8595360" cy="384048"/>
+          </a:xfrm>
+          <a:prstGeom prst="rect">
+            <a:avLst/>
+          </a:prstGeom>
+          <a:noFill/>
+          <a:ln/>
+        </p:spPr>
+        <p:txBody>
+          <a:bodyPr wrap="square" lIns="0" tIns="0" rIns="0" bIns="0" rtlCol="0" anchor="ctr"/>
+          <a:lstStyle/>
+          <a:p>
+            <a:pPr indent="0" marL="0">
+              <a:buNone/>
+            </a:pPr>
+            <a:r>
+              <a:rPr lang="en-US" sz="1350" dirty="0">
+                <a:solidFill>
+                  <a:srgbClr val="5C6675"/>
+                </a:solidFill>
+                <a:latin typeface="Calibri" pitchFamily="34" charset="0"/>
+                <a:ea typeface="Calibri" pitchFamily="34" charset="-122"/>
+                <a:cs typeface="Calibri" pitchFamily="34" charset="-120"/>
+              </a:rPr>
+              <a:t>FOCUS-compliant platforms for multi-cloud reporting</a:t>
+            </a:r>
+            <a:endParaRPr lang="en-US" sz="1350" dirty="0"/>
+          </a:p>
+        </p:txBody>
+      </p:sp>
+    </p:spTree>
+  </p:cSld>
+  <p:clrMapOvr>
+    <a:masterClrMapping/>
+  </p:clrMapOvr>
+</p:sld>
+</file>
+
+<file path=ppt/slides/slide23.xml><?xml version="1.0" encoding="utf-8"?>
+<p:sld xmlns:a="http://schemas.openxmlformats.org/drawingml/2006/main" xmlns:r="http://schemas.openxmlformats.org/officeDocument/2006/relationships" xmlns:p="http://schemas.openxmlformats.org/presentationml/2006/main">
+  <p:cSld name="Slide 23">
     <p:bg>
       <p:bgPr>
         <a:solidFill>
@@ -17092,9 +18461,9 @@
 </p:sld>
 </file>
 
-<file path=ppt/slides/slide23.xml><?xml version="1.0" encoding="utf-8"?>
+<file path=ppt/slides/slide24.xml><?xml version="1.0" encoding="utf-8"?>
 <p:sld xmlns:a="http://schemas.openxmlformats.org/drawingml/2006/main" xmlns:r="http://schemas.openxmlformats.org/officeDocument/2006/relationships" xmlns:p="http://schemas.openxmlformats.org/presentationml/2006/main">
-  <p:cSld name="Slide 23">
+  <p:cSld name="Slide 24">
     <p:bg>
       <p:bgPr>
         <a:solidFill>

--- a/presentations/finops-gaining-visibility-cfo.pptx
+++ b/presentations/finops-gaining-visibility-cfo.pptx
@@ -29,9 +29,10 @@
     <p:sldId id="277" r:id="rId23"/>
     <p:sldId id="278" r:id="rId24"/>
     <p:sldId id="279" r:id="rId25"/>
+    <p:sldId id="280" r:id="rId26"/>
   </p:sldIdLst>
   <p:notesMasterIdLst>
-    <p:notesMasterId r:id="rId26"/>
+    <p:notesMasterId r:id="rId27"/>
   </p:notesMasterIdLst>
   <p:sldSz cx="12192000" cy="6858000"/>
   <p:notesSz cx="6858000" cy="12192000"/>
@@ -1757,7 +1758,7 @@
           <a:p>
             <a:r>
               <a:rPr lang="en-US" dirty="0"/>
-              <a:t>This is the ask, and the honest cost answer is effort rather than licence spend if we stay on native tooling — name the roles and the share of their time instead of quoting a budget number you would have to defend. Step one is the only item that cannot run in parallel: every downstream report degrades if the taxonomy is still moving. Split the ownership explicitly — finance owns the taxonomy, the allocation policy and the KPI definitions; engineering owns enforcement, instrumentation and remediation. Steps two and four are both arguments for restraint: attack the largest cost categories rather than pursuing complete granularity, and buy tooling that matches the estate we have rather than the one we might have in three years.</a:t>
+              <a:t>This is the governance-of-the-programme slide, and the one that answers 'how will we know this is working before the savings arrive'. The distinction to hold on to is identified versus realized savings. Identified is an estimate produced by a tool; realized is a change visible on an invoice. Treat the first as a pipeline and only the second as a result, and never let the two be reported as one number — that conflation is how cost programmes end up claiming savings the P&amp;L cannot find. Adoption is the leading indicator worth putting in the monthly pack: the share of findings with a named owner and a date. It moves months before the savings do, and it is the earliest reliable signal that the practice is real rather than decorative. The closing line is the framing to keep with a board: we are buying better decisions, and a lower bill is what a better decision looks like a quarter later. It also sets the right expectation on timing.</a:t>
             </a:r>
             <a:endParaRPr lang="en-US" dirty="0"/>
           </a:p>
@@ -1845,7 +1846,7 @@
           <a:p>
             <a:r>
               <a:rPr lang="en-US" dirty="0"/>
-              <a:t>Close on why this sequencing produces a better financial outcome than cutting first. A cut delivers a one-time step down and reverses as soon as attention moves elsewhere; allocation plus ownership changes the rate at which cost is added, which compounds across every subsequent period. That is also the honest framing for the board: the near-term deliverable is explainable variance and a forecast we can stand behind, with targeted savings following the first full period of clean data. Ask for the first two links today — the allocation standard and published ownership — because the rest follow from them and cannot be bought separately.</a:t>
+              <a:t>This is the ask, and the honest cost answer is effort rather than licence spend if we stay on native tooling — name the roles and the share of their time instead of quoting a budget number you would have to defend. Step one is the only item that cannot run in parallel: every downstream report degrades if the taxonomy is still moving. Split the ownership explicitly — finance owns the taxonomy, the allocation policy and the KPI definitions; engineering owns enforcement, instrumentation and remediation. Steps two and four are both arguments for restraint: attack the largest cost categories rather than pursuing complete granularity, and buy tooling that matches the estate we have rather than the one we might have in three years.</a:t>
             </a:r>
             <a:endParaRPr lang="en-US" dirty="0"/>
           </a:p>
@@ -1933,7 +1934,7 @@
           <a:p>
             <a:r>
               <a:rPr lang="en-US" dirty="0"/>
-              <a:t>Expect five questions and have the answers ready. What does it cost: effort, principally, plus any tooling only if we are genuinely multi-cloud. When do savings appear: allocation coverage improves within weeks, targeted savings follow the first full period of clean data, and be careful not to promise a percentage before we can see where the waste is. Who owns it: name the taxonomy owner and the monthly review before leaving the room, or none of this happens. Does it affect the close: better, not worse — daily data improves the accrual, though chargeback adds a journal step worth scoping with the controller. And will chargeback start an internal war: only if we launch it on allocation nobody trusts, which is exactly what the showback runway is for.</a:t>
+              <a:t>Close on why this sequencing produces a better financial outcome than cutting first. A cut delivers a one-time step down and reverses as soon as attention moves elsewhere; allocation plus ownership changes the rate at which cost is added, which compounds across every subsequent period. That is also the honest framing for the board: the near-term deliverable is explainable variance and a forecast we can stand behind, with targeted savings following the first full period of clean data. Ask for the first two links today — the allocation standard and published ownership — because the rest follow from them and cannot be bought separately.</a:t>
             </a:r>
             <a:endParaRPr lang="en-US" dirty="0"/>
           </a:p>
@@ -1957,6 +1958,94 @@
             <a:fld id="{F7021451-1387-4CA6-816F-3879F97B5CBC}" type="slidenum">
               <a:rPr lang="en-US"/>
               <a:t>24</a:t>
+            </a:fld>
+            <a:endParaRPr lang="en-US"/>
+          </a:p>
+        </p:txBody>
+      </p:sp>
+    </p:spTree>
+    <p:extLst>
+      <p:ext uri="{BB962C8B-B14F-4D97-AF65-F5344CB8AC3E}">
+        <p14:creationId xmlns:p14="http://schemas.microsoft.com/office/powerpoint/2010/main" val="1024086991"/>
+      </p:ext>
+    </p:extLst>
+  </p:cSld>
+  <p:clrMapOvr>
+    <a:masterClrMapping/>
+  </p:clrMapOvr>
+</p:notes>
+</file>
+
+<file path=ppt/notesSlides/notesSlide25.xml><?xml version="1.0" encoding="utf-8"?>
+<p:notes xmlns:a="http://schemas.openxmlformats.org/drawingml/2006/main" xmlns:r="http://schemas.openxmlformats.org/officeDocument/2006/relationships" xmlns:p="http://schemas.openxmlformats.org/presentationml/2006/main">
+  <p:cSld>
+    <p:spTree>
+      <p:nvGrpSpPr>
+        <p:cNvPr id="1" name=""/>
+        <p:cNvGrpSpPr/>
+        <p:nvPr/>
+      </p:nvGrpSpPr>
+      <p:grpSpPr>
+        <a:xfrm>
+          <a:off x="0" y="0"/>
+          <a:ext cx="0" cy="0"/>
+          <a:chOff x="0" y="0"/>
+          <a:chExt cx="0" cy="0"/>
+        </a:xfrm>
+      </p:grpSpPr>
+      <p:sp>
+        <p:nvSpPr>
+          <p:cNvPr id="2" name="Slide Image Placeholder 1"/>
+          <p:cNvSpPr>
+            <a:spLocks noGrp="1" noRot="1" noChangeAspect="1"/>
+          </p:cNvSpPr>
+          <p:nvPr>
+            <p:ph type="sldImg"/>
+          </p:nvPr>
+        </p:nvSpPr>
+        <p:spPr/>
+      </p:sp>
+      <p:sp>
+        <p:nvSpPr>
+          <p:cNvPr id="3" name="Notes Placeholder 2"/>
+          <p:cNvSpPr>
+            <a:spLocks noGrp="1"/>
+          </p:cNvSpPr>
+          <p:nvPr>
+            <p:ph type="body" idx="1"/>
+          </p:nvPr>
+        </p:nvSpPr>
+        <p:spPr/>
+        <p:txBody>
+          <a:bodyPr/>
+          <a:lstStyle/>
+          <a:p>
+            <a:r>
+              <a:rPr lang="en-US" dirty="0"/>
+              <a:t>Expect five questions and have the answers ready. What does it cost: effort, principally, plus any tooling only if we are genuinely multi-cloud. When do savings appear: allocation coverage improves within weeks, targeted savings follow the first full period of clean data, and be careful not to promise a percentage before we can see where the waste is. Who owns it: name the taxonomy owner and the monthly review before leaving the room, or none of this happens. Does it affect the close: better, not worse — daily data improves the accrual, though chargeback adds a journal step worth scoping with the controller. And will chargeback start an internal war: only if we launch it on allocation nobody trusts, which is exactly what the showback runway is for.</a:t>
+            </a:r>
+            <a:endParaRPr lang="en-US" dirty="0"/>
+          </a:p>
+        </p:txBody>
+      </p:sp>
+      <p:sp>
+        <p:nvSpPr>
+          <p:cNvPr id="4" name="Slide Number Placeholder 3"/>
+          <p:cNvSpPr>
+            <a:spLocks noGrp="1"/>
+          </p:cNvSpPr>
+          <p:nvPr>
+            <p:ph type="sldNum" sz="quarter" idx="10"/>
+          </p:nvPr>
+        </p:nvSpPr>
+        <p:spPr/>
+        <p:txBody>
+          <a:bodyPr/>
+          <a:lstStyle/>
+          <a:p>
+            <a:fld id="{F7021451-1387-4CA6-816F-3879F97B5CBC}" type="slidenum">
+              <a:rPr lang="en-US"/>
+              <a:t>25</a:t>
             </a:fld>
             <a:endParaRPr lang="en-US"/>
           </a:p>
@@ -16731,7 +16820,7 @@
                 <a:ea typeface="Calibri" pitchFamily="34" charset="-122"/>
                 <a:cs typeface="Calibri" pitchFamily="34" charset="-120"/>
               </a:rPr>
-              <a:t>THE PATH FORWARD</a:t>
+              <a:t>OPERATE — RUNNING THE PRACTICE</a:t>
             </a:r>
             <a:endParaRPr lang="en-US" sz="1100" dirty="0"/>
           </a:p>
@@ -16770,7 +16859,7 @@
                 <a:ea typeface="Cambria" pitchFamily="34" charset="-122"/>
                 <a:cs typeface="Cambria" pitchFamily="34" charset="-120"/>
               </a:rPr>
-              <a:t>Where to start</a:t>
+              <a:t>Ship the insight, don't just publish it</a:t>
             </a:r>
             <a:endParaRPr lang="en-US" sz="3100" dirty="0"/>
           </a:p>
@@ -16778,21 +16867,675 @@
       </p:sp>
       <p:sp>
         <p:nvSpPr>
-          <p:cNvPr id="4" name="Shape 2"/>
-          <p:cNvSpPr/>
-          <p:nvPr/>
-        </p:nvSpPr>
-        <p:spPr>
-          <a:xfrm>
-            <a:off x="548640" y="1783080"/>
-            <a:ext cx="2587752" cy="2423160"/>
+          <p:cNvPr id="4" name="Text 2"/>
+          <p:cNvSpPr/>
+          <p:nvPr/>
+        </p:nvSpPr>
+        <p:spPr>
+          <a:xfrm>
+            <a:off x="548640" y="1536192"/>
+            <a:ext cx="10607040" cy="365760"/>
+          </a:xfrm>
+          <a:prstGeom prst="rect">
+            <a:avLst/>
+          </a:prstGeom>
+          <a:noFill/>
+          <a:ln/>
+        </p:spPr>
+        <p:txBody>
+          <a:bodyPr wrap="square" lIns="0" tIns="0" rIns="0" bIns="0" rtlCol="0" anchor="ctr"/>
+          <a:lstStyle/>
+          <a:p>
+            <a:pPr indent="0" marL="0">
+              <a:buNone/>
+            </a:pPr>
+            <a:r>
+              <a:rPr lang="en-US" sz="1500" dirty="0">
+                <a:solidFill>
+                  <a:srgbClr val="5C6675"/>
+                </a:solidFill>
+                <a:latin typeface="Calibri" pitchFamily="34" charset="0"/>
+                <a:ea typeface="Calibri" pitchFamily="34" charset="-122"/>
+                <a:cs typeface="Calibri" pitchFamily="34" charset="-120"/>
+              </a:rPr>
+              <a:t>A report tells someone a number. Only a change in what they do next reaches the bill.</a:t>
+            </a:r>
+            <a:endParaRPr lang="en-US" sz="1500" dirty="0"/>
+          </a:p>
+        </p:txBody>
+      </p:sp>
+      <p:sp>
+        <p:nvSpPr>
+          <p:cNvPr id="5" name="Shape 3"/>
+          <p:cNvSpPr/>
+          <p:nvPr/>
+        </p:nvSpPr>
+        <p:spPr>
+          <a:xfrm>
+            <a:off x="548640" y="2286000"/>
+            <a:ext cx="1700784" cy="960120"/>
           </a:xfrm>
           <a:prstGeom prst="roundRect">
             <a:avLst>
-              <a:gd name="adj" fmla="val 3396"/>
+              <a:gd name="adj" fmla="val 8571"/>
             </a:avLst>
           </a:prstGeom>
           <a:solidFill>
+            <a:srgbClr val="F1F3F6"/>
+          </a:solidFill>
+          <a:ln/>
+        </p:spPr>
+      </p:sp>
+      <p:sp>
+        <p:nvSpPr>
+          <p:cNvPr id="6" name="Text 4"/>
+          <p:cNvSpPr/>
+          <p:nvPr/>
+        </p:nvSpPr>
+        <p:spPr>
+          <a:xfrm>
+            <a:off x="548640" y="2395728"/>
+            <a:ext cx="1700784" cy="329184"/>
+          </a:xfrm>
+          <a:prstGeom prst="rect">
+            <a:avLst/>
+          </a:prstGeom>
+          <a:noFill/>
+          <a:ln/>
+        </p:spPr>
+        <p:txBody>
+          <a:bodyPr wrap="square" lIns="0" tIns="0" rIns="0" bIns="0" rtlCol="0" anchor="ctr"/>
+          <a:lstStyle/>
+          <a:p>
+            <a:pPr algn="ctr" indent="0" marL="0">
+              <a:buNone/>
+            </a:pPr>
+            <a:r>
+              <a:rPr lang="en-US" sz="1350" b="1" dirty="0">
+                <a:solidFill>
+                  <a:srgbClr val="1B2430"/>
+                </a:solidFill>
+                <a:latin typeface="Calibri" pitchFamily="34" charset="0"/>
+                <a:ea typeface="Calibri" pitchFamily="34" charset="-122"/>
+                <a:cs typeface="Calibri" pitchFamily="34" charset="-120"/>
+              </a:rPr>
+              <a:t>Finding</a:t>
+            </a:r>
+            <a:endParaRPr lang="en-US" sz="1350" dirty="0"/>
+          </a:p>
+        </p:txBody>
+      </p:sp>
+      <p:sp>
+        <p:nvSpPr>
+          <p:cNvPr id="7" name="Text 5"/>
+          <p:cNvSpPr/>
+          <p:nvPr/>
+        </p:nvSpPr>
+        <p:spPr>
+          <a:xfrm>
+            <a:off x="640080" y="2724912"/>
+            <a:ext cx="1517904" cy="402336"/>
+          </a:xfrm>
+          <a:prstGeom prst="rect">
+            <a:avLst/>
+          </a:prstGeom>
+          <a:noFill/>
+          <a:ln/>
+        </p:spPr>
+        <p:txBody>
+          <a:bodyPr wrap="square" lIns="0" tIns="0" rIns="0" bIns="0" rtlCol="0" anchor="t"/>
+          <a:lstStyle/>
+          <a:p>
+            <a:pPr algn="ctr" indent="0" marL="0">
+              <a:lnSpc>
+                <a:spcPts val="1400"/>
+              </a:lnSpc>
+              <a:buNone/>
+            </a:pPr>
+            <a:r>
+              <a:rPr lang="en-US" sz="1100" dirty="0">
+                <a:solidFill>
+                  <a:srgbClr val="5C6675"/>
+                </a:solidFill>
+                <a:latin typeface="Calibri" pitchFamily="34" charset="0"/>
+                <a:ea typeface="Calibri" pitchFamily="34" charset="-122"/>
+                <a:cs typeface="Calibri" pitchFamily="34" charset="-120"/>
+              </a:rPr>
+              <a:t>the dashboard flags it</a:t>
+            </a:r>
+            <a:endParaRPr lang="en-US" sz="1100" dirty="0"/>
+          </a:p>
+        </p:txBody>
+      </p:sp>
+      <p:sp>
+        <p:nvSpPr>
+          <p:cNvPr id="8" name="Shape 6"/>
+          <p:cNvSpPr/>
+          <p:nvPr/>
+        </p:nvSpPr>
+        <p:spPr>
+          <a:xfrm>
+            <a:off x="2267712" y="2688336"/>
+            <a:ext cx="137160" cy="146304"/>
+          </a:xfrm>
+          <a:prstGeom prst="rightArrow">
+            <a:avLst/>
+          </a:prstGeom>
+          <a:solidFill>
+            <a:srgbClr val="C3CBD5"/>
+          </a:solidFill>
+          <a:ln/>
+        </p:spPr>
+      </p:sp>
+      <p:sp>
+        <p:nvSpPr>
+          <p:cNvPr id="9" name="Shape 7"/>
+          <p:cNvSpPr/>
+          <p:nvPr/>
+        </p:nvSpPr>
+        <p:spPr>
+          <a:xfrm>
+            <a:off x="2423160" y="2286000"/>
+            <a:ext cx="1700784" cy="960120"/>
+          </a:xfrm>
+          <a:prstGeom prst="roundRect">
+            <a:avLst>
+              <a:gd name="adj" fmla="val 8571"/>
+            </a:avLst>
+          </a:prstGeom>
+          <a:solidFill>
+            <a:srgbClr val="F1F3F6"/>
+          </a:solidFill>
+          <a:ln/>
+        </p:spPr>
+      </p:sp>
+      <p:sp>
+        <p:nvSpPr>
+          <p:cNvPr id="10" name="Text 8"/>
+          <p:cNvSpPr/>
+          <p:nvPr/>
+        </p:nvSpPr>
+        <p:spPr>
+          <a:xfrm>
+            <a:off x="2423160" y="2395728"/>
+            <a:ext cx="1700784" cy="329184"/>
+          </a:xfrm>
+          <a:prstGeom prst="rect">
+            <a:avLst/>
+          </a:prstGeom>
+          <a:noFill/>
+          <a:ln/>
+        </p:spPr>
+        <p:txBody>
+          <a:bodyPr wrap="square" lIns="0" tIns="0" rIns="0" bIns="0" rtlCol="0" anchor="ctr"/>
+          <a:lstStyle/>
+          <a:p>
+            <a:pPr algn="ctr" indent="0" marL="0">
+              <a:buNone/>
+            </a:pPr>
+            <a:r>
+              <a:rPr lang="en-US" sz="1350" b="1" dirty="0">
+                <a:solidFill>
+                  <a:srgbClr val="1B2430"/>
+                </a:solidFill>
+                <a:latin typeface="Calibri" pitchFamily="34" charset="0"/>
+                <a:ea typeface="Calibri" pitchFamily="34" charset="-122"/>
+                <a:cs typeface="Calibri" pitchFamily="34" charset="-120"/>
+              </a:rPr>
+              <a:t>Named owner</a:t>
+            </a:r>
+            <a:endParaRPr lang="en-US" sz="1350" dirty="0"/>
+          </a:p>
+        </p:txBody>
+      </p:sp>
+      <p:sp>
+        <p:nvSpPr>
+          <p:cNvPr id="11" name="Text 9"/>
+          <p:cNvSpPr/>
+          <p:nvPr/>
+        </p:nvSpPr>
+        <p:spPr>
+          <a:xfrm>
+            <a:off x="2514600" y="2724912"/>
+            <a:ext cx="1517904" cy="402336"/>
+          </a:xfrm>
+          <a:prstGeom prst="rect">
+            <a:avLst/>
+          </a:prstGeom>
+          <a:noFill/>
+          <a:ln/>
+        </p:spPr>
+        <p:txBody>
+          <a:bodyPr wrap="square" lIns="0" tIns="0" rIns="0" bIns="0" rtlCol="0" anchor="t"/>
+          <a:lstStyle/>
+          <a:p>
+            <a:pPr algn="ctr" indent="0" marL="0">
+              <a:lnSpc>
+                <a:spcPts val="1400"/>
+              </a:lnSpc>
+              <a:buNone/>
+            </a:pPr>
+            <a:r>
+              <a:rPr lang="en-US" sz="1100" dirty="0">
+                <a:solidFill>
+                  <a:srgbClr val="5C6675"/>
+                </a:solidFill>
+                <a:latin typeface="Calibri" pitchFamily="34" charset="0"/>
+                <a:ea typeface="Calibri" pitchFamily="34" charset="-122"/>
+                <a:cs typeface="Calibri" pitchFamily="34" charset="-120"/>
+              </a:rPr>
+              <a:t>one person, not a team</a:t>
+            </a:r>
+            <a:endParaRPr lang="en-US" sz="1100" dirty="0"/>
+          </a:p>
+        </p:txBody>
+      </p:sp>
+      <p:sp>
+        <p:nvSpPr>
+          <p:cNvPr id="12" name="Shape 10"/>
+          <p:cNvSpPr/>
+          <p:nvPr/>
+        </p:nvSpPr>
+        <p:spPr>
+          <a:xfrm>
+            <a:off x="4142232" y="2688336"/>
+            <a:ext cx="137160" cy="146304"/>
+          </a:xfrm>
+          <a:prstGeom prst="rightArrow">
+            <a:avLst/>
+          </a:prstGeom>
+          <a:solidFill>
+            <a:srgbClr val="C3CBD5"/>
+          </a:solidFill>
+          <a:ln/>
+        </p:spPr>
+      </p:sp>
+      <p:sp>
+        <p:nvSpPr>
+          <p:cNvPr id="13" name="Shape 11"/>
+          <p:cNvSpPr/>
+          <p:nvPr/>
+        </p:nvSpPr>
+        <p:spPr>
+          <a:xfrm>
+            <a:off x="4297680" y="2286000"/>
+            <a:ext cx="1700784" cy="960120"/>
+          </a:xfrm>
+          <a:prstGeom prst="roundRect">
+            <a:avLst>
+              <a:gd name="adj" fmla="val 8571"/>
+            </a:avLst>
+          </a:prstGeom>
+          <a:solidFill>
+            <a:srgbClr val="F1F3F6"/>
+          </a:solidFill>
+          <a:ln/>
+        </p:spPr>
+      </p:sp>
+      <p:sp>
+        <p:nvSpPr>
+          <p:cNvPr id="14" name="Text 12"/>
+          <p:cNvSpPr/>
+          <p:nvPr/>
+        </p:nvSpPr>
+        <p:spPr>
+          <a:xfrm>
+            <a:off x="4297680" y="2395728"/>
+            <a:ext cx="1700784" cy="329184"/>
+          </a:xfrm>
+          <a:prstGeom prst="rect">
+            <a:avLst/>
+          </a:prstGeom>
+          <a:noFill/>
+          <a:ln/>
+        </p:spPr>
+        <p:txBody>
+          <a:bodyPr wrap="square" lIns="0" tIns="0" rIns="0" bIns="0" rtlCol="0" anchor="ctr"/>
+          <a:lstStyle/>
+          <a:p>
+            <a:pPr algn="ctr" indent="0" marL="0">
+              <a:buNone/>
+            </a:pPr>
+            <a:r>
+              <a:rPr lang="en-US" sz="1350" b="1" dirty="0">
+                <a:solidFill>
+                  <a:srgbClr val="1B2430"/>
+                </a:solidFill>
+                <a:latin typeface="Calibri" pitchFamily="34" charset="0"/>
+                <a:ea typeface="Calibri" pitchFamily="34" charset="-122"/>
+                <a:cs typeface="Calibri" pitchFamily="34" charset="-120"/>
+              </a:rPr>
+              <a:t>Sized</a:t>
+            </a:r>
+            <a:endParaRPr lang="en-US" sz="1350" dirty="0"/>
+          </a:p>
+        </p:txBody>
+      </p:sp>
+      <p:sp>
+        <p:nvSpPr>
+          <p:cNvPr id="15" name="Text 13"/>
+          <p:cNvSpPr/>
+          <p:nvPr/>
+        </p:nvSpPr>
+        <p:spPr>
+          <a:xfrm>
+            <a:off x="4389120" y="2724912"/>
+            <a:ext cx="1517904" cy="402336"/>
+          </a:xfrm>
+          <a:prstGeom prst="rect">
+            <a:avLst/>
+          </a:prstGeom>
+          <a:noFill/>
+          <a:ln/>
+        </p:spPr>
+        <p:txBody>
+          <a:bodyPr wrap="square" lIns="0" tIns="0" rIns="0" bIns="0" rtlCol="0" anchor="t"/>
+          <a:lstStyle/>
+          <a:p>
+            <a:pPr algn="ctr" indent="0" marL="0">
+              <a:lnSpc>
+                <a:spcPts val="1400"/>
+              </a:lnSpc>
+              <a:buNone/>
+            </a:pPr>
+            <a:r>
+              <a:rPr lang="en-US" sz="1100" dirty="0">
+                <a:solidFill>
+                  <a:srgbClr val="5C6675"/>
+                </a:solidFill>
+                <a:latin typeface="Calibri" pitchFamily="34" charset="0"/>
+                <a:ea typeface="Calibri" pitchFamily="34" charset="-122"/>
+                <a:cs typeface="Calibri" pitchFamily="34" charset="-120"/>
+              </a:rPr>
+              <a:t>what it is worth</a:t>
+            </a:r>
+            <a:endParaRPr lang="en-US" sz="1100" dirty="0"/>
+          </a:p>
+        </p:txBody>
+      </p:sp>
+      <p:sp>
+        <p:nvSpPr>
+          <p:cNvPr id="16" name="Shape 14"/>
+          <p:cNvSpPr/>
+          <p:nvPr/>
+        </p:nvSpPr>
+        <p:spPr>
+          <a:xfrm>
+            <a:off x="6016752" y="2688336"/>
+            <a:ext cx="137160" cy="146304"/>
+          </a:xfrm>
+          <a:prstGeom prst="rightArrow">
+            <a:avLst/>
+          </a:prstGeom>
+          <a:solidFill>
+            <a:srgbClr val="C3CBD5"/>
+          </a:solidFill>
+          <a:ln/>
+        </p:spPr>
+      </p:sp>
+      <p:sp>
+        <p:nvSpPr>
+          <p:cNvPr id="17" name="Shape 15"/>
+          <p:cNvSpPr/>
+          <p:nvPr/>
+        </p:nvSpPr>
+        <p:spPr>
+          <a:xfrm>
+            <a:off x="6172200" y="2286000"/>
+            <a:ext cx="1700784" cy="960120"/>
+          </a:xfrm>
+          <a:prstGeom prst="roundRect">
+            <a:avLst>
+              <a:gd name="adj" fmla="val 8571"/>
+            </a:avLst>
+          </a:prstGeom>
+          <a:solidFill>
+            <a:srgbClr val="F1F3F6"/>
+          </a:solidFill>
+          <a:ln/>
+        </p:spPr>
+      </p:sp>
+      <p:sp>
+        <p:nvSpPr>
+          <p:cNvPr id="18" name="Text 16"/>
+          <p:cNvSpPr/>
+          <p:nvPr/>
+        </p:nvSpPr>
+        <p:spPr>
+          <a:xfrm>
+            <a:off x="6172200" y="2395728"/>
+            <a:ext cx="1700784" cy="329184"/>
+          </a:xfrm>
+          <a:prstGeom prst="rect">
+            <a:avLst/>
+          </a:prstGeom>
+          <a:noFill/>
+          <a:ln/>
+        </p:spPr>
+        <p:txBody>
+          <a:bodyPr wrap="square" lIns="0" tIns="0" rIns="0" bIns="0" rtlCol="0" anchor="ctr"/>
+          <a:lstStyle/>
+          <a:p>
+            <a:pPr algn="ctr" indent="0" marL="0">
+              <a:buNone/>
+            </a:pPr>
+            <a:r>
+              <a:rPr lang="en-US" sz="1350" b="1" dirty="0">
+                <a:solidFill>
+                  <a:srgbClr val="1B2430"/>
+                </a:solidFill>
+                <a:latin typeface="Calibri" pitchFamily="34" charset="0"/>
+                <a:ea typeface="Calibri" pitchFamily="34" charset="-122"/>
+                <a:cs typeface="Calibri" pitchFamily="34" charset="-120"/>
+              </a:rPr>
+              <a:t>Target date</a:t>
+            </a:r>
+            <a:endParaRPr lang="en-US" sz="1350" dirty="0"/>
+          </a:p>
+        </p:txBody>
+      </p:sp>
+      <p:sp>
+        <p:nvSpPr>
+          <p:cNvPr id="19" name="Text 17"/>
+          <p:cNvSpPr/>
+          <p:nvPr/>
+        </p:nvSpPr>
+        <p:spPr>
+          <a:xfrm>
+            <a:off x="6263640" y="2724912"/>
+            <a:ext cx="1517904" cy="402336"/>
+          </a:xfrm>
+          <a:prstGeom prst="rect">
+            <a:avLst/>
+          </a:prstGeom>
+          <a:noFill/>
+          <a:ln/>
+        </p:spPr>
+        <p:txBody>
+          <a:bodyPr wrap="square" lIns="0" tIns="0" rIns="0" bIns="0" rtlCol="0" anchor="t"/>
+          <a:lstStyle/>
+          <a:p>
+            <a:pPr algn="ctr" indent="0" marL="0">
+              <a:lnSpc>
+                <a:spcPts val="1400"/>
+              </a:lnSpc>
+              <a:buNone/>
+            </a:pPr>
+            <a:r>
+              <a:rPr lang="en-US" sz="1100" dirty="0">
+                <a:solidFill>
+                  <a:srgbClr val="5C6675"/>
+                </a:solidFill>
+                <a:latin typeface="Calibri" pitchFamily="34" charset="0"/>
+                <a:ea typeface="Calibri" pitchFamily="34" charset="-122"/>
+                <a:cs typeface="Calibri" pitchFamily="34" charset="-120"/>
+              </a:rPr>
+              <a:t>when, not someday</a:t>
+            </a:r>
+            <a:endParaRPr lang="en-US" sz="1100" dirty="0"/>
+          </a:p>
+        </p:txBody>
+      </p:sp>
+      <p:sp>
+        <p:nvSpPr>
+          <p:cNvPr id="20" name="Shape 18"/>
+          <p:cNvSpPr/>
+          <p:nvPr/>
+        </p:nvSpPr>
+        <p:spPr>
+          <a:xfrm>
+            <a:off x="7891272" y="2688336"/>
+            <a:ext cx="137160" cy="146304"/>
+          </a:xfrm>
+          <a:prstGeom prst="rightArrow">
+            <a:avLst/>
+          </a:prstGeom>
+          <a:solidFill>
+            <a:srgbClr val="C3CBD5"/>
+          </a:solidFill>
+          <a:ln/>
+        </p:spPr>
+      </p:sp>
+      <p:sp>
+        <p:nvSpPr>
+          <p:cNvPr id="21" name="Shape 19"/>
+          <p:cNvSpPr/>
+          <p:nvPr/>
+        </p:nvSpPr>
+        <p:spPr>
+          <a:xfrm>
+            <a:off x="8046720" y="2286000"/>
+            <a:ext cx="1700784" cy="960120"/>
+          </a:xfrm>
+          <a:prstGeom prst="roundRect">
+            <a:avLst>
+              <a:gd name="adj" fmla="val 8571"/>
+            </a:avLst>
+          </a:prstGeom>
+          <a:solidFill>
+            <a:srgbClr val="F1F3F6"/>
+          </a:solidFill>
+          <a:ln/>
+        </p:spPr>
+      </p:sp>
+      <p:sp>
+        <p:nvSpPr>
+          <p:cNvPr id="22" name="Text 20"/>
+          <p:cNvSpPr/>
+          <p:nvPr/>
+        </p:nvSpPr>
+        <p:spPr>
+          <a:xfrm>
+            <a:off x="8046720" y="2395728"/>
+            <a:ext cx="1700784" cy="329184"/>
+          </a:xfrm>
+          <a:prstGeom prst="rect">
+            <a:avLst/>
+          </a:prstGeom>
+          <a:noFill/>
+          <a:ln/>
+        </p:spPr>
+        <p:txBody>
+          <a:bodyPr wrap="square" lIns="0" tIns="0" rIns="0" bIns="0" rtlCol="0" anchor="ctr"/>
+          <a:lstStyle/>
+          <a:p>
+            <a:pPr algn="ctr" indent="0" marL="0">
+              <a:buNone/>
+            </a:pPr>
+            <a:r>
+              <a:rPr lang="en-US" sz="1350" b="1" dirty="0">
+                <a:solidFill>
+                  <a:srgbClr val="1B2430"/>
+                </a:solidFill>
+                <a:latin typeface="Calibri" pitchFamily="34" charset="0"/>
+                <a:ea typeface="Calibri" pitchFamily="34" charset="-122"/>
+                <a:cs typeface="Calibri" pitchFamily="34" charset="-120"/>
+              </a:rPr>
+              <a:t>Reviewed</a:t>
+            </a:r>
+            <a:endParaRPr lang="en-US" sz="1350" dirty="0"/>
+          </a:p>
+        </p:txBody>
+      </p:sp>
+      <p:sp>
+        <p:nvSpPr>
+          <p:cNvPr id="23" name="Text 21"/>
+          <p:cNvSpPr/>
+          <p:nvPr/>
+        </p:nvSpPr>
+        <p:spPr>
+          <a:xfrm>
+            <a:off x="8138160" y="2724912"/>
+            <a:ext cx="1517904" cy="402336"/>
+          </a:xfrm>
+          <a:prstGeom prst="rect">
+            <a:avLst/>
+          </a:prstGeom>
+          <a:noFill/>
+          <a:ln/>
+        </p:spPr>
+        <p:txBody>
+          <a:bodyPr wrap="square" lIns="0" tIns="0" rIns="0" bIns="0" rtlCol="0" anchor="t"/>
+          <a:lstStyle/>
+          <a:p>
+            <a:pPr algn="ctr" indent="0" marL="0">
+              <a:lnSpc>
+                <a:spcPts val="1400"/>
+              </a:lnSpc>
+              <a:buNone/>
+            </a:pPr>
+            <a:r>
+              <a:rPr lang="en-US" sz="1100" dirty="0">
+                <a:solidFill>
+                  <a:srgbClr val="5C6675"/>
+                </a:solidFill>
+                <a:latin typeface="Calibri" pitchFamily="34" charset="0"/>
+                <a:ea typeface="Calibri" pitchFamily="34" charset="-122"/>
+                <a:cs typeface="Calibri" pitchFamily="34" charset="-120"/>
+              </a:rPr>
+              <a:t>did it happen</a:t>
+            </a:r>
+            <a:endParaRPr lang="en-US" sz="1100" dirty="0"/>
+          </a:p>
+        </p:txBody>
+      </p:sp>
+      <p:sp>
+        <p:nvSpPr>
+          <p:cNvPr id="24" name="Shape 22"/>
+          <p:cNvSpPr/>
+          <p:nvPr/>
+        </p:nvSpPr>
+        <p:spPr>
+          <a:xfrm>
+            <a:off x="9765792" y="2688336"/>
+            <a:ext cx="137160" cy="146304"/>
+          </a:xfrm>
+          <a:prstGeom prst="rightArrow">
+            <a:avLst/>
+          </a:prstGeom>
+          <a:solidFill>
+            <a:srgbClr val="C3CBD5"/>
+          </a:solidFill>
+          <a:ln/>
+        </p:spPr>
+      </p:sp>
+      <p:sp>
+        <p:nvSpPr>
+          <p:cNvPr id="25" name="Shape 23"/>
+          <p:cNvSpPr/>
+          <p:nvPr/>
+        </p:nvSpPr>
+        <p:spPr>
+          <a:xfrm>
+            <a:off x="9921240" y="2286000"/>
+            <a:ext cx="1700784" cy="960120"/>
+          </a:xfrm>
+          <a:prstGeom prst="roundRect">
+            <a:avLst>
+              <a:gd name="adj" fmla="val 8571"/>
+            </a:avLst>
+          </a:prstGeom>
+          <a:solidFill>
             <a:srgbClr val="1F2936"/>
           </a:solidFill>
           <a:ln/>
@@ -16800,854 +17543,695 @@
       </p:sp>
       <p:sp>
         <p:nvSpPr>
-          <p:cNvPr id="5" name="Text 3"/>
-          <p:cNvSpPr/>
-          <p:nvPr/>
-        </p:nvSpPr>
-        <p:spPr>
-          <a:xfrm>
-            <a:off x="804672" y="1965960"/>
-            <a:ext cx="1097280" cy="502920"/>
-          </a:xfrm>
-          <a:prstGeom prst="rect">
-            <a:avLst/>
-          </a:prstGeom>
-          <a:noFill/>
-          <a:ln/>
-        </p:spPr>
-        <p:txBody>
-          <a:bodyPr wrap="square" lIns="0" tIns="0" rIns="0" bIns="0" rtlCol="0" anchor="ctr"/>
-          <a:lstStyle/>
-          <a:p>
-            <a:pPr indent="0" marL="0">
-              <a:buNone/>
-            </a:pPr>
-            <a:r>
-              <a:rPr lang="en-US" sz="2800" b="1" dirty="0">
+          <p:cNvPr id="26" name="Text 24"/>
+          <p:cNvSpPr/>
+          <p:nvPr/>
+        </p:nvSpPr>
+        <p:spPr>
+          <a:xfrm>
+            <a:off x="9921240" y="2395728"/>
+            <a:ext cx="1700784" cy="329184"/>
+          </a:xfrm>
+          <a:prstGeom prst="rect">
+            <a:avLst/>
+          </a:prstGeom>
+          <a:noFill/>
+          <a:ln/>
+        </p:spPr>
+        <p:txBody>
+          <a:bodyPr wrap="square" lIns="0" tIns="0" rIns="0" bIns="0" rtlCol="0" anchor="ctr"/>
+          <a:lstStyle/>
+          <a:p>
+            <a:pPr algn="ctr" indent="0" marL="0">
+              <a:buNone/>
+            </a:pPr>
+            <a:r>
+              <a:rPr lang="en-US" sz="1350" b="1" dirty="0">
                 <a:solidFill>
                   <a:srgbClr val="E39B2C"/>
+                </a:solidFill>
+                <a:latin typeface="Calibri" pitchFamily="34" charset="0"/>
+                <a:ea typeface="Calibri" pitchFamily="34" charset="-122"/>
+                <a:cs typeface="Calibri" pitchFamily="34" charset="-120"/>
+              </a:rPr>
+              <a:t>Realized</a:t>
+            </a:r>
+            <a:endParaRPr lang="en-US" sz="1350" dirty="0"/>
+          </a:p>
+        </p:txBody>
+      </p:sp>
+      <p:sp>
+        <p:nvSpPr>
+          <p:cNvPr id="27" name="Text 25"/>
+          <p:cNvSpPr/>
+          <p:nvPr/>
+        </p:nvSpPr>
+        <p:spPr>
+          <a:xfrm>
+            <a:off x="10012680" y="2724912"/>
+            <a:ext cx="1517904" cy="402336"/>
+          </a:xfrm>
+          <a:prstGeom prst="rect">
+            <a:avLst/>
+          </a:prstGeom>
+          <a:noFill/>
+          <a:ln/>
+        </p:spPr>
+        <p:txBody>
+          <a:bodyPr wrap="square" lIns="0" tIns="0" rIns="0" bIns="0" rtlCol="0" anchor="t"/>
+          <a:lstStyle/>
+          <a:p>
+            <a:pPr algn="ctr" indent="0" marL="0">
+              <a:lnSpc>
+                <a:spcPts val="1400"/>
+              </a:lnSpc>
+              <a:buNone/>
+            </a:pPr>
+            <a:r>
+              <a:rPr lang="en-US" sz="1100" dirty="0">
+                <a:solidFill>
+                  <a:srgbClr val="9EABBA"/>
+                </a:solidFill>
+                <a:latin typeface="Calibri" pitchFamily="34" charset="0"/>
+                <a:ea typeface="Calibri" pitchFamily="34" charset="-122"/>
+                <a:cs typeface="Calibri" pitchFamily="34" charset="-120"/>
+              </a:rPr>
+              <a:t>measured on the bill</a:t>
+            </a:r>
+            <a:endParaRPr lang="en-US" sz="1100" dirty="0"/>
+          </a:p>
+        </p:txBody>
+      </p:sp>
+      <p:sp>
+        <p:nvSpPr>
+          <p:cNvPr id="28" name="Text 26"/>
+          <p:cNvSpPr/>
+          <p:nvPr/>
+        </p:nvSpPr>
+        <p:spPr>
+          <a:xfrm>
+            <a:off x="548640" y="3364992"/>
+            <a:ext cx="11091672" cy="310896"/>
+          </a:xfrm>
+          <a:prstGeom prst="rect">
+            <a:avLst/>
+          </a:prstGeom>
+          <a:noFill/>
+          <a:ln/>
+        </p:spPr>
+        <p:txBody>
+          <a:bodyPr wrap="square" lIns="0" tIns="0" rIns="0" bIns="0" rtlCol="0" anchor="ctr"/>
+          <a:lstStyle/>
+          <a:p>
+            <a:pPr indent="0" marL="0">
+              <a:buNone/>
+            </a:pPr>
+            <a:r>
+              <a:rPr lang="en-US" sz="1250" dirty="0">
+                <a:solidFill>
+                  <a:srgbClr val="5C6675"/>
+                </a:solidFill>
+                <a:latin typeface="Calibri" pitchFamily="34" charset="0"/>
+                <a:ea typeface="Calibri" pitchFamily="34" charset="-122"/>
+                <a:cs typeface="Calibri" pitchFamily="34" charset="-120"/>
+              </a:rPr>
+              <a:t>A recommendation without an owner and a date is an opinion.</a:t>
+            </a:r>
+            <a:endParaRPr lang="en-US" sz="1250" dirty="0"/>
+          </a:p>
+        </p:txBody>
+      </p:sp>
+      <p:sp>
+        <p:nvSpPr>
+          <p:cNvPr id="29" name="Shape 27"/>
+          <p:cNvSpPr/>
+          <p:nvPr/>
+        </p:nvSpPr>
+        <p:spPr>
+          <a:xfrm>
+            <a:off x="548640" y="3913632"/>
+            <a:ext cx="5394960" cy="2240280"/>
+          </a:xfrm>
+          <a:prstGeom prst="roundRect">
+            <a:avLst>
+              <a:gd name="adj" fmla="val 3673"/>
+            </a:avLst>
+          </a:prstGeom>
+          <a:solidFill>
+            <a:srgbClr val="F1F3F6"/>
+          </a:solidFill>
+          <a:ln/>
+        </p:spPr>
+      </p:sp>
+      <p:sp>
+        <p:nvSpPr>
+          <p:cNvPr id="30" name="Text 28"/>
+          <p:cNvSpPr/>
+          <p:nvPr/>
+        </p:nvSpPr>
+        <p:spPr>
+          <a:xfrm>
+            <a:off x="859536" y="4078224"/>
+            <a:ext cx="4572000" cy="292608"/>
+          </a:xfrm>
+          <a:prstGeom prst="rect">
+            <a:avLst/>
+          </a:prstGeom>
+          <a:noFill/>
+          <a:ln/>
+        </p:spPr>
+        <p:txBody>
+          <a:bodyPr wrap="square" lIns="0" tIns="0" rIns="0" bIns="0" rtlCol="0" anchor="ctr"/>
+          <a:lstStyle/>
+          <a:p>
+            <a:pPr indent="0" marL="0">
+              <a:buNone/>
+            </a:pPr>
+            <a:r>
+              <a:rPr lang="en-US" sz="1200" b="1" spc="180" kern="0" dirty="0">
+                <a:solidFill>
+                  <a:srgbClr val="5C6675"/>
+                </a:solidFill>
+                <a:latin typeface="Calibri" pitchFamily="34" charset="0"/>
+                <a:ea typeface="Calibri" pitchFamily="34" charset="-122"/>
+                <a:cs typeface="Calibri" pitchFamily="34" charset="-120"/>
+              </a:rPr>
+              <a:t>The difference that matters</a:t>
+            </a:r>
+            <a:endParaRPr lang="en-US" sz="1200" dirty="0"/>
+          </a:p>
+        </p:txBody>
+      </p:sp>
+      <p:sp>
+        <p:nvSpPr>
+          <p:cNvPr id="31" name="Text 29"/>
+          <p:cNvSpPr/>
+          <p:nvPr/>
+        </p:nvSpPr>
+        <p:spPr>
+          <a:xfrm>
+            <a:off x="859536" y="4425696"/>
+            <a:ext cx="4773168" cy="530352"/>
+          </a:xfrm>
+          <a:prstGeom prst="rect">
+            <a:avLst/>
+          </a:prstGeom>
+          <a:noFill/>
+          <a:ln/>
+        </p:spPr>
+        <p:txBody>
+          <a:bodyPr wrap="square" lIns="0" tIns="0" rIns="0" bIns="0" rtlCol="0" anchor="t"/>
+          <a:lstStyle/>
+          <a:p>
+            <a:pPr indent="0" marL="0">
+              <a:lnSpc>
+                <a:spcPts val="1900"/>
+              </a:lnSpc>
+              <a:buNone/>
+            </a:pPr>
+            <a:r>
+              <a:rPr lang="en-US" sz="1400" b="1" dirty="0">
+                <a:solidFill>
+                  <a:srgbClr val="5C6675"/>
+                </a:solidFill>
+                <a:latin typeface="Calibri" pitchFamily="34" charset="0"/>
+                <a:ea typeface="Calibri" pitchFamily="34" charset="-122"/>
+                <a:cs typeface="Calibri" pitchFamily="34" charset="-120"/>
+              </a:rPr>
+              <a:t>A report  </a:t>
+            </a:r>
+            <a:pPr indent="0" marL="0">
+              <a:lnSpc>
+                <a:spcPts val="1900"/>
+              </a:lnSpc>
+              <a:buNone/>
+            </a:pPr>
+            <a:r>
+              <a:rPr lang="en-US" sz="1400" dirty="0">
+                <a:solidFill>
+                  <a:srgbClr val="5C6675"/>
+                </a:solidFill>
+                <a:latin typeface="Calibri" pitchFamily="34" charset="0"/>
+                <a:ea typeface="Calibri" pitchFamily="34" charset="-122"/>
+                <a:cs typeface="Calibri" pitchFamily="34" charset="-120"/>
+              </a:rPr>
+              <a:t>is finished when the number is right.</a:t>
+            </a:r>
+            <a:endParaRPr lang="en-US" sz="1400" dirty="0"/>
+          </a:p>
+        </p:txBody>
+      </p:sp>
+      <p:sp>
+        <p:nvSpPr>
+          <p:cNvPr id="32" name="Text 30"/>
+          <p:cNvSpPr/>
+          <p:nvPr/>
+        </p:nvSpPr>
+        <p:spPr>
+          <a:xfrm>
+            <a:off x="859536" y="4974336"/>
+            <a:ext cx="4773168" cy="530352"/>
+          </a:xfrm>
+          <a:prstGeom prst="rect">
+            <a:avLst/>
+          </a:prstGeom>
+          <a:noFill/>
+          <a:ln/>
+        </p:spPr>
+        <p:txBody>
+          <a:bodyPr wrap="square" lIns="0" tIns="0" rIns="0" bIns="0" rtlCol="0" anchor="t"/>
+          <a:lstStyle/>
+          <a:p>
+            <a:pPr indent="0" marL="0">
+              <a:lnSpc>
+                <a:spcPts val="1900"/>
+              </a:lnSpc>
+              <a:buNone/>
+            </a:pPr>
+            <a:r>
+              <a:rPr lang="en-US" sz="1400" b="1" dirty="0">
+                <a:solidFill>
+                  <a:srgbClr val="1B2430"/>
+                </a:solidFill>
+                <a:latin typeface="Calibri" pitchFamily="34" charset="0"/>
+                <a:ea typeface="Calibri" pitchFamily="34" charset="-122"/>
+                <a:cs typeface="Calibri" pitchFamily="34" charset="-120"/>
+              </a:rPr>
+              <a:t>A product  </a:t>
+            </a:r>
+            <a:pPr indent="0" marL="0">
+              <a:lnSpc>
+                <a:spcPts val="1900"/>
+              </a:lnSpc>
+              <a:buNone/>
+            </a:pPr>
+            <a:r>
+              <a:rPr lang="en-US" sz="1400" dirty="0">
+                <a:solidFill>
+                  <a:srgbClr val="5C6675"/>
+                </a:solidFill>
+                <a:latin typeface="Calibri" pitchFamily="34" charset="0"/>
+                <a:ea typeface="Calibri" pitchFamily="34" charset="-122"/>
+                <a:cs typeface="Calibri" pitchFamily="34" charset="-120"/>
+              </a:rPr>
+              <a:t>is finished when someone behaves differently.</a:t>
+            </a:r>
+            <a:endParaRPr lang="en-US" sz="1400" dirty="0"/>
+          </a:p>
+        </p:txBody>
+      </p:sp>
+      <p:sp>
+        <p:nvSpPr>
+          <p:cNvPr id="33" name="Text 31"/>
+          <p:cNvSpPr/>
+          <p:nvPr/>
+        </p:nvSpPr>
+        <p:spPr>
+          <a:xfrm>
+            <a:off x="859536" y="5522976"/>
+            <a:ext cx="4773168" cy="457200"/>
+          </a:xfrm>
+          <a:prstGeom prst="rect">
+            <a:avLst/>
+          </a:prstGeom>
+          <a:noFill/>
+          <a:ln/>
+        </p:spPr>
+        <p:txBody>
+          <a:bodyPr wrap="square" lIns="0" tIns="0" rIns="0" bIns="0" rtlCol="0" anchor="t"/>
+          <a:lstStyle/>
+          <a:p>
+            <a:pPr indent="0" marL="0">
+              <a:lnSpc>
+                <a:spcPts val="1600"/>
+              </a:lnSpc>
+              <a:buNone/>
+            </a:pPr>
+            <a:r>
+              <a:rPr lang="en-US" sz="1250" dirty="0">
+                <a:solidFill>
+                  <a:srgbClr val="1B2430"/>
+                </a:solidFill>
+                <a:latin typeface="Calibri" pitchFamily="34" charset="0"/>
+                <a:ea typeface="Calibri" pitchFamily="34" charset="-122"/>
+                <a:cs typeface="Calibri" pitchFamily="34" charset="-120"/>
+              </a:rPr>
+              <a:t>Build for the engineer who wants the three things worth fixing this sprint — the finance report improves as a by-product.</a:t>
+            </a:r>
+            <a:endParaRPr lang="en-US" sz="1250" dirty="0"/>
+          </a:p>
+        </p:txBody>
+      </p:sp>
+      <p:sp>
+        <p:nvSpPr>
+          <p:cNvPr id="34" name="Shape 32"/>
+          <p:cNvSpPr/>
+          <p:nvPr/>
+        </p:nvSpPr>
+        <p:spPr>
+          <a:xfrm>
+            <a:off x="6245352" y="3913632"/>
+            <a:ext cx="5394960" cy="2240280"/>
+          </a:xfrm>
+          <a:prstGeom prst="roundRect">
+            <a:avLst>
+              <a:gd name="adj" fmla="val 3673"/>
+            </a:avLst>
+          </a:prstGeom>
+          <a:solidFill>
+            <a:srgbClr val="1F2936"/>
+          </a:solidFill>
+          <a:ln/>
+          <a:effectLst>
+            <a:outerShdw sx="100000" sy="100000" kx="0" ky="0" algn="bl" rotWithShape="0" blurRad="127000" dist="25400" dir="5400000">
+              <a:srgbClr val="8C99A8">
+                <a:alpha val="16000"/>
+              </a:srgbClr>
+            </a:outerShdw>
+          </a:effectLst>
+        </p:spPr>
+      </p:sp>
+      <p:sp>
+        <p:nvSpPr>
+          <p:cNvPr id="35" name="Text 33"/>
+          <p:cNvSpPr/>
+          <p:nvPr/>
+        </p:nvSpPr>
+        <p:spPr>
+          <a:xfrm>
+            <a:off x="6556248" y="4078224"/>
+            <a:ext cx="4572000" cy="292608"/>
+          </a:xfrm>
+          <a:prstGeom prst="rect">
+            <a:avLst/>
+          </a:prstGeom>
+          <a:noFill/>
+          <a:ln/>
+        </p:spPr>
+        <p:txBody>
+          <a:bodyPr wrap="square" lIns="0" tIns="0" rIns="0" bIns="0" rtlCol="0" anchor="ctr"/>
+          <a:lstStyle/>
+          <a:p>
+            <a:pPr indent="0" marL="0">
+              <a:buNone/>
+            </a:pPr>
+            <a:r>
+              <a:rPr lang="en-US" sz="1200" b="1" spc="180" kern="0" dirty="0">
+                <a:solidFill>
+                  <a:srgbClr val="E39B2C"/>
+                </a:solidFill>
+                <a:latin typeface="Calibri" pitchFamily="34" charset="0"/>
+                <a:ea typeface="Calibri" pitchFamily="34" charset="-122"/>
+                <a:cs typeface="Calibri" pitchFamily="34" charset="-120"/>
+              </a:rPr>
+              <a:t>Measure adoption, not accuracy</a:t>
+            </a:r>
+            <a:endParaRPr lang="en-US" sz="1200" dirty="0"/>
+          </a:p>
+        </p:txBody>
+      </p:sp>
+      <p:sp>
+        <p:nvSpPr>
+          <p:cNvPr id="36" name="Shape 34"/>
+          <p:cNvSpPr/>
+          <p:nvPr/>
+        </p:nvSpPr>
+        <p:spPr>
+          <a:xfrm>
+            <a:off x="6574536" y="4590288"/>
+            <a:ext cx="100584" cy="100584"/>
+          </a:xfrm>
+          <a:prstGeom prst="ellipse">
+            <a:avLst/>
+          </a:prstGeom>
+          <a:solidFill>
+            <a:srgbClr val="E39B2C"/>
+          </a:solidFill>
+          <a:ln/>
+        </p:spPr>
+      </p:sp>
+      <p:sp>
+        <p:nvSpPr>
+          <p:cNvPr id="37" name="Text 35"/>
+          <p:cNvSpPr/>
+          <p:nvPr/>
+        </p:nvSpPr>
+        <p:spPr>
+          <a:xfrm>
+            <a:off x="6812280" y="4443984"/>
+            <a:ext cx="4553712" cy="457200"/>
+          </a:xfrm>
+          <a:prstGeom prst="rect">
+            <a:avLst/>
+          </a:prstGeom>
+          <a:noFill/>
+          <a:ln/>
+        </p:spPr>
+        <p:txBody>
+          <a:bodyPr wrap="square" lIns="0" tIns="0" rIns="0" bIns="0" rtlCol="0" anchor="t"/>
+          <a:lstStyle/>
+          <a:p>
+            <a:pPr indent="0" marL="0">
+              <a:lnSpc>
+                <a:spcPts val="1600"/>
+              </a:lnSpc>
+              <a:buNone/>
+            </a:pPr>
+            <a:r>
+              <a:rPr lang="en-US" sz="1250" b="1" dirty="0">
+                <a:solidFill>
+                  <a:srgbClr val="FFFFFF"/>
+                </a:solidFill>
+                <a:latin typeface="Calibri" pitchFamily="34" charset="0"/>
+                <a:ea typeface="Calibri" pitchFamily="34" charset="-122"/>
+                <a:cs typeface="Calibri" pitchFamily="34" charset="-120"/>
+              </a:rPr>
+              <a:t>Findings with an owner and a date</a:t>
+            </a:r>
+            <a:endParaRPr lang="en-US" sz="1250" dirty="0"/>
+          </a:p>
+          <a:p>
+            <a:pPr indent="0" marL="0">
+              <a:lnSpc>
+                <a:spcPts val="1600"/>
+              </a:lnSpc>
+              <a:buNone/>
+            </a:pPr>
+            <a:r>
+              <a:rPr lang="en-US" sz="1250" dirty="0">
+                <a:solidFill>
+                  <a:srgbClr val="9EABBA"/>
+                </a:solidFill>
+                <a:latin typeface="Calibri" pitchFamily="34" charset="0"/>
+                <a:ea typeface="Calibri" pitchFamily="34" charset="-122"/>
+                <a:cs typeface="Calibri" pitchFamily="34" charset="-120"/>
+              </a:rPr>
+              <a:t>The share that became work.</a:t>
+            </a:r>
+            <a:endParaRPr lang="en-US" sz="1250" dirty="0"/>
+          </a:p>
+        </p:txBody>
+      </p:sp>
+      <p:sp>
+        <p:nvSpPr>
+          <p:cNvPr id="38" name="Shape 36"/>
+          <p:cNvSpPr/>
+          <p:nvPr/>
+        </p:nvSpPr>
+        <p:spPr>
+          <a:xfrm>
+            <a:off x="6574536" y="5102352"/>
+            <a:ext cx="100584" cy="100584"/>
+          </a:xfrm>
+          <a:prstGeom prst="ellipse">
+            <a:avLst/>
+          </a:prstGeom>
+          <a:solidFill>
+            <a:srgbClr val="E39B2C"/>
+          </a:solidFill>
+          <a:ln/>
+        </p:spPr>
+      </p:sp>
+      <p:sp>
+        <p:nvSpPr>
+          <p:cNvPr id="39" name="Text 37"/>
+          <p:cNvSpPr/>
+          <p:nvPr/>
+        </p:nvSpPr>
+        <p:spPr>
+          <a:xfrm>
+            <a:off x="6812280" y="4956048"/>
+            <a:ext cx="4553712" cy="457200"/>
+          </a:xfrm>
+          <a:prstGeom prst="rect">
+            <a:avLst/>
+          </a:prstGeom>
+          <a:noFill/>
+          <a:ln/>
+        </p:spPr>
+        <p:txBody>
+          <a:bodyPr wrap="square" lIns="0" tIns="0" rIns="0" bIns="0" rtlCol="0" anchor="t"/>
+          <a:lstStyle/>
+          <a:p>
+            <a:pPr indent="0" marL="0">
+              <a:lnSpc>
+                <a:spcPts val="1600"/>
+              </a:lnSpc>
+              <a:buNone/>
+            </a:pPr>
+            <a:r>
+              <a:rPr lang="en-US" sz="1250" b="1" dirty="0">
+                <a:solidFill>
+                  <a:srgbClr val="FFFFFF"/>
+                </a:solidFill>
+                <a:latin typeface="Calibri" pitchFamily="34" charset="0"/>
+                <a:ea typeface="Calibri" pitchFamily="34" charset="-122"/>
+                <a:cs typeface="Calibri" pitchFamily="34" charset="-120"/>
+              </a:rPr>
+              <a:t>Realized against identified saving</a:t>
+            </a:r>
+            <a:endParaRPr lang="en-US" sz="1250" dirty="0"/>
+          </a:p>
+          <a:p>
+            <a:pPr indent="0" marL="0">
+              <a:lnSpc>
+                <a:spcPts val="1600"/>
+              </a:lnSpc>
+              <a:buNone/>
+            </a:pPr>
+            <a:r>
+              <a:rPr lang="en-US" sz="1250" dirty="0">
+                <a:solidFill>
+                  <a:srgbClr val="9EABBA"/>
+                </a:solidFill>
+                <a:latin typeface="Calibri" pitchFamily="34" charset="0"/>
+                <a:ea typeface="Calibri" pitchFamily="34" charset="-122"/>
+                <a:cs typeface="Calibri" pitchFamily="34" charset="-120"/>
+              </a:rPr>
+              <a:t>Only the first reaches an invoice.</a:t>
+            </a:r>
+            <a:endParaRPr lang="en-US" sz="1250" dirty="0"/>
+          </a:p>
+        </p:txBody>
+      </p:sp>
+      <p:sp>
+        <p:nvSpPr>
+          <p:cNvPr id="40" name="Shape 38"/>
+          <p:cNvSpPr/>
+          <p:nvPr/>
+        </p:nvSpPr>
+        <p:spPr>
+          <a:xfrm>
+            <a:off x="6574536" y="5614416"/>
+            <a:ext cx="100584" cy="100584"/>
+          </a:xfrm>
+          <a:prstGeom prst="ellipse">
+            <a:avLst/>
+          </a:prstGeom>
+          <a:solidFill>
+            <a:srgbClr val="E39B2C"/>
+          </a:solidFill>
+          <a:ln/>
+        </p:spPr>
+      </p:sp>
+      <p:sp>
+        <p:nvSpPr>
+          <p:cNvPr id="41" name="Text 39"/>
+          <p:cNvSpPr/>
+          <p:nvPr/>
+        </p:nvSpPr>
+        <p:spPr>
+          <a:xfrm>
+            <a:off x="6812280" y="5468112"/>
+            <a:ext cx="4553712" cy="457200"/>
+          </a:xfrm>
+          <a:prstGeom prst="rect">
+            <a:avLst/>
+          </a:prstGeom>
+          <a:noFill/>
+          <a:ln/>
+        </p:spPr>
+        <p:txBody>
+          <a:bodyPr wrap="square" lIns="0" tIns="0" rIns="0" bIns="0" rtlCol="0" anchor="t"/>
+          <a:lstStyle/>
+          <a:p>
+            <a:pPr indent="0" marL="0">
+              <a:lnSpc>
+                <a:spcPts val="1600"/>
+              </a:lnSpc>
+              <a:buNone/>
+            </a:pPr>
+            <a:r>
+              <a:rPr lang="en-US" sz="1250" b="1" dirty="0">
+                <a:solidFill>
+                  <a:srgbClr val="FFFFFF"/>
+                </a:solidFill>
+                <a:latin typeface="Calibri" pitchFamily="34" charset="0"/>
+                <a:ea typeface="Calibri" pitchFamily="34" charset="-122"/>
+                <a:cs typeface="Calibri" pitchFamily="34" charset="-120"/>
+              </a:rPr>
+              <a:t>Time from finding to owner</a:t>
+            </a:r>
+            <a:endParaRPr lang="en-US" sz="1250" dirty="0"/>
+          </a:p>
+          <a:p>
+            <a:pPr indent="0" marL="0">
+              <a:lnSpc>
+                <a:spcPts val="1600"/>
+              </a:lnSpc>
+              <a:buNone/>
+            </a:pPr>
+            <a:r>
+              <a:rPr lang="en-US" sz="1250" dirty="0">
+                <a:solidFill>
+                  <a:srgbClr val="9EABBA"/>
+                </a:solidFill>
+                <a:latin typeface="Calibri" pitchFamily="34" charset="0"/>
+                <a:ea typeface="Calibri" pitchFamily="34" charset="-122"/>
+                <a:cs typeface="Calibri" pitchFamily="34" charset="-120"/>
+              </a:rPr>
+              <a:t>Days, not weeks — and trending down.</a:t>
+            </a:r>
+            <a:endParaRPr lang="en-US" sz="1250" dirty="0"/>
+          </a:p>
+        </p:txBody>
+      </p:sp>
+      <p:sp>
+        <p:nvSpPr>
+          <p:cNvPr id="42" name="Text 40"/>
+          <p:cNvSpPr/>
+          <p:nvPr/>
+        </p:nvSpPr>
+        <p:spPr>
+          <a:xfrm>
+            <a:off x="548640" y="6272784"/>
+            <a:ext cx="11091672" cy="402336"/>
+          </a:xfrm>
+          <a:prstGeom prst="rect">
+            <a:avLst/>
+          </a:prstGeom>
+          <a:noFill/>
+          <a:ln/>
+        </p:spPr>
+        <p:txBody>
+          <a:bodyPr wrap="square" lIns="0" tIns="0" rIns="0" bIns="0" rtlCol="0" anchor="ctr"/>
+          <a:lstStyle/>
+          <a:p>
+            <a:pPr indent="0" marL="0">
+              <a:buNone/>
+            </a:pPr>
+            <a:r>
+              <a:rPr lang="en-US" sz="1400" i="1" dirty="0">
+                <a:solidFill>
+                  <a:srgbClr val="5C6675"/>
                 </a:solidFill>
                 <a:latin typeface="Cambria" pitchFamily="34" charset="0"/>
                 <a:ea typeface="Cambria" pitchFamily="34" charset="-122"/>
                 <a:cs typeface="Cambria" pitchFamily="34" charset="-120"/>
               </a:rPr>
-              <a:t>01</a:t>
-            </a:r>
-            <a:endParaRPr lang="en-US" sz="2800" dirty="0"/>
-          </a:p>
-        </p:txBody>
-      </p:sp>
-      <p:sp>
-        <p:nvSpPr>
-          <p:cNvPr id="6" name="Text 4"/>
-          <p:cNvSpPr/>
-          <p:nvPr/>
-        </p:nvSpPr>
-        <p:spPr>
-          <a:xfrm>
-            <a:off x="786384" y="2523744"/>
-            <a:ext cx="2139696" cy="786384"/>
-          </a:xfrm>
-          <a:prstGeom prst="rect">
-            <a:avLst/>
-          </a:prstGeom>
-          <a:noFill/>
-          <a:ln/>
-        </p:spPr>
-        <p:txBody>
-          <a:bodyPr wrap="square" lIns="0" tIns="0" rIns="0" bIns="0" rtlCol="0" anchor="t"/>
-          <a:lstStyle/>
-          <a:p>
-            <a:pPr indent="0" marL="0">
-              <a:lnSpc>
-                <a:spcPts val="2000"/>
-              </a:lnSpc>
-              <a:buNone/>
-            </a:pPr>
-            <a:r>
-              <a:rPr lang="en-US" sz="1500" b="1" dirty="0">
-                <a:solidFill>
-                  <a:srgbClr val="FFFFFF"/>
-                </a:solidFill>
-                <a:latin typeface="Cambria" pitchFamily="34" charset="0"/>
-                <a:ea typeface="Cambria" pitchFamily="34" charset="-122"/>
-                <a:cs typeface="Cambria" pitchFamily="34" charset="-120"/>
-              </a:rPr>
-              <a:t>Set the tagging standard</a:t>
-            </a:r>
-            <a:endParaRPr lang="en-US" sz="1500" dirty="0"/>
-          </a:p>
-        </p:txBody>
-      </p:sp>
-      <p:sp>
-        <p:nvSpPr>
-          <p:cNvPr id="7" name="Text 5"/>
-          <p:cNvSpPr/>
-          <p:nvPr/>
-        </p:nvSpPr>
-        <p:spPr>
-          <a:xfrm>
-            <a:off x="786384" y="3346704"/>
-            <a:ext cx="2139696" cy="749808"/>
-          </a:xfrm>
-          <a:prstGeom prst="rect">
-            <a:avLst/>
-          </a:prstGeom>
-          <a:noFill/>
-          <a:ln/>
-        </p:spPr>
-        <p:txBody>
-          <a:bodyPr wrap="square" lIns="0" tIns="0" rIns="0" bIns="0" rtlCol="0" anchor="t"/>
-          <a:lstStyle/>
-          <a:p>
-            <a:pPr indent="0" marL="0">
-              <a:lnSpc>
-                <a:spcPts val="1500"/>
-              </a:lnSpc>
-              <a:buNone/>
-            </a:pPr>
-            <a:r>
-              <a:rPr lang="en-US" sz="1200" dirty="0">
-                <a:solidFill>
-                  <a:srgbClr val="9EABBA"/>
-                </a:solidFill>
-                <a:latin typeface="Calibri" pitchFamily="34" charset="0"/>
-                <a:ea typeface="Calibri" pitchFamily="34" charset="-122"/>
-                <a:cs typeface="Calibri" pitchFamily="34" charset="-120"/>
-              </a:rPr>
-              <a:t>Agree a consistent taxonomy before investing in dashboards.</a:t>
-            </a:r>
-            <a:endParaRPr lang="en-US" sz="1200" dirty="0"/>
-          </a:p>
-        </p:txBody>
-      </p:sp>
-      <p:sp>
-        <p:nvSpPr>
-          <p:cNvPr id="8" name="Shape 6"/>
-          <p:cNvSpPr/>
-          <p:nvPr/>
-        </p:nvSpPr>
-        <p:spPr>
-          <a:xfrm>
-            <a:off x="3383280" y="1783080"/>
-            <a:ext cx="2587752" cy="2423160"/>
-          </a:xfrm>
-          <a:prstGeom prst="roundRect">
-            <a:avLst>
-              <a:gd name="adj" fmla="val 3396"/>
-            </a:avLst>
-          </a:prstGeom>
-          <a:solidFill>
-            <a:srgbClr val="F1F3F6"/>
-          </a:solidFill>
-          <a:ln/>
-        </p:spPr>
-      </p:sp>
-      <p:sp>
-        <p:nvSpPr>
-          <p:cNvPr id="9" name="Text 7"/>
-          <p:cNvSpPr/>
-          <p:nvPr/>
-        </p:nvSpPr>
-        <p:spPr>
-          <a:xfrm>
-            <a:off x="3639312" y="1965960"/>
-            <a:ext cx="1097280" cy="502920"/>
-          </a:xfrm>
-          <a:prstGeom prst="rect">
-            <a:avLst/>
-          </a:prstGeom>
-          <a:noFill/>
-          <a:ln/>
-        </p:spPr>
-        <p:txBody>
-          <a:bodyPr wrap="square" lIns="0" tIns="0" rIns="0" bIns="0" rtlCol="0" anchor="ctr"/>
-          <a:lstStyle/>
-          <a:p>
-            <a:pPr indent="0" marL="0">
-              <a:buNone/>
-            </a:pPr>
-            <a:r>
-              <a:rPr lang="en-US" sz="2800" b="1" dirty="0">
-                <a:solidFill>
-                  <a:srgbClr val="B9C2CD"/>
-                </a:solidFill>
-                <a:latin typeface="Cambria" pitchFamily="34" charset="0"/>
-                <a:ea typeface="Cambria" pitchFamily="34" charset="-122"/>
-                <a:cs typeface="Cambria" pitchFamily="34" charset="-120"/>
-              </a:rPr>
-              <a:t>02</a:t>
-            </a:r>
-            <a:endParaRPr lang="en-US" sz="2800" dirty="0"/>
-          </a:p>
-        </p:txBody>
-      </p:sp>
-      <p:sp>
-        <p:nvSpPr>
-          <p:cNvPr id="10" name="Text 8"/>
-          <p:cNvSpPr/>
-          <p:nvPr/>
-        </p:nvSpPr>
-        <p:spPr>
-          <a:xfrm>
-            <a:off x="3621024" y="2523744"/>
-            <a:ext cx="2139696" cy="786384"/>
-          </a:xfrm>
-          <a:prstGeom prst="rect">
-            <a:avLst/>
-          </a:prstGeom>
-          <a:noFill/>
-          <a:ln/>
-        </p:spPr>
-        <p:txBody>
-          <a:bodyPr wrap="square" lIns="0" tIns="0" rIns="0" bIns="0" rtlCol="0" anchor="t"/>
-          <a:lstStyle/>
-          <a:p>
-            <a:pPr indent="0" marL="0">
-              <a:lnSpc>
-                <a:spcPts val="2000"/>
-              </a:lnSpc>
-              <a:buNone/>
-            </a:pPr>
-            <a:r>
-              <a:rPr lang="en-US" sz="1500" b="1" dirty="0">
-                <a:solidFill>
-                  <a:srgbClr val="1B2430"/>
-                </a:solidFill>
-                <a:latin typeface="Cambria" pitchFamily="34" charset="0"/>
-                <a:ea typeface="Cambria" pitchFamily="34" charset="-122"/>
-                <a:cs typeface="Cambria" pitchFamily="34" charset="-120"/>
-              </a:rPr>
-              <a:t>Start with the biggest spend</a:t>
-            </a:r>
-            <a:endParaRPr lang="en-US" sz="1500" dirty="0"/>
-          </a:p>
-        </p:txBody>
-      </p:sp>
-      <p:sp>
-        <p:nvSpPr>
-          <p:cNvPr id="11" name="Text 9"/>
-          <p:cNvSpPr/>
-          <p:nvPr/>
-        </p:nvSpPr>
-        <p:spPr>
-          <a:xfrm>
-            <a:off x="3621024" y="3346704"/>
-            <a:ext cx="2139696" cy="749808"/>
-          </a:xfrm>
-          <a:prstGeom prst="rect">
-            <a:avLst/>
-          </a:prstGeom>
-          <a:noFill/>
-          <a:ln/>
-        </p:spPr>
-        <p:txBody>
-          <a:bodyPr wrap="square" lIns="0" tIns="0" rIns="0" bIns="0" rtlCol="0" anchor="t"/>
-          <a:lstStyle/>
-          <a:p>
-            <a:pPr indent="0" marL="0">
-              <a:lnSpc>
-                <a:spcPts val="1500"/>
-              </a:lnSpc>
-              <a:buNone/>
-            </a:pPr>
-            <a:r>
-              <a:rPr lang="en-US" sz="1200" dirty="0">
-                <a:solidFill>
-                  <a:srgbClr val="5C6675"/>
-                </a:solidFill>
-                <a:latin typeface="Calibri" pitchFamily="34" charset="0"/>
-                <a:ea typeface="Calibri" pitchFamily="34" charset="-122"/>
-                <a:cs typeface="Calibri" pitchFamily="34" charset="-120"/>
-              </a:rPr>
-              <a:t>Attack the largest categories first. Don't chase perfect granularity everywhere.</a:t>
-            </a:r>
-            <a:endParaRPr lang="en-US" sz="1200" dirty="0"/>
-          </a:p>
-        </p:txBody>
-      </p:sp>
-      <p:sp>
-        <p:nvSpPr>
-          <p:cNvPr id="12" name="Shape 10"/>
-          <p:cNvSpPr/>
-          <p:nvPr/>
-        </p:nvSpPr>
-        <p:spPr>
-          <a:xfrm>
-            <a:off x="6217920" y="1783080"/>
-            <a:ext cx="2587752" cy="2423160"/>
-          </a:xfrm>
-          <a:prstGeom prst="roundRect">
-            <a:avLst>
-              <a:gd name="adj" fmla="val 3396"/>
-            </a:avLst>
-          </a:prstGeom>
-          <a:solidFill>
-            <a:srgbClr val="F1F3F6"/>
-          </a:solidFill>
-          <a:ln/>
-        </p:spPr>
-      </p:sp>
-      <p:sp>
-        <p:nvSpPr>
-          <p:cNvPr id="13" name="Text 11"/>
-          <p:cNvSpPr/>
-          <p:nvPr/>
-        </p:nvSpPr>
-        <p:spPr>
-          <a:xfrm>
-            <a:off x="6473952" y="1965960"/>
-            <a:ext cx="1097280" cy="502920"/>
-          </a:xfrm>
-          <a:prstGeom prst="rect">
-            <a:avLst/>
-          </a:prstGeom>
-          <a:noFill/>
-          <a:ln/>
-        </p:spPr>
-        <p:txBody>
-          <a:bodyPr wrap="square" lIns="0" tIns="0" rIns="0" bIns="0" rtlCol="0" anchor="ctr"/>
-          <a:lstStyle/>
-          <a:p>
-            <a:pPr indent="0" marL="0">
-              <a:buNone/>
-            </a:pPr>
-            <a:r>
-              <a:rPr lang="en-US" sz="2800" b="1" dirty="0">
-                <a:solidFill>
-                  <a:srgbClr val="B9C2CD"/>
-                </a:solidFill>
-                <a:latin typeface="Cambria" pitchFamily="34" charset="0"/>
-                <a:ea typeface="Cambria" pitchFamily="34" charset="-122"/>
-                <a:cs typeface="Cambria" pitchFamily="34" charset="-120"/>
-              </a:rPr>
-              <a:t>03</a:t>
-            </a:r>
-            <a:endParaRPr lang="en-US" sz="2800" dirty="0"/>
-          </a:p>
-        </p:txBody>
-      </p:sp>
-      <p:sp>
-        <p:nvSpPr>
-          <p:cNvPr id="14" name="Text 12"/>
-          <p:cNvSpPr/>
-          <p:nvPr/>
-        </p:nvSpPr>
-        <p:spPr>
-          <a:xfrm>
-            <a:off x="6455664" y="2523744"/>
-            <a:ext cx="2139696" cy="786384"/>
-          </a:xfrm>
-          <a:prstGeom prst="rect">
-            <a:avLst/>
-          </a:prstGeom>
-          <a:noFill/>
-          <a:ln/>
-        </p:spPr>
-        <p:txBody>
-          <a:bodyPr wrap="square" lIns="0" tIns="0" rIns="0" bIns="0" rtlCol="0" anchor="t"/>
-          <a:lstStyle/>
-          <a:p>
-            <a:pPr indent="0" marL="0">
-              <a:lnSpc>
-                <a:spcPts val="2000"/>
-              </a:lnSpc>
-              <a:buNone/>
-            </a:pPr>
-            <a:r>
-              <a:rPr lang="en-US" sz="1500" b="1" dirty="0">
-                <a:solidFill>
-                  <a:srgbClr val="1B2430"/>
-                </a:solidFill>
-                <a:latin typeface="Cambria" pitchFamily="34" charset="0"/>
-                <a:ea typeface="Cambria" pitchFamily="34" charset="-122"/>
-                <a:cs typeface="Cambria" pitchFamily="34" charset="-120"/>
-              </a:rPr>
-              <a:t>Get finance and engineering talking</a:t>
-            </a:r>
-            <a:endParaRPr lang="en-US" sz="1500" dirty="0"/>
-          </a:p>
-        </p:txBody>
-      </p:sp>
-      <p:sp>
-        <p:nvSpPr>
-          <p:cNvPr id="15" name="Text 13"/>
-          <p:cNvSpPr/>
-          <p:nvPr/>
-        </p:nvSpPr>
-        <p:spPr>
-          <a:xfrm>
-            <a:off x="6455664" y="3346704"/>
-            <a:ext cx="2139696" cy="749808"/>
-          </a:xfrm>
-          <a:prstGeom prst="rect">
-            <a:avLst/>
-          </a:prstGeom>
-          <a:noFill/>
-          <a:ln/>
-        </p:spPr>
-        <p:txBody>
-          <a:bodyPr wrap="square" lIns="0" tIns="0" rIns="0" bIns="0" rtlCol="0" anchor="t"/>
-          <a:lstStyle/>
-          <a:p>
-            <a:pPr indent="0" marL="0">
-              <a:lnSpc>
-                <a:spcPts val="1500"/>
-              </a:lnSpc>
-              <a:buNone/>
-            </a:pPr>
-            <a:r>
-              <a:rPr lang="en-US" sz="1200" dirty="0">
-                <a:solidFill>
-                  <a:srgbClr val="5C6675"/>
-                </a:solidFill>
-                <a:latin typeface="Calibri" pitchFamily="34" charset="0"/>
-                <a:ea typeface="Calibri" pitchFamily="34" charset="-122"/>
-                <a:cs typeface="Calibri" pitchFamily="34" charset="-120"/>
-              </a:rPr>
-              <a:t>Bring both into the conversation early, not as an afterthought.</a:t>
-            </a:r>
-            <a:endParaRPr lang="en-US" sz="1200" dirty="0"/>
-          </a:p>
-        </p:txBody>
-      </p:sp>
-      <p:sp>
-        <p:nvSpPr>
-          <p:cNvPr id="16" name="Shape 14"/>
-          <p:cNvSpPr/>
-          <p:nvPr/>
-        </p:nvSpPr>
-        <p:spPr>
-          <a:xfrm>
-            <a:off x="9052560" y="1783080"/>
-            <a:ext cx="2587752" cy="2423160"/>
-          </a:xfrm>
-          <a:prstGeom prst="roundRect">
-            <a:avLst>
-              <a:gd name="adj" fmla="val 3396"/>
-            </a:avLst>
-          </a:prstGeom>
-          <a:solidFill>
-            <a:srgbClr val="F1F3F6"/>
-          </a:solidFill>
-          <a:ln/>
-        </p:spPr>
-      </p:sp>
-      <p:sp>
-        <p:nvSpPr>
-          <p:cNvPr id="17" name="Text 15"/>
-          <p:cNvSpPr/>
-          <p:nvPr/>
-        </p:nvSpPr>
-        <p:spPr>
-          <a:xfrm>
-            <a:off x="9308592" y="1965960"/>
-            <a:ext cx="1097280" cy="502920"/>
-          </a:xfrm>
-          <a:prstGeom prst="rect">
-            <a:avLst/>
-          </a:prstGeom>
-          <a:noFill/>
-          <a:ln/>
-        </p:spPr>
-        <p:txBody>
-          <a:bodyPr wrap="square" lIns="0" tIns="0" rIns="0" bIns="0" rtlCol="0" anchor="ctr"/>
-          <a:lstStyle/>
-          <a:p>
-            <a:pPr indent="0" marL="0">
-              <a:buNone/>
-            </a:pPr>
-            <a:r>
-              <a:rPr lang="en-US" sz="2800" b="1" dirty="0">
-                <a:solidFill>
-                  <a:srgbClr val="B9C2CD"/>
-                </a:solidFill>
-                <a:latin typeface="Cambria" pitchFamily="34" charset="0"/>
-                <a:ea typeface="Cambria" pitchFamily="34" charset="-122"/>
-                <a:cs typeface="Cambria" pitchFamily="34" charset="-120"/>
-              </a:rPr>
-              <a:t>04</a:t>
-            </a:r>
-            <a:endParaRPr lang="en-US" sz="2800" dirty="0"/>
-          </a:p>
-        </p:txBody>
-      </p:sp>
-      <p:sp>
-        <p:nvSpPr>
-          <p:cNvPr id="18" name="Text 16"/>
-          <p:cNvSpPr/>
-          <p:nvPr/>
-        </p:nvSpPr>
-        <p:spPr>
-          <a:xfrm>
-            <a:off x="9290304" y="2523744"/>
-            <a:ext cx="2139696" cy="786384"/>
-          </a:xfrm>
-          <a:prstGeom prst="rect">
-            <a:avLst/>
-          </a:prstGeom>
-          <a:noFill/>
-          <a:ln/>
-        </p:spPr>
-        <p:txBody>
-          <a:bodyPr wrap="square" lIns="0" tIns="0" rIns="0" bIns="0" rtlCol="0" anchor="t"/>
-          <a:lstStyle/>
-          <a:p>
-            <a:pPr indent="0" marL="0">
-              <a:lnSpc>
-                <a:spcPts val="2000"/>
-              </a:lnSpc>
-              <a:buNone/>
-            </a:pPr>
-            <a:r>
-              <a:rPr lang="en-US" sz="1500" b="1" dirty="0">
-                <a:solidFill>
-                  <a:srgbClr val="1B2430"/>
-                </a:solidFill>
-                <a:latin typeface="Cambria" pitchFamily="34" charset="0"/>
-                <a:ea typeface="Cambria" pitchFamily="34" charset="-122"/>
-                <a:cs typeface="Cambria" pitchFamily="34" charset="-120"/>
-              </a:rPr>
-              <a:t>Set guardrails early</a:t>
-            </a:r>
-            <a:endParaRPr lang="en-US" sz="1500" dirty="0"/>
-          </a:p>
-        </p:txBody>
-      </p:sp>
-      <p:sp>
-        <p:nvSpPr>
-          <p:cNvPr id="19" name="Text 17"/>
-          <p:cNvSpPr/>
-          <p:nvPr/>
-        </p:nvSpPr>
-        <p:spPr>
-          <a:xfrm>
-            <a:off x="9290304" y="3346704"/>
-            <a:ext cx="2139696" cy="749808"/>
-          </a:xfrm>
-          <a:prstGeom prst="rect">
-            <a:avLst/>
-          </a:prstGeom>
-          <a:noFill/>
-          <a:ln/>
-        </p:spPr>
-        <p:txBody>
-          <a:bodyPr wrap="square" lIns="0" tIns="0" rIns="0" bIns="0" rtlCol="0" anchor="t"/>
-          <a:lstStyle/>
-          <a:p>
-            <a:pPr indent="0" marL="0">
-              <a:lnSpc>
-                <a:spcPts val="1500"/>
-              </a:lnSpc>
-              <a:buNone/>
-            </a:pPr>
-            <a:r>
-              <a:rPr lang="en-US" sz="1200" dirty="0">
-                <a:solidFill>
-                  <a:srgbClr val="5C6675"/>
-                </a:solidFill>
-                <a:latin typeface="Calibri" pitchFamily="34" charset="0"/>
-                <a:ea typeface="Calibri" pitchFamily="34" charset="-122"/>
-                <a:cs typeface="Calibri" pitchFamily="34" charset="-120"/>
-              </a:rPr>
-              <a:t>Owners, budget thresholds and quotas cost little to add — and stop the expensive surprises.</a:t>
-            </a:r>
-            <a:endParaRPr lang="en-US" sz="1200" dirty="0"/>
-          </a:p>
-        </p:txBody>
-      </p:sp>
-      <p:sp>
-        <p:nvSpPr>
-          <p:cNvPr id="20" name="Shape 18"/>
-          <p:cNvSpPr/>
-          <p:nvPr/>
-        </p:nvSpPr>
-        <p:spPr>
-          <a:xfrm>
-            <a:off x="548640" y="4434840"/>
-            <a:ext cx="11091672" cy="1874520"/>
-          </a:xfrm>
-          <a:prstGeom prst="roundRect">
-            <a:avLst>
-              <a:gd name="adj" fmla="val 4390"/>
-            </a:avLst>
-          </a:prstGeom>
-          <a:solidFill>
-            <a:srgbClr val="F1F3F6"/>
-          </a:solidFill>
-          <a:ln/>
-        </p:spPr>
-      </p:sp>
-      <p:sp>
-        <p:nvSpPr>
-          <p:cNvPr id="21" name="Text 19"/>
-          <p:cNvSpPr/>
-          <p:nvPr/>
-        </p:nvSpPr>
-        <p:spPr>
-          <a:xfrm>
-            <a:off x="877824" y="4572000"/>
-            <a:ext cx="6035040" cy="292608"/>
-          </a:xfrm>
-          <a:prstGeom prst="rect">
-            <a:avLst/>
-          </a:prstGeom>
-          <a:noFill/>
-          <a:ln/>
-        </p:spPr>
-        <p:txBody>
-          <a:bodyPr wrap="square" lIns="0" tIns="0" rIns="0" bIns="0" rtlCol="0" anchor="ctr"/>
-          <a:lstStyle/>
-          <a:p>
-            <a:pPr indent="0" marL="0">
-              <a:buNone/>
-            </a:pPr>
-            <a:r>
-              <a:rPr lang="en-US" sz="1200" b="1" spc="180" kern="0" dirty="0">
-                <a:solidFill>
-                  <a:srgbClr val="5C6675"/>
-                </a:solidFill>
-                <a:latin typeface="Calibri" pitchFamily="34" charset="0"/>
-                <a:ea typeface="Calibri" pitchFamily="34" charset="-122"/>
-                <a:cs typeface="Calibri" pitchFamily="34" charset="-120"/>
-              </a:rPr>
-              <a:t>Tooling — match the footprint, not the ambition</a:t>
-            </a:r>
-            <a:endParaRPr lang="en-US" sz="1200" dirty="0"/>
-          </a:p>
-        </p:txBody>
-      </p:sp>
-      <p:sp>
-        <p:nvSpPr>
-          <p:cNvPr id="22" name="Text 20"/>
-          <p:cNvSpPr/>
-          <p:nvPr/>
-        </p:nvSpPr>
-        <p:spPr>
-          <a:xfrm>
-            <a:off x="877824" y="4937760"/>
-            <a:ext cx="1737360" cy="384048"/>
-          </a:xfrm>
-          <a:prstGeom prst="rect">
-            <a:avLst/>
-          </a:prstGeom>
-          <a:noFill/>
-          <a:ln/>
-        </p:spPr>
-        <p:txBody>
-          <a:bodyPr wrap="square" lIns="0" tIns="0" rIns="0" bIns="0" rtlCol="0" anchor="ctr"/>
-          <a:lstStyle/>
-          <a:p>
-            <a:pPr indent="0" marL="0">
-              <a:buNone/>
-            </a:pPr>
-            <a:r>
-              <a:rPr lang="en-US" sz="1350" b="1" dirty="0">
-                <a:solidFill>
-                  <a:srgbClr val="2E8B7A"/>
-                </a:solidFill>
-                <a:latin typeface="Calibri" pitchFamily="34" charset="0"/>
-                <a:ea typeface="Calibri" pitchFamily="34" charset="-122"/>
-                <a:cs typeface="Calibri" pitchFamily="34" charset="-120"/>
-              </a:rPr>
-              <a:t>Native</a:t>
-            </a:r>
-            <a:endParaRPr lang="en-US" sz="1350" dirty="0"/>
-          </a:p>
-        </p:txBody>
-      </p:sp>
-      <p:sp>
-        <p:nvSpPr>
-          <p:cNvPr id="23" name="Text 21"/>
-          <p:cNvSpPr/>
-          <p:nvPr/>
-        </p:nvSpPr>
-        <p:spPr>
-          <a:xfrm>
-            <a:off x="2651760" y="4937760"/>
-            <a:ext cx="8595360" cy="384048"/>
-          </a:xfrm>
-          <a:prstGeom prst="rect">
-            <a:avLst/>
-          </a:prstGeom>
-          <a:noFill/>
-          <a:ln/>
-        </p:spPr>
-        <p:txBody>
-          <a:bodyPr wrap="square" lIns="0" tIns="0" rIns="0" bIns="0" rtlCol="0" anchor="ctr"/>
-          <a:lstStyle/>
-          <a:p>
-            <a:pPr indent="0" marL="0">
-              <a:buNone/>
-            </a:pPr>
-            <a:r>
-              <a:rPr lang="en-US" sz="1350" dirty="0">
-                <a:solidFill>
-                  <a:srgbClr val="5C6675"/>
-                </a:solidFill>
-                <a:latin typeface="Calibri" pitchFamily="34" charset="0"/>
-                <a:ea typeface="Calibri" pitchFamily="34" charset="-122"/>
-                <a:cs typeface="Calibri" pitchFamily="34" charset="-120"/>
-              </a:rPr>
-              <a:t>AWS Cost Explorer  ·  Azure Cost Management  ·  GCP Billing</a:t>
-            </a:r>
-            <a:endParaRPr lang="en-US" sz="1350" dirty="0"/>
-          </a:p>
-        </p:txBody>
-      </p:sp>
-      <p:sp>
-        <p:nvSpPr>
-          <p:cNvPr id="24" name="Text 22"/>
-          <p:cNvSpPr/>
-          <p:nvPr/>
-        </p:nvSpPr>
-        <p:spPr>
-          <a:xfrm>
-            <a:off x="877824" y="5349240"/>
-            <a:ext cx="1737360" cy="384048"/>
-          </a:xfrm>
-          <a:prstGeom prst="rect">
-            <a:avLst/>
-          </a:prstGeom>
-          <a:noFill/>
-          <a:ln/>
-        </p:spPr>
-        <p:txBody>
-          <a:bodyPr wrap="square" lIns="0" tIns="0" rIns="0" bIns="0" rtlCol="0" anchor="ctr"/>
-          <a:lstStyle/>
-          <a:p>
-            <a:pPr indent="0" marL="0">
-              <a:buNone/>
-            </a:pPr>
-            <a:r>
-              <a:rPr lang="en-US" sz="1350" b="1" dirty="0">
-                <a:solidFill>
-                  <a:srgbClr val="B87B18"/>
-                </a:solidFill>
-                <a:latin typeface="Calibri" pitchFamily="34" charset="0"/>
-                <a:ea typeface="Calibri" pitchFamily="34" charset="-122"/>
-                <a:cs typeface="Calibri" pitchFamily="34" charset="-120"/>
-              </a:rPr>
-              <a:t>Third-party</a:t>
-            </a:r>
-            <a:endParaRPr lang="en-US" sz="1350" dirty="0"/>
-          </a:p>
-        </p:txBody>
-      </p:sp>
-      <p:sp>
-        <p:nvSpPr>
-          <p:cNvPr id="25" name="Text 23"/>
-          <p:cNvSpPr/>
-          <p:nvPr/>
-        </p:nvSpPr>
-        <p:spPr>
-          <a:xfrm>
-            <a:off x="2651760" y="5349240"/>
-            <a:ext cx="8595360" cy="384048"/>
-          </a:xfrm>
-          <a:prstGeom prst="rect">
-            <a:avLst/>
-          </a:prstGeom>
-          <a:noFill/>
-          <a:ln/>
-        </p:spPr>
-        <p:txBody>
-          <a:bodyPr wrap="square" lIns="0" tIns="0" rIns="0" bIns="0" rtlCol="0" anchor="ctr"/>
-          <a:lstStyle/>
-          <a:p>
-            <a:pPr indent="0" marL="0">
-              <a:buNone/>
-            </a:pPr>
-            <a:r>
-              <a:rPr lang="en-US" sz="1350" dirty="0">
-                <a:solidFill>
-                  <a:srgbClr val="5C6675"/>
-                </a:solidFill>
-                <a:latin typeface="Calibri" pitchFamily="34" charset="0"/>
-                <a:ea typeface="Calibri" pitchFamily="34" charset="-122"/>
-                <a:cs typeface="Calibri" pitchFamily="34" charset="-120"/>
-              </a:rPr>
-              <a:t>CloudHealth  ·  Apptio  ·  Vantage  ·  nOps  ·  Finout  ·  CoreStack</a:t>
-            </a:r>
-            <a:endParaRPr lang="en-US" sz="1350" dirty="0"/>
-          </a:p>
-        </p:txBody>
-      </p:sp>
-      <p:sp>
-        <p:nvSpPr>
-          <p:cNvPr id="26" name="Text 24"/>
-          <p:cNvSpPr/>
-          <p:nvPr/>
-        </p:nvSpPr>
-        <p:spPr>
-          <a:xfrm>
-            <a:off x="877824" y="5760720"/>
-            <a:ext cx="1737360" cy="384048"/>
-          </a:xfrm>
-          <a:prstGeom prst="rect">
-            <a:avLst/>
-          </a:prstGeom>
-          <a:noFill/>
-          <a:ln/>
-        </p:spPr>
-        <p:txBody>
-          <a:bodyPr wrap="square" lIns="0" tIns="0" rIns="0" bIns="0" rtlCol="0" anchor="ctr"/>
-          <a:lstStyle/>
-          <a:p>
-            <a:pPr indent="0" marL="0">
-              <a:buNone/>
-            </a:pPr>
-            <a:r>
-              <a:rPr lang="en-US" sz="1350" b="1" dirty="0">
-                <a:solidFill>
-                  <a:srgbClr val="1B2430"/>
-                </a:solidFill>
-                <a:latin typeface="Calibri" pitchFamily="34" charset="0"/>
-                <a:ea typeface="Calibri" pitchFamily="34" charset="-122"/>
-                <a:cs typeface="Calibri" pitchFamily="34" charset="-120"/>
-              </a:rPr>
-              <a:t>Standard</a:t>
-            </a:r>
-            <a:endParaRPr lang="en-US" sz="1350" dirty="0"/>
-          </a:p>
-        </p:txBody>
-      </p:sp>
-      <p:sp>
-        <p:nvSpPr>
-          <p:cNvPr id="27" name="Text 25"/>
-          <p:cNvSpPr/>
-          <p:nvPr/>
-        </p:nvSpPr>
-        <p:spPr>
-          <a:xfrm>
-            <a:off x="2651760" y="5760720"/>
-            <a:ext cx="8595360" cy="384048"/>
-          </a:xfrm>
-          <a:prstGeom prst="rect">
-            <a:avLst/>
-          </a:prstGeom>
-          <a:noFill/>
-          <a:ln/>
-        </p:spPr>
-        <p:txBody>
-          <a:bodyPr wrap="square" lIns="0" tIns="0" rIns="0" bIns="0" rtlCol="0" anchor="ctr"/>
-          <a:lstStyle/>
-          <a:p>
-            <a:pPr indent="0" marL="0">
-              <a:buNone/>
-            </a:pPr>
-            <a:r>
-              <a:rPr lang="en-US" sz="1350" dirty="0">
-                <a:solidFill>
-                  <a:srgbClr val="5C6675"/>
-                </a:solidFill>
-                <a:latin typeface="Calibri" pitchFamily="34" charset="0"/>
-                <a:ea typeface="Calibri" pitchFamily="34" charset="-122"/>
-                <a:cs typeface="Calibri" pitchFamily="34" charset="-120"/>
-              </a:rPr>
-              <a:t>FOCUS-compliant platforms for multi-cloud reporting</a:t>
-            </a:r>
-            <a:endParaRPr lang="en-US" sz="1350" dirty="0"/>
+              <a:t>The goal is a better decision, not a lower bill — the lower bill is what a better decision looks like a quarter later.</a:t>
+            </a:r>
+            <a:endParaRPr lang="en-US" sz="1400" dirty="0"/>
           </a:p>
         </p:txBody>
       </p:sp>
@@ -17662,6 +18246,991 @@
 <file path=ppt/slides/slide23.xml><?xml version="1.0" encoding="utf-8"?>
 <p:sld xmlns:a="http://schemas.openxmlformats.org/drawingml/2006/main" xmlns:r="http://schemas.openxmlformats.org/officeDocument/2006/relationships" xmlns:p="http://schemas.openxmlformats.org/presentationml/2006/main">
   <p:cSld name="Slide 23">
+    <p:bg>
+      <p:bgPr>
+        <a:solidFill>
+          <a:srgbClr val="FFFFFF"/>
+        </a:solidFill>
+      </p:bgPr>
+    </p:bg>
+    <p:spTree>
+      <p:nvGrpSpPr>
+        <p:cNvPr id="1" name=""/>
+        <p:cNvGrpSpPr/>
+        <p:nvPr/>
+      </p:nvGrpSpPr>
+      <p:grpSpPr>
+        <a:xfrm>
+          <a:off x="0" y="0"/>
+          <a:ext cx="0" cy="0"/>
+          <a:chOff x="0" y="0"/>
+          <a:chExt cx="0" cy="0"/>
+        </a:xfrm>
+      </p:grpSpPr>
+      <p:sp>
+        <p:nvSpPr>
+          <p:cNvPr id="2" name="Text 0"/>
+          <p:cNvSpPr/>
+          <p:nvPr/>
+        </p:nvSpPr>
+        <p:spPr>
+          <a:xfrm>
+            <a:off x="548640" y="475488"/>
+            <a:ext cx="7315200" cy="256032"/>
+          </a:xfrm>
+          <a:prstGeom prst="rect">
+            <a:avLst/>
+          </a:prstGeom>
+          <a:noFill/>
+          <a:ln/>
+        </p:spPr>
+        <p:txBody>
+          <a:bodyPr wrap="square" lIns="0" tIns="0" rIns="0" bIns="0" rtlCol="0" anchor="ctr"/>
+          <a:lstStyle/>
+          <a:p>
+            <a:pPr indent="0" marL="0">
+              <a:buNone/>
+            </a:pPr>
+            <a:r>
+              <a:rPr lang="en-US" sz="1100" b="1" spc="220" kern="0" dirty="0">
+                <a:solidFill>
+                  <a:srgbClr val="E39B2C"/>
+                </a:solidFill>
+                <a:latin typeface="Calibri" pitchFamily="34" charset="0"/>
+                <a:ea typeface="Calibri" pitchFamily="34" charset="-122"/>
+                <a:cs typeface="Calibri" pitchFamily="34" charset="-120"/>
+              </a:rPr>
+              <a:t>THE PATH FORWARD</a:t>
+            </a:r>
+            <a:endParaRPr lang="en-US" sz="1100" dirty="0"/>
+          </a:p>
+        </p:txBody>
+      </p:sp>
+      <p:sp>
+        <p:nvSpPr>
+          <p:cNvPr id="3" name="Text 1"/>
+          <p:cNvSpPr/>
+          <p:nvPr/>
+        </p:nvSpPr>
+        <p:spPr>
+          <a:xfrm>
+            <a:off x="548640" y="768096"/>
+            <a:ext cx="11091672" cy="804672"/>
+          </a:xfrm>
+          <a:prstGeom prst="rect">
+            <a:avLst/>
+          </a:prstGeom>
+          <a:noFill/>
+          <a:ln/>
+        </p:spPr>
+        <p:txBody>
+          <a:bodyPr wrap="square" lIns="0" tIns="0" rIns="0" bIns="0" rtlCol="0" anchor="ctr"/>
+          <a:lstStyle/>
+          <a:p>
+            <a:pPr indent="0" marL="0">
+              <a:buNone/>
+            </a:pPr>
+            <a:r>
+              <a:rPr lang="en-US" sz="3100" b="1" dirty="0">
+                <a:solidFill>
+                  <a:srgbClr val="1B2430"/>
+                </a:solidFill>
+                <a:latin typeface="Cambria" pitchFamily="34" charset="0"/>
+                <a:ea typeface="Cambria" pitchFamily="34" charset="-122"/>
+                <a:cs typeface="Cambria" pitchFamily="34" charset="-120"/>
+              </a:rPr>
+              <a:t>Where to start</a:t>
+            </a:r>
+            <a:endParaRPr lang="en-US" sz="3100" dirty="0"/>
+          </a:p>
+        </p:txBody>
+      </p:sp>
+      <p:sp>
+        <p:nvSpPr>
+          <p:cNvPr id="4" name="Shape 2"/>
+          <p:cNvSpPr/>
+          <p:nvPr/>
+        </p:nvSpPr>
+        <p:spPr>
+          <a:xfrm>
+            <a:off x="548640" y="1783080"/>
+            <a:ext cx="2587752" cy="2423160"/>
+          </a:xfrm>
+          <a:prstGeom prst="roundRect">
+            <a:avLst>
+              <a:gd name="adj" fmla="val 3396"/>
+            </a:avLst>
+          </a:prstGeom>
+          <a:solidFill>
+            <a:srgbClr val="1F2936"/>
+          </a:solidFill>
+          <a:ln/>
+        </p:spPr>
+      </p:sp>
+      <p:sp>
+        <p:nvSpPr>
+          <p:cNvPr id="5" name="Text 3"/>
+          <p:cNvSpPr/>
+          <p:nvPr/>
+        </p:nvSpPr>
+        <p:spPr>
+          <a:xfrm>
+            <a:off x="804672" y="1965960"/>
+            <a:ext cx="1097280" cy="502920"/>
+          </a:xfrm>
+          <a:prstGeom prst="rect">
+            <a:avLst/>
+          </a:prstGeom>
+          <a:noFill/>
+          <a:ln/>
+        </p:spPr>
+        <p:txBody>
+          <a:bodyPr wrap="square" lIns="0" tIns="0" rIns="0" bIns="0" rtlCol="0" anchor="ctr"/>
+          <a:lstStyle/>
+          <a:p>
+            <a:pPr indent="0" marL="0">
+              <a:buNone/>
+            </a:pPr>
+            <a:r>
+              <a:rPr lang="en-US" sz="2800" b="1" dirty="0">
+                <a:solidFill>
+                  <a:srgbClr val="E39B2C"/>
+                </a:solidFill>
+                <a:latin typeface="Cambria" pitchFamily="34" charset="0"/>
+                <a:ea typeface="Cambria" pitchFamily="34" charset="-122"/>
+                <a:cs typeface="Cambria" pitchFamily="34" charset="-120"/>
+              </a:rPr>
+              <a:t>01</a:t>
+            </a:r>
+            <a:endParaRPr lang="en-US" sz="2800" dirty="0"/>
+          </a:p>
+        </p:txBody>
+      </p:sp>
+      <p:sp>
+        <p:nvSpPr>
+          <p:cNvPr id="6" name="Text 4"/>
+          <p:cNvSpPr/>
+          <p:nvPr/>
+        </p:nvSpPr>
+        <p:spPr>
+          <a:xfrm>
+            <a:off x="786384" y="2523744"/>
+            <a:ext cx="2139696" cy="786384"/>
+          </a:xfrm>
+          <a:prstGeom prst="rect">
+            <a:avLst/>
+          </a:prstGeom>
+          <a:noFill/>
+          <a:ln/>
+        </p:spPr>
+        <p:txBody>
+          <a:bodyPr wrap="square" lIns="0" tIns="0" rIns="0" bIns="0" rtlCol="0" anchor="t"/>
+          <a:lstStyle/>
+          <a:p>
+            <a:pPr indent="0" marL="0">
+              <a:lnSpc>
+                <a:spcPts val="2000"/>
+              </a:lnSpc>
+              <a:buNone/>
+            </a:pPr>
+            <a:r>
+              <a:rPr lang="en-US" sz="1500" b="1" dirty="0">
+                <a:solidFill>
+                  <a:srgbClr val="FFFFFF"/>
+                </a:solidFill>
+                <a:latin typeface="Cambria" pitchFamily="34" charset="0"/>
+                <a:ea typeface="Cambria" pitchFamily="34" charset="-122"/>
+                <a:cs typeface="Cambria" pitchFamily="34" charset="-120"/>
+              </a:rPr>
+              <a:t>Set the tagging standard</a:t>
+            </a:r>
+            <a:endParaRPr lang="en-US" sz="1500" dirty="0"/>
+          </a:p>
+        </p:txBody>
+      </p:sp>
+      <p:sp>
+        <p:nvSpPr>
+          <p:cNvPr id="7" name="Text 5"/>
+          <p:cNvSpPr/>
+          <p:nvPr/>
+        </p:nvSpPr>
+        <p:spPr>
+          <a:xfrm>
+            <a:off x="786384" y="3346704"/>
+            <a:ext cx="2139696" cy="749808"/>
+          </a:xfrm>
+          <a:prstGeom prst="rect">
+            <a:avLst/>
+          </a:prstGeom>
+          <a:noFill/>
+          <a:ln/>
+        </p:spPr>
+        <p:txBody>
+          <a:bodyPr wrap="square" lIns="0" tIns="0" rIns="0" bIns="0" rtlCol="0" anchor="t"/>
+          <a:lstStyle/>
+          <a:p>
+            <a:pPr indent="0" marL="0">
+              <a:lnSpc>
+                <a:spcPts val="1500"/>
+              </a:lnSpc>
+              <a:buNone/>
+            </a:pPr>
+            <a:r>
+              <a:rPr lang="en-US" sz="1200" dirty="0">
+                <a:solidFill>
+                  <a:srgbClr val="9EABBA"/>
+                </a:solidFill>
+                <a:latin typeface="Calibri" pitchFamily="34" charset="0"/>
+                <a:ea typeface="Calibri" pitchFamily="34" charset="-122"/>
+                <a:cs typeface="Calibri" pitchFamily="34" charset="-120"/>
+              </a:rPr>
+              <a:t>Agree a consistent taxonomy before investing in dashboards.</a:t>
+            </a:r>
+            <a:endParaRPr lang="en-US" sz="1200" dirty="0"/>
+          </a:p>
+        </p:txBody>
+      </p:sp>
+      <p:sp>
+        <p:nvSpPr>
+          <p:cNvPr id="8" name="Shape 6"/>
+          <p:cNvSpPr/>
+          <p:nvPr/>
+        </p:nvSpPr>
+        <p:spPr>
+          <a:xfrm>
+            <a:off x="3383280" y="1783080"/>
+            <a:ext cx="2587752" cy="2423160"/>
+          </a:xfrm>
+          <a:prstGeom prst="roundRect">
+            <a:avLst>
+              <a:gd name="adj" fmla="val 3396"/>
+            </a:avLst>
+          </a:prstGeom>
+          <a:solidFill>
+            <a:srgbClr val="F1F3F6"/>
+          </a:solidFill>
+          <a:ln/>
+        </p:spPr>
+      </p:sp>
+      <p:sp>
+        <p:nvSpPr>
+          <p:cNvPr id="9" name="Text 7"/>
+          <p:cNvSpPr/>
+          <p:nvPr/>
+        </p:nvSpPr>
+        <p:spPr>
+          <a:xfrm>
+            <a:off x="3639312" y="1965960"/>
+            <a:ext cx="1097280" cy="502920"/>
+          </a:xfrm>
+          <a:prstGeom prst="rect">
+            <a:avLst/>
+          </a:prstGeom>
+          <a:noFill/>
+          <a:ln/>
+        </p:spPr>
+        <p:txBody>
+          <a:bodyPr wrap="square" lIns="0" tIns="0" rIns="0" bIns="0" rtlCol="0" anchor="ctr"/>
+          <a:lstStyle/>
+          <a:p>
+            <a:pPr indent="0" marL="0">
+              <a:buNone/>
+            </a:pPr>
+            <a:r>
+              <a:rPr lang="en-US" sz="2800" b="1" dirty="0">
+                <a:solidFill>
+                  <a:srgbClr val="B9C2CD"/>
+                </a:solidFill>
+                <a:latin typeface="Cambria" pitchFamily="34" charset="0"/>
+                <a:ea typeface="Cambria" pitchFamily="34" charset="-122"/>
+                <a:cs typeface="Cambria" pitchFamily="34" charset="-120"/>
+              </a:rPr>
+              <a:t>02</a:t>
+            </a:r>
+            <a:endParaRPr lang="en-US" sz="2800" dirty="0"/>
+          </a:p>
+        </p:txBody>
+      </p:sp>
+      <p:sp>
+        <p:nvSpPr>
+          <p:cNvPr id="10" name="Text 8"/>
+          <p:cNvSpPr/>
+          <p:nvPr/>
+        </p:nvSpPr>
+        <p:spPr>
+          <a:xfrm>
+            <a:off x="3621024" y="2523744"/>
+            <a:ext cx="2139696" cy="786384"/>
+          </a:xfrm>
+          <a:prstGeom prst="rect">
+            <a:avLst/>
+          </a:prstGeom>
+          <a:noFill/>
+          <a:ln/>
+        </p:spPr>
+        <p:txBody>
+          <a:bodyPr wrap="square" lIns="0" tIns="0" rIns="0" bIns="0" rtlCol="0" anchor="t"/>
+          <a:lstStyle/>
+          <a:p>
+            <a:pPr indent="0" marL="0">
+              <a:lnSpc>
+                <a:spcPts val="2000"/>
+              </a:lnSpc>
+              <a:buNone/>
+            </a:pPr>
+            <a:r>
+              <a:rPr lang="en-US" sz="1500" b="1" dirty="0">
+                <a:solidFill>
+                  <a:srgbClr val="1B2430"/>
+                </a:solidFill>
+                <a:latin typeface="Cambria" pitchFamily="34" charset="0"/>
+                <a:ea typeface="Cambria" pitchFamily="34" charset="-122"/>
+                <a:cs typeface="Cambria" pitchFamily="34" charset="-120"/>
+              </a:rPr>
+              <a:t>Start with the biggest spend</a:t>
+            </a:r>
+            <a:endParaRPr lang="en-US" sz="1500" dirty="0"/>
+          </a:p>
+        </p:txBody>
+      </p:sp>
+      <p:sp>
+        <p:nvSpPr>
+          <p:cNvPr id="11" name="Text 9"/>
+          <p:cNvSpPr/>
+          <p:nvPr/>
+        </p:nvSpPr>
+        <p:spPr>
+          <a:xfrm>
+            <a:off x="3621024" y="3346704"/>
+            <a:ext cx="2139696" cy="749808"/>
+          </a:xfrm>
+          <a:prstGeom prst="rect">
+            <a:avLst/>
+          </a:prstGeom>
+          <a:noFill/>
+          <a:ln/>
+        </p:spPr>
+        <p:txBody>
+          <a:bodyPr wrap="square" lIns="0" tIns="0" rIns="0" bIns="0" rtlCol="0" anchor="t"/>
+          <a:lstStyle/>
+          <a:p>
+            <a:pPr indent="0" marL="0">
+              <a:lnSpc>
+                <a:spcPts val="1500"/>
+              </a:lnSpc>
+              <a:buNone/>
+            </a:pPr>
+            <a:r>
+              <a:rPr lang="en-US" sz="1200" dirty="0">
+                <a:solidFill>
+                  <a:srgbClr val="5C6675"/>
+                </a:solidFill>
+                <a:latin typeface="Calibri" pitchFamily="34" charset="0"/>
+                <a:ea typeface="Calibri" pitchFamily="34" charset="-122"/>
+                <a:cs typeface="Calibri" pitchFamily="34" charset="-120"/>
+              </a:rPr>
+              <a:t>Attack the largest categories first. Don't chase perfect granularity everywhere.</a:t>
+            </a:r>
+            <a:endParaRPr lang="en-US" sz="1200" dirty="0"/>
+          </a:p>
+        </p:txBody>
+      </p:sp>
+      <p:sp>
+        <p:nvSpPr>
+          <p:cNvPr id="12" name="Shape 10"/>
+          <p:cNvSpPr/>
+          <p:nvPr/>
+        </p:nvSpPr>
+        <p:spPr>
+          <a:xfrm>
+            <a:off x="6217920" y="1783080"/>
+            <a:ext cx="2587752" cy="2423160"/>
+          </a:xfrm>
+          <a:prstGeom prst="roundRect">
+            <a:avLst>
+              <a:gd name="adj" fmla="val 3396"/>
+            </a:avLst>
+          </a:prstGeom>
+          <a:solidFill>
+            <a:srgbClr val="F1F3F6"/>
+          </a:solidFill>
+          <a:ln/>
+        </p:spPr>
+      </p:sp>
+      <p:sp>
+        <p:nvSpPr>
+          <p:cNvPr id="13" name="Text 11"/>
+          <p:cNvSpPr/>
+          <p:nvPr/>
+        </p:nvSpPr>
+        <p:spPr>
+          <a:xfrm>
+            <a:off x="6473952" y="1965960"/>
+            <a:ext cx="1097280" cy="502920"/>
+          </a:xfrm>
+          <a:prstGeom prst="rect">
+            <a:avLst/>
+          </a:prstGeom>
+          <a:noFill/>
+          <a:ln/>
+        </p:spPr>
+        <p:txBody>
+          <a:bodyPr wrap="square" lIns="0" tIns="0" rIns="0" bIns="0" rtlCol="0" anchor="ctr"/>
+          <a:lstStyle/>
+          <a:p>
+            <a:pPr indent="0" marL="0">
+              <a:buNone/>
+            </a:pPr>
+            <a:r>
+              <a:rPr lang="en-US" sz="2800" b="1" dirty="0">
+                <a:solidFill>
+                  <a:srgbClr val="B9C2CD"/>
+                </a:solidFill>
+                <a:latin typeface="Cambria" pitchFamily="34" charset="0"/>
+                <a:ea typeface="Cambria" pitchFamily="34" charset="-122"/>
+                <a:cs typeface="Cambria" pitchFamily="34" charset="-120"/>
+              </a:rPr>
+              <a:t>03</a:t>
+            </a:r>
+            <a:endParaRPr lang="en-US" sz="2800" dirty="0"/>
+          </a:p>
+        </p:txBody>
+      </p:sp>
+      <p:sp>
+        <p:nvSpPr>
+          <p:cNvPr id="14" name="Text 12"/>
+          <p:cNvSpPr/>
+          <p:nvPr/>
+        </p:nvSpPr>
+        <p:spPr>
+          <a:xfrm>
+            <a:off x="6455664" y="2523744"/>
+            <a:ext cx="2139696" cy="786384"/>
+          </a:xfrm>
+          <a:prstGeom prst="rect">
+            <a:avLst/>
+          </a:prstGeom>
+          <a:noFill/>
+          <a:ln/>
+        </p:spPr>
+        <p:txBody>
+          <a:bodyPr wrap="square" lIns="0" tIns="0" rIns="0" bIns="0" rtlCol="0" anchor="t"/>
+          <a:lstStyle/>
+          <a:p>
+            <a:pPr indent="0" marL="0">
+              <a:lnSpc>
+                <a:spcPts val="2000"/>
+              </a:lnSpc>
+              <a:buNone/>
+            </a:pPr>
+            <a:r>
+              <a:rPr lang="en-US" sz="1500" b="1" dirty="0">
+                <a:solidFill>
+                  <a:srgbClr val="1B2430"/>
+                </a:solidFill>
+                <a:latin typeface="Cambria" pitchFamily="34" charset="0"/>
+                <a:ea typeface="Cambria" pitchFamily="34" charset="-122"/>
+                <a:cs typeface="Cambria" pitchFamily="34" charset="-120"/>
+              </a:rPr>
+              <a:t>Get finance and engineering talking</a:t>
+            </a:r>
+            <a:endParaRPr lang="en-US" sz="1500" dirty="0"/>
+          </a:p>
+        </p:txBody>
+      </p:sp>
+      <p:sp>
+        <p:nvSpPr>
+          <p:cNvPr id="15" name="Text 13"/>
+          <p:cNvSpPr/>
+          <p:nvPr/>
+        </p:nvSpPr>
+        <p:spPr>
+          <a:xfrm>
+            <a:off x="6455664" y="3346704"/>
+            <a:ext cx="2139696" cy="749808"/>
+          </a:xfrm>
+          <a:prstGeom prst="rect">
+            <a:avLst/>
+          </a:prstGeom>
+          <a:noFill/>
+          <a:ln/>
+        </p:spPr>
+        <p:txBody>
+          <a:bodyPr wrap="square" lIns="0" tIns="0" rIns="0" bIns="0" rtlCol="0" anchor="t"/>
+          <a:lstStyle/>
+          <a:p>
+            <a:pPr indent="0" marL="0">
+              <a:lnSpc>
+                <a:spcPts val="1500"/>
+              </a:lnSpc>
+              <a:buNone/>
+            </a:pPr>
+            <a:r>
+              <a:rPr lang="en-US" sz="1200" dirty="0">
+                <a:solidFill>
+                  <a:srgbClr val="5C6675"/>
+                </a:solidFill>
+                <a:latin typeface="Calibri" pitchFamily="34" charset="0"/>
+                <a:ea typeface="Calibri" pitchFamily="34" charset="-122"/>
+                <a:cs typeface="Calibri" pitchFamily="34" charset="-120"/>
+              </a:rPr>
+              <a:t>Bring both into the conversation early, not as an afterthought.</a:t>
+            </a:r>
+            <a:endParaRPr lang="en-US" sz="1200" dirty="0"/>
+          </a:p>
+        </p:txBody>
+      </p:sp>
+      <p:sp>
+        <p:nvSpPr>
+          <p:cNvPr id="16" name="Shape 14"/>
+          <p:cNvSpPr/>
+          <p:nvPr/>
+        </p:nvSpPr>
+        <p:spPr>
+          <a:xfrm>
+            <a:off x="9052560" y="1783080"/>
+            <a:ext cx="2587752" cy="2423160"/>
+          </a:xfrm>
+          <a:prstGeom prst="roundRect">
+            <a:avLst>
+              <a:gd name="adj" fmla="val 3396"/>
+            </a:avLst>
+          </a:prstGeom>
+          <a:solidFill>
+            <a:srgbClr val="F1F3F6"/>
+          </a:solidFill>
+          <a:ln/>
+        </p:spPr>
+      </p:sp>
+      <p:sp>
+        <p:nvSpPr>
+          <p:cNvPr id="17" name="Text 15"/>
+          <p:cNvSpPr/>
+          <p:nvPr/>
+        </p:nvSpPr>
+        <p:spPr>
+          <a:xfrm>
+            <a:off x="9308592" y="1965960"/>
+            <a:ext cx="1097280" cy="502920"/>
+          </a:xfrm>
+          <a:prstGeom prst="rect">
+            <a:avLst/>
+          </a:prstGeom>
+          <a:noFill/>
+          <a:ln/>
+        </p:spPr>
+        <p:txBody>
+          <a:bodyPr wrap="square" lIns="0" tIns="0" rIns="0" bIns="0" rtlCol="0" anchor="ctr"/>
+          <a:lstStyle/>
+          <a:p>
+            <a:pPr indent="0" marL="0">
+              <a:buNone/>
+            </a:pPr>
+            <a:r>
+              <a:rPr lang="en-US" sz="2800" b="1" dirty="0">
+                <a:solidFill>
+                  <a:srgbClr val="B9C2CD"/>
+                </a:solidFill>
+                <a:latin typeface="Cambria" pitchFamily="34" charset="0"/>
+                <a:ea typeface="Cambria" pitchFamily="34" charset="-122"/>
+                <a:cs typeface="Cambria" pitchFamily="34" charset="-120"/>
+              </a:rPr>
+              <a:t>04</a:t>
+            </a:r>
+            <a:endParaRPr lang="en-US" sz="2800" dirty="0"/>
+          </a:p>
+        </p:txBody>
+      </p:sp>
+      <p:sp>
+        <p:nvSpPr>
+          <p:cNvPr id="18" name="Text 16"/>
+          <p:cNvSpPr/>
+          <p:nvPr/>
+        </p:nvSpPr>
+        <p:spPr>
+          <a:xfrm>
+            <a:off x="9290304" y="2523744"/>
+            <a:ext cx="2139696" cy="786384"/>
+          </a:xfrm>
+          <a:prstGeom prst="rect">
+            <a:avLst/>
+          </a:prstGeom>
+          <a:noFill/>
+          <a:ln/>
+        </p:spPr>
+        <p:txBody>
+          <a:bodyPr wrap="square" lIns="0" tIns="0" rIns="0" bIns="0" rtlCol="0" anchor="t"/>
+          <a:lstStyle/>
+          <a:p>
+            <a:pPr indent="0" marL="0">
+              <a:lnSpc>
+                <a:spcPts val="2000"/>
+              </a:lnSpc>
+              <a:buNone/>
+            </a:pPr>
+            <a:r>
+              <a:rPr lang="en-US" sz="1500" b="1" dirty="0">
+                <a:solidFill>
+                  <a:srgbClr val="1B2430"/>
+                </a:solidFill>
+                <a:latin typeface="Cambria" pitchFamily="34" charset="0"/>
+                <a:ea typeface="Cambria" pitchFamily="34" charset="-122"/>
+                <a:cs typeface="Cambria" pitchFamily="34" charset="-120"/>
+              </a:rPr>
+              <a:t>Set guardrails early</a:t>
+            </a:r>
+            <a:endParaRPr lang="en-US" sz="1500" dirty="0"/>
+          </a:p>
+        </p:txBody>
+      </p:sp>
+      <p:sp>
+        <p:nvSpPr>
+          <p:cNvPr id="19" name="Text 17"/>
+          <p:cNvSpPr/>
+          <p:nvPr/>
+        </p:nvSpPr>
+        <p:spPr>
+          <a:xfrm>
+            <a:off x="9290304" y="3346704"/>
+            <a:ext cx="2139696" cy="749808"/>
+          </a:xfrm>
+          <a:prstGeom prst="rect">
+            <a:avLst/>
+          </a:prstGeom>
+          <a:noFill/>
+          <a:ln/>
+        </p:spPr>
+        <p:txBody>
+          <a:bodyPr wrap="square" lIns="0" tIns="0" rIns="0" bIns="0" rtlCol="0" anchor="t"/>
+          <a:lstStyle/>
+          <a:p>
+            <a:pPr indent="0" marL="0">
+              <a:lnSpc>
+                <a:spcPts val="1500"/>
+              </a:lnSpc>
+              <a:buNone/>
+            </a:pPr>
+            <a:r>
+              <a:rPr lang="en-US" sz="1200" dirty="0">
+                <a:solidFill>
+                  <a:srgbClr val="5C6675"/>
+                </a:solidFill>
+                <a:latin typeface="Calibri" pitchFamily="34" charset="0"/>
+                <a:ea typeface="Calibri" pitchFamily="34" charset="-122"/>
+                <a:cs typeface="Calibri" pitchFamily="34" charset="-120"/>
+              </a:rPr>
+              <a:t>Owners, budget thresholds and quotas cost little to add — and stop the expensive surprises.</a:t>
+            </a:r>
+            <a:endParaRPr lang="en-US" sz="1200" dirty="0"/>
+          </a:p>
+        </p:txBody>
+      </p:sp>
+      <p:sp>
+        <p:nvSpPr>
+          <p:cNvPr id="20" name="Shape 18"/>
+          <p:cNvSpPr/>
+          <p:nvPr/>
+        </p:nvSpPr>
+        <p:spPr>
+          <a:xfrm>
+            <a:off x="548640" y="4434840"/>
+            <a:ext cx="11091672" cy="1874520"/>
+          </a:xfrm>
+          <a:prstGeom prst="roundRect">
+            <a:avLst>
+              <a:gd name="adj" fmla="val 4390"/>
+            </a:avLst>
+          </a:prstGeom>
+          <a:solidFill>
+            <a:srgbClr val="F1F3F6"/>
+          </a:solidFill>
+          <a:ln/>
+        </p:spPr>
+      </p:sp>
+      <p:sp>
+        <p:nvSpPr>
+          <p:cNvPr id="21" name="Text 19"/>
+          <p:cNvSpPr/>
+          <p:nvPr/>
+        </p:nvSpPr>
+        <p:spPr>
+          <a:xfrm>
+            <a:off x="877824" y="4572000"/>
+            <a:ext cx="6035040" cy="292608"/>
+          </a:xfrm>
+          <a:prstGeom prst="rect">
+            <a:avLst/>
+          </a:prstGeom>
+          <a:noFill/>
+          <a:ln/>
+        </p:spPr>
+        <p:txBody>
+          <a:bodyPr wrap="square" lIns="0" tIns="0" rIns="0" bIns="0" rtlCol="0" anchor="ctr"/>
+          <a:lstStyle/>
+          <a:p>
+            <a:pPr indent="0" marL="0">
+              <a:buNone/>
+            </a:pPr>
+            <a:r>
+              <a:rPr lang="en-US" sz="1200" b="1" spc="180" kern="0" dirty="0">
+                <a:solidFill>
+                  <a:srgbClr val="5C6675"/>
+                </a:solidFill>
+                <a:latin typeface="Calibri" pitchFamily="34" charset="0"/>
+                <a:ea typeface="Calibri" pitchFamily="34" charset="-122"/>
+                <a:cs typeface="Calibri" pitchFamily="34" charset="-120"/>
+              </a:rPr>
+              <a:t>Tooling — match the footprint, not the ambition</a:t>
+            </a:r>
+            <a:endParaRPr lang="en-US" sz="1200" dirty="0"/>
+          </a:p>
+        </p:txBody>
+      </p:sp>
+      <p:sp>
+        <p:nvSpPr>
+          <p:cNvPr id="22" name="Text 20"/>
+          <p:cNvSpPr/>
+          <p:nvPr/>
+        </p:nvSpPr>
+        <p:spPr>
+          <a:xfrm>
+            <a:off x="877824" y="4937760"/>
+            <a:ext cx="1737360" cy="384048"/>
+          </a:xfrm>
+          <a:prstGeom prst="rect">
+            <a:avLst/>
+          </a:prstGeom>
+          <a:noFill/>
+          <a:ln/>
+        </p:spPr>
+        <p:txBody>
+          <a:bodyPr wrap="square" lIns="0" tIns="0" rIns="0" bIns="0" rtlCol="0" anchor="ctr"/>
+          <a:lstStyle/>
+          <a:p>
+            <a:pPr indent="0" marL="0">
+              <a:buNone/>
+            </a:pPr>
+            <a:r>
+              <a:rPr lang="en-US" sz="1350" b="1" dirty="0">
+                <a:solidFill>
+                  <a:srgbClr val="2E8B7A"/>
+                </a:solidFill>
+                <a:latin typeface="Calibri" pitchFamily="34" charset="0"/>
+                <a:ea typeface="Calibri" pitchFamily="34" charset="-122"/>
+                <a:cs typeface="Calibri" pitchFamily="34" charset="-120"/>
+              </a:rPr>
+              <a:t>Native</a:t>
+            </a:r>
+            <a:endParaRPr lang="en-US" sz="1350" dirty="0"/>
+          </a:p>
+        </p:txBody>
+      </p:sp>
+      <p:sp>
+        <p:nvSpPr>
+          <p:cNvPr id="23" name="Text 21"/>
+          <p:cNvSpPr/>
+          <p:nvPr/>
+        </p:nvSpPr>
+        <p:spPr>
+          <a:xfrm>
+            <a:off x="2651760" y="4937760"/>
+            <a:ext cx="8595360" cy="384048"/>
+          </a:xfrm>
+          <a:prstGeom prst="rect">
+            <a:avLst/>
+          </a:prstGeom>
+          <a:noFill/>
+          <a:ln/>
+        </p:spPr>
+        <p:txBody>
+          <a:bodyPr wrap="square" lIns="0" tIns="0" rIns="0" bIns="0" rtlCol="0" anchor="ctr"/>
+          <a:lstStyle/>
+          <a:p>
+            <a:pPr indent="0" marL="0">
+              <a:buNone/>
+            </a:pPr>
+            <a:r>
+              <a:rPr lang="en-US" sz="1350" dirty="0">
+                <a:solidFill>
+                  <a:srgbClr val="5C6675"/>
+                </a:solidFill>
+                <a:latin typeface="Calibri" pitchFamily="34" charset="0"/>
+                <a:ea typeface="Calibri" pitchFamily="34" charset="-122"/>
+                <a:cs typeface="Calibri" pitchFamily="34" charset="-120"/>
+              </a:rPr>
+              <a:t>AWS Cost Explorer  ·  Azure Cost Management  ·  GCP Billing</a:t>
+            </a:r>
+            <a:endParaRPr lang="en-US" sz="1350" dirty="0"/>
+          </a:p>
+        </p:txBody>
+      </p:sp>
+      <p:sp>
+        <p:nvSpPr>
+          <p:cNvPr id="24" name="Text 22"/>
+          <p:cNvSpPr/>
+          <p:nvPr/>
+        </p:nvSpPr>
+        <p:spPr>
+          <a:xfrm>
+            <a:off x="877824" y="5349240"/>
+            <a:ext cx="1737360" cy="384048"/>
+          </a:xfrm>
+          <a:prstGeom prst="rect">
+            <a:avLst/>
+          </a:prstGeom>
+          <a:noFill/>
+          <a:ln/>
+        </p:spPr>
+        <p:txBody>
+          <a:bodyPr wrap="square" lIns="0" tIns="0" rIns="0" bIns="0" rtlCol="0" anchor="ctr"/>
+          <a:lstStyle/>
+          <a:p>
+            <a:pPr indent="0" marL="0">
+              <a:buNone/>
+            </a:pPr>
+            <a:r>
+              <a:rPr lang="en-US" sz="1350" b="1" dirty="0">
+                <a:solidFill>
+                  <a:srgbClr val="B87B18"/>
+                </a:solidFill>
+                <a:latin typeface="Calibri" pitchFamily="34" charset="0"/>
+                <a:ea typeface="Calibri" pitchFamily="34" charset="-122"/>
+                <a:cs typeface="Calibri" pitchFamily="34" charset="-120"/>
+              </a:rPr>
+              <a:t>Third-party</a:t>
+            </a:r>
+            <a:endParaRPr lang="en-US" sz="1350" dirty="0"/>
+          </a:p>
+        </p:txBody>
+      </p:sp>
+      <p:sp>
+        <p:nvSpPr>
+          <p:cNvPr id="25" name="Text 23"/>
+          <p:cNvSpPr/>
+          <p:nvPr/>
+        </p:nvSpPr>
+        <p:spPr>
+          <a:xfrm>
+            <a:off x="2651760" y="5349240"/>
+            <a:ext cx="8595360" cy="384048"/>
+          </a:xfrm>
+          <a:prstGeom prst="rect">
+            <a:avLst/>
+          </a:prstGeom>
+          <a:noFill/>
+          <a:ln/>
+        </p:spPr>
+        <p:txBody>
+          <a:bodyPr wrap="square" lIns="0" tIns="0" rIns="0" bIns="0" rtlCol="0" anchor="ctr"/>
+          <a:lstStyle/>
+          <a:p>
+            <a:pPr indent="0" marL="0">
+              <a:buNone/>
+            </a:pPr>
+            <a:r>
+              <a:rPr lang="en-US" sz="1350" dirty="0">
+                <a:solidFill>
+                  <a:srgbClr val="5C6675"/>
+                </a:solidFill>
+                <a:latin typeface="Calibri" pitchFamily="34" charset="0"/>
+                <a:ea typeface="Calibri" pitchFamily="34" charset="-122"/>
+                <a:cs typeface="Calibri" pitchFamily="34" charset="-120"/>
+              </a:rPr>
+              <a:t>CloudHealth  ·  Apptio  ·  Vantage  ·  nOps  ·  Finout  ·  CoreStack</a:t>
+            </a:r>
+            <a:endParaRPr lang="en-US" sz="1350" dirty="0"/>
+          </a:p>
+        </p:txBody>
+      </p:sp>
+      <p:sp>
+        <p:nvSpPr>
+          <p:cNvPr id="26" name="Text 24"/>
+          <p:cNvSpPr/>
+          <p:nvPr/>
+        </p:nvSpPr>
+        <p:spPr>
+          <a:xfrm>
+            <a:off x="877824" y="5760720"/>
+            <a:ext cx="1737360" cy="384048"/>
+          </a:xfrm>
+          <a:prstGeom prst="rect">
+            <a:avLst/>
+          </a:prstGeom>
+          <a:noFill/>
+          <a:ln/>
+        </p:spPr>
+        <p:txBody>
+          <a:bodyPr wrap="square" lIns="0" tIns="0" rIns="0" bIns="0" rtlCol="0" anchor="ctr"/>
+          <a:lstStyle/>
+          <a:p>
+            <a:pPr indent="0" marL="0">
+              <a:buNone/>
+            </a:pPr>
+            <a:r>
+              <a:rPr lang="en-US" sz="1350" b="1" dirty="0">
+                <a:solidFill>
+                  <a:srgbClr val="1B2430"/>
+                </a:solidFill>
+                <a:latin typeface="Calibri" pitchFamily="34" charset="0"/>
+                <a:ea typeface="Calibri" pitchFamily="34" charset="-122"/>
+                <a:cs typeface="Calibri" pitchFamily="34" charset="-120"/>
+              </a:rPr>
+              <a:t>Standard</a:t>
+            </a:r>
+            <a:endParaRPr lang="en-US" sz="1350" dirty="0"/>
+          </a:p>
+        </p:txBody>
+      </p:sp>
+      <p:sp>
+        <p:nvSpPr>
+          <p:cNvPr id="27" name="Text 25"/>
+          <p:cNvSpPr/>
+          <p:nvPr/>
+        </p:nvSpPr>
+        <p:spPr>
+          <a:xfrm>
+            <a:off x="2651760" y="5760720"/>
+            <a:ext cx="8595360" cy="384048"/>
+          </a:xfrm>
+          <a:prstGeom prst="rect">
+            <a:avLst/>
+          </a:prstGeom>
+          <a:noFill/>
+          <a:ln/>
+        </p:spPr>
+        <p:txBody>
+          <a:bodyPr wrap="square" lIns="0" tIns="0" rIns="0" bIns="0" rtlCol="0" anchor="ctr"/>
+          <a:lstStyle/>
+          <a:p>
+            <a:pPr indent="0" marL="0">
+              <a:buNone/>
+            </a:pPr>
+            <a:r>
+              <a:rPr lang="en-US" sz="1350" dirty="0">
+                <a:solidFill>
+                  <a:srgbClr val="5C6675"/>
+                </a:solidFill>
+                <a:latin typeface="Calibri" pitchFamily="34" charset="0"/>
+                <a:ea typeface="Calibri" pitchFamily="34" charset="-122"/>
+                <a:cs typeface="Calibri" pitchFamily="34" charset="-120"/>
+              </a:rPr>
+              <a:t>FOCUS-compliant platforms for multi-cloud reporting</a:t>
+            </a:r>
+            <a:endParaRPr lang="en-US" sz="1350" dirty="0"/>
+          </a:p>
+        </p:txBody>
+      </p:sp>
+    </p:spTree>
+  </p:cSld>
+  <p:clrMapOvr>
+    <a:masterClrMapping/>
+  </p:clrMapOvr>
+</p:sld>
+</file>
+
+<file path=ppt/slides/slide24.xml><?xml version="1.0" encoding="utf-8"?>
+<p:sld xmlns:a="http://schemas.openxmlformats.org/drawingml/2006/main" xmlns:r="http://schemas.openxmlformats.org/officeDocument/2006/relationships" xmlns:p="http://schemas.openxmlformats.org/presentationml/2006/main">
+  <p:cSld name="Slide 24">
     <p:bg>
       <p:bgPr>
         <a:solidFill>
@@ -18461,9 +20030,9 @@
 </p:sld>
 </file>
 
-<file path=ppt/slides/slide24.xml><?xml version="1.0" encoding="utf-8"?>
+<file path=ppt/slides/slide25.xml><?xml version="1.0" encoding="utf-8"?>
 <p:sld xmlns:a="http://schemas.openxmlformats.org/drawingml/2006/main" xmlns:r="http://schemas.openxmlformats.org/officeDocument/2006/relationships" xmlns:p="http://schemas.openxmlformats.org/presentationml/2006/main">
-  <p:cSld name="Slide 24">
+  <p:cSld name="Slide 25">
     <p:bg>
       <p:bgPr>
         <a:solidFill>

--- a/presentations/finops-gaining-visibility-cfo.pptx
+++ b/presentations/finops-gaining-visibility-cfo.pptx
@@ -30,9 +30,10 @@
     <p:sldId id="278" r:id="rId24"/>
     <p:sldId id="279" r:id="rId25"/>
     <p:sldId id="280" r:id="rId26"/>
+    <p:sldId id="281" r:id="rId27"/>
   </p:sldIdLst>
   <p:notesMasterIdLst>
-    <p:notesMasterId r:id="rId27"/>
+    <p:notesMasterId r:id="rId28"/>
   </p:notesMasterIdLst>
   <p:sldSz cx="12192000" cy="6858000"/>
   <p:notesSz cx="6858000" cy="12192000"/>
@@ -1758,7 +1759,7 @@
           <a:p>
             <a:r>
               <a:rPr lang="en-US" dirty="0"/>
-              <a:t>This is the governance-of-the-programme slide, and the one that answers 'how will we know this is working before the savings arrive'. The distinction to hold on to is identified versus realized savings. Identified is an estimate produced by a tool; realized is a change visible on an invoice. Treat the first as a pipeline and only the second as a result, and never let the two be reported as one number — that conflation is how cost programmes end up claiming savings the P&amp;L cannot find. Adoption is the leading indicator worth putting in the monthly pack: the share of findings with a named owner and a date. It moves months before the savings do, and it is the earliest reliable signal that the practice is real rather than decorative. The closing line is the framing to keep with a board: we are buying better decisions, and a lower bill is what a better decision looks like a quarter later. It also sets the right expectation on timing.</a:t>
+              <a:t>Read this as the risk slide for the fastest-growing line in the technology budget. The pattern is familiar — spend scaled before ownership and controls did — and the consequence is the same: variance nobody can explain quickly. The finance-relevant figure is the diagnosis time. Four in five organizations need a day or more to trace an AI cost spike to its source, which in practice means the exposure continues while the investigation runs. Framing that as a measurable target — hours rather than days — gives us something to report and improve, unlike a general commitment to better governance. Handle the source honestly and do it unprompted: this is vendor research from a company that sells AI cost management, and the 26% waste number is a self-reported estimate rather than a measurement. Cite the ownership and diagnosis findings, which independent coverage repeats, and treat the waste figure as directional only. Over-claiming it invites the audit question we cannot answer. If asked what would change: per-consumer attribution on AI traffic, so a spike resolves to a team and an application rather than to a shared resource.</a:t>
             </a:r>
             <a:endParaRPr lang="en-US" dirty="0"/>
           </a:p>
@@ -1846,7 +1847,7 @@
           <a:p>
             <a:r>
               <a:rPr lang="en-US" dirty="0"/>
-              <a:t>This is the ask, and the honest cost answer is effort rather than licence spend if we stay on native tooling — name the roles and the share of their time instead of quoting a budget number you would have to defend. Step one is the only item that cannot run in parallel: every downstream report degrades if the taxonomy is still moving. Split the ownership explicitly — finance owns the taxonomy, the allocation policy and the KPI definitions; engineering owns enforcement, instrumentation and remediation. Steps two and four are both arguments for restraint: attack the largest cost categories rather than pursuing complete granularity, and buy tooling that matches the estate we have rather than the one we might have in three years.</a:t>
+              <a:t>This is the governance-of-the-programme slide, and the one that answers 'how will we know this is working before the savings arrive'. The distinction to hold on to is identified versus realized savings. Identified is an estimate produced by a tool; realized is a change visible on an invoice. Treat the first as a pipeline and only the second as a result, and never let the two be reported as one number — that conflation is how cost programmes end up claiming savings the P&amp;L cannot find. Adoption is the leading indicator worth putting in the monthly pack: the share of findings with a named owner and a date. It moves months before the savings do, and it is the earliest reliable signal that the practice is real rather than decorative. The closing line is the framing to keep with a board: we are buying better decisions, and a lower bill is what a better decision looks like a quarter later. It also sets the right expectation on timing.</a:t>
             </a:r>
             <a:endParaRPr lang="en-US" dirty="0"/>
           </a:p>
@@ -1934,7 +1935,7 @@
           <a:p>
             <a:r>
               <a:rPr lang="en-US" dirty="0"/>
-              <a:t>Close on why this sequencing produces a better financial outcome than cutting first. A cut delivers a one-time step down and reverses as soon as attention moves elsewhere; allocation plus ownership changes the rate at which cost is added, which compounds across every subsequent period. That is also the honest framing for the board: the near-term deliverable is explainable variance and a forecast we can stand behind, with targeted savings following the first full period of clean data. Ask for the first two links today — the allocation standard and published ownership — because the rest follow from them and cannot be bought separately.</a:t>
+              <a:t>This is the ask, and the honest cost answer is effort rather than licence spend if we stay on native tooling — name the roles and the share of their time instead of quoting a budget number you would have to defend. Step one is the only item that cannot run in parallel: every downstream report degrades if the taxonomy is still moving. Split the ownership explicitly — finance owns the taxonomy, the allocation policy and the KPI definitions; engineering owns enforcement, instrumentation and remediation. Steps two and four are both arguments for restraint: attack the largest cost categories rather than pursuing complete granularity, and buy tooling that matches the estate we have rather than the one we might have in three years.</a:t>
             </a:r>
             <a:endParaRPr lang="en-US" dirty="0"/>
           </a:p>
@@ -2022,7 +2023,7 @@
           <a:p>
             <a:r>
               <a:rPr lang="en-US" dirty="0"/>
-              <a:t>Expect five questions and have the answers ready. What does it cost: effort, principally, plus any tooling only if we are genuinely multi-cloud. When do savings appear: allocation coverage improves within weeks, targeted savings follow the first full period of clean data, and be careful not to promise a percentage before we can see where the waste is. Who owns it: name the taxonomy owner and the monthly review before leaving the room, or none of this happens. Does it affect the close: better, not worse — daily data improves the accrual, though chargeback adds a journal step worth scoping with the controller. And will chargeback start an internal war: only if we launch it on allocation nobody trusts, which is exactly what the showback runway is for.</a:t>
+              <a:t>Close on why this sequencing produces a better financial outcome than cutting first. A cut delivers a one-time step down and reverses as soon as attention moves elsewhere; allocation plus ownership changes the rate at which cost is added, which compounds across every subsequent period. That is also the honest framing for the board: the near-term deliverable is explainable variance and a forecast we can stand behind, with targeted savings following the first full period of clean data. Ask for the first two links today — the allocation standard and published ownership — because the rest follow from them and cannot be bought separately.</a:t>
             </a:r>
             <a:endParaRPr lang="en-US" dirty="0"/>
           </a:p>
@@ -2046,6 +2047,94 @@
             <a:fld id="{F7021451-1387-4CA6-816F-3879F97B5CBC}" type="slidenum">
               <a:rPr lang="en-US"/>
               <a:t>25</a:t>
+            </a:fld>
+            <a:endParaRPr lang="en-US"/>
+          </a:p>
+        </p:txBody>
+      </p:sp>
+    </p:spTree>
+    <p:extLst>
+      <p:ext uri="{BB962C8B-B14F-4D97-AF65-F5344CB8AC3E}">
+        <p14:creationId xmlns:p14="http://schemas.microsoft.com/office/powerpoint/2010/main" val="1024086991"/>
+      </p:ext>
+    </p:extLst>
+  </p:cSld>
+  <p:clrMapOvr>
+    <a:masterClrMapping/>
+  </p:clrMapOvr>
+</p:notes>
+</file>
+
+<file path=ppt/notesSlides/notesSlide26.xml><?xml version="1.0" encoding="utf-8"?>
+<p:notes xmlns:a="http://schemas.openxmlformats.org/drawingml/2006/main" xmlns:r="http://schemas.openxmlformats.org/officeDocument/2006/relationships" xmlns:p="http://schemas.openxmlformats.org/presentationml/2006/main">
+  <p:cSld>
+    <p:spTree>
+      <p:nvGrpSpPr>
+        <p:cNvPr id="1" name=""/>
+        <p:cNvGrpSpPr/>
+        <p:nvPr/>
+      </p:nvGrpSpPr>
+      <p:grpSpPr>
+        <a:xfrm>
+          <a:off x="0" y="0"/>
+          <a:ext cx="0" cy="0"/>
+          <a:chOff x="0" y="0"/>
+          <a:chExt cx="0" cy="0"/>
+        </a:xfrm>
+      </p:grpSpPr>
+      <p:sp>
+        <p:nvSpPr>
+          <p:cNvPr id="2" name="Slide Image Placeholder 1"/>
+          <p:cNvSpPr>
+            <a:spLocks noGrp="1" noRot="1" noChangeAspect="1"/>
+          </p:cNvSpPr>
+          <p:nvPr>
+            <p:ph type="sldImg"/>
+          </p:nvPr>
+        </p:nvSpPr>
+        <p:spPr/>
+      </p:sp>
+      <p:sp>
+        <p:nvSpPr>
+          <p:cNvPr id="3" name="Notes Placeholder 2"/>
+          <p:cNvSpPr>
+            <a:spLocks noGrp="1"/>
+          </p:cNvSpPr>
+          <p:nvPr>
+            <p:ph type="body" idx="1"/>
+          </p:nvPr>
+        </p:nvSpPr>
+        <p:spPr/>
+        <p:txBody>
+          <a:bodyPr/>
+          <a:lstStyle/>
+          <a:p>
+            <a:r>
+              <a:rPr lang="en-US" dirty="0"/>
+              <a:t>Expect five questions and have the answers ready. What does it cost: effort, principally, plus any tooling only if we are genuinely multi-cloud. When do savings appear: allocation coverage improves within weeks, targeted savings follow the first full period of clean data, and be careful not to promise a percentage before we can see where the waste is. Who owns it: name the taxonomy owner and the monthly review before leaving the room, or none of this happens. Does it affect the close: better, not worse — daily data improves the accrual, though chargeback adds a journal step worth scoping with the controller. And will chargeback start an internal war: only if we launch it on allocation nobody trusts, which is exactly what the showback runway is for.</a:t>
+            </a:r>
+            <a:endParaRPr lang="en-US" dirty="0"/>
+          </a:p>
+        </p:txBody>
+      </p:sp>
+      <p:sp>
+        <p:nvSpPr>
+          <p:cNvPr id="4" name="Slide Number Placeholder 3"/>
+          <p:cNvSpPr>
+            <a:spLocks noGrp="1"/>
+          </p:cNvSpPr>
+          <p:nvPr>
+            <p:ph type="sldNum" sz="quarter" idx="10"/>
+          </p:nvPr>
+        </p:nvSpPr>
+        <p:spPr/>
+        <p:txBody>
+          <a:bodyPr/>
+          <a:lstStyle/>
+          <a:p>
+            <a:fld id="{F7021451-1387-4CA6-816F-3879F97B5CBC}" type="slidenum">
+              <a:rPr lang="en-US"/>
+              <a:t>26</a:t>
             </a:fld>
             <a:endParaRPr lang="en-US"/>
           </a:p>
@@ -16820,7 +16909,7 @@
                 <a:ea typeface="Calibri" pitchFamily="34" charset="-122"/>
                 <a:cs typeface="Calibri" pitchFamily="34" charset="-120"/>
               </a:rPr>
-              <a:t>OPERATE — RUNNING THE PRACTICE</a:t>
+              <a:t>GOVERNANCE — THE AI LINE</a:t>
             </a:r>
             <a:endParaRPr lang="en-US" sz="1100" dirty="0"/>
           </a:p>
@@ -16859,7 +16948,7 @@
                 <a:ea typeface="Cambria" pitchFamily="34" charset="-122"/>
                 <a:cs typeface="Cambria" pitchFamily="34" charset="-120"/>
               </a:rPr>
-              <a:t>Ship the insight, don't just publish it</a:t>
+              <a:t>AI is repeating the cloud journey, at speed</a:t>
             </a:r>
             <a:endParaRPr lang="en-US" sz="3100" dirty="0"/>
           </a:p>
@@ -16898,7 +16987,7 @@
                 <a:ea typeface="Calibri" pitchFamily="34" charset="-122"/>
                 <a:cs typeface="Calibri" pitchFamily="34" charset="-120"/>
               </a:rPr>
-              <a:t>A report tells someone a number. Only a change in what they do next reaches the bill.</a:t>
+              <a:t>The same three failures — no owner, no attribution, no ceiling — arriving on a much shorter clock.</a:t>
             </a:r>
             <a:endParaRPr lang="en-US" sz="1500" dirty="0"/>
           </a:p>
@@ -16912,12 +17001,12 @@
         </p:nvSpPr>
         <p:spPr>
           <a:xfrm>
-            <a:off x="548640" y="2286000"/>
-            <a:ext cx="1700784" cy="960120"/>
+            <a:off x="548640" y="2121408"/>
+            <a:ext cx="2587752" cy="2194560"/>
           </a:xfrm>
           <a:prstGeom prst="roundRect">
             <a:avLst>
-              <a:gd name="adj" fmla="val 8571"/>
+              <a:gd name="adj" fmla="val 3750"/>
             </a:avLst>
           </a:prstGeom>
           <a:solidFill>
@@ -16934,24 +17023,66 @@
         </p:nvSpPr>
         <p:spPr>
           <a:xfrm>
-            <a:off x="548640" y="2395728"/>
-            <a:ext cx="1700784" cy="329184"/>
-          </a:xfrm>
-          <a:prstGeom prst="rect">
-            <a:avLst/>
-          </a:prstGeom>
-          <a:noFill/>
-          <a:ln/>
-        </p:spPr>
-        <p:txBody>
-          <a:bodyPr wrap="square" lIns="0" tIns="0" rIns="0" bIns="0" rtlCol="0" anchor="ctr"/>
-          <a:lstStyle/>
-          <a:p>
-            <a:pPr algn="ctr" indent="0" marL="0">
-              <a:buNone/>
-            </a:pPr>
-            <a:r>
-              <a:rPr lang="en-US" sz="1350" b="1" dirty="0">
+            <a:off x="804672" y="2286000"/>
+            <a:ext cx="2103120" cy="640080"/>
+          </a:xfrm>
+          <a:prstGeom prst="rect">
+            <a:avLst/>
+          </a:prstGeom>
+          <a:noFill/>
+          <a:ln/>
+        </p:spPr>
+        <p:txBody>
+          <a:bodyPr wrap="square" lIns="0" tIns="0" rIns="0" bIns="0" rtlCol="0" anchor="ctr"/>
+          <a:lstStyle/>
+          <a:p>
+            <a:pPr indent="0" marL="0">
+              <a:buNone/>
+            </a:pPr>
+            <a:r>
+              <a:rPr lang="en-US" sz="3200" b="1" dirty="0">
+                <a:solidFill>
+                  <a:srgbClr val="A6432F"/>
+                </a:solidFill>
+                <a:latin typeface="Cambria" pitchFamily="34" charset="0"/>
+                <a:ea typeface="Cambria" pitchFamily="34" charset="-122"/>
+                <a:cs typeface="Cambria" pitchFamily="34" charset="-120"/>
+              </a:rPr>
+              <a:t>72%</a:t>
+            </a:r>
+            <a:endParaRPr lang="en-US" sz="3200" dirty="0"/>
+          </a:p>
+        </p:txBody>
+      </p:sp>
+      <p:sp>
+        <p:nvSpPr>
+          <p:cNvPr id="7" name="Text 5"/>
+          <p:cNvSpPr/>
+          <p:nvPr/>
+        </p:nvSpPr>
+        <p:spPr>
+          <a:xfrm>
+            <a:off x="804672" y="2962656"/>
+            <a:ext cx="2103120" cy="777240"/>
+          </a:xfrm>
+          <a:prstGeom prst="rect">
+            <a:avLst/>
+          </a:prstGeom>
+          <a:noFill/>
+          <a:ln/>
+        </p:spPr>
+        <p:txBody>
+          <a:bodyPr wrap="square" lIns="0" tIns="0" rIns="0" bIns="0" rtlCol="0" anchor="t"/>
+          <a:lstStyle/>
+          <a:p>
+            <a:pPr indent="0" marL="0">
+              <a:lnSpc>
+                <a:spcPts val="1700"/>
+              </a:lnSpc>
+              <a:buNone/>
+            </a:pPr>
+            <a:r>
+              <a:rPr lang="en-US" sz="1300" dirty="0">
                 <a:solidFill>
                   <a:srgbClr val="1B2430"/>
                 </a:solidFill>
@@ -16959,22 +17090,22 @@
                 <a:ea typeface="Calibri" pitchFamily="34" charset="-122"/>
                 <a:cs typeface="Calibri" pitchFamily="34" charset="-120"/>
               </a:rPr>
-              <a:t>Finding</a:t>
-            </a:r>
-            <a:endParaRPr lang="en-US" sz="1350" dirty="0"/>
-          </a:p>
-        </p:txBody>
-      </p:sp>
-      <p:sp>
-        <p:nvSpPr>
-          <p:cNvPr id="7" name="Text 5"/>
-          <p:cNvSpPr/>
-          <p:nvPr/>
-        </p:nvSpPr>
-        <p:spPr>
-          <a:xfrm>
-            <a:off x="640080" y="2724912"/>
-            <a:ext cx="1517904" cy="402336"/>
+              <a:t>hit an unexpected AI bill in the past year</a:t>
+            </a:r>
+            <a:endParaRPr lang="en-US" sz="1300" dirty="0"/>
+          </a:p>
+        </p:txBody>
+      </p:sp>
+      <p:sp>
+        <p:nvSpPr>
+          <p:cNvPr id="8" name="Text 6"/>
+          <p:cNvSpPr/>
+          <p:nvPr/>
+        </p:nvSpPr>
+        <p:spPr>
+          <a:xfrm>
+            <a:off x="804672" y="3712464"/>
+            <a:ext cx="2103120" cy="512064"/>
           </a:xfrm>
           <a:prstGeom prst="rect">
             <a:avLst/>
@@ -16986,7 +17117,7 @@
           <a:bodyPr wrap="square" lIns="0" tIns="0" rIns="0" bIns="0" rtlCol="0" anchor="t"/>
           <a:lstStyle/>
           <a:p>
-            <a:pPr algn="ctr" indent="0" marL="0">
+            <a:pPr indent="0" marL="0">
               <a:lnSpc>
                 <a:spcPts val="1400"/>
               </a:lnSpc>
@@ -17001,7 +17132,7 @@
                 <a:ea typeface="Calibri" pitchFamily="34" charset="-122"/>
                 <a:cs typeface="Calibri" pitchFamily="34" charset="-120"/>
               </a:rPr>
-              <a:t>the dashboard flags it</a:t>
+              <a:t>One in three, more than once.</a:t>
             </a:r>
             <a:endParaRPr lang="en-US" sz="1100" dirty="0"/>
           </a:p>
@@ -17009,38 +17140,18 @@
       </p:sp>
       <p:sp>
         <p:nvSpPr>
-          <p:cNvPr id="8" name="Shape 6"/>
-          <p:cNvSpPr/>
-          <p:nvPr/>
-        </p:nvSpPr>
-        <p:spPr>
-          <a:xfrm>
-            <a:off x="2267712" y="2688336"/>
-            <a:ext cx="137160" cy="146304"/>
-          </a:xfrm>
-          <a:prstGeom prst="rightArrow">
-            <a:avLst/>
-          </a:prstGeom>
-          <a:solidFill>
-            <a:srgbClr val="C3CBD5"/>
-          </a:solidFill>
-          <a:ln/>
-        </p:spPr>
-      </p:sp>
-      <p:sp>
-        <p:nvSpPr>
           <p:cNvPr id="9" name="Shape 7"/>
           <p:cNvSpPr/>
           <p:nvPr/>
         </p:nvSpPr>
         <p:spPr>
           <a:xfrm>
-            <a:off x="2423160" y="2286000"/>
-            <a:ext cx="1700784" cy="960120"/>
+            <a:off x="3383280" y="2121408"/>
+            <a:ext cx="2587752" cy="2194560"/>
           </a:xfrm>
           <a:prstGeom prst="roundRect">
             <a:avLst>
-              <a:gd name="adj" fmla="val 8571"/>
+              <a:gd name="adj" fmla="val 3750"/>
             </a:avLst>
           </a:prstGeom>
           <a:solidFill>
@@ -17057,24 +17168,66 @@
         </p:nvSpPr>
         <p:spPr>
           <a:xfrm>
-            <a:off x="2423160" y="2395728"/>
-            <a:ext cx="1700784" cy="329184"/>
-          </a:xfrm>
-          <a:prstGeom prst="rect">
-            <a:avLst/>
-          </a:prstGeom>
-          <a:noFill/>
-          <a:ln/>
-        </p:spPr>
-        <p:txBody>
-          <a:bodyPr wrap="square" lIns="0" tIns="0" rIns="0" bIns="0" rtlCol="0" anchor="ctr"/>
-          <a:lstStyle/>
-          <a:p>
-            <a:pPr algn="ctr" indent="0" marL="0">
-              <a:buNone/>
-            </a:pPr>
-            <a:r>
-              <a:rPr lang="en-US" sz="1350" b="1" dirty="0">
+            <a:off x="3639312" y="2286000"/>
+            <a:ext cx="2103120" cy="640080"/>
+          </a:xfrm>
+          <a:prstGeom prst="rect">
+            <a:avLst/>
+          </a:prstGeom>
+          <a:noFill/>
+          <a:ln/>
+        </p:spPr>
+        <p:txBody>
+          <a:bodyPr wrap="square" lIns="0" tIns="0" rIns="0" bIns="0" rtlCol="0" anchor="ctr"/>
+          <a:lstStyle/>
+          <a:p>
+            <a:pPr indent="0" marL="0">
+              <a:buNone/>
+            </a:pPr>
+            <a:r>
+              <a:rPr lang="en-US" sz="3200" b="1" dirty="0">
+                <a:solidFill>
+                  <a:srgbClr val="E39B2C"/>
+                </a:solidFill>
+                <a:latin typeface="Cambria" pitchFamily="34" charset="0"/>
+                <a:ea typeface="Cambria" pitchFamily="34" charset="-122"/>
+                <a:cs typeface="Cambria" pitchFamily="34" charset="-120"/>
+              </a:rPr>
+              <a:t>52%</a:t>
+            </a:r>
+            <a:endParaRPr lang="en-US" sz="3200" dirty="0"/>
+          </a:p>
+        </p:txBody>
+      </p:sp>
+      <p:sp>
+        <p:nvSpPr>
+          <p:cNvPr id="11" name="Text 9"/>
+          <p:cNvSpPr/>
+          <p:nvPr/>
+        </p:nvSpPr>
+        <p:spPr>
+          <a:xfrm>
+            <a:off x="3639312" y="2962656"/>
+            <a:ext cx="2103120" cy="777240"/>
+          </a:xfrm>
+          <a:prstGeom prst="rect">
+            <a:avLst/>
+          </a:prstGeom>
+          <a:noFill/>
+          <a:ln/>
+        </p:spPr>
+        <p:txBody>
+          <a:bodyPr wrap="square" lIns="0" tIns="0" rIns="0" bIns="0" rtlCol="0" anchor="t"/>
+          <a:lstStyle/>
+          <a:p>
+            <a:pPr indent="0" marL="0">
+              <a:lnSpc>
+                <a:spcPts val="1700"/>
+              </a:lnSpc>
+              <a:buNone/>
+            </a:pPr>
+            <a:r>
+              <a:rPr lang="en-US" sz="1300" dirty="0">
                 <a:solidFill>
                   <a:srgbClr val="1B2430"/>
                 </a:solidFill>
@@ -17082,22 +17235,22 @@
                 <a:ea typeface="Calibri" pitchFamily="34" charset="-122"/>
                 <a:cs typeface="Calibri" pitchFamily="34" charset="-120"/>
               </a:rPr>
-              <a:t>Named owner</a:t>
-            </a:r>
-            <a:endParaRPr lang="en-US" sz="1350" dirty="0"/>
-          </a:p>
-        </p:txBody>
-      </p:sp>
-      <p:sp>
-        <p:nvSpPr>
-          <p:cNvPr id="11" name="Text 9"/>
-          <p:cNvSpPr/>
-          <p:nvPr/>
-        </p:nvSpPr>
-        <p:spPr>
-          <a:xfrm>
-            <a:off x="2514600" y="2724912"/>
-            <a:ext cx="1517904" cy="402336"/>
+              <a:t>have no clear owner for AI cost</a:t>
+            </a:r>
+            <a:endParaRPr lang="en-US" sz="1300" dirty="0"/>
+          </a:p>
+        </p:txBody>
+      </p:sp>
+      <p:sp>
+        <p:nvSpPr>
+          <p:cNvPr id="12" name="Text 10"/>
+          <p:cNvSpPr/>
+          <p:nvPr/>
+        </p:nvSpPr>
+        <p:spPr>
+          <a:xfrm>
+            <a:off x="3639312" y="3712464"/>
+            <a:ext cx="2103120" cy="512064"/>
           </a:xfrm>
           <a:prstGeom prst="rect">
             <a:avLst/>
@@ -17109,7 +17262,7 @@
           <a:bodyPr wrap="square" lIns="0" tIns="0" rIns="0" bIns="0" rtlCol="0" anchor="t"/>
           <a:lstStyle/>
           <a:p>
-            <a:pPr algn="ctr" indent="0" marL="0">
+            <a:pPr indent="0" marL="0">
               <a:lnSpc>
                 <a:spcPts val="1400"/>
               </a:lnSpc>
@@ -17124,7 +17277,7 @@
                 <a:ea typeface="Calibri" pitchFamily="34" charset="-122"/>
                 <a:cs typeface="Calibri" pitchFamily="34" charset="-120"/>
               </a:rPr>
-              <a:t>one person, not a team</a:t>
+              <a:t>Split across engineering, FinOps, finance and IT.</a:t>
             </a:r>
             <a:endParaRPr lang="en-US" sz="1100" dirty="0"/>
           </a:p>
@@ -17132,38 +17285,18 @@
       </p:sp>
       <p:sp>
         <p:nvSpPr>
-          <p:cNvPr id="12" name="Shape 10"/>
-          <p:cNvSpPr/>
-          <p:nvPr/>
-        </p:nvSpPr>
-        <p:spPr>
-          <a:xfrm>
-            <a:off x="4142232" y="2688336"/>
-            <a:ext cx="137160" cy="146304"/>
-          </a:xfrm>
-          <a:prstGeom prst="rightArrow">
-            <a:avLst/>
-          </a:prstGeom>
-          <a:solidFill>
-            <a:srgbClr val="C3CBD5"/>
-          </a:solidFill>
-          <a:ln/>
-        </p:spPr>
-      </p:sp>
-      <p:sp>
-        <p:nvSpPr>
           <p:cNvPr id="13" name="Shape 11"/>
           <p:cNvSpPr/>
           <p:nvPr/>
         </p:nvSpPr>
         <p:spPr>
           <a:xfrm>
-            <a:off x="4297680" y="2286000"/>
-            <a:ext cx="1700784" cy="960120"/>
+            <a:off x="6217920" y="2121408"/>
+            <a:ext cx="2587752" cy="2194560"/>
           </a:xfrm>
           <a:prstGeom prst="roundRect">
             <a:avLst>
-              <a:gd name="adj" fmla="val 8571"/>
+              <a:gd name="adj" fmla="val 3750"/>
             </a:avLst>
           </a:prstGeom>
           <a:solidFill>
@@ -17180,24 +17313,66 @@
         </p:nvSpPr>
         <p:spPr>
           <a:xfrm>
-            <a:off x="4297680" y="2395728"/>
-            <a:ext cx="1700784" cy="329184"/>
-          </a:xfrm>
-          <a:prstGeom prst="rect">
-            <a:avLst/>
-          </a:prstGeom>
-          <a:noFill/>
-          <a:ln/>
-        </p:spPr>
-        <p:txBody>
-          <a:bodyPr wrap="square" lIns="0" tIns="0" rIns="0" bIns="0" rtlCol="0" anchor="ctr"/>
-          <a:lstStyle/>
-          <a:p>
-            <a:pPr algn="ctr" indent="0" marL="0">
-              <a:buNone/>
-            </a:pPr>
-            <a:r>
-              <a:rPr lang="en-US" sz="1350" b="1" dirty="0">
+            <a:off x="6473952" y="2286000"/>
+            <a:ext cx="2103120" cy="640080"/>
+          </a:xfrm>
+          <a:prstGeom prst="rect">
+            <a:avLst/>
+          </a:prstGeom>
+          <a:noFill/>
+          <a:ln/>
+        </p:spPr>
+        <p:txBody>
+          <a:bodyPr wrap="square" lIns="0" tIns="0" rIns="0" bIns="0" rtlCol="0" anchor="ctr"/>
+          <a:lstStyle/>
+          <a:p>
+            <a:pPr indent="0" marL="0">
+              <a:buNone/>
+            </a:pPr>
+            <a:r>
+              <a:rPr lang="en-US" sz="3200" b="1" dirty="0">
+                <a:solidFill>
+                  <a:srgbClr val="E39B2C"/>
+                </a:solidFill>
+                <a:latin typeface="Cambria" pitchFamily="34" charset="0"/>
+                <a:ea typeface="Cambria" pitchFamily="34" charset="-122"/>
+                <a:cs typeface="Cambria" pitchFamily="34" charset="-120"/>
+              </a:rPr>
+              <a:t>4 in 5</a:t>
+            </a:r>
+            <a:endParaRPr lang="en-US" sz="3200" dirty="0"/>
+          </a:p>
+        </p:txBody>
+      </p:sp>
+      <p:sp>
+        <p:nvSpPr>
+          <p:cNvPr id="15" name="Text 13"/>
+          <p:cNvSpPr/>
+          <p:nvPr/>
+        </p:nvSpPr>
+        <p:spPr>
+          <a:xfrm>
+            <a:off x="6473952" y="2962656"/>
+            <a:ext cx="2103120" cy="777240"/>
+          </a:xfrm>
+          <a:prstGeom prst="rect">
+            <a:avLst/>
+          </a:prstGeom>
+          <a:noFill/>
+          <a:ln/>
+        </p:spPr>
+        <p:txBody>
+          <a:bodyPr wrap="square" lIns="0" tIns="0" rIns="0" bIns="0" rtlCol="0" anchor="t"/>
+          <a:lstStyle/>
+          <a:p>
+            <a:pPr indent="0" marL="0">
+              <a:lnSpc>
+                <a:spcPts val="1700"/>
+              </a:lnSpc>
+              <a:buNone/>
+            </a:pPr>
+            <a:r>
+              <a:rPr lang="en-US" sz="1300" dirty="0">
                 <a:solidFill>
                   <a:srgbClr val="1B2430"/>
                 </a:solidFill>
@@ -17205,22 +17380,22 @@
                 <a:ea typeface="Calibri" pitchFamily="34" charset="-122"/>
                 <a:cs typeface="Calibri" pitchFamily="34" charset="-120"/>
               </a:rPr>
-              <a:t>Sized</a:t>
-            </a:r>
-            <a:endParaRPr lang="en-US" sz="1350" dirty="0"/>
-          </a:p>
-        </p:txBody>
-      </p:sp>
-      <p:sp>
-        <p:nvSpPr>
-          <p:cNvPr id="15" name="Text 13"/>
-          <p:cNvSpPr/>
-          <p:nvPr/>
-        </p:nvSpPr>
-        <p:spPr>
-          <a:xfrm>
-            <a:off x="4389120" y="2724912"/>
-            <a:ext cx="1517904" cy="402336"/>
+              <a:t>need a day or more to trace a spike to its source</a:t>
+            </a:r>
+            <a:endParaRPr lang="en-US" sz="1300" dirty="0"/>
+          </a:p>
+        </p:txBody>
+      </p:sp>
+      <p:sp>
+        <p:nvSpPr>
+          <p:cNvPr id="16" name="Text 14"/>
+          <p:cNvSpPr/>
+          <p:nvPr/>
+        </p:nvSpPr>
+        <p:spPr>
+          <a:xfrm>
+            <a:off x="6473952" y="3712464"/>
+            <a:ext cx="2103120" cy="512064"/>
           </a:xfrm>
           <a:prstGeom prst="rect">
             <a:avLst/>
@@ -17232,7 +17407,7 @@
           <a:bodyPr wrap="square" lIns="0" tIns="0" rIns="0" bIns="0" rtlCol="0" anchor="t"/>
           <a:lstStyle/>
           <a:p>
-            <a:pPr algn="ctr" indent="0" marL="0">
+            <a:pPr indent="0" marL="0">
               <a:lnSpc>
                 <a:spcPts val="1400"/>
               </a:lnSpc>
@@ -17247,7 +17422,7 @@
                 <a:ea typeface="Calibri" pitchFamily="34" charset="-122"/>
                 <a:cs typeface="Calibri" pitchFamily="34" charset="-120"/>
               </a:rPr>
-              <a:t>what it is worth</a:t>
+              <a:t>Only about one in five manage it within hours.</a:t>
             </a:r>
             <a:endParaRPr lang="en-US" sz="1100" dirty="0"/>
           </a:p>
@@ -17255,38 +17430,18 @@
       </p:sp>
       <p:sp>
         <p:nvSpPr>
-          <p:cNvPr id="16" name="Shape 14"/>
-          <p:cNvSpPr/>
-          <p:nvPr/>
-        </p:nvSpPr>
-        <p:spPr>
-          <a:xfrm>
-            <a:off x="6016752" y="2688336"/>
-            <a:ext cx="137160" cy="146304"/>
-          </a:xfrm>
-          <a:prstGeom prst="rightArrow">
-            <a:avLst/>
-          </a:prstGeom>
-          <a:solidFill>
-            <a:srgbClr val="C3CBD5"/>
-          </a:solidFill>
-          <a:ln/>
-        </p:spPr>
-      </p:sp>
-      <p:sp>
-        <p:nvSpPr>
           <p:cNvPr id="17" name="Shape 15"/>
           <p:cNvSpPr/>
           <p:nvPr/>
         </p:nvSpPr>
         <p:spPr>
           <a:xfrm>
-            <a:off x="6172200" y="2286000"/>
-            <a:ext cx="1700784" cy="960120"/>
+            <a:off x="9052560" y="2121408"/>
+            <a:ext cx="2587752" cy="2194560"/>
           </a:xfrm>
           <a:prstGeom prst="roundRect">
             <a:avLst>
-              <a:gd name="adj" fmla="val 8571"/>
+              <a:gd name="adj" fmla="val 3750"/>
             </a:avLst>
           </a:prstGeom>
           <a:solidFill>
@@ -17303,24 +17458,66 @@
         </p:nvSpPr>
         <p:spPr>
           <a:xfrm>
-            <a:off x="6172200" y="2395728"/>
-            <a:ext cx="1700784" cy="329184"/>
-          </a:xfrm>
-          <a:prstGeom prst="rect">
-            <a:avLst/>
-          </a:prstGeom>
-          <a:noFill/>
-          <a:ln/>
-        </p:spPr>
-        <p:txBody>
-          <a:bodyPr wrap="square" lIns="0" tIns="0" rIns="0" bIns="0" rtlCol="0" anchor="ctr"/>
-          <a:lstStyle/>
-          <a:p>
-            <a:pPr algn="ctr" indent="0" marL="0">
-              <a:buNone/>
-            </a:pPr>
-            <a:r>
-              <a:rPr lang="en-US" sz="1350" b="1" dirty="0">
+            <a:off x="9308592" y="2286000"/>
+            <a:ext cx="2103120" cy="640080"/>
+          </a:xfrm>
+          <a:prstGeom prst="rect">
+            <a:avLst/>
+          </a:prstGeom>
+          <a:noFill/>
+          <a:ln/>
+        </p:spPr>
+        <p:txBody>
+          <a:bodyPr wrap="square" lIns="0" tIns="0" rIns="0" bIns="0" rtlCol="0" anchor="ctr"/>
+          <a:lstStyle/>
+          <a:p>
+            <a:pPr indent="0" marL="0">
+              <a:buNone/>
+            </a:pPr>
+            <a:r>
+              <a:rPr lang="en-US" sz="3200" b="1" dirty="0">
+                <a:solidFill>
+                  <a:srgbClr val="5C6675"/>
+                </a:solidFill>
+                <a:latin typeface="Cambria" pitchFamily="34" charset="0"/>
+                <a:ea typeface="Cambria" pitchFamily="34" charset="-122"/>
+                <a:cs typeface="Cambria" pitchFamily="34" charset="-120"/>
+              </a:rPr>
+              <a:t>26%</a:t>
+            </a:r>
+            <a:endParaRPr lang="en-US" sz="3200" dirty="0"/>
+          </a:p>
+        </p:txBody>
+      </p:sp>
+      <p:sp>
+        <p:nvSpPr>
+          <p:cNvPr id="19" name="Text 17"/>
+          <p:cNvSpPr/>
+          <p:nvPr/>
+        </p:nvSpPr>
+        <p:spPr>
+          <a:xfrm>
+            <a:off x="9308592" y="2962656"/>
+            <a:ext cx="2103120" cy="777240"/>
+          </a:xfrm>
+          <a:prstGeom prst="rect">
+            <a:avLst/>
+          </a:prstGeom>
+          <a:noFill/>
+          <a:ln/>
+        </p:spPr>
+        <p:txBody>
+          <a:bodyPr wrap="square" lIns="0" tIns="0" rIns="0" bIns="0" rtlCol="0" anchor="t"/>
+          <a:lstStyle/>
+          <a:p>
+            <a:pPr indent="0" marL="0">
+              <a:lnSpc>
+                <a:spcPts val="1700"/>
+              </a:lnSpc>
+              <a:buNone/>
+            </a:pPr>
+            <a:r>
+              <a:rPr lang="en-US" sz="1300" dirty="0">
                 <a:solidFill>
                   <a:srgbClr val="1B2430"/>
                 </a:solidFill>
@@ -17328,22 +17525,22 @@
                 <a:ea typeface="Calibri" pitchFamily="34" charset="-122"/>
                 <a:cs typeface="Calibri" pitchFamily="34" charset="-120"/>
               </a:rPr>
-              <a:t>Target date</a:t>
-            </a:r>
-            <a:endParaRPr lang="en-US" sz="1350" dirty="0"/>
-          </a:p>
-        </p:txBody>
-      </p:sp>
-      <p:sp>
-        <p:nvSpPr>
-          <p:cNvPr id="19" name="Text 17"/>
-          <p:cNvSpPr/>
-          <p:nvPr/>
-        </p:nvSpPr>
-        <p:spPr>
-          <a:xfrm>
-            <a:off x="6263640" y="2724912"/>
-            <a:ext cx="1517904" cy="402336"/>
+              <a:t>of AI spend estimated wasted</a:t>
+            </a:r>
+            <a:endParaRPr lang="en-US" sz="1300" dirty="0"/>
+          </a:p>
+        </p:txBody>
+      </p:sp>
+      <p:sp>
+        <p:nvSpPr>
+          <p:cNvPr id="20" name="Text 18"/>
+          <p:cNvSpPr/>
+          <p:nvPr/>
+        </p:nvSpPr>
+        <p:spPr>
+          <a:xfrm>
+            <a:off x="9308592" y="3712464"/>
+            <a:ext cx="2103120" cy="512064"/>
           </a:xfrm>
           <a:prstGeom prst="rect">
             <a:avLst/>
@@ -17355,7 +17552,7 @@
           <a:bodyPr wrap="square" lIns="0" tIns="0" rIns="0" bIns="0" rtlCol="0" anchor="t"/>
           <a:lstStyle/>
           <a:p>
-            <a:pPr algn="ctr" indent="0" marL="0">
+            <a:pPr indent="0" marL="0">
               <a:lnSpc>
                 <a:spcPts val="1400"/>
               </a:lnSpc>
@@ -17370,7 +17567,7 @@
                 <a:ea typeface="Calibri" pitchFamily="34" charset="-122"/>
                 <a:cs typeface="Calibri" pitchFamily="34" charset="-120"/>
               </a:rPr>
-              <a:t>when, not someday</a:t>
+              <a:t>Respondents' own estimate, not a measurement.</a:t>
             </a:r>
             <a:endParaRPr lang="en-US" sz="1100" dirty="0"/>
           </a:p>
@@ -17378,524 +17575,18 @@
       </p:sp>
       <p:sp>
         <p:nvSpPr>
-          <p:cNvPr id="20" name="Shape 18"/>
-          <p:cNvSpPr/>
-          <p:nvPr/>
-        </p:nvSpPr>
-        <p:spPr>
-          <a:xfrm>
-            <a:off x="7891272" y="2688336"/>
-            <a:ext cx="137160" cy="146304"/>
-          </a:xfrm>
-          <a:prstGeom prst="rightArrow">
-            <a:avLst/>
-          </a:prstGeom>
-          <a:solidFill>
-            <a:srgbClr val="C3CBD5"/>
-          </a:solidFill>
-          <a:ln/>
-        </p:spPr>
-      </p:sp>
-      <p:sp>
-        <p:nvSpPr>
           <p:cNvPr id="21" name="Shape 19"/>
           <p:cNvSpPr/>
           <p:nvPr/>
         </p:nvSpPr>
         <p:spPr>
           <a:xfrm>
-            <a:off x="8046720" y="2286000"/>
-            <a:ext cx="1700784" cy="960120"/>
+            <a:off x="548640" y="4572000"/>
+            <a:ext cx="6675120" cy="1481328"/>
           </a:xfrm>
           <a:prstGeom prst="roundRect">
             <a:avLst>
-              <a:gd name="adj" fmla="val 8571"/>
-            </a:avLst>
-          </a:prstGeom>
-          <a:solidFill>
-            <a:srgbClr val="F1F3F6"/>
-          </a:solidFill>
-          <a:ln/>
-        </p:spPr>
-      </p:sp>
-      <p:sp>
-        <p:nvSpPr>
-          <p:cNvPr id="22" name="Text 20"/>
-          <p:cNvSpPr/>
-          <p:nvPr/>
-        </p:nvSpPr>
-        <p:spPr>
-          <a:xfrm>
-            <a:off x="8046720" y="2395728"/>
-            <a:ext cx="1700784" cy="329184"/>
-          </a:xfrm>
-          <a:prstGeom prst="rect">
-            <a:avLst/>
-          </a:prstGeom>
-          <a:noFill/>
-          <a:ln/>
-        </p:spPr>
-        <p:txBody>
-          <a:bodyPr wrap="square" lIns="0" tIns="0" rIns="0" bIns="0" rtlCol="0" anchor="ctr"/>
-          <a:lstStyle/>
-          <a:p>
-            <a:pPr algn="ctr" indent="0" marL="0">
-              <a:buNone/>
-            </a:pPr>
-            <a:r>
-              <a:rPr lang="en-US" sz="1350" b="1" dirty="0">
-                <a:solidFill>
-                  <a:srgbClr val="1B2430"/>
-                </a:solidFill>
-                <a:latin typeface="Calibri" pitchFamily="34" charset="0"/>
-                <a:ea typeface="Calibri" pitchFamily="34" charset="-122"/>
-                <a:cs typeface="Calibri" pitchFamily="34" charset="-120"/>
-              </a:rPr>
-              <a:t>Reviewed</a:t>
-            </a:r>
-            <a:endParaRPr lang="en-US" sz="1350" dirty="0"/>
-          </a:p>
-        </p:txBody>
-      </p:sp>
-      <p:sp>
-        <p:nvSpPr>
-          <p:cNvPr id="23" name="Text 21"/>
-          <p:cNvSpPr/>
-          <p:nvPr/>
-        </p:nvSpPr>
-        <p:spPr>
-          <a:xfrm>
-            <a:off x="8138160" y="2724912"/>
-            <a:ext cx="1517904" cy="402336"/>
-          </a:xfrm>
-          <a:prstGeom prst="rect">
-            <a:avLst/>
-          </a:prstGeom>
-          <a:noFill/>
-          <a:ln/>
-        </p:spPr>
-        <p:txBody>
-          <a:bodyPr wrap="square" lIns="0" tIns="0" rIns="0" bIns="0" rtlCol="0" anchor="t"/>
-          <a:lstStyle/>
-          <a:p>
-            <a:pPr algn="ctr" indent="0" marL="0">
-              <a:lnSpc>
-                <a:spcPts val="1400"/>
-              </a:lnSpc>
-              <a:buNone/>
-            </a:pPr>
-            <a:r>
-              <a:rPr lang="en-US" sz="1100" dirty="0">
-                <a:solidFill>
-                  <a:srgbClr val="5C6675"/>
-                </a:solidFill>
-                <a:latin typeface="Calibri" pitchFamily="34" charset="0"/>
-                <a:ea typeface="Calibri" pitchFamily="34" charset="-122"/>
-                <a:cs typeface="Calibri" pitchFamily="34" charset="-120"/>
-              </a:rPr>
-              <a:t>did it happen</a:t>
-            </a:r>
-            <a:endParaRPr lang="en-US" sz="1100" dirty="0"/>
-          </a:p>
-        </p:txBody>
-      </p:sp>
-      <p:sp>
-        <p:nvSpPr>
-          <p:cNvPr id="24" name="Shape 22"/>
-          <p:cNvSpPr/>
-          <p:nvPr/>
-        </p:nvSpPr>
-        <p:spPr>
-          <a:xfrm>
-            <a:off x="9765792" y="2688336"/>
-            <a:ext cx="137160" cy="146304"/>
-          </a:xfrm>
-          <a:prstGeom prst="rightArrow">
-            <a:avLst/>
-          </a:prstGeom>
-          <a:solidFill>
-            <a:srgbClr val="C3CBD5"/>
-          </a:solidFill>
-          <a:ln/>
-        </p:spPr>
-      </p:sp>
-      <p:sp>
-        <p:nvSpPr>
-          <p:cNvPr id="25" name="Shape 23"/>
-          <p:cNvSpPr/>
-          <p:nvPr/>
-        </p:nvSpPr>
-        <p:spPr>
-          <a:xfrm>
-            <a:off x="9921240" y="2286000"/>
-            <a:ext cx="1700784" cy="960120"/>
-          </a:xfrm>
-          <a:prstGeom prst="roundRect">
-            <a:avLst>
-              <a:gd name="adj" fmla="val 8571"/>
-            </a:avLst>
-          </a:prstGeom>
-          <a:solidFill>
-            <a:srgbClr val="1F2936"/>
-          </a:solidFill>
-          <a:ln/>
-        </p:spPr>
-      </p:sp>
-      <p:sp>
-        <p:nvSpPr>
-          <p:cNvPr id="26" name="Text 24"/>
-          <p:cNvSpPr/>
-          <p:nvPr/>
-        </p:nvSpPr>
-        <p:spPr>
-          <a:xfrm>
-            <a:off x="9921240" y="2395728"/>
-            <a:ext cx="1700784" cy="329184"/>
-          </a:xfrm>
-          <a:prstGeom prst="rect">
-            <a:avLst/>
-          </a:prstGeom>
-          <a:noFill/>
-          <a:ln/>
-        </p:spPr>
-        <p:txBody>
-          <a:bodyPr wrap="square" lIns="0" tIns="0" rIns="0" bIns="0" rtlCol="0" anchor="ctr"/>
-          <a:lstStyle/>
-          <a:p>
-            <a:pPr algn="ctr" indent="0" marL="0">
-              <a:buNone/>
-            </a:pPr>
-            <a:r>
-              <a:rPr lang="en-US" sz="1350" b="1" dirty="0">
-                <a:solidFill>
-                  <a:srgbClr val="E39B2C"/>
-                </a:solidFill>
-                <a:latin typeface="Calibri" pitchFamily="34" charset="0"/>
-                <a:ea typeface="Calibri" pitchFamily="34" charset="-122"/>
-                <a:cs typeface="Calibri" pitchFamily="34" charset="-120"/>
-              </a:rPr>
-              <a:t>Realized</a:t>
-            </a:r>
-            <a:endParaRPr lang="en-US" sz="1350" dirty="0"/>
-          </a:p>
-        </p:txBody>
-      </p:sp>
-      <p:sp>
-        <p:nvSpPr>
-          <p:cNvPr id="27" name="Text 25"/>
-          <p:cNvSpPr/>
-          <p:nvPr/>
-        </p:nvSpPr>
-        <p:spPr>
-          <a:xfrm>
-            <a:off x="10012680" y="2724912"/>
-            <a:ext cx="1517904" cy="402336"/>
-          </a:xfrm>
-          <a:prstGeom prst="rect">
-            <a:avLst/>
-          </a:prstGeom>
-          <a:noFill/>
-          <a:ln/>
-        </p:spPr>
-        <p:txBody>
-          <a:bodyPr wrap="square" lIns="0" tIns="0" rIns="0" bIns="0" rtlCol="0" anchor="t"/>
-          <a:lstStyle/>
-          <a:p>
-            <a:pPr algn="ctr" indent="0" marL="0">
-              <a:lnSpc>
-                <a:spcPts val="1400"/>
-              </a:lnSpc>
-              <a:buNone/>
-            </a:pPr>
-            <a:r>
-              <a:rPr lang="en-US" sz="1100" dirty="0">
-                <a:solidFill>
-                  <a:srgbClr val="9EABBA"/>
-                </a:solidFill>
-                <a:latin typeface="Calibri" pitchFamily="34" charset="0"/>
-                <a:ea typeface="Calibri" pitchFamily="34" charset="-122"/>
-                <a:cs typeface="Calibri" pitchFamily="34" charset="-120"/>
-              </a:rPr>
-              <a:t>measured on the bill</a:t>
-            </a:r>
-            <a:endParaRPr lang="en-US" sz="1100" dirty="0"/>
-          </a:p>
-        </p:txBody>
-      </p:sp>
-      <p:sp>
-        <p:nvSpPr>
-          <p:cNvPr id="28" name="Text 26"/>
-          <p:cNvSpPr/>
-          <p:nvPr/>
-        </p:nvSpPr>
-        <p:spPr>
-          <a:xfrm>
-            <a:off x="548640" y="3364992"/>
-            <a:ext cx="11091672" cy="310896"/>
-          </a:xfrm>
-          <a:prstGeom prst="rect">
-            <a:avLst/>
-          </a:prstGeom>
-          <a:noFill/>
-          <a:ln/>
-        </p:spPr>
-        <p:txBody>
-          <a:bodyPr wrap="square" lIns="0" tIns="0" rIns="0" bIns="0" rtlCol="0" anchor="ctr"/>
-          <a:lstStyle/>
-          <a:p>
-            <a:pPr indent="0" marL="0">
-              <a:buNone/>
-            </a:pPr>
-            <a:r>
-              <a:rPr lang="en-US" sz="1250" dirty="0">
-                <a:solidFill>
-                  <a:srgbClr val="5C6675"/>
-                </a:solidFill>
-                <a:latin typeface="Calibri" pitchFamily="34" charset="0"/>
-                <a:ea typeface="Calibri" pitchFamily="34" charset="-122"/>
-                <a:cs typeface="Calibri" pitchFamily="34" charset="-120"/>
-              </a:rPr>
-              <a:t>A recommendation without an owner and a date is an opinion.</a:t>
-            </a:r>
-            <a:endParaRPr lang="en-US" sz="1250" dirty="0"/>
-          </a:p>
-        </p:txBody>
-      </p:sp>
-      <p:sp>
-        <p:nvSpPr>
-          <p:cNvPr id="29" name="Shape 27"/>
-          <p:cNvSpPr/>
-          <p:nvPr/>
-        </p:nvSpPr>
-        <p:spPr>
-          <a:xfrm>
-            <a:off x="548640" y="3913632"/>
-            <a:ext cx="5394960" cy="2240280"/>
-          </a:xfrm>
-          <a:prstGeom prst="roundRect">
-            <a:avLst>
-              <a:gd name="adj" fmla="val 3673"/>
-            </a:avLst>
-          </a:prstGeom>
-          <a:solidFill>
-            <a:srgbClr val="F1F3F6"/>
-          </a:solidFill>
-          <a:ln/>
-        </p:spPr>
-      </p:sp>
-      <p:sp>
-        <p:nvSpPr>
-          <p:cNvPr id="30" name="Text 28"/>
-          <p:cNvSpPr/>
-          <p:nvPr/>
-        </p:nvSpPr>
-        <p:spPr>
-          <a:xfrm>
-            <a:off x="859536" y="4078224"/>
-            <a:ext cx="4572000" cy="292608"/>
-          </a:xfrm>
-          <a:prstGeom prst="rect">
-            <a:avLst/>
-          </a:prstGeom>
-          <a:noFill/>
-          <a:ln/>
-        </p:spPr>
-        <p:txBody>
-          <a:bodyPr wrap="square" lIns="0" tIns="0" rIns="0" bIns="0" rtlCol="0" anchor="ctr"/>
-          <a:lstStyle/>
-          <a:p>
-            <a:pPr indent="0" marL="0">
-              <a:buNone/>
-            </a:pPr>
-            <a:r>
-              <a:rPr lang="en-US" sz="1200" b="1" spc="180" kern="0" dirty="0">
-                <a:solidFill>
-                  <a:srgbClr val="5C6675"/>
-                </a:solidFill>
-                <a:latin typeface="Calibri" pitchFamily="34" charset="0"/>
-                <a:ea typeface="Calibri" pitchFamily="34" charset="-122"/>
-                <a:cs typeface="Calibri" pitchFamily="34" charset="-120"/>
-              </a:rPr>
-              <a:t>The difference that matters</a:t>
-            </a:r>
-            <a:endParaRPr lang="en-US" sz="1200" dirty="0"/>
-          </a:p>
-        </p:txBody>
-      </p:sp>
-      <p:sp>
-        <p:nvSpPr>
-          <p:cNvPr id="31" name="Text 29"/>
-          <p:cNvSpPr/>
-          <p:nvPr/>
-        </p:nvSpPr>
-        <p:spPr>
-          <a:xfrm>
-            <a:off x="859536" y="4425696"/>
-            <a:ext cx="4773168" cy="530352"/>
-          </a:xfrm>
-          <a:prstGeom prst="rect">
-            <a:avLst/>
-          </a:prstGeom>
-          <a:noFill/>
-          <a:ln/>
-        </p:spPr>
-        <p:txBody>
-          <a:bodyPr wrap="square" lIns="0" tIns="0" rIns="0" bIns="0" rtlCol="0" anchor="t"/>
-          <a:lstStyle/>
-          <a:p>
-            <a:pPr indent="0" marL="0">
-              <a:lnSpc>
-                <a:spcPts val="1900"/>
-              </a:lnSpc>
-              <a:buNone/>
-            </a:pPr>
-            <a:r>
-              <a:rPr lang="en-US" sz="1400" b="1" dirty="0">
-                <a:solidFill>
-                  <a:srgbClr val="5C6675"/>
-                </a:solidFill>
-                <a:latin typeface="Calibri" pitchFamily="34" charset="0"/>
-                <a:ea typeface="Calibri" pitchFamily="34" charset="-122"/>
-                <a:cs typeface="Calibri" pitchFamily="34" charset="-120"/>
-              </a:rPr>
-              <a:t>A report  </a:t>
-            </a:r>
-            <a:pPr indent="0" marL="0">
-              <a:lnSpc>
-                <a:spcPts val="1900"/>
-              </a:lnSpc>
-              <a:buNone/>
-            </a:pPr>
-            <a:r>
-              <a:rPr lang="en-US" sz="1400" dirty="0">
-                <a:solidFill>
-                  <a:srgbClr val="5C6675"/>
-                </a:solidFill>
-                <a:latin typeface="Calibri" pitchFamily="34" charset="0"/>
-                <a:ea typeface="Calibri" pitchFamily="34" charset="-122"/>
-                <a:cs typeface="Calibri" pitchFamily="34" charset="-120"/>
-              </a:rPr>
-              <a:t>is finished when the number is right.</a:t>
-            </a:r>
-            <a:endParaRPr lang="en-US" sz="1400" dirty="0"/>
-          </a:p>
-        </p:txBody>
-      </p:sp>
-      <p:sp>
-        <p:nvSpPr>
-          <p:cNvPr id="32" name="Text 30"/>
-          <p:cNvSpPr/>
-          <p:nvPr/>
-        </p:nvSpPr>
-        <p:spPr>
-          <a:xfrm>
-            <a:off x="859536" y="4974336"/>
-            <a:ext cx="4773168" cy="530352"/>
-          </a:xfrm>
-          <a:prstGeom prst="rect">
-            <a:avLst/>
-          </a:prstGeom>
-          <a:noFill/>
-          <a:ln/>
-        </p:spPr>
-        <p:txBody>
-          <a:bodyPr wrap="square" lIns="0" tIns="0" rIns="0" bIns="0" rtlCol="0" anchor="t"/>
-          <a:lstStyle/>
-          <a:p>
-            <a:pPr indent="0" marL="0">
-              <a:lnSpc>
-                <a:spcPts val="1900"/>
-              </a:lnSpc>
-              <a:buNone/>
-            </a:pPr>
-            <a:r>
-              <a:rPr lang="en-US" sz="1400" b="1" dirty="0">
-                <a:solidFill>
-                  <a:srgbClr val="1B2430"/>
-                </a:solidFill>
-                <a:latin typeface="Calibri" pitchFamily="34" charset="0"/>
-                <a:ea typeface="Calibri" pitchFamily="34" charset="-122"/>
-                <a:cs typeface="Calibri" pitchFamily="34" charset="-120"/>
-              </a:rPr>
-              <a:t>A product  </a:t>
-            </a:r>
-            <a:pPr indent="0" marL="0">
-              <a:lnSpc>
-                <a:spcPts val="1900"/>
-              </a:lnSpc>
-              <a:buNone/>
-            </a:pPr>
-            <a:r>
-              <a:rPr lang="en-US" sz="1400" dirty="0">
-                <a:solidFill>
-                  <a:srgbClr val="5C6675"/>
-                </a:solidFill>
-                <a:latin typeface="Calibri" pitchFamily="34" charset="0"/>
-                <a:ea typeface="Calibri" pitchFamily="34" charset="-122"/>
-                <a:cs typeface="Calibri" pitchFamily="34" charset="-120"/>
-              </a:rPr>
-              <a:t>is finished when someone behaves differently.</a:t>
-            </a:r>
-            <a:endParaRPr lang="en-US" sz="1400" dirty="0"/>
-          </a:p>
-        </p:txBody>
-      </p:sp>
-      <p:sp>
-        <p:nvSpPr>
-          <p:cNvPr id="33" name="Text 31"/>
-          <p:cNvSpPr/>
-          <p:nvPr/>
-        </p:nvSpPr>
-        <p:spPr>
-          <a:xfrm>
-            <a:off x="859536" y="5522976"/>
-            <a:ext cx="4773168" cy="457200"/>
-          </a:xfrm>
-          <a:prstGeom prst="rect">
-            <a:avLst/>
-          </a:prstGeom>
-          <a:noFill/>
-          <a:ln/>
-        </p:spPr>
-        <p:txBody>
-          <a:bodyPr wrap="square" lIns="0" tIns="0" rIns="0" bIns="0" rtlCol="0" anchor="t"/>
-          <a:lstStyle/>
-          <a:p>
-            <a:pPr indent="0" marL="0">
-              <a:lnSpc>
-                <a:spcPts val="1600"/>
-              </a:lnSpc>
-              <a:buNone/>
-            </a:pPr>
-            <a:r>
-              <a:rPr lang="en-US" sz="1250" dirty="0">
-                <a:solidFill>
-                  <a:srgbClr val="1B2430"/>
-                </a:solidFill>
-                <a:latin typeface="Calibri" pitchFamily="34" charset="0"/>
-                <a:ea typeface="Calibri" pitchFamily="34" charset="-122"/>
-                <a:cs typeface="Calibri" pitchFamily="34" charset="-120"/>
-              </a:rPr>
-              <a:t>Build for the engineer who wants the three things worth fixing this sprint — the finance report improves as a by-product.</a:t>
-            </a:r>
-            <a:endParaRPr lang="en-US" sz="1250" dirty="0"/>
-          </a:p>
-        </p:txBody>
-      </p:sp>
-      <p:sp>
-        <p:nvSpPr>
-          <p:cNvPr id="34" name="Shape 32"/>
-          <p:cNvSpPr/>
-          <p:nvPr/>
-        </p:nvSpPr>
-        <p:spPr>
-          <a:xfrm>
-            <a:off x="6245352" y="3913632"/>
-            <a:ext cx="5394960" cy="2240280"/>
-          </a:xfrm>
-          <a:prstGeom prst="roundRect">
-            <a:avLst>
-              <a:gd name="adj" fmla="val 3673"/>
+              <a:gd name="adj" fmla="val 5556"/>
             </a:avLst>
           </a:prstGeom>
           <a:solidFill>
@@ -17913,13 +17604,13 @@
       </p:sp>
       <p:sp>
         <p:nvSpPr>
-          <p:cNvPr id="35" name="Text 33"/>
-          <p:cNvSpPr/>
-          <p:nvPr/>
-        </p:nvSpPr>
-        <p:spPr>
-          <a:xfrm>
-            <a:off x="6556248" y="4078224"/>
+          <p:cNvPr id="22" name="Text 20"/>
+          <p:cNvSpPr/>
+          <p:nvPr/>
+        </p:nvSpPr>
+        <p:spPr>
+          <a:xfrm>
+            <a:off x="859536" y="4736592"/>
             <a:ext cx="4572000" cy="292608"/>
           </a:xfrm>
           <a:prstGeom prst="rect">
@@ -17944,7 +17635,7 @@
                 <a:ea typeface="Calibri" pitchFamily="34" charset="-122"/>
                 <a:cs typeface="Calibri" pitchFamily="34" charset="-120"/>
               </a:rPr>
-              <a:t>Measure adoption, not accuracy</a:t>
+              <a:t>The number to manage</a:t>
             </a:r>
             <a:endParaRPr lang="en-US" sz="1200" dirty="0"/>
           </a:p>
@@ -17952,34 +17643,14 @@
       </p:sp>
       <p:sp>
         <p:nvSpPr>
-          <p:cNvPr id="36" name="Shape 34"/>
-          <p:cNvSpPr/>
-          <p:nvPr/>
-        </p:nvSpPr>
-        <p:spPr>
-          <a:xfrm>
-            <a:off x="6574536" y="4590288"/>
-            <a:ext cx="100584" cy="100584"/>
-          </a:xfrm>
-          <a:prstGeom prst="ellipse">
-            <a:avLst/>
-          </a:prstGeom>
-          <a:solidFill>
-            <a:srgbClr val="E39B2C"/>
-          </a:solidFill>
-          <a:ln/>
-        </p:spPr>
-      </p:sp>
-      <p:sp>
-        <p:nvSpPr>
-          <p:cNvPr id="37" name="Text 35"/>
-          <p:cNvSpPr/>
-          <p:nvPr/>
-        </p:nvSpPr>
-        <p:spPr>
-          <a:xfrm>
-            <a:off x="6812280" y="4443984"/>
-            <a:ext cx="4553712" cy="457200"/>
+          <p:cNvPr id="23" name="Text 21"/>
+          <p:cNvSpPr/>
+          <p:nvPr/>
+        </p:nvSpPr>
+        <p:spPr>
+          <a:xfrm>
+            <a:off x="859536" y="5065776"/>
+            <a:ext cx="6053328" cy="877824"/>
           </a:xfrm>
           <a:prstGeom prst="rect">
             <a:avLst/>
@@ -17993,12 +17664,12 @@
           <a:p>
             <a:pPr indent="0" marL="0">
               <a:lnSpc>
-                <a:spcPts val="1600"/>
+                <a:spcPts val="1900"/>
               </a:lnSpc>
               <a:buNone/>
             </a:pPr>
             <a:r>
-              <a:rPr lang="en-US" sz="1250" b="1" dirty="0">
+              <a:rPr lang="en-US" sz="1350" b="1" dirty="0">
                 <a:solidFill>
                   <a:srgbClr val="FFFFFF"/>
                 </a:solidFill>
@@ -18006,232 +17677,168 @@
                 <a:ea typeface="Calibri" pitchFamily="34" charset="-122"/>
                 <a:cs typeface="Calibri" pitchFamily="34" charset="-120"/>
               </a:rPr>
-              <a:t>Findings with an owner and a date</a:t>
+              <a:t>Time to attribute a spike. </a:t>
+            </a:r>
+            <a:pPr indent="0" marL="0">
+              <a:lnSpc>
+                <a:spcPts val="1900"/>
+              </a:lnSpc>
+              <a:buNone/>
+            </a:pPr>
+            <a:r>
+              <a:rPr lang="en-US" sz="1350" dirty="0">
+                <a:solidFill>
+                  <a:srgbClr val="9EABBA"/>
+                </a:solidFill>
+                <a:latin typeface="Calibri" pitchFamily="34" charset="0"/>
+                <a:ea typeface="Calibri" pitchFamily="34" charset="-122"/>
+                <a:cs typeface="Calibri" pitchFamily="34" charset="-120"/>
+              </a:rPr>
+              <a:t>It turns an argument about governance into a number we can move — days today, hours as the target — and it is the one metric a runaway AI workload is measured against.</a:t>
+            </a:r>
+            <a:endParaRPr lang="en-US" sz="1350" dirty="0"/>
+          </a:p>
+        </p:txBody>
+      </p:sp>
+      <p:sp>
+        <p:nvSpPr>
+          <p:cNvPr id="24" name="Shape 22"/>
+          <p:cNvSpPr/>
+          <p:nvPr/>
+        </p:nvSpPr>
+        <p:spPr>
+          <a:xfrm>
+            <a:off x="7525512" y="4572000"/>
+            <a:ext cx="4114800" cy="1481328"/>
+          </a:xfrm>
+          <a:prstGeom prst="roundRect">
+            <a:avLst>
+              <a:gd name="adj" fmla="val 5556"/>
+            </a:avLst>
+          </a:prstGeom>
+          <a:solidFill>
+            <a:srgbClr val="FBEFD8"/>
+          </a:solidFill>
+          <a:ln/>
+        </p:spPr>
+      </p:sp>
+      <p:sp>
+        <p:nvSpPr>
+          <p:cNvPr id="25" name="Text 23"/>
+          <p:cNvSpPr/>
+          <p:nvPr/>
+        </p:nvSpPr>
+        <p:spPr>
+          <a:xfrm>
+            <a:off x="7836408" y="4736592"/>
+            <a:ext cx="3657600" cy="292608"/>
+          </a:xfrm>
+          <a:prstGeom prst="rect">
+            <a:avLst/>
+          </a:prstGeom>
+          <a:noFill/>
+          <a:ln/>
+        </p:spPr>
+        <p:txBody>
+          <a:bodyPr wrap="square" lIns="0" tIns="0" rIns="0" bIns="0" rtlCol="0" anchor="ctr"/>
+          <a:lstStyle/>
+          <a:p>
+            <a:pPr indent="0" marL="0">
+              <a:buNone/>
+            </a:pPr>
+            <a:r>
+              <a:rPr lang="en-US" sz="1200" b="1" spc="180" kern="0" dirty="0">
+                <a:solidFill>
+                  <a:srgbClr val="6B4A0E"/>
+                </a:solidFill>
+                <a:latin typeface="Calibri" pitchFamily="34" charset="0"/>
+                <a:ea typeface="Calibri" pitchFamily="34" charset="-122"/>
+                <a:cs typeface="Calibri" pitchFamily="34" charset="-120"/>
+              </a:rPr>
+              <a:t>Why a rollup will not do it</a:t>
+            </a:r>
+            <a:endParaRPr lang="en-US" sz="1200" dirty="0"/>
+          </a:p>
+        </p:txBody>
+      </p:sp>
+      <p:sp>
+        <p:nvSpPr>
+          <p:cNvPr id="26" name="Text 24"/>
+          <p:cNvSpPr/>
+          <p:nvPr/>
+        </p:nvSpPr>
+        <p:spPr>
+          <a:xfrm>
+            <a:off x="7836408" y="5065776"/>
+            <a:ext cx="3529584" cy="877824"/>
+          </a:xfrm>
+          <a:prstGeom prst="rect">
+            <a:avLst/>
+          </a:prstGeom>
+          <a:noFill/>
+          <a:ln/>
+        </p:spPr>
+        <p:txBody>
+          <a:bodyPr wrap="square" lIns="0" tIns="0" rIns="0" bIns="0" rtlCol="0" anchor="t"/>
+          <a:lstStyle/>
+          <a:p>
+            <a:pPr indent="0" marL="0">
+              <a:lnSpc>
+                <a:spcPts val="1700"/>
+              </a:lnSpc>
+              <a:buNone/>
+            </a:pPr>
+            <a:r>
+              <a:rPr lang="en-US" sz="1250" dirty="0">
+                <a:solidFill>
+                  <a:srgbClr val="6B4A0E"/>
+                </a:solidFill>
+                <a:latin typeface="Calibri" pitchFamily="34" charset="0"/>
+                <a:ea typeface="Calibri" pitchFamily="34" charset="-122"/>
+                <a:cs typeface="Calibri" pitchFamily="34" charset="-120"/>
+              </a:rPr>
+              <a:t>AI waste hides in prompt design, model choice and retry logic. A monthly bill by resource cannot name the caller — that needs per-consumer token attribution.</a:t>
             </a:r>
             <a:endParaRPr lang="en-US" sz="1250" dirty="0"/>
           </a:p>
-          <a:p>
-            <a:pPr indent="0" marL="0">
-              <a:lnSpc>
-                <a:spcPts val="1600"/>
-              </a:lnSpc>
-              <a:buNone/>
-            </a:pPr>
-            <a:r>
-              <a:rPr lang="en-US" sz="1250" dirty="0">
-                <a:solidFill>
-                  <a:srgbClr val="9EABBA"/>
-                </a:solidFill>
-                <a:latin typeface="Calibri" pitchFamily="34" charset="0"/>
-                <a:ea typeface="Calibri" pitchFamily="34" charset="-122"/>
-                <a:cs typeface="Calibri" pitchFamily="34" charset="-120"/>
-              </a:rPr>
-              <a:t>The share that became work.</a:t>
-            </a:r>
-            <a:endParaRPr lang="en-US" sz="1250" dirty="0"/>
-          </a:p>
-        </p:txBody>
-      </p:sp>
-      <p:sp>
-        <p:nvSpPr>
-          <p:cNvPr id="38" name="Shape 36"/>
-          <p:cNvSpPr/>
-          <p:nvPr/>
-        </p:nvSpPr>
-        <p:spPr>
-          <a:xfrm>
-            <a:off x="6574536" y="5102352"/>
-            <a:ext cx="100584" cy="100584"/>
-          </a:xfrm>
-          <a:prstGeom prst="ellipse">
-            <a:avLst/>
-          </a:prstGeom>
-          <a:solidFill>
-            <a:srgbClr val="E39B2C"/>
-          </a:solidFill>
-          <a:ln/>
-        </p:spPr>
-      </p:sp>
-      <p:sp>
-        <p:nvSpPr>
-          <p:cNvPr id="39" name="Text 37"/>
-          <p:cNvSpPr/>
-          <p:nvPr/>
-        </p:nvSpPr>
-        <p:spPr>
-          <a:xfrm>
-            <a:off x="6812280" y="4956048"/>
-            <a:ext cx="4553712" cy="457200"/>
-          </a:xfrm>
-          <a:prstGeom prst="rect">
-            <a:avLst/>
-          </a:prstGeom>
-          <a:noFill/>
-          <a:ln/>
-        </p:spPr>
-        <p:txBody>
-          <a:bodyPr wrap="square" lIns="0" tIns="0" rIns="0" bIns="0" rtlCol="0" anchor="t"/>
-          <a:lstStyle/>
-          <a:p>
-            <a:pPr indent="0" marL="0">
-              <a:lnSpc>
-                <a:spcPts val="1600"/>
-              </a:lnSpc>
-              <a:buNone/>
-            </a:pPr>
-            <a:r>
-              <a:rPr lang="en-US" sz="1250" b="1" dirty="0">
-                <a:solidFill>
-                  <a:srgbClr val="FFFFFF"/>
-                </a:solidFill>
-                <a:latin typeface="Calibri" pitchFamily="34" charset="0"/>
-                <a:ea typeface="Calibri" pitchFamily="34" charset="-122"/>
-                <a:cs typeface="Calibri" pitchFamily="34" charset="-120"/>
-              </a:rPr>
-              <a:t>Realized against identified saving</a:t>
-            </a:r>
-            <a:endParaRPr lang="en-US" sz="1250" dirty="0"/>
-          </a:p>
-          <a:p>
-            <a:pPr indent="0" marL="0">
-              <a:lnSpc>
-                <a:spcPts val="1600"/>
-              </a:lnSpc>
-              <a:buNone/>
-            </a:pPr>
-            <a:r>
-              <a:rPr lang="en-US" sz="1250" dirty="0">
-                <a:solidFill>
-                  <a:srgbClr val="9EABBA"/>
-                </a:solidFill>
-                <a:latin typeface="Calibri" pitchFamily="34" charset="0"/>
-                <a:ea typeface="Calibri" pitchFamily="34" charset="-122"/>
-                <a:cs typeface="Calibri" pitchFamily="34" charset="-120"/>
-              </a:rPr>
-              <a:t>Only the first reaches an invoice.</a:t>
-            </a:r>
-            <a:endParaRPr lang="en-US" sz="1250" dirty="0"/>
-          </a:p>
-        </p:txBody>
-      </p:sp>
-      <p:sp>
-        <p:nvSpPr>
-          <p:cNvPr id="40" name="Shape 38"/>
-          <p:cNvSpPr/>
-          <p:nvPr/>
-        </p:nvSpPr>
-        <p:spPr>
-          <a:xfrm>
-            <a:off x="6574536" y="5614416"/>
-            <a:ext cx="100584" cy="100584"/>
-          </a:xfrm>
-          <a:prstGeom prst="ellipse">
-            <a:avLst/>
-          </a:prstGeom>
-          <a:solidFill>
-            <a:srgbClr val="E39B2C"/>
-          </a:solidFill>
-          <a:ln/>
-        </p:spPr>
-      </p:sp>
-      <p:sp>
-        <p:nvSpPr>
-          <p:cNvPr id="41" name="Text 39"/>
-          <p:cNvSpPr/>
-          <p:nvPr/>
-        </p:nvSpPr>
-        <p:spPr>
-          <a:xfrm>
-            <a:off x="6812280" y="5468112"/>
-            <a:ext cx="4553712" cy="457200"/>
-          </a:xfrm>
-          <a:prstGeom prst="rect">
-            <a:avLst/>
-          </a:prstGeom>
-          <a:noFill/>
-          <a:ln/>
-        </p:spPr>
-        <p:txBody>
-          <a:bodyPr wrap="square" lIns="0" tIns="0" rIns="0" bIns="0" rtlCol="0" anchor="t"/>
-          <a:lstStyle/>
-          <a:p>
-            <a:pPr indent="0" marL="0">
-              <a:lnSpc>
-                <a:spcPts val="1600"/>
-              </a:lnSpc>
-              <a:buNone/>
-            </a:pPr>
-            <a:r>
-              <a:rPr lang="en-US" sz="1250" b="1" dirty="0">
-                <a:solidFill>
-                  <a:srgbClr val="FFFFFF"/>
-                </a:solidFill>
-                <a:latin typeface="Calibri" pitchFamily="34" charset="0"/>
-                <a:ea typeface="Calibri" pitchFamily="34" charset="-122"/>
-                <a:cs typeface="Calibri" pitchFamily="34" charset="-120"/>
-              </a:rPr>
-              <a:t>Time from finding to owner</a:t>
-            </a:r>
-            <a:endParaRPr lang="en-US" sz="1250" dirty="0"/>
-          </a:p>
-          <a:p>
-            <a:pPr indent="0" marL="0">
-              <a:lnSpc>
-                <a:spcPts val="1600"/>
-              </a:lnSpc>
-              <a:buNone/>
-            </a:pPr>
-            <a:r>
-              <a:rPr lang="en-US" sz="1250" dirty="0">
-                <a:solidFill>
-                  <a:srgbClr val="9EABBA"/>
-                </a:solidFill>
-                <a:latin typeface="Calibri" pitchFamily="34" charset="0"/>
-                <a:ea typeface="Calibri" pitchFamily="34" charset="-122"/>
-                <a:cs typeface="Calibri" pitchFamily="34" charset="-120"/>
-              </a:rPr>
-              <a:t>Days, not weeks — and trending down.</a:t>
-            </a:r>
-            <a:endParaRPr lang="en-US" sz="1250" dirty="0"/>
-          </a:p>
-        </p:txBody>
-      </p:sp>
-      <p:sp>
-        <p:nvSpPr>
-          <p:cNvPr id="42" name="Text 40"/>
-          <p:cNvSpPr/>
-          <p:nvPr/>
-        </p:nvSpPr>
-        <p:spPr>
-          <a:xfrm>
-            <a:off x="548640" y="6272784"/>
-            <a:ext cx="11091672" cy="402336"/>
-          </a:xfrm>
-          <a:prstGeom prst="rect">
-            <a:avLst/>
-          </a:prstGeom>
-          <a:noFill/>
-          <a:ln/>
-        </p:spPr>
-        <p:txBody>
-          <a:bodyPr wrap="square" lIns="0" tIns="0" rIns="0" bIns="0" rtlCol="0" anchor="ctr"/>
-          <a:lstStyle/>
-          <a:p>
-            <a:pPr indent="0" marL="0">
-              <a:buNone/>
-            </a:pPr>
-            <a:r>
-              <a:rPr lang="en-US" sz="1400" i="1" dirty="0">
+        </p:txBody>
+      </p:sp>
+      <p:sp>
+        <p:nvSpPr>
+          <p:cNvPr id="27" name="Text 25"/>
+          <p:cNvSpPr/>
+          <p:nvPr/>
+        </p:nvSpPr>
+        <p:spPr>
+          <a:xfrm>
+            <a:off x="548640" y="6199632"/>
+            <a:ext cx="11091672" cy="457200"/>
+          </a:xfrm>
+          <a:prstGeom prst="rect">
+            <a:avLst/>
+          </a:prstGeom>
+          <a:noFill/>
+          <a:ln/>
+        </p:spPr>
+        <p:txBody>
+          <a:bodyPr wrap="square" lIns="0" tIns="0" rIns="0" bIns="0" rtlCol="0" anchor="ctr"/>
+          <a:lstStyle/>
+          <a:p>
+            <a:pPr indent="0" marL="0">
+              <a:buNone/>
+            </a:pPr>
+            <a:r>
+              <a:rPr lang="en-US" sz="1050" dirty="0">
                 <a:solidFill>
                   <a:srgbClr val="5C6675"/>
                 </a:solidFill>
-                <a:latin typeface="Cambria" pitchFamily="34" charset="0"/>
-                <a:ea typeface="Cambria" pitchFamily="34" charset="-122"/>
-                <a:cs typeface="Cambria" pitchFamily="34" charset="-120"/>
-              </a:rPr>
-              <a:t>The goal is a better decision, not a lower bill — the lower bill is what a better decision looks like a quarter later.</a:t>
-            </a:r>
-            <a:endParaRPr lang="en-US" sz="1400" dirty="0"/>
+                <a:latin typeface="Calibri" pitchFamily="34" charset="0"/>
+                <a:ea typeface="Calibri" pitchFamily="34" charset="-122"/>
+                <a:cs typeface="Calibri" pitchFamily="34" charset="-120"/>
+              </a:rPr>
+              <a:t>Harness / Sapio Research, 2026 State of AI in FinOps — 700 engineering leaders and practitioners, May–June 2026. Vendor-sponsored research; the waste and maturity figures are self-reported estimates.</a:t>
+            </a:r>
+            <a:endParaRPr lang="en-US" sz="1050" dirty="0"/>
           </a:p>
         </p:txBody>
       </p:sp>
@@ -18300,7 +17907,7 @@
                 <a:ea typeface="Calibri" pitchFamily="34" charset="-122"/>
                 <a:cs typeface="Calibri" pitchFamily="34" charset="-120"/>
               </a:rPr>
-              <a:t>THE PATH FORWARD</a:t>
+              <a:t>OPERATE — RUNNING THE PRACTICE</a:t>
             </a:r>
             <a:endParaRPr lang="en-US" sz="1100" dirty="0"/>
           </a:p>
@@ -18339,7 +17946,7 @@
                 <a:ea typeface="Cambria" pitchFamily="34" charset="-122"/>
                 <a:cs typeface="Cambria" pitchFamily="34" charset="-120"/>
               </a:rPr>
-              <a:t>Where to start</a:t>
+              <a:t>Ship the insight, don't just publish it</a:t>
             </a:r>
             <a:endParaRPr lang="en-US" sz="3100" dirty="0"/>
           </a:p>
@@ -18347,21 +17954,675 @@
       </p:sp>
       <p:sp>
         <p:nvSpPr>
-          <p:cNvPr id="4" name="Shape 2"/>
-          <p:cNvSpPr/>
-          <p:nvPr/>
-        </p:nvSpPr>
-        <p:spPr>
-          <a:xfrm>
-            <a:off x="548640" y="1783080"/>
-            <a:ext cx="2587752" cy="2423160"/>
+          <p:cNvPr id="4" name="Text 2"/>
+          <p:cNvSpPr/>
+          <p:nvPr/>
+        </p:nvSpPr>
+        <p:spPr>
+          <a:xfrm>
+            <a:off x="548640" y="1536192"/>
+            <a:ext cx="10607040" cy="365760"/>
+          </a:xfrm>
+          <a:prstGeom prst="rect">
+            <a:avLst/>
+          </a:prstGeom>
+          <a:noFill/>
+          <a:ln/>
+        </p:spPr>
+        <p:txBody>
+          <a:bodyPr wrap="square" lIns="0" tIns="0" rIns="0" bIns="0" rtlCol="0" anchor="ctr"/>
+          <a:lstStyle/>
+          <a:p>
+            <a:pPr indent="0" marL="0">
+              <a:buNone/>
+            </a:pPr>
+            <a:r>
+              <a:rPr lang="en-US" sz="1500" dirty="0">
+                <a:solidFill>
+                  <a:srgbClr val="5C6675"/>
+                </a:solidFill>
+                <a:latin typeface="Calibri" pitchFamily="34" charset="0"/>
+                <a:ea typeface="Calibri" pitchFamily="34" charset="-122"/>
+                <a:cs typeface="Calibri" pitchFamily="34" charset="-120"/>
+              </a:rPr>
+              <a:t>A report tells someone a number. Only a change in what they do next reaches the bill.</a:t>
+            </a:r>
+            <a:endParaRPr lang="en-US" sz="1500" dirty="0"/>
+          </a:p>
+        </p:txBody>
+      </p:sp>
+      <p:sp>
+        <p:nvSpPr>
+          <p:cNvPr id="5" name="Shape 3"/>
+          <p:cNvSpPr/>
+          <p:nvPr/>
+        </p:nvSpPr>
+        <p:spPr>
+          <a:xfrm>
+            <a:off x="548640" y="2286000"/>
+            <a:ext cx="1700784" cy="960120"/>
           </a:xfrm>
           <a:prstGeom prst="roundRect">
             <a:avLst>
-              <a:gd name="adj" fmla="val 3396"/>
+              <a:gd name="adj" fmla="val 8571"/>
             </a:avLst>
           </a:prstGeom>
           <a:solidFill>
+            <a:srgbClr val="F1F3F6"/>
+          </a:solidFill>
+          <a:ln/>
+        </p:spPr>
+      </p:sp>
+      <p:sp>
+        <p:nvSpPr>
+          <p:cNvPr id="6" name="Text 4"/>
+          <p:cNvSpPr/>
+          <p:nvPr/>
+        </p:nvSpPr>
+        <p:spPr>
+          <a:xfrm>
+            <a:off x="548640" y="2395728"/>
+            <a:ext cx="1700784" cy="329184"/>
+          </a:xfrm>
+          <a:prstGeom prst="rect">
+            <a:avLst/>
+          </a:prstGeom>
+          <a:noFill/>
+          <a:ln/>
+        </p:spPr>
+        <p:txBody>
+          <a:bodyPr wrap="square" lIns="0" tIns="0" rIns="0" bIns="0" rtlCol="0" anchor="ctr"/>
+          <a:lstStyle/>
+          <a:p>
+            <a:pPr algn="ctr" indent="0" marL="0">
+              <a:buNone/>
+            </a:pPr>
+            <a:r>
+              <a:rPr lang="en-US" sz="1350" b="1" dirty="0">
+                <a:solidFill>
+                  <a:srgbClr val="1B2430"/>
+                </a:solidFill>
+                <a:latin typeface="Calibri" pitchFamily="34" charset="0"/>
+                <a:ea typeface="Calibri" pitchFamily="34" charset="-122"/>
+                <a:cs typeface="Calibri" pitchFamily="34" charset="-120"/>
+              </a:rPr>
+              <a:t>Finding</a:t>
+            </a:r>
+            <a:endParaRPr lang="en-US" sz="1350" dirty="0"/>
+          </a:p>
+        </p:txBody>
+      </p:sp>
+      <p:sp>
+        <p:nvSpPr>
+          <p:cNvPr id="7" name="Text 5"/>
+          <p:cNvSpPr/>
+          <p:nvPr/>
+        </p:nvSpPr>
+        <p:spPr>
+          <a:xfrm>
+            <a:off x="640080" y="2724912"/>
+            <a:ext cx="1517904" cy="402336"/>
+          </a:xfrm>
+          <a:prstGeom prst="rect">
+            <a:avLst/>
+          </a:prstGeom>
+          <a:noFill/>
+          <a:ln/>
+        </p:spPr>
+        <p:txBody>
+          <a:bodyPr wrap="square" lIns="0" tIns="0" rIns="0" bIns="0" rtlCol="0" anchor="t"/>
+          <a:lstStyle/>
+          <a:p>
+            <a:pPr algn="ctr" indent="0" marL="0">
+              <a:lnSpc>
+                <a:spcPts val="1400"/>
+              </a:lnSpc>
+              <a:buNone/>
+            </a:pPr>
+            <a:r>
+              <a:rPr lang="en-US" sz="1100" dirty="0">
+                <a:solidFill>
+                  <a:srgbClr val="5C6675"/>
+                </a:solidFill>
+                <a:latin typeface="Calibri" pitchFamily="34" charset="0"/>
+                <a:ea typeface="Calibri" pitchFamily="34" charset="-122"/>
+                <a:cs typeface="Calibri" pitchFamily="34" charset="-120"/>
+              </a:rPr>
+              <a:t>the dashboard flags it</a:t>
+            </a:r>
+            <a:endParaRPr lang="en-US" sz="1100" dirty="0"/>
+          </a:p>
+        </p:txBody>
+      </p:sp>
+      <p:sp>
+        <p:nvSpPr>
+          <p:cNvPr id="8" name="Shape 6"/>
+          <p:cNvSpPr/>
+          <p:nvPr/>
+        </p:nvSpPr>
+        <p:spPr>
+          <a:xfrm>
+            <a:off x="2267712" y="2688336"/>
+            <a:ext cx="137160" cy="146304"/>
+          </a:xfrm>
+          <a:prstGeom prst="rightArrow">
+            <a:avLst/>
+          </a:prstGeom>
+          <a:solidFill>
+            <a:srgbClr val="C3CBD5"/>
+          </a:solidFill>
+          <a:ln/>
+        </p:spPr>
+      </p:sp>
+      <p:sp>
+        <p:nvSpPr>
+          <p:cNvPr id="9" name="Shape 7"/>
+          <p:cNvSpPr/>
+          <p:nvPr/>
+        </p:nvSpPr>
+        <p:spPr>
+          <a:xfrm>
+            <a:off x="2423160" y="2286000"/>
+            <a:ext cx="1700784" cy="960120"/>
+          </a:xfrm>
+          <a:prstGeom prst="roundRect">
+            <a:avLst>
+              <a:gd name="adj" fmla="val 8571"/>
+            </a:avLst>
+          </a:prstGeom>
+          <a:solidFill>
+            <a:srgbClr val="F1F3F6"/>
+          </a:solidFill>
+          <a:ln/>
+        </p:spPr>
+      </p:sp>
+      <p:sp>
+        <p:nvSpPr>
+          <p:cNvPr id="10" name="Text 8"/>
+          <p:cNvSpPr/>
+          <p:nvPr/>
+        </p:nvSpPr>
+        <p:spPr>
+          <a:xfrm>
+            <a:off x="2423160" y="2395728"/>
+            <a:ext cx="1700784" cy="329184"/>
+          </a:xfrm>
+          <a:prstGeom prst="rect">
+            <a:avLst/>
+          </a:prstGeom>
+          <a:noFill/>
+          <a:ln/>
+        </p:spPr>
+        <p:txBody>
+          <a:bodyPr wrap="square" lIns="0" tIns="0" rIns="0" bIns="0" rtlCol="0" anchor="ctr"/>
+          <a:lstStyle/>
+          <a:p>
+            <a:pPr algn="ctr" indent="0" marL="0">
+              <a:buNone/>
+            </a:pPr>
+            <a:r>
+              <a:rPr lang="en-US" sz="1350" b="1" dirty="0">
+                <a:solidFill>
+                  <a:srgbClr val="1B2430"/>
+                </a:solidFill>
+                <a:latin typeface="Calibri" pitchFamily="34" charset="0"/>
+                <a:ea typeface="Calibri" pitchFamily="34" charset="-122"/>
+                <a:cs typeface="Calibri" pitchFamily="34" charset="-120"/>
+              </a:rPr>
+              <a:t>Named owner</a:t>
+            </a:r>
+            <a:endParaRPr lang="en-US" sz="1350" dirty="0"/>
+          </a:p>
+        </p:txBody>
+      </p:sp>
+      <p:sp>
+        <p:nvSpPr>
+          <p:cNvPr id="11" name="Text 9"/>
+          <p:cNvSpPr/>
+          <p:nvPr/>
+        </p:nvSpPr>
+        <p:spPr>
+          <a:xfrm>
+            <a:off x="2514600" y="2724912"/>
+            <a:ext cx="1517904" cy="402336"/>
+          </a:xfrm>
+          <a:prstGeom prst="rect">
+            <a:avLst/>
+          </a:prstGeom>
+          <a:noFill/>
+          <a:ln/>
+        </p:spPr>
+        <p:txBody>
+          <a:bodyPr wrap="square" lIns="0" tIns="0" rIns="0" bIns="0" rtlCol="0" anchor="t"/>
+          <a:lstStyle/>
+          <a:p>
+            <a:pPr algn="ctr" indent="0" marL="0">
+              <a:lnSpc>
+                <a:spcPts val="1400"/>
+              </a:lnSpc>
+              <a:buNone/>
+            </a:pPr>
+            <a:r>
+              <a:rPr lang="en-US" sz="1100" dirty="0">
+                <a:solidFill>
+                  <a:srgbClr val="5C6675"/>
+                </a:solidFill>
+                <a:latin typeface="Calibri" pitchFamily="34" charset="0"/>
+                <a:ea typeface="Calibri" pitchFamily="34" charset="-122"/>
+                <a:cs typeface="Calibri" pitchFamily="34" charset="-120"/>
+              </a:rPr>
+              <a:t>one person, not a team</a:t>
+            </a:r>
+            <a:endParaRPr lang="en-US" sz="1100" dirty="0"/>
+          </a:p>
+        </p:txBody>
+      </p:sp>
+      <p:sp>
+        <p:nvSpPr>
+          <p:cNvPr id="12" name="Shape 10"/>
+          <p:cNvSpPr/>
+          <p:nvPr/>
+        </p:nvSpPr>
+        <p:spPr>
+          <a:xfrm>
+            <a:off x="4142232" y="2688336"/>
+            <a:ext cx="137160" cy="146304"/>
+          </a:xfrm>
+          <a:prstGeom prst="rightArrow">
+            <a:avLst/>
+          </a:prstGeom>
+          <a:solidFill>
+            <a:srgbClr val="C3CBD5"/>
+          </a:solidFill>
+          <a:ln/>
+        </p:spPr>
+      </p:sp>
+      <p:sp>
+        <p:nvSpPr>
+          <p:cNvPr id="13" name="Shape 11"/>
+          <p:cNvSpPr/>
+          <p:nvPr/>
+        </p:nvSpPr>
+        <p:spPr>
+          <a:xfrm>
+            <a:off x="4297680" y="2286000"/>
+            <a:ext cx="1700784" cy="960120"/>
+          </a:xfrm>
+          <a:prstGeom prst="roundRect">
+            <a:avLst>
+              <a:gd name="adj" fmla="val 8571"/>
+            </a:avLst>
+          </a:prstGeom>
+          <a:solidFill>
+            <a:srgbClr val="F1F3F6"/>
+          </a:solidFill>
+          <a:ln/>
+        </p:spPr>
+      </p:sp>
+      <p:sp>
+        <p:nvSpPr>
+          <p:cNvPr id="14" name="Text 12"/>
+          <p:cNvSpPr/>
+          <p:nvPr/>
+        </p:nvSpPr>
+        <p:spPr>
+          <a:xfrm>
+            <a:off x="4297680" y="2395728"/>
+            <a:ext cx="1700784" cy="329184"/>
+          </a:xfrm>
+          <a:prstGeom prst="rect">
+            <a:avLst/>
+          </a:prstGeom>
+          <a:noFill/>
+          <a:ln/>
+        </p:spPr>
+        <p:txBody>
+          <a:bodyPr wrap="square" lIns="0" tIns="0" rIns="0" bIns="0" rtlCol="0" anchor="ctr"/>
+          <a:lstStyle/>
+          <a:p>
+            <a:pPr algn="ctr" indent="0" marL="0">
+              <a:buNone/>
+            </a:pPr>
+            <a:r>
+              <a:rPr lang="en-US" sz="1350" b="1" dirty="0">
+                <a:solidFill>
+                  <a:srgbClr val="1B2430"/>
+                </a:solidFill>
+                <a:latin typeface="Calibri" pitchFamily="34" charset="0"/>
+                <a:ea typeface="Calibri" pitchFamily="34" charset="-122"/>
+                <a:cs typeface="Calibri" pitchFamily="34" charset="-120"/>
+              </a:rPr>
+              <a:t>Sized</a:t>
+            </a:r>
+            <a:endParaRPr lang="en-US" sz="1350" dirty="0"/>
+          </a:p>
+        </p:txBody>
+      </p:sp>
+      <p:sp>
+        <p:nvSpPr>
+          <p:cNvPr id="15" name="Text 13"/>
+          <p:cNvSpPr/>
+          <p:nvPr/>
+        </p:nvSpPr>
+        <p:spPr>
+          <a:xfrm>
+            <a:off x="4389120" y="2724912"/>
+            <a:ext cx="1517904" cy="402336"/>
+          </a:xfrm>
+          <a:prstGeom prst="rect">
+            <a:avLst/>
+          </a:prstGeom>
+          <a:noFill/>
+          <a:ln/>
+        </p:spPr>
+        <p:txBody>
+          <a:bodyPr wrap="square" lIns="0" tIns="0" rIns="0" bIns="0" rtlCol="0" anchor="t"/>
+          <a:lstStyle/>
+          <a:p>
+            <a:pPr algn="ctr" indent="0" marL="0">
+              <a:lnSpc>
+                <a:spcPts val="1400"/>
+              </a:lnSpc>
+              <a:buNone/>
+            </a:pPr>
+            <a:r>
+              <a:rPr lang="en-US" sz="1100" dirty="0">
+                <a:solidFill>
+                  <a:srgbClr val="5C6675"/>
+                </a:solidFill>
+                <a:latin typeface="Calibri" pitchFamily="34" charset="0"/>
+                <a:ea typeface="Calibri" pitchFamily="34" charset="-122"/>
+                <a:cs typeface="Calibri" pitchFamily="34" charset="-120"/>
+              </a:rPr>
+              <a:t>what it is worth</a:t>
+            </a:r>
+            <a:endParaRPr lang="en-US" sz="1100" dirty="0"/>
+          </a:p>
+        </p:txBody>
+      </p:sp>
+      <p:sp>
+        <p:nvSpPr>
+          <p:cNvPr id="16" name="Shape 14"/>
+          <p:cNvSpPr/>
+          <p:nvPr/>
+        </p:nvSpPr>
+        <p:spPr>
+          <a:xfrm>
+            <a:off x="6016752" y="2688336"/>
+            <a:ext cx="137160" cy="146304"/>
+          </a:xfrm>
+          <a:prstGeom prst="rightArrow">
+            <a:avLst/>
+          </a:prstGeom>
+          <a:solidFill>
+            <a:srgbClr val="C3CBD5"/>
+          </a:solidFill>
+          <a:ln/>
+        </p:spPr>
+      </p:sp>
+      <p:sp>
+        <p:nvSpPr>
+          <p:cNvPr id="17" name="Shape 15"/>
+          <p:cNvSpPr/>
+          <p:nvPr/>
+        </p:nvSpPr>
+        <p:spPr>
+          <a:xfrm>
+            <a:off x="6172200" y="2286000"/>
+            <a:ext cx="1700784" cy="960120"/>
+          </a:xfrm>
+          <a:prstGeom prst="roundRect">
+            <a:avLst>
+              <a:gd name="adj" fmla="val 8571"/>
+            </a:avLst>
+          </a:prstGeom>
+          <a:solidFill>
+            <a:srgbClr val="F1F3F6"/>
+          </a:solidFill>
+          <a:ln/>
+        </p:spPr>
+      </p:sp>
+      <p:sp>
+        <p:nvSpPr>
+          <p:cNvPr id="18" name="Text 16"/>
+          <p:cNvSpPr/>
+          <p:nvPr/>
+        </p:nvSpPr>
+        <p:spPr>
+          <a:xfrm>
+            <a:off x="6172200" y="2395728"/>
+            <a:ext cx="1700784" cy="329184"/>
+          </a:xfrm>
+          <a:prstGeom prst="rect">
+            <a:avLst/>
+          </a:prstGeom>
+          <a:noFill/>
+          <a:ln/>
+        </p:spPr>
+        <p:txBody>
+          <a:bodyPr wrap="square" lIns="0" tIns="0" rIns="0" bIns="0" rtlCol="0" anchor="ctr"/>
+          <a:lstStyle/>
+          <a:p>
+            <a:pPr algn="ctr" indent="0" marL="0">
+              <a:buNone/>
+            </a:pPr>
+            <a:r>
+              <a:rPr lang="en-US" sz="1350" b="1" dirty="0">
+                <a:solidFill>
+                  <a:srgbClr val="1B2430"/>
+                </a:solidFill>
+                <a:latin typeface="Calibri" pitchFamily="34" charset="0"/>
+                <a:ea typeface="Calibri" pitchFamily="34" charset="-122"/>
+                <a:cs typeface="Calibri" pitchFamily="34" charset="-120"/>
+              </a:rPr>
+              <a:t>Target date</a:t>
+            </a:r>
+            <a:endParaRPr lang="en-US" sz="1350" dirty="0"/>
+          </a:p>
+        </p:txBody>
+      </p:sp>
+      <p:sp>
+        <p:nvSpPr>
+          <p:cNvPr id="19" name="Text 17"/>
+          <p:cNvSpPr/>
+          <p:nvPr/>
+        </p:nvSpPr>
+        <p:spPr>
+          <a:xfrm>
+            <a:off x="6263640" y="2724912"/>
+            <a:ext cx="1517904" cy="402336"/>
+          </a:xfrm>
+          <a:prstGeom prst="rect">
+            <a:avLst/>
+          </a:prstGeom>
+          <a:noFill/>
+          <a:ln/>
+        </p:spPr>
+        <p:txBody>
+          <a:bodyPr wrap="square" lIns="0" tIns="0" rIns="0" bIns="0" rtlCol="0" anchor="t"/>
+          <a:lstStyle/>
+          <a:p>
+            <a:pPr algn="ctr" indent="0" marL="0">
+              <a:lnSpc>
+                <a:spcPts val="1400"/>
+              </a:lnSpc>
+              <a:buNone/>
+            </a:pPr>
+            <a:r>
+              <a:rPr lang="en-US" sz="1100" dirty="0">
+                <a:solidFill>
+                  <a:srgbClr val="5C6675"/>
+                </a:solidFill>
+                <a:latin typeface="Calibri" pitchFamily="34" charset="0"/>
+                <a:ea typeface="Calibri" pitchFamily="34" charset="-122"/>
+                <a:cs typeface="Calibri" pitchFamily="34" charset="-120"/>
+              </a:rPr>
+              <a:t>when, not someday</a:t>
+            </a:r>
+            <a:endParaRPr lang="en-US" sz="1100" dirty="0"/>
+          </a:p>
+        </p:txBody>
+      </p:sp>
+      <p:sp>
+        <p:nvSpPr>
+          <p:cNvPr id="20" name="Shape 18"/>
+          <p:cNvSpPr/>
+          <p:nvPr/>
+        </p:nvSpPr>
+        <p:spPr>
+          <a:xfrm>
+            <a:off x="7891272" y="2688336"/>
+            <a:ext cx="137160" cy="146304"/>
+          </a:xfrm>
+          <a:prstGeom prst="rightArrow">
+            <a:avLst/>
+          </a:prstGeom>
+          <a:solidFill>
+            <a:srgbClr val="C3CBD5"/>
+          </a:solidFill>
+          <a:ln/>
+        </p:spPr>
+      </p:sp>
+      <p:sp>
+        <p:nvSpPr>
+          <p:cNvPr id="21" name="Shape 19"/>
+          <p:cNvSpPr/>
+          <p:nvPr/>
+        </p:nvSpPr>
+        <p:spPr>
+          <a:xfrm>
+            <a:off x="8046720" y="2286000"/>
+            <a:ext cx="1700784" cy="960120"/>
+          </a:xfrm>
+          <a:prstGeom prst="roundRect">
+            <a:avLst>
+              <a:gd name="adj" fmla="val 8571"/>
+            </a:avLst>
+          </a:prstGeom>
+          <a:solidFill>
+            <a:srgbClr val="F1F3F6"/>
+          </a:solidFill>
+          <a:ln/>
+        </p:spPr>
+      </p:sp>
+      <p:sp>
+        <p:nvSpPr>
+          <p:cNvPr id="22" name="Text 20"/>
+          <p:cNvSpPr/>
+          <p:nvPr/>
+        </p:nvSpPr>
+        <p:spPr>
+          <a:xfrm>
+            <a:off x="8046720" y="2395728"/>
+            <a:ext cx="1700784" cy="329184"/>
+          </a:xfrm>
+          <a:prstGeom prst="rect">
+            <a:avLst/>
+          </a:prstGeom>
+          <a:noFill/>
+          <a:ln/>
+        </p:spPr>
+        <p:txBody>
+          <a:bodyPr wrap="square" lIns="0" tIns="0" rIns="0" bIns="0" rtlCol="0" anchor="ctr"/>
+          <a:lstStyle/>
+          <a:p>
+            <a:pPr algn="ctr" indent="0" marL="0">
+              <a:buNone/>
+            </a:pPr>
+            <a:r>
+              <a:rPr lang="en-US" sz="1350" b="1" dirty="0">
+                <a:solidFill>
+                  <a:srgbClr val="1B2430"/>
+                </a:solidFill>
+                <a:latin typeface="Calibri" pitchFamily="34" charset="0"/>
+                <a:ea typeface="Calibri" pitchFamily="34" charset="-122"/>
+                <a:cs typeface="Calibri" pitchFamily="34" charset="-120"/>
+              </a:rPr>
+              <a:t>Reviewed</a:t>
+            </a:r>
+            <a:endParaRPr lang="en-US" sz="1350" dirty="0"/>
+          </a:p>
+        </p:txBody>
+      </p:sp>
+      <p:sp>
+        <p:nvSpPr>
+          <p:cNvPr id="23" name="Text 21"/>
+          <p:cNvSpPr/>
+          <p:nvPr/>
+        </p:nvSpPr>
+        <p:spPr>
+          <a:xfrm>
+            <a:off x="8138160" y="2724912"/>
+            <a:ext cx="1517904" cy="402336"/>
+          </a:xfrm>
+          <a:prstGeom prst="rect">
+            <a:avLst/>
+          </a:prstGeom>
+          <a:noFill/>
+          <a:ln/>
+        </p:spPr>
+        <p:txBody>
+          <a:bodyPr wrap="square" lIns="0" tIns="0" rIns="0" bIns="0" rtlCol="0" anchor="t"/>
+          <a:lstStyle/>
+          <a:p>
+            <a:pPr algn="ctr" indent="0" marL="0">
+              <a:lnSpc>
+                <a:spcPts val="1400"/>
+              </a:lnSpc>
+              <a:buNone/>
+            </a:pPr>
+            <a:r>
+              <a:rPr lang="en-US" sz="1100" dirty="0">
+                <a:solidFill>
+                  <a:srgbClr val="5C6675"/>
+                </a:solidFill>
+                <a:latin typeface="Calibri" pitchFamily="34" charset="0"/>
+                <a:ea typeface="Calibri" pitchFamily="34" charset="-122"/>
+                <a:cs typeface="Calibri" pitchFamily="34" charset="-120"/>
+              </a:rPr>
+              <a:t>did it happen</a:t>
+            </a:r>
+            <a:endParaRPr lang="en-US" sz="1100" dirty="0"/>
+          </a:p>
+        </p:txBody>
+      </p:sp>
+      <p:sp>
+        <p:nvSpPr>
+          <p:cNvPr id="24" name="Shape 22"/>
+          <p:cNvSpPr/>
+          <p:nvPr/>
+        </p:nvSpPr>
+        <p:spPr>
+          <a:xfrm>
+            <a:off x="9765792" y="2688336"/>
+            <a:ext cx="137160" cy="146304"/>
+          </a:xfrm>
+          <a:prstGeom prst="rightArrow">
+            <a:avLst/>
+          </a:prstGeom>
+          <a:solidFill>
+            <a:srgbClr val="C3CBD5"/>
+          </a:solidFill>
+          <a:ln/>
+        </p:spPr>
+      </p:sp>
+      <p:sp>
+        <p:nvSpPr>
+          <p:cNvPr id="25" name="Shape 23"/>
+          <p:cNvSpPr/>
+          <p:nvPr/>
+        </p:nvSpPr>
+        <p:spPr>
+          <a:xfrm>
+            <a:off x="9921240" y="2286000"/>
+            <a:ext cx="1700784" cy="960120"/>
+          </a:xfrm>
+          <a:prstGeom prst="roundRect">
+            <a:avLst>
+              <a:gd name="adj" fmla="val 8571"/>
+            </a:avLst>
+          </a:prstGeom>
+          <a:solidFill>
             <a:srgbClr val="1F2936"/>
           </a:solidFill>
           <a:ln/>
@@ -18369,854 +18630,695 @@
       </p:sp>
       <p:sp>
         <p:nvSpPr>
-          <p:cNvPr id="5" name="Text 3"/>
-          <p:cNvSpPr/>
-          <p:nvPr/>
-        </p:nvSpPr>
-        <p:spPr>
-          <a:xfrm>
-            <a:off x="804672" y="1965960"/>
-            <a:ext cx="1097280" cy="502920"/>
-          </a:xfrm>
-          <a:prstGeom prst="rect">
-            <a:avLst/>
-          </a:prstGeom>
-          <a:noFill/>
-          <a:ln/>
-        </p:spPr>
-        <p:txBody>
-          <a:bodyPr wrap="square" lIns="0" tIns="0" rIns="0" bIns="0" rtlCol="0" anchor="ctr"/>
-          <a:lstStyle/>
-          <a:p>
-            <a:pPr indent="0" marL="0">
-              <a:buNone/>
-            </a:pPr>
-            <a:r>
-              <a:rPr lang="en-US" sz="2800" b="1" dirty="0">
+          <p:cNvPr id="26" name="Text 24"/>
+          <p:cNvSpPr/>
+          <p:nvPr/>
+        </p:nvSpPr>
+        <p:spPr>
+          <a:xfrm>
+            <a:off x="9921240" y="2395728"/>
+            <a:ext cx="1700784" cy="329184"/>
+          </a:xfrm>
+          <a:prstGeom prst="rect">
+            <a:avLst/>
+          </a:prstGeom>
+          <a:noFill/>
+          <a:ln/>
+        </p:spPr>
+        <p:txBody>
+          <a:bodyPr wrap="square" lIns="0" tIns="0" rIns="0" bIns="0" rtlCol="0" anchor="ctr"/>
+          <a:lstStyle/>
+          <a:p>
+            <a:pPr algn="ctr" indent="0" marL="0">
+              <a:buNone/>
+            </a:pPr>
+            <a:r>
+              <a:rPr lang="en-US" sz="1350" b="1" dirty="0">
                 <a:solidFill>
                   <a:srgbClr val="E39B2C"/>
+                </a:solidFill>
+                <a:latin typeface="Calibri" pitchFamily="34" charset="0"/>
+                <a:ea typeface="Calibri" pitchFamily="34" charset="-122"/>
+                <a:cs typeface="Calibri" pitchFamily="34" charset="-120"/>
+              </a:rPr>
+              <a:t>Realized</a:t>
+            </a:r>
+            <a:endParaRPr lang="en-US" sz="1350" dirty="0"/>
+          </a:p>
+        </p:txBody>
+      </p:sp>
+      <p:sp>
+        <p:nvSpPr>
+          <p:cNvPr id="27" name="Text 25"/>
+          <p:cNvSpPr/>
+          <p:nvPr/>
+        </p:nvSpPr>
+        <p:spPr>
+          <a:xfrm>
+            <a:off x="10012680" y="2724912"/>
+            <a:ext cx="1517904" cy="402336"/>
+          </a:xfrm>
+          <a:prstGeom prst="rect">
+            <a:avLst/>
+          </a:prstGeom>
+          <a:noFill/>
+          <a:ln/>
+        </p:spPr>
+        <p:txBody>
+          <a:bodyPr wrap="square" lIns="0" tIns="0" rIns="0" bIns="0" rtlCol="0" anchor="t"/>
+          <a:lstStyle/>
+          <a:p>
+            <a:pPr algn="ctr" indent="0" marL="0">
+              <a:lnSpc>
+                <a:spcPts val="1400"/>
+              </a:lnSpc>
+              <a:buNone/>
+            </a:pPr>
+            <a:r>
+              <a:rPr lang="en-US" sz="1100" dirty="0">
+                <a:solidFill>
+                  <a:srgbClr val="9EABBA"/>
+                </a:solidFill>
+                <a:latin typeface="Calibri" pitchFamily="34" charset="0"/>
+                <a:ea typeface="Calibri" pitchFamily="34" charset="-122"/>
+                <a:cs typeface="Calibri" pitchFamily="34" charset="-120"/>
+              </a:rPr>
+              <a:t>measured on the bill</a:t>
+            </a:r>
+            <a:endParaRPr lang="en-US" sz="1100" dirty="0"/>
+          </a:p>
+        </p:txBody>
+      </p:sp>
+      <p:sp>
+        <p:nvSpPr>
+          <p:cNvPr id="28" name="Text 26"/>
+          <p:cNvSpPr/>
+          <p:nvPr/>
+        </p:nvSpPr>
+        <p:spPr>
+          <a:xfrm>
+            <a:off x="548640" y="3364992"/>
+            <a:ext cx="11091672" cy="310896"/>
+          </a:xfrm>
+          <a:prstGeom prst="rect">
+            <a:avLst/>
+          </a:prstGeom>
+          <a:noFill/>
+          <a:ln/>
+        </p:spPr>
+        <p:txBody>
+          <a:bodyPr wrap="square" lIns="0" tIns="0" rIns="0" bIns="0" rtlCol="0" anchor="ctr"/>
+          <a:lstStyle/>
+          <a:p>
+            <a:pPr indent="0" marL="0">
+              <a:buNone/>
+            </a:pPr>
+            <a:r>
+              <a:rPr lang="en-US" sz="1250" dirty="0">
+                <a:solidFill>
+                  <a:srgbClr val="5C6675"/>
+                </a:solidFill>
+                <a:latin typeface="Calibri" pitchFamily="34" charset="0"/>
+                <a:ea typeface="Calibri" pitchFamily="34" charset="-122"/>
+                <a:cs typeface="Calibri" pitchFamily="34" charset="-120"/>
+              </a:rPr>
+              <a:t>A recommendation without an owner and a date is an opinion.</a:t>
+            </a:r>
+            <a:endParaRPr lang="en-US" sz="1250" dirty="0"/>
+          </a:p>
+        </p:txBody>
+      </p:sp>
+      <p:sp>
+        <p:nvSpPr>
+          <p:cNvPr id="29" name="Shape 27"/>
+          <p:cNvSpPr/>
+          <p:nvPr/>
+        </p:nvSpPr>
+        <p:spPr>
+          <a:xfrm>
+            <a:off x="548640" y="3913632"/>
+            <a:ext cx="5394960" cy="2240280"/>
+          </a:xfrm>
+          <a:prstGeom prst="roundRect">
+            <a:avLst>
+              <a:gd name="adj" fmla="val 3673"/>
+            </a:avLst>
+          </a:prstGeom>
+          <a:solidFill>
+            <a:srgbClr val="F1F3F6"/>
+          </a:solidFill>
+          <a:ln/>
+        </p:spPr>
+      </p:sp>
+      <p:sp>
+        <p:nvSpPr>
+          <p:cNvPr id="30" name="Text 28"/>
+          <p:cNvSpPr/>
+          <p:nvPr/>
+        </p:nvSpPr>
+        <p:spPr>
+          <a:xfrm>
+            <a:off x="859536" y="4078224"/>
+            <a:ext cx="4572000" cy="292608"/>
+          </a:xfrm>
+          <a:prstGeom prst="rect">
+            <a:avLst/>
+          </a:prstGeom>
+          <a:noFill/>
+          <a:ln/>
+        </p:spPr>
+        <p:txBody>
+          <a:bodyPr wrap="square" lIns="0" tIns="0" rIns="0" bIns="0" rtlCol="0" anchor="ctr"/>
+          <a:lstStyle/>
+          <a:p>
+            <a:pPr indent="0" marL="0">
+              <a:buNone/>
+            </a:pPr>
+            <a:r>
+              <a:rPr lang="en-US" sz="1200" b="1" spc="180" kern="0" dirty="0">
+                <a:solidFill>
+                  <a:srgbClr val="5C6675"/>
+                </a:solidFill>
+                <a:latin typeface="Calibri" pitchFamily="34" charset="0"/>
+                <a:ea typeface="Calibri" pitchFamily="34" charset="-122"/>
+                <a:cs typeface="Calibri" pitchFamily="34" charset="-120"/>
+              </a:rPr>
+              <a:t>The difference that matters</a:t>
+            </a:r>
+            <a:endParaRPr lang="en-US" sz="1200" dirty="0"/>
+          </a:p>
+        </p:txBody>
+      </p:sp>
+      <p:sp>
+        <p:nvSpPr>
+          <p:cNvPr id="31" name="Text 29"/>
+          <p:cNvSpPr/>
+          <p:nvPr/>
+        </p:nvSpPr>
+        <p:spPr>
+          <a:xfrm>
+            <a:off x="859536" y="4425696"/>
+            <a:ext cx="4773168" cy="530352"/>
+          </a:xfrm>
+          <a:prstGeom prst="rect">
+            <a:avLst/>
+          </a:prstGeom>
+          <a:noFill/>
+          <a:ln/>
+        </p:spPr>
+        <p:txBody>
+          <a:bodyPr wrap="square" lIns="0" tIns="0" rIns="0" bIns="0" rtlCol="0" anchor="t"/>
+          <a:lstStyle/>
+          <a:p>
+            <a:pPr indent="0" marL="0">
+              <a:lnSpc>
+                <a:spcPts val="1900"/>
+              </a:lnSpc>
+              <a:buNone/>
+            </a:pPr>
+            <a:r>
+              <a:rPr lang="en-US" sz="1400" b="1" dirty="0">
+                <a:solidFill>
+                  <a:srgbClr val="5C6675"/>
+                </a:solidFill>
+                <a:latin typeface="Calibri" pitchFamily="34" charset="0"/>
+                <a:ea typeface="Calibri" pitchFamily="34" charset="-122"/>
+                <a:cs typeface="Calibri" pitchFamily="34" charset="-120"/>
+              </a:rPr>
+              <a:t>A report  </a:t>
+            </a:r>
+            <a:pPr indent="0" marL="0">
+              <a:lnSpc>
+                <a:spcPts val="1900"/>
+              </a:lnSpc>
+              <a:buNone/>
+            </a:pPr>
+            <a:r>
+              <a:rPr lang="en-US" sz="1400" dirty="0">
+                <a:solidFill>
+                  <a:srgbClr val="5C6675"/>
+                </a:solidFill>
+                <a:latin typeface="Calibri" pitchFamily="34" charset="0"/>
+                <a:ea typeface="Calibri" pitchFamily="34" charset="-122"/>
+                <a:cs typeface="Calibri" pitchFamily="34" charset="-120"/>
+              </a:rPr>
+              <a:t>is finished when the number is right.</a:t>
+            </a:r>
+            <a:endParaRPr lang="en-US" sz="1400" dirty="0"/>
+          </a:p>
+        </p:txBody>
+      </p:sp>
+      <p:sp>
+        <p:nvSpPr>
+          <p:cNvPr id="32" name="Text 30"/>
+          <p:cNvSpPr/>
+          <p:nvPr/>
+        </p:nvSpPr>
+        <p:spPr>
+          <a:xfrm>
+            <a:off x="859536" y="4974336"/>
+            <a:ext cx="4773168" cy="530352"/>
+          </a:xfrm>
+          <a:prstGeom prst="rect">
+            <a:avLst/>
+          </a:prstGeom>
+          <a:noFill/>
+          <a:ln/>
+        </p:spPr>
+        <p:txBody>
+          <a:bodyPr wrap="square" lIns="0" tIns="0" rIns="0" bIns="0" rtlCol="0" anchor="t"/>
+          <a:lstStyle/>
+          <a:p>
+            <a:pPr indent="0" marL="0">
+              <a:lnSpc>
+                <a:spcPts val="1900"/>
+              </a:lnSpc>
+              <a:buNone/>
+            </a:pPr>
+            <a:r>
+              <a:rPr lang="en-US" sz="1400" b="1" dirty="0">
+                <a:solidFill>
+                  <a:srgbClr val="1B2430"/>
+                </a:solidFill>
+                <a:latin typeface="Calibri" pitchFamily="34" charset="0"/>
+                <a:ea typeface="Calibri" pitchFamily="34" charset="-122"/>
+                <a:cs typeface="Calibri" pitchFamily="34" charset="-120"/>
+              </a:rPr>
+              <a:t>A product  </a:t>
+            </a:r>
+            <a:pPr indent="0" marL="0">
+              <a:lnSpc>
+                <a:spcPts val="1900"/>
+              </a:lnSpc>
+              <a:buNone/>
+            </a:pPr>
+            <a:r>
+              <a:rPr lang="en-US" sz="1400" dirty="0">
+                <a:solidFill>
+                  <a:srgbClr val="5C6675"/>
+                </a:solidFill>
+                <a:latin typeface="Calibri" pitchFamily="34" charset="0"/>
+                <a:ea typeface="Calibri" pitchFamily="34" charset="-122"/>
+                <a:cs typeface="Calibri" pitchFamily="34" charset="-120"/>
+              </a:rPr>
+              <a:t>is finished when someone behaves differently.</a:t>
+            </a:r>
+            <a:endParaRPr lang="en-US" sz="1400" dirty="0"/>
+          </a:p>
+        </p:txBody>
+      </p:sp>
+      <p:sp>
+        <p:nvSpPr>
+          <p:cNvPr id="33" name="Text 31"/>
+          <p:cNvSpPr/>
+          <p:nvPr/>
+        </p:nvSpPr>
+        <p:spPr>
+          <a:xfrm>
+            <a:off x="859536" y="5522976"/>
+            <a:ext cx="4773168" cy="457200"/>
+          </a:xfrm>
+          <a:prstGeom prst="rect">
+            <a:avLst/>
+          </a:prstGeom>
+          <a:noFill/>
+          <a:ln/>
+        </p:spPr>
+        <p:txBody>
+          <a:bodyPr wrap="square" lIns="0" tIns="0" rIns="0" bIns="0" rtlCol="0" anchor="t"/>
+          <a:lstStyle/>
+          <a:p>
+            <a:pPr indent="0" marL="0">
+              <a:lnSpc>
+                <a:spcPts val="1600"/>
+              </a:lnSpc>
+              <a:buNone/>
+            </a:pPr>
+            <a:r>
+              <a:rPr lang="en-US" sz="1250" dirty="0">
+                <a:solidFill>
+                  <a:srgbClr val="1B2430"/>
+                </a:solidFill>
+                <a:latin typeface="Calibri" pitchFamily="34" charset="0"/>
+                <a:ea typeface="Calibri" pitchFamily="34" charset="-122"/>
+                <a:cs typeface="Calibri" pitchFamily="34" charset="-120"/>
+              </a:rPr>
+              <a:t>Build for the engineer who wants the three things worth fixing this sprint — the finance report improves as a by-product.</a:t>
+            </a:r>
+            <a:endParaRPr lang="en-US" sz="1250" dirty="0"/>
+          </a:p>
+        </p:txBody>
+      </p:sp>
+      <p:sp>
+        <p:nvSpPr>
+          <p:cNvPr id="34" name="Shape 32"/>
+          <p:cNvSpPr/>
+          <p:nvPr/>
+        </p:nvSpPr>
+        <p:spPr>
+          <a:xfrm>
+            <a:off x="6245352" y="3913632"/>
+            <a:ext cx="5394960" cy="2240280"/>
+          </a:xfrm>
+          <a:prstGeom prst="roundRect">
+            <a:avLst>
+              <a:gd name="adj" fmla="val 3673"/>
+            </a:avLst>
+          </a:prstGeom>
+          <a:solidFill>
+            <a:srgbClr val="1F2936"/>
+          </a:solidFill>
+          <a:ln/>
+          <a:effectLst>
+            <a:outerShdw sx="100000" sy="100000" kx="0" ky="0" algn="bl" rotWithShape="0" blurRad="127000" dist="25400" dir="5400000">
+              <a:srgbClr val="8C99A8">
+                <a:alpha val="16000"/>
+              </a:srgbClr>
+            </a:outerShdw>
+          </a:effectLst>
+        </p:spPr>
+      </p:sp>
+      <p:sp>
+        <p:nvSpPr>
+          <p:cNvPr id="35" name="Text 33"/>
+          <p:cNvSpPr/>
+          <p:nvPr/>
+        </p:nvSpPr>
+        <p:spPr>
+          <a:xfrm>
+            <a:off x="6556248" y="4078224"/>
+            <a:ext cx="4572000" cy="292608"/>
+          </a:xfrm>
+          <a:prstGeom prst="rect">
+            <a:avLst/>
+          </a:prstGeom>
+          <a:noFill/>
+          <a:ln/>
+        </p:spPr>
+        <p:txBody>
+          <a:bodyPr wrap="square" lIns="0" tIns="0" rIns="0" bIns="0" rtlCol="0" anchor="ctr"/>
+          <a:lstStyle/>
+          <a:p>
+            <a:pPr indent="0" marL="0">
+              <a:buNone/>
+            </a:pPr>
+            <a:r>
+              <a:rPr lang="en-US" sz="1200" b="1" spc="180" kern="0" dirty="0">
+                <a:solidFill>
+                  <a:srgbClr val="E39B2C"/>
+                </a:solidFill>
+                <a:latin typeface="Calibri" pitchFamily="34" charset="0"/>
+                <a:ea typeface="Calibri" pitchFamily="34" charset="-122"/>
+                <a:cs typeface="Calibri" pitchFamily="34" charset="-120"/>
+              </a:rPr>
+              <a:t>Measure adoption, not accuracy</a:t>
+            </a:r>
+            <a:endParaRPr lang="en-US" sz="1200" dirty="0"/>
+          </a:p>
+        </p:txBody>
+      </p:sp>
+      <p:sp>
+        <p:nvSpPr>
+          <p:cNvPr id="36" name="Shape 34"/>
+          <p:cNvSpPr/>
+          <p:nvPr/>
+        </p:nvSpPr>
+        <p:spPr>
+          <a:xfrm>
+            <a:off x="6574536" y="4590288"/>
+            <a:ext cx="100584" cy="100584"/>
+          </a:xfrm>
+          <a:prstGeom prst="ellipse">
+            <a:avLst/>
+          </a:prstGeom>
+          <a:solidFill>
+            <a:srgbClr val="E39B2C"/>
+          </a:solidFill>
+          <a:ln/>
+        </p:spPr>
+      </p:sp>
+      <p:sp>
+        <p:nvSpPr>
+          <p:cNvPr id="37" name="Text 35"/>
+          <p:cNvSpPr/>
+          <p:nvPr/>
+        </p:nvSpPr>
+        <p:spPr>
+          <a:xfrm>
+            <a:off x="6812280" y="4443984"/>
+            <a:ext cx="4553712" cy="457200"/>
+          </a:xfrm>
+          <a:prstGeom prst="rect">
+            <a:avLst/>
+          </a:prstGeom>
+          <a:noFill/>
+          <a:ln/>
+        </p:spPr>
+        <p:txBody>
+          <a:bodyPr wrap="square" lIns="0" tIns="0" rIns="0" bIns="0" rtlCol="0" anchor="t"/>
+          <a:lstStyle/>
+          <a:p>
+            <a:pPr indent="0" marL="0">
+              <a:lnSpc>
+                <a:spcPts val="1600"/>
+              </a:lnSpc>
+              <a:buNone/>
+            </a:pPr>
+            <a:r>
+              <a:rPr lang="en-US" sz="1250" b="1" dirty="0">
+                <a:solidFill>
+                  <a:srgbClr val="FFFFFF"/>
+                </a:solidFill>
+                <a:latin typeface="Calibri" pitchFamily="34" charset="0"/>
+                <a:ea typeface="Calibri" pitchFamily="34" charset="-122"/>
+                <a:cs typeface="Calibri" pitchFamily="34" charset="-120"/>
+              </a:rPr>
+              <a:t>Findings with an owner and a date</a:t>
+            </a:r>
+            <a:endParaRPr lang="en-US" sz="1250" dirty="0"/>
+          </a:p>
+          <a:p>
+            <a:pPr indent="0" marL="0">
+              <a:lnSpc>
+                <a:spcPts val="1600"/>
+              </a:lnSpc>
+              <a:buNone/>
+            </a:pPr>
+            <a:r>
+              <a:rPr lang="en-US" sz="1250" dirty="0">
+                <a:solidFill>
+                  <a:srgbClr val="9EABBA"/>
+                </a:solidFill>
+                <a:latin typeface="Calibri" pitchFamily="34" charset="0"/>
+                <a:ea typeface="Calibri" pitchFamily="34" charset="-122"/>
+                <a:cs typeface="Calibri" pitchFamily="34" charset="-120"/>
+              </a:rPr>
+              <a:t>The share that became work.</a:t>
+            </a:r>
+            <a:endParaRPr lang="en-US" sz="1250" dirty="0"/>
+          </a:p>
+        </p:txBody>
+      </p:sp>
+      <p:sp>
+        <p:nvSpPr>
+          <p:cNvPr id="38" name="Shape 36"/>
+          <p:cNvSpPr/>
+          <p:nvPr/>
+        </p:nvSpPr>
+        <p:spPr>
+          <a:xfrm>
+            <a:off x="6574536" y="5102352"/>
+            <a:ext cx="100584" cy="100584"/>
+          </a:xfrm>
+          <a:prstGeom prst="ellipse">
+            <a:avLst/>
+          </a:prstGeom>
+          <a:solidFill>
+            <a:srgbClr val="E39B2C"/>
+          </a:solidFill>
+          <a:ln/>
+        </p:spPr>
+      </p:sp>
+      <p:sp>
+        <p:nvSpPr>
+          <p:cNvPr id="39" name="Text 37"/>
+          <p:cNvSpPr/>
+          <p:nvPr/>
+        </p:nvSpPr>
+        <p:spPr>
+          <a:xfrm>
+            <a:off x="6812280" y="4956048"/>
+            <a:ext cx="4553712" cy="457200"/>
+          </a:xfrm>
+          <a:prstGeom prst="rect">
+            <a:avLst/>
+          </a:prstGeom>
+          <a:noFill/>
+          <a:ln/>
+        </p:spPr>
+        <p:txBody>
+          <a:bodyPr wrap="square" lIns="0" tIns="0" rIns="0" bIns="0" rtlCol="0" anchor="t"/>
+          <a:lstStyle/>
+          <a:p>
+            <a:pPr indent="0" marL="0">
+              <a:lnSpc>
+                <a:spcPts val="1600"/>
+              </a:lnSpc>
+              <a:buNone/>
+            </a:pPr>
+            <a:r>
+              <a:rPr lang="en-US" sz="1250" b="1" dirty="0">
+                <a:solidFill>
+                  <a:srgbClr val="FFFFFF"/>
+                </a:solidFill>
+                <a:latin typeface="Calibri" pitchFamily="34" charset="0"/>
+                <a:ea typeface="Calibri" pitchFamily="34" charset="-122"/>
+                <a:cs typeface="Calibri" pitchFamily="34" charset="-120"/>
+              </a:rPr>
+              <a:t>Realized against identified saving</a:t>
+            </a:r>
+            <a:endParaRPr lang="en-US" sz="1250" dirty="0"/>
+          </a:p>
+          <a:p>
+            <a:pPr indent="0" marL="0">
+              <a:lnSpc>
+                <a:spcPts val="1600"/>
+              </a:lnSpc>
+              <a:buNone/>
+            </a:pPr>
+            <a:r>
+              <a:rPr lang="en-US" sz="1250" dirty="0">
+                <a:solidFill>
+                  <a:srgbClr val="9EABBA"/>
+                </a:solidFill>
+                <a:latin typeface="Calibri" pitchFamily="34" charset="0"/>
+                <a:ea typeface="Calibri" pitchFamily="34" charset="-122"/>
+                <a:cs typeface="Calibri" pitchFamily="34" charset="-120"/>
+              </a:rPr>
+              <a:t>Only the first reaches an invoice.</a:t>
+            </a:r>
+            <a:endParaRPr lang="en-US" sz="1250" dirty="0"/>
+          </a:p>
+        </p:txBody>
+      </p:sp>
+      <p:sp>
+        <p:nvSpPr>
+          <p:cNvPr id="40" name="Shape 38"/>
+          <p:cNvSpPr/>
+          <p:nvPr/>
+        </p:nvSpPr>
+        <p:spPr>
+          <a:xfrm>
+            <a:off x="6574536" y="5614416"/>
+            <a:ext cx="100584" cy="100584"/>
+          </a:xfrm>
+          <a:prstGeom prst="ellipse">
+            <a:avLst/>
+          </a:prstGeom>
+          <a:solidFill>
+            <a:srgbClr val="E39B2C"/>
+          </a:solidFill>
+          <a:ln/>
+        </p:spPr>
+      </p:sp>
+      <p:sp>
+        <p:nvSpPr>
+          <p:cNvPr id="41" name="Text 39"/>
+          <p:cNvSpPr/>
+          <p:nvPr/>
+        </p:nvSpPr>
+        <p:spPr>
+          <a:xfrm>
+            <a:off x="6812280" y="5468112"/>
+            <a:ext cx="4553712" cy="457200"/>
+          </a:xfrm>
+          <a:prstGeom prst="rect">
+            <a:avLst/>
+          </a:prstGeom>
+          <a:noFill/>
+          <a:ln/>
+        </p:spPr>
+        <p:txBody>
+          <a:bodyPr wrap="square" lIns="0" tIns="0" rIns="0" bIns="0" rtlCol="0" anchor="t"/>
+          <a:lstStyle/>
+          <a:p>
+            <a:pPr indent="0" marL="0">
+              <a:lnSpc>
+                <a:spcPts val="1600"/>
+              </a:lnSpc>
+              <a:buNone/>
+            </a:pPr>
+            <a:r>
+              <a:rPr lang="en-US" sz="1250" b="1" dirty="0">
+                <a:solidFill>
+                  <a:srgbClr val="FFFFFF"/>
+                </a:solidFill>
+                <a:latin typeface="Calibri" pitchFamily="34" charset="0"/>
+                <a:ea typeface="Calibri" pitchFamily="34" charset="-122"/>
+                <a:cs typeface="Calibri" pitchFamily="34" charset="-120"/>
+              </a:rPr>
+              <a:t>Time from finding to owner</a:t>
+            </a:r>
+            <a:endParaRPr lang="en-US" sz="1250" dirty="0"/>
+          </a:p>
+          <a:p>
+            <a:pPr indent="0" marL="0">
+              <a:lnSpc>
+                <a:spcPts val="1600"/>
+              </a:lnSpc>
+              <a:buNone/>
+            </a:pPr>
+            <a:r>
+              <a:rPr lang="en-US" sz="1250" dirty="0">
+                <a:solidFill>
+                  <a:srgbClr val="9EABBA"/>
+                </a:solidFill>
+                <a:latin typeface="Calibri" pitchFamily="34" charset="0"/>
+                <a:ea typeface="Calibri" pitchFamily="34" charset="-122"/>
+                <a:cs typeface="Calibri" pitchFamily="34" charset="-120"/>
+              </a:rPr>
+              <a:t>Days, not weeks — and trending down.</a:t>
+            </a:r>
+            <a:endParaRPr lang="en-US" sz="1250" dirty="0"/>
+          </a:p>
+        </p:txBody>
+      </p:sp>
+      <p:sp>
+        <p:nvSpPr>
+          <p:cNvPr id="42" name="Text 40"/>
+          <p:cNvSpPr/>
+          <p:nvPr/>
+        </p:nvSpPr>
+        <p:spPr>
+          <a:xfrm>
+            <a:off x="548640" y="6272784"/>
+            <a:ext cx="11091672" cy="402336"/>
+          </a:xfrm>
+          <a:prstGeom prst="rect">
+            <a:avLst/>
+          </a:prstGeom>
+          <a:noFill/>
+          <a:ln/>
+        </p:spPr>
+        <p:txBody>
+          <a:bodyPr wrap="square" lIns="0" tIns="0" rIns="0" bIns="0" rtlCol="0" anchor="ctr"/>
+          <a:lstStyle/>
+          <a:p>
+            <a:pPr indent="0" marL="0">
+              <a:buNone/>
+            </a:pPr>
+            <a:r>
+              <a:rPr lang="en-US" sz="1400" i="1" dirty="0">
+                <a:solidFill>
+                  <a:srgbClr val="5C6675"/>
                 </a:solidFill>
                 <a:latin typeface="Cambria" pitchFamily="34" charset="0"/>
                 <a:ea typeface="Cambria" pitchFamily="34" charset="-122"/>
                 <a:cs typeface="Cambria" pitchFamily="34" charset="-120"/>
               </a:rPr>
-              <a:t>01</a:t>
-            </a:r>
-            <a:endParaRPr lang="en-US" sz="2800" dirty="0"/>
-          </a:p>
-        </p:txBody>
-      </p:sp>
-      <p:sp>
-        <p:nvSpPr>
-          <p:cNvPr id="6" name="Text 4"/>
-          <p:cNvSpPr/>
-          <p:nvPr/>
-        </p:nvSpPr>
-        <p:spPr>
-          <a:xfrm>
-            <a:off x="786384" y="2523744"/>
-            <a:ext cx="2139696" cy="786384"/>
-          </a:xfrm>
-          <a:prstGeom prst="rect">
-            <a:avLst/>
-          </a:prstGeom>
-          <a:noFill/>
-          <a:ln/>
-        </p:spPr>
-        <p:txBody>
-          <a:bodyPr wrap="square" lIns="0" tIns="0" rIns="0" bIns="0" rtlCol="0" anchor="t"/>
-          <a:lstStyle/>
-          <a:p>
-            <a:pPr indent="0" marL="0">
-              <a:lnSpc>
-                <a:spcPts val="2000"/>
-              </a:lnSpc>
-              <a:buNone/>
-            </a:pPr>
-            <a:r>
-              <a:rPr lang="en-US" sz="1500" b="1" dirty="0">
-                <a:solidFill>
-                  <a:srgbClr val="FFFFFF"/>
-                </a:solidFill>
-                <a:latin typeface="Cambria" pitchFamily="34" charset="0"/>
-                <a:ea typeface="Cambria" pitchFamily="34" charset="-122"/>
-                <a:cs typeface="Cambria" pitchFamily="34" charset="-120"/>
-              </a:rPr>
-              <a:t>Set the tagging standard</a:t>
-            </a:r>
-            <a:endParaRPr lang="en-US" sz="1500" dirty="0"/>
-          </a:p>
-        </p:txBody>
-      </p:sp>
-      <p:sp>
-        <p:nvSpPr>
-          <p:cNvPr id="7" name="Text 5"/>
-          <p:cNvSpPr/>
-          <p:nvPr/>
-        </p:nvSpPr>
-        <p:spPr>
-          <a:xfrm>
-            <a:off x="786384" y="3346704"/>
-            <a:ext cx="2139696" cy="749808"/>
-          </a:xfrm>
-          <a:prstGeom prst="rect">
-            <a:avLst/>
-          </a:prstGeom>
-          <a:noFill/>
-          <a:ln/>
-        </p:spPr>
-        <p:txBody>
-          <a:bodyPr wrap="square" lIns="0" tIns="0" rIns="0" bIns="0" rtlCol="0" anchor="t"/>
-          <a:lstStyle/>
-          <a:p>
-            <a:pPr indent="0" marL="0">
-              <a:lnSpc>
-                <a:spcPts val="1500"/>
-              </a:lnSpc>
-              <a:buNone/>
-            </a:pPr>
-            <a:r>
-              <a:rPr lang="en-US" sz="1200" dirty="0">
-                <a:solidFill>
-                  <a:srgbClr val="9EABBA"/>
-                </a:solidFill>
-                <a:latin typeface="Calibri" pitchFamily="34" charset="0"/>
-                <a:ea typeface="Calibri" pitchFamily="34" charset="-122"/>
-                <a:cs typeface="Calibri" pitchFamily="34" charset="-120"/>
-              </a:rPr>
-              <a:t>Agree a consistent taxonomy before investing in dashboards.</a:t>
-            </a:r>
-            <a:endParaRPr lang="en-US" sz="1200" dirty="0"/>
-          </a:p>
-        </p:txBody>
-      </p:sp>
-      <p:sp>
-        <p:nvSpPr>
-          <p:cNvPr id="8" name="Shape 6"/>
-          <p:cNvSpPr/>
-          <p:nvPr/>
-        </p:nvSpPr>
-        <p:spPr>
-          <a:xfrm>
-            <a:off x="3383280" y="1783080"/>
-            <a:ext cx="2587752" cy="2423160"/>
-          </a:xfrm>
-          <a:prstGeom prst="roundRect">
-            <a:avLst>
-              <a:gd name="adj" fmla="val 3396"/>
-            </a:avLst>
-          </a:prstGeom>
-          <a:solidFill>
-            <a:srgbClr val="F1F3F6"/>
-          </a:solidFill>
-          <a:ln/>
-        </p:spPr>
-      </p:sp>
-      <p:sp>
-        <p:nvSpPr>
-          <p:cNvPr id="9" name="Text 7"/>
-          <p:cNvSpPr/>
-          <p:nvPr/>
-        </p:nvSpPr>
-        <p:spPr>
-          <a:xfrm>
-            <a:off x="3639312" y="1965960"/>
-            <a:ext cx="1097280" cy="502920"/>
-          </a:xfrm>
-          <a:prstGeom prst="rect">
-            <a:avLst/>
-          </a:prstGeom>
-          <a:noFill/>
-          <a:ln/>
-        </p:spPr>
-        <p:txBody>
-          <a:bodyPr wrap="square" lIns="0" tIns="0" rIns="0" bIns="0" rtlCol="0" anchor="ctr"/>
-          <a:lstStyle/>
-          <a:p>
-            <a:pPr indent="0" marL="0">
-              <a:buNone/>
-            </a:pPr>
-            <a:r>
-              <a:rPr lang="en-US" sz="2800" b="1" dirty="0">
-                <a:solidFill>
-                  <a:srgbClr val="B9C2CD"/>
-                </a:solidFill>
-                <a:latin typeface="Cambria" pitchFamily="34" charset="0"/>
-                <a:ea typeface="Cambria" pitchFamily="34" charset="-122"/>
-                <a:cs typeface="Cambria" pitchFamily="34" charset="-120"/>
-              </a:rPr>
-              <a:t>02</a:t>
-            </a:r>
-            <a:endParaRPr lang="en-US" sz="2800" dirty="0"/>
-          </a:p>
-        </p:txBody>
-      </p:sp>
-      <p:sp>
-        <p:nvSpPr>
-          <p:cNvPr id="10" name="Text 8"/>
-          <p:cNvSpPr/>
-          <p:nvPr/>
-        </p:nvSpPr>
-        <p:spPr>
-          <a:xfrm>
-            <a:off x="3621024" y="2523744"/>
-            <a:ext cx="2139696" cy="786384"/>
-          </a:xfrm>
-          <a:prstGeom prst="rect">
-            <a:avLst/>
-          </a:prstGeom>
-          <a:noFill/>
-          <a:ln/>
-        </p:spPr>
-        <p:txBody>
-          <a:bodyPr wrap="square" lIns="0" tIns="0" rIns="0" bIns="0" rtlCol="0" anchor="t"/>
-          <a:lstStyle/>
-          <a:p>
-            <a:pPr indent="0" marL="0">
-              <a:lnSpc>
-                <a:spcPts val="2000"/>
-              </a:lnSpc>
-              <a:buNone/>
-            </a:pPr>
-            <a:r>
-              <a:rPr lang="en-US" sz="1500" b="1" dirty="0">
-                <a:solidFill>
-                  <a:srgbClr val="1B2430"/>
-                </a:solidFill>
-                <a:latin typeface="Cambria" pitchFamily="34" charset="0"/>
-                <a:ea typeface="Cambria" pitchFamily="34" charset="-122"/>
-                <a:cs typeface="Cambria" pitchFamily="34" charset="-120"/>
-              </a:rPr>
-              <a:t>Start with the biggest spend</a:t>
-            </a:r>
-            <a:endParaRPr lang="en-US" sz="1500" dirty="0"/>
-          </a:p>
-        </p:txBody>
-      </p:sp>
-      <p:sp>
-        <p:nvSpPr>
-          <p:cNvPr id="11" name="Text 9"/>
-          <p:cNvSpPr/>
-          <p:nvPr/>
-        </p:nvSpPr>
-        <p:spPr>
-          <a:xfrm>
-            <a:off x="3621024" y="3346704"/>
-            <a:ext cx="2139696" cy="749808"/>
-          </a:xfrm>
-          <a:prstGeom prst="rect">
-            <a:avLst/>
-          </a:prstGeom>
-          <a:noFill/>
-          <a:ln/>
-        </p:spPr>
-        <p:txBody>
-          <a:bodyPr wrap="square" lIns="0" tIns="0" rIns="0" bIns="0" rtlCol="0" anchor="t"/>
-          <a:lstStyle/>
-          <a:p>
-            <a:pPr indent="0" marL="0">
-              <a:lnSpc>
-                <a:spcPts val="1500"/>
-              </a:lnSpc>
-              <a:buNone/>
-            </a:pPr>
-            <a:r>
-              <a:rPr lang="en-US" sz="1200" dirty="0">
-                <a:solidFill>
-                  <a:srgbClr val="5C6675"/>
-                </a:solidFill>
-                <a:latin typeface="Calibri" pitchFamily="34" charset="0"/>
-                <a:ea typeface="Calibri" pitchFamily="34" charset="-122"/>
-                <a:cs typeface="Calibri" pitchFamily="34" charset="-120"/>
-              </a:rPr>
-              <a:t>Attack the largest categories first. Don't chase perfect granularity everywhere.</a:t>
-            </a:r>
-            <a:endParaRPr lang="en-US" sz="1200" dirty="0"/>
-          </a:p>
-        </p:txBody>
-      </p:sp>
-      <p:sp>
-        <p:nvSpPr>
-          <p:cNvPr id="12" name="Shape 10"/>
-          <p:cNvSpPr/>
-          <p:nvPr/>
-        </p:nvSpPr>
-        <p:spPr>
-          <a:xfrm>
-            <a:off x="6217920" y="1783080"/>
-            <a:ext cx="2587752" cy="2423160"/>
-          </a:xfrm>
-          <a:prstGeom prst="roundRect">
-            <a:avLst>
-              <a:gd name="adj" fmla="val 3396"/>
-            </a:avLst>
-          </a:prstGeom>
-          <a:solidFill>
-            <a:srgbClr val="F1F3F6"/>
-          </a:solidFill>
-          <a:ln/>
-        </p:spPr>
-      </p:sp>
-      <p:sp>
-        <p:nvSpPr>
-          <p:cNvPr id="13" name="Text 11"/>
-          <p:cNvSpPr/>
-          <p:nvPr/>
-        </p:nvSpPr>
-        <p:spPr>
-          <a:xfrm>
-            <a:off x="6473952" y="1965960"/>
-            <a:ext cx="1097280" cy="502920"/>
-          </a:xfrm>
-          <a:prstGeom prst="rect">
-            <a:avLst/>
-          </a:prstGeom>
-          <a:noFill/>
-          <a:ln/>
-        </p:spPr>
-        <p:txBody>
-          <a:bodyPr wrap="square" lIns="0" tIns="0" rIns="0" bIns="0" rtlCol="0" anchor="ctr"/>
-          <a:lstStyle/>
-          <a:p>
-            <a:pPr indent="0" marL="0">
-              <a:buNone/>
-            </a:pPr>
-            <a:r>
-              <a:rPr lang="en-US" sz="2800" b="1" dirty="0">
-                <a:solidFill>
-                  <a:srgbClr val="B9C2CD"/>
-                </a:solidFill>
-                <a:latin typeface="Cambria" pitchFamily="34" charset="0"/>
-                <a:ea typeface="Cambria" pitchFamily="34" charset="-122"/>
-                <a:cs typeface="Cambria" pitchFamily="34" charset="-120"/>
-              </a:rPr>
-              <a:t>03</a:t>
-            </a:r>
-            <a:endParaRPr lang="en-US" sz="2800" dirty="0"/>
-          </a:p>
-        </p:txBody>
-      </p:sp>
-      <p:sp>
-        <p:nvSpPr>
-          <p:cNvPr id="14" name="Text 12"/>
-          <p:cNvSpPr/>
-          <p:nvPr/>
-        </p:nvSpPr>
-        <p:spPr>
-          <a:xfrm>
-            <a:off x="6455664" y="2523744"/>
-            <a:ext cx="2139696" cy="786384"/>
-          </a:xfrm>
-          <a:prstGeom prst="rect">
-            <a:avLst/>
-          </a:prstGeom>
-          <a:noFill/>
-          <a:ln/>
-        </p:spPr>
-        <p:txBody>
-          <a:bodyPr wrap="square" lIns="0" tIns="0" rIns="0" bIns="0" rtlCol="0" anchor="t"/>
-          <a:lstStyle/>
-          <a:p>
-            <a:pPr indent="0" marL="0">
-              <a:lnSpc>
-                <a:spcPts val="2000"/>
-              </a:lnSpc>
-              <a:buNone/>
-            </a:pPr>
-            <a:r>
-              <a:rPr lang="en-US" sz="1500" b="1" dirty="0">
-                <a:solidFill>
-                  <a:srgbClr val="1B2430"/>
-                </a:solidFill>
-                <a:latin typeface="Cambria" pitchFamily="34" charset="0"/>
-                <a:ea typeface="Cambria" pitchFamily="34" charset="-122"/>
-                <a:cs typeface="Cambria" pitchFamily="34" charset="-120"/>
-              </a:rPr>
-              <a:t>Get finance and engineering talking</a:t>
-            </a:r>
-            <a:endParaRPr lang="en-US" sz="1500" dirty="0"/>
-          </a:p>
-        </p:txBody>
-      </p:sp>
-      <p:sp>
-        <p:nvSpPr>
-          <p:cNvPr id="15" name="Text 13"/>
-          <p:cNvSpPr/>
-          <p:nvPr/>
-        </p:nvSpPr>
-        <p:spPr>
-          <a:xfrm>
-            <a:off x="6455664" y="3346704"/>
-            <a:ext cx="2139696" cy="749808"/>
-          </a:xfrm>
-          <a:prstGeom prst="rect">
-            <a:avLst/>
-          </a:prstGeom>
-          <a:noFill/>
-          <a:ln/>
-        </p:spPr>
-        <p:txBody>
-          <a:bodyPr wrap="square" lIns="0" tIns="0" rIns="0" bIns="0" rtlCol="0" anchor="t"/>
-          <a:lstStyle/>
-          <a:p>
-            <a:pPr indent="0" marL="0">
-              <a:lnSpc>
-                <a:spcPts val="1500"/>
-              </a:lnSpc>
-              <a:buNone/>
-            </a:pPr>
-            <a:r>
-              <a:rPr lang="en-US" sz="1200" dirty="0">
-                <a:solidFill>
-                  <a:srgbClr val="5C6675"/>
-                </a:solidFill>
-                <a:latin typeface="Calibri" pitchFamily="34" charset="0"/>
-                <a:ea typeface="Calibri" pitchFamily="34" charset="-122"/>
-                <a:cs typeface="Calibri" pitchFamily="34" charset="-120"/>
-              </a:rPr>
-              <a:t>Bring both into the conversation early, not as an afterthought.</a:t>
-            </a:r>
-            <a:endParaRPr lang="en-US" sz="1200" dirty="0"/>
-          </a:p>
-        </p:txBody>
-      </p:sp>
-      <p:sp>
-        <p:nvSpPr>
-          <p:cNvPr id="16" name="Shape 14"/>
-          <p:cNvSpPr/>
-          <p:nvPr/>
-        </p:nvSpPr>
-        <p:spPr>
-          <a:xfrm>
-            <a:off x="9052560" y="1783080"/>
-            <a:ext cx="2587752" cy="2423160"/>
-          </a:xfrm>
-          <a:prstGeom prst="roundRect">
-            <a:avLst>
-              <a:gd name="adj" fmla="val 3396"/>
-            </a:avLst>
-          </a:prstGeom>
-          <a:solidFill>
-            <a:srgbClr val="F1F3F6"/>
-          </a:solidFill>
-          <a:ln/>
-        </p:spPr>
-      </p:sp>
-      <p:sp>
-        <p:nvSpPr>
-          <p:cNvPr id="17" name="Text 15"/>
-          <p:cNvSpPr/>
-          <p:nvPr/>
-        </p:nvSpPr>
-        <p:spPr>
-          <a:xfrm>
-            <a:off x="9308592" y="1965960"/>
-            <a:ext cx="1097280" cy="502920"/>
-          </a:xfrm>
-          <a:prstGeom prst="rect">
-            <a:avLst/>
-          </a:prstGeom>
-          <a:noFill/>
-          <a:ln/>
-        </p:spPr>
-        <p:txBody>
-          <a:bodyPr wrap="square" lIns="0" tIns="0" rIns="0" bIns="0" rtlCol="0" anchor="ctr"/>
-          <a:lstStyle/>
-          <a:p>
-            <a:pPr indent="0" marL="0">
-              <a:buNone/>
-            </a:pPr>
-            <a:r>
-              <a:rPr lang="en-US" sz="2800" b="1" dirty="0">
-                <a:solidFill>
-                  <a:srgbClr val="B9C2CD"/>
-                </a:solidFill>
-                <a:latin typeface="Cambria" pitchFamily="34" charset="0"/>
-                <a:ea typeface="Cambria" pitchFamily="34" charset="-122"/>
-                <a:cs typeface="Cambria" pitchFamily="34" charset="-120"/>
-              </a:rPr>
-              <a:t>04</a:t>
-            </a:r>
-            <a:endParaRPr lang="en-US" sz="2800" dirty="0"/>
-          </a:p>
-        </p:txBody>
-      </p:sp>
-      <p:sp>
-        <p:nvSpPr>
-          <p:cNvPr id="18" name="Text 16"/>
-          <p:cNvSpPr/>
-          <p:nvPr/>
-        </p:nvSpPr>
-        <p:spPr>
-          <a:xfrm>
-            <a:off x="9290304" y="2523744"/>
-            <a:ext cx="2139696" cy="786384"/>
-          </a:xfrm>
-          <a:prstGeom prst="rect">
-            <a:avLst/>
-          </a:prstGeom>
-          <a:noFill/>
-          <a:ln/>
-        </p:spPr>
-        <p:txBody>
-          <a:bodyPr wrap="square" lIns="0" tIns="0" rIns="0" bIns="0" rtlCol="0" anchor="t"/>
-          <a:lstStyle/>
-          <a:p>
-            <a:pPr indent="0" marL="0">
-              <a:lnSpc>
-                <a:spcPts val="2000"/>
-              </a:lnSpc>
-              <a:buNone/>
-            </a:pPr>
-            <a:r>
-              <a:rPr lang="en-US" sz="1500" b="1" dirty="0">
-                <a:solidFill>
-                  <a:srgbClr val="1B2430"/>
-                </a:solidFill>
-                <a:latin typeface="Cambria" pitchFamily="34" charset="0"/>
-                <a:ea typeface="Cambria" pitchFamily="34" charset="-122"/>
-                <a:cs typeface="Cambria" pitchFamily="34" charset="-120"/>
-              </a:rPr>
-              <a:t>Set guardrails early</a:t>
-            </a:r>
-            <a:endParaRPr lang="en-US" sz="1500" dirty="0"/>
-          </a:p>
-        </p:txBody>
-      </p:sp>
-      <p:sp>
-        <p:nvSpPr>
-          <p:cNvPr id="19" name="Text 17"/>
-          <p:cNvSpPr/>
-          <p:nvPr/>
-        </p:nvSpPr>
-        <p:spPr>
-          <a:xfrm>
-            <a:off x="9290304" y="3346704"/>
-            <a:ext cx="2139696" cy="749808"/>
-          </a:xfrm>
-          <a:prstGeom prst="rect">
-            <a:avLst/>
-          </a:prstGeom>
-          <a:noFill/>
-          <a:ln/>
-        </p:spPr>
-        <p:txBody>
-          <a:bodyPr wrap="square" lIns="0" tIns="0" rIns="0" bIns="0" rtlCol="0" anchor="t"/>
-          <a:lstStyle/>
-          <a:p>
-            <a:pPr indent="0" marL="0">
-              <a:lnSpc>
-                <a:spcPts val="1500"/>
-              </a:lnSpc>
-              <a:buNone/>
-            </a:pPr>
-            <a:r>
-              <a:rPr lang="en-US" sz="1200" dirty="0">
-                <a:solidFill>
-                  <a:srgbClr val="5C6675"/>
-                </a:solidFill>
-                <a:latin typeface="Calibri" pitchFamily="34" charset="0"/>
-                <a:ea typeface="Calibri" pitchFamily="34" charset="-122"/>
-                <a:cs typeface="Calibri" pitchFamily="34" charset="-120"/>
-              </a:rPr>
-              <a:t>Owners, budget thresholds and quotas cost little to add — and stop the expensive surprises.</a:t>
-            </a:r>
-            <a:endParaRPr lang="en-US" sz="1200" dirty="0"/>
-          </a:p>
-        </p:txBody>
-      </p:sp>
-      <p:sp>
-        <p:nvSpPr>
-          <p:cNvPr id="20" name="Shape 18"/>
-          <p:cNvSpPr/>
-          <p:nvPr/>
-        </p:nvSpPr>
-        <p:spPr>
-          <a:xfrm>
-            <a:off x="548640" y="4434840"/>
-            <a:ext cx="11091672" cy="1874520"/>
-          </a:xfrm>
-          <a:prstGeom prst="roundRect">
-            <a:avLst>
-              <a:gd name="adj" fmla="val 4390"/>
-            </a:avLst>
-          </a:prstGeom>
-          <a:solidFill>
-            <a:srgbClr val="F1F3F6"/>
-          </a:solidFill>
-          <a:ln/>
-        </p:spPr>
-      </p:sp>
-      <p:sp>
-        <p:nvSpPr>
-          <p:cNvPr id="21" name="Text 19"/>
-          <p:cNvSpPr/>
-          <p:nvPr/>
-        </p:nvSpPr>
-        <p:spPr>
-          <a:xfrm>
-            <a:off x="877824" y="4572000"/>
-            <a:ext cx="6035040" cy="292608"/>
-          </a:xfrm>
-          <a:prstGeom prst="rect">
-            <a:avLst/>
-          </a:prstGeom>
-          <a:noFill/>
-          <a:ln/>
-        </p:spPr>
-        <p:txBody>
-          <a:bodyPr wrap="square" lIns="0" tIns="0" rIns="0" bIns="0" rtlCol="0" anchor="ctr"/>
-          <a:lstStyle/>
-          <a:p>
-            <a:pPr indent="0" marL="0">
-              <a:buNone/>
-            </a:pPr>
-            <a:r>
-              <a:rPr lang="en-US" sz="1200" b="1" spc="180" kern="0" dirty="0">
-                <a:solidFill>
-                  <a:srgbClr val="5C6675"/>
-                </a:solidFill>
-                <a:latin typeface="Calibri" pitchFamily="34" charset="0"/>
-                <a:ea typeface="Calibri" pitchFamily="34" charset="-122"/>
-                <a:cs typeface="Calibri" pitchFamily="34" charset="-120"/>
-              </a:rPr>
-              <a:t>Tooling — match the footprint, not the ambition</a:t>
-            </a:r>
-            <a:endParaRPr lang="en-US" sz="1200" dirty="0"/>
-          </a:p>
-        </p:txBody>
-      </p:sp>
-      <p:sp>
-        <p:nvSpPr>
-          <p:cNvPr id="22" name="Text 20"/>
-          <p:cNvSpPr/>
-          <p:nvPr/>
-        </p:nvSpPr>
-        <p:spPr>
-          <a:xfrm>
-            <a:off x="877824" y="4937760"/>
-            <a:ext cx="1737360" cy="384048"/>
-          </a:xfrm>
-          <a:prstGeom prst="rect">
-            <a:avLst/>
-          </a:prstGeom>
-          <a:noFill/>
-          <a:ln/>
-        </p:spPr>
-        <p:txBody>
-          <a:bodyPr wrap="square" lIns="0" tIns="0" rIns="0" bIns="0" rtlCol="0" anchor="ctr"/>
-          <a:lstStyle/>
-          <a:p>
-            <a:pPr indent="0" marL="0">
-              <a:buNone/>
-            </a:pPr>
-            <a:r>
-              <a:rPr lang="en-US" sz="1350" b="1" dirty="0">
-                <a:solidFill>
-                  <a:srgbClr val="2E8B7A"/>
-                </a:solidFill>
-                <a:latin typeface="Calibri" pitchFamily="34" charset="0"/>
-                <a:ea typeface="Calibri" pitchFamily="34" charset="-122"/>
-                <a:cs typeface="Calibri" pitchFamily="34" charset="-120"/>
-              </a:rPr>
-              <a:t>Native</a:t>
-            </a:r>
-            <a:endParaRPr lang="en-US" sz="1350" dirty="0"/>
-          </a:p>
-        </p:txBody>
-      </p:sp>
-      <p:sp>
-        <p:nvSpPr>
-          <p:cNvPr id="23" name="Text 21"/>
-          <p:cNvSpPr/>
-          <p:nvPr/>
-        </p:nvSpPr>
-        <p:spPr>
-          <a:xfrm>
-            <a:off x="2651760" y="4937760"/>
-            <a:ext cx="8595360" cy="384048"/>
-          </a:xfrm>
-          <a:prstGeom prst="rect">
-            <a:avLst/>
-          </a:prstGeom>
-          <a:noFill/>
-          <a:ln/>
-        </p:spPr>
-        <p:txBody>
-          <a:bodyPr wrap="square" lIns="0" tIns="0" rIns="0" bIns="0" rtlCol="0" anchor="ctr"/>
-          <a:lstStyle/>
-          <a:p>
-            <a:pPr indent="0" marL="0">
-              <a:buNone/>
-            </a:pPr>
-            <a:r>
-              <a:rPr lang="en-US" sz="1350" dirty="0">
-                <a:solidFill>
-                  <a:srgbClr val="5C6675"/>
-                </a:solidFill>
-                <a:latin typeface="Calibri" pitchFamily="34" charset="0"/>
-                <a:ea typeface="Calibri" pitchFamily="34" charset="-122"/>
-                <a:cs typeface="Calibri" pitchFamily="34" charset="-120"/>
-              </a:rPr>
-              <a:t>AWS Cost Explorer  ·  Azure Cost Management  ·  GCP Billing</a:t>
-            </a:r>
-            <a:endParaRPr lang="en-US" sz="1350" dirty="0"/>
-          </a:p>
-        </p:txBody>
-      </p:sp>
-      <p:sp>
-        <p:nvSpPr>
-          <p:cNvPr id="24" name="Text 22"/>
-          <p:cNvSpPr/>
-          <p:nvPr/>
-        </p:nvSpPr>
-        <p:spPr>
-          <a:xfrm>
-            <a:off x="877824" y="5349240"/>
-            <a:ext cx="1737360" cy="384048"/>
-          </a:xfrm>
-          <a:prstGeom prst="rect">
-            <a:avLst/>
-          </a:prstGeom>
-          <a:noFill/>
-          <a:ln/>
-        </p:spPr>
-        <p:txBody>
-          <a:bodyPr wrap="square" lIns="0" tIns="0" rIns="0" bIns="0" rtlCol="0" anchor="ctr"/>
-          <a:lstStyle/>
-          <a:p>
-            <a:pPr indent="0" marL="0">
-              <a:buNone/>
-            </a:pPr>
-            <a:r>
-              <a:rPr lang="en-US" sz="1350" b="1" dirty="0">
-                <a:solidFill>
-                  <a:srgbClr val="B87B18"/>
-                </a:solidFill>
-                <a:latin typeface="Calibri" pitchFamily="34" charset="0"/>
-                <a:ea typeface="Calibri" pitchFamily="34" charset="-122"/>
-                <a:cs typeface="Calibri" pitchFamily="34" charset="-120"/>
-              </a:rPr>
-              <a:t>Third-party</a:t>
-            </a:r>
-            <a:endParaRPr lang="en-US" sz="1350" dirty="0"/>
-          </a:p>
-        </p:txBody>
-      </p:sp>
-      <p:sp>
-        <p:nvSpPr>
-          <p:cNvPr id="25" name="Text 23"/>
-          <p:cNvSpPr/>
-          <p:nvPr/>
-        </p:nvSpPr>
-        <p:spPr>
-          <a:xfrm>
-            <a:off x="2651760" y="5349240"/>
-            <a:ext cx="8595360" cy="384048"/>
-          </a:xfrm>
-          <a:prstGeom prst="rect">
-            <a:avLst/>
-          </a:prstGeom>
-          <a:noFill/>
-          <a:ln/>
-        </p:spPr>
-        <p:txBody>
-          <a:bodyPr wrap="square" lIns="0" tIns="0" rIns="0" bIns="0" rtlCol="0" anchor="ctr"/>
-          <a:lstStyle/>
-          <a:p>
-            <a:pPr indent="0" marL="0">
-              <a:buNone/>
-            </a:pPr>
-            <a:r>
-              <a:rPr lang="en-US" sz="1350" dirty="0">
-                <a:solidFill>
-                  <a:srgbClr val="5C6675"/>
-                </a:solidFill>
-                <a:latin typeface="Calibri" pitchFamily="34" charset="0"/>
-                <a:ea typeface="Calibri" pitchFamily="34" charset="-122"/>
-                <a:cs typeface="Calibri" pitchFamily="34" charset="-120"/>
-              </a:rPr>
-              <a:t>CloudHealth  ·  Apptio  ·  Vantage  ·  nOps  ·  Finout  ·  CoreStack</a:t>
-            </a:r>
-            <a:endParaRPr lang="en-US" sz="1350" dirty="0"/>
-          </a:p>
-        </p:txBody>
-      </p:sp>
-      <p:sp>
-        <p:nvSpPr>
-          <p:cNvPr id="26" name="Text 24"/>
-          <p:cNvSpPr/>
-          <p:nvPr/>
-        </p:nvSpPr>
-        <p:spPr>
-          <a:xfrm>
-            <a:off x="877824" y="5760720"/>
-            <a:ext cx="1737360" cy="384048"/>
-          </a:xfrm>
-          <a:prstGeom prst="rect">
-            <a:avLst/>
-          </a:prstGeom>
-          <a:noFill/>
-          <a:ln/>
-        </p:spPr>
-        <p:txBody>
-          <a:bodyPr wrap="square" lIns="0" tIns="0" rIns="0" bIns="0" rtlCol="0" anchor="ctr"/>
-          <a:lstStyle/>
-          <a:p>
-            <a:pPr indent="0" marL="0">
-              <a:buNone/>
-            </a:pPr>
-            <a:r>
-              <a:rPr lang="en-US" sz="1350" b="1" dirty="0">
-                <a:solidFill>
-                  <a:srgbClr val="1B2430"/>
-                </a:solidFill>
-                <a:latin typeface="Calibri" pitchFamily="34" charset="0"/>
-                <a:ea typeface="Calibri" pitchFamily="34" charset="-122"/>
-                <a:cs typeface="Calibri" pitchFamily="34" charset="-120"/>
-              </a:rPr>
-              <a:t>Standard</a:t>
-            </a:r>
-            <a:endParaRPr lang="en-US" sz="1350" dirty="0"/>
-          </a:p>
-        </p:txBody>
-      </p:sp>
-      <p:sp>
-        <p:nvSpPr>
-          <p:cNvPr id="27" name="Text 25"/>
-          <p:cNvSpPr/>
-          <p:nvPr/>
-        </p:nvSpPr>
-        <p:spPr>
-          <a:xfrm>
-            <a:off x="2651760" y="5760720"/>
-            <a:ext cx="8595360" cy="384048"/>
-          </a:xfrm>
-          <a:prstGeom prst="rect">
-            <a:avLst/>
-          </a:prstGeom>
-          <a:noFill/>
-          <a:ln/>
-        </p:spPr>
-        <p:txBody>
-          <a:bodyPr wrap="square" lIns="0" tIns="0" rIns="0" bIns="0" rtlCol="0" anchor="ctr"/>
-          <a:lstStyle/>
-          <a:p>
-            <a:pPr indent="0" marL="0">
-              <a:buNone/>
-            </a:pPr>
-            <a:r>
-              <a:rPr lang="en-US" sz="1350" dirty="0">
-                <a:solidFill>
-                  <a:srgbClr val="5C6675"/>
-                </a:solidFill>
-                <a:latin typeface="Calibri" pitchFamily="34" charset="0"/>
-                <a:ea typeface="Calibri" pitchFamily="34" charset="-122"/>
-                <a:cs typeface="Calibri" pitchFamily="34" charset="-120"/>
-              </a:rPr>
-              <a:t>FOCUS-compliant platforms for multi-cloud reporting</a:t>
-            </a:r>
-            <a:endParaRPr lang="en-US" sz="1350" dirty="0"/>
+              <a:t>The goal is a better decision, not a lower bill — the lower bill is what a better decision looks like a quarter later.</a:t>
+            </a:r>
+            <a:endParaRPr lang="en-US" sz="1400" dirty="0"/>
           </a:p>
         </p:txBody>
       </p:sp>
@@ -19231,6 +19333,991 @@
 <file path=ppt/slides/slide24.xml><?xml version="1.0" encoding="utf-8"?>
 <p:sld xmlns:a="http://schemas.openxmlformats.org/drawingml/2006/main" xmlns:r="http://schemas.openxmlformats.org/officeDocument/2006/relationships" xmlns:p="http://schemas.openxmlformats.org/presentationml/2006/main">
   <p:cSld name="Slide 24">
+    <p:bg>
+      <p:bgPr>
+        <a:solidFill>
+          <a:srgbClr val="FFFFFF"/>
+        </a:solidFill>
+      </p:bgPr>
+    </p:bg>
+    <p:spTree>
+      <p:nvGrpSpPr>
+        <p:cNvPr id="1" name=""/>
+        <p:cNvGrpSpPr/>
+        <p:nvPr/>
+      </p:nvGrpSpPr>
+      <p:grpSpPr>
+        <a:xfrm>
+          <a:off x="0" y="0"/>
+          <a:ext cx="0" cy="0"/>
+          <a:chOff x="0" y="0"/>
+          <a:chExt cx="0" cy="0"/>
+        </a:xfrm>
+      </p:grpSpPr>
+      <p:sp>
+        <p:nvSpPr>
+          <p:cNvPr id="2" name="Text 0"/>
+          <p:cNvSpPr/>
+          <p:nvPr/>
+        </p:nvSpPr>
+        <p:spPr>
+          <a:xfrm>
+            <a:off x="548640" y="475488"/>
+            <a:ext cx="7315200" cy="256032"/>
+          </a:xfrm>
+          <a:prstGeom prst="rect">
+            <a:avLst/>
+          </a:prstGeom>
+          <a:noFill/>
+          <a:ln/>
+        </p:spPr>
+        <p:txBody>
+          <a:bodyPr wrap="square" lIns="0" tIns="0" rIns="0" bIns="0" rtlCol="0" anchor="ctr"/>
+          <a:lstStyle/>
+          <a:p>
+            <a:pPr indent="0" marL="0">
+              <a:buNone/>
+            </a:pPr>
+            <a:r>
+              <a:rPr lang="en-US" sz="1100" b="1" spc="220" kern="0" dirty="0">
+                <a:solidFill>
+                  <a:srgbClr val="E39B2C"/>
+                </a:solidFill>
+                <a:latin typeface="Calibri" pitchFamily="34" charset="0"/>
+                <a:ea typeface="Calibri" pitchFamily="34" charset="-122"/>
+                <a:cs typeface="Calibri" pitchFamily="34" charset="-120"/>
+              </a:rPr>
+              <a:t>THE PATH FORWARD</a:t>
+            </a:r>
+            <a:endParaRPr lang="en-US" sz="1100" dirty="0"/>
+          </a:p>
+        </p:txBody>
+      </p:sp>
+      <p:sp>
+        <p:nvSpPr>
+          <p:cNvPr id="3" name="Text 1"/>
+          <p:cNvSpPr/>
+          <p:nvPr/>
+        </p:nvSpPr>
+        <p:spPr>
+          <a:xfrm>
+            <a:off x="548640" y="768096"/>
+            <a:ext cx="11091672" cy="804672"/>
+          </a:xfrm>
+          <a:prstGeom prst="rect">
+            <a:avLst/>
+          </a:prstGeom>
+          <a:noFill/>
+          <a:ln/>
+        </p:spPr>
+        <p:txBody>
+          <a:bodyPr wrap="square" lIns="0" tIns="0" rIns="0" bIns="0" rtlCol="0" anchor="ctr"/>
+          <a:lstStyle/>
+          <a:p>
+            <a:pPr indent="0" marL="0">
+              <a:buNone/>
+            </a:pPr>
+            <a:r>
+              <a:rPr lang="en-US" sz="3100" b="1" dirty="0">
+                <a:solidFill>
+                  <a:srgbClr val="1B2430"/>
+                </a:solidFill>
+                <a:latin typeface="Cambria" pitchFamily="34" charset="0"/>
+                <a:ea typeface="Cambria" pitchFamily="34" charset="-122"/>
+                <a:cs typeface="Cambria" pitchFamily="34" charset="-120"/>
+              </a:rPr>
+              <a:t>Where to start</a:t>
+            </a:r>
+            <a:endParaRPr lang="en-US" sz="3100" dirty="0"/>
+          </a:p>
+        </p:txBody>
+      </p:sp>
+      <p:sp>
+        <p:nvSpPr>
+          <p:cNvPr id="4" name="Shape 2"/>
+          <p:cNvSpPr/>
+          <p:nvPr/>
+        </p:nvSpPr>
+        <p:spPr>
+          <a:xfrm>
+            <a:off x="548640" y="1783080"/>
+            <a:ext cx="2587752" cy="2423160"/>
+          </a:xfrm>
+          <a:prstGeom prst="roundRect">
+            <a:avLst>
+              <a:gd name="adj" fmla="val 3396"/>
+            </a:avLst>
+          </a:prstGeom>
+          <a:solidFill>
+            <a:srgbClr val="1F2936"/>
+          </a:solidFill>
+          <a:ln/>
+        </p:spPr>
+      </p:sp>
+      <p:sp>
+        <p:nvSpPr>
+          <p:cNvPr id="5" name="Text 3"/>
+          <p:cNvSpPr/>
+          <p:nvPr/>
+        </p:nvSpPr>
+        <p:spPr>
+          <a:xfrm>
+            <a:off x="804672" y="1965960"/>
+            <a:ext cx="1097280" cy="502920"/>
+          </a:xfrm>
+          <a:prstGeom prst="rect">
+            <a:avLst/>
+          </a:prstGeom>
+          <a:noFill/>
+          <a:ln/>
+        </p:spPr>
+        <p:txBody>
+          <a:bodyPr wrap="square" lIns="0" tIns="0" rIns="0" bIns="0" rtlCol="0" anchor="ctr"/>
+          <a:lstStyle/>
+          <a:p>
+            <a:pPr indent="0" marL="0">
+              <a:buNone/>
+            </a:pPr>
+            <a:r>
+              <a:rPr lang="en-US" sz="2800" b="1" dirty="0">
+                <a:solidFill>
+                  <a:srgbClr val="E39B2C"/>
+                </a:solidFill>
+                <a:latin typeface="Cambria" pitchFamily="34" charset="0"/>
+                <a:ea typeface="Cambria" pitchFamily="34" charset="-122"/>
+                <a:cs typeface="Cambria" pitchFamily="34" charset="-120"/>
+              </a:rPr>
+              <a:t>01</a:t>
+            </a:r>
+            <a:endParaRPr lang="en-US" sz="2800" dirty="0"/>
+          </a:p>
+        </p:txBody>
+      </p:sp>
+      <p:sp>
+        <p:nvSpPr>
+          <p:cNvPr id="6" name="Text 4"/>
+          <p:cNvSpPr/>
+          <p:nvPr/>
+        </p:nvSpPr>
+        <p:spPr>
+          <a:xfrm>
+            <a:off x="786384" y="2523744"/>
+            <a:ext cx="2139696" cy="786384"/>
+          </a:xfrm>
+          <a:prstGeom prst="rect">
+            <a:avLst/>
+          </a:prstGeom>
+          <a:noFill/>
+          <a:ln/>
+        </p:spPr>
+        <p:txBody>
+          <a:bodyPr wrap="square" lIns="0" tIns="0" rIns="0" bIns="0" rtlCol="0" anchor="t"/>
+          <a:lstStyle/>
+          <a:p>
+            <a:pPr indent="0" marL="0">
+              <a:lnSpc>
+                <a:spcPts val="2000"/>
+              </a:lnSpc>
+              <a:buNone/>
+            </a:pPr>
+            <a:r>
+              <a:rPr lang="en-US" sz="1500" b="1" dirty="0">
+                <a:solidFill>
+                  <a:srgbClr val="FFFFFF"/>
+                </a:solidFill>
+                <a:latin typeface="Cambria" pitchFamily="34" charset="0"/>
+                <a:ea typeface="Cambria" pitchFamily="34" charset="-122"/>
+                <a:cs typeface="Cambria" pitchFamily="34" charset="-120"/>
+              </a:rPr>
+              <a:t>Set the tagging standard</a:t>
+            </a:r>
+            <a:endParaRPr lang="en-US" sz="1500" dirty="0"/>
+          </a:p>
+        </p:txBody>
+      </p:sp>
+      <p:sp>
+        <p:nvSpPr>
+          <p:cNvPr id="7" name="Text 5"/>
+          <p:cNvSpPr/>
+          <p:nvPr/>
+        </p:nvSpPr>
+        <p:spPr>
+          <a:xfrm>
+            <a:off x="786384" y="3346704"/>
+            <a:ext cx="2139696" cy="749808"/>
+          </a:xfrm>
+          <a:prstGeom prst="rect">
+            <a:avLst/>
+          </a:prstGeom>
+          <a:noFill/>
+          <a:ln/>
+        </p:spPr>
+        <p:txBody>
+          <a:bodyPr wrap="square" lIns="0" tIns="0" rIns="0" bIns="0" rtlCol="0" anchor="t"/>
+          <a:lstStyle/>
+          <a:p>
+            <a:pPr indent="0" marL="0">
+              <a:lnSpc>
+                <a:spcPts val="1500"/>
+              </a:lnSpc>
+              <a:buNone/>
+            </a:pPr>
+            <a:r>
+              <a:rPr lang="en-US" sz="1200" dirty="0">
+                <a:solidFill>
+                  <a:srgbClr val="9EABBA"/>
+                </a:solidFill>
+                <a:latin typeface="Calibri" pitchFamily="34" charset="0"/>
+                <a:ea typeface="Calibri" pitchFamily="34" charset="-122"/>
+                <a:cs typeface="Calibri" pitchFamily="34" charset="-120"/>
+              </a:rPr>
+              <a:t>Agree a consistent taxonomy before investing in dashboards.</a:t>
+            </a:r>
+            <a:endParaRPr lang="en-US" sz="1200" dirty="0"/>
+          </a:p>
+        </p:txBody>
+      </p:sp>
+      <p:sp>
+        <p:nvSpPr>
+          <p:cNvPr id="8" name="Shape 6"/>
+          <p:cNvSpPr/>
+          <p:nvPr/>
+        </p:nvSpPr>
+        <p:spPr>
+          <a:xfrm>
+            <a:off x="3383280" y="1783080"/>
+            <a:ext cx="2587752" cy="2423160"/>
+          </a:xfrm>
+          <a:prstGeom prst="roundRect">
+            <a:avLst>
+              <a:gd name="adj" fmla="val 3396"/>
+            </a:avLst>
+          </a:prstGeom>
+          <a:solidFill>
+            <a:srgbClr val="F1F3F6"/>
+          </a:solidFill>
+          <a:ln/>
+        </p:spPr>
+      </p:sp>
+      <p:sp>
+        <p:nvSpPr>
+          <p:cNvPr id="9" name="Text 7"/>
+          <p:cNvSpPr/>
+          <p:nvPr/>
+        </p:nvSpPr>
+        <p:spPr>
+          <a:xfrm>
+            <a:off x="3639312" y="1965960"/>
+            <a:ext cx="1097280" cy="502920"/>
+          </a:xfrm>
+          <a:prstGeom prst="rect">
+            <a:avLst/>
+          </a:prstGeom>
+          <a:noFill/>
+          <a:ln/>
+        </p:spPr>
+        <p:txBody>
+          <a:bodyPr wrap="square" lIns="0" tIns="0" rIns="0" bIns="0" rtlCol="0" anchor="ctr"/>
+          <a:lstStyle/>
+          <a:p>
+            <a:pPr indent="0" marL="0">
+              <a:buNone/>
+            </a:pPr>
+            <a:r>
+              <a:rPr lang="en-US" sz="2800" b="1" dirty="0">
+                <a:solidFill>
+                  <a:srgbClr val="B9C2CD"/>
+                </a:solidFill>
+                <a:latin typeface="Cambria" pitchFamily="34" charset="0"/>
+                <a:ea typeface="Cambria" pitchFamily="34" charset="-122"/>
+                <a:cs typeface="Cambria" pitchFamily="34" charset="-120"/>
+              </a:rPr>
+              <a:t>02</a:t>
+            </a:r>
+            <a:endParaRPr lang="en-US" sz="2800" dirty="0"/>
+          </a:p>
+        </p:txBody>
+      </p:sp>
+      <p:sp>
+        <p:nvSpPr>
+          <p:cNvPr id="10" name="Text 8"/>
+          <p:cNvSpPr/>
+          <p:nvPr/>
+        </p:nvSpPr>
+        <p:spPr>
+          <a:xfrm>
+            <a:off x="3621024" y="2523744"/>
+            <a:ext cx="2139696" cy="786384"/>
+          </a:xfrm>
+          <a:prstGeom prst="rect">
+            <a:avLst/>
+          </a:prstGeom>
+          <a:noFill/>
+          <a:ln/>
+        </p:spPr>
+        <p:txBody>
+          <a:bodyPr wrap="square" lIns="0" tIns="0" rIns="0" bIns="0" rtlCol="0" anchor="t"/>
+          <a:lstStyle/>
+          <a:p>
+            <a:pPr indent="0" marL="0">
+              <a:lnSpc>
+                <a:spcPts val="2000"/>
+              </a:lnSpc>
+              <a:buNone/>
+            </a:pPr>
+            <a:r>
+              <a:rPr lang="en-US" sz="1500" b="1" dirty="0">
+                <a:solidFill>
+                  <a:srgbClr val="1B2430"/>
+                </a:solidFill>
+                <a:latin typeface="Cambria" pitchFamily="34" charset="0"/>
+                <a:ea typeface="Cambria" pitchFamily="34" charset="-122"/>
+                <a:cs typeface="Cambria" pitchFamily="34" charset="-120"/>
+              </a:rPr>
+              <a:t>Start with the biggest spend</a:t>
+            </a:r>
+            <a:endParaRPr lang="en-US" sz="1500" dirty="0"/>
+          </a:p>
+        </p:txBody>
+      </p:sp>
+      <p:sp>
+        <p:nvSpPr>
+          <p:cNvPr id="11" name="Text 9"/>
+          <p:cNvSpPr/>
+          <p:nvPr/>
+        </p:nvSpPr>
+        <p:spPr>
+          <a:xfrm>
+            <a:off x="3621024" y="3346704"/>
+            <a:ext cx="2139696" cy="749808"/>
+          </a:xfrm>
+          <a:prstGeom prst="rect">
+            <a:avLst/>
+          </a:prstGeom>
+          <a:noFill/>
+          <a:ln/>
+        </p:spPr>
+        <p:txBody>
+          <a:bodyPr wrap="square" lIns="0" tIns="0" rIns="0" bIns="0" rtlCol="0" anchor="t"/>
+          <a:lstStyle/>
+          <a:p>
+            <a:pPr indent="0" marL="0">
+              <a:lnSpc>
+                <a:spcPts val="1500"/>
+              </a:lnSpc>
+              <a:buNone/>
+            </a:pPr>
+            <a:r>
+              <a:rPr lang="en-US" sz="1200" dirty="0">
+                <a:solidFill>
+                  <a:srgbClr val="5C6675"/>
+                </a:solidFill>
+                <a:latin typeface="Calibri" pitchFamily="34" charset="0"/>
+                <a:ea typeface="Calibri" pitchFamily="34" charset="-122"/>
+                <a:cs typeface="Calibri" pitchFamily="34" charset="-120"/>
+              </a:rPr>
+              <a:t>Attack the largest categories first. Don't chase perfect granularity everywhere.</a:t>
+            </a:r>
+            <a:endParaRPr lang="en-US" sz="1200" dirty="0"/>
+          </a:p>
+        </p:txBody>
+      </p:sp>
+      <p:sp>
+        <p:nvSpPr>
+          <p:cNvPr id="12" name="Shape 10"/>
+          <p:cNvSpPr/>
+          <p:nvPr/>
+        </p:nvSpPr>
+        <p:spPr>
+          <a:xfrm>
+            <a:off x="6217920" y="1783080"/>
+            <a:ext cx="2587752" cy="2423160"/>
+          </a:xfrm>
+          <a:prstGeom prst="roundRect">
+            <a:avLst>
+              <a:gd name="adj" fmla="val 3396"/>
+            </a:avLst>
+          </a:prstGeom>
+          <a:solidFill>
+            <a:srgbClr val="F1F3F6"/>
+          </a:solidFill>
+          <a:ln/>
+        </p:spPr>
+      </p:sp>
+      <p:sp>
+        <p:nvSpPr>
+          <p:cNvPr id="13" name="Text 11"/>
+          <p:cNvSpPr/>
+          <p:nvPr/>
+        </p:nvSpPr>
+        <p:spPr>
+          <a:xfrm>
+            <a:off x="6473952" y="1965960"/>
+            <a:ext cx="1097280" cy="502920"/>
+          </a:xfrm>
+          <a:prstGeom prst="rect">
+            <a:avLst/>
+          </a:prstGeom>
+          <a:noFill/>
+          <a:ln/>
+        </p:spPr>
+        <p:txBody>
+          <a:bodyPr wrap="square" lIns="0" tIns="0" rIns="0" bIns="0" rtlCol="0" anchor="ctr"/>
+          <a:lstStyle/>
+          <a:p>
+            <a:pPr indent="0" marL="0">
+              <a:buNone/>
+            </a:pPr>
+            <a:r>
+              <a:rPr lang="en-US" sz="2800" b="1" dirty="0">
+                <a:solidFill>
+                  <a:srgbClr val="B9C2CD"/>
+                </a:solidFill>
+                <a:latin typeface="Cambria" pitchFamily="34" charset="0"/>
+                <a:ea typeface="Cambria" pitchFamily="34" charset="-122"/>
+                <a:cs typeface="Cambria" pitchFamily="34" charset="-120"/>
+              </a:rPr>
+              <a:t>03</a:t>
+            </a:r>
+            <a:endParaRPr lang="en-US" sz="2800" dirty="0"/>
+          </a:p>
+        </p:txBody>
+      </p:sp>
+      <p:sp>
+        <p:nvSpPr>
+          <p:cNvPr id="14" name="Text 12"/>
+          <p:cNvSpPr/>
+          <p:nvPr/>
+        </p:nvSpPr>
+        <p:spPr>
+          <a:xfrm>
+            <a:off x="6455664" y="2523744"/>
+            <a:ext cx="2139696" cy="786384"/>
+          </a:xfrm>
+          <a:prstGeom prst="rect">
+            <a:avLst/>
+          </a:prstGeom>
+          <a:noFill/>
+          <a:ln/>
+        </p:spPr>
+        <p:txBody>
+          <a:bodyPr wrap="square" lIns="0" tIns="0" rIns="0" bIns="0" rtlCol="0" anchor="t"/>
+          <a:lstStyle/>
+          <a:p>
+            <a:pPr indent="0" marL="0">
+              <a:lnSpc>
+                <a:spcPts val="2000"/>
+              </a:lnSpc>
+              <a:buNone/>
+            </a:pPr>
+            <a:r>
+              <a:rPr lang="en-US" sz="1500" b="1" dirty="0">
+                <a:solidFill>
+                  <a:srgbClr val="1B2430"/>
+                </a:solidFill>
+                <a:latin typeface="Cambria" pitchFamily="34" charset="0"/>
+                <a:ea typeface="Cambria" pitchFamily="34" charset="-122"/>
+                <a:cs typeface="Cambria" pitchFamily="34" charset="-120"/>
+              </a:rPr>
+              <a:t>Get finance and engineering talking</a:t>
+            </a:r>
+            <a:endParaRPr lang="en-US" sz="1500" dirty="0"/>
+          </a:p>
+        </p:txBody>
+      </p:sp>
+      <p:sp>
+        <p:nvSpPr>
+          <p:cNvPr id="15" name="Text 13"/>
+          <p:cNvSpPr/>
+          <p:nvPr/>
+        </p:nvSpPr>
+        <p:spPr>
+          <a:xfrm>
+            <a:off x="6455664" y="3346704"/>
+            <a:ext cx="2139696" cy="749808"/>
+          </a:xfrm>
+          <a:prstGeom prst="rect">
+            <a:avLst/>
+          </a:prstGeom>
+          <a:noFill/>
+          <a:ln/>
+        </p:spPr>
+        <p:txBody>
+          <a:bodyPr wrap="square" lIns="0" tIns="0" rIns="0" bIns="0" rtlCol="0" anchor="t"/>
+          <a:lstStyle/>
+          <a:p>
+            <a:pPr indent="0" marL="0">
+              <a:lnSpc>
+                <a:spcPts val="1500"/>
+              </a:lnSpc>
+              <a:buNone/>
+            </a:pPr>
+            <a:r>
+              <a:rPr lang="en-US" sz="1200" dirty="0">
+                <a:solidFill>
+                  <a:srgbClr val="5C6675"/>
+                </a:solidFill>
+                <a:latin typeface="Calibri" pitchFamily="34" charset="0"/>
+                <a:ea typeface="Calibri" pitchFamily="34" charset="-122"/>
+                <a:cs typeface="Calibri" pitchFamily="34" charset="-120"/>
+              </a:rPr>
+              <a:t>Bring both into the conversation early, not as an afterthought.</a:t>
+            </a:r>
+            <a:endParaRPr lang="en-US" sz="1200" dirty="0"/>
+          </a:p>
+        </p:txBody>
+      </p:sp>
+      <p:sp>
+        <p:nvSpPr>
+          <p:cNvPr id="16" name="Shape 14"/>
+          <p:cNvSpPr/>
+          <p:nvPr/>
+        </p:nvSpPr>
+        <p:spPr>
+          <a:xfrm>
+            <a:off x="9052560" y="1783080"/>
+            <a:ext cx="2587752" cy="2423160"/>
+          </a:xfrm>
+          <a:prstGeom prst="roundRect">
+            <a:avLst>
+              <a:gd name="adj" fmla="val 3396"/>
+            </a:avLst>
+          </a:prstGeom>
+          <a:solidFill>
+            <a:srgbClr val="F1F3F6"/>
+          </a:solidFill>
+          <a:ln/>
+        </p:spPr>
+      </p:sp>
+      <p:sp>
+        <p:nvSpPr>
+          <p:cNvPr id="17" name="Text 15"/>
+          <p:cNvSpPr/>
+          <p:nvPr/>
+        </p:nvSpPr>
+        <p:spPr>
+          <a:xfrm>
+            <a:off x="9308592" y="1965960"/>
+            <a:ext cx="1097280" cy="502920"/>
+          </a:xfrm>
+          <a:prstGeom prst="rect">
+            <a:avLst/>
+          </a:prstGeom>
+          <a:noFill/>
+          <a:ln/>
+        </p:spPr>
+        <p:txBody>
+          <a:bodyPr wrap="square" lIns="0" tIns="0" rIns="0" bIns="0" rtlCol="0" anchor="ctr"/>
+          <a:lstStyle/>
+          <a:p>
+            <a:pPr indent="0" marL="0">
+              <a:buNone/>
+            </a:pPr>
+            <a:r>
+              <a:rPr lang="en-US" sz="2800" b="1" dirty="0">
+                <a:solidFill>
+                  <a:srgbClr val="B9C2CD"/>
+                </a:solidFill>
+                <a:latin typeface="Cambria" pitchFamily="34" charset="0"/>
+                <a:ea typeface="Cambria" pitchFamily="34" charset="-122"/>
+                <a:cs typeface="Cambria" pitchFamily="34" charset="-120"/>
+              </a:rPr>
+              <a:t>04</a:t>
+            </a:r>
+            <a:endParaRPr lang="en-US" sz="2800" dirty="0"/>
+          </a:p>
+        </p:txBody>
+      </p:sp>
+      <p:sp>
+        <p:nvSpPr>
+          <p:cNvPr id="18" name="Text 16"/>
+          <p:cNvSpPr/>
+          <p:nvPr/>
+        </p:nvSpPr>
+        <p:spPr>
+          <a:xfrm>
+            <a:off x="9290304" y="2523744"/>
+            <a:ext cx="2139696" cy="786384"/>
+          </a:xfrm>
+          <a:prstGeom prst="rect">
+            <a:avLst/>
+          </a:prstGeom>
+          <a:noFill/>
+          <a:ln/>
+        </p:spPr>
+        <p:txBody>
+          <a:bodyPr wrap="square" lIns="0" tIns="0" rIns="0" bIns="0" rtlCol="0" anchor="t"/>
+          <a:lstStyle/>
+          <a:p>
+            <a:pPr indent="0" marL="0">
+              <a:lnSpc>
+                <a:spcPts val="2000"/>
+              </a:lnSpc>
+              <a:buNone/>
+            </a:pPr>
+            <a:r>
+              <a:rPr lang="en-US" sz="1500" b="1" dirty="0">
+                <a:solidFill>
+                  <a:srgbClr val="1B2430"/>
+                </a:solidFill>
+                <a:latin typeface="Cambria" pitchFamily="34" charset="0"/>
+                <a:ea typeface="Cambria" pitchFamily="34" charset="-122"/>
+                <a:cs typeface="Cambria" pitchFamily="34" charset="-120"/>
+              </a:rPr>
+              <a:t>Set guardrails early</a:t>
+            </a:r>
+            <a:endParaRPr lang="en-US" sz="1500" dirty="0"/>
+          </a:p>
+        </p:txBody>
+      </p:sp>
+      <p:sp>
+        <p:nvSpPr>
+          <p:cNvPr id="19" name="Text 17"/>
+          <p:cNvSpPr/>
+          <p:nvPr/>
+        </p:nvSpPr>
+        <p:spPr>
+          <a:xfrm>
+            <a:off x="9290304" y="3346704"/>
+            <a:ext cx="2139696" cy="749808"/>
+          </a:xfrm>
+          <a:prstGeom prst="rect">
+            <a:avLst/>
+          </a:prstGeom>
+          <a:noFill/>
+          <a:ln/>
+        </p:spPr>
+        <p:txBody>
+          <a:bodyPr wrap="square" lIns="0" tIns="0" rIns="0" bIns="0" rtlCol="0" anchor="t"/>
+          <a:lstStyle/>
+          <a:p>
+            <a:pPr indent="0" marL="0">
+              <a:lnSpc>
+                <a:spcPts val="1500"/>
+              </a:lnSpc>
+              <a:buNone/>
+            </a:pPr>
+            <a:r>
+              <a:rPr lang="en-US" sz="1200" dirty="0">
+                <a:solidFill>
+                  <a:srgbClr val="5C6675"/>
+                </a:solidFill>
+                <a:latin typeface="Calibri" pitchFamily="34" charset="0"/>
+                <a:ea typeface="Calibri" pitchFamily="34" charset="-122"/>
+                <a:cs typeface="Calibri" pitchFamily="34" charset="-120"/>
+              </a:rPr>
+              <a:t>Owners, budget thresholds and quotas cost little to add — and stop the expensive surprises.</a:t>
+            </a:r>
+            <a:endParaRPr lang="en-US" sz="1200" dirty="0"/>
+          </a:p>
+        </p:txBody>
+      </p:sp>
+      <p:sp>
+        <p:nvSpPr>
+          <p:cNvPr id="20" name="Shape 18"/>
+          <p:cNvSpPr/>
+          <p:nvPr/>
+        </p:nvSpPr>
+        <p:spPr>
+          <a:xfrm>
+            <a:off x="548640" y="4434840"/>
+            <a:ext cx="11091672" cy="1874520"/>
+          </a:xfrm>
+          <a:prstGeom prst="roundRect">
+            <a:avLst>
+              <a:gd name="adj" fmla="val 4390"/>
+            </a:avLst>
+          </a:prstGeom>
+          <a:solidFill>
+            <a:srgbClr val="F1F3F6"/>
+          </a:solidFill>
+          <a:ln/>
+        </p:spPr>
+      </p:sp>
+      <p:sp>
+        <p:nvSpPr>
+          <p:cNvPr id="21" name="Text 19"/>
+          <p:cNvSpPr/>
+          <p:nvPr/>
+        </p:nvSpPr>
+        <p:spPr>
+          <a:xfrm>
+            <a:off x="877824" y="4572000"/>
+            <a:ext cx="6035040" cy="292608"/>
+          </a:xfrm>
+          <a:prstGeom prst="rect">
+            <a:avLst/>
+          </a:prstGeom>
+          <a:noFill/>
+          <a:ln/>
+        </p:spPr>
+        <p:txBody>
+          <a:bodyPr wrap="square" lIns="0" tIns="0" rIns="0" bIns="0" rtlCol="0" anchor="ctr"/>
+          <a:lstStyle/>
+          <a:p>
+            <a:pPr indent="0" marL="0">
+              <a:buNone/>
+            </a:pPr>
+            <a:r>
+              <a:rPr lang="en-US" sz="1200" b="1" spc="180" kern="0" dirty="0">
+                <a:solidFill>
+                  <a:srgbClr val="5C6675"/>
+                </a:solidFill>
+                <a:latin typeface="Calibri" pitchFamily="34" charset="0"/>
+                <a:ea typeface="Calibri" pitchFamily="34" charset="-122"/>
+                <a:cs typeface="Calibri" pitchFamily="34" charset="-120"/>
+              </a:rPr>
+              <a:t>Tooling — match the footprint, not the ambition</a:t>
+            </a:r>
+            <a:endParaRPr lang="en-US" sz="1200" dirty="0"/>
+          </a:p>
+        </p:txBody>
+      </p:sp>
+      <p:sp>
+        <p:nvSpPr>
+          <p:cNvPr id="22" name="Text 20"/>
+          <p:cNvSpPr/>
+          <p:nvPr/>
+        </p:nvSpPr>
+        <p:spPr>
+          <a:xfrm>
+            <a:off x="877824" y="4937760"/>
+            <a:ext cx="1737360" cy="384048"/>
+          </a:xfrm>
+          <a:prstGeom prst="rect">
+            <a:avLst/>
+          </a:prstGeom>
+          <a:noFill/>
+          <a:ln/>
+        </p:spPr>
+        <p:txBody>
+          <a:bodyPr wrap="square" lIns="0" tIns="0" rIns="0" bIns="0" rtlCol="0" anchor="ctr"/>
+          <a:lstStyle/>
+          <a:p>
+            <a:pPr indent="0" marL="0">
+              <a:buNone/>
+            </a:pPr>
+            <a:r>
+              <a:rPr lang="en-US" sz="1350" b="1" dirty="0">
+                <a:solidFill>
+                  <a:srgbClr val="2E8B7A"/>
+                </a:solidFill>
+                <a:latin typeface="Calibri" pitchFamily="34" charset="0"/>
+                <a:ea typeface="Calibri" pitchFamily="34" charset="-122"/>
+                <a:cs typeface="Calibri" pitchFamily="34" charset="-120"/>
+              </a:rPr>
+              <a:t>Native</a:t>
+            </a:r>
+            <a:endParaRPr lang="en-US" sz="1350" dirty="0"/>
+          </a:p>
+        </p:txBody>
+      </p:sp>
+      <p:sp>
+        <p:nvSpPr>
+          <p:cNvPr id="23" name="Text 21"/>
+          <p:cNvSpPr/>
+          <p:nvPr/>
+        </p:nvSpPr>
+        <p:spPr>
+          <a:xfrm>
+            <a:off x="2651760" y="4937760"/>
+            <a:ext cx="8595360" cy="384048"/>
+          </a:xfrm>
+          <a:prstGeom prst="rect">
+            <a:avLst/>
+          </a:prstGeom>
+          <a:noFill/>
+          <a:ln/>
+        </p:spPr>
+        <p:txBody>
+          <a:bodyPr wrap="square" lIns="0" tIns="0" rIns="0" bIns="0" rtlCol="0" anchor="ctr"/>
+          <a:lstStyle/>
+          <a:p>
+            <a:pPr indent="0" marL="0">
+              <a:buNone/>
+            </a:pPr>
+            <a:r>
+              <a:rPr lang="en-US" sz="1350" dirty="0">
+                <a:solidFill>
+                  <a:srgbClr val="5C6675"/>
+                </a:solidFill>
+                <a:latin typeface="Calibri" pitchFamily="34" charset="0"/>
+                <a:ea typeface="Calibri" pitchFamily="34" charset="-122"/>
+                <a:cs typeface="Calibri" pitchFamily="34" charset="-120"/>
+              </a:rPr>
+              <a:t>AWS Cost Explorer  ·  Azure Cost Management  ·  GCP Billing</a:t>
+            </a:r>
+            <a:endParaRPr lang="en-US" sz="1350" dirty="0"/>
+          </a:p>
+        </p:txBody>
+      </p:sp>
+      <p:sp>
+        <p:nvSpPr>
+          <p:cNvPr id="24" name="Text 22"/>
+          <p:cNvSpPr/>
+          <p:nvPr/>
+        </p:nvSpPr>
+        <p:spPr>
+          <a:xfrm>
+            <a:off x="877824" y="5349240"/>
+            <a:ext cx="1737360" cy="384048"/>
+          </a:xfrm>
+          <a:prstGeom prst="rect">
+            <a:avLst/>
+          </a:prstGeom>
+          <a:noFill/>
+          <a:ln/>
+        </p:spPr>
+        <p:txBody>
+          <a:bodyPr wrap="square" lIns="0" tIns="0" rIns="0" bIns="0" rtlCol="0" anchor="ctr"/>
+          <a:lstStyle/>
+          <a:p>
+            <a:pPr indent="0" marL="0">
+              <a:buNone/>
+            </a:pPr>
+            <a:r>
+              <a:rPr lang="en-US" sz="1350" b="1" dirty="0">
+                <a:solidFill>
+                  <a:srgbClr val="B87B18"/>
+                </a:solidFill>
+                <a:latin typeface="Calibri" pitchFamily="34" charset="0"/>
+                <a:ea typeface="Calibri" pitchFamily="34" charset="-122"/>
+                <a:cs typeface="Calibri" pitchFamily="34" charset="-120"/>
+              </a:rPr>
+              <a:t>Third-party</a:t>
+            </a:r>
+            <a:endParaRPr lang="en-US" sz="1350" dirty="0"/>
+          </a:p>
+        </p:txBody>
+      </p:sp>
+      <p:sp>
+        <p:nvSpPr>
+          <p:cNvPr id="25" name="Text 23"/>
+          <p:cNvSpPr/>
+          <p:nvPr/>
+        </p:nvSpPr>
+        <p:spPr>
+          <a:xfrm>
+            <a:off x="2651760" y="5349240"/>
+            <a:ext cx="8595360" cy="384048"/>
+          </a:xfrm>
+          <a:prstGeom prst="rect">
+            <a:avLst/>
+          </a:prstGeom>
+          <a:noFill/>
+          <a:ln/>
+        </p:spPr>
+        <p:txBody>
+          <a:bodyPr wrap="square" lIns="0" tIns="0" rIns="0" bIns="0" rtlCol="0" anchor="ctr"/>
+          <a:lstStyle/>
+          <a:p>
+            <a:pPr indent="0" marL="0">
+              <a:buNone/>
+            </a:pPr>
+            <a:r>
+              <a:rPr lang="en-US" sz="1350" dirty="0">
+                <a:solidFill>
+                  <a:srgbClr val="5C6675"/>
+                </a:solidFill>
+                <a:latin typeface="Calibri" pitchFamily="34" charset="0"/>
+                <a:ea typeface="Calibri" pitchFamily="34" charset="-122"/>
+                <a:cs typeface="Calibri" pitchFamily="34" charset="-120"/>
+              </a:rPr>
+              <a:t>CloudHealth  ·  Apptio  ·  Vantage  ·  nOps  ·  Finout  ·  CoreStack</a:t>
+            </a:r>
+            <a:endParaRPr lang="en-US" sz="1350" dirty="0"/>
+          </a:p>
+        </p:txBody>
+      </p:sp>
+      <p:sp>
+        <p:nvSpPr>
+          <p:cNvPr id="26" name="Text 24"/>
+          <p:cNvSpPr/>
+          <p:nvPr/>
+        </p:nvSpPr>
+        <p:spPr>
+          <a:xfrm>
+            <a:off x="877824" y="5760720"/>
+            <a:ext cx="1737360" cy="384048"/>
+          </a:xfrm>
+          <a:prstGeom prst="rect">
+            <a:avLst/>
+          </a:prstGeom>
+          <a:noFill/>
+          <a:ln/>
+        </p:spPr>
+        <p:txBody>
+          <a:bodyPr wrap="square" lIns="0" tIns="0" rIns="0" bIns="0" rtlCol="0" anchor="ctr"/>
+          <a:lstStyle/>
+          <a:p>
+            <a:pPr indent="0" marL="0">
+              <a:buNone/>
+            </a:pPr>
+            <a:r>
+              <a:rPr lang="en-US" sz="1350" b="1" dirty="0">
+                <a:solidFill>
+                  <a:srgbClr val="1B2430"/>
+                </a:solidFill>
+                <a:latin typeface="Calibri" pitchFamily="34" charset="0"/>
+                <a:ea typeface="Calibri" pitchFamily="34" charset="-122"/>
+                <a:cs typeface="Calibri" pitchFamily="34" charset="-120"/>
+              </a:rPr>
+              <a:t>Standard</a:t>
+            </a:r>
+            <a:endParaRPr lang="en-US" sz="1350" dirty="0"/>
+          </a:p>
+        </p:txBody>
+      </p:sp>
+      <p:sp>
+        <p:nvSpPr>
+          <p:cNvPr id="27" name="Text 25"/>
+          <p:cNvSpPr/>
+          <p:nvPr/>
+        </p:nvSpPr>
+        <p:spPr>
+          <a:xfrm>
+            <a:off x="2651760" y="5760720"/>
+            <a:ext cx="8595360" cy="384048"/>
+          </a:xfrm>
+          <a:prstGeom prst="rect">
+            <a:avLst/>
+          </a:prstGeom>
+          <a:noFill/>
+          <a:ln/>
+        </p:spPr>
+        <p:txBody>
+          <a:bodyPr wrap="square" lIns="0" tIns="0" rIns="0" bIns="0" rtlCol="0" anchor="ctr"/>
+          <a:lstStyle/>
+          <a:p>
+            <a:pPr indent="0" marL="0">
+              <a:buNone/>
+            </a:pPr>
+            <a:r>
+              <a:rPr lang="en-US" sz="1350" dirty="0">
+                <a:solidFill>
+                  <a:srgbClr val="5C6675"/>
+                </a:solidFill>
+                <a:latin typeface="Calibri" pitchFamily="34" charset="0"/>
+                <a:ea typeface="Calibri" pitchFamily="34" charset="-122"/>
+                <a:cs typeface="Calibri" pitchFamily="34" charset="-120"/>
+              </a:rPr>
+              <a:t>FOCUS-compliant platforms for multi-cloud reporting</a:t>
+            </a:r>
+            <a:endParaRPr lang="en-US" sz="1350" dirty="0"/>
+          </a:p>
+        </p:txBody>
+      </p:sp>
+    </p:spTree>
+  </p:cSld>
+  <p:clrMapOvr>
+    <a:masterClrMapping/>
+  </p:clrMapOvr>
+</p:sld>
+</file>
+
+<file path=ppt/slides/slide25.xml><?xml version="1.0" encoding="utf-8"?>
+<p:sld xmlns:a="http://schemas.openxmlformats.org/drawingml/2006/main" xmlns:r="http://schemas.openxmlformats.org/officeDocument/2006/relationships" xmlns:p="http://schemas.openxmlformats.org/presentationml/2006/main">
+  <p:cSld name="Slide 25">
     <p:bg>
       <p:bgPr>
         <a:solidFill>
@@ -20030,9 +21117,9 @@
 </p:sld>
 </file>
 
-<file path=ppt/slides/slide25.xml><?xml version="1.0" encoding="utf-8"?>
+<file path=ppt/slides/slide26.xml><?xml version="1.0" encoding="utf-8"?>
 <p:sld xmlns:a="http://schemas.openxmlformats.org/drawingml/2006/main" xmlns:r="http://schemas.openxmlformats.org/officeDocument/2006/relationships" xmlns:p="http://schemas.openxmlformats.org/presentationml/2006/main">
-  <p:cSld name="Slide 25">
+  <p:cSld name="Slide 26">
     <p:bg>
       <p:bgPr>
         <a:solidFill>

--- a/presentations/finops-gaining-visibility-cfo.pptx
+++ b/presentations/finops-gaining-visibility-cfo.pptx
@@ -31,9 +31,10 @@
     <p:sldId id="279" r:id="rId25"/>
     <p:sldId id="280" r:id="rId26"/>
     <p:sldId id="281" r:id="rId27"/>
+    <p:sldId id="282" r:id="rId28"/>
   </p:sldIdLst>
   <p:notesMasterIdLst>
-    <p:notesMasterId r:id="rId28"/>
+    <p:notesMasterId r:id="rId29"/>
   </p:notesMasterIdLst>
   <p:sldSz cx="12192000" cy="6858000"/>
   <p:notesSz cx="6858000" cy="12192000"/>
@@ -1935,7 +1936,7 @@
           <a:p>
             <a:r>
               <a:rPr lang="en-US" dirty="0"/>
-              <a:t>This is the ask, and the honest cost answer is effort rather than licence spend if we stay on native tooling — name the roles and the share of their time instead of quoting a budget number you would have to defend. Step one is the only item that cannot run in parallel: every downstream report degrades if the taxonomy is still moving. Split the ownership explicitly — finance owns the taxonomy, the allocation policy and the KPI definitions; engineering owns enforcement, instrumentation and remediation. Steps two and four are both arguments for restraint: attack the largest cost categories rather than pursuing complete granularity, and buy tooling that matches the estate we have rather than the one we might have in three years.</a:t>
+              <a:t>The procurement slide. Treat the six capabilities as the requirement list rather than as an endorsement — they describe what this category of platform does, and the same list should go to any competing vendor so the comparison is like for like. Two commercial points. First, the pricing model in this market is usually a percentage of cloud spend under management or a tiered subscription, which means the cost grows with the estate — worth confirming before it becomes a line that scales with the problem it manages. Second, insist on FOCUS export in the contract: it is the standard that makes the data portable and keeps a future migration cheap. Be explicit about the published outcomes. Roughly 30% cost reduction and 50% engineer time saved are vendor marketing figures, not audited results and not a commitment to us. If we want a business case, it should be built on our own measured allocation gap and the cost of the analyst time this would replace — a proof of value on our data, with success criteria agreed in advance.</a:t>
             </a:r>
             <a:endParaRPr lang="en-US" dirty="0"/>
           </a:p>
@@ -2023,7 +2024,7 @@
           <a:p>
             <a:r>
               <a:rPr lang="en-US" dirty="0"/>
-              <a:t>Close on why this sequencing produces a better financial outcome than cutting first. A cut delivers a one-time step down and reverses as soon as attention moves elsewhere; allocation plus ownership changes the rate at which cost is added, which compounds across every subsequent period. That is also the honest framing for the board: the near-term deliverable is explainable variance and a forecast we can stand behind, with targeted savings following the first full period of clean data. Ask for the first two links today — the allocation standard and published ownership — because the rest follow from them and cannot be bought separately.</a:t>
+              <a:t>This is the ask, and the honest cost answer is effort rather than licence spend if we stay on native tooling — name the roles and the share of their time instead of quoting a budget number you would have to defend. Step one is the only item that cannot run in parallel: every downstream report degrades if the taxonomy is still moving. Split the ownership explicitly — finance owns the taxonomy, the allocation policy and the KPI definitions; engineering owns enforcement, instrumentation and remediation. Steps two and four are both arguments for restraint: attack the largest cost categories rather than pursuing complete granularity, and buy tooling that matches the estate we have rather than the one we might have in three years.</a:t>
             </a:r>
             <a:endParaRPr lang="en-US" dirty="0"/>
           </a:p>
@@ -2111,7 +2112,7 @@
           <a:p>
             <a:r>
               <a:rPr lang="en-US" dirty="0"/>
-              <a:t>Expect five questions and have the answers ready. What does it cost: effort, principally, plus any tooling only if we are genuinely multi-cloud. When do savings appear: allocation coverage improves within weeks, targeted savings follow the first full period of clean data, and be careful not to promise a percentage before we can see where the waste is. Who owns it: name the taxonomy owner and the monthly review before leaving the room, or none of this happens. Does it affect the close: better, not worse — daily data improves the accrual, though chargeback adds a journal step worth scoping with the controller. And will chargeback start an internal war: only if we launch it on allocation nobody trusts, which is exactly what the showback runway is for.</a:t>
+              <a:t>Close on why this sequencing produces a better financial outcome than cutting first. A cut delivers a one-time step down and reverses as soon as attention moves elsewhere; allocation plus ownership changes the rate at which cost is added, which compounds across every subsequent period. That is also the honest framing for the board: the near-term deliverable is explainable variance and a forecast we can stand behind, with targeted savings following the first full period of clean data. Ask for the first two links today — the allocation standard and published ownership — because the rest follow from them and cannot be bought separately.</a:t>
             </a:r>
             <a:endParaRPr lang="en-US" dirty="0"/>
           </a:p>
@@ -2135,6 +2136,94 @@
             <a:fld id="{F7021451-1387-4CA6-816F-3879F97B5CBC}" type="slidenum">
               <a:rPr lang="en-US"/>
               <a:t>26</a:t>
+            </a:fld>
+            <a:endParaRPr lang="en-US"/>
+          </a:p>
+        </p:txBody>
+      </p:sp>
+    </p:spTree>
+    <p:extLst>
+      <p:ext uri="{BB962C8B-B14F-4D97-AF65-F5344CB8AC3E}">
+        <p14:creationId xmlns:p14="http://schemas.microsoft.com/office/powerpoint/2010/main" val="1024086991"/>
+      </p:ext>
+    </p:extLst>
+  </p:cSld>
+  <p:clrMapOvr>
+    <a:masterClrMapping/>
+  </p:clrMapOvr>
+</p:notes>
+</file>
+
+<file path=ppt/notesSlides/notesSlide27.xml><?xml version="1.0" encoding="utf-8"?>
+<p:notes xmlns:a="http://schemas.openxmlformats.org/drawingml/2006/main" xmlns:r="http://schemas.openxmlformats.org/officeDocument/2006/relationships" xmlns:p="http://schemas.openxmlformats.org/presentationml/2006/main">
+  <p:cSld>
+    <p:spTree>
+      <p:nvGrpSpPr>
+        <p:cNvPr id="1" name=""/>
+        <p:cNvGrpSpPr/>
+        <p:nvPr/>
+      </p:nvGrpSpPr>
+      <p:grpSpPr>
+        <a:xfrm>
+          <a:off x="0" y="0"/>
+          <a:ext cx="0" cy="0"/>
+          <a:chOff x="0" y="0"/>
+          <a:chExt cx="0" cy="0"/>
+        </a:xfrm>
+      </p:grpSpPr>
+      <p:sp>
+        <p:nvSpPr>
+          <p:cNvPr id="2" name="Slide Image Placeholder 1"/>
+          <p:cNvSpPr>
+            <a:spLocks noGrp="1" noRot="1" noChangeAspect="1"/>
+          </p:cNvSpPr>
+          <p:nvPr>
+            <p:ph type="sldImg"/>
+          </p:nvPr>
+        </p:nvSpPr>
+        <p:spPr/>
+      </p:sp>
+      <p:sp>
+        <p:nvSpPr>
+          <p:cNvPr id="3" name="Notes Placeholder 2"/>
+          <p:cNvSpPr>
+            <a:spLocks noGrp="1"/>
+          </p:cNvSpPr>
+          <p:nvPr>
+            <p:ph type="body" idx="1"/>
+          </p:nvPr>
+        </p:nvSpPr>
+        <p:spPr/>
+        <p:txBody>
+          <a:bodyPr/>
+          <a:lstStyle/>
+          <a:p>
+            <a:r>
+              <a:rPr lang="en-US" dirty="0"/>
+              <a:t>Expect five questions and have the answers ready. What does it cost: effort, principally, plus any tooling only if we are genuinely multi-cloud. When do savings appear: allocation coverage improves within weeks, targeted savings follow the first full period of clean data, and be careful not to promise a percentage before we can see where the waste is. Who owns it: name the taxonomy owner and the monthly review before leaving the room, or none of this happens. Does it affect the close: better, not worse — daily data improves the accrual, though chargeback adds a journal step worth scoping with the controller. And will chargeback start an internal war: only if we launch it on allocation nobody trusts, which is exactly what the showback runway is for.</a:t>
+            </a:r>
+            <a:endParaRPr lang="en-US" dirty="0"/>
+          </a:p>
+        </p:txBody>
+      </p:sp>
+      <p:sp>
+        <p:nvSpPr>
+          <p:cNvPr id="4" name="Slide Number Placeholder 3"/>
+          <p:cNvSpPr>
+            <a:spLocks noGrp="1"/>
+          </p:cNvSpPr>
+          <p:nvPr>
+            <p:ph type="sldNum" sz="quarter" idx="10"/>
+          </p:nvPr>
+        </p:nvSpPr>
+        <p:spPr/>
+        <p:txBody>
+          <a:bodyPr/>
+          <a:lstStyle/>
+          <a:p>
+            <a:fld id="{F7021451-1387-4CA6-816F-3879F97B5CBC}" type="slidenum">
+              <a:rPr lang="en-US"/>
+              <a:t>27</a:t>
             </a:fld>
             <a:endParaRPr lang="en-US"/>
           </a:p>
@@ -19387,7 +19476,7 @@
                 <a:ea typeface="Calibri" pitchFamily="34" charset="-122"/>
                 <a:cs typeface="Calibri" pitchFamily="34" charset="-120"/>
               </a:rPr>
-              <a:t>THE PATH FORWARD</a:t>
+              <a:t>TOOLING — A WORKED EXAMPLE</a:t>
             </a:r>
             <a:endParaRPr lang="en-US" sz="1100" dirty="0"/>
           </a:p>
@@ -19426,7 +19515,7 @@
                 <a:ea typeface="Cambria" pitchFamily="34" charset="-122"/>
                 <a:cs typeface="Cambria" pitchFamily="34" charset="-120"/>
               </a:rPr>
-              <a:t>Where to start</a:t>
+              <a:t>What a FinOps platform adds: Finout</a:t>
             </a:r>
             <a:endParaRPr lang="en-US" sz="3100" dirty="0"/>
           </a:p>
@@ -19434,36 +19523,119 @@
       </p:sp>
       <p:sp>
         <p:nvSpPr>
-          <p:cNvPr id="4" name="Shape 2"/>
-          <p:cNvSpPr/>
-          <p:nvPr/>
-        </p:nvSpPr>
-        <p:spPr>
-          <a:xfrm>
-            <a:off x="548640" y="1783080"/>
-            <a:ext cx="2587752" cy="2423160"/>
+          <p:cNvPr id="4" name="Text 2"/>
+          <p:cNvSpPr/>
+          <p:nvPr/>
+        </p:nvSpPr>
+        <p:spPr>
+          <a:xfrm>
+            <a:off x="548640" y="1536192"/>
+            <a:ext cx="10607040" cy="365760"/>
+          </a:xfrm>
+          <a:prstGeom prst="rect">
+            <a:avLst/>
+          </a:prstGeom>
+          <a:noFill/>
+          <a:ln/>
+        </p:spPr>
+        <p:txBody>
+          <a:bodyPr wrap="square" lIns="0" tIns="0" rIns="0" bIns="0" rtlCol="0" anchor="ctr"/>
+          <a:lstStyle/>
+          <a:p>
+            <a:pPr indent="0" marL="0">
+              <a:buNone/>
+            </a:pPr>
+            <a:r>
+              <a:rPr lang="en-US" sz="1500" dirty="0">
+                <a:solidFill>
+                  <a:srgbClr val="5C6675"/>
+                </a:solidFill>
+                <a:latin typeface="Calibri" pitchFamily="34" charset="0"/>
+                <a:ea typeface="Calibri" pitchFamily="34" charset="-122"/>
+                <a:cs typeface="Calibri" pitchFamily="34" charset="-120"/>
+              </a:rPr>
+              <a:t>The capabilities a dedicated platform brings over native billing consoles, and what to test before buying one.</a:t>
+            </a:r>
+            <a:endParaRPr lang="en-US" sz="1500" dirty="0"/>
+          </a:p>
+        </p:txBody>
+      </p:sp>
+      <p:sp>
+        <p:nvSpPr>
+          <p:cNvPr id="5" name="Shape 3"/>
+          <p:cNvSpPr/>
+          <p:nvPr/>
+        </p:nvSpPr>
+        <p:spPr>
+          <a:xfrm>
+            <a:off x="548640" y="2121408"/>
+            <a:ext cx="3511296" cy="1719072"/>
           </a:xfrm>
           <a:prstGeom prst="roundRect">
             <a:avLst>
-              <a:gd name="adj" fmla="val 3396"/>
+              <a:gd name="adj" fmla="val 4787"/>
             </a:avLst>
           </a:prstGeom>
           <a:solidFill>
-            <a:srgbClr val="1F2936"/>
-          </a:solidFill>
-          <a:ln/>
-        </p:spPr>
-      </p:sp>
-      <p:sp>
-        <p:nvSpPr>
-          <p:cNvPr id="5" name="Text 3"/>
-          <p:cNvSpPr/>
-          <p:nvPr/>
-        </p:nvSpPr>
-        <p:spPr>
-          <a:xfrm>
-            <a:off x="804672" y="1965960"/>
-            <a:ext cx="1097280" cy="502920"/>
+            <a:srgbClr val="F1F3F6"/>
+          </a:solidFill>
+          <a:ln/>
+        </p:spPr>
+      </p:sp>
+      <p:sp>
+        <p:nvSpPr>
+          <p:cNvPr id="6" name="Shape 4"/>
+          <p:cNvSpPr/>
+          <p:nvPr/>
+        </p:nvSpPr>
+        <p:spPr>
+          <a:xfrm>
+            <a:off x="841248" y="2359152"/>
+            <a:ext cx="457200" cy="457200"/>
+          </a:xfrm>
+          <a:prstGeom prst="ellipse">
+            <a:avLst/>
+          </a:prstGeom>
+          <a:solidFill>
+            <a:srgbClr val="FFFFFF"/>
+          </a:solidFill>
+          <a:ln/>
+        </p:spPr>
+      </p:sp>
+      <p:pic>
+        <p:nvPicPr>
+          <p:cNvPr id="7" name="Image 0" descr="preencoded.png">    </p:cNvPr>
+          <p:cNvPicPr>
+            <a:picLocks noChangeAspect="1"/>
+          </p:cNvPicPr>
+          <p:nvPr/>
+        </p:nvPicPr>
+        <p:blipFill>
+          <a:blip r:embed="rId1"/>
+          <a:stretch>
+            <a:fillRect/>
+          </a:stretch>
+        </p:blipFill>
+        <p:spPr>
+          <a:xfrm>
+            <a:off x="955548" y="2473452"/>
+            <a:ext cx="228600" cy="228600"/>
+          </a:xfrm>
+          <a:prstGeom prst="rect">
+            <a:avLst/>
+          </a:prstGeom>
+        </p:spPr>
+      </p:pic>
+      <p:sp>
+        <p:nvSpPr>
+          <p:cNvPr id="8" name="Text 5"/>
+          <p:cNvSpPr/>
+          <p:nvPr/>
+        </p:nvSpPr>
+        <p:spPr>
+          <a:xfrm>
+            <a:off x="1426464" y="2340864"/>
+            <a:ext cx="2468880" cy="493776"/>
           </a:xfrm>
           <a:prstGeom prst="rect">
             <a:avLst/>
@@ -19479,30 +19651,30 @@
               <a:buNone/>
             </a:pPr>
             <a:r>
-              <a:rPr lang="en-US" sz="2800" b="1" dirty="0">
-                <a:solidFill>
-                  <a:srgbClr val="E39B2C"/>
+              <a:rPr lang="en-US" sz="1500" b="1" dirty="0">
+                <a:solidFill>
+                  <a:srgbClr val="1B2430"/>
                 </a:solidFill>
                 <a:latin typeface="Cambria" pitchFamily="34" charset="0"/>
                 <a:ea typeface="Cambria" pitchFamily="34" charset="-122"/>
                 <a:cs typeface="Cambria" pitchFamily="34" charset="-120"/>
               </a:rPr>
-              <a:t>01</a:t>
-            </a:r>
-            <a:endParaRPr lang="en-US" sz="2800" dirty="0"/>
-          </a:p>
-        </p:txBody>
-      </p:sp>
-      <p:sp>
-        <p:nvSpPr>
-          <p:cNvPr id="6" name="Text 4"/>
-          <p:cNvSpPr/>
-          <p:nvPr/>
-        </p:nvSpPr>
-        <p:spPr>
-          <a:xfrm>
-            <a:off x="786384" y="2523744"/>
-            <a:ext cx="2139696" cy="786384"/>
+              <a:t>One normalized bill</a:t>
+            </a:r>
+            <a:endParaRPr lang="en-US" sz="1500" dirty="0"/>
+          </a:p>
+        </p:txBody>
+      </p:sp>
+      <p:sp>
+        <p:nvSpPr>
+          <p:cNvPr id="9" name="Text 6"/>
+          <p:cNvSpPr/>
+          <p:nvPr/>
+        </p:nvSpPr>
+        <p:spPr>
+          <a:xfrm>
+            <a:off x="841248" y="2907792"/>
+            <a:ext cx="2926080" cy="859536"/>
           </a:xfrm>
           <a:prstGeom prst="rect">
             <a:avLst/>
@@ -19516,20 +19688,125 @@
           <a:p>
             <a:pPr indent="0" marL="0">
               <a:lnSpc>
-                <a:spcPts val="2000"/>
+                <a:spcPts val="1500"/>
               </a:lnSpc>
               <a:buNone/>
             </a:pPr>
             <a:r>
+              <a:rPr lang="en-US" sz="1150" dirty="0">
+                <a:solidFill>
+                  <a:srgbClr val="5C6675"/>
+                </a:solidFill>
+                <a:latin typeface="Calibri" pitchFamily="34" charset="0"/>
+                <a:ea typeface="Calibri" pitchFamily="34" charset="-122"/>
+                <a:cs typeface="Calibri" pitchFamily="34" charset="-120"/>
+              </a:rPr>
+              <a:t>Cloud, SaaS and AI in one view — AWS, Azure, GCP, OCI, Kubernetes, Snowflake, Databricks, OpenAI, Anthropic. FOCUS supported.</a:t>
+            </a:r>
+            <a:endParaRPr lang="en-US" sz="1150" dirty="0"/>
+          </a:p>
+        </p:txBody>
+      </p:sp>
+      <p:sp>
+        <p:nvSpPr>
+          <p:cNvPr id="10" name="Shape 7"/>
+          <p:cNvSpPr/>
+          <p:nvPr/>
+        </p:nvSpPr>
+        <p:spPr>
+          <a:xfrm>
+            <a:off x="4334256" y="2121408"/>
+            <a:ext cx="3511296" cy="1719072"/>
+          </a:xfrm>
+          <a:prstGeom prst="roundRect">
+            <a:avLst>
+              <a:gd name="adj" fmla="val 4787"/>
+            </a:avLst>
+          </a:prstGeom>
+          <a:solidFill>
+            <a:srgbClr val="F1F3F6"/>
+          </a:solidFill>
+          <a:ln/>
+        </p:spPr>
+      </p:sp>
+      <p:sp>
+        <p:nvSpPr>
+          <p:cNvPr id="11" name="Shape 8"/>
+          <p:cNvSpPr/>
+          <p:nvPr/>
+        </p:nvSpPr>
+        <p:spPr>
+          <a:xfrm>
+            <a:off x="4626864" y="2359152"/>
+            <a:ext cx="457200" cy="457200"/>
+          </a:xfrm>
+          <a:prstGeom prst="ellipse">
+            <a:avLst/>
+          </a:prstGeom>
+          <a:solidFill>
+            <a:srgbClr val="FFFFFF"/>
+          </a:solidFill>
+          <a:ln/>
+        </p:spPr>
+      </p:sp>
+      <p:pic>
+        <p:nvPicPr>
+          <p:cNvPr id="12" name="Image 1" descr="preencoded.png">    </p:cNvPr>
+          <p:cNvPicPr>
+            <a:picLocks noChangeAspect="1"/>
+          </p:cNvPicPr>
+          <p:nvPr/>
+        </p:nvPicPr>
+        <p:blipFill>
+          <a:blip r:embed="rId2"/>
+          <a:stretch>
+            <a:fillRect/>
+          </a:stretch>
+        </p:blipFill>
+        <p:spPr>
+          <a:xfrm>
+            <a:off x="4741164" y="2473452"/>
+            <a:ext cx="228600" cy="228600"/>
+          </a:xfrm>
+          <a:prstGeom prst="rect">
+            <a:avLst/>
+          </a:prstGeom>
+        </p:spPr>
+      </p:pic>
+      <p:sp>
+        <p:nvSpPr>
+          <p:cNvPr id="13" name="Text 9"/>
+          <p:cNvSpPr/>
+          <p:nvPr/>
+        </p:nvSpPr>
+        <p:spPr>
+          <a:xfrm>
+            <a:off x="5212080" y="2340864"/>
+            <a:ext cx="2468880" cy="493776"/>
+          </a:xfrm>
+          <a:prstGeom prst="rect">
+            <a:avLst/>
+          </a:prstGeom>
+          <a:noFill/>
+          <a:ln/>
+        </p:spPr>
+        <p:txBody>
+          <a:bodyPr wrap="square" lIns="0" tIns="0" rIns="0" bIns="0" rtlCol="0" anchor="ctr"/>
+          <a:lstStyle/>
+          <a:p>
+            <a:pPr indent="0" marL="0">
+              <a:buNone/>
+            </a:pPr>
+            <a:r>
               <a:rPr lang="en-US" sz="1500" b="1" dirty="0">
                 <a:solidFill>
-                  <a:srgbClr val="FFFFFF"/>
+                  <a:srgbClr val="1B2430"/>
                 </a:solidFill>
                 <a:latin typeface="Cambria" pitchFamily="34" charset="0"/>
                 <a:ea typeface="Cambria" pitchFamily="34" charset="-122"/>
                 <a:cs typeface="Cambria" pitchFamily="34" charset="-120"/>
               </a:rPr>
-              <a:t>Set the tagging standard</a:t>
+              <a:t>Virtual tags</a:t>
             </a:r>
             <a:endParaRPr lang="en-US" sz="1500" dirty="0"/>
           </a:p>
@@ -19537,14 +19814,14 @@
       </p:sp>
       <p:sp>
         <p:nvSpPr>
-          <p:cNvPr id="7" name="Text 5"/>
-          <p:cNvSpPr/>
-          <p:nvPr/>
-        </p:nvSpPr>
-        <p:spPr>
-          <a:xfrm>
-            <a:off x="786384" y="3346704"/>
-            <a:ext cx="2139696" cy="749808"/>
+          <p:cNvPr id="14" name="Text 10"/>
+          <p:cNvSpPr/>
+          <p:nvPr/>
+        </p:nvSpPr>
+        <p:spPr>
+          <a:xfrm>
+            <a:off x="4626864" y="2907792"/>
+            <a:ext cx="2926080" cy="859536"/>
           </a:xfrm>
           <a:prstGeom prst="rect">
             <a:avLst/>
@@ -19563,34 +19840,34 @@
               <a:buNone/>
             </a:pPr>
             <a:r>
-              <a:rPr lang="en-US" sz="1200" dirty="0">
-                <a:solidFill>
-                  <a:srgbClr val="9EABBA"/>
-                </a:solidFill>
-                <a:latin typeface="Calibri" pitchFamily="34" charset="0"/>
-                <a:ea typeface="Calibri" pitchFamily="34" charset="-122"/>
-                <a:cs typeface="Calibri" pitchFamily="34" charset="-120"/>
-              </a:rPr>
-              <a:t>Agree a consistent taxonomy before investing in dashboards.</a:t>
-            </a:r>
-            <a:endParaRPr lang="en-US" sz="1200" dirty="0"/>
-          </a:p>
-        </p:txBody>
-      </p:sp>
-      <p:sp>
-        <p:nvSpPr>
-          <p:cNvPr id="8" name="Shape 6"/>
-          <p:cNvSpPr/>
-          <p:nvPr/>
-        </p:nvSpPr>
-        <p:spPr>
-          <a:xfrm>
-            <a:off x="3383280" y="1783080"/>
-            <a:ext cx="2587752" cy="2423160"/>
+              <a:rPr lang="en-US" sz="1150" dirty="0">
+                <a:solidFill>
+                  <a:srgbClr val="5C6675"/>
+                </a:solidFill>
+                <a:latin typeface="Calibri" pitchFamily="34" charset="0"/>
+                <a:ea typeface="Calibri" pitchFamily="34" charset="-122"/>
+                <a:cs typeface="Calibri" pitchFamily="34" charset="-120"/>
+              </a:rPr>
+              <a:t>Allocates untagged and shared cost by rule, without touching infrastructure tags — showback without a retagging project.</a:t>
+            </a:r>
+            <a:endParaRPr lang="en-US" sz="1150" dirty="0"/>
+          </a:p>
+        </p:txBody>
+      </p:sp>
+      <p:sp>
+        <p:nvSpPr>
+          <p:cNvPr id="15" name="Shape 11"/>
+          <p:cNvSpPr/>
+          <p:nvPr/>
+        </p:nvSpPr>
+        <p:spPr>
+          <a:xfrm>
+            <a:off x="8119872" y="2121408"/>
+            <a:ext cx="3511296" cy="1719072"/>
           </a:xfrm>
           <a:prstGeom prst="roundRect">
             <a:avLst>
-              <a:gd name="adj" fmla="val 3396"/>
+              <a:gd name="adj" fmla="val 4787"/>
             </a:avLst>
           </a:prstGeom>
           <a:solidFill>
@@ -19601,14 +19878,58 @@
       </p:sp>
       <p:sp>
         <p:nvSpPr>
-          <p:cNvPr id="9" name="Text 7"/>
-          <p:cNvSpPr/>
-          <p:nvPr/>
-        </p:nvSpPr>
-        <p:spPr>
-          <a:xfrm>
-            <a:off x="3639312" y="1965960"/>
-            <a:ext cx="1097280" cy="502920"/>
+          <p:cNvPr id="16" name="Shape 12"/>
+          <p:cNvSpPr/>
+          <p:nvPr/>
+        </p:nvSpPr>
+        <p:spPr>
+          <a:xfrm>
+            <a:off x="8412480" y="2359152"/>
+            <a:ext cx="457200" cy="457200"/>
+          </a:xfrm>
+          <a:prstGeom prst="ellipse">
+            <a:avLst/>
+          </a:prstGeom>
+          <a:solidFill>
+            <a:srgbClr val="FFFFFF"/>
+          </a:solidFill>
+          <a:ln/>
+        </p:spPr>
+      </p:sp>
+      <p:pic>
+        <p:nvPicPr>
+          <p:cNvPr id="17" name="Image 2" descr="preencoded.png">    </p:cNvPr>
+          <p:cNvPicPr>
+            <a:picLocks noChangeAspect="1"/>
+          </p:cNvPicPr>
+          <p:nvPr/>
+        </p:nvPicPr>
+        <p:blipFill>
+          <a:blip r:embed="rId3"/>
+          <a:stretch>
+            <a:fillRect/>
+          </a:stretch>
+        </p:blipFill>
+        <p:spPr>
+          <a:xfrm>
+            <a:off x="8526780" y="2473452"/>
+            <a:ext cx="228600" cy="228600"/>
+          </a:xfrm>
+          <a:prstGeom prst="rect">
+            <a:avLst/>
+          </a:prstGeom>
+        </p:spPr>
+      </p:pic>
+      <p:sp>
+        <p:nvSpPr>
+          <p:cNvPr id="18" name="Text 13"/>
+          <p:cNvSpPr/>
+          <p:nvPr/>
+        </p:nvSpPr>
+        <p:spPr>
+          <a:xfrm>
+            <a:off x="8997696" y="2340864"/>
+            <a:ext cx="2468880" cy="493776"/>
           </a:xfrm>
           <a:prstGeom prst="rect">
             <a:avLst/>
@@ -19624,30 +19945,30 @@
               <a:buNone/>
             </a:pPr>
             <a:r>
-              <a:rPr lang="en-US" sz="2800" b="1" dirty="0">
-                <a:solidFill>
-                  <a:srgbClr val="B9C2CD"/>
+              <a:rPr lang="en-US" sz="1500" b="1" dirty="0">
+                <a:solidFill>
+                  <a:srgbClr val="1B2430"/>
                 </a:solidFill>
                 <a:latin typeface="Cambria" pitchFamily="34" charset="0"/>
                 <a:ea typeface="Cambria" pitchFamily="34" charset="-122"/>
                 <a:cs typeface="Cambria" pitchFamily="34" charset="-120"/>
               </a:rPr>
-              <a:t>02</a:t>
-            </a:r>
-            <a:endParaRPr lang="en-US" sz="2800" dirty="0"/>
-          </a:p>
-        </p:txBody>
-      </p:sp>
-      <p:sp>
-        <p:nvSpPr>
-          <p:cNvPr id="10" name="Text 8"/>
-          <p:cNvSpPr/>
-          <p:nvPr/>
-        </p:nvSpPr>
-        <p:spPr>
-          <a:xfrm>
-            <a:off x="3621024" y="2523744"/>
-            <a:ext cx="2139696" cy="786384"/>
+              <a:t>Kubernetes to pod level</a:t>
+            </a:r>
+            <a:endParaRPr lang="en-US" sz="1500" dirty="0"/>
+          </a:p>
+        </p:txBody>
+      </p:sp>
+      <p:sp>
+        <p:nvSpPr>
+          <p:cNvPr id="19" name="Text 14"/>
+          <p:cNvSpPr/>
+          <p:nvPr/>
+        </p:nvSpPr>
+        <p:spPr>
+          <a:xfrm>
+            <a:off x="8412480" y="2907792"/>
+            <a:ext cx="2926080" cy="859536"/>
           </a:xfrm>
           <a:prstGeom prst="rect">
             <a:avLst/>
@@ -19661,8 +19982,113 @@
           <a:p>
             <a:pPr indent="0" marL="0">
               <a:lnSpc>
-                <a:spcPts val="2000"/>
+                <a:spcPts val="1500"/>
               </a:lnSpc>
+              <a:buNone/>
+            </a:pPr>
+            <a:r>
+              <a:rPr lang="en-US" sz="1150" dirty="0">
+                <a:solidFill>
+                  <a:srgbClr val="5C6675"/>
+                </a:solidFill>
+                <a:latin typeface="Calibri" pitchFamily="34" charset="0"/>
+                <a:ea typeface="Calibri" pitchFamily="34" charset="-122"/>
+                <a:cs typeface="Calibri" pitchFamily="34" charset="-120"/>
+              </a:rPr>
+              <a:t>Cluster, namespace and pod allocation without an agent, which is the shared-cost problem most tools leave unsolved.</a:t>
+            </a:r>
+            <a:endParaRPr lang="en-US" sz="1150" dirty="0"/>
+          </a:p>
+        </p:txBody>
+      </p:sp>
+      <p:sp>
+        <p:nvSpPr>
+          <p:cNvPr id="20" name="Shape 15"/>
+          <p:cNvSpPr/>
+          <p:nvPr/>
+        </p:nvSpPr>
+        <p:spPr>
+          <a:xfrm>
+            <a:off x="548640" y="3986784"/>
+            <a:ext cx="3511296" cy="1719072"/>
+          </a:xfrm>
+          <a:prstGeom prst="roundRect">
+            <a:avLst>
+              <a:gd name="adj" fmla="val 4787"/>
+            </a:avLst>
+          </a:prstGeom>
+          <a:solidFill>
+            <a:srgbClr val="F1F3F6"/>
+          </a:solidFill>
+          <a:ln/>
+        </p:spPr>
+      </p:sp>
+      <p:sp>
+        <p:nvSpPr>
+          <p:cNvPr id="21" name="Shape 16"/>
+          <p:cNvSpPr/>
+          <p:nvPr/>
+        </p:nvSpPr>
+        <p:spPr>
+          <a:xfrm>
+            <a:off x="841248" y="4224528"/>
+            <a:ext cx="457200" cy="457200"/>
+          </a:xfrm>
+          <a:prstGeom prst="ellipse">
+            <a:avLst/>
+          </a:prstGeom>
+          <a:solidFill>
+            <a:srgbClr val="FFFFFF"/>
+          </a:solidFill>
+          <a:ln/>
+        </p:spPr>
+      </p:sp>
+      <p:pic>
+        <p:nvPicPr>
+          <p:cNvPr id="22" name="Image 3" descr="preencoded.png">    </p:cNvPr>
+          <p:cNvPicPr>
+            <a:picLocks noChangeAspect="1"/>
+          </p:cNvPicPr>
+          <p:nvPr/>
+        </p:nvPicPr>
+        <p:blipFill>
+          <a:blip r:embed="rId4"/>
+          <a:stretch>
+            <a:fillRect/>
+          </a:stretch>
+        </p:blipFill>
+        <p:spPr>
+          <a:xfrm>
+            <a:off x="955548" y="4338828"/>
+            <a:ext cx="228600" cy="228600"/>
+          </a:xfrm>
+          <a:prstGeom prst="rect">
+            <a:avLst/>
+          </a:prstGeom>
+        </p:spPr>
+      </p:pic>
+      <p:sp>
+        <p:nvSpPr>
+          <p:cNvPr id="23" name="Text 17"/>
+          <p:cNvSpPr/>
+          <p:nvPr/>
+        </p:nvSpPr>
+        <p:spPr>
+          <a:xfrm>
+            <a:off x="1426464" y="4206240"/>
+            <a:ext cx="2468880" cy="493776"/>
+          </a:xfrm>
+          <a:prstGeom prst="rect">
+            <a:avLst/>
+          </a:prstGeom>
+          <a:noFill/>
+          <a:ln/>
+        </p:spPr>
+        <p:txBody>
+          <a:bodyPr wrap="square" lIns="0" tIns="0" rIns="0" bIns="0" rtlCol="0" anchor="ctr"/>
+          <a:lstStyle/>
+          <a:p>
+            <a:pPr indent="0" marL="0">
               <a:buNone/>
             </a:pPr>
             <a:r>
@@ -19674,7 +20100,7 @@
                 <a:ea typeface="Cambria" pitchFamily="34" charset="-122"/>
                 <a:cs typeface="Cambria" pitchFamily="34" charset="-120"/>
               </a:rPr>
-              <a:t>Start with the biggest spend</a:t>
+              <a:t>Dashboards and unit economics</a:t>
             </a:r>
             <a:endParaRPr lang="en-US" sz="1500" dirty="0"/>
           </a:p>
@@ -19682,14 +20108,14 @@
       </p:sp>
       <p:sp>
         <p:nvSpPr>
-          <p:cNvPr id="11" name="Text 9"/>
-          <p:cNvSpPr/>
-          <p:nvPr/>
-        </p:nvSpPr>
-        <p:spPr>
-          <a:xfrm>
-            <a:off x="3621024" y="3346704"/>
-            <a:ext cx="2139696" cy="749808"/>
+          <p:cNvPr id="24" name="Text 18"/>
+          <p:cNvSpPr/>
+          <p:nvPr/>
+        </p:nvSpPr>
+        <p:spPr>
+          <a:xfrm>
+            <a:off x="841248" y="4773168"/>
+            <a:ext cx="2926080" cy="859536"/>
           </a:xfrm>
           <a:prstGeom prst="rect">
             <a:avLst/>
@@ -19708,7 +20134,7 @@
               <a:buNone/>
             </a:pPr>
             <a:r>
-              <a:rPr lang="en-US" sz="1200" dirty="0">
+              <a:rPr lang="en-US" sz="1150" dirty="0">
                 <a:solidFill>
                   <a:srgbClr val="5C6675"/>
                 </a:solidFill>
@@ -19716,26 +20142,26 @@
                 <a:ea typeface="Calibri" pitchFamily="34" charset="-122"/>
                 <a:cs typeface="Calibri" pitchFamily="34" charset="-120"/>
               </a:rPr>
-              <a:t>Attack the largest categories first. Don't chase perfect granularity everywhere.</a:t>
-            </a:r>
-            <a:endParaRPr lang="en-US" sz="1200" dirty="0"/>
-          </a:p>
-        </p:txBody>
-      </p:sp>
-      <p:sp>
-        <p:nvSpPr>
-          <p:cNvPr id="12" name="Shape 10"/>
-          <p:cNvSpPr/>
-          <p:nvPr/>
-        </p:nvSpPr>
-        <p:spPr>
-          <a:xfrm>
-            <a:off x="6217920" y="1783080"/>
-            <a:ext cx="2587752" cy="2423160"/>
+              <a:t>Widgets for cost, usage, waste, budget and unit cost; business metrics from Datadog, Salesforce or Looker to divide by.</a:t>
+            </a:r>
+            <a:endParaRPr lang="en-US" sz="1150" dirty="0"/>
+          </a:p>
+        </p:txBody>
+      </p:sp>
+      <p:sp>
+        <p:nvSpPr>
+          <p:cNvPr id="25" name="Shape 19"/>
+          <p:cNvSpPr/>
+          <p:nvPr/>
+        </p:nvSpPr>
+        <p:spPr>
+          <a:xfrm>
+            <a:off x="4334256" y="3986784"/>
+            <a:ext cx="3511296" cy="1719072"/>
           </a:xfrm>
           <a:prstGeom prst="roundRect">
             <a:avLst>
-              <a:gd name="adj" fmla="val 3396"/>
+              <a:gd name="adj" fmla="val 4787"/>
             </a:avLst>
           </a:prstGeom>
           <a:solidFill>
@@ -19746,14 +20172,58 @@
       </p:sp>
       <p:sp>
         <p:nvSpPr>
-          <p:cNvPr id="13" name="Text 11"/>
-          <p:cNvSpPr/>
-          <p:nvPr/>
-        </p:nvSpPr>
-        <p:spPr>
-          <a:xfrm>
-            <a:off x="6473952" y="1965960"/>
-            <a:ext cx="1097280" cy="502920"/>
+          <p:cNvPr id="26" name="Shape 20"/>
+          <p:cNvSpPr/>
+          <p:nvPr/>
+        </p:nvSpPr>
+        <p:spPr>
+          <a:xfrm>
+            <a:off x="4626864" y="4224528"/>
+            <a:ext cx="457200" cy="457200"/>
+          </a:xfrm>
+          <a:prstGeom prst="ellipse">
+            <a:avLst/>
+          </a:prstGeom>
+          <a:solidFill>
+            <a:srgbClr val="FFFFFF"/>
+          </a:solidFill>
+          <a:ln/>
+        </p:spPr>
+      </p:sp>
+      <p:pic>
+        <p:nvPicPr>
+          <p:cNvPr id="27" name="Image 4" descr="preencoded.png">    </p:cNvPr>
+          <p:cNvPicPr>
+            <a:picLocks noChangeAspect="1"/>
+          </p:cNvPicPr>
+          <p:nvPr/>
+        </p:nvPicPr>
+        <p:blipFill>
+          <a:blip r:embed="rId5"/>
+          <a:stretch>
+            <a:fillRect/>
+          </a:stretch>
+        </p:blipFill>
+        <p:spPr>
+          <a:xfrm>
+            <a:off x="4741164" y="4338828"/>
+            <a:ext cx="228600" cy="228600"/>
+          </a:xfrm>
+          <a:prstGeom prst="rect">
+            <a:avLst/>
+          </a:prstGeom>
+        </p:spPr>
+      </p:pic>
+      <p:sp>
+        <p:nvSpPr>
+          <p:cNvPr id="28" name="Text 21"/>
+          <p:cNvSpPr/>
+          <p:nvPr/>
+        </p:nvSpPr>
+        <p:spPr>
+          <a:xfrm>
+            <a:off x="5212080" y="4206240"/>
+            <a:ext cx="2468880" cy="493776"/>
           </a:xfrm>
           <a:prstGeom prst="rect">
             <a:avLst/>
@@ -19769,30 +20239,30 @@
               <a:buNone/>
             </a:pPr>
             <a:r>
-              <a:rPr lang="en-US" sz="2800" b="1" dirty="0">
-                <a:solidFill>
-                  <a:srgbClr val="B9C2CD"/>
+              <a:rPr lang="en-US" sz="1500" b="1" dirty="0">
+                <a:solidFill>
+                  <a:srgbClr val="1B2430"/>
                 </a:solidFill>
                 <a:latin typeface="Cambria" pitchFamily="34" charset="0"/>
                 <a:ea typeface="Cambria" pitchFamily="34" charset="-122"/>
                 <a:cs typeface="Cambria" pitchFamily="34" charset="-120"/>
               </a:rPr>
-              <a:t>03</a:t>
-            </a:r>
-            <a:endParaRPr lang="en-US" sz="2800" dirty="0"/>
-          </a:p>
-        </p:txBody>
-      </p:sp>
-      <p:sp>
-        <p:nvSpPr>
-          <p:cNvPr id="14" name="Text 12"/>
-          <p:cNvSpPr/>
-          <p:nvPr/>
-        </p:nvSpPr>
-        <p:spPr>
-          <a:xfrm>
-            <a:off x="6455664" y="2523744"/>
-            <a:ext cx="2139696" cy="786384"/>
+              <a:t>Budgets, forecast, anomalies</a:t>
+            </a:r>
+            <a:endParaRPr lang="en-US" sz="1500" dirty="0"/>
+          </a:p>
+        </p:txBody>
+      </p:sp>
+      <p:sp>
+        <p:nvSpPr>
+          <p:cNvPr id="29" name="Text 22"/>
+          <p:cNvSpPr/>
+          <p:nvPr/>
+        </p:nvSpPr>
+        <p:spPr>
+          <a:xfrm>
+            <a:off x="4626864" y="4773168"/>
+            <a:ext cx="2926080" cy="859536"/>
           </a:xfrm>
           <a:prstGeom prst="rect">
             <a:avLst/>
@@ -19806,8 +20276,113 @@
           <a:p>
             <a:pPr indent="0" marL="0">
               <a:lnSpc>
-                <a:spcPts val="2000"/>
+                <a:spcPts val="1500"/>
               </a:lnSpc>
+              <a:buNone/>
+            </a:pPr>
+            <a:r>
+              <a:rPr lang="en-US" sz="1150" dirty="0">
+                <a:solidFill>
+                  <a:srgbClr val="5C6675"/>
+                </a:solidFill>
+                <a:latin typeface="Calibri" pitchFamily="34" charset="0"/>
+                <a:ea typeface="Calibri" pitchFamily="34" charset="-122"/>
+                <a:cs typeface="Calibri" pitchFamily="34" charset="-120"/>
+              </a:rPr>
+              <a:t>Budget structures, forecasting on any unit cost, and anomaly alerts on unexpected movement.</a:t>
+            </a:r>
+            <a:endParaRPr lang="en-US" sz="1150" dirty="0"/>
+          </a:p>
+        </p:txBody>
+      </p:sp>
+      <p:sp>
+        <p:nvSpPr>
+          <p:cNvPr id="30" name="Shape 23"/>
+          <p:cNvSpPr/>
+          <p:nvPr/>
+        </p:nvSpPr>
+        <p:spPr>
+          <a:xfrm>
+            <a:off x="8119872" y="3986784"/>
+            <a:ext cx="3511296" cy="1719072"/>
+          </a:xfrm>
+          <a:prstGeom prst="roundRect">
+            <a:avLst>
+              <a:gd name="adj" fmla="val 4787"/>
+            </a:avLst>
+          </a:prstGeom>
+          <a:solidFill>
+            <a:srgbClr val="F1F3F6"/>
+          </a:solidFill>
+          <a:ln/>
+        </p:spPr>
+      </p:sp>
+      <p:sp>
+        <p:nvSpPr>
+          <p:cNvPr id="31" name="Shape 24"/>
+          <p:cNvSpPr/>
+          <p:nvPr/>
+        </p:nvSpPr>
+        <p:spPr>
+          <a:xfrm>
+            <a:off x="8412480" y="4224528"/>
+            <a:ext cx="457200" cy="457200"/>
+          </a:xfrm>
+          <a:prstGeom prst="ellipse">
+            <a:avLst/>
+          </a:prstGeom>
+          <a:solidFill>
+            <a:srgbClr val="FFFFFF"/>
+          </a:solidFill>
+          <a:ln/>
+        </p:spPr>
+      </p:sp>
+      <p:pic>
+        <p:nvPicPr>
+          <p:cNvPr id="32" name="Image 5" descr="preencoded.png">    </p:cNvPr>
+          <p:cNvPicPr>
+            <a:picLocks noChangeAspect="1"/>
+          </p:cNvPicPr>
+          <p:nvPr/>
+        </p:nvPicPr>
+        <p:blipFill>
+          <a:blip r:embed="rId6"/>
+          <a:stretch>
+            <a:fillRect/>
+          </a:stretch>
+        </p:blipFill>
+        <p:spPr>
+          <a:xfrm>
+            <a:off x="8526780" y="4338828"/>
+            <a:ext cx="228600" cy="228600"/>
+          </a:xfrm>
+          <a:prstGeom prst="rect">
+            <a:avLst/>
+          </a:prstGeom>
+        </p:spPr>
+      </p:pic>
+      <p:sp>
+        <p:nvSpPr>
+          <p:cNvPr id="33" name="Text 25"/>
+          <p:cNvSpPr/>
+          <p:nvPr/>
+        </p:nvSpPr>
+        <p:spPr>
+          <a:xfrm>
+            <a:off x="8997696" y="4206240"/>
+            <a:ext cx="2468880" cy="493776"/>
+          </a:xfrm>
+          <a:prstGeom prst="rect">
+            <a:avLst/>
+          </a:prstGeom>
+          <a:noFill/>
+          <a:ln/>
+        </p:spPr>
+        <p:txBody>
+          <a:bodyPr wrap="square" lIns="0" tIns="0" rIns="0" bIns="0" rtlCol="0" anchor="ctr"/>
+          <a:lstStyle/>
+          <a:p>
+            <a:pPr indent="0" marL="0">
               <a:buNone/>
             </a:pPr>
             <a:r>
@@ -19819,7 +20394,7 @@
                 <a:ea typeface="Cambria" pitchFamily="34" charset="-122"/>
                 <a:cs typeface="Cambria" pitchFamily="34" charset="-120"/>
               </a:rPr>
-              <a:t>Get finance and engineering talking</a:t>
+              <a:t>Waste detection with an owner</a:t>
             </a:r>
             <a:endParaRPr lang="en-US" sz="1500" dirty="0"/>
           </a:p>
@@ -19827,14 +20402,14 @@
       </p:sp>
       <p:sp>
         <p:nvSpPr>
-          <p:cNvPr id="15" name="Text 13"/>
-          <p:cNvSpPr/>
-          <p:nvPr/>
-        </p:nvSpPr>
-        <p:spPr>
-          <a:xfrm>
-            <a:off x="6455664" y="3346704"/>
-            <a:ext cx="2139696" cy="749808"/>
+          <p:cNvPr id="34" name="Text 26"/>
+          <p:cNvSpPr/>
+          <p:nvPr/>
+        </p:nvSpPr>
+        <p:spPr>
+          <a:xfrm>
+            <a:off x="8412480" y="4773168"/>
+            <a:ext cx="2926080" cy="859536"/>
           </a:xfrm>
           <a:prstGeom prst="rect">
             <a:avLst/>
@@ -19853,7 +20428,7 @@
               <a:buNone/>
             </a:pPr>
             <a:r>
-              <a:rPr lang="en-US" sz="1200" dirty="0">
+              <a:rPr lang="en-US" sz="1150" dirty="0">
                 <a:solidFill>
                   <a:srgbClr val="5C6675"/>
                 </a:solidFill>
@@ -19861,44 +20436,51 @@
                 <a:ea typeface="Calibri" pitchFamily="34" charset="-122"/>
                 <a:cs typeface="Calibri" pitchFamily="34" charset="-120"/>
               </a:rPr>
-              <a:t>Bring both into the conversation early, not as an afterthought.</a:t>
-            </a:r>
-            <a:endParaRPr lang="en-US" sz="1200" dirty="0"/>
-          </a:p>
-        </p:txBody>
-      </p:sp>
-      <p:sp>
-        <p:nvSpPr>
-          <p:cNvPr id="16" name="Shape 14"/>
-          <p:cNvSpPr/>
-          <p:nvPr/>
-        </p:nvSpPr>
-        <p:spPr>
-          <a:xfrm>
-            <a:off x="9052560" y="1783080"/>
-            <a:ext cx="2587752" cy="2423160"/>
+              <a:t>CostGuard consolidates recommendations across providers, assigns an owner and tracks the saving — into Jira, Slack or ServiceNow.</a:t>
+            </a:r>
+            <a:endParaRPr lang="en-US" sz="1150" dirty="0"/>
+          </a:p>
+        </p:txBody>
+      </p:sp>
+      <p:sp>
+        <p:nvSpPr>
+          <p:cNvPr id="35" name="Shape 27"/>
+          <p:cNvSpPr/>
+          <p:nvPr/>
+        </p:nvSpPr>
+        <p:spPr>
+          <a:xfrm>
+            <a:off x="548640" y="5852160"/>
+            <a:ext cx="11091672" cy="786384"/>
           </a:xfrm>
           <a:prstGeom prst="roundRect">
             <a:avLst>
-              <a:gd name="adj" fmla="val 3396"/>
+              <a:gd name="adj" fmla="val 10465"/>
             </a:avLst>
           </a:prstGeom>
           <a:solidFill>
-            <a:srgbClr val="F1F3F6"/>
-          </a:solidFill>
-          <a:ln/>
-        </p:spPr>
-      </p:sp>
-      <p:sp>
-        <p:nvSpPr>
-          <p:cNvPr id="17" name="Text 15"/>
-          <p:cNvSpPr/>
-          <p:nvPr/>
-        </p:nvSpPr>
-        <p:spPr>
-          <a:xfrm>
-            <a:off x="9308592" y="1965960"/>
-            <a:ext cx="1097280" cy="502920"/>
+            <a:srgbClr val="1F2936"/>
+          </a:solidFill>
+          <a:ln/>
+          <a:effectLst>
+            <a:outerShdw sx="100000" sy="100000" kx="0" ky="0" algn="bl" rotWithShape="0" blurRad="127000" dist="25400" dir="5400000">
+              <a:srgbClr val="8C99A8">
+                <a:alpha val="16000"/>
+              </a:srgbClr>
+            </a:outerShdw>
+          </a:effectLst>
+        </p:spPr>
+      </p:sp>
+      <p:sp>
+        <p:nvSpPr>
+          <p:cNvPr id="36" name="Text 28"/>
+          <p:cNvSpPr/>
+          <p:nvPr/>
+        </p:nvSpPr>
+        <p:spPr>
+          <a:xfrm>
+            <a:off x="877824" y="5852160"/>
+            <a:ext cx="10424160" cy="786384"/>
           </a:xfrm>
           <a:prstGeom prst="rect">
             <a:avLst/>
@@ -19911,399 +20493,40 @@
           <a:lstStyle/>
           <a:p>
             <a:pPr indent="0" marL="0">
-              <a:buNone/>
-            </a:pPr>
-            <a:r>
-              <a:rPr lang="en-US" sz="2800" b="1" dirty="0">
-                <a:solidFill>
-                  <a:srgbClr val="B9C2CD"/>
-                </a:solidFill>
-                <a:latin typeface="Cambria" pitchFamily="34" charset="0"/>
-                <a:ea typeface="Cambria" pitchFamily="34" charset="-122"/>
-                <a:cs typeface="Cambria" pitchFamily="34" charset="-120"/>
-              </a:rPr>
-              <a:t>04</a:t>
-            </a:r>
-            <a:endParaRPr lang="en-US" sz="2800" dirty="0"/>
-          </a:p>
-        </p:txBody>
-      </p:sp>
-      <p:sp>
-        <p:nvSpPr>
-          <p:cNvPr id="18" name="Text 16"/>
-          <p:cNvSpPr/>
-          <p:nvPr/>
-        </p:nvSpPr>
-        <p:spPr>
-          <a:xfrm>
-            <a:off x="9290304" y="2523744"/>
-            <a:ext cx="2139696" cy="786384"/>
-          </a:xfrm>
-          <a:prstGeom prst="rect">
-            <a:avLst/>
-          </a:prstGeom>
-          <a:noFill/>
-          <a:ln/>
-        </p:spPr>
-        <p:txBody>
-          <a:bodyPr wrap="square" lIns="0" tIns="0" rIns="0" bIns="0" rtlCol="0" anchor="t"/>
-          <a:lstStyle/>
-          <a:p>
-            <a:pPr indent="0" marL="0">
               <a:lnSpc>
-                <a:spcPts val="2000"/>
+                <a:spcPts val="1600"/>
               </a:lnSpc>
               <a:buNone/>
             </a:pPr>
             <a:r>
-              <a:rPr lang="en-US" sz="1500" b="1" dirty="0">
-                <a:solidFill>
-                  <a:srgbClr val="1B2430"/>
-                </a:solidFill>
-                <a:latin typeface="Cambria" pitchFamily="34" charset="0"/>
-                <a:ea typeface="Cambria" pitchFamily="34" charset="-122"/>
-                <a:cs typeface="Cambria" pitchFamily="34" charset="-120"/>
-              </a:rPr>
-              <a:t>Set guardrails early</a:t>
-            </a:r>
-            <a:endParaRPr lang="en-US" sz="1500" dirty="0"/>
-          </a:p>
-        </p:txBody>
-      </p:sp>
-      <p:sp>
-        <p:nvSpPr>
-          <p:cNvPr id="19" name="Text 17"/>
-          <p:cNvSpPr/>
-          <p:nvPr/>
-        </p:nvSpPr>
-        <p:spPr>
-          <a:xfrm>
-            <a:off x="9290304" y="3346704"/>
-            <a:ext cx="2139696" cy="749808"/>
-          </a:xfrm>
-          <a:prstGeom prst="rect">
-            <a:avLst/>
-          </a:prstGeom>
-          <a:noFill/>
-          <a:ln/>
-        </p:spPr>
-        <p:txBody>
-          <a:bodyPr wrap="square" lIns="0" tIns="0" rIns="0" bIns="0" rtlCol="0" anchor="t"/>
-          <a:lstStyle/>
-          <a:p>
+              <a:rPr lang="en-US" sz="1200" b="1" dirty="0">
+                <a:solidFill>
+                  <a:srgbClr val="E39B2C"/>
+                </a:solidFill>
+                <a:latin typeface="Calibri" pitchFamily="34" charset="0"/>
+                <a:ea typeface="Calibri" pitchFamily="34" charset="-122"/>
+                <a:cs typeface="Calibri" pitchFamily="34" charset="-120"/>
+              </a:rPr>
+              <a:t>Before buying, prove three things on our own data:  </a:t>
+            </a:r>
             <a:pPr indent="0" marL="0">
               <a:lnSpc>
-                <a:spcPts val="1500"/>
+                <a:spcPts val="1600"/>
               </a:lnSpc>
               <a:buNone/>
             </a:pPr>
             <a:r>
               <a:rPr lang="en-US" sz="1200" dirty="0">
                 <a:solidFill>
-                  <a:srgbClr val="5C6675"/>
-                </a:solidFill>
-                <a:latin typeface="Calibri" pitchFamily="34" charset="0"/>
-                <a:ea typeface="Calibri" pitchFamily="34" charset="-122"/>
-                <a:cs typeface="Calibri" pitchFamily="34" charset="-120"/>
-              </a:rPr>
-              <a:t>Owners, budget thresholds and quotas cost little to add — and stop the expensive surprises.</a:t>
+                  <a:srgbClr val="9EABBA"/>
+                </a:solidFill>
+                <a:latin typeface="Calibri" pitchFamily="34" charset="0"/>
+                <a:ea typeface="Calibri" pitchFamily="34" charset="-122"/>
+                <a:cs typeface="Calibri" pitchFamily="34" charset="-120"/>
+              </a:rPr>
+              <a:t>that it allocates the spend we cannot allocate today, that it attributes Azure OpenAI cost per calling application rather than per resource, and that it exports FOCUS so we are not locked in. Vendor-published outcomes — around 30% cost reduction and 50% engineer time saved — are marketing claims, not a forecast for us.</a:t>
             </a:r>
             <a:endParaRPr lang="en-US" sz="1200" dirty="0"/>
-          </a:p>
-        </p:txBody>
-      </p:sp>
-      <p:sp>
-        <p:nvSpPr>
-          <p:cNvPr id="20" name="Shape 18"/>
-          <p:cNvSpPr/>
-          <p:nvPr/>
-        </p:nvSpPr>
-        <p:spPr>
-          <a:xfrm>
-            <a:off x="548640" y="4434840"/>
-            <a:ext cx="11091672" cy="1874520"/>
-          </a:xfrm>
-          <a:prstGeom prst="roundRect">
-            <a:avLst>
-              <a:gd name="adj" fmla="val 4390"/>
-            </a:avLst>
-          </a:prstGeom>
-          <a:solidFill>
-            <a:srgbClr val="F1F3F6"/>
-          </a:solidFill>
-          <a:ln/>
-        </p:spPr>
-      </p:sp>
-      <p:sp>
-        <p:nvSpPr>
-          <p:cNvPr id="21" name="Text 19"/>
-          <p:cNvSpPr/>
-          <p:nvPr/>
-        </p:nvSpPr>
-        <p:spPr>
-          <a:xfrm>
-            <a:off x="877824" y="4572000"/>
-            <a:ext cx="6035040" cy="292608"/>
-          </a:xfrm>
-          <a:prstGeom prst="rect">
-            <a:avLst/>
-          </a:prstGeom>
-          <a:noFill/>
-          <a:ln/>
-        </p:spPr>
-        <p:txBody>
-          <a:bodyPr wrap="square" lIns="0" tIns="0" rIns="0" bIns="0" rtlCol="0" anchor="ctr"/>
-          <a:lstStyle/>
-          <a:p>
-            <a:pPr indent="0" marL="0">
-              <a:buNone/>
-            </a:pPr>
-            <a:r>
-              <a:rPr lang="en-US" sz="1200" b="1" spc="180" kern="0" dirty="0">
-                <a:solidFill>
-                  <a:srgbClr val="5C6675"/>
-                </a:solidFill>
-                <a:latin typeface="Calibri" pitchFamily="34" charset="0"/>
-                <a:ea typeface="Calibri" pitchFamily="34" charset="-122"/>
-                <a:cs typeface="Calibri" pitchFamily="34" charset="-120"/>
-              </a:rPr>
-              <a:t>Tooling — match the footprint, not the ambition</a:t>
-            </a:r>
-            <a:endParaRPr lang="en-US" sz="1200" dirty="0"/>
-          </a:p>
-        </p:txBody>
-      </p:sp>
-      <p:sp>
-        <p:nvSpPr>
-          <p:cNvPr id="22" name="Text 20"/>
-          <p:cNvSpPr/>
-          <p:nvPr/>
-        </p:nvSpPr>
-        <p:spPr>
-          <a:xfrm>
-            <a:off x="877824" y="4937760"/>
-            <a:ext cx="1737360" cy="384048"/>
-          </a:xfrm>
-          <a:prstGeom prst="rect">
-            <a:avLst/>
-          </a:prstGeom>
-          <a:noFill/>
-          <a:ln/>
-        </p:spPr>
-        <p:txBody>
-          <a:bodyPr wrap="square" lIns="0" tIns="0" rIns="0" bIns="0" rtlCol="0" anchor="ctr"/>
-          <a:lstStyle/>
-          <a:p>
-            <a:pPr indent="0" marL="0">
-              <a:buNone/>
-            </a:pPr>
-            <a:r>
-              <a:rPr lang="en-US" sz="1350" b="1" dirty="0">
-                <a:solidFill>
-                  <a:srgbClr val="2E8B7A"/>
-                </a:solidFill>
-                <a:latin typeface="Calibri" pitchFamily="34" charset="0"/>
-                <a:ea typeface="Calibri" pitchFamily="34" charset="-122"/>
-                <a:cs typeface="Calibri" pitchFamily="34" charset="-120"/>
-              </a:rPr>
-              <a:t>Native</a:t>
-            </a:r>
-            <a:endParaRPr lang="en-US" sz="1350" dirty="0"/>
-          </a:p>
-        </p:txBody>
-      </p:sp>
-      <p:sp>
-        <p:nvSpPr>
-          <p:cNvPr id="23" name="Text 21"/>
-          <p:cNvSpPr/>
-          <p:nvPr/>
-        </p:nvSpPr>
-        <p:spPr>
-          <a:xfrm>
-            <a:off x="2651760" y="4937760"/>
-            <a:ext cx="8595360" cy="384048"/>
-          </a:xfrm>
-          <a:prstGeom prst="rect">
-            <a:avLst/>
-          </a:prstGeom>
-          <a:noFill/>
-          <a:ln/>
-        </p:spPr>
-        <p:txBody>
-          <a:bodyPr wrap="square" lIns="0" tIns="0" rIns="0" bIns="0" rtlCol="0" anchor="ctr"/>
-          <a:lstStyle/>
-          <a:p>
-            <a:pPr indent="0" marL="0">
-              <a:buNone/>
-            </a:pPr>
-            <a:r>
-              <a:rPr lang="en-US" sz="1350" dirty="0">
-                <a:solidFill>
-                  <a:srgbClr val="5C6675"/>
-                </a:solidFill>
-                <a:latin typeface="Calibri" pitchFamily="34" charset="0"/>
-                <a:ea typeface="Calibri" pitchFamily="34" charset="-122"/>
-                <a:cs typeface="Calibri" pitchFamily="34" charset="-120"/>
-              </a:rPr>
-              <a:t>AWS Cost Explorer  ·  Azure Cost Management  ·  GCP Billing</a:t>
-            </a:r>
-            <a:endParaRPr lang="en-US" sz="1350" dirty="0"/>
-          </a:p>
-        </p:txBody>
-      </p:sp>
-      <p:sp>
-        <p:nvSpPr>
-          <p:cNvPr id="24" name="Text 22"/>
-          <p:cNvSpPr/>
-          <p:nvPr/>
-        </p:nvSpPr>
-        <p:spPr>
-          <a:xfrm>
-            <a:off x="877824" y="5349240"/>
-            <a:ext cx="1737360" cy="384048"/>
-          </a:xfrm>
-          <a:prstGeom prst="rect">
-            <a:avLst/>
-          </a:prstGeom>
-          <a:noFill/>
-          <a:ln/>
-        </p:spPr>
-        <p:txBody>
-          <a:bodyPr wrap="square" lIns="0" tIns="0" rIns="0" bIns="0" rtlCol="0" anchor="ctr"/>
-          <a:lstStyle/>
-          <a:p>
-            <a:pPr indent="0" marL="0">
-              <a:buNone/>
-            </a:pPr>
-            <a:r>
-              <a:rPr lang="en-US" sz="1350" b="1" dirty="0">
-                <a:solidFill>
-                  <a:srgbClr val="B87B18"/>
-                </a:solidFill>
-                <a:latin typeface="Calibri" pitchFamily="34" charset="0"/>
-                <a:ea typeface="Calibri" pitchFamily="34" charset="-122"/>
-                <a:cs typeface="Calibri" pitchFamily="34" charset="-120"/>
-              </a:rPr>
-              <a:t>Third-party</a:t>
-            </a:r>
-            <a:endParaRPr lang="en-US" sz="1350" dirty="0"/>
-          </a:p>
-        </p:txBody>
-      </p:sp>
-      <p:sp>
-        <p:nvSpPr>
-          <p:cNvPr id="25" name="Text 23"/>
-          <p:cNvSpPr/>
-          <p:nvPr/>
-        </p:nvSpPr>
-        <p:spPr>
-          <a:xfrm>
-            <a:off x="2651760" y="5349240"/>
-            <a:ext cx="8595360" cy="384048"/>
-          </a:xfrm>
-          <a:prstGeom prst="rect">
-            <a:avLst/>
-          </a:prstGeom>
-          <a:noFill/>
-          <a:ln/>
-        </p:spPr>
-        <p:txBody>
-          <a:bodyPr wrap="square" lIns="0" tIns="0" rIns="0" bIns="0" rtlCol="0" anchor="ctr"/>
-          <a:lstStyle/>
-          <a:p>
-            <a:pPr indent="0" marL="0">
-              <a:buNone/>
-            </a:pPr>
-            <a:r>
-              <a:rPr lang="en-US" sz="1350" dirty="0">
-                <a:solidFill>
-                  <a:srgbClr val="5C6675"/>
-                </a:solidFill>
-                <a:latin typeface="Calibri" pitchFamily="34" charset="0"/>
-                <a:ea typeface="Calibri" pitchFamily="34" charset="-122"/>
-                <a:cs typeface="Calibri" pitchFamily="34" charset="-120"/>
-              </a:rPr>
-              <a:t>CloudHealth  ·  Apptio  ·  Vantage  ·  nOps  ·  Finout  ·  CoreStack</a:t>
-            </a:r>
-            <a:endParaRPr lang="en-US" sz="1350" dirty="0"/>
-          </a:p>
-        </p:txBody>
-      </p:sp>
-      <p:sp>
-        <p:nvSpPr>
-          <p:cNvPr id="26" name="Text 24"/>
-          <p:cNvSpPr/>
-          <p:nvPr/>
-        </p:nvSpPr>
-        <p:spPr>
-          <a:xfrm>
-            <a:off x="877824" y="5760720"/>
-            <a:ext cx="1737360" cy="384048"/>
-          </a:xfrm>
-          <a:prstGeom prst="rect">
-            <a:avLst/>
-          </a:prstGeom>
-          <a:noFill/>
-          <a:ln/>
-        </p:spPr>
-        <p:txBody>
-          <a:bodyPr wrap="square" lIns="0" tIns="0" rIns="0" bIns="0" rtlCol="0" anchor="ctr"/>
-          <a:lstStyle/>
-          <a:p>
-            <a:pPr indent="0" marL="0">
-              <a:buNone/>
-            </a:pPr>
-            <a:r>
-              <a:rPr lang="en-US" sz="1350" b="1" dirty="0">
-                <a:solidFill>
-                  <a:srgbClr val="1B2430"/>
-                </a:solidFill>
-                <a:latin typeface="Calibri" pitchFamily="34" charset="0"/>
-                <a:ea typeface="Calibri" pitchFamily="34" charset="-122"/>
-                <a:cs typeface="Calibri" pitchFamily="34" charset="-120"/>
-              </a:rPr>
-              <a:t>Standard</a:t>
-            </a:r>
-            <a:endParaRPr lang="en-US" sz="1350" dirty="0"/>
-          </a:p>
-        </p:txBody>
-      </p:sp>
-      <p:sp>
-        <p:nvSpPr>
-          <p:cNvPr id="27" name="Text 25"/>
-          <p:cNvSpPr/>
-          <p:nvPr/>
-        </p:nvSpPr>
-        <p:spPr>
-          <a:xfrm>
-            <a:off x="2651760" y="5760720"/>
-            <a:ext cx="8595360" cy="384048"/>
-          </a:xfrm>
-          <a:prstGeom prst="rect">
-            <a:avLst/>
-          </a:prstGeom>
-          <a:noFill/>
-          <a:ln/>
-        </p:spPr>
-        <p:txBody>
-          <a:bodyPr wrap="square" lIns="0" tIns="0" rIns="0" bIns="0" rtlCol="0" anchor="ctr"/>
-          <a:lstStyle/>
-          <a:p>
-            <a:pPr indent="0" marL="0">
-              <a:buNone/>
-            </a:pPr>
-            <a:r>
-              <a:rPr lang="en-US" sz="1350" dirty="0">
-                <a:solidFill>
-                  <a:srgbClr val="5C6675"/>
-                </a:solidFill>
-                <a:latin typeface="Calibri" pitchFamily="34" charset="0"/>
-                <a:ea typeface="Calibri" pitchFamily="34" charset="-122"/>
-                <a:cs typeface="Calibri" pitchFamily="34" charset="-120"/>
-              </a:rPr>
-              <a:t>FOCUS-compliant platforms for multi-cloud reporting</a:t>
-            </a:r>
-            <a:endParaRPr lang="en-US" sz="1350" dirty="0"/>
           </a:p>
         </p:txBody>
       </p:sp>
@@ -20318,6 +20541,991 @@
 <file path=ppt/slides/slide25.xml><?xml version="1.0" encoding="utf-8"?>
 <p:sld xmlns:a="http://schemas.openxmlformats.org/drawingml/2006/main" xmlns:r="http://schemas.openxmlformats.org/officeDocument/2006/relationships" xmlns:p="http://schemas.openxmlformats.org/presentationml/2006/main">
   <p:cSld name="Slide 25">
+    <p:bg>
+      <p:bgPr>
+        <a:solidFill>
+          <a:srgbClr val="FFFFFF"/>
+        </a:solidFill>
+      </p:bgPr>
+    </p:bg>
+    <p:spTree>
+      <p:nvGrpSpPr>
+        <p:cNvPr id="1" name=""/>
+        <p:cNvGrpSpPr/>
+        <p:nvPr/>
+      </p:nvGrpSpPr>
+      <p:grpSpPr>
+        <a:xfrm>
+          <a:off x="0" y="0"/>
+          <a:ext cx="0" cy="0"/>
+          <a:chOff x="0" y="0"/>
+          <a:chExt cx="0" cy="0"/>
+        </a:xfrm>
+      </p:grpSpPr>
+      <p:sp>
+        <p:nvSpPr>
+          <p:cNvPr id="2" name="Text 0"/>
+          <p:cNvSpPr/>
+          <p:nvPr/>
+        </p:nvSpPr>
+        <p:spPr>
+          <a:xfrm>
+            <a:off x="548640" y="475488"/>
+            <a:ext cx="7315200" cy="256032"/>
+          </a:xfrm>
+          <a:prstGeom prst="rect">
+            <a:avLst/>
+          </a:prstGeom>
+          <a:noFill/>
+          <a:ln/>
+        </p:spPr>
+        <p:txBody>
+          <a:bodyPr wrap="square" lIns="0" tIns="0" rIns="0" bIns="0" rtlCol="0" anchor="ctr"/>
+          <a:lstStyle/>
+          <a:p>
+            <a:pPr indent="0" marL="0">
+              <a:buNone/>
+            </a:pPr>
+            <a:r>
+              <a:rPr lang="en-US" sz="1100" b="1" spc="220" kern="0" dirty="0">
+                <a:solidFill>
+                  <a:srgbClr val="E39B2C"/>
+                </a:solidFill>
+                <a:latin typeface="Calibri" pitchFamily="34" charset="0"/>
+                <a:ea typeface="Calibri" pitchFamily="34" charset="-122"/>
+                <a:cs typeface="Calibri" pitchFamily="34" charset="-120"/>
+              </a:rPr>
+              <a:t>THE PATH FORWARD</a:t>
+            </a:r>
+            <a:endParaRPr lang="en-US" sz="1100" dirty="0"/>
+          </a:p>
+        </p:txBody>
+      </p:sp>
+      <p:sp>
+        <p:nvSpPr>
+          <p:cNvPr id="3" name="Text 1"/>
+          <p:cNvSpPr/>
+          <p:nvPr/>
+        </p:nvSpPr>
+        <p:spPr>
+          <a:xfrm>
+            <a:off x="548640" y="768096"/>
+            <a:ext cx="11091672" cy="804672"/>
+          </a:xfrm>
+          <a:prstGeom prst="rect">
+            <a:avLst/>
+          </a:prstGeom>
+          <a:noFill/>
+          <a:ln/>
+        </p:spPr>
+        <p:txBody>
+          <a:bodyPr wrap="square" lIns="0" tIns="0" rIns="0" bIns="0" rtlCol="0" anchor="ctr"/>
+          <a:lstStyle/>
+          <a:p>
+            <a:pPr indent="0" marL="0">
+              <a:buNone/>
+            </a:pPr>
+            <a:r>
+              <a:rPr lang="en-US" sz="3100" b="1" dirty="0">
+                <a:solidFill>
+                  <a:srgbClr val="1B2430"/>
+                </a:solidFill>
+                <a:latin typeface="Cambria" pitchFamily="34" charset="0"/>
+                <a:ea typeface="Cambria" pitchFamily="34" charset="-122"/>
+                <a:cs typeface="Cambria" pitchFamily="34" charset="-120"/>
+              </a:rPr>
+              <a:t>Where to start</a:t>
+            </a:r>
+            <a:endParaRPr lang="en-US" sz="3100" dirty="0"/>
+          </a:p>
+        </p:txBody>
+      </p:sp>
+      <p:sp>
+        <p:nvSpPr>
+          <p:cNvPr id="4" name="Shape 2"/>
+          <p:cNvSpPr/>
+          <p:nvPr/>
+        </p:nvSpPr>
+        <p:spPr>
+          <a:xfrm>
+            <a:off x="548640" y="1783080"/>
+            <a:ext cx="2587752" cy="2423160"/>
+          </a:xfrm>
+          <a:prstGeom prst="roundRect">
+            <a:avLst>
+              <a:gd name="adj" fmla="val 3396"/>
+            </a:avLst>
+          </a:prstGeom>
+          <a:solidFill>
+            <a:srgbClr val="1F2936"/>
+          </a:solidFill>
+          <a:ln/>
+        </p:spPr>
+      </p:sp>
+      <p:sp>
+        <p:nvSpPr>
+          <p:cNvPr id="5" name="Text 3"/>
+          <p:cNvSpPr/>
+          <p:nvPr/>
+        </p:nvSpPr>
+        <p:spPr>
+          <a:xfrm>
+            <a:off x="804672" y="1965960"/>
+            <a:ext cx="1097280" cy="502920"/>
+          </a:xfrm>
+          <a:prstGeom prst="rect">
+            <a:avLst/>
+          </a:prstGeom>
+          <a:noFill/>
+          <a:ln/>
+        </p:spPr>
+        <p:txBody>
+          <a:bodyPr wrap="square" lIns="0" tIns="0" rIns="0" bIns="0" rtlCol="0" anchor="ctr"/>
+          <a:lstStyle/>
+          <a:p>
+            <a:pPr indent="0" marL="0">
+              <a:buNone/>
+            </a:pPr>
+            <a:r>
+              <a:rPr lang="en-US" sz="2800" b="1" dirty="0">
+                <a:solidFill>
+                  <a:srgbClr val="E39B2C"/>
+                </a:solidFill>
+                <a:latin typeface="Cambria" pitchFamily="34" charset="0"/>
+                <a:ea typeface="Cambria" pitchFamily="34" charset="-122"/>
+                <a:cs typeface="Cambria" pitchFamily="34" charset="-120"/>
+              </a:rPr>
+              <a:t>01</a:t>
+            </a:r>
+            <a:endParaRPr lang="en-US" sz="2800" dirty="0"/>
+          </a:p>
+        </p:txBody>
+      </p:sp>
+      <p:sp>
+        <p:nvSpPr>
+          <p:cNvPr id="6" name="Text 4"/>
+          <p:cNvSpPr/>
+          <p:nvPr/>
+        </p:nvSpPr>
+        <p:spPr>
+          <a:xfrm>
+            <a:off x="786384" y="2523744"/>
+            <a:ext cx="2139696" cy="786384"/>
+          </a:xfrm>
+          <a:prstGeom prst="rect">
+            <a:avLst/>
+          </a:prstGeom>
+          <a:noFill/>
+          <a:ln/>
+        </p:spPr>
+        <p:txBody>
+          <a:bodyPr wrap="square" lIns="0" tIns="0" rIns="0" bIns="0" rtlCol="0" anchor="t"/>
+          <a:lstStyle/>
+          <a:p>
+            <a:pPr indent="0" marL="0">
+              <a:lnSpc>
+                <a:spcPts val="2000"/>
+              </a:lnSpc>
+              <a:buNone/>
+            </a:pPr>
+            <a:r>
+              <a:rPr lang="en-US" sz="1500" b="1" dirty="0">
+                <a:solidFill>
+                  <a:srgbClr val="FFFFFF"/>
+                </a:solidFill>
+                <a:latin typeface="Cambria" pitchFamily="34" charset="0"/>
+                <a:ea typeface="Cambria" pitchFamily="34" charset="-122"/>
+                <a:cs typeface="Cambria" pitchFamily="34" charset="-120"/>
+              </a:rPr>
+              <a:t>Set the tagging standard</a:t>
+            </a:r>
+            <a:endParaRPr lang="en-US" sz="1500" dirty="0"/>
+          </a:p>
+        </p:txBody>
+      </p:sp>
+      <p:sp>
+        <p:nvSpPr>
+          <p:cNvPr id="7" name="Text 5"/>
+          <p:cNvSpPr/>
+          <p:nvPr/>
+        </p:nvSpPr>
+        <p:spPr>
+          <a:xfrm>
+            <a:off x="786384" y="3346704"/>
+            <a:ext cx="2139696" cy="749808"/>
+          </a:xfrm>
+          <a:prstGeom prst="rect">
+            <a:avLst/>
+          </a:prstGeom>
+          <a:noFill/>
+          <a:ln/>
+        </p:spPr>
+        <p:txBody>
+          <a:bodyPr wrap="square" lIns="0" tIns="0" rIns="0" bIns="0" rtlCol="0" anchor="t"/>
+          <a:lstStyle/>
+          <a:p>
+            <a:pPr indent="0" marL="0">
+              <a:lnSpc>
+                <a:spcPts val="1500"/>
+              </a:lnSpc>
+              <a:buNone/>
+            </a:pPr>
+            <a:r>
+              <a:rPr lang="en-US" sz="1200" dirty="0">
+                <a:solidFill>
+                  <a:srgbClr val="9EABBA"/>
+                </a:solidFill>
+                <a:latin typeface="Calibri" pitchFamily="34" charset="0"/>
+                <a:ea typeface="Calibri" pitchFamily="34" charset="-122"/>
+                <a:cs typeface="Calibri" pitchFamily="34" charset="-120"/>
+              </a:rPr>
+              <a:t>Agree a consistent taxonomy before investing in dashboards.</a:t>
+            </a:r>
+            <a:endParaRPr lang="en-US" sz="1200" dirty="0"/>
+          </a:p>
+        </p:txBody>
+      </p:sp>
+      <p:sp>
+        <p:nvSpPr>
+          <p:cNvPr id="8" name="Shape 6"/>
+          <p:cNvSpPr/>
+          <p:nvPr/>
+        </p:nvSpPr>
+        <p:spPr>
+          <a:xfrm>
+            <a:off x="3383280" y="1783080"/>
+            <a:ext cx="2587752" cy="2423160"/>
+          </a:xfrm>
+          <a:prstGeom prst="roundRect">
+            <a:avLst>
+              <a:gd name="adj" fmla="val 3396"/>
+            </a:avLst>
+          </a:prstGeom>
+          <a:solidFill>
+            <a:srgbClr val="F1F3F6"/>
+          </a:solidFill>
+          <a:ln/>
+        </p:spPr>
+      </p:sp>
+      <p:sp>
+        <p:nvSpPr>
+          <p:cNvPr id="9" name="Text 7"/>
+          <p:cNvSpPr/>
+          <p:nvPr/>
+        </p:nvSpPr>
+        <p:spPr>
+          <a:xfrm>
+            <a:off x="3639312" y="1965960"/>
+            <a:ext cx="1097280" cy="502920"/>
+          </a:xfrm>
+          <a:prstGeom prst="rect">
+            <a:avLst/>
+          </a:prstGeom>
+          <a:noFill/>
+          <a:ln/>
+        </p:spPr>
+        <p:txBody>
+          <a:bodyPr wrap="square" lIns="0" tIns="0" rIns="0" bIns="0" rtlCol="0" anchor="ctr"/>
+          <a:lstStyle/>
+          <a:p>
+            <a:pPr indent="0" marL="0">
+              <a:buNone/>
+            </a:pPr>
+            <a:r>
+              <a:rPr lang="en-US" sz="2800" b="1" dirty="0">
+                <a:solidFill>
+                  <a:srgbClr val="B9C2CD"/>
+                </a:solidFill>
+                <a:latin typeface="Cambria" pitchFamily="34" charset="0"/>
+                <a:ea typeface="Cambria" pitchFamily="34" charset="-122"/>
+                <a:cs typeface="Cambria" pitchFamily="34" charset="-120"/>
+              </a:rPr>
+              <a:t>02</a:t>
+            </a:r>
+            <a:endParaRPr lang="en-US" sz="2800" dirty="0"/>
+          </a:p>
+        </p:txBody>
+      </p:sp>
+      <p:sp>
+        <p:nvSpPr>
+          <p:cNvPr id="10" name="Text 8"/>
+          <p:cNvSpPr/>
+          <p:nvPr/>
+        </p:nvSpPr>
+        <p:spPr>
+          <a:xfrm>
+            <a:off x="3621024" y="2523744"/>
+            <a:ext cx="2139696" cy="786384"/>
+          </a:xfrm>
+          <a:prstGeom prst="rect">
+            <a:avLst/>
+          </a:prstGeom>
+          <a:noFill/>
+          <a:ln/>
+        </p:spPr>
+        <p:txBody>
+          <a:bodyPr wrap="square" lIns="0" tIns="0" rIns="0" bIns="0" rtlCol="0" anchor="t"/>
+          <a:lstStyle/>
+          <a:p>
+            <a:pPr indent="0" marL="0">
+              <a:lnSpc>
+                <a:spcPts val="2000"/>
+              </a:lnSpc>
+              <a:buNone/>
+            </a:pPr>
+            <a:r>
+              <a:rPr lang="en-US" sz="1500" b="1" dirty="0">
+                <a:solidFill>
+                  <a:srgbClr val="1B2430"/>
+                </a:solidFill>
+                <a:latin typeface="Cambria" pitchFamily="34" charset="0"/>
+                <a:ea typeface="Cambria" pitchFamily="34" charset="-122"/>
+                <a:cs typeface="Cambria" pitchFamily="34" charset="-120"/>
+              </a:rPr>
+              <a:t>Start with the biggest spend</a:t>
+            </a:r>
+            <a:endParaRPr lang="en-US" sz="1500" dirty="0"/>
+          </a:p>
+        </p:txBody>
+      </p:sp>
+      <p:sp>
+        <p:nvSpPr>
+          <p:cNvPr id="11" name="Text 9"/>
+          <p:cNvSpPr/>
+          <p:nvPr/>
+        </p:nvSpPr>
+        <p:spPr>
+          <a:xfrm>
+            <a:off x="3621024" y="3346704"/>
+            <a:ext cx="2139696" cy="749808"/>
+          </a:xfrm>
+          <a:prstGeom prst="rect">
+            <a:avLst/>
+          </a:prstGeom>
+          <a:noFill/>
+          <a:ln/>
+        </p:spPr>
+        <p:txBody>
+          <a:bodyPr wrap="square" lIns="0" tIns="0" rIns="0" bIns="0" rtlCol="0" anchor="t"/>
+          <a:lstStyle/>
+          <a:p>
+            <a:pPr indent="0" marL="0">
+              <a:lnSpc>
+                <a:spcPts val="1500"/>
+              </a:lnSpc>
+              <a:buNone/>
+            </a:pPr>
+            <a:r>
+              <a:rPr lang="en-US" sz="1200" dirty="0">
+                <a:solidFill>
+                  <a:srgbClr val="5C6675"/>
+                </a:solidFill>
+                <a:latin typeface="Calibri" pitchFamily="34" charset="0"/>
+                <a:ea typeface="Calibri" pitchFamily="34" charset="-122"/>
+                <a:cs typeface="Calibri" pitchFamily="34" charset="-120"/>
+              </a:rPr>
+              <a:t>Attack the largest categories first. Don't chase perfect granularity everywhere.</a:t>
+            </a:r>
+            <a:endParaRPr lang="en-US" sz="1200" dirty="0"/>
+          </a:p>
+        </p:txBody>
+      </p:sp>
+      <p:sp>
+        <p:nvSpPr>
+          <p:cNvPr id="12" name="Shape 10"/>
+          <p:cNvSpPr/>
+          <p:nvPr/>
+        </p:nvSpPr>
+        <p:spPr>
+          <a:xfrm>
+            <a:off x="6217920" y="1783080"/>
+            <a:ext cx="2587752" cy="2423160"/>
+          </a:xfrm>
+          <a:prstGeom prst="roundRect">
+            <a:avLst>
+              <a:gd name="adj" fmla="val 3396"/>
+            </a:avLst>
+          </a:prstGeom>
+          <a:solidFill>
+            <a:srgbClr val="F1F3F6"/>
+          </a:solidFill>
+          <a:ln/>
+        </p:spPr>
+      </p:sp>
+      <p:sp>
+        <p:nvSpPr>
+          <p:cNvPr id="13" name="Text 11"/>
+          <p:cNvSpPr/>
+          <p:nvPr/>
+        </p:nvSpPr>
+        <p:spPr>
+          <a:xfrm>
+            <a:off x="6473952" y="1965960"/>
+            <a:ext cx="1097280" cy="502920"/>
+          </a:xfrm>
+          <a:prstGeom prst="rect">
+            <a:avLst/>
+          </a:prstGeom>
+          <a:noFill/>
+          <a:ln/>
+        </p:spPr>
+        <p:txBody>
+          <a:bodyPr wrap="square" lIns="0" tIns="0" rIns="0" bIns="0" rtlCol="0" anchor="ctr"/>
+          <a:lstStyle/>
+          <a:p>
+            <a:pPr indent="0" marL="0">
+              <a:buNone/>
+            </a:pPr>
+            <a:r>
+              <a:rPr lang="en-US" sz="2800" b="1" dirty="0">
+                <a:solidFill>
+                  <a:srgbClr val="B9C2CD"/>
+                </a:solidFill>
+                <a:latin typeface="Cambria" pitchFamily="34" charset="0"/>
+                <a:ea typeface="Cambria" pitchFamily="34" charset="-122"/>
+                <a:cs typeface="Cambria" pitchFamily="34" charset="-120"/>
+              </a:rPr>
+              <a:t>03</a:t>
+            </a:r>
+            <a:endParaRPr lang="en-US" sz="2800" dirty="0"/>
+          </a:p>
+        </p:txBody>
+      </p:sp>
+      <p:sp>
+        <p:nvSpPr>
+          <p:cNvPr id="14" name="Text 12"/>
+          <p:cNvSpPr/>
+          <p:nvPr/>
+        </p:nvSpPr>
+        <p:spPr>
+          <a:xfrm>
+            <a:off x="6455664" y="2523744"/>
+            <a:ext cx="2139696" cy="786384"/>
+          </a:xfrm>
+          <a:prstGeom prst="rect">
+            <a:avLst/>
+          </a:prstGeom>
+          <a:noFill/>
+          <a:ln/>
+        </p:spPr>
+        <p:txBody>
+          <a:bodyPr wrap="square" lIns="0" tIns="0" rIns="0" bIns="0" rtlCol="0" anchor="t"/>
+          <a:lstStyle/>
+          <a:p>
+            <a:pPr indent="0" marL="0">
+              <a:lnSpc>
+                <a:spcPts val="2000"/>
+              </a:lnSpc>
+              <a:buNone/>
+            </a:pPr>
+            <a:r>
+              <a:rPr lang="en-US" sz="1500" b="1" dirty="0">
+                <a:solidFill>
+                  <a:srgbClr val="1B2430"/>
+                </a:solidFill>
+                <a:latin typeface="Cambria" pitchFamily="34" charset="0"/>
+                <a:ea typeface="Cambria" pitchFamily="34" charset="-122"/>
+                <a:cs typeface="Cambria" pitchFamily="34" charset="-120"/>
+              </a:rPr>
+              <a:t>Get finance and engineering talking</a:t>
+            </a:r>
+            <a:endParaRPr lang="en-US" sz="1500" dirty="0"/>
+          </a:p>
+        </p:txBody>
+      </p:sp>
+      <p:sp>
+        <p:nvSpPr>
+          <p:cNvPr id="15" name="Text 13"/>
+          <p:cNvSpPr/>
+          <p:nvPr/>
+        </p:nvSpPr>
+        <p:spPr>
+          <a:xfrm>
+            <a:off x="6455664" y="3346704"/>
+            <a:ext cx="2139696" cy="749808"/>
+          </a:xfrm>
+          <a:prstGeom prst="rect">
+            <a:avLst/>
+          </a:prstGeom>
+          <a:noFill/>
+          <a:ln/>
+        </p:spPr>
+        <p:txBody>
+          <a:bodyPr wrap="square" lIns="0" tIns="0" rIns="0" bIns="0" rtlCol="0" anchor="t"/>
+          <a:lstStyle/>
+          <a:p>
+            <a:pPr indent="0" marL="0">
+              <a:lnSpc>
+                <a:spcPts val="1500"/>
+              </a:lnSpc>
+              <a:buNone/>
+            </a:pPr>
+            <a:r>
+              <a:rPr lang="en-US" sz="1200" dirty="0">
+                <a:solidFill>
+                  <a:srgbClr val="5C6675"/>
+                </a:solidFill>
+                <a:latin typeface="Calibri" pitchFamily="34" charset="0"/>
+                <a:ea typeface="Calibri" pitchFamily="34" charset="-122"/>
+                <a:cs typeface="Calibri" pitchFamily="34" charset="-120"/>
+              </a:rPr>
+              <a:t>Bring both into the conversation early, not as an afterthought.</a:t>
+            </a:r>
+            <a:endParaRPr lang="en-US" sz="1200" dirty="0"/>
+          </a:p>
+        </p:txBody>
+      </p:sp>
+      <p:sp>
+        <p:nvSpPr>
+          <p:cNvPr id="16" name="Shape 14"/>
+          <p:cNvSpPr/>
+          <p:nvPr/>
+        </p:nvSpPr>
+        <p:spPr>
+          <a:xfrm>
+            <a:off x="9052560" y="1783080"/>
+            <a:ext cx="2587752" cy="2423160"/>
+          </a:xfrm>
+          <a:prstGeom prst="roundRect">
+            <a:avLst>
+              <a:gd name="adj" fmla="val 3396"/>
+            </a:avLst>
+          </a:prstGeom>
+          <a:solidFill>
+            <a:srgbClr val="F1F3F6"/>
+          </a:solidFill>
+          <a:ln/>
+        </p:spPr>
+      </p:sp>
+      <p:sp>
+        <p:nvSpPr>
+          <p:cNvPr id="17" name="Text 15"/>
+          <p:cNvSpPr/>
+          <p:nvPr/>
+        </p:nvSpPr>
+        <p:spPr>
+          <a:xfrm>
+            <a:off x="9308592" y="1965960"/>
+            <a:ext cx="1097280" cy="502920"/>
+          </a:xfrm>
+          <a:prstGeom prst="rect">
+            <a:avLst/>
+          </a:prstGeom>
+          <a:noFill/>
+          <a:ln/>
+        </p:spPr>
+        <p:txBody>
+          <a:bodyPr wrap="square" lIns="0" tIns="0" rIns="0" bIns="0" rtlCol="0" anchor="ctr"/>
+          <a:lstStyle/>
+          <a:p>
+            <a:pPr indent="0" marL="0">
+              <a:buNone/>
+            </a:pPr>
+            <a:r>
+              <a:rPr lang="en-US" sz="2800" b="1" dirty="0">
+                <a:solidFill>
+                  <a:srgbClr val="B9C2CD"/>
+                </a:solidFill>
+                <a:latin typeface="Cambria" pitchFamily="34" charset="0"/>
+                <a:ea typeface="Cambria" pitchFamily="34" charset="-122"/>
+                <a:cs typeface="Cambria" pitchFamily="34" charset="-120"/>
+              </a:rPr>
+              <a:t>04</a:t>
+            </a:r>
+            <a:endParaRPr lang="en-US" sz="2800" dirty="0"/>
+          </a:p>
+        </p:txBody>
+      </p:sp>
+      <p:sp>
+        <p:nvSpPr>
+          <p:cNvPr id="18" name="Text 16"/>
+          <p:cNvSpPr/>
+          <p:nvPr/>
+        </p:nvSpPr>
+        <p:spPr>
+          <a:xfrm>
+            <a:off x="9290304" y="2523744"/>
+            <a:ext cx="2139696" cy="786384"/>
+          </a:xfrm>
+          <a:prstGeom prst="rect">
+            <a:avLst/>
+          </a:prstGeom>
+          <a:noFill/>
+          <a:ln/>
+        </p:spPr>
+        <p:txBody>
+          <a:bodyPr wrap="square" lIns="0" tIns="0" rIns="0" bIns="0" rtlCol="0" anchor="t"/>
+          <a:lstStyle/>
+          <a:p>
+            <a:pPr indent="0" marL="0">
+              <a:lnSpc>
+                <a:spcPts val="2000"/>
+              </a:lnSpc>
+              <a:buNone/>
+            </a:pPr>
+            <a:r>
+              <a:rPr lang="en-US" sz="1500" b="1" dirty="0">
+                <a:solidFill>
+                  <a:srgbClr val="1B2430"/>
+                </a:solidFill>
+                <a:latin typeface="Cambria" pitchFamily="34" charset="0"/>
+                <a:ea typeface="Cambria" pitchFamily="34" charset="-122"/>
+                <a:cs typeface="Cambria" pitchFamily="34" charset="-120"/>
+              </a:rPr>
+              <a:t>Set guardrails early</a:t>
+            </a:r>
+            <a:endParaRPr lang="en-US" sz="1500" dirty="0"/>
+          </a:p>
+        </p:txBody>
+      </p:sp>
+      <p:sp>
+        <p:nvSpPr>
+          <p:cNvPr id="19" name="Text 17"/>
+          <p:cNvSpPr/>
+          <p:nvPr/>
+        </p:nvSpPr>
+        <p:spPr>
+          <a:xfrm>
+            <a:off x="9290304" y="3346704"/>
+            <a:ext cx="2139696" cy="749808"/>
+          </a:xfrm>
+          <a:prstGeom prst="rect">
+            <a:avLst/>
+          </a:prstGeom>
+          <a:noFill/>
+          <a:ln/>
+        </p:spPr>
+        <p:txBody>
+          <a:bodyPr wrap="square" lIns="0" tIns="0" rIns="0" bIns="0" rtlCol="0" anchor="t"/>
+          <a:lstStyle/>
+          <a:p>
+            <a:pPr indent="0" marL="0">
+              <a:lnSpc>
+                <a:spcPts val="1500"/>
+              </a:lnSpc>
+              <a:buNone/>
+            </a:pPr>
+            <a:r>
+              <a:rPr lang="en-US" sz="1200" dirty="0">
+                <a:solidFill>
+                  <a:srgbClr val="5C6675"/>
+                </a:solidFill>
+                <a:latin typeface="Calibri" pitchFamily="34" charset="0"/>
+                <a:ea typeface="Calibri" pitchFamily="34" charset="-122"/>
+                <a:cs typeface="Calibri" pitchFamily="34" charset="-120"/>
+              </a:rPr>
+              <a:t>Owners, budget thresholds and quotas cost little to add — and stop the expensive surprises.</a:t>
+            </a:r>
+            <a:endParaRPr lang="en-US" sz="1200" dirty="0"/>
+          </a:p>
+        </p:txBody>
+      </p:sp>
+      <p:sp>
+        <p:nvSpPr>
+          <p:cNvPr id="20" name="Shape 18"/>
+          <p:cNvSpPr/>
+          <p:nvPr/>
+        </p:nvSpPr>
+        <p:spPr>
+          <a:xfrm>
+            <a:off x="548640" y="4434840"/>
+            <a:ext cx="11091672" cy="1874520"/>
+          </a:xfrm>
+          <a:prstGeom prst="roundRect">
+            <a:avLst>
+              <a:gd name="adj" fmla="val 4390"/>
+            </a:avLst>
+          </a:prstGeom>
+          <a:solidFill>
+            <a:srgbClr val="F1F3F6"/>
+          </a:solidFill>
+          <a:ln/>
+        </p:spPr>
+      </p:sp>
+      <p:sp>
+        <p:nvSpPr>
+          <p:cNvPr id="21" name="Text 19"/>
+          <p:cNvSpPr/>
+          <p:nvPr/>
+        </p:nvSpPr>
+        <p:spPr>
+          <a:xfrm>
+            <a:off x="877824" y="4572000"/>
+            <a:ext cx="6035040" cy="292608"/>
+          </a:xfrm>
+          <a:prstGeom prst="rect">
+            <a:avLst/>
+          </a:prstGeom>
+          <a:noFill/>
+          <a:ln/>
+        </p:spPr>
+        <p:txBody>
+          <a:bodyPr wrap="square" lIns="0" tIns="0" rIns="0" bIns="0" rtlCol="0" anchor="ctr"/>
+          <a:lstStyle/>
+          <a:p>
+            <a:pPr indent="0" marL="0">
+              <a:buNone/>
+            </a:pPr>
+            <a:r>
+              <a:rPr lang="en-US" sz="1200" b="1" spc="180" kern="0" dirty="0">
+                <a:solidFill>
+                  <a:srgbClr val="5C6675"/>
+                </a:solidFill>
+                <a:latin typeface="Calibri" pitchFamily="34" charset="0"/>
+                <a:ea typeface="Calibri" pitchFamily="34" charset="-122"/>
+                <a:cs typeface="Calibri" pitchFamily="34" charset="-120"/>
+              </a:rPr>
+              <a:t>Tooling — match the footprint, not the ambition</a:t>
+            </a:r>
+            <a:endParaRPr lang="en-US" sz="1200" dirty="0"/>
+          </a:p>
+        </p:txBody>
+      </p:sp>
+      <p:sp>
+        <p:nvSpPr>
+          <p:cNvPr id="22" name="Text 20"/>
+          <p:cNvSpPr/>
+          <p:nvPr/>
+        </p:nvSpPr>
+        <p:spPr>
+          <a:xfrm>
+            <a:off x="877824" y="4937760"/>
+            <a:ext cx="1737360" cy="384048"/>
+          </a:xfrm>
+          <a:prstGeom prst="rect">
+            <a:avLst/>
+          </a:prstGeom>
+          <a:noFill/>
+          <a:ln/>
+        </p:spPr>
+        <p:txBody>
+          <a:bodyPr wrap="square" lIns="0" tIns="0" rIns="0" bIns="0" rtlCol="0" anchor="ctr"/>
+          <a:lstStyle/>
+          <a:p>
+            <a:pPr indent="0" marL="0">
+              <a:buNone/>
+            </a:pPr>
+            <a:r>
+              <a:rPr lang="en-US" sz="1350" b="1" dirty="0">
+                <a:solidFill>
+                  <a:srgbClr val="2E8B7A"/>
+                </a:solidFill>
+                <a:latin typeface="Calibri" pitchFamily="34" charset="0"/>
+                <a:ea typeface="Calibri" pitchFamily="34" charset="-122"/>
+                <a:cs typeface="Calibri" pitchFamily="34" charset="-120"/>
+              </a:rPr>
+              <a:t>Native</a:t>
+            </a:r>
+            <a:endParaRPr lang="en-US" sz="1350" dirty="0"/>
+          </a:p>
+        </p:txBody>
+      </p:sp>
+      <p:sp>
+        <p:nvSpPr>
+          <p:cNvPr id="23" name="Text 21"/>
+          <p:cNvSpPr/>
+          <p:nvPr/>
+        </p:nvSpPr>
+        <p:spPr>
+          <a:xfrm>
+            <a:off x="2651760" y="4937760"/>
+            <a:ext cx="8595360" cy="384048"/>
+          </a:xfrm>
+          <a:prstGeom prst="rect">
+            <a:avLst/>
+          </a:prstGeom>
+          <a:noFill/>
+          <a:ln/>
+        </p:spPr>
+        <p:txBody>
+          <a:bodyPr wrap="square" lIns="0" tIns="0" rIns="0" bIns="0" rtlCol="0" anchor="ctr"/>
+          <a:lstStyle/>
+          <a:p>
+            <a:pPr indent="0" marL="0">
+              <a:buNone/>
+            </a:pPr>
+            <a:r>
+              <a:rPr lang="en-US" sz="1350" dirty="0">
+                <a:solidFill>
+                  <a:srgbClr val="5C6675"/>
+                </a:solidFill>
+                <a:latin typeface="Calibri" pitchFamily="34" charset="0"/>
+                <a:ea typeface="Calibri" pitchFamily="34" charset="-122"/>
+                <a:cs typeface="Calibri" pitchFamily="34" charset="-120"/>
+              </a:rPr>
+              <a:t>AWS Cost Explorer  ·  Azure Cost Management  ·  GCP Billing</a:t>
+            </a:r>
+            <a:endParaRPr lang="en-US" sz="1350" dirty="0"/>
+          </a:p>
+        </p:txBody>
+      </p:sp>
+      <p:sp>
+        <p:nvSpPr>
+          <p:cNvPr id="24" name="Text 22"/>
+          <p:cNvSpPr/>
+          <p:nvPr/>
+        </p:nvSpPr>
+        <p:spPr>
+          <a:xfrm>
+            <a:off x="877824" y="5349240"/>
+            <a:ext cx="1737360" cy="384048"/>
+          </a:xfrm>
+          <a:prstGeom prst="rect">
+            <a:avLst/>
+          </a:prstGeom>
+          <a:noFill/>
+          <a:ln/>
+        </p:spPr>
+        <p:txBody>
+          <a:bodyPr wrap="square" lIns="0" tIns="0" rIns="0" bIns="0" rtlCol="0" anchor="ctr"/>
+          <a:lstStyle/>
+          <a:p>
+            <a:pPr indent="0" marL="0">
+              <a:buNone/>
+            </a:pPr>
+            <a:r>
+              <a:rPr lang="en-US" sz="1350" b="1" dirty="0">
+                <a:solidFill>
+                  <a:srgbClr val="B87B18"/>
+                </a:solidFill>
+                <a:latin typeface="Calibri" pitchFamily="34" charset="0"/>
+                <a:ea typeface="Calibri" pitchFamily="34" charset="-122"/>
+                <a:cs typeface="Calibri" pitchFamily="34" charset="-120"/>
+              </a:rPr>
+              <a:t>Third-party</a:t>
+            </a:r>
+            <a:endParaRPr lang="en-US" sz="1350" dirty="0"/>
+          </a:p>
+        </p:txBody>
+      </p:sp>
+      <p:sp>
+        <p:nvSpPr>
+          <p:cNvPr id="25" name="Text 23"/>
+          <p:cNvSpPr/>
+          <p:nvPr/>
+        </p:nvSpPr>
+        <p:spPr>
+          <a:xfrm>
+            <a:off x="2651760" y="5349240"/>
+            <a:ext cx="8595360" cy="384048"/>
+          </a:xfrm>
+          <a:prstGeom prst="rect">
+            <a:avLst/>
+          </a:prstGeom>
+          <a:noFill/>
+          <a:ln/>
+        </p:spPr>
+        <p:txBody>
+          <a:bodyPr wrap="square" lIns="0" tIns="0" rIns="0" bIns="0" rtlCol="0" anchor="ctr"/>
+          <a:lstStyle/>
+          <a:p>
+            <a:pPr indent="0" marL="0">
+              <a:buNone/>
+            </a:pPr>
+            <a:r>
+              <a:rPr lang="en-US" sz="1350" dirty="0">
+                <a:solidFill>
+                  <a:srgbClr val="5C6675"/>
+                </a:solidFill>
+                <a:latin typeface="Calibri" pitchFamily="34" charset="0"/>
+                <a:ea typeface="Calibri" pitchFamily="34" charset="-122"/>
+                <a:cs typeface="Calibri" pitchFamily="34" charset="-120"/>
+              </a:rPr>
+              <a:t>CloudHealth  ·  Apptio  ·  Vantage  ·  nOps  ·  Finout  ·  CoreStack</a:t>
+            </a:r>
+            <a:endParaRPr lang="en-US" sz="1350" dirty="0"/>
+          </a:p>
+        </p:txBody>
+      </p:sp>
+      <p:sp>
+        <p:nvSpPr>
+          <p:cNvPr id="26" name="Text 24"/>
+          <p:cNvSpPr/>
+          <p:nvPr/>
+        </p:nvSpPr>
+        <p:spPr>
+          <a:xfrm>
+            <a:off x="877824" y="5760720"/>
+            <a:ext cx="1737360" cy="384048"/>
+          </a:xfrm>
+          <a:prstGeom prst="rect">
+            <a:avLst/>
+          </a:prstGeom>
+          <a:noFill/>
+          <a:ln/>
+        </p:spPr>
+        <p:txBody>
+          <a:bodyPr wrap="square" lIns="0" tIns="0" rIns="0" bIns="0" rtlCol="0" anchor="ctr"/>
+          <a:lstStyle/>
+          <a:p>
+            <a:pPr indent="0" marL="0">
+              <a:buNone/>
+            </a:pPr>
+            <a:r>
+              <a:rPr lang="en-US" sz="1350" b="1" dirty="0">
+                <a:solidFill>
+                  <a:srgbClr val="1B2430"/>
+                </a:solidFill>
+                <a:latin typeface="Calibri" pitchFamily="34" charset="0"/>
+                <a:ea typeface="Calibri" pitchFamily="34" charset="-122"/>
+                <a:cs typeface="Calibri" pitchFamily="34" charset="-120"/>
+              </a:rPr>
+              <a:t>Standard</a:t>
+            </a:r>
+            <a:endParaRPr lang="en-US" sz="1350" dirty="0"/>
+          </a:p>
+        </p:txBody>
+      </p:sp>
+      <p:sp>
+        <p:nvSpPr>
+          <p:cNvPr id="27" name="Text 25"/>
+          <p:cNvSpPr/>
+          <p:nvPr/>
+        </p:nvSpPr>
+        <p:spPr>
+          <a:xfrm>
+            <a:off x="2651760" y="5760720"/>
+            <a:ext cx="8595360" cy="384048"/>
+          </a:xfrm>
+          <a:prstGeom prst="rect">
+            <a:avLst/>
+          </a:prstGeom>
+          <a:noFill/>
+          <a:ln/>
+        </p:spPr>
+        <p:txBody>
+          <a:bodyPr wrap="square" lIns="0" tIns="0" rIns="0" bIns="0" rtlCol="0" anchor="ctr"/>
+          <a:lstStyle/>
+          <a:p>
+            <a:pPr indent="0" marL="0">
+              <a:buNone/>
+            </a:pPr>
+            <a:r>
+              <a:rPr lang="en-US" sz="1350" dirty="0">
+                <a:solidFill>
+                  <a:srgbClr val="5C6675"/>
+                </a:solidFill>
+                <a:latin typeface="Calibri" pitchFamily="34" charset="0"/>
+                <a:ea typeface="Calibri" pitchFamily="34" charset="-122"/>
+                <a:cs typeface="Calibri" pitchFamily="34" charset="-120"/>
+              </a:rPr>
+              <a:t>FOCUS-compliant platforms for multi-cloud reporting</a:t>
+            </a:r>
+            <a:endParaRPr lang="en-US" sz="1350" dirty="0"/>
+          </a:p>
+        </p:txBody>
+      </p:sp>
+    </p:spTree>
+  </p:cSld>
+  <p:clrMapOvr>
+    <a:masterClrMapping/>
+  </p:clrMapOvr>
+</p:sld>
+</file>
+
+<file path=ppt/slides/slide26.xml><?xml version="1.0" encoding="utf-8"?>
+<p:sld xmlns:a="http://schemas.openxmlformats.org/drawingml/2006/main" xmlns:r="http://schemas.openxmlformats.org/officeDocument/2006/relationships" xmlns:p="http://schemas.openxmlformats.org/presentationml/2006/main">
+  <p:cSld name="Slide 26">
     <p:bg>
       <p:bgPr>
         <a:solidFill>
@@ -21117,9 +22325,9 @@
 </p:sld>
 </file>
 
-<file path=ppt/slides/slide26.xml><?xml version="1.0" encoding="utf-8"?>
+<file path=ppt/slides/slide27.xml><?xml version="1.0" encoding="utf-8"?>
 <p:sld xmlns:a="http://schemas.openxmlformats.org/drawingml/2006/main" xmlns:r="http://schemas.openxmlformats.org/officeDocument/2006/relationships" xmlns:p="http://schemas.openxmlformats.org/presentationml/2006/main">
-  <p:cSld name="Slide 26">
+  <p:cSld name="Slide 27">
     <p:bg>
       <p:bgPr>
         <a:solidFill>
